--- a/blocks/D_sensors/M15_sensor_operations/M15_센서_운영과_동기화.pptx
+++ b/blocks/D_sensors/M15_sensor_operations/M15_센서_운영과_동기화.pptx
@@ -29,6 +29,7 @@
     <p:sldId id="277" r:id="rId29"/>
     <p:sldId id="278" r:id="rId30"/>
     <p:sldId id="279" r:id="rId31"/>
+    <p:sldId id="280" r:id="rId32"/>
   </p:sldIdLst>
   <p:sldSz cx="12191999" cy="6858000" type="screen4x3"/>
   <p:notesSz cx="6858000" cy="9144000"/>
@@ -1155,7 +1156,7 @@
           <a:lstStyle/>
           <a:p>
             <a:r>
-              <a:t>[설명] ~/agv_ws/src/agv_sensors/agv_sensors/imu_monitor.py의 전체 파일을 1/2 구간으로 작성한다.</a:t>
+              <a:t>[설명] ~/agv_ws/src/agv_sensors/agv_sensors/imu_monitor.py의 전체 파일을 1/3 구간으로 작성한다.</a:t>
             </a:r>
           </a:p>
           <a:p>
@@ -1245,7 +1246,7 @@
           <a:lstStyle/>
           <a:p>
             <a:r>
-              <a:t>[설명] ~/agv_ws/src/agv_sensors/agv_sensors/imu_monitor.py의 전체 파일을 2/2 구간으로 작성한다.</a:t>
+              <a:t>[설명] ~/agv_ws/src/agv_sensors/agv_sensors/imu_monitor.py의 전체 파일을 2/3 구간으로 작성한다.</a:t>
             </a:r>
           </a:p>
           <a:p>
@@ -1335,17 +1336,17 @@
           <a:lstStyle/>
           <a:p>
             <a:r>
-              <a:t>[설명] build/source/run을 생략 없이 실행한다.</a:t>
-            </a:r>
-          </a:p>
-          <a:p>
-            <a:r>
-              <a:t>[실행] ros2 launch agv_bringup agv_sim.launch.py rviz:=false</a:t>
-            </a:r>
-          </a:p>
-          <a:p>
-            <a:r>
-              <a:t>[확인] 모든 sensor 노드가 같은 시뮬레이션 시간과 기대 publish rate를 사용한다.</a:t>
+              <a:t>[설명] ~/agv_ws/src/agv_sensors/agv_sensors/imu_monitor.py의 전체 파일을 3/3 구간으로 작성한다.</a:t>
+            </a:r>
+          </a:p>
+          <a:p>
+            <a:r>
+              <a:t>[실행] nano ~/agv_ws/src/agv_sensors/agv_sensors/imu_monitor.py</a:t>
+            </a:r>
+          </a:p>
+          <a:p>
+            <a:r>
+              <a:t>[확인] 코드를 저장하고 다음 코드 슬라이드 또는 build 단계로 이동한다.</a:t>
             </a:r>
           </a:p>
           <a:p>
@@ -1355,7 +1356,7 @@
           </a:p>
           <a:p>
             <a:r>
-              <a:t>[오류] 오류가 나면 현재 폴더, source, 파일 경로를 먼저 확인한다.</a:t>
+              <a:t>[오류] 들여쓰기·XML 태그·따옴표가 슬라이드와 정확히 같은지 확인한다.</a:t>
             </a:r>
           </a:p>
         </p:txBody>
@@ -1425,17 +1426,17 @@
           <a:lstStyle/>
           <a:p>
             <a:r>
-              <a:t>[설명] 실제 Ubuntu/ROS 2 환경에서 생성한 검증 화면이다.</a:t>
-            </a:r>
-          </a:p>
-          <a:p>
-            <a:r>
-              <a:t>[실행] 슬라이드의 명령 또는 파일 작성 단계를 진행한다.</a:t>
-            </a:r>
-          </a:p>
-          <a:p>
-            <a:r>
-              <a:t>[확인] 캡처의 명령과 다음 슬라이드의 검증 명령을 비교한다.</a:t>
+              <a:t>[설명] build/source/run을 생략 없이 실행한다.</a:t>
+            </a:r>
+          </a:p>
+          <a:p>
+            <a:r>
+              <a:t>[실행] ros2 launch agv_bringup agv_sim.launch.py rviz:=false</a:t>
+            </a:r>
+          </a:p>
+          <a:p>
+            <a:r>
+              <a:t>[확인] 모든 sensor 노드가 같은 시뮬레이션 시간과 기대 publish rate를 사용한다.</a:t>
             </a:r>
           </a:p>
           <a:p>
@@ -1605,32 +1606,17 @@
           <a:lstStyle/>
           <a:p>
             <a:r>
-              <a:t>[설명] 검증 명령은 GUI 결과와 별도로 실행해 재현 가능한 완료 기준을 만든다.</a:t>
-            </a:r>
-          </a:p>
-          <a:p>
-            <a:r>
-              <a:t>[실행] ros2 topic echo /clock --once</a:t>
-            </a:r>
-          </a:p>
-          <a:p>
-            <a:r>
-              <a:t>ros2 topic hz /scan</a:t>
-            </a:r>
-          </a:p>
-          <a:p>
-            <a:r>
-              <a:t>ros2 topic hz /imu/data</a:t>
-            </a:r>
-          </a:p>
-          <a:p>
-            <a:r>
-              <a:t>ros2 param get /lidar_processor use_sim_time</a:t>
-            </a:r>
-          </a:p>
-          <a:p>
-            <a:r>
-              <a:t>[확인] 모든 sensor 노드가 같은 시뮬레이션 시간과 기대 publish rate를 사용한다.</a:t>
+              <a:t>[설명] 실제 Ubuntu/ROS 2 환경에서 생성한 검증 화면이다.</a:t>
+            </a:r>
+          </a:p>
+          <a:p>
+            <a:r>
+              <a:t>[실행] 슬라이드의 명령 또는 파일 작성 단계를 진행한다.</a:t>
+            </a:r>
+          </a:p>
+          <a:p>
+            <a:r>
+              <a:t>[확인] 캡처의 명령과 다음 슬라이드의 검증 명령을 비교한다.</a:t>
             </a:r>
           </a:p>
           <a:p>
@@ -1710,17 +1696,32 @@
           <a:lstStyle/>
           <a:p>
             <a:r>
-              <a:t>[설명] 오류를 대신 해결하지 말고 증상부터 우선 확인 순서대로 교육생이 실행하게 한다.</a:t>
-            </a:r>
-          </a:p>
-          <a:p>
-            <a:r>
-              <a:t>[실행] 슬라이드의 명령 또는 파일 작성 단계를 진행한다.</a:t>
-            </a:r>
-          </a:p>
-          <a:p>
-            <a:r>
-              <a:t>[확인] 수정 뒤 첫 검증 명령을 다시 실행한다.</a:t>
+              <a:t>[설명] 검증 명령은 GUI 결과와 별도로 실행해 재현 가능한 완료 기준을 만든다.</a:t>
+            </a:r>
+          </a:p>
+          <a:p>
+            <a:r>
+              <a:t>[실행] ros2 topic echo /clock --once</a:t>
+            </a:r>
+          </a:p>
+          <a:p>
+            <a:r>
+              <a:t>ros2 topic hz /scan</a:t>
+            </a:r>
+          </a:p>
+          <a:p>
+            <a:r>
+              <a:t>ros2 topic hz /imu/data</a:t>
+            </a:r>
+          </a:p>
+          <a:p>
+            <a:r>
+              <a:t>ros2 param get /lidar_processor use_sim_time</a:t>
+            </a:r>
+          </a:p>
+          <a:p>
+            <a:r>
+              <a:t>[확인] 모든 sensor 노드가 같은 시뮬레이션 시간과 기대 publish rate를 사용한다.</a:t>
             </a:r>
           </a:p>
           <a:p>
@@ -1730,7 +1731,7 @@
           </a:p>
           <a:p>
             <a:r>
-              <a:t>[오류] 슬라이드의 두 대표 오류를 먼저 사용한다.</a:t>
+              <a:t>[오류] 오류가 나면 현재 폴더, source, 파일 경로를 먼저 확인한다.</a:t>
             </a:r>
           </a:p>
         </p:txBody>
@@ -1800,7 +1801,7 @@
           <a:lstStyle/>
           <a:p>
             <a:r>
-              <a:t>[설명] 교육생이 직접 한 값만 바꿔 원인과 결과를 연결하게 한다.</a:t>
+              <a:t>[설명] 오류를 대신 해결하지 말고 증상부터 우선 확인 순서대로 교육생이 실행하게 한다.</a:t>
             </a:r>
           </a:p>
           <a:p>
@@ -1810,7 +1811,7 @@
           </a:p>
           <a:p>
             <a:r>
-              <a:t>[확인] 원래 값과 변경 값을 모두 기록한다.</a:t>
+              <a:t>[확인] 수정 뒤 첫 검증 명령을 다시 실행한다.</a:t>
             </a:r>
           </a:p>
           <a:p>
@@ -1820,7 +1821,7 @@
           </a:p>
           <a:p>
             <a:r>
-              <a:t>[오류] 오류가 나면 현재 폴더, source, 파일 경로를 먼저 확인한다.</a:t>
+              <a:t>[오류] 슬라이드의 두 대표 오류를 먼저 사용한다.</a:t>
             </a:r>
           </a:p>
         </p:txBody>
@@ -1890,7 +1891,7 @@
           <a:lstStyle/>
           <a:p>
             <a:r>
-              <a:t>[설명] 교육생이 Complete·캡처·로그를 저장했는지 확인하고 다음 모듈의 시작 상태를 읽는다.</a:t>
+              <a:t>[설명] 교육생이 직접 한 값만 바꿔 원인과 결과를 연결하게 한다.</a:t>
             </a:r>
           </a:p>
           <a:p>
@@ -1900,7 +1901,7 @@
           </a:p>
           <a:p>
             <a:r>
-              <a:t>[확인] M16 제어 interface 시작 조건을 말할 수 있다.</a:t>
+              <a:t>[확인] 원래 값과 변경 값을 모두 기록한다.</a:t>
             </a:r>
           </a:p>
           <a:p>
@@ -1936,6 +1937,96 @@
 </file>
 
 <file path=ppt/notesSlides/notesSlide24.xml><?xml version="1.0" encoding="utf-8"?>
+<p:notes xmlns:a="http://schemas.openxmlformats.org/drawingml/2006/main" xmlns:p="http://schemas.openxmlformats.org/presentationml/2006/main" xmlns:r="http://schemas.openxmlformats.org/officeDocument/2006/relationships">
+  <p:cSld>
+    <p:spTree>
+      <p:nvGrpSpPr>
+        <p:cNvPr id="1" name=""/>
+        <p:cNvGrpSpPr/>
+        <p:nvPr/>
+      </p:nvGrpSpPr>
+      <p:grpSpPr>
+        <a:xfrm>
+          <a:off x="0" y="0"/>
+          <a:ext cx="0" cy="0"/>
+          <a:chOff x="0" y="0"/>
+          <a:chExt cx="0" cy="0"/>
+        </a:xfrm>
+      </p:grpSpPr>
+      <p:sp>
+        <p:nvSpPr>
+          <p:cNvPr id="2" name="Slide Image Placeholder 1"/>
+          <p:cNvSpPr>
+            <a:spLocks noGrp="1"/>
+          </p:cNvSpPr>
+          <p:nvPr>
+            <p:ph type="sldImg" idx="2"/>
+          </p:nvPr>
+        </p:nvSpPr>
+        <p:spPr/>
+      </p:sp>
+      <p:sp>
+        <p:nvSpPr>
+          <p:cNvPr id="3" name="Notes Placeholder 2"/>
+          <p:cNvSpPr>
+            <a:spLocks noGrp="1"/>
+          </p:cNvSpPr>
+          <p:nvPr>
+            <p:ph type="body" idx="3" sz="quarter"/>
+          </p:nvPr>
+        </p:nvSpPr>
+        <p:spPr/>
+        <p:txBody>
+          <a:bodyPr/>
+          <a:lstStyle/>
+          <a:p>
+            <a:r>
+              <a:t>[설명] 교육생이 Complete·캡처·로그를 저장했는지 확인하고 다음 모듈의 시작 상태를 읽는다.</a:t>
+            </a:r>
+          </a:p>
+          <a:p>
+            <a:r>
+              <a:t>[실행] 슬라이드의 명령 또는 파일 작성 단계를 진행한다.</a:t>
+            </a:r>
+          </a:p>
+          <a:p>
+            <a:r>
+              <a:t>[확인] M16 제어 interface 시작 조건을 말할 수 있다.</a:t>
+            </a:r>
+          </a:p>
+          <a:p>
+            <a:r>
+              <a:t>[멈춤] 교육생이 현재 체크포인트를 통과할 때까지 기다린다.</a:t>
+            </a:r>
+          </a:p>
+          <a:p>
+            <a:r>
+              <a:t>[오류] 오류가 나면 현재 폴더, source, 파일 경로를 먼저 확인한다.</a:t>
+            </a:r>
+          </a:p>
+        </p:txBody>
+      </p:sp>
+      <p:sp>
+        <p:nvSpPr>
+          <p:cNvPr id="4" name="Slide Number Placeholder 3"/>
+          <p:cNvSpPr>
+            <a:spLocks noGrp="1"/>
+          </p:cNvSpPr>
+          <p:nvPr>
+            <p:ph type="sldNum" idx="5" sz="quarter"/>
+          </p:nvPr>
+        </p:nvSpPr>
+        <p:spPr/>
+      </p:sp>
+    </p:spTree>
+  </p:cSld>
+  <p:clrMapOvr>
+    <a:masterClrMapping/>
+  </p:clrMapOvr>
+</p:notes>
+</file>
+
+<file path=ppt/notesSlides/notesSlide25.xml><?xml version="1.0" encoding="utf-8"?>
 <p:notes xmlns:a="http://schemas.openxmlformats.org/drawingml/2006/main" xmlns:p="http://schemas.openxmlformats.org/presentationml/2006/main" xmlns:r="http://schemas.openxmlformats.org/officeDocument/2006/relationships">
   <p:cSld>
     <p:spTree>
@@ -6206,8 +6297,8 @@
         </p:nvSpPr>
         <p:spPr>
           <a:xfrm>
-            <a:off x="658368" y="1682496"/>
-            <a:ext cx="10972800" cy="347472"/>
+            <a:off x="658368" y="1627632"/>
+            <a:ext cx="10972800" cy="256032"/>
           </a:xfrm>
           <a:prstGeom prst="rect">
             <a:avLst/>
@@ -6224,7 +6315,7 @@
               <a:spcAft>
                 <a:spcPts val="0"/>
               </a:spcAft>
-              <a:defRPr sz="1700" b="1">
+              <a:defRPr sz="1500" b="1">
                 <a:solidFill>
                   <a:srgbClr val="122C4E"/>
                 </a:solidFill>
@@ -6245,8 +6336,8 @@
         </p:nvSpPr>
         <p:spPr>
           <a:xfrm>
-            <a:off x="658368" y="2103120"/>
-            <a:ext cx="10972800" cy="493776"/>
+            <a:off x="658368" y="1956816"/>
+            <a:ext cx="10972800" cy="603504"/>
           </a:xfrm>
           <a:prstGeom prst="rect">
             <a:avLst/>
@@ -6290,7 +6381,11 @@
               </a:defRPr>
             </a:pPr>
             <a:r>
-              <a:t>파일 생성/열기: mkdir -p ~/agv_ws/src/agv_gazebo/config    &amp;&amp;    nano ~/agv_ws/src/agv_gazebo/config/bridge.yaml</a:t>
+              <a:t>파일 생성: mkdir -p ~/agv_ws/src/agv_gazebo/config</a:t>
+            </a:r>
+            <a:br/>
+            <a:r>
+              <a:t>파일 열기: nano ~/agv_ws/src/agv_gazebo/config/bridge.yaml</a:t>
             </a:r>
           </a:p>
         </p:txBody>
@@ -6303,8 +6398,8 @@
         </p:nvSpPr>
         <p:spPr>
           <a:xfrm>
-            <a:off x="658368" y="2761488"/>
-            <a:ext cx="10972800" cy="3383280"/>
+            <a:off x="658368" y="2706624"/>
+            <a:ext cx="10972800" cy="3364992"/>
           </a:xfrm>
           <a:prstGeom prst="rect">
             <a:avLst/>
@@ -6394,14 +6489,6 @@
             <a:r>
               <a:t>  gz_topic_name: "/scan"</a:t>
             </a:r>
-            <a:br/>
-            <a:r>
-              <a:t>  ros_type_name: "sensor_msgs/msg/LaserScan"</a:t>
-            </a:r>
-            <a:br/>
-            <a:r>
-              <a:t>  gz_type_name: "gz.msgs.LaserScan"</a:t>
-            </a:r>
           </a:p>
         </p:txBody>
       </p:sp>
@@ -6413,7 +6500,7 @@
         </p:nvSpPr>
         <p:spPr>
           <a:xfrm>
-            <a:off x="749808" y="6199632"/>
+            <a:off x="749808" y="6181344"/>
             <a:ext cx="10789920" cy="201168"/>
           </a:xfrm>
           <a:prstGeom prst="rect">
@@ -6684,8 +6771,8 @@
         </p:nvSpPr>
         <p:spPr>
           <a:xfrm>
-            <a:off x="658368" y="1682496"/>
-            <a:ext cx="10972800" cy="347472"/>
+            <a:off x="658368" y="1627632"/>
+            <a:ext cx="10972800" cy="256032"/>
           </a:xfrm>
           <a:prstGeom prst="rect">
             <a:avLst/>
@@ -6702,7 +6789,7 @@
               <a:spcAft>
                 <a:spcPts val="0"/>
               </a:spcAft>
-              <a:defRPr sz="1700" b="1">
+              <a:defRPr sz="1500" b="1">
                 <a:solidFill>
                   <a:srgbClr val="122C4E"/>
                 </a:solidFill>
@@ -6723,8 +6810,8 @@
         </p:nvSpPr>
         <p:spPr>
           <a:xfrm>
-            <a:off x="658368" y="2103120"/>
-            <a:ext cx="10972800" cy="493776"/>
+            <a:off x="658368" y="1956816"/>
+            <a:ext cx="10972800" cy="603504"/>
           </a:xfrm>
           <a:prstGeom prst="rect">
             <a:avLst/>
@@ -6768,7 +6855,11 @@
               </a:defRPr>
             </a:pPr>
             <a:r>
-              <a:t>파일 생성/열기: mkdir -p ~/agv_ws/src/agv_gazebo/config    &amp;&amp;    nano ~/agv_ws/src/agv_gazebo/config/bridge.yaml</a:t>
+              <a:t>파일 생성: mkdir -p ~/agv_ws/src/agv_gazebo/config</a:t>
+            </a:r>
+            <a:br/>
+            <a:r>
+              <a:t>파일 열기: nano ~/agv_ws/src/agv_gazebo/config/bridge.yaml</a:t>
             </a:r>
           </a:p>
         </p:txBody>
@@ -6781,8 +6872,8 @@
         </p:nvSpPr>
         <p:spPr>
           <a:xfrm>
-            <a:off x="658368" y="2761488"/>
-            <a:ext cx="10972800" cy="3383280"/>
+            <a:off x="658368" y="2706624"/>
+            <a:ext cx="10972800" cy="3364992"/>
           </a:xfrm>
           <a:prstGeom prst="rect">
             <a:avLst/>
@@ -6826,6 +6917,14 @@
               </a:defRPr>
             </a:pPr>
             <a:r>
+              <a:t>  ros_type_name: "sensor_msgs/msg/LaserScan"</a:t>
+            </a:r>
+            <a:br/>
+            <a:r>
+              <a:t>  gz_type_name: "gz.msgs.LaserScan"</a:t>
+            </a:r>
+            <a:br/>
+            <a:r>
               <a:t>  direction: GZ_TO_ROS</a:t>
             </a:r>
             <a:br/>
@@ -6863,22 +6962,6 @@
             <a:br/>
             <a:r>
               <a:t>  gz_type_name: "gz.msgs.Image"</a:t>
-            </a:r>
-            <a:br/>
-            <a:r>
-              <a:t>  direction: GZ_TO_ROS</a:t>
-            </a:r>
-            <a:br/>
-            <a:r>
-              <a:t>- ros_topic_name: "/clock"</a:t>
-            </a:r>
-            <a:br/>
-            <a:r>
-              <a:t>  gz_topic_name: "/clock"</a:t>
-            </a:r>
-            <a:br/>
-            <a:r>
-              <a:t>  ros_type_name: "rosgraph_msgs/msg/Clock"</a:t>
             </a:r>
           </a:p>
         </p:txBody>
@@ -6891,7 +6974,7 @@
         </p:nvSpPr>
         <p:spPr>
           <a:xfrm>
-            <a:off x="749808" y="6199632"/>
+            <a:off x="749808" y="6181344"/>
             <a:ext cx="10789920" cy="201168"/>
           </a:xfrm>
           <a:prstGeom prst="rect">
@@ -7162,8 +7245,8 @@
         </p:nvSpPr>
         <p:spPr>
           <a:xfrm>
-            <a:off x="658368" y="1682496"/>
-            <a:ext cx="10972800" cy="347472"/>
+            <a:off x="658368" y="1627632"/>
+            <a:ext cx="10972800" cy="256032"/>
           </a:xfrm>
           <a:prstGeom prst="rect">
             <a:avLst/>
@@ -7180,7 +7263,7 @@
               <a:spcAft>
                 <a:spcPts val="0"/>
               </a:spcAft>
-              <a:defRPr sz="1700" b="1">
+              <a:defRPr sz="1500" b="1">
                 <a:solidFill>
                   <a:srgbClr val="122C4E"/>
                 </a:solidFill>
@@ -7201,8 +7284,8 @@
         </p:nvSpPr>
         <p:spPr>
           <a:xfrm>
-            <a:off x="658368" y="2103120"/>
-            <a:ext cx="10972800" cy="493776"/>
+            <a:off x="658368" y="1956816"/>
+            <a:ext cx="10972800" cy="603504"/>
           </a:xfrm>
           <a:prstGeom prst="rect">
             <a:avLst/>
@@ -7246,7 +7329,11 @@
               </a:defRPr>
             </a:pPr>
             <a:r>
-              <a:t>파일 생성/열기: mkdir -p ~/agv_ws/src/agv_gazebo/config    &amp;&amp;    nano ~/agv_ws/src/agv_gazebo/config/bridge.yaml</a:t>
+              <a:t>파일 생성: mkdir -p ~/agv_ws/src/agv_gazebo/config</a:t>
+            </a:r>
+            <a:br/>
+            <a:r>
+              <a:t>파일 열기: nano ~/agv_ws/src/agv_gazebo/config/bridge.yaml</a:t>
             </a:r>
           </a:p>
         </p:txBody>
@@ -7259,8 +7346,8 @@
         </p:nvSpPr>
         <p:spPr>
           <a:xfrm>
-            <a:off x="658368" y="2761488"/>
-            <a:ext cx="10972800" cy="3383280"/>
+            <a:off x="658368" y="2706624"/>
+            <a:ext cx="10972800" cy="3364992"/>
           </a:xfrm>
           <a:prstGeom prst="rect">
             <a:avLst/>
@@ -7304,6 +7391,22 @@
               </a:defRPr>
             </a:pPr>
             <a:r>
+              <a:t>  direction: GZ_TO_ROS</a:t>
+            </a:r>
+            <a:br/>
+            <a:r>
+              <a:t>- ros_topic_name: "/clock"</a:t>
+            </a:r>
+            <a:br/>
+            <a:r>
+              <a:t>  gz_topic_name: "/clock"</a:t>
+            </a:r>
+            <a:br/>
+            <a:r>
+              <a:t>  ros_type_name: "rosgraph_msgs/msg/Clock"</a:t>
+            </a:r>
+            <a:br/>
+            <a:r>
               <a:t>  gz_type_name: "gz.msgs.Clock"</a:t>
             </a:r>
             <a:br/>
@@ -7321,7 +7424,7 @@
         </p:nvSpPr>
         <p:spPr>
           <a:xfrm>
-            <a:off x="749808" y="6199632"/>
+            <a:off x="749808" y="6181344"/>
             <a:ext cx="10789920" cy="201168"/>
           </a:xfrm>
           <a:prstGeom prst="rect">
@@ -7592,8 +7695,8 @@
         </p:nvSpPr>
         <p:spPr>
           <a:xfrm>
-            <a:off x="658368" y="1682496"/>
-            <a:ext cx="10972800" cy="347472"/>
+            <a:off x="658368" y="1627632"/>
+            <a:ext cx="10972800" cy="256032"/>
           </a:xfrm>
           <a:prstGeom prst="rect">
             <a:avLst/>
@@ -7610,7 +7713,7 @@
               <a:spcAft>
                 <a:spcPts val="0"/>
               </a:spcAft>
-              <a:defRPr sz="1700" b="1">
+              <a:defRPr sz="1500" b="1">
                 <a:solidFill>
                   <a:srgbClr val="122C4E"/>
                 </a:solidFill>
@@ -7631,8 +7734,8 @@
         </p:nvSpPr>
         <p:spPr>
           <a:xfrm>
-            <a:off x="658368" y="2103120"/>
-            <a:ext cx="10972800" cy="493776"/>
+            <a:off x="658368" y="1956816"/>
+            <a:ext cx="10972800" cy="603504"/>
           </a:xfrm>
           <a:prstGeom prst="rect">
             <a:avLst/>
@@ -7676,7 +7779,11 @@
               </a:defRPr>
             </a:pPr>
             <a:r>
-              <a:t>파일 생성/열기: mkdir -p ~/agv_ws/src/agv_sensors/agv_sensors    &amp;&amp;    nano ~/agv_ws/src/agv_sensors/agv_sensors/lidar_processor.py</a:t>
+              <a:t>파일 생성: mkdir -p ~/agv_ws/src/agv_sensors/agv_sensors</a:t>
+            </a:r>
+            <a:br/>
+            <a:r>
+              <a:t>파일 열기: nano ~/agv_ws/src/agv_sensors/agv_sensors/lidar_processor.py</a:t>
             </a:r>
           </a:p>
         </p:txBody>
@@ -7689,8 +7796,8 @@
         </p:nvSpPr>
         <p:spPr>
           <a:xfrm>
-            <a:off x="658368" y="2761488"/>
-            <a:ext cx="10972800" cy="3383280"/>
+            <a:off x="658368" y="2706624"/>
+            <a:ext cx="10972800" cy="3364992"/>
           </a:xfrm>
           <a:prstGeom prst="rect">
             <a:avLst/>
@@ -7774,14 +7881,6 @@
             <a:r>
               <a:t>        self.declare_parameter('front_half_angle_deg', 15.0)</a:t>
             </a:r>
-            <a:br/>
-            <a:r>
-              <a:t>        self.subscription = self.create_subscription(LaserScan, '/scan', self.callback,</a:t>
-            </a:r>
-            <a:br/>
-            <a:r>
-              <a:t>            qos_profile_sensor_data)</a:t>
-            </a:r>
           </a:p>
         </p:txBody>
       </p:sp>
@@ -7793,7 +7892,7 @@
         </p:nvSpPr>
         <p:spPr>
           <a:xfrm>
-            <a:off x="749808" y="6199632"/>
+            <a:off x="749808" y="6181344"/>
             <a:ext cx="10789920" cy="201168"/>
           </a:xfrm>
           <a:prstGeom prst="rect">
@@ -8064,8 +8163,8 @@
         </p:nvSpPr>
         <p:spPr>
           <a:xfrm>
-            <a:off x="658368" y="1682496"/>
-            <a:ext cx="10972800" cy="347472"/>
+            <a:off x="658368" y="1627632"/>
+            <a:ext cx="10972800" cy="256032"/>
           </a:xfrm>
           <a:prstGeom prst="rect">
             <a:avLst/>
@@ -8082,7 +8181,7 @@
               <a:spcAft>
                 <a:spcPts val="0"/>
               </a:spcAft>
-              <a:defRPr sz="1700" b="1">
+              <a:defRPr sz="1500" b="1">
                 <a:solidFill>
                   <a:srgbClr val="122C4E"/>
                 </a:solidFill>
@@ -8103,8 +8202,8 @@
         </p:nvSpPr>
         <p:spPr>
           <a:xfrm>
-            <a:off x="658368" y="2103120"/>
-            <a:ext cx="10972800" cy="493776"/>
+            <a:off x="658368" y="1956816"/>
+            <a:ext cx="10972800" cy="603504"/>
           </a:xfrm>
           <a:prstGeom prst="rect">
             <a:avLst/>
@@ -8148,7 +8247,11 @@
               </a:defRPr>
             </a:pPr>
             <a:r>
-              <a:t>파일 생성/열기: mkdir -p ~/agv_ws/src/agv_sensors/agv_sensors    &amp;&amp;    nano ~/agv_ws/src/agv_sensors/agv_sensors/lidar_processor.py</a:t>
+              <a:t>파일 생성: mkdir -p ~/agv_ws/src/agv_sensors/agv_sensors</a:t>
+            </a:r>
+            <a:br/>
+            <a:r>
+              <a:t>파일 열기: nano ~/agv_ws/src/agv_sensors/agv_sensors/lidar_processor.py</a:t>
             </a:r>
           </a:p>
         </p:txBody>
@@ -8161,8 +8264,8 @@
         </p:nvSpPr>
         <p:spPr>
           <a:xfrm>
-            <a:off x="658368" y="2761488"/>
-            <a:ext cx="10972800" cy="3383280"/>
+            <a:off x="658368" y="2706624"/>
+            <a:ext cx="10972800" cy="3364992"/>
           </a:xfrm>
           <a:prstGeom prst="rect">
             <a:avLst/>
@@ -8206,6 +8309,14 @@
               </a:defRPr>
             </a:pPr>
             <a:r>
+              <a:t>        self.subscription = self.create_subscription(LaserScan, '/scan', self.callback,</a:t>
+            </a:r>
+            <a:br/>
+            <a:r>
+              <a:t>            qos_profile_sensor_data)</a:t>
+            </a:r>
+            <a:br/>
+            <a:r>
               <a:t>        self.publisher = self.create_publisher(Float32, '/obstacle_distance', 10)</a:t>
             </a:r>
             <a:br/>
@@ -8238,22 +8349,6 @@
             <a:r>
               <a:t>def main():</a:t>
             </a:r>
-            <a:br/>
-            <a:r>
-              <a:t>    rclpy.init()</a:t>
-            </a:r>
-            <a:br/>
-            <a:r>
-              <a:t>    node = LidarProcessor()</a:t>
-            </a:r>
-            <a:br/>
-            <a:r>
-              <a:t>    try:</a:t>
-            </a:r>
-            <a:br/>
-            <a:r>
-              <a:t>        rclpy.spin(node)</a:t>
-            </a:r>
           </a:p>
         </p:txBody>
       </p:sp>
@@ -8265,7 +8360,7 @@
         </p:nvSpPr>
         <p:spPr>
           <a:xfrm>
-            <a:off x="749808" y="6199632"/>
+            <a:off x="749808" y="6181344"/>
             <a:ext cx="10789920" cy="201168"/>
           </a:xfrm>
           <a:prstGeom prst="rect">
@@ -8536,8 +8631,8 @@
         </p:nvSpPr>
         <p:spPr>
           <a:xfrm>
-            <a:off x="658368" y="1682496"/>
-            <a:ext cx="10972800" cy="347472"/>
+            <a:off x="658368" y="1627632"/>
+            <a:ext cx="10972800" cy="256032"/>
           </a:xfrm>
           <a:prstGeom prst="rect">
             <a:avLst/>
@@ -8554,7 +8649,7 @@
               <a:spcAft>
                 <a:spcPts val="0"/>
               </a:spcAft>
-              <a:defRPr sz="1700" b="1">
+              <a:defRPr sz="1500" b="1">
                 <a:solidFill>
                   <a:srgbClr val="122C4E"/>
                 </a:solidFill>
@@ -8575,8 +8670,8 @@
         </p:nvSpPr>
         <p:spPr>
           <a:xfrm>
-            <a:off x="658368" y="2103120"/>
-            <a:ext cx="10972800" cy="493776"/>
+            <a:off x="658368" y="1956816"/>
+            <a:ext cx="10972800" cy="603504"/>
           </a:xfrm>
           <a:prstGeom prst="rect">
             <a:avLst/>
@@ -8620,7 +8715,11 @@
               </a:defRPr>
             </a:pPr>
             <a:r>
-              <a:t>파일 생성/열기: mkdir -p ~/agv_ws/src/agv_sensors/agv_sensors    &amp;&amp;    nano ~/agv_ws/src/agv_sensors/agv_sensors/lidar_processor.py</a:t>
+              <a:t>파일 생성: mkdir -p ~/agv_ws/src/agv_sensors/agv_sensors</a:t>
+            </a:r>
+            <a:br/>
+            <a:r>
+              <a:t>파일 열기: nano ~/agv_ws/src/agv_sensors/agv_sensors/lidar_processor.py</a:t>
             </a:r>
           </a:p>
         </p:txBody>
@@ -8633,8 +8732,8 @@
         </p:nvSpPr>
         <p:spPr>
           <a:xfrm>
-            <a:off x="658368" y="2761488"/>
-            <a:ext cx="10972800" cy="3383280"/>
+            <a:off x="658368" y="2706624"/>
+            <a:ext cx="10972800" cy="3364992"/>
           </a:xfrm>
           <a:prstGeom prst="rect">
             <a:avLst/>
@@ -8678,6 +8777,22 @@
               </a:defRPr>
             </a:pPr>
             <a:r>
+              <a:t>    rclpy.init()</a:t>
+            </a:r>
+            <a:br/>
+            <a:r>
+              <a:t>    node = LidarProcessor()</a:t>
+            </a:r>
+            <a:br/>
+            <a:r>
+              <a:t>    try:</a:t>
+            </a:r>
+            <a:br/>
+            <a:r>
+              <a:t>        rclpy.spin(node)</a:t>
+            </a:r>
+            <a:br/>
+            <a:r>
               <a:t>    except KeyboardInterrupt:</a:t>
             </a:r>
             <a:br/>
@@ -8711,7 +8826,7 @@
         </p:nvSpPr>
         <p:spPr>
           <a:xfrm>
-            <a:off x="749808" y="6199632"/>
+            <a:off x="749808" y="6181344"/>
             <a:ext cx="10789920" cy="201168"/>
           </a:xfrm>
           <a:prstGeom prst="rect">
@@ -8794,7 +8909,7 @@
               </a:defRPr>
             </a:pPr>
             <a:r>
-              <a:t>파일을 새로 만들고 저장한다 (1/2)</a:t>
+              <a:t>파일을 새로 만들고 저장한다 (1/3)</a:t>
             </a:r>
           </a:p>
         </p:txBody>
@@ -8969,7 +9084,7 @@
               </a:defRPr>
             </a:pPr>
             <a:r>
-              <a:t>현재 단계 10/12    |    현재 폴더 ~/agv_ws    |    현재 터미널</a:t>
+              <a:t>현재 단계 10/13    |    현재 폴더 ~/agv_ws    |    현재 터미널</a:t>
             </a:r>
           </a:p>
         </p:txBody>
@@ -8982,8 +9097,8 @@
         </p:nvSpPr>
         <p:spPr>
           <a:xfrm>
-            <a:off x="658368" y="1682496"/>
-            <a:ext cx="10972800" cy="347472"/>
+            <a:off x="658368" y="1627632"/>
+            <a:ext cx="10972800" cy="256032"/>
           </a:xfrm>
           <a:prstGeom prst="rect">
             <a:avLst/>
@@ -9000,7 +9115,7 @@
               <a:spcAft>
                 <a:spcPts val="0"/>
               </a:spcAft>
-              <a:defRPr sz="1700" b="1">
+              <a:defRPr sz="1500" b="1">
                 <a:solidFill>
                   <a:srgbClr val="122C4E"/>
                 </a:solidFill>
@@ -9021,8 +9136,8 @@
         </p:nvSpPr>
         <p:spPr>
           <a:xfrm>
-            <a:off x="658368" y="2103120"/>
-            <a:ext cx="10972800" cy="493776"/>
+            <a:off x="658368" y="1956816"/>
+            <a:ext cx="10972800" cy="603504"/>
           </a:xfrm>
           <a:prstGeom prst="rect">
             <a:avLst/>
@@ -9066,7 +9181,11 @@
               </a:defRPr>
             </a:pPr>
             <a:r>
-              <a:t>파일 생성/열기: mkdir -p ~/agv_ws/src/agv_sensors/agv_sensors    &amp;&amp;    nano ~/agv_ws/src/agv_sensors/agv_sensors/imu_monitor.py</a:t>
+              <a:t>파일 생성: mkdir -p ~/agv_ws/src/agv_sensors/agv_sensors</a:t>
+            </a:r>
+            <a:br/>
+            <a:r>
+              <a:t>파일 열기: nano ~/agv_ws/src/agv_sensors/agv_sensors/imu_monitor.py</a:t>
             </a:r>
           </a:p>
         </p:txBody>
@@ -9079,8 +9198,8 @@
         </p:nvSpPr>
         <p:spPr>
           <a:xfrm>
-            <a:off x="658368" y="2761488"/>
-            <a:ext cx="10972800" cy="3383280"/>
+            <a:off x="658368" y="2706624"/>
+            <a:ext cx="10972800" cy="3364992"/>
           </a:xfrm>
           <a:prstGeom prst="rect">
             <a:avLst/>
@@ -9161,14 +9280,6 @@
               <a:t>            qos_profile_sensor_data)</a:t>
             </a:r>
             <a:br/>
-            <a:br/>
-            <a:r>
-              <a:t>    def callback(self, message):</a:t>
-            </a:r>
-            <a:br/>
-            <a:r>
-              <a:t>        self.get_logger().info('gyro z=%.3f rad/s, acceleration z=%.3f m/s²,</a:t>
-            </a:r>
           </a:p>
         </p:txBody>
       </p:sp>
@@ -9180,7 +9291,7 @@
         </p:nvSpPr>
         <p:spPr>
           <a:xfrm>
-            <a:off x="749808" y="6199632"/>
+            <a:off x="749808" y="6181344"/>
             <a:ext cx="10789920" cy="201168"/>
           </a:xfrm>
           <a:prstGeom prst="rect">
@@ -9206,7 +9317,7 @@
               </a:defRPr>
             </a:pPr>
             <a:r>
-              <a:t>파일 전체 1/2 · 이 슬라이드 다음에 같은 파일의 나머지 줄이 이어집니다.</a:t>
+              <a:t>파일 전체 1/3 · 이 슬라이드 다음에 같은 파일의 나머지 줄이 이어집니다.</a:t>
             </a:r>
           </a:p>
         </p:txBody>
@@ -9263,7 +9374,7 @@
               </a:defRPr>
             </a:pPr>
             <a:r>
-              <a:t>파일을 계속 작성하고 저장한다 (2/2)</a:t>
+              <a:t>파일을 계속 작성하고 저장한다 (2/3)</a:t>
             </a:r>
           </a:p>
         </p:txBody>
@@ -9438,7 +9549,7 @@
               </a:defRPr>
             </a:pPr>
             <a:r>
-              <a:t>현재 단계 11/12    |    현재 폴더 ~/agv_ws    |    현재 터미널</a:t>
+              <a:t>현재 단계 11/13    |    현재 폴더 ~/agv_ws    |    현재 터미널</a:t>
             </a:r>
           </a:p>
         </p:txBody>
@@ -9451,8 +9562,8 @@
         </p:nvSpPr>
         <p:spPr>
           <a:xfrm>
-            <a:off x="658368" y="1682496"/>
-            <a:ext cx="10972800" cy="347472"/>
+            <a:off x="658368" y="1627632"/>
+            <a:ext cx="10972800" cy="256032"/>
           </a:xfrm>
           <a:prstGeom prst="rect">
             <a:avLst/>
@@ -9469,7 +9580,7 @@
               <a:spcAft>
                 <a:spcPts val="0"/>
               </a:spcAft>
-              <a:defRPr sz="1700" b="1">
+              <a:defRPr sz="1500" b="1">
                 <a:solidFill>
                   <a:srgbClr val="122C4E"/>
                 </a:solidFill>
@@ -9490,8 +9601,8 @@
         </p:nvSpPr>
         <p:spPr>
           <a:xfrm>
-            <a:off x="658368" y="2103120"/>
-            <a:ext cx="10972800" cy="493776"/>
+            <a:off x="658368" y="1956816"/>
+            <a:ext cx="10972800" cy="603504"/>
           </a:xfrm>
           <a:prstGeom prst="rect">
             <a:avLst/>
@@ -9535,7 +9646,11 @@
               </a:defRPr>
             </a:pPr>
             <a:r>
-              <a:t>파일 생성/열기: mkdir -p ~/agv_ws/src/agv_sensors/agv_sensors    &amp;&amp;    nano ~/agv_ws/src/agv_sensors/agv_sensors/imu_monitor.py</a:t>
+              <a:t>파일 생성: mkdir -p ~/agv_ws/src/agv_sensors/agv_sensors</a:t>
+            </a:r>
+            <a:br/>
+            <a:r>
+              <a:t>파일 열기: nano ~/agv_ws/src/agv_sensors/agv_sensors/imu_monitor.py</a:t>
             </a:r>
           </a:p>
         </p:txBody>
@@ -9548,8 +9663,8 @@
         </p:nvSpPr>
         <p:spPr>
           <a:xfrm>
-            <a:off x="658368" y="2761488"/>
-            <a:ext cx="10972800" cy="3383280"/>
+            <a:off x="658368" y="2706624"/>
+            <a:ext cx="10972800" cy="3364992"/>
           </a:xfrm>
           <a:prstGeom prst="rect">
             <a:avLst/>
@@ -9593,6 +9708,14 @@
               </a:defRPr>
             </a:pPr>
             <a:r>
+              <a:t>    def callback(self, message):</a:t>
+            </a:r>
+            <a:br/>
+            <a:r>
+              <a:t>        self.get_logger().info('gyro z=%.3f rad/s, acceleration z=%.3f m/s²,</a:t>
+            </a:r>
+            <a:br/>
+            <a:r>
               <a:t>            frame=%s' % (message.angular_velocity.z, message.linear_acceleration.z,</a:t>
             </a:r>
             <a:br/>
@@ -9628,22 +9751,6 @@
             <a:r>
               <a:t>        pass</a:t>
             </a:r>
-            <a:br/>
-            <a:r>
-              <a:t>    finally:</a:t>
-            </a:r>
-            <a:br/>
-            <a:r>
-              <a:t>        node.destroy_node()</a:t>
-            </a:r>
-            <a:br/>
-            <a:r>
-              <a:t>        if rclpy.ok():</a:t>
-            </a:r>
-            <a:br/>
-            <a:r>
-              <a:t>            rclpy.shutdown()</a:t>
-            </a:r>
           </a:p>
         </p:txBody>
       </p:sp>
@@ -9655,7 +9762,7 @@
         </p:nvSpPr>
         <p:spPr>
           <a:xfrm>
-            <a:off x="749808" y="6199632"/>
+            <a:off x="749808" y="6181344"/>
             <a:ext cx="10789920" cy="201168"/>
           </a:xfrm>
           <a:prstGeom prst="rect">
@@ -9681,7 +9788,7 @@
               </a:defRPr>
             </a:pPr>
             <a:r>
-              <a:t>파일 전체 2/2 · 이 슬라이드 다음에 같은 파일의 나머지 줄이 이어집니다.</a:t>
+              <a:t>파일 전체 2/3 · 이 슬라이드 다음에 같은 파일의 나머지 줄이 이어집니다.</a:t>
             </a:r>
           </a:p>
         </p:txBody>
@@ -9738,7 +9845,7 @@
               </a:defRPr>
             </a:pPr>
             <a:r>
-              <a:t>build → source → run 순서로 실행한다</a:t>
+              <a:t>파일을 계속 작성하고 저장한다 (3/3)</a:t>
             </a:r>
           </a:p>
         </p:txBody>
@@ -9777,7 +9884,7 @@
               </a:defRPr>
             </a:pPr>
             <a:r>
-              <a:t>새 파일 또는 수정 파일은 build와 source 뒤에만 실행 이름·설정에 반영됩니다.</a:t>
+              <a:t>~/agv_ws/src/agv_sensors/agv_sensors/imu_monitor.py</a:t>
             </a:r>
           </a:p>
         </p:txBody>
@@ -9913,23 +10020,124 @@
               </a:defRPr>
             </a:pPr>
             <a:r>
-              <a:t>현재 단계 실행    |    현재 폴더 ~/agv_ws    |    현재 터미널</a:t>
-            </a:r>
-          </a:p>
-        </p:txBody>
-      </p:sp>
-      <p:sp>
-        <p:nvSpPr>
-          <p:cNvPr id="7" name="Rounded Rectangle 6"/>
+              <a:t>현재 단계 12/13    |    현재 폴더 ~/agv_ws    |    현재 터미널</a:t>
+            </a:r>
+          </a:p>
+        </p:txBody>
+      </p:sp>
+      <p:sp>
+        <p:nvSpPr>
+          <p:cNvPr id="7" name="TextBox 6"/>
+          <p:cNvSpPr txBox="1"/>
+          <p:nvPr/>
+        </p:nvSpPr>
+        <p:spPr>
+          <a:xfrm>
+            <a:off x="658368" y="1627632"/>
+            <a:ext cx="10972800" cy="256032"/>
+          </a:xfrm>
+          <a:prstGeom prst="rect">
+            <a:avLst/>
+          </a:prstGeom>
+          <a:noFill/>
+        </p:spPr>
+        <p:txBody>
+          <a:bodyPr wrap="square" lIns="73152" rIns="73152" tIns="36576" bIns="36576">
+            <a:spAutoFit/>
+          </a:bodyPr>
+          <a:lstStyle/>
+          <a:p>
+            <a:pPr algn="l">
+              <a:spcAft>
+                <a:spcPts val="0"/>
+              </a:spcAft>
+              <a:defRPr sz="1500" b="1">
+                <a:solidFill>
+                  <a:srgbClr val="122C4E"/>
+                </a:solidFill>
+                <a:latin typeface="Noto Sans CJK KR"/>
+              </a:defRPr>
+            </a:pPr>
+            <a:r>
+              <a:t>이번 단계: 파일의 전체 내용을 중간 생략 없이 작성합니다. 아래 줄 범위를 끝까지 입력하세요.</a:t>
+            </a:r>
+          </a:p>
+        </p:txBody>
+      </p:sp>
+      <p:sp>
+        <p:nvSpPr>
+          <p:cNvPr id="8" name="Rectangle 7"/>
           <p:cNvSpPr/>
           <p:nvPr/>
         </p:nvSpPr>
         <p:spPr>
           <a:xfrm>
-            <a:off x="658368" y="1700784"/>
-            <a:ext cx="10972800" cy="3182112"/>
-          </a:xfrm>
-          <a:prstGeom prst="roundRect">
+            <a:off x="658368" y="1956816"/>
+            <a:ext cx="10972800" cy="603504"/>
+          </a:xfrm>
+          <a:prstGeom prst="rect">
+            <a:avLst/>
+          </a:prstGeom>
+          <a:solidFill>
+            <a:srgbClr val="F4F7FB"/>
+          </a:solidFill>
+          <a:ln>
+            <a:solidFill>
+              <a:srgbClr val="F4F7FB"/>
+            </a:solidFill>
+          </a:ln>
+        </p:spPr>
+        <p:style>
+          <a:lnRef idx="1">
+            <a:schemeClr val="accent1"/>
+          </a:lnRef>
+          <a:fillRef idx="3">
+            <a:schemeClr val="accent1"/>
+          </a:fillRef>
+          <a:effectRef idx="2">
+            <a:schemeClr val="accent1"/>
+          </a:effectRef>
+          <a:fontRef idx="minor">
+            <a:schemeClr val="lt1"/>
+          </a:fontRef>
+        </p:style>
+        <p:txBody>
+          <a:bodyPr rtlCol="0" anchor="ctr" wrap="square" lIns="73152" rIns="73152" tIns="36576" bIns="36576"/>
+          <a:lstStyle/>
+          <a:p>
+            <a:pPr algn="l">
+              <a:spcAft>
+                <a:spcPts val="0"/>
+              </a:spcAft>
+              <a:defRPr sz="1400" b="0">
+                <a:solidFill>
+                  <a:srgbClr val="122C4E"/>
+                </a:solidFill>
+                <a:latin typeface="DejaVu Sans Mono"/>
+              </a:defRPr>
+            </a:pPr>
+            <a:r>
+              <a:t>파일 생성: mkdir -p ~/agv_ws/src/agv_sensors/agv_sensors</a:t>
+            </a:r>
+            <a:br/>
+            <a:r>
+              <a:t>파일 열기: nano ~/agv_ws/src/agv_sensors/agv_sensors/imu_monitor.py</a:t>
+            </a:r>
+          </a:p>
+        </p:txBody>
+      </p:sp>
+      <p:sp>
+        <p:nvSpPr>
+          <p:cNvPr id="9" name="Rectangle 8"/>
+          <p:cNvSpPr/>
+          <p:nvPr/>
+        </p:nvSpPr>
+        <p:spPr>
+          <a:xfrm>
+            <a:off x="658368" y="2706624"/>
+            <a:ext cx="10972800" cy="3364992"/>
+          </a:xfrm>
+          <a:prstGeom prst="rect">
             <a:avLst/>
           </a:prstGeom>
           <a:solidFill>
@@ -9956,14 +10164,14 @@
           </a:fontRef>
         </p:style>
         <p:txBody>
-          <a:bodyPr rtlCol="0" anchor="ctr" wrap="square" lIns="73152" rIns="73152" tIns="36576" bIns="36576"/>
+          <a:bodyPr rtlCol="0" anchor="ctr" wrap="square" lIns="164592" rIns="164592" tIns="109728" bIns="36576"/>
           <a:lstStyle/>
           <a:p>
             <a:pPr algn="l">
               <a:spcAft>
                 <a:spcPts val="0"/>
               </a:spcAft>
-              <a:defRPr sz="1600" b="0">
+              <a:defRPr sz="1400" b="0">
                 <a:solidFill>
                   <a:srgbClr val="FFFFFF"/>
                 </a:solidFill>
@@ -9971,21 +10179,33 @@
               </a:defRPr>
             </a:pPr>
             <a:r>
-              <a:t>ros2 launch agv_bringup agv_sim.launch.py rviz:=false</a:t>
-            </a:r>
-          </a:p>
-        </p:txBody>
-      </p:sp>
-      <p:sp>
-        <p:nvSpPr>
-          <p:cNvPr id="8" name="TextBox 7"/>
+              <a:t>    finally:</a:t>
+            </a:r>
+            <a:br/>
+            <a:r>
+              <a:t>        node.destroy_node()</a:t>
+            </a:r>
+            <a:br/>
+            <a:r>
+              <a:t>        if rclpy.ok():</a:t>
+            </a:r>
+            <a:br/>
+            <a:r>
+              <a:t>            rclpy.shutdown()</a:t>
+            </a:r>
+          </a:p>
+        </p:txBody>
+      </p:sp>
+      <p:sp>
+        <p:nvSpPr>
+          <p:cNvPr id="10" name="TextBox 9"/>
           <p:cNvSpPr txBox="1"/>
           <p:nvPr/>
         </p:nvSpPr>
         <p:spPr>
           <a:xfrm>
-            <a:off x="786384" y="5239512"/>
-            <a:ext cx="1261872" cy="237744"/>
+            <a:off x="749808" y="6181344"/>
+            <a:ext cx="10789920" cy="201168"/>
           </a:xfrm>
           <a:prstGeom prst="rect">
             <a:avLst/>
@@ -10002,54 +10222,15 @@
               <a:spcAft>
                 <a:spcPts val="0"/>
               </a:spcAft>
-              <a:defRPr sz="1800" b="1">
-                <a:solidFill>
-                  <a:srgbClr val="2A8B5A"/>
-                </a:solidFill>
-                <a:latin typeface="Noto Sans CJK KR"/>
-              </a:defRPr>
-            </a:pPr>
-            <a:r>
-              <a:t>확인 기준</a:t>
-            </a:r>
-          </a:p>
-        </p:txBody>
-      </p:sp>
-      <p:sp>
-        <p:nvSpPr>
-          <p:cNvPr id="9" name="TextBox 8"/>
-          <p:cNvSpPr txBox="1"/>
-          <p:nvPr/>
-        </p:nvSpPr>
-        <p:spPr>
-          <a:xfrm>
-            <a:off x="786384" y="5532120"/>
-            <a:ext cx="10469880" cy="420624"/>
-          </a:xfrm>
-          <a:prstGeom prst="rect">
-            <a:avLst/>
-          </a:prstGeom>
-          <a:noFill/>
-        </p:spPr>
-        <p:txBody>
-          <a:bodyPr wrap="square" lIns="73152" rIns="73152" tIns="36576" bIns="36576">
-            <a:spAutoFit/>
-          </a:bodyPr>
-          <a:lstStyle/>
-          <a:p>
-            <a:pPr algn="l">
-              <a:spcAft>
-                <a:spcPts val="0"/>
-              </a:spcAft>
-              <a:defRPr sz="1800" b="0">
-                <a:solidFill>
-                  <a:srgbClr val="122C4E"/>
-                </a:solidFill>
-                <a:latin typeface="Noto Sans CJK KR"/>
-              </a:defRPr>
-            </a:pPr>
-            <a:r>
-              <a:t>모든 sensor 노드가 같은 시뮬레이션 시간과 기대 publish rate를 사용한다.</a:t>
+              <a:defRPr sz="1000" b="0">
+                <a:solidFill>
+                  <a:srgbClr val="5C6672"/>
+                </a:solidFill>
+                <a:latin typeface="Noto Sans CJK KR"/>
+              </a:defRPr>
+            </a:pPr>
+            <a:r>
+              <a:t>파일 전체 3/3 · 이 슬라이드 다음에 같은 파일의 나머지 줄이 이어집니다.</a:t>
             </a:r>
           </a:p>
         </p:txBody>
@@ -10106,7 +10287,7 @@
               </a:defRPr>
             </a:pPr>
             <a:r>
-              <a:t>정상 결과: 실제 환경에서 확인한 출력</a:t>
+              <a:t>build → source → run 순서로 실행한다</a:t>
             </a:r>
           </a:p>
         </p:txBody>
@@ -10145,7 +10326,7 @@
               </a:defRPr>
             </a:pPr>
             <a:r>
-              <a:t>실제 ROS 2 환경의 파일·패키지·구성 검증 로그</a:t>
+              <a:t>새 파일 또는 수정 파일은 build와 source 뒤에만 실행 이름·설정에 반영됩니다.</a:t>
             </a:r>
           </a:p>
         </p:txBody>
@@ -10228,40 +10409,132 @@
           </a:p>
         </p:txBody>
       </p:sp>
-      <p:pic>
-        <p:nvPicPr>
-          <p:cNvPr id="6" name="Picture 5" descr="validation_terminal.png"/>
-          <p:cNvPicPr>
-            <a:picLocks noChangeAspect="1"/>
-          </p:cNvPicPr>
-          <p:nvPr/>
-        </p:nvPicPr>
-        <p:blipFill>
-          <a:blip r:embed="rId2"/>
-          <a:stretch>
-            <a:fillRect/>
-          </a:stretch>
-        </p:blipFill>
-        <p:spPr>
-          <a:xfrm>
-            <a:off x="790956" y="1453970"/>
-            <a:ext cx="10607040" cy="4599282"/>
-          </a:xfrm>
-          <a:prstGeom prst="rect">
-            <a:avLst/>
-          </a:prstGeom>
-        </p:spPr>
-      </p:pic>
-      <p:sp>
-        <p:nvSpPr>
-          <p:cNvPr id="7" name="TextBox 6"/>
+      <p:sp>
+        <p:nvSpPr>
+          <p:cNvPr id="6" name="Rectangle 5"/>
+          <p:cNvSpPr/>
+          <p:nvPr/>
+        </p:nvSpPr>
+        <p:spPr>
+          <a:xfrm>
+            <a:off x="566928" y="1188720"/>
+            <a:ext cx="11064240" cy="347472"/>
+          </a:xfrm>
+          <a:prstGeom prst="rect">
+            <a:avLst/>
+          </a:prstGeom>
+          <a:solidFill>
+            <a:srgbClr val="F4F7FB"/>
+          </a:solidFill>
+          <a:ln>
+            <a:solidFill>
+              <a:srgbClr val="F4F7FB"/>
+            </a:solidFill>
+          </a:ln>
+        </p:spPr>
+        <p:style>
+          <a:lnRef idx="1">
+            <a:schemeClr val="accent1"/>
+          </a:lnRef>
+          <a:fillRef idx="3">
+            <a:schemeClr val="accent1"/>
+          </a:fillRef>
+          <a:effectRef idx="2">
+            <a:schemeClr val="accent1"/>
+          </a:effectRef>
+          <a:fontRef idx="minor">
+            <a:schemeClr val="lt1"/>
+          </a:fontRef>
+        </p:style>
+        <p:txBody>
+          <a:bodyPr rtlCol="0" anchor="ctr" wrap="square" lIns="73152" rIns="73152" tIns="36576" bIns="36576"/>
+          <a:lstStyle/>
+          <a:p>
+            <a:pPr algn="l">
+              <a:spcAft>
+                <a:spcPts val="0"/>
+              </a:spcAft>
+              <a:defRPr sz="1300" b="1">
+                <a:solidFill>
+                  <a:srgbClr val="122C4E"/>
+                </a:solidFill>
+                <a:latin typeface="Noto Sans CJK KR"/>
+              </a:defRPr>
+            </a:pPr>
+            <a:r>
+              <a:t>현재 단계 실행    |    현재 폴더 ~/agv_ws    |    현재 터미널</a:t>
+            </a:r>
+          </a:p>
+        </p:txBody>
+      </p:sp>
+      <p:sp>
+        <p:nvSpPr>
+          <p:cNvPr id="7" name="Rounded Rectangle 6"/>
+          <p:cNvSpPr/>
+          <p:nvPr/>
+        </p:nvSpPr>
+        <p:spPr>
+          <a:xfrm>
+            <a:off x="658368" y="1700784"/>
+            <a:ext cx="10972800" cy="3182112"/>
+          </a:xfrm>
+          <a:prstGeom prst="roundRect">
+            <a:avLst/>
+          </a:prstGeom>
+          <a:solidFill>
+            <a:srgbClr val="1D232D"/>
+          </a:solidFill>
+          <a:ln>
+            <a:solidFill>
+              <a:srgbClr val="1D232D"/>
+            </a:solidFill>
+          </a:ln>
+        </p:spPr>
+        <p:style>
+          <a:lnRef idx="1">
+            <a:schemeClr val="accent1"/>
+          </a:lnRef>
+          <a:fillRef idx="3">
+            <a:schemeClr val="accent1"/>
+          </a:fillRef>
+          <a:effectRef idx="2">
+            <a:schemeClr val="accent1"/>
+          </a:effectRef>
+          <a:fontRef idx="minor">
+            <a:schemeClr val="lt1"/>
+          </a:fontRef>
+        </p:style>
+        <p:txBody>
+          <a:bodyPr rtlCol="0" anchor="ctr" wrap="square" lIns="73152" rIns="73152" tIns="36576" bIns="36576"/>
+          <a:lstStyle/>
+          <a:p>
+            <a:pPr algn="l">
+              <a:spcAft>
+                <a:spcPts val="0"/>
+              </a:spcAft>
+              <a:defRPr sz="1600" b="0">
+                <a:solidFill>
+                  <a:srgbClr val="FFFFFF"/>
+                </a:solidFill>
+                <a:latin typeface="DejaVu Sans Mono"/>
+              </a:defRPr>
+            </a:pPr>
+            <a:r>
+              <a:t>ros2 launch agv_bringup agv_sim.launch.py rviz:=false</a:t>
+            </a:r>
+          </a:p>
+        </p:txBody>
+      </p:sp>
+      <p:sp>
+        <p:nvSpPr>
+          <p:cNvPr id="8" name="TextBox 7"/>
           <p:cNvSpPr txBox="1"/>
           <p:nvPr/>
         </p:nvSpPr>
         <p:spPr>
           <a:xfrm>
-            <a:off x="777240" y="6217920"/>
-            <a:ext cx="10607040" cy="182880"/>
+            <a:off x="786384" y="5239512"/>
+            <a:ext cx="1261872" cy="237744"/>
           </a:xfrm>
           <a:prstGeom prst="rect">
             <a:avLst/>
@@ -10274,11 +10547,11 @@
           </a:bodyPr>
           <a:lstStyle/>
           <a:p>
-            <a:pPr algn="ctr">
-              <a:spcAft>
-                <a:spcPts val="0"/>
-              </a:spcAft>
-              <a:defRPr sz="1100" b="1">
+            <a:pPr algn="l">
+              <a:spcAft>
+                <a:spcPts val="0"/>
+              </a:spcAft>
+              <a:defRPr sz="1800" b="1">
                 <a:solidFill>
                   <a:srgbClr val="2A8B5A"/>
                 </a:solidFill>
@@ -10286,7 +10559,46 @@
               </a:defRPr>
             </a:pPr>
             <a:r>
-              <a:t>① 명령/설정  ② 정상 출력 또는 화면  ③ 다음 검증 명령으로 재확인</a:t>
+              <a:t>확인 기준</a:t>
+            </a:r>
+          </a:p>
+        </p:txBody>
+      </p:sp>
+      <p:sp>
+        <p:nvSpPr>
+          <p:cNvPr id="9" name="TextBox 8"/>
+          <p:cNvSpPr txBox="1"/>
+          <p:nvPr/>
+        </p:nvSpPr>
+        <p:spPr>
+          <a:xfrm>
+            <a:off x="786384" y="5532120"/>
+            <a:ext cx="10469880" cy="420624"/>
+          </a:xfrm>
+          <a:prstGeom prst="rect">
+            <a:avLst/>
+          </a:prstGeom>
+          <a:noFill/>
+        </p:spPr>
+        <p:txBody>
+          <a:bodyPr wrap="square" lIns="73152" rIns="73152" tIns="36576" bIns="36576">
+            <a:spAutoFit/>
+          </a:bodyPr>
+          <a:lstStyle/>
+          <a:p>
+            <a:pPr algn="l">
+              <a:spcAft>
+                <a:spcPts val="0"/>
+              </a:spcAft>
+              <a:defRPr sz="1800" b="0">
+                <a:solidFill>
+                  <a:srgbClr val="122C4E"/>
+                </a:solidFill>
+                <a:latin typeface="Noto Sans CJK KR"/>
+              </a:defRPr>
+            </a:pPr>
+            <a:r>
+              <a:t>모든 sensor 노드가 같은 시뮬레이션 시간과 기대 publish rate를 사용한다.</a:t>
             </a:r>
           </a:p>
         </p:txBody>
@@ -10804,7 +11116,7 @@
               </a:defRPr>
             </a:pPr>
             <a:r>
-              <a:t>객관적 검증 명령으로 완료를 확인한다</a:t>
+              <a:t>정상 결과: 실제 환경에서 확인한 출력</a:t>
             </a:r>
           </a:p>
         </p:txBody>
@@ -10843,7 +11155,7 @@
               </a:defRPr>
             </a:pPr>
             <a:r>
-              <a:t>화면만 보지 말고 topic·frame·파일·parameter를 다시 확인합니다.</a:t>
+              <a:t>실제 ROS 2 환경의 파일·패키지·구성 검증 로그</a:t>
             </a:r>
           </a:p>
         </p:txBody>
@@ -10926,214 +11238,40 @@
           </a:p>
         </p:txBody>
       </p:sp>
-      <p:sp>
-        <p:nvSpPr>
-          <p:cNvPr id="6" name="Rectangle 5"/>
-          <p:cNvSpPr/>
-          <p:nvPr/>
-        </p:nvSpPr>
-        <p:spPr>
-          <a:xfrm>
-            <a:off x="566928" y="1188720"/>
-            <a:ext cx="11064240" cy="347472"/>
-          </a:xfrm>
-          <a:prstGeom prst="rect">
-            <a:avLst/>
-          </a:prstGeom>
-          <a:solidFill>
-            <a:srgbClr val="F4F7FB"/>
-          </a:solidFill>
-          <a:ln>
-            <a:solidFill>
-              <a:srgbClr val="F4F7FB"/>
-            </a:solidFill>
-          </a:ln>
-        </p:spPr>
-        <p:style>
-          <a:lnRef idx="1">
-            <a:schemeClr val="accent1"/>
-          </a:lnRef>
-          <a:fillRef idx="3">
-            <a:schemeClr val="accent1"/>
-          </a:fillRef>
-          <a:effectRef idx="2">
-            <a:schemeClr val="accent1"/>
-          </a:effectRef>
-          <a:fontRef idx="minor">
-            <a:schemeClr val="lt1"/>
-          </a:fontRef>
-        </p:style>
-        <p:txBody>
-          <a:bodyPr rtlCol="0" anchor="ctr" wrap="square" lIns="73152" rIns="73152" tIns="36576" bIns="36576"/>
-          <a:lstStyle/>
-          <a:p>
-            <a:pPr algn="l">
-              <a:spcAft>
-                <a:spcPts val="0"/>
-              </a:spcAft>
-              <a:defRPr sz="1300" b="1">
-                <a:solidFill>
-                  <a:srgbClr val="122C4E"/>
-                </a:solidFill>
-                <a:latin typeface="Noto Sans CJK KR"/>
-              </a:defRPr>
-            </a:pPr>
-            <a:r>
-              <a:t>현재 단계 검증    |    현재 폴더 ~/agv_ws    |    현재 터미널</a:t>
-            </a:r>
-          </a:p>
-        </p:txBody>
-      </p:sp>
-      <p:sp>
-        <p:nvSpPr>
-          <p:cNvPr id="7" name="Rounded Rectangle 6"/>
-          <p:cNvSpPr/>
-          <p:nvPr/>
-        </p:nvSpPr>
-        <p:spPr>
-          <a:xfrm>
-            <a:off x="658368" y="1755648"/>
-            <a:ext cx="10972800" cy="2148840"/>
-          </a:xfrm>
-          <a:prstGeom prst="roundRect">
-            <a:avLst/>
-          </a:prstGeom>
-          <a:solidFill>
-            <a:srgbClr val="1D232D"/>
-          </a:solidFill>
-          <a:ln>
-            <a:solidFill>
-              <a:srgbClr val="1D232D"/>
-            </a:solidFill>
-          </a:ln>
-        </p:spPr>
-        <p:style>
-          <a:lnRef idx="1">
-            <a:schemeClr val="accent1"/>
-          </a:lnRef>
-          <a:fillRef idx="3">
-            <a:schemeClr val="accent1"/>
-          </a:fillRef>
-          <a:effectRef idx="2">
-            <a:schemeClr val="accent1"/>
-          </a:effectRef>
-          <a:fontRef idx="minor">
-            <a:schemeClr val="lt1"/>
-          </a:fontRef>
-        </p:style>
-        <p:txBody>
-          <a:bodyPr rtlCol="0" anchor="ctr" wrap="square" lIns="73152" rIns="73152" tIns="36576" bIns="36576"/>
-          <a:lstStyle/>
-          <a:p>
-            <a:pPr algn="l">
-              <a:spcAft>
-                <a:spcPts val="0"/>
-              </a:spcAft>
-              <a:defRPr sz="1600" b="0">
-                <a:solidFill>
-                  <a:srgbClr val="FFFFFF"/>
-                </a:solidFill>
-                <a:latin typeface="DejaVu Sans Mono"/>
-              </a:defRPr>
-            </a:pPr>
-            <a:r>
-              <a:t>ros2 topic echo /clock --once</a:t>
-            </a:r>
-            <a:br/>
-            <a:r>
-              <a:t>ros2 topic hz /scan</a:t>
-            </a:r>
-            <a:br/>
-            <a:r>
-              <a:t>ros2 topic hz /imu/data</a:t>
-            </a:r>
-            <a:br/>
-            <a:r>
-              <a:t>ros2 param get /lidar_processor use_sim_time</a:t>
-            </a:r>
-          </a:p>
-        </p:txBody>
-      </p:sp>
-      <p:sp>
-        <p:nvSpPr>
-          <p:cNvPr id="8" name="Rounded Rectangle 7"/>
-          <p:cNvSpPr/>
-          <p:nvPr/>
-        </p:nvSpPr>
-        <p:spPr>
-          <a:xfrm>
-            <a:off x="658368" y="4206240"/>
-            <a:ext cx="10972800" cy="1554480"/>
-          </a:xfrm>
-          <a:prstGeom prst="roundRect">
-            <a:avLst/>
-          </a:prstGeom>
-          <a:solidFill>
-            <a:srgbClr val="F4F7FB"/>
-          </a:solidFill>
-          <a:ln>
-            <a:solidFill>
-              <a:srgbClr val="D1DFD5"/>
-            </a:solidFill>
-          </a:ln>
-        </p:spPr>
-        <p:style>
-          <a:lnRef idx="1">
-            <a:schemeClr val="accent1"/>
-          </a:lnRef>
-          <a:fillRef idx="3">
-            <a:schemeClr val="accent1"/>
-          </a:fillRef>
-          <a:effectRef idx="2">
-            <a:schemeClr val="accent1"/>
-          </a:effectRef>
-          <a:fontRef idx="minor">
-            <a:schemeClr val="lt1"/>
-          </a:fontRef>
-        </p:style>
-        <p:txBody>
-          <a:bodyPr rtlCol="0" anchor="ctr" wrap="square" lIns="73152" rIns="73152" tIns="36576" bIns="36576"/>
-          <a:lstStyle/>
-          <a:p>
-            <a:pPr algn="l">
-              <a:spcAft>
-                <a:spcPts val="0"/>
-              </a:spcAft>
-              <a:defRPr sz="1800" b="1">
-                <a:solidFill>
-                  <a:srgbClr val="2A8B5A"/>
-                </a:solidFill>
-                <a:latin typeface="Noto Sans CJK KR"/>
-              </a:defRPr>
-            </a:pPr>
-            <a:r>
-              <a:t>완료 체크</a:t>
-            </a:r>
-            <a:br/>
-            <a:r>
-              <a:t>□ 명령이 오류 없이 실행된다.</a:t>
-            </a:r>
-            <a:br/>
-            <a:r>
-              <a:t>□ 기대한 파일·topic·frame·parameter 이름이 보인다.</a:t>
-            </a:r>
-            <a:br/>
-            <a:r>
-              <a:t>□ 값의 단위와 방향을 한 문장으로 설명할 수 있다.</a:t>
-            </a:r>
-          </a:p>
-        </p:txBody>
-      </p:sp>
-      <p:sp>
-        <p:nvSpPr>
-          <p:cNvPr id="9" name="TextBox 8"/>
+      <p:pic>
+        <p:nvPicPr>
+          <p:cNvPr id="6" name="Picture 5" descr="validation_terminal.png"/>
+          <p:cNvPicPr>
+            <a:picLocks noChangeAspect="1"/>
+          </p:cNvPicPr>
+          <p:nvPr/>
+        </p:nvPicPr>
+        <p:blipFill>
+          <a:blip r:embed="rId2"/>
+          <a:stretch>
+            <a:fillRect/>
+          </a:stretch>
+        </p:blipFill>
+        <p:spPr>
+          <a:xfrm>
+            <a:off x="790956" y="1453970"/>
+            <a:ext cx="10607040" cy="4599282"/>
+          </a:xfrm>
+          <a:prstGeom prst="rect">
+            <a:avLst/>
+          </a:prstGeom>
+        </p:spPr>
+      </p:pic>
+      <p:sp>
+        <p:nvSpPr>
+          <p:cNvPr id="7" name="TextBox 6"/>
           <p:cNvSpPr txBox="1"/>
           <p:nvPr/>
         </p:nvSpPr>
         <p:spPr>
           <a:xfrm>
-            <a:off x="731520" y="5989320"/>
-            <a:ext cx="10789920" cy="237744"/>
+            <a:off x="777240" y="6217920"/>
+            <a:ext cx="10607040" cy="182880"/>
           </a:xfrm>
           <a:prstGeom prst="rect">
             <a:avLst/>
@@ -11146,19 +11284,19 @@
           </a:bodyPr>
           <a:lstStyle/>
           <a:p>
-            <a:pPr algn="l">
-              <a:spcAft>
-                <a:spcPts val="0"/>
-              </a:spcAft>
-              <a:defRPr sz="1500" b="1">
-                <a:solidFill>
-                  <a:srgbClr val="122C4E"/>
-                </a:solidFill>
-                <a:latin typeface="Noto Sans CJK KR"/>
-              </a:defRPr>
-            </a:pPr>
-            <a:r>
-              <a:t>완료 조건: 모든 sensor 노드가 같은 시뮬레이션 시간과 기대 publish rate를 사용한다.</a:t>
+            <a:pPr algn="ctr">
+              <a:spcAft>
+                <a:spcPts val="0"/>
+              </a:spcAft>
+              <a:defRPr sz="1100" b="1">
+                <a:solidFill>
+                  <a:srgbClr val="2A8B5A"/>
+                </a:solidFill>
+                <a:latin typeface="Noto Sans CJK KR"/>
+              </a:defRPr>
+            </a:pPr>
+            <a:r>
+              <a:t>① 명령/설정  ② 정상 출력 또는 화면  ③ 다음 검증 명령으로 재확인</a:t>
             </a:r>
           </a:p>
         </p:txBody>
@@ -11215,7 +11353,7 @@
               </a:defRPr>
             </a:pPr>
             <a:r>
-              <a:t>막히면: 증상 → 우선 확인 → 재검증</a:t>
+              <a:t>객관적 검증 명령으로 완료를 확인한다</a:t>
             </a:r>
           </a:p>
         </p:txBody>
@@ -11254,7 +11392,7 @@
               </a:defRPr>
             </a:pPr>
             <a:r>
-              <a:t>오류 메시지를 숨기지 않고 같은 순서로 점검합니다.</a:t>
+              <a:t>화면만 보지 말고 topic·frame·파일·parameter를 다시 확인합니다.</a:t>
             </a:r>
           </a:p>
         </p:txBody>
@@ -11390,7 +11528,7 @@
               </a:defRPr>
             </a:pPr>
             <a:r>
-              <a:t>현재 단계 오류 대응    |    현재 폴더 ~/agv_ws    |    현재 터미널</a:t>
+              <a:t>현재 단계 검증    |    현재 폴더 ~/agv_ws    |    현재 터미널</a:t>
             </a:r>
           </a:p>
         </p:txBody>
@@ -11403,18 +11541,18 @@
         </p:nvSpPr>
         <p:spPr>
           <a:xfrm>
-            <a:off x="694944" y="1755648"/>
-            <a:ext cx="10972800" cy="1115568"/>
+            <a:off x="658368" y="1755648"/>
+            <a:ext cx="10972800" cy="2148840"/>
           </a:xfrm>
           <a:prstGeom prst="roundRect">
             <a:avLst/>
           </a:prstGeom>
           <a:solidFill>
-            <a:srgbClr val="FFF7F4"/>
+            <a:srgbClr val="1D232D"/>
           </a:solidFill>
           <a:ln>
             <a:solidFill>
-              <a:srgbClr val="EDBEB4"/>
+              <a:srgbClr val="1D232D"/>
             </a:solidFill>
           </a:ln>
         </p:spPr>
@@ -11433,115 +11571,58 @@
           </a:fontRef>
         </p:style>
         <p:txBody>
-          <a:bodyPr rtlCol="0" anchor="ctr"/>
-          <a:lstStyle/>
-          <a:p>
-            <a:pPr algn="ctr"/>
-          </a:p>
-        </p:txBody>
-      </p:sp>
-      <p:sp>
-        <p:nvSpPr>
-          <p:cNvPr id="8" name="TextBox 7"/>
-          <p:cNvSpPr txBox="1"/>
-          <p:nvPr/>
-        </p:nvSpPr>
-        <p:spPr>
-          <a:xfrm>
-            <a:off x="896112" y="1901952"/>
-            <a:ext cx="2926080" cy="274320"/>
-          </a:xfrm>
-          <a:prstGeom prst="rect">
-            <a:avLst/>
-          </a:prstGeom>
-          <a:noFill/>
-        </p:spPr>
-        <p:txBody>
-          <a:bodyPr wrap="square" lIns="73152" rIns="73152" tIns="36576" bIns="36576">
-            <a:spAutoFit/>
-          </a:bodyPr>
+          <a:bodyPr rtlCol="0" anchor="ctr" wrap="square" lIns="73152" rIns="73152" tIns="36576" bIns="36576"/>
           <a:lstStyle/>
           <a:p>
             <a:pPr algn="l">
               <a:spcAft>
                 <a:spcPts val="0"/>
               </a:spcAft>
-              <a:defRPr sz="1800" b="1">
-                <a:solidFill>
-                  <a:srgbClr val="BE3B3B"/>
-                </a:solidFill>
-                <a:latin typeface="Noto Sans CJK KR"/>
-              </a:defRPr>
-            </a:pPr>
-            <a:r>
-              <a:t>증상 1: ROS 노드 시간이 안 감</a:t>
-            </a:r>
-          </a:p>
-        </p:txBody>
-      </p:sp>
-      <p:sp>
-        <p:nvSpPr>
-          <p:cNvPr id="9" name="TextBox 8"/>
-          <p:cNvSpPr txBox="1"/>
-          <p:nvPr/>
-        </p:nvSpPr>
-        <p:spPr>
-          <a:xfrm>
-            <a:off x="3794760" y="1883664"/>
-            <a:ext cx="7543800" cy="621792"/>
-          </a:xfrm>
-          <a:prstGeom prst="rect">
-            <a:avLst/>
-          </a:prstGeom>
-          <a:noFill/>
-        </p:spPr>
-        <p:txBody>
-          <a:bodyPr wrap="square" lIns="73152" rIns="73152" tIns="36576" bIns="36576">
-            <a:spAutoFit/>
-          </a:bodyPr>
-          <a:lstStyle/>
-          <a:p>
-            <a:pPr algn="l">
-              <a:spcAft>
-                <a:spcPts val="0"/>
-              </a:spcAft>
               <a:defRPr sz="1600" b="0">
                 <a:solidFill>
-                  <a:srgbClr val="122C4E"/>
-                </a:solidFill>
-                <a:latin typeface="Noto Sans CJK KR"/>
-              </a:defRPr>
-            </a:pPr>
-            <a:r>
-              <a:t>우선 확인: use_sim_time과 /clock bridge를 확인한다.</a:t>
+                  <a:srgbClr val="FFFFFF"/>
+                </a:solidFill>
+                <a:latin typeface="DejaVu Sans Mono"/>
+              </a:defRPr>
+            </a:pPr>
+            <a:r>
+              <a:t>ros2 topic echo /clock --once</a:t>
             </a:r>
             <a:br/>
             <a:r>
-              <a:t>수정 후: ros2 topic echo /clock --once</a:t>
-            </a:r>
-          </a:p>
-        </p:txBody>
-      </p:sp>
-      <p:sp>
-        <p:nvSpPr>
-          <p:cNvPr id="10" name="Rounded Rectangle 9"/>
+              <a:t>ros2 topic hz /scan</a:t>
+            </a:r>
+            <a:br/>
+            <a:r>
+              <a:t>ros2 topic hz /imu/data</a:t>
+            </a:r>
+            <a:br/>
+            <a:r>
+              <a:t>ros2 param get /lidar_processor use_sim_time</a:t>
+            </a:r>
+          </a:p>
+        </p:txBody>
+      </p:sp>
+      <p:sp>
+        <p:nvSpPr>
+          <p:cNvPr id="8" name="Rounded Rectangle 7"/>
           <p:cNvSpPr/>
           <p:nvPr/>
         </p:nvSpPr>
         <p:spPr>
           <a:xfrm>
-            <a:off x="694944" y="3172968"/>
-            <a:ext cx="10972800" cy="1115568"/>
+            <a:off x="658368" y="4206240"/>
+            <a:ext cx="10972800" cy="1554480"/>
           </a:xfrm>
           <a:prstGeom prst="roundRect">
             <a:avLst/>
           </a:prstGeom>
           <a:solidFill>
-            <a:srgbClr val="FFF7F4"/>
+            <a:srgbClr val="F4F7FB"/>
           </a:solidFill>
           <a:ln>
             <a:solidFill>
-              <a:srgbClr val="EDBEB4"/>
+              <a:srgbClr val="D1DFD5"/>
             </a:solidFill>
           </a:ln>
         </p:spPr>
@@ -11560,23 +11641,48 @@
           </a:fontRef>
         </p:style>
         <p:txBody>
-          <a:bodyPr rtlCol="0" anchor="ctr"/>
-          <a:lstStyle/>
-          <a:p>
-            <a:pPr algn="ctr"/>
-          </a:p>
-        </p:txBody>
-      </p:sp>
-      <p:sp>
-        <p:nvSpPr>
-          <p:cNvPr id="11" name="TextBox 10"/>
+          <a:bodyPr rtlCol="0" anchor="ctr" wrap="square" lIns="73152" rIns="73152" tIns="36576" bIns="36576"/>
+          <a:lstStyle/>
+          <a:p>
+            <a:pPr algn="l">
+              <a:spcAft>
+                <a:spcPts val="0"/>
+              </a:spcAft>
+              <a:defRPr sz="1800" b="1">
+                <a:solidFill>
+                  <a:srgbClr val="2A8B5A"/>
+                </a:solidFill>
+                <a:latin typeface="Noto Sans CJK KR"/>
+              </a:defRPr>
+            </a:pPr>
+            <a:r>
+              <a:t>완료 체크</a:t>
+            </a:r>
+            <a:br/>
+            <a:r>
+              <a:t>□ 명령이 오류 없이 실행된다.</a:t>
+            </a:r>
+            <a:br/>
+            <a:r>
+              <a:t>□ 기대한 파일·topic·frame·parameter 이름이 보인다.</a:t>
+            </a:r>
+            <a:br/>
+            <a:r>
+              <a:t>□ 값의 단위와 방향을 한 문장으로 설명할 수 있다.</a:t>
+            </a:r>
+          </a:p>
+        </p:txBody>
+      </p:sp>
+      <p:sp>
+        <p:nvSpPr>
+          <p:cNvPr id="9" name="TextBox 8"/>
           <p:cNvSpPr txBox="1"/>
           <p:nvPr/>
         </p:nvSpPr>
         <p:spPr>
           <a:xfrm>
-            <a:off x="896112" y="3319272"/>
-            <a:ext cx="2926080" cy="274320"/>
+            <a:off x="731520" y="5989320"/>
+            <a:ext cx="10789920" cy="237744"/>
           </a:xfrm>
           <a:prstGeom prst="rect">
             <a:avLst/>
@@ -11593,46 +11699,7 @@
               <a:spcAft>
                 <a:spcPts val="0"/>
               </a:spcAft>
-              <a:defRPr sz="1800" b="1">
-                <a:solidFill>
-                  <a:srgbClr val="BE3B3B"/>
-                </a:solidFill>
-                <a:latin typeface="Noto Sans CJK KR"/>
-              </a:defRPr>
-            </a:pPr>
-            <a:r>
-              <a:t>증상 2: topic은 있는데 subscriber가 못 받음</a:t>
-            </a:r>
-          </a:p>
-        </p:txBody>
-      </p:sp>
-      <p:sp>
-        <p:nvSpPr>
-          <p:cNvPr id="12" name="TextBox 11"/>
-          <p:cNvSpPr txBox="1"/>
-          <p:nvPr/>
-        </p:nvSpPr>
-        <p:spPr>
-          <a:xfrm>
-            <a:off x="3794760" y="3300984"/>
-            <a:ext cx="7543800" cy="621792"/>
-          </a:xfrm>
-          <a:prstGeom prst="rect">
-            <a:avLst/>
-          </a:prstGeom>
-          <a:noFill/>
-        </p:spPr>
-        <p:txBody>
-          <a:bodyPr wrap="square" lIns="73152" rIns="73152" tIns="36576" bIns="36576">
-            <a:spAutoFit/>
-          </a:bodyPr>
-          <a:lstStyle/>
-          <a:p>
-            <a:pPr algn="l">
-              <a:spcAft>
-                <a:spcPts val="0"/>
-              </a:spcAft>
-              <a:defRPr sz="1600" b="0">
+              <a:defRPr sz="1500" b="1">
                 <a:solidFill>
                   <a:srgbClr val="122C4E"/>
                 </a:solidFill>
@@ -11640,50 +11707,7 @@
               </a:defRPr>
             </a:pPr>
             <a:r>
-              <a:t>우선 확인: publisher/subscriber QoS reliability 호환을 확인한다.</a:t>
-            </a:r>
-            <a:br/>
-            <a:r>
-              <a:t>수정 후: ros2 topic echo /clock --once</a:t>
-            </a:r>
-          </a:p>
-        </p:txBody>
-      </p:sp>
-      <p:sp>
-        <p:nvSpPr>
-          <p:cNvPr id="13" name="TextBox 12"/>
-          <p:cNvSpPr txBox="1"/>
-          <p:nvPr/>
-        </p:nvSpPr>
-        <p:spPr>
-          <a:xfrm>
-            <a:off x="822960" y="5102352"/>
-            <a:ext cx="10607040" cy="402336"/>
-          </a:xfrm>
-          <a:prstGeom prst="rect">
-            <a:avLst/>
-          </a:prstGeom>
-          <a:noFill/>
-        </p:spPr>
-        <p:txBody>
-          <a:bodyPr wrap="square" lIns="73152" rIns="73152" tIns="36576" bIns="36576">
-            <a:spAutoFit/>
-          </a:bodyPr>
-          <a:lstStyle/>
-          <a:p>
-            <a:pPr algn="ctr">
-              <a:spcAft>
-                <a:spcPts val="0"/>
-              </a:spcAft>
-              <a:defRPr sz="1800" b="1">
-                <a:solidFill>
-                  <a:srgbClr val="DB7E22"/>
-                </a:solidFill>
-                <a:latin typeface="Noto Sans CJK KR"/>
-              </a:defRPr>
-            </a:pPr>
-            <a:r>
-              <a:t>공통 순서: ① 현재 폴더 ② source ③ 파일 경로 ④ 이름/타입/단위 ⑤ build·source 후 재실행</a:t>
+              <a:t>완료 조건: 모든 sensor 노드가 같은 시뮬레이션 시간과 기대 publish rate를 사용한다.</a:t>
             </a:r>
           </a:p>
         </p:txBody>
@@ -11740,7 +11764,7 @@
               </a:defRPr>
             </a:pPr>
             <a:r>
-              <a:t>미니 실습: 값 하나를 바꾸고 결과를 비교한다</a:t>
+              <a:t>막히면: 증상 → 우선 확인 → 재검증</a:t>
             </a:r>
           </a:p>
         </p:txBody>
@@ -11779,7 +11803,7 @@
               </a:defRPr>
             </a:pPr>
             <a:r>
-              <a:t>정상 결과를 만든 뒤에는 한 번에 하나의 값만 바꿉니다.</a:t>
+              <a:t>오류 메시지를 숨기지 않고 같은 순서로 점검합니다.</a:t>
             </a:r>
           </a:p>
         </p:txBody>
@@ -11915,7 +11939,7 @@
               </a:defRPr>
             </a:pPr>
             <a:r>
-              <a:t>현재 단계 미니 실습    |    현재 폴더 ~/agv_ws    |    현재 터미널</a:t>
+              <a:t>현재 단계 오류 대응    |    현재 폴더 ~/agv_ws    |    현재 터미널</a:t>
             </a:r>
           </a:p>
         </p:txBody>
@@ -11928,18 +11952,18 @@
         </p:nvSpPr>
         <p:spPr>
           <a:xfrm>
-            <a:off x="749808" y="1874519"/>
-            <a:ext cx="10652760" cy="1993392"/>
+            <a:off x="694944" y="1755648"/>
+            <a:ext cx="10972800" cy="1115568"/>
           </a:xfrm>
           <a:prstGeom prst="roundRect">
             <a:avLst/>
           </a:prstGeom>
           <a:solidFill>
-            <a:srgbClr val="FFF8EB"/>
+            <a:srgbClr val="FFF7F4"/>
           </a:solidFill>
           <a:ln>
             <a:solidFill>
-              <a:srgbClr val="ECC680"/>
+              <a:srgbClr val="EDBEB4"/>
             </a:solidFill>
           </a:ln>
         </p:spPr>
@@ -11958,23 +11982,10 @@
           </a:fontRef>
         </p:style>
         <p:txBody>
-          <a:bodyPr rtlCol="0" anchor="ctr" wrap="square" lIns="73152" rIns="73152" tIns="36576" bIns="36576"/>
-          <a:lstStyle/>
-          <a:p>
-            <a:pPr algn="ctr">
-              <a:spcAft>
-                <a:spcPts val="0"/>
-              </a:spcAft>
-              <a:defRPr sz="2300" b="1">
-                <a:solidFill>
-                  <a:srgbClr val="122C4E"/>
-                </a:solidFill>
-                <a:latin typeface="Noto Sans CJK KR"/>
-              </a:defRPr>
-            </a:pPr>
-            <a:r>
-              <a:t>/scan과 /imu/data의 hz를 표로 기록하고 SDF update_rate 10/100 Hz와 비교한다.</a:t>
-            </a:r>
+          <a:bodyPr rtlCol="0" anchor="ctr"/>
+          <a:lstStyle/>
+          <a:p>
+            <a:pPr algn="ctr"/>
           </a:p>
         </p:txBody>
       </p:sp>
@@ -11986,8 +11997,8 @@
         </p:nvSpPr>
         <p:spPr>
           <a:xfrm>
-            <a:off x="877824" y="4590288"/>
-            <a:ext cx="10241280" cy="594360"/>
+            <a:off x="896112" y="1901952"/>
+            <a:ext cx="2926080" cy="274320"/>
           </a:xfrm>
           <a:prstGeom prst="rect">
             <a:avLst/>
@@ -12000,11 +12011,220 @@
           </a:bodyPr>
           <a:lstStyle/>
           <a:p>
+            <a:pPr algn="l">
+              <a:spcAft>
+                <a:spcPts val="0"/>
+              </a:spcAft>
+              <a:defRPr sz="1800" b="1">
+                <a:solidFill>
+                  <a:srgbClr val="BE3B3B"/>
+                </a:solidFill>
+                <a:latin typeface="Noto Sans CJK KR"/>
+              </a:defRPr>
+            </a:pPr>
+            <a:r>
+              <a:t>증상 1: ROS 노드 시간이 안 감</a:t>
+            </a:r>
+          </a:p>
+        </p:txBody>
+      </p:sp>
+      <p:sp>
+        <p:nvSpPr>
+          <p:cNvPr id="9" name="TextBox 8"/>
+          <p:cNvSpPr txBox="1"/>
+          <p:nvPr/>
+        </p:nvSpPr>
+        <p:spPr>
+          <a:xfrm>
+            <a:off x="3794760" y="1883664"/>
+            <a:ext cx="7543800" cy="621792"/>
+          </a:xfrm>
+          <a:prstGeom prst="rect">
+            <a:avLst/>
+          </a:prstGeom>
+          <a:noFill/>
+        </p:spPr>
+        <p:txBody>
+          <a:bodyPr wrap="square" lIns="73152" rIns="73152" tIns="36576" bIns="36576">
+            <a:spAutoFit/>
+          </a:bodyPr>
+          <a:lstStyle/>
+          <a:p>
+            <a:pPr algn="l">
+              <a:spcAft>
+                <a:spcPts val="0"/>
+              </a:spcAft>
+              <a:defRPr sz="1600" b="0">
+                <a:solidFill>
+                  <a:srgbClr val="122C4E"/>
+                </a:solidFill>
+                <a:latin typeface="Noto Sans CJK KR"/>
+              </a:defRPr>
+            </a:pPr>
+            <a:r>
+              <a:t>우선 확인: use_sim_time과 /clock bridge를 확인한다.</a:t>
+            </a:r>
+            <a:br/>
+            <a:r>
+              <a:t>수정 후: ros2 topic echo /clock --once</a:t>
+            </a:r>
+          </a:p>
+        </p:txBody>
+      </p:sp>
+      <p:sp>
+        <p:nvSpPr>
+          <p:cNvPr id="10" name="Rounded Rectangle 9"/>
+          <p:cNvSpPr/>
+          <p:nvPr/>
+        </p:nvSpPr>
+        <p:spPr>
+          <a:xfrm>
+            <a:off x="694944" y="3172968"/>
+            <a:ext cx="10972800" cy="1115568"/>
+          </a:xfrm>
+          <a:prstGeom prst="roundRect">
+            <a:avLst/>
+          </a:prstGeom>
+          <a:solidFill>
+            <a:srgbClr val="FFF7F4"/>
+          </a:solidFill>
+          <a:ln>
+            <a:solidFill>
+              <a:srgbClr val="EDBEB4"/>
+            </a:solidFill>
+          </a:ln>
+        </p:spPr>
+        <p:style>
+          <a:lnRef idx="1">
+            <a:schemeClr val="accent1"/>
+          </a:lnRef>
+          <a:fillRef idx="3">
+            <a:schemeClr val="accent1"/>
+          </a:fillRef>
+          <a:effectRef idx="2">
+            <a:schemeClr val="accent1"/>
+          </a:effectRef>
+          <a:fontRef idx="minor">
+            <a:schemeClr val="lt1"/>
+          </a:fontRef>
+        </p:style>
+        <p:txBody>
+          <a:bodyPr rtlCol="0" anchor="ctr"/>
+          <a:lstStyle/>
+          <a:p>
+            <a:pPr algn="ctr"/>
+          </a:p>
+        </p:txBody>
+      </p:sp>
+      <p:sp>
+        <p:nvSpPr>
+          <p:cNvPr id="11" name="TextBox 10"/>
+          <p:cNvSpPr txBox="1"/>
+          <p:nvPr/>
+        </p:nvSpPr>
+        <p:spPr>
+          <a:xfrm>
+            <a:off x="896112" y="3319272"/>
+            <a:ext cx="2926080" cy="274320"/>
+          </a:xfrm>
+          <a:prstGeom prst="rect">
+            <a:avLst/>
+          </a:prstGeom>
+          <a:noFill/>
+        </p:spPr>
+        <p:txBody>
+          <a:bodyPr wrap="square" lIns="73152" rIns="73152" tIns="36576" bIns="36576">
+            <a:spAutoFit/>
+          </a:bodyPr>
+          <a:lstStyle/>
+          <a:p>
+            <a:pPr algn="l">
+              <a:spcAft>
+                <a:spcPts val="0"/>
+              </a:spcAft>
+              <a:defRPr sz="1800" b="1">
+                <a:solidFill>
+                  <a:srgbClr val="BE3B3B"/>
+                </a:solidFill>
+                <a:latin typeface="Noto Sans CJK KR"/>
+              </a:defRPr>
+            </a:pPr>
+            <a:r>
+              <a:t>증상 2: topic은 있는데 subscriber가 못 받음</a:t>
+            </a:r>
+          </a:p>
+        </p:txBody>
+      </p:sp>
+      <p:sp>
+        <p:nvSpPr>
+          <p:cNvPr id="12" name="TextBox 11"/>
+          <p:cNvSpPr txBox="1"/>
+          <p:nvPr/>
+        </p:nvSpPr>
+        <p:spPr>
+          <a:xfrm>
+            <a:off x="3794760" y="3300984"/>
+            <a:ext cx="7543800" cy="621792"/>
+          </a:xfrm>
+          <a:prstGeom prst="rect">
+            <a:avLst/>
+          </a:prstGeom>
+          <a:noFill/>
+        </p:spPr>
+        <p:txBody>
+          <a:bodyPr wrap="square" lIns="73152" rIns="73152" tIns="36576" bIns="36576">
+            <a:spAutoFit/>
+          </a:bodyPr>
+          <a:lstStyle/>
+          <a:p>
+            <a:pPr algn="l">
+              <a:spcAft>
+                <a:spcPts val="0"/>
+              </a:spcAft>
+              <a:defRPr sz="1600" b="0">
+                <a:solidFill>
+                  <a:srgbClr val="122C4E"/>
+                </a:solidFill>
+                <a:latin typeface="Noto Sans CJK KR"/>
+              </a:defRPr>
+            </a:pPr>
+            <a:r>
+              <a:t>우선 확인: publisher/subscriber QoS reliability 호환을 확인한다.</a:t>
+            </a:r>
+            <a:br/>
+            <a:r>
+              <a:t>수정 후: ros2 topic echo /clock --once</a:t>
+            </a:r>
+          </a:p>
+        </p:txBody>
+      </p:sp>
+      <p:sp>
+        <p:nvSpPr>
+          <p:cNvPr id="13" name="TextBox 12"/>
+          <p:cNvSpPr txBox="1"/>
+          <p:nvPr/>
+        </p:nvSpPr>
+        <p:spPr>
+          <a:xfrm>
+            <a:off x="822960" y="5102352"/>
+            <a:ext cx="10607040" cy="402336"/>
+          </a:xfrm>
+          <a:prstGeom prst="rect">
+            <a:avLst/>
+          </a:prstGeom>
+          <a:noFill/>
+        </p:spPr>
+        <p:txBody>
+          <a:bodyPr wrap="square" lIns="73152" rIns="73152" tIns="36576" bIns="36576">
+            <a:spAutoFit/>
+          </a:bodyPr>
+          <a:lstStyle/>
+          <a:p>
             <a:pPr algn="ctr">
               <a:spcAft>
                 <a:spcPts val="0"/>
               </a:spcAft>
-              <a:defRPr sz="1900" b="1">
+              <a:defRPr sz="1800" b="1">
                 <a:solidFill>
                   <a:srgbClr val="DB7E22"/>
                 </a:solidFill>
@@ -12012,7 +12232,7 @@
               </a:defRPr>
             </a:pPr>
             <a:r>
-              <a:t>기록할 것: 바꾼 값(단위) · 기대한 변화 · 실제 출력/화면 · 원래 값으로 되돌린 결과</a:t>
+              <a:t>공통 순서: ① 현재 폴더 ② source ③ 파일 경로 ④ 이름/타입/단위 ⑤ build·source 후 재실행</a:t>
             </a:r>
           </a:p>
         </p:txBody>
@@ -12069,7 +12289,7 @@
               </a:defRPr>
             </a:pPr>
             <a:r>
-              <a:t>체크포인트를 저장하고 다음 모듈로 넘긴다</a:t>
+              <a:t>미니 실습: 값 하나를 바꾸고 결과를 비교한다</a:t>
             </a:r>
           </a:p>
         </p:txBody>
@@ -12108,7 +12328,7 @@
               </a:defRPr>
             </a:pPr>
             <a:r>
-              <a:t>현재 Complete는 다음 Starter의 기준선입니다.</a:t>
+              <a:t>정상 결과를 만든 뒤에는 한 번에 하나의 값만 바꿉니다.</a:t>
             </a:r>
           </a:p>
         </p:txBody>
@@ -12244,7 +12464,7 @@
               </a:defRPr>
             </a:pPr>
             <a:r>
-              <a:t>현재 단계 체크포인트    |    현재 폴더 ~/agv_ws    |    현재 터미널</a:t>
+              <a:t>현재 단계 미니 실습    |    현재 폴더 ~/agv_ws    |    현재 터미널</a:t>
             </a:r>
           </a:p>
         </p:txBody>
@@ -12257,18 +12477,18 @@
         </p:nvSpPr>
         <p:spPr>
           <a:xfrm>
-            <a:off x="685800" y="1737360"/>
-            <a:ext cx="10972800" cy="3611880"/>
+            <a:off x="749808" y="1874519"/>
+            <a:ext cx="10652760" cy="1993392"/>
           </a:xfrm>
           <a:prstGeom prst="roundRect">
             <a:avLst/>
           </a:prstGeom>
           <a:solidFill>
-            <a:srgbClr val="F4F7FB"/>
+            <a:srgbClr val="FFF8EB"/>
           </a:solidFill>
           <a:ln>
             <a:solidFill>
-              <a:srgbClr val="D2DCE8"/>
+              <a:srgbClr val="ECC680"/>
             </a:solidFill>
           </a:ln>
         </p:spPr>
@@ -12287,10 +12507,23 @@
           </a:fontRef>
         </p:style>
         <p:txBody>
-          <a:bodyPr rtlCol="0" anchor="ctr"/>
-          <a:lstStyle/>
-          <a:p>
-            <a:pPr algn="ctr"/>
+          <a:bodyPr rtlCol="0" anchor="ctr" wrap="square" lIns="73152" rIns="73152" tIns="36576" bIns="36576"/>
+          <a:lstStyle/>
+          <a:p>
+            <a:pPr algn="ctr">
+              <a:spcAft>
+                <a:spcPts val="0"/>
+              </a:spcAft>
+              <a:defRPr sz="2300" b="1">
+                <a:solidFill>
+                  <a:srgbClr val="122C4E"/>
+                </a:solidFill>
+                <a:latin typeface="Noto Sans CJK KR"/>
+              </a:defRPr>
+            </a:pPr>
+            <a:r>
+              <a:t>/scan과 /imu/data의 hz를 표로 기록하고 SDF update_rate 10/100 Hz와 비교한다.</a:t>
+            </a:r>
           </a:p>
         </p:txBody>
       </p:sp>
@@ -12302,111 +12535,8 @@
         </p:nvSpPr>
         <p:spPr>
           <a:xfrm>
-            <a:off x="896112" y="1993392"/>
-            <a:ext cx="10332720" cy="2971800"/>
-          </a:xfrm>
-          <a:prstGeom prst="rect">
-            <a:avLst/>
-          </a:prstGeom>
-          <a:noFill/>
-        </p:spPr>
-        <p:txBody>
-          <a:bodyPr wrap="square" lIns="109728" rIns="109728">
-            <a:spAutoFit/>
-          </a:bodyPr>
-          <a:lstStyle/>
-          <a:p>
-            <a:pPr>
-              <a:spcAft>
-                <a:spcPts val="800"/>
-              </a:spcAft>
-              <a:defRPr sz="1800">
-                <a:solidFill>
-                  <a:srgbClr val="122C4E"/>
-                </a:solidFill>
-                <a:latin typeface="Noto Sans CJK KR"/>
-              </a:defRPr>
-            </a:pPr>
-            <a:r>
-              <a:t>• □ 완료 화면: 모든 sensor 노드가 같은 시뮬레이션 시간과 기대 publish rate를 사용한다.</a:t>
-            </a:r>
-          </a:p>
-          <a:p>
-            <a:pPr>
-              <a:spcAft>
-                <a:spcPts val="800"/>
-              </a:spcAft>
-              <a:defRPr sz="1800">
-                <a:solidFill>
-                  <a:srgbClr val="122C4E"/>
-                </a:solidFill>
-                <a:latin typeface="Noto Sans CJK KR"/>
-              </a:defRPr>
-            </a:pPr>
-            <a:r>
-              <a:t>• □ Complete 파일: blocks/D_sensors/M15_sensor_operations/complete/</a:t>
-            </a:r>
-          </a:p>
-          <a:p>
-            <a:pPr>
-              <a:spcAft>
-                <a:spcPts val="800"/>
-              </a:spcAft>
-              <a:defRPr sz="1800">
-                <a:solidFill>
-                  <a:srgbClr val="122C4E"/>
-                </a:solidFill>
-                <a:latin typeface="Noto Sans CJK KR"/>
-              </a:defRPr>
-            </a:pPr>
-            <a:r>
-              <a:t>• □ 정상 로그·캡처: logs/validation.log, screenshots/validation_terminal.png</a:t>
-            </a:r>
-          </a:p>
-          <a:p>
-            <a:pPr>
-              <a:spcAft>
-                <a:spcPts val="800"/>
-              </a:spcAft>
-              <a:defRPr sz="1800">
-                <a:solidFill>
-                  <a:srgbClr val="122C4E"/>
-                </a:solidFill>
-                <a:latin typeface="Noto Sans CJK KR"/>
-              </a:defRPr>
-            </a:pPr>
-            <a:r>
-              <a:t>• □ 버전 식별: CHECKSUM_or_TAG.txt의 SHA-256 manifest</a:t>
-            </a:r>
-          </a:p>
-          <a:p>
-            <a:pPr>
-              <a:spcAft>
-                <a:spcPts val="800"/>
-              </a:spcAft>
-              <a:defRPr sz="1800">
-                <a:solidFill>
-                  <a:srgbClr val="122C4E"/>
-                </a:solidFill>
-                <a:latin typeface="Noto Sans CJK KR"/>
-              </a:defRPr>
-            </a:pPr>
-            <a:r>
-              <a:t>• □ 다음 시작 조건: M16 제어 interface</a:t>
-            </a:r>
-          </a:p>
-        </p:txBody>
-      </p:sp>
-      <p:sp>
-        <p:nvSpPr>
-          <p:cNvPr id="9" name="TextBox 8"/>
-          <p:cNvSpPr txBox="1"/>
-          <p:nvPr/>
-        </p:nvSpPr>
-        <p:spPr>
-          <a:xfrm>
-            <a:off x="868680" y="5596128"/>
-            <a:ext cx="10515600" cy="338328"/>
+            <a:off x="877824" y="4590288"/>
+            <a:ext cx="10241280" cy="594360"/>
           </a:xfrm>
           <a:prstGeom prst="rect">
             <a:avLst/>
@@ -12423,15 +12553,15 @@
               <a:spcAft>
                 <a:spcPts val="0"/>
               </a:spcAft>
-              <a:defRPr sz="1700" b="1">
-                <a:solidFill>
-                  <a:srgbClr val="2A8B5A"/>
-                </a:solidFill>
-                <a:latin typeface="Noto Sans CJK KR"/>
-              </a:defRPr>
-            </a:pPr>
-            <a:r>
-              <a:t>다음 모듈을 시작하기 전, 이 슬라이드의 Complete와 다음 모듈의 Starter를 비교합니다.</a:t>
+              <a:defRPr sz="1900" b="1">
+                <a:solidFill>
+                  <a:srgbClr val="DB7E22"/>
+                </a:solidFill>
+                <a:latin typeface="Noto Sans CJK KR"/>
+              </a:defRPr>
+            </a:pPr>
+            <a:r>
+              <a:t>기록할 것: 바꾼 값(단위) · 기대한 변화 · 실제 출력/화면 · 원래 값으로 되돌린 결과</a:t>
             </a:r>
           </a:p>
         </p:txBody>
@@ -12488,6 +12618,425 @@
               </a:defRPr>
             </a:pPr>
             <a:r>
+              <a:t>체크포인트를 저장하고 다음 모듈로 넘긴다</a:t>
+            </a:r>
+          </a:p>
+        </p:txBody>
+      </p:sp>
+      <p:sp>
+        <p:nvSpPr>
+          <p:cNvPr id="3" name="TextBox 2"/>
+          <p:cNvSpPr txBox="1"/>
+          <p:nvPr/>
+        </p:nvSpPr>
+        <p:spPr>
+          <a:xfrm>
+            <a:off x="603504" y="859536"/>
+            <a:ext cx="10698480" cy="292608"/>
+          </a:xfrm>
+          <a:prstGeom prst="rect">
+            <a:avLst/>
+          </a:prstGeom>
+          <a:noFill/>
+        </p:spPr>
+        <p:txBody>
+          <a:bodyPr wrap="square" lIns="73152" rIns="73152" tIns="36576" bIns="36576">
+            <a:spAutoFit/>
+          </a:bodyPr>
+          <a:lstStyle/>
+          <a:p>
+            <a:pPr algn="l">
+              <a:spcAft>
+                <a:spcPts val="0"/>
+              </a:spcAft>
+              <a:defRPr sz="1700" b="0">
+                <a:solidFill>
+                  <a:srgbClr val="5C6672"/>
+                </a:solidFill>
+                <a:latin typeface="Noto Sans CJK KR"/>
+              </a:defRPr>
+            </a:pPr>
+            <a:r>
+              <a:t>현재 Complete는 다음 Starter의 기준선입니다.</a:t>
+            </a:r>
+          </a:p>
+        </p:txBody>
+      </p:sp>
+      <p:sp>
+        <p:nvSpPr>
+          <p:cNvPr id="4" name="TextBox 3"/>
+          <p:cNvSpPr txBox="1"/>
+          <p:nvPr/>
+        </p:nvSpPr>
+        <p:spPr>
+          <a:xfrm>
+            <a:off x="530352" y="6510528"/>
+            <a:ext cx="7772400" cy="201168"/>
+          </a:xfrm>
+          <a:prstGeom prst="rect">
+            <a:avLst/>
+          </a:prstGeom>
+          <a:noFill/>
+        </p:spPr>
+        <p:txBody>
+          <a:bodyPr wrap="square" lIns="73152" rIns="73152" tIns="36576" bIns="36576">
+            <a:spAutoFit/>
+          </a:bodyPr>
+          <a:lstStyle/>
+          <a:p>
+            <a:pPr algn="l">
+              <a:spcAft>
+                <a:spcPts val="0"/>
+              </a:spcAft>
+              <a:defRPr sz="1000" b="0">
+                <a:solidFill>
+                  <a:srgbClr val="5C6672"/>
+                </a:solidFill>
+                <a:latin typeface="Noto Sans CJK KR"/>
+              </a:defRPr>
+            </a:pPr>
+            <a:r>
+              <a:t>ROS 2 Jazzy · Gazebo Harmonic · M15 · 따라 하기형 AGV 실습</a:t>
+            </a:r>
+          </a:p>
+        </p:txBody>
+      </p:sp>
+      <p:sp>
+        <p:nvSpPr>
+          <p:cNvPr id="5" name="TextBox 4"/>
+          <p:cNvSpPr txBox="1"/>
+          <p:nvPr/>
+        </p:nvSpPr>
+        <p:spPr>
+          <a:xfrm>
+            <a:off x="9144000" y="6510528"/>
+            <a:ext cx="2468880" cy="201168"/>
+          </a:xfrm>
+          <a:prstGeom prst="rect">
+            <a:avLst/>
+          </a:prstGeom>
+          <a:noFill/>
+        </p:spPr>
+        <p:txBody>
+          <a:bodyPr wrap="square" lIns="73152" rIns="73152" tIns="36576" bIns="36576">
+            <a:spAutoFit/>
+          </a:bodyPr>
+          <a:lstStyle/>
+          <a:p>
+            <a:pPr algn="r">
+              <a:spcAft>
+                <a:spcPts val="0"/>
+              </a:spcAft>
+              <a:defRPr sz="1000" b="0">
+                <a:solidFill>
+                  <a:srgbClr val="5C6672"/>
+                </a:solidFill>
+                <a:latin typeface="Noto Sans CJK KR"/>
+              </a:defRPr>
+            </a:pPr>
+            <a:r>
+              <a:t>명령·파일 경로는 슬라이드에서 복사 가능</a:t>
+            </a:r>
+          </a:p>
+        </p:txBody>
+      </p:sp>
+      <p:sp>
+        <p:nvSpPr>
+          <p:cNvPr id="6" name="Rectangle 5"/>
+          <p:cNvSpPr/>
+          <p:nvPr/>
+        </p:nvSpPr>
+        <p:spPr>
+          <a:xfrm>
+            <a:off x="566928" y="1188720"/>
+            <a:ext cx="11064240" cy="347472"/>
+          </a:xfrm>
+          <a:prstGeom prst="rect">
+            <a:avLst/>
+          </a:prstGeom>
+          <a:solidFill>
+            <a:srgbClr val="F4F7FB"/>
+          </a:solidFill>
+          <a:ln>
+            <a:solidFill>
+              <a:srgbClr val="F4F7FB"/>
+            </a:solidFill>
+          </a:ln>
+        </p:spPr>
+        <p:style>
+          <a:lnRef idx="1">
+            <a:schemeClr val="accent1"/>
+          </a:lnRef>
+          <a:fillRef idx="3">
+            <a:schemeClr val="accent1"/>
+          </a:fillRef>
+          <a:effectRef idx="2">
+            <a:schemeClr val="accent1"/>
+          </a:effectRef>
+          <a:fontRef idx="minor">
+            <a:schemeClr val="lt1"/>
+          </a:fontRef>
+        </p:style>
+        <p:txBody>
+          <a:bodyPr rtlCol="0" anchor="ctr" wrap="square" lIns="73152" rIns="73152" tIns="36576" bIns="36576"/>
+          <a:lstStyle/>
+          <a:p>
+            <a:pPr algn="l">
+              <a:spcAft>
+                <a:spcPts val="0"/>
+              </a:spcAft>
+              <a:defRPr sz="1300" b="1">
+                <a:solidFill>
+                  <a:srgbClr val="122C4E"/>
+                </a:solidFill>
+                <a:latin typeface="Noto Sans CJK KR"/>
+              </a:defRPr>
+            </a:pPr>
+            <a:r>
+              <a:t>현재 단계 체크포인트    |    현재 폴더 ~/agv_ws    |    현재 터미널</a:t>
+            </a:r>
+          </a:p>
+        </p:txBody>
+      </p:sp>
+      <p:sp>
+        <p:nvSpPr>
+          <p:cNvPr id="7" name="Rounded Rectangle 6"/>
+          <p:cNvSpPr/>
+          <p:nvPr/>
+        </p:nvSpPr>
+        <p:spPr>
+          <a:xfrm>
+            <a:off x="685800" y="1737360"/>
+            <a:ext cx="10972800" cy="3611880"/>
+          </a:xfrm>
+          <a:prstGeom prst="roundRect">
+            <a:avLst/>
+          </a:prstGeom>
+          <a:solidFill>
+            <a:srgbClr val="F4F7FB"/>
+          </a:solidFill>
+          <a:ln>
+            <a:solidFill>
+              <a:srgbClr val="D2DCE8"/>
+            </a:solidFill>
+          </a:ln>
+        </p:spPr>
+        <p:style>
+          <a:lnRef idx="1">
+            <a:schemeClr val="accent1"/>
+          </a:lnRef>
+          <a:fillRef idx="3">
+            <a:schemeClr val="accent1"/>
+          </a:fillRef>
+          <a:effectRef idx="2">
+            <a:schemeClr val="accent1"/>
+          </a:effectRef>
+          <a:fontRef idx="minor">
+            <a:schemeClr val="lt1"/>
+          </a:fontRef>
+        </p:style>
+        <p:txBody>
+          <a:bodyPr rtlCol="0" anchor="ctr"/>
+          <a:lstStyle/>
+          <a:p>
+            <a:pPr algn="ctr"/>
+          </a:p>
+        </p:txBody>
+      </p:sp>
+      <p:sp>
+        <p:nvSpPr>
+          <p:cNvPr id="8" name="TextBox 7"/>
+          <p:cNvSpPr txBox="1"/>
+          <p:nvPr/>
+        </p:nvSpPr>
+        <p:spPr>
+          <a:xfrm>
+            <a:off x="896112" y="1993392"/>
+            <a:ext cx="10332720" cy="2971800"/>
+          </a:xfrm>
+          <a:prstGeom prst="rect">
+            <a:avLst/>
+          </a:prstGeom>
+          <a:noFill/>
+        </p:spPr>
+        <p:txBody>
+          <a:bodyPr wrap="square" lIns="109728" rIns="109728">
+            <a:spAutoFit/>
+          </a:bodyPr>
+          <a:lstStyle/>
+          <a:p>
+            <a:pPr>
+              <a:spcAft>
+                <a:spcPts val="800"/>
+              </a:spcAft>
+              <a:defRPr sz="1800">
+                <a:solidFill>
+                  <a:srgbClr val="122C4E"/>
+                </a:solidFill>
+                <a:latin typeface="Noto Sans CJK KR"/>
+              </a:defRPr>
+            </a:pPr>
+            <a:r>
+              <a:t>• □ 완료 화면: 모든 sensor 노드가 같은 시뮬레이션 시간과 기대 publish rate를 사용한다.</a:t>
+            </a:r>
+          </a:p>
+          <a:p>
+            <a:pPr>
+              <a:spcAft>
+                <a:spcPts val="800"/>
+              </a:spcAft>
+              <a:defRPr sz="1800">
+                <a:solidFill>
+                  <a:srgbClr val="122C4E"/>
+                </a:solidFill>
+                <a:latin typeface="Noto Sans CJK KR"/>
+              </a:defRPr>
+            </a:pPr>
+            <a:r>
+              <a:t>• □ Complete 파일: blocks/D_sensors/M15_sensor_operations/complete/</a:t>
+            </a:r>
+          </a:p>
+          <a:p>
+            <a:pPr>
+              <a:spcAft>
+                <a:spcPts val="800"/>
+              </a:spcAft>
+              <a:defRPr sz="1800">
+                <a:solidFill>
+                  <a:srgbClr val="122C4E"/>
+                </a:solidFill>
+                <a:latin typeface="Noto Sans CJK KR"/>
+              </a:defRPr>
+            </a:pPr>
+            <a:r>
+              <a:t>• □ 정상 로그·캡처: logs/validation.log, screenshots/validation_terminal.png</a:t>
+            </a:r>
+          </a:p>
+          <a:p>
+            <a:pPr>
+              <a:spcAft>
+                <a:spcPts val="800"/>
+              </a:spcAft>
+              <a:defRPr sz="1800">
+                <a:solidFill>
+                  <a:srgbClr val="122C4E"/>
+                </a:solidFill>
+                <a:latin typeface="Noto Sans CJK KR"/>
+              </a:defRPr>
+            </a:pPr>
+            <a:r>
+              <a:t>• □ 버전 식별: CHECKSUM_or_TAG.txt의 SHA-256 manifest</a:t>
+            </a:r>
+          </a:p>
+          <a:p>
+            <a:pPr>
+              <a:spcAft>
+                <a:spcPts val="800"/>
+              </a:spcAft>
+              <a:defRPr sz="1800">
+                <a:solidFill>
+                  <a:srgbClr val="122C4E"/>
+                </a:solidFill>
+                <a:latin typeface="Noto Sans CJK KR"/>
+              </a:defRPr>
+            </a:pPr>
+            <a:r>
+              <a:t>• □ 다음 시작 조건: M16 제어 interface</a:t>
+            </a:r>
+          </a:p>
+        </p:txBody>
+      </p:sp>
+      <p:sp>
+        <p:nvSpPr>
+          <p:cNvPr id="9" name="TextBox 8"/>
+          <p:cNvSpPr txBox="1"/>
+          <p:nvPr/>
+        </p:nvSpPr>
+        <p:spPr>
+          <a:xfrm>
+            <a:off x="868680" y="5596128"/>
+            <a:ext cx="10515600" cy="338328"/>
+          </a:xfrm>
+          <a:prstGeom prst="rect">
+            <a:avLst/>
+          </a:prstGeom>
+          <a:noFill/>
+        </p:spPr>
+        <p:txBody>
+          <a:bodyPr wrap="square" lIns="73152" rIns="73152" tIns="36576" bIns="36576">
+            <a:spAutoFit/>
+          </a:bodyPr>
+          <a:lstStyle/>
+          <a:p>
+            <a:pPr algn="ctr">
+              <a:spcAft>
+                <a:spcPts val="0"/>
+              </a:spcAft>
+              <a:defRPr sz="1700" b="1">
+                <a:solidFill>
+                  <a:srgbClr val="2A8B5A"/>
+                </a:solidFill>
+                <a:latin typeface="Noto Sans CJK KR"/>
+              </a:defRPr>
+            </a:pPr>
+            <a:r>
+              <a:t>다음 모듈을 시작하기 전, 이 슬라이드의 Complete와 다음 모듈의 Starter를 비교합니다.</a:t>
+            </a:r>
+          </a:p>
+        </p:txBody>
+      </p:sp>
+    </p:spTree>
+  </p:cSld>
+  <p:clrMapOvr>
+    <a:masterClrMapping/>
+  </p:clrMapOvr>
+</p:sld>
+</file>
+
+<file path=ppt/slides/slide25.xml><?xml version="1.0" encoding="utf-8"?>
+<p:sld xmlns:a="http://schemas.openxmlformats.org/drawingml/2006/main" xmlns:p="http://schemas.openxmlformats.org/presentationml/2006/main" xmlns:r="http://schemas.openxmlformats.org/officeDocument/2006/relationships">
+  <p:cSld>
+    <p:spTree>
+      <p:nvGrpSpPr>
+        <p:cNvPr id="1" name=""/>
+        <p:cNvGrpSpPr/>
+        <p:nvPr/>
+      </p:nvGrpSpPr>
+      <p:grpSpPr/>
+      <p:sp>
+        <p:nvSpPr>
+          <p:cNvPr id="2" name="TextBox 1"/>
+          <p:cNvSpPr txBox="1"/>
+          <p:nvPr/>
+        </p:nvSpPr>
+        <p:spPr>
+          <a:xfrm>
+            <a:off x="566928" y="347472"/>
+            <a:ext cx="10881360" cy="438912"/>
+          </a:xfrm>
+          <a:prstGeom prst="rect">
+            <a:avLst/>
+          </a:prstGeom>
+          <a:noFill/>
+        </p:spPr>
+        <p:txBody>
+          <a:bodyPr wrap="square" lIns="73152" rIns="73152" tIns="36576" bIns="36576">
+            <a:spAutoFit/>
+          </a:bodyPr>
+          <a:lstStyle/>
+          <a:p>
+            <a:pPr algn="l">
+              <a:spcAft>
+                <a:spcPts val="0"/>
+              </a:spcAft>
+              <a:defRPr sz="3200" b="1">
+                <a:solidFill>
+                  <a:srgbClr val="122C4E"/>
+                </a:solidFill>
+                <a:latin typeface="Noto Sans CJK KR"/>
+              </a:defRPr>
+            </a:pPr>
+            <a:r>
               <a:t>공식 참고 자료</a:t>
             </a:r>
           </a:p>
@@ -12663,7 +13212,7 @@
         </p:nvSpPr>
         <p:spPr>
           <a:xfrm>
-            <a:off x="914400" y="1810512"/>
+            <a:off x="914400" y="1773936"/>
             <a:ext cx="3840480" cy="256032"/>
           </a:xfrm>
           <a:prstGeom prst="rect">
@@ -12702,8 +13251,8 @@
         </p:nvSpPr>
         <p:spPr>
           <a:xfrm>
-            <a:off x="914400" y="2121408"/>
-            <a:ext cx="9966960" cy="256032"/>
+            <a:off x="914400" y="2048255"/>
+            <a:ext cx="9966960" cy="475488"/>
           </a:xfrm>
           <a:prstGeom prst="rect">
             <a:avLst/>
@@ -12720,7 +13269,7 @@
               <a:spcAft>
                 <a:spcPts val="0"/>
               </a:spcAft>
-              <a:defRPr sz="1200" b="0">
+              <a:defRPr sz="1000" b="0">
                 <a:solidFill>
                   <a:srgbClr val="225B9B"/>
                 </a:solidFill>
@@ -12741,7 +13290,7 @@
         </p:nvSpPr>
         <p:spPr>
           <a:xfrm>
-            <a:off x="914400" y="2816352"/>
+            <a:off x="914400" y="2852928"/>
             <a:ext cx="3840480" cy="256032"/>
           </a:xfrm>
           <a:prstGeom prst="rect">
@@ -12781,7 +13330,7 @@
         <p:spPr>
           <a:xfrm>
             <a:off x="914400" y="3127248"/>
-            <a:ext cx="9966960" cy="256032"/>
+            <a:ext cx="9966960" cy="475488"/>
           </a:xfrm>
           <a:prstGeom prst="rect">
             <a:avLst/>
@@ -12798,7 +13347,7 @@
               <a:spcAft>
                 <a:spcPts val="0"/>
               </a:spcAft>
-              <a:defRPr sz="1200" b="0">
+              <a:defRPr sz="1000" b="0">
                 <a:solidFill>
                   <a:srgbClr val="225B9B"/>
                 </a:solidFill>
@@ -12819,7 +13368,7 @@
         </p:nvSpPr>
         <p:spPr>
           <a:xfrm>
-            <a:off x="914400" y="3822191"/>
+            <a:off x="914400" y="3931920"/>
             <a:ext cx="3840480" cy="256032"/>
           </a:xfrm>
           <a:prstGeom prst="rect">
@@ -12858,8 +13407,8 @@
         </p:nvSpPr>
         <p:spPr>
           <a:xfrm>
-            <a:off x="914400" y="4133087"/>
-            <a:ext cx="9966960" cy="256032"/>
+            <a:off x="914400" y="4206240"/>
+            <a:ext cx="9966960" cy="475488"/>
           </a:xfrm>
           <a:prstGeom prst="rect">
             <a:avLst/>
@@ -12876,7 +13425,7 @@
               <a:spcAft>
                 <a:spcPts val="0"/>
               </a:spcAft>
-              <a:defRPr sz="1200" b="0">
+              <a:defRPr sz="1000" b="0">
                 <a:solidFill>
                   <a:srgbClr val="225B9B"/>
                 </a:solidFill>
@@ -12897,7 +13446,7 @@
         </p:nvSpPr>
         <p:spPr>
           <a:xfrm>
-            <a:off x="914400" y="4828032"/>
+            <a:off x="914400" y="5010912"/>
             <a:ext cx="3840480" cy="256032"/>
           </a:xfrm>
           <a:prstGeom prst="rect">
@@ -12936,8 +13485,8 @@
         </p:nvSpPr>
         <p:spPr>
           <a:xfrm>
-            <a:off x="914400" y="5138928"/>
-            <a:ext cx="9966960" cy="256032"/>
+            <a:off x="914400" y="5285232"/>
+            <a:ext cx="9966960" cy="475488"/>
           </a:xfrm>
           <a:prstGeom prst="rect">
             <a:avLst/>
@@ -12954,7 +13503,7 @@
               <a:spcAft>
                 <a:spcPts val="0"/>
               </a:spcAft>
-              <a:defRPr sz="1200" b="0">
+              <a:defRPr sz="1000" b="0">
                 <a:solidFill>
                   <a:srgbClr val="225B9B"/>
                 </a:solidFill>
@@ -15700,8 +16249,8 @@
         </p:nvSpPr>
         <p:spPr>
           <a:xfrm>
-            <a:off x="658368" y="1682496"/>
-            <a:ext cx="10972800" cy="347472"/>
+            <a:off x="658368" y="1627632"/>
+            <a:ext cx="10972800" cy="256032"/>
           </a:xfrm>
           <a:prstGeom prst="rect">
             <a:avLst/>
@@ -15718,7 +16267,7 @@
               <a:spcAft>
                 <a:spcPts val="0"/>
               </a:spcAft>
-              <a:defRPr sz="1700" b="1">
+              <a:defRPr sz="1500" b="1">
                 <a:solidFill>
                   <a:srgbClr val="122C4E"/>
                 </a:solidFill>
@@ -15739,8 +16288,8 @@
         </p:nvSpPr>
         <p:spPr>
           <a:xfrm>
-            <a:off x="658368" y="2103120"/>
-            <a:ext cx="10972800" cy="493776"/>
+            <a:off x="658368" y="1956816"/>
+            <a:ext cx="10972800" cy="603504"/>
           </a:xfrm>
           <a:prstGeom prst="rect">
             <a:avLst/>
@@ -15784,7 +16333,11 @@
               </a:defRPr>
             </a:pPr>
             <a:r>
-              <a:t>파일 생성/열기: mkdir -p ~/agv_ws/src/agv_bringup/config    &amp;&amp;    nano ~/agv_ws/src/agv_bringup/config/sensors.yaml</a:t>
+              <a:t>파일 생성: mkdir -p ~/agv_ws/src/agv_bringup/config</a:t>
+            </a:r>
+            <a:br/>
+            <a:r>
+              <a:t>파일 열기: nano ~/agv_ws/src/agv_bringup/config/sensors.yaml</a:t>
             </a:r>
           </a:p>
         </p:txBody>
@@ -15797,8 +16350,8 @@
         </p:nvSpPr>
         <p:spPr>
           <a:xfrm>
-            <a:off x="658368" y="2761488"/>
-            <a:ext cx="10972800" cy="3383280"/>
+            <a:off x="658368" y="2706624"/>
+            <a:ext cx="10972800" cy="3364992"/>
           </a:xfrm>
           <a:prstGeom prst="rect">
             <a:avLst/>
@@ -15879,7 +16432,7 @@
         </p:nvSpPr>
         <p:spPr>
           <a:xfrm>
-            <a:off x="749808" y="6199632"/>
+            <a:off x="749808" y="6181344"/>
             <a:ext cx="10789920" cy="201168"/>
           </a:xfrm>
           <a:prstGeom prst="rect">

--- a/blocks/D_sensors/M15_sensor_operations/M15_센서_운영과_동기화.pptx
+++ b/blocks/D_sensors/M15_sensor_operations/M15_센서_운영과_동기화.pptx
@@ -30,6 +30,7 @@
     <p:sldId id="278" r:id="rId30"/>
     <p:sldId id="279" r:id="rId31"/>
     <p:sldId id="280" r:id="rId32"/>
+    <p:sldId id="281" r:id="rId33"/>
   </p:sldIdLst>
   <p:sldSz cx="12191999" cy="6858000" type="screen4x3"/>
   <p:notesSz cx="6858000" cy="9144000"/>
@@ -616,12 +617,12 @@
           <a:lstStyle/>
           <a:p>
             <a:r>
-              <a:t>[설명] ~/agv_ws/src/agv_gazebo/config/bridge.yaml의 전체 파일을 1/3 구간으로 작성한다.</a:t>
-            </a:r>
-          </a:p>
-          <a:p>
-            <a:r>
-              <a:t>[실행] nano ~/agv_ws/src/agv_gazebo/config/bridge.yaml</a:t>
+              <a:t>[설명] ~/ros2_curri/agv_ws/src/agv_gazebo/config/bridge.yaml의 전체 파일을 1/3 구간으로 작성한다.</a:t>
+            </a:r>
+          </a:p>
+          <a:p>
+            <a:r>
+              <a:t>[실행] nano ~/ros2_curri/agv_ws/src/agv_gazebo/config/bridge.yaml</a:t>
             </a:r>
           </a:p>
           <a:p>
@@ -706,12 +707,12 @@
           <a:lstStyle/>
           <a:p>
             <a:r>
-              <a:t>[설명] ~/agv_ws/src/agv_gazebo/config/bridge.yaml의 전체 파일을 2/3 구간으로 작성한다.</a:t>
-            </a:r>
-          </a:p>
-          <a:p>
-            <a:r>
-              <a:t>[실행] nano ~/agv_ws/src/agv_gazebo/config/bridge.yaml</a:t>
+              <a:t>[설명] ~/ros2_curri/agv_ws/src/agv_gazebo/config/bridge.yaml의 전체 파일을 2/3 구간으로 작성한다.</a:t>
+            </a:r>
+          </a:p>
+          <a:p>
+            <a:r>
+              <a:t>[실행] nano ~/ros2_curri/agv_ws/src/agv_gazebo/config/bridge.yaml</a:t>
             </a:r>
           </a:p>
           <a:p>
@@ -796,12 +797,12 @@
           <a:lstStyle/>
           <a:p>
             <a:r>
-              <a:t>[설명] ~/agv_ws/src/agv_gazebo/config/bridge.yaml의 전체 파일을 3/3 구간으로 작성한다.</a:t>
-            </a:r>
-          </a:p>
-          <a:p>
-            <a:r>
-              <a:t>[실행] nano ~/agv_ws/src/agv_gazebo/config/bridge.yaml</a:t>
+              <a:t>[설명] ~/ros2_curri/agv_ws/src/agv_gazebo/config/bridge.yaml의 전체 파일을 3/3 구간으로 작성한다.</a:t>
+            </a:r>
+          </a:p>
+          <a:p>
+            <a:r>
+              <a:t>[실행] nano ~/ros2_curri/agv_ws/src/agv_gazebo/config/bridge.yaml</a:t>
             </a:r>
           </a:p>
           <a:p>
@@ -886,12 +887,12 @@
           <a:lstStyle/>
           <a:p>
             <a:r>
-              <a:t>[설명] ~/agv_ws/src/agv_sensors/agv_sensors/lidar_processor.py의 전체 파일을 1/3 구간으로 작성한다.</a:t>
-            </a:r>
-          </a:p>
-          <a:p>
-            <a:r>
-              <a:t>[실행] nano ~/agv_ws/src/agv_sensors/agv_sensors/lidar_processor.py</a:t>
+              <a:t>[설명] ~/ros2_curri/agv_ws/src/agv_sensors/agv_sensors/lidar_processor.py의 전체 파일을 1/3 구간으로 작성한다.</a:t>
+            </a:r>
+          </a:p>
+          <a:p>
+            <a:r>
+              <a:t>[실행] nano ~/ros2_curri/agv_ws/src/agv_sensors/agv_sensors/lidar_processor.py</a:t>
             </a:r>
           </a:p>
           <a:p>
@@ -976,12 +977,12 @@
           <a:lstStyle/>
           <a:p>
             <a:r>
-              <a:t>[설명] ~/agv_ws/src/agv_sensors/agv_sensors/lidar_processor.py의 전체 파일을 2/3 구간으로 작성한다.</a:t>
-            </a:r>
-          </a:p>
-          <a:p>
-            <a:r>
-              <a:t>[실행] nano ~/agv_ws/src/agv_sensors/agv_sensors/lidar_processor.py</a:t>
+              <a:t>[설명] ~/ros2_curri/agv_ws/src/agv_sensors/agv_sensors/lidar_processor.py의 전체 파일을 2/3 구간으로 작성한다.</a:t>
+            </a:r>
+          </a:p>
+          <a:p>
+            <a:r>
+              <a:t>[실행] nano ~/ros2_curri/agv_ws/src/agv_sensors/agv_sensors/lidar_processor.py</a:t>
             </a:r>
           </a:p>
           <a:p>
@@ -1066,12 +1067,12 @@
           <a:lstStyle/>
           <a:p>
             <a:r>
-              <a:t>[설명] ~/agv_ws/src/agv_sensors/agv_sensors/lidar_processor.py의 전체 파일을 3/3 구간으로 작성한다.</a:t>
-            </a:r>
-          </a:p>
-          <a:p>
-            <a:r>
-              <a:t>[실행] nano ~/agv_ws/src/agv_sensors/agv_sensors/lidar_processor.py</a:t>
+              <a:t>[설명] ~/ros2_curri/agv_ws/src/agv_sensors/agv_sensors/lidar_processor.py의 전체 파일을 3/3 구간으로 작성한다.</a:t>
+            </a:r>
+          </a:p>
+          <a:p>
+            <a:r>
+              <a:t>[실행] nano ~/ros2_curri/agv_ws/src/agv_sensors/agv_sensors/lidar_processor.py</a:t>
             </a:r>
           </a:p>
           <a:p>
@@ -1156,12 +1157,12 @@
           <a:lstStyle/>
           <a:p>
             <a:r>
-              <a:t>[설명] ~/agv_ws/src/agv_sensors/agv_sensors/imu_monitor.py의 전체 파일을 1/3 구간으로 작성한다.</a:t>
-            </a:r>
-          </a:p>
-          <a:p>
-            <a:r>
-              <a:t>[실행] nano ~/agv_ws/src/agv_sensors/agv_sensors/imu_monitor.py</a:t>
+              <a:t>[설명] ~/ros2_curri/agv_ws/src/agv_sensors/agv_sensors/imu_monitor.py의 전체 파일을 1/3 구간으로 작성한다.</a:t>
+            </a:r>
+          </a:p>
+          <a:p>
+            <a:r>
+              <a:t>[실행] nano ~/ros2_curri/agv_ws/src/agv_sensors/agv_sensors/imu_monitor.py</a:t>
             </a:r>
           </a:p>
           <a:p>
@@ -1246,12 +1247,12 @@
           <a:lstStyle/>
           <a:p>
             <a:r>
-              <a:t>[설명] ~/agv_ws/src/agv_sensors/agv_sensors/imu_monitor.py의 전체 파일을 2/3 구간으로 작성한다.</a:t>
-            </a:r>
-          </a:p>
-          <a:p>
-            <a:r>
-              <a:t>[실행] nano ~/agv_ws/src/agv_sensors/agv_sensors/imu_monitor.py</a:t>
+              <a:t>[설명] ~/ros2_curri/agv_ws/src/agv_sensors/agv_sensors/imu_monitor.py의 전체 파일을 2/3 구간으로 작성한다.</a:t>
+            </a:r>
+          </a:p>
+          <a:p>
+            <a:r>
+              <a:t>[실행] nano ~/ros2_curri/agv_ws/src/agv_sensors/agv_sensors/imu_monitor.py</a:t>
             </a:r>
           </a:p>
           <a:p>
@@ -1336,12 +1337,12 @@
           <a:lstStyle/>
           <a:p>
             <a:r>
-              <a:t>[설명] ~/agv_ws/src/agv_sensors/agv_sensors/imu_monitor.py의 전체 파일을 3/3 구간으로 작성한다.</a:t>
-            </a:r>
-          </a:p>
-          <a:p>
-            <a:r>
-              <a:t>[실행] nano ~/agv_ws/src/agv_sensors/agv_sensors/imu_monitor.py</a:t>
+              <a:t>[설명] ~/ros2_curri/agv_ws/src/agv_sensors/agv_sensors/imu_monitor.py의 전체 파일을 3/3 구간으로 작성한다.</a:t>
+            </a:r>
+          </a:p>
+          <a:p>
+            <a:r>
+              <a:t>[실행] nano ~/ros2_curri/agv_ws/src/agv_sensors/agv_sensors/imu_monitor.py</a:t>
             </a:r>
           </a:p>
           <a:p>
@@ -1696,32 +1697,17 @@
           <a:lstStyle/>
           <a:p>
             <a:r>
-              <a:t>[설명] 검증 명령은 GUI 결과와 별도로 실행해 재현 가능한 완료 기준을 만든다.</a:t>
-            </a:r>
-          </a:p>
-          <a:p>
-            <a:r>
-              <a:t>[실행] ros2 topic echo /clock --once</a:t>
-            </a:r>
-          </a:p>
-          <a:p>
-            <a:r>
-              <a:t>ros2 topic hz /scan</a:t>
-            </a:r>
-          </a:p>
-          <a:p>
-            <a:r>
-              <a:t>ros2 topic hz /imu/data</a:t>
-            </a:r>
-          </a:p>
-          <a:p>
-            <a:r>
-              <a:t>ros2 param get /lidar_processor use_sim_time</a:t>
-            </a:r>
-          </a:p>
-          <a:p>
-            <a:r>
-              <a:t>[확인] 모든 sensor 노드가 같은 시뮬레이션 시간과 기대 publish rate를 사용한다.</a:t>
+              <a:t>[설명] 실제 Ubuntu/ROS 2 환경에서 생성한 검증 화면이다.</a:t>
+            </a:r>
+          </a:p>
+          <a:p>
+            <a:r>
+              <a:t>[실행] 슬라이드의 명령 또는 파일 작성 단계를 진행한다.</a:t>
+            </a:r>
+          </a:p>
+          <a:p>
+            <a:r>
+              <a:t>[확인] 캡처의 명령과 다음 슬라이드의 검증 명령을 비교한다.</a:t>
             </a:r>
           </a:p>
           <a:p>
@@ -1801,17 +1787,32 @@
           <a:lstStyle/>
           <a:p>
             <a:r>
-              <a:t>[설명] 오류를 대신 해결하지 말고 증상부터 우선 확인 순서대로 교육생이 실행하게 한다.</a:t>
-            </a:r>
-          </a:p>
-          <a:p>
-            <a:r>
-              <a:t>[실행] 슬라이드의 명령 또는 파일 작성 단계를 진행한다.</a:t>
-            </a:r>
-          </a:p>
-          <a:p>
-            <a:r>
-              <a:t>[확인] 수정 뒤 첫 검증 명령을 다시 실행한다.</a:t>
+              <a:t>[설명] 검증 명령은 GUI 결과와 별도로 실행해 재현 가능한 완료 기준을 만든다.</a:t>
+            </a:r>
+          </a:p>
+          <a:p>
+            <a:r>
+              <a:t>[실행] ros2 topic echo /clock --once</a:t>
+            </a:r>
+          </a:p>
+          <a:p>
+            <a:r>
+              <a:t>ros2 topic hz /scan</a:t>
+            </a:r>
+          </a:p>
+          <a:p>
+            <a:r>
+              <a:t>ros2 topic hz /imu/data</a:t>
+            </a:r>
+          </a:p>
+          <a:p>
+            <a:r>
+              <a:t>ros2 param get /lidar_processor use_sim_time</a:t>
+            </a:r>
+          </a:p>
+          <a:p>
+            <a:r>
+              <a:t>[확인] 모든 sensor 노드가 같은 시뮬레이션 시간과 기대 publish rate를 사용한다.</a:t>
             </a:r>
           </a:p>
           <a:p>
@@ -1821,7 +1822,7 @@
           </a:p>
           <a:p>
             <a:r>
-              <a:t>[오류] 슬라이드의 두 대표 오류를 먼저 사용한다.</a:t>
+              <a:t>[오류] 오류가 나면 현재 폴더, source, 파일 경로를 먼저 확인한다.</a:t>
             </a:r>
           </a:p>
         </p:txBody>
@@ -1891,7 +1892,7 @@
           <a:lstStyle/>
           <a:p>
             <a:r>
-              <a:t>[설명] 교육생이 직접 한 값만 바꿔 원인과 결과를 연결하게 한다.</a:t>
+              <a:t>[설명] 오류를 대신 해결하지 말고 증상부터 우선 확인 순서대로 교육생이 실행하게 한다.</a:t>
             </a:r>
           </a:p>
           <a:p>
@@ -1901,7 +1902,7 @@
           </a:p>
           <a:p>
             <a:r>
-              <a:t>[확인] 원래 값과 변경 값을 모두 기록한다.</a:t>
+              <a:t>[확인] 수정 뒤 첫 검증 명령을 다시 실행한다.</a:t>
             </a:r>
           </a:p>
           <a:p>
@@ -1911,7 +1912,7 @@
           </a:p>
           <a:p>
             <a:r>
-              <a:t>[오류] 오류가 나면 현재 폴더, source, 파일 경로를 먼저 확인한다.</a:t>
+              <a:t>[오류] 슬라이드의 두 대표 오류를 먼저 사용한다.</a:t>
             </a:r>
           </a:p>
         </p:txBody>
@@ -1981,7 +1982,7 @@
           <a:lstStyle/>
           <a:p>
             <a:r>
-              <a:t>[설명] 교육생이 Complete·캡처·로그를 저장했는지 확인하고 다음 모듈의 시작 상태를 읽는다.</a:t>
+              <a:t>[설명] 교육생이 직접 한 값만 바꿔 원인과 결과를 연결하게 한다.</a:t>
             </a:r>
           </a:p>
           <a:p>
@@ -1991,7 +1992,7 @@
           </a:p>
           <a:p>
             <a:r>
-              <a:t>[확인] M16 제어 interface 시작 조건을 말할 수 있다.</a:t>
+              <a:t>[확인] 원래 값과 변경 값을 모두 기록한다.</a:t>
             </a:r>
           </a:p>
           <a:p>
@@ -2071,6 +2072,96 @@
           <a:lstStyle/>
           <a:p>
             <a:r>
+              <a:t>[설명] 교육생이 Complete·캡처·로그를 저장했는지 확인하고 다음 모듈의 시작 상태를 읽는다.</a:t>
+            </a:r>
+          </a:p>
+          <a:p>
+            <a:r>
+              <a:t>[실행] 슬라이드의 명령 또는 파일 작성 단계를 진행한다.</a:t>
+            </a:r>
+          </a:p>
+          <a:p>
+            <a:r>
+              <a:t>[확인] M16 제어 interface 시작 조건을 말할 수 있다.</a:t>
+            </a:r>
+          </a:p>
+          <a:p>
+            <a:r>
+              <a:t>[멈춤] 교육생이 현재 체크포인트를 통과할 때까지 기다린다.</a:t>
+            </a:r>
+          </a:p>
+          <a:p>
+            <a:r>
+              <a:t>[오류] 오류가 나면 현재 폴더, source, 파일 경로를 먼저 확인한다.</a:t>
+            </a:r>
+          </a:p>
+        </p:txBody>
+      </p:sp>
+      <p:sp>
+        <p:nvSpPr>
+          <p:cNvPr id="4" name="Slide Number Placeholder 3"/>
+          <p:cNvSpPr>
+            <a:spLocks noGrp="1"/>
+          </p:cNvSpPr>
+          <p:nvPr>
+            <p:ph type="sldNum" idx="5" sz="quarter"/>
+          </p:nvPr>
+        </p:nvSpPr>
+        <p:spPr/>
+      </p:sp>
+    </p:spTree>
+  </p:cSld>
+  <p:clrMapOvr>
+    <a:masterClrMapping/>
+  </p:clrMapOvr>
+</p:notes>
+</file>
+
+<file path=ppt/notesSlides/notesSlide26.xml><?xml version="1.0" encoding="utf-8"?>
+<p:notes xmlns:a="http://schemas.openxmlformats.org/drawingml/2006/main" xmlns:p="http://schemas.openxmlformats.org/presentationml/2006/main" xmlns:r="http://schemas.openxmlformats.org/officeDocument/2006/relationships">
+  <p:cSld>
+    <p:spTree>
+      <p:nvGrpSpPr>
+        <p:cNvPr id="1" name=""/>
+        <p:cNvGrpSpPr/>
+        <p:nvPr/>
+      </p:nvGrpSpPr>
+      <p:grpSpPr>
+        <a:xfrm>
+          <a:off x="0" y="0"/>
+          <a:ext cx="0" cy="0"/>
+          <a:chOff x="0" y="0"/>
+          <a:chExt cx="0" cy="0"/>
+        </a:xfrm>
+      </p:grpSpPr>
+      <p:sp>
+        <p:nvSpPr>
+          <p:cNvPr id="2" name="Slide Image Placeholder 1"/>
+          <p:cNvSpPr>
+            <a:spLocks noGrp="1"/>
+          </p:cNvSpPr>
+          <p:nvPr>
+            <p:ph type="sldImg" idx="2"/>
+          </p:nvPr>
+        </p:nvSpPr>
+        <p:spPr/>
+      </p:sp>
+      <p:sp>
+        <p:nvSpPr>
+          <p:cNvPr id="3" name="Notes Placeholder 2"/>
+          <p:cNvSpPr>
+            <a:spLocks noGrp="1"/>
+          </p:cNvSpPr>
+          <p:nvPr>
+            <p:ph type="body" idx="3" sz="quarter"/>
+          </p:nvPr>
+        </p:nvSpPr>
+        <p:spPr/>
+        <p:txBody>
+          <a:bodyPr/>
+          <a:lstStyle/>
+          <a:p>
+            <a:r>
               <a:t>[설명] 공식 문서는 버전 차이와 확장 학습을 확인할 때 사용한다.</a:t>
             </a:r>
           </a:p>
@@ -2166,7 +2257,7 @@
           </a:p>
           <a:p>
             <a:r>
-              <a:t>[실행] pwd; source /opt/ros/jazzy/setup.bash; source ~/agv_ws/install/setup.bash</a:t>
+              <a:t>[실행] pwd; source /opt/ros/jazzy/setup.bash; source ~/ros2_curri/agv_ws/install/setup.bash</a:t>
             </a:r>
           </a:p>
           <a:p>
@@ -2716,12 +2807,12 @@
           <a:lstStyle/>
           <a:p>
             <a:r>
-              <a:t>[설명] ~/agv_ws/src/agv_bringup/config/sensors.yaml의 전체 파일을 1/1 구간으로 작성한다.</a:t>
-            </a:r>
-          </a:p>
-          <a:p>
-            <a:r>
-              <a:t>[실행] nano ~/agv_ws/src/agv_bringup/config/sensors.yaml</a:t>
+              <a:t>[설명] ~/ros2_curri/agv_ws/src/agv_bringup/config/sensors.yaml의 전체 파일을 1/1 구간으로 작성한다.</a:t>
+            </a:r>
+          </a:p>
+          <a:p>
+            <a:r>
+              <a:t>[실행] nano ~/ros2_curri/agv_ws/src/agv_bringup/config/sensors.yaml</a:t>
             </a:r>
           </a:p>
           <a:p>
@@ -6148,7 +6239,7 @@
               </a:defRPr>
             </a:pPr>
             <a:r>
-              <a:t>~/agv_ws/src/agv_gazebo/config/bridge.yaml</a:t>
+              <a:t>~/ros2_curri/agv_ws/src/agv_gazebo/config/bridge.yaml</a:t>
             </a:r>
           </a:p>
         </p:txBody>
@@ -6284,7 +6375,7 @@
               </a:defRPr>
             </a:pPr>
             <a:r>
-              <a:t>현재 단계 4/7    |    현재 폴더 ~/agv_ws    |    현재 터미널</a:t>
+              <a:t>현재 단계 4/7    |    현재 폴더 ~/ros2_curri/agv_ws    |    현재 터미널</a:t>
             </a:r>
           </a:p>
         </p:txBody>
@@ -6381,11 +6472,11 @@
               </a:defRPr>
             </a:pPr>
             <a:r>
-              <a:t>파일 생성: mkdir -p ~/agv_ws/src/agv_gazebo/config</a:t>
+              <a:t>파일 생성: mkdir -p ~/ros2_curri/agv_ws/src/agv_gazebo/config</a:t>
             </a:r>
             <a:br/>
             <a:r>
-              <a:t>파일 열기: nano ~/agv_ws/src/agv_gazebo/config/bridge.yaml</a:t>
+              <a:t>파일 열기: nano ~/ros2_curri/agv_ws/src/agv_gazebo/config/bridge.yaml</a:t>
             </a:r>
           </a:p>
         </p:txBody>
@@ -6622,7 +6713,7 @@
               </a:defRPr>
             </a:pPr>
             <a:r>
-              <a:t>~/agv_ws/src/agv_gazebo/config/bridge.yaml</a:t>
+              <a:t>~/ros2_curri/agv_ws/src/agv_gazebo/config/bridge.yaml</a:t>
             </a:r>
           </a:p>
         </p:txBody>
@@ -6758,7 +6849,7 @@
               </a:defRPr>
             </a:pPr>
             <a:r>
-              <a:t>현재 단계 5/7    |    현재 폴더 ~/agv_ws    |    현재 터미널</a:t>
+              <a:t>현재 단계 5/7    |    현재 폴더 ~/ros2_curri/agv_ws    |    현재 터미널</a:t>
             </a:r>
           </a:p>
         </p:txBody>
@@ -6855,11 +6946,11 @@
               </a:defRPr>
             </a:pPr>
             <a:r>
-              <a:t>파일 생성: mkdir -p ~/agv_ws/src/agv_gazebo/config</a:t>
+              <a:t>파일 생성: mkdir -p ~/ros2_curri/agv_ws/src/agv_gazebo/config</a:t>
             </a:r>
             <a:br/>
             <a:r>
-              <a:t>파일 열기: nano ~/agv_ws/src/agv_gazebo/config/bridge.yaml</a:t>
+              <a:t>파일 열기: nano ~/ros2_curri/agv_ws/src/agv_gazebo/config/bridge.yaml</a:t>
             </a:r>
           </a:p>
         </p:txBody>
@@ -7096,7 +7187,7 @@
               </a:defRPr>
             </a:pPr>
             <a:r>
-              <a:t>~/agv_ws/src/agv_gazebo/config/bridge.yaml</a:t>
+              <a:t>~/ros2_curri/agv_ws/src/agv_gazebo/config/bridge.yaml</a:t>
             </a:r>
           </a:p>
         </p:txBody>
@@ -7232,7 +7323,7 @@
               </a:defRPr>
             </a:pPr>
             <a:r>
-              <a:t>현재 단계 6/7    |    현재 폴더 ~/agv_ws    |    현재 터미널</a:t>
+              <a:t>현재 단계 6/7    |    현재 폴더 ~/ros2_curri/agv_ws    |    현재 터미널</a:t>
             </a:r>
           </a:p>
         </p:txBody>
@@ -7329,11 +7420,11 @@
               </a:defRPr>
             </a:pPr>
             <a:r>
-              <a:t>파일 생성: mkdir -p ~/agv_ws/src/agv_gazebo/config</a:t>
+              <a:t>파일 생성: mkdir -p ~/ros2_curri/agv_ws/src/agv_gazebo/config</a:t>
             </a:r>
             <a:br/>
             <a:r>
-              <a:t>파일 열기: nano ~/agv_ws/src/agv_gazebo/config/bridge.yaml</a:t>
+              <a:t>파일 열기: nano ~/ros2_curri/agv_ws/src/agv_gazebo/config/bridge.yaml</a:t>
             </a:r>
           </a:p>
         </p:txBody>
@@ -7546,7 +7637,7 @@
               </a:defRPr>
             </a:pPr>
             <a:r>
-              <a:t>~/agv_ws/src/agv_sensors/agv_sensors/lidar_processor.py</a:t>
+              <a:t>~/ros2_curri/agv_ws/src/agv_sensors/agv_sensors/lidar_processor.py</a:t>
             </a:r>
           </a:p>
         </p:txBody>
@@ -7682,7 +7773,7 @@
               </a:defRPr>
             </a:pPr>
             <a:r>
-              <a:t>현재 단계 7/10    |    현재 폴더 ~/agv_ws    |    현재 터미널</a:t>
+              <a:t>현재 단계 7/10    |    현재 폴더 ~/ros2_curri/agv_ws    |    현재 터미널</a:t>
             </a:r>
           </a:p>
         </p:txBody>
@@ -7779,11 +7870,11 @@
               </a:defRPr>
             </a:pPr>
             <a:r>
-              <a:t>파일 생성: mkdir -p ~/agv_ws/src/agv_sensors/agv_sensors</a:t>
+              <a:t>파일 생성: mkdir -p ~/ros2_curri/agv_ws/src/agv_sensors/agv_sensors</a:t>
             </a:r>
             <a:br/>
             <a:r>
-              <a:t>파일 열기: nano ~/agv_ws/src/agv_sensors/agv_sensors/lidar_processor.py</a:t>
+              <a:t>파일 열기: nano ~/ros2_curri/agv_ws/src/agv_sensors/agv_sensors/lidar_processor.py</a:t>
             </a:r>
           </a:p>
         </p:txBody>
@@ -8014,7 +8105,7 @@
               </a:defRPr>
             </a:pPr>
             <a:r>
-              <a:t>~/agv_ws/src/agv_sensors/agv_sensors/lidar_processor.py</a:t>
+              <a:t>~/ros2_curri/agv_ws/src/agv_sensors/agv_sensors/lidar_processor.py</a:t>
             </a:r>
           </a:p>
         </p:txBody>
@@ -8150,7 +8241,7 @@
               </a:defRPr>
             </a:pPr>
             <a:r>
-              <a:t>현재 단계 8/10    |    현재 폴더 ~/agv_ws    |    현재 터미널</a:t>
+              <a:t>현재 단계 8/10    |    현재 폴더 ~/ros2_curri/agv_ws    |    현재 터미널</a:t>
             </a:r>
           </a:p>
         </p:txBody>
@@ -8247,11 +8338,11 @@
               </a:defRPr>
             </a:pPr>
             <a:r>
-              <a:t>파일 생성: mkdir -p ~/agv_ws/src/agv_sensors/agv_sensors</a:t>
+              <a:t>파일 생성: mkdir -p ~/ros2_curri/agv_ws/src/agv_sensors/agv_sensors</a:t>
             </a:r>
             <a:br/>
             <a:r>
-              <a:t>파일 열기: nano ~/agv_ws/src/agv_sensors/agv_sensors/lidar_processor.py</a:t>
+              <a:t>파일 열기: nano ~/ros2_curri/agv_ws/src/agv_sensors/agv_sensors/lidar_processor.py</a:t>
             </a:r>
           </a:p>
         </p:txBody>
@@ -8482,7 +8573,7 @@
               </a:defRPr>
             </a:pPr>
             <a:r>
-              <a:t>~/agv_ws/src/agv_sensors/agv_sensors/lidar_processor.py</a:t>
+              <a:t>~/ros2_curri/agv_ws/src/agv_sensors/agv_sensors/lidar_processor.py</a:t>
             </a:r>
           </a:p>
         </p:txBody>
@@ -8618,7 +8709,7 @@
               </a:defRPr>
             </a:pPr>
             <a:r>
-              <a:t>현재 단계 9/10    |    현재 폴더 ~/agv_ws    |    현재 터미널</a:t>
+              <a:t>현재 단계 9/10    |    현재 폴더 ~/ros2_curri/agv_ws    |    현재 터미널</a:t>
             </a:r>
           </a:p>
         </p:txBody>
@@ -8715,11 +8806,11 @@
               </a:defRPr>
             </a:pPr>
             <a:r>
-              <a:t>파일 생성: mkdir -p ~/agv_ws/src/agv_sensors/agv_sensors</a:t>
+              <a:t>파일 생성: mkdir -p ~/ros2_curri/agv_ws/src/agv_sensors/agv_sensors</a:t>
             </a:r>
             <a:br/>
             <a:r>
-              <a:t>파일 열기: nano ~/agv_ws/src/agv_sensors/agv_sensors/lidar_processor.py</a:t>
+              <a:t>파일 열기: nano ~/ros2_curri/agv_ws/src/agv_sensors/agv_sensors/lidar_processor.py</a:t>
             </a:r>
           </a:p>
         </p:txBody>
@@ -8948,7 +9039,7 @@
               </a:defRPr>
             </a:pPr>
             <a:r>
-              <a:t>~/agv_ws/src/agv_sensors/agv_sensors/imu_monitor.py</a:t>
+              <a:t>~/ros2_curri/agv_ws/src/agv_sensors/agv_sensors/imu_monitor.py</a:t>
             </a:r>
           </a:p>
         </p:txBody>
@@ -9084,7 +9175,7 @@
               </a:defRPr>
             </a:pPr>
             <a:r>
-              <a:t>현재 단계 10/13    |    현재 폴더 ~/agv_ws    |    현재 터미널</a:t>
+              <a:t>현재 단계 10/13    |    현재 폴더 ~/ros2_curri/agv_ws    |    현재 터미널</a:t>
             </a:r>
           </a:p>
         </p:txBody>
@@ -9181,11 +9272,11 @@
               </a:defRPr>
             </a:pPr>
             <a:r>
-              <a:t>파일 생성: mkdir -p ~/agv_ws/src/agv_sensors/agv_sensors</a:t>
+              <a:t>파일 생성: mkdir -p ~/ros2_curri/agv_ws/src/agv_sensors/agv_sensors</a:t>
             </a:r>
             <a:br/>
             <a:r>
-              <a:t>파일 열기: nano ~/agv_ws/src/agv_sensors/agv_sensors/imu_monitor.py</a:t>
+              <a:t>파일 열기: nano ~/ros2_curri/agv_ws/src/agv_sensors/agv_sensors/imu_monitor.py</a:t>
             </a:r>
           </a:p>
         </p:txBody>
@@ -9413,7 +9504,7 @@
               </a:defRPr>
             </a:pPr>
             <a:r>
-              <a:t>~/agv_ws/src/agv_sensors/agv_sensors/imu_monitor.py</a:t>
+              <a:t>~/ros2_curri/agv_ws/src/agv_sensors/agv_sensors/imu_monitor.py</a:t>
             </a:r>
           </a:p>
         </p:txBody>
@@ -9549,7 +9640,7 @@
               </a:defRPr>
             </a:pPr>
             <a:r>
-              <a:t>현재 단계 11/13    |    현재 폴더 ~/agv_ws    |    현재 터미널</a:t>
+              <a:t>현재 단계 11/13    |    현재 폴더 ~/ros2_curri/agv_ws    |    현재 터미널</a:t>
             </a:r>
           </a:p>
         </p:txBody>
@@ -9646,11 +9737,11 @@
               </a:defRPr>
             </a:pPr>
             <a:r>
-              <a:t>파일 생성: mkdir -p ~/agv_ws/src/agv_sensors/agv_sensors</a:t>
+              <a:t>파일 생성: mkdir -p ~/ros2_curri/agv_ws/src/agv_sensors/agv_sensors</a:t>
             </a:r>
             <a:br/>
             <a:r>
-              <a:t>파일 열기: nano ~/agv_ws/src/agv_sensors/agv_sensors/imu_monitor.py</a:t>
+              <a:t>파일 열기: nano ~/ros2_curri/agv_ws/src/agv_sensors/agv_sensors/imu_monitor.py</a:t>
             </a:r>
           </a:p>
         </p:txBody>
@@ -9884,7 +9975,7 @@
               </a:defRPr>
             </a:pPr>
             <a:r>
-              <a:t>~/agv_ws/src/agv_sensors/agv_sensors/imu_monitor.py</a:t>
+              <a:t>~/ros2_curri/agv_ws/src/agv_sensors/agv_sensors/imu_monitor.py</a:t>
             </a:r>
           </a:p>
         </p:txBody>
@@ -10020,7 +10111,7 @@
               </a:defRPr>
             </a:pPr>
             <a:r>
-              <a:t>현재 단계 12/13    |    현재 폴더 ~/agv_ws    |    현재 터미널</a:t>
+              <a:t>현재 단계 12/13    |    현재 폴더 ~/ros2_curri/agv_ws    |    현재 터미널</a:t>
             </a:r>
           </a:p>
         </p:txBody>
@@ -10117,11 +10208,11 @@
               </a:defRPr>
             </a:pPr>
             <a:r>
-              <a:t>파일 생성: mkdir -p ~/agv_ws/src/agv_sensors/agv_sensors</a:t>
+              <a:t>파일 생성: mkdir -p ~/ros2_curri/agv_ws/src/agv_sensors/agv_sensors</a:t>
             </a:r>
             <a:br/>
             <a:r>
-              <a:t>파일 열기: nano ~/agv_ws/src/agv_sensors/agv_sensors/imu_monitor.py</a:t>
+              <a:t>파일 열기: nano ~/ros2_curri/agv_ws/src/agv_sensors/agv_sensors/imu_monitor.py</a:t>
             </a:r>
           </a:p>
         </p:txBody>
@@ -10462,7 +10553,7 @@
               </a:defRPr>
             </a:pPr>
             <a:r>
-              <a:t>현재 단계 실행    |    현재 폴더 ~/agv_ws    |    현재 터미널</a:t>
+              <a:t>현재 단계 실행    |    현재 폴더 ~/ros2_curri/agv_ws    |    현재 터미널</a:t>
             </a:r>
           </a:p>
         </p:txBody>
@@ -11353,7 +11444,7 @@
               </a:defRPr>
             </a:pPr>
             <a:r>
-              <a:t>객관적 검증 명령으로 완료를 확인한다</a:t>
+              <a:t>정상 결과: 실제 환경에서 확인한 출력</a:t>
             </a:r>
           </a:p>
         </p:txBody>
@@ -11392,7 +11483,7 @@
               </a:defRPr>
             </a:pPr>
             <a:r>
-              <a:t>화면만 보지 말고 topic·frame·파일·parameter를 다시 확인합니다.</a:t>
+              <a:t>실제 RViz2: 여러 sensor display를 같은 Fixed Frame에서 여는 운영 점검 화면</a:t>
             </a:r>
           </a:p>
         </p:txBody>
@@ -11475,214 +11566,40 @@
           </a:p>
         </p:txBody>
       </p:sp>
-      <p:sp>
-        <p:nvSpPr>
-          <p:cNvPr id="6" name="Rectangle 5"/>
-          <p:cNvSpPr/>
-          <p:nvPr/>
-        </p:nvSpPr>
-        <p:spPr>
-          <a:xfrm>
-            <a:off x="566928" y="1188720"/>
-            <a:ext cx="11064240" cy="347472"/>
-          </a:xfrm>
-          <a:prstGeom prst="rect">
-            <a:avLst/>
-          </a:prstGeom>
-          <a:solidFill>
-            <a:srgbClr val="F4F7FB"/>
-          </a:solidFill>
-          <a:ln>
-            <a:solidFill>
-              <a:srgbClr val="F4F7FB"/>
-            </a:solidFill>
-          </a:ln>
-        </p:spPr>
-        <p:style>
-          <a:lnRef idx="1">
-            <a:schemeClr val="accent1"/>
-          </a:lnRef>
-          <a:fillRef idx="3">
-            <a:schemeClr val="accent1"/>
-          </a:fillRef>
-          <a:effectRef idx="2">
-            <a:schemeClr val="accent1"/>
-          </a:effectRef>
-          <a:fontRef idx="minor">
-            <a:schemeClr val="lt1"/>
-          </a:fontRef>
-        </p:style>
-        <p:txBody>
-          <a:bodyPr rtlCol="0" anchor="ctr" wrap="square" lIns="73152" rIns="73152" tIns="36576" bIns="36576"/>
-          <a:lstStyle/>
-          <a:p>
-            <a:pPr algn="l">
-              <a:spcAft>
-                <a:spcPts val="0"/>
-              </a:spcAft>
-              <a:defRPr sz="1300" b="1">
-                <a:solidFill>
-                  <a:srgbClr val="122C4E"/>
-                </a:solidFill>
-                <a:latin typeface="Noto Sans CJK KR"/>
-              </a:defRPr>
-            </a:pPr>
-            <a:r>
-              <a:t>현재 단계 검증    |    현재 폴더 ~/agv_ws    |    현재 터미널</a:t>
-            </a:r>
-          </a:p>
-        </p:txBody>
-      </p:sp>
-      <p:sp>
-        <p:nvSpPr>
-          <p:cNvPr id="7" name="Rounded Rectangle 6"/>
-          <p:cNvSpPr/>
-          <p:nvPr/>
-        </p:nvSpPr>
-        <p:spPr>
-          <a:xfrm>
-            <a:off x="658368" y="1755648"/>
-            <a:ext cx="10972800" cy="2148840"/>
-          </a:xfrm>
-          <a:prstGeom prst="roundRect">
-            <a:avLst/>
-          </a:prstGeom>
-          <a:solidFill>
-            <a:srgbClr val="1D232D"/>
-          </a:solidFill>
-          <a:ln>
-            <a:solidFill>
-              <a:srgbClr val="1D232D"/>
-            </a:solidFill>
-          </a:ln>
-        </p:spPr>
-        <p:style>
-          <a:lnRef idx="1">
-            <a:schemeClr val="accent1"/>
-          </a:lnRef>
-          <a:fillRef idx="3">
-            <a:schemeClr val="accent1"/>
-          </a:fillRef>
-          <a:effectRef idx="2">
-            <a:schemeClr val="accent1"/>
-          </a:effectRef>
-          <a:fontRef idx="minor">
-            <a:schemeClr val="lt1"/>
-          </a:fontRef>
-        </p:style>
-        <p:txBody>
-          <a:bodyPr rtlCol="0" anchor="ctr" wrap="square" lIns="73152" rIns="73152" tIns="36576" bIns="36576"/>
-          <a:lstStyle/>
-          <a:p>
-            <a:pPr algn="l">
-              <a:spcAft>
-                <a:spcPts val="0"/>
-              </a:spcAft>
-              <a:defRPr sz="1600" b="0">
-                <a:solidFill>
-                  <a:srgbClr val="FFFFFF"/>
-                </a:solidFill>
-                <a:latin typeface="DejaVu Sans Mono"/>
-              </a:defRPr>
-            </a:pPr>
-            <a:r>
-              <a:t>ros2 topic echo /clock --once</a:t>
-            </a:r>
-            <a:br/>
-            <a:r>
-              <a:t>ros2 topic hz /scan</a:t>
-            </a:r>
-            <a:br/>
-            <a:r>
-              <a:t>ros2 topic hz /imu/data</a:t>
-            </a:r>
-            <a:br/>
-            <a:r>
-              <a:t>ros2 param get /lidar_processor use_sim_time</a:t>
-            </a:r>
-          </a:p>
-        </p:txBody>
-      </p:sp>
-      <p:sp>
-        <p:nvSpPr>
-          <p:cNvPr id="8" name="Rounded Rectangle 7"/>
-          <p:cNvSpPr/>
-          <p:nvPr/>
-        </p:nvSpPr>
-        <p:spPr>
-          <a:xfrm>
-            <a:off x="658368" y="4206240"/>
-            <a:ext cx="10972800" cy="1554480"/>
-          </a:xfrm>
-          <a:prstGeom prst="roundRect">
-            <a:avLst/>
-          </a:prstGeom>
-          <a:solidFill>
-            <a:srgbClr val="F4F7FB"/>
-          </a:solidFill>
-          <a:ln>
-            <a:solidFill>
-              <a:srgbClr val="D1DFD5"/>
-            </a:solidFill>
-          </a:ln>
-        </p:spPr>
-        <p:style>
-          <a:lnRef idx="1">
-            <a:schemeClr val="accent1"/>
-          </a:lnRef>
-          <a:fillRef idx="3">
-            <a:schemeClr val="accent1"/>
-          </a:fillRef>
-          <a:effectRef idx="2">
-            <a:schemeClr val="accent1"/>
-          </a:effectRef>
-          <a:fontRef idx="minor">
-            <a:schemeClr val="lt1"/>
-          </a:fontRef>
-        </p:style>
-        <p:txBody>
-          <a:bodyPr rtlCol="0" anchor="ctr" wrap="square" lIns="73152" rIns="73152" tIns="36576" bIns="36576"/>
-          <a:lstStyle/>
-          <a:p>
-            <a:pPr algn="l">
-              <a:spcAft>
-                <a:spcPts val="0"/>
-              </a:spcAft>
-              <a:defRPr sz="1800" b="1">
-                <a:solidFill>
-                  <a:srgbClr val="2A8B5A"/>
-                </a:solidFill>
-                <a:latin typeface="Noto Sans CJK KR"/>
-              </a:defRPr>
-            </a:pPr>
-            <a:r>
-              <a:t>완료 체크</a:t>
-            </a:r>
-            <a:br/>
-            <a:r>
-              <a:t>□ 명령이 오류 없이 실행된다.</a:t>
-            </a:r>
-            <a:br/>
-            <a:r>
-              <a:t>□ 기대한 파일·topic·frame·parameter 이름이 보인다.</a:t>
-            </a:r>
-            <a:br/>
-            <a:r>
-              <a:t>□ 값의 단위와 방향을 한 문장으로 설명할 수 있다.</a:t>
-            </a:r>
-          </a:p>
-        </p:txBody>
-      </p:sp>
-      <p:sp>
-        <p:nvSpPr>
-          <p:cNvPr id="9" name="TextBox 8"/>
+      <p:pic>
+        <p:nvPicPr>
+          <p:cNvPr id="6" name="Picture 5" descr="03_rviz_sensors_actual.png"/>
+          <p:cNvPicPr>
+            <a:picLocks noChangeAspect="1"/>
+          </p:cNvPicPr>
+          <p:nvPr/>
+        </p:nvPicPr>
+        <p:blipFill>
+          <a:blip r:embed="rId2"/>
+          <a:stretch>
+            <a:fillRect/>
+          </a:stretch>
+        </p:blipFill>
+        <p:spPr>
+          <a:xfrm>
+            <a:off x="2971409" y="1353312"/>
+            <a:ext cx="6246133" cy="4800600"/>
+          </a:xfrm>
+          <a:prstGeom prst="rect">
+            <a:avLst/>
+          </a:prstGeom>
+        </p:spPr>
+      </p:pic>
+      <p:sp>
+        <p:nvSpPr>
+          <p:cNvPr id="7" name="TextBox 6"/>
           <p:cNvSpPr txBox="1"/>
           <p:nvPr/>
         </p:nvSpPr>
         <p:spPr>
           <a:xfrm>
-            <a:off x="731520" y="5989320"/>
-            <a:ext cx="10789920" cy="237744"/>
+            <a:off x="777240" y="6217920"/>
+            <a:ext cx="10607040" cy="182880"/>
           </a:xfrm>
           <a:prstGeom prst="rect">
             <a:avLst/>
@@ -11695,19 +11612,19 @@
           </a:bodyPr>
           <a:lstStyle/>
           <a:p>
-            <a:pPr algn="l">
-              <a:spcAft>
-                <a:spcPts val="0"/>
-              </a:spcAft>
-              <a:defRPr sz="1500" b="1">
-                <a:solidFill>
-                  <a:srgbClr val="122C4E"/>
-                </a:solidFill>
-                <a:latin typeface="Noto Sans CJK KR"/>
-              </a:defRPr>
-            </a:pPr>
-            <a:r>
-              <a:t>완료 조건: 모든 sensor 노드가 같은 시뮬레이션 시간과 기대 publish rate를 사용한다.</a:t>
+            <a:pPr algn="ctr">
+              <a:spcAft>
+                <a:spcPts val="0"/>
+              </a:spcAft>
+              <a:defRPr sz="1100" b="1">
+                <a:solidFill>
+                  <a:srgbClr val="2A8B5A"/>
+                </a:solidFill>
+                <a:latin typeface="Noto Sans CJK KR"/>
+              </a:defRPr>
+            </a:pPr>
+            <a:r>
+              <a:t>① 명령/설정  ② 정상 출력 또는 화면  ③ 다음 검증 명령으로 재확인</a:t>
             </a:r>
           </a:p>
         </p:txBody>
@@ -11764,7 +11681,7 @@
               </a:defRPr>
             </a:pPr>
             <a:r>
-              <a:t>막히면: 증상 → 우선 확인 → 재검증</a:t>
+              <a:t>객관적 검증 명령으로 완료를 확인한다</a:t>
             </a:r>
           </a:p>
         </p:txBody>
@@ -11803,7 +11720,7 @@
               </a:defRPr>
             </a:pPr>
             <a:r>
-              <a:t>오류 메시지를 숨기지 않고 같은 순서로 점검합니다.</a:t>
+              <a:t>화면만 보지 말고 topic·frame·파일·parameter를 다시 확인합니다.</a:t>
             </a:r>
           </a:p>
         </p:txBody>
@@ -11939,7 +11856,7 @@
               </a:defRPr>
             </a:pPr>
             <a:r>
-              <a:t>현재 단계 오류 대응    |    현재 폴더 ~/agv_ws    |    현재 터미널</a:t>
+              <a:t>현재 단계 검증    |    현재 폴더 ~/ros2_curri/agv_ws    |    현재 터미널</a:t>
             </a:r>
           </a:p>
         </p:txBody>
@@ -11952,18 +11869,18 @@
         </p:nvSpPr>
         <p:spPr>
           <a:xfrm>
-            <a:off x="694944" y="1755648"/>
-            <a:ext cx="10972800" cy="1115568"/>
+            <a:off x="658368" y="1755648"/>
+            <a:ext cx="10972800" cy="2148840"/>
           </a:xfrm>
           <a:prstGeom prst="roundRect">
             <a:avLst/>
           </a:prstGeom>
           <a:solidFill>
-            <a:srgbClr val="FFF7F4"/>
+            <a:srgbClr val="1D232D"/>
           </a:solidFill>
           <a:ln>
             <a:solidFill>
-              <a:srgbClr val="EDBEB4"/>
+              <a:srgbClr val="1D232D"/>
             </a:solidFill>
           </a:ln>
         </p:spPr>
@@ -11982,115 +11899,58 @@
           </a:fontRef>
         </p:style>
         <p:txBody>
-          <a:bodyPr rtlCol="0" anchor="ctr"/>
-          <a:lstStyle/>
-          <a:p>
-            <a:pPr algn="ctr"/>
-          </a:p>
-        </p:txBody>
-      </p:sp>
-      <p:sp>
-        <p:nvSpPr>
-          <p:cNvPr id="8" name="TextBox 7"/>
-          <p:cNvSpPr txBox="1"/>
-          <p:nvPr/>
-        </p:nvSpPr>
-        <p:spPr>
-          <a:xfrm>
-            <a:off x="896112" y="1901952"/>
-            <a:ext cx="2926080" cy="274320"/>
-          </a:xfrm>
-          <a:prstGeom prst="rect">
-            <a:avLst/>
-          </a:prstGeom>
-          <a:noFill/>
-        </p:spPr>
-        <p:txBody>
-          <a:bodyPr wrap="square" lIns="73152" rIns="73152" tIns="36576" bIns="36576">
-            <a:spAutoFit/>
-          </a:bodyPr>
+          <a:bodyPr rtlCol="0" anchor="ctr" wrap="square" lIns="73152" rIns="73152" tIns="36576" bIns="36576"/>
           <a:lstStyle/>
           <a:p>
             <a:pPr algn="l">
               <a:spcAft>
                 <a:spcPts val="0"/>
               </a:spcAft>
-              <a:defRPr sz="1800" b="1">
-                <a:solidFill>
-                  <a:srgbClr val="BE3B3B"/>
-                </a:solidFill>
-                <a:latin typeface="Noto Sans CJK KR"/>
-              </a:defRPr>
-            </a:pPr>
-            <a:r>
-              <a:t>증상 1: ROS 노드 시간이 안 감</a:t>
-            </a:r>
-          </a:p>
-        </p:txBody>
-      </p:sp>
-      <p:sp>
-        <p:nvSpPr>
-          <p:cNvPr id="9" name="TextBox 8"/>
-          <p:cNvSpPr txBox="1"/>
-          <p:nvPr/>
-        </p:nvSpPr>
-        <p:spPr>
-          <a:xfrm>
-            <a:off x="3794760" y="1883664"/>
-            <a:ext cx="7543800" cy="621792"/>
-          </a:xfrm>
-          <a:prstGeom prst="rect">
-            <a:avLst/>
-          </a:prstGeom>
-          <a:noFill/>
-        </p:spPr>
-        <p:txBody>
-          <a:bodyPr wrap="square" lIns="73152" rIns="73152" tIns="36576" bIns="36576">
-            <a:spAutoFit/>
-          </a:bodyPr>
-          <a:lstStyle/>
-          <a:p>
-            <a:pPr algn="l">
-              <a:spcAft>
-                <a:spcPts val="0"/>
-              </a:spcAft>
               <a:defRPr sz="1600" b="0">
                 <a:solidFill>
-                  <a:srgbClr val="122C4E"/>
-                </a:solidFill>
-                <a:latin typeface="Noto Sans CJK KR"/>
-              </a:defRPr>
-            </a:pPr>
-            <a:r>
-              <a:t>우선 확인: use_sim_time과 /clock bridge를 확인한다.</a:t>
+                  <a:srgbClr val="FFFFFF"/>
+                </a:solidFill>
+                <a:latin typeface="DejaVu Sans Mono"/>
+              </a:defRPr>
+            </a:pPr>
+            <a:r>
+              <a:t>ros2 topic echo /clock --once</a:t>
             </a:r>
             <a:br/>
             <a:r>
-              <a:t>수정 후: ros2 topic echo /clock --once</a:t>
-            </a:r>
-          </a:p>
-        </p:txBody>
-      </p:sp>
-      <p:sp>
-        <p:nvSpPr>
-          <p:cNvPr id="10" name="Rounded Rectangle 9"/>
+              <a:t>ros2 topic hz /scan</a:t>
+            </a:r>
+            <a:br/>
+            <a:r>
+              <a:t>ros2 topic hz /imu/data</a:t>
+            </a:r>
+            <a:br/>
+            <a:r>
+              <a:t>ros2 param get /lidar_processor use_sim_time</a:t>
+            </a:r>
+          </a:p>
+        </p:txBody>
+      </p:sp>
+      <p:sp>
+        <p:nvSpPr>
+          <p:cNvPr id="8" name="Rounded Rectangle 7"/>
           <p:cNvSpPr/>
           <p:nvPr/>
         </p:nvSpPr>
         <p:spPr>
           <a:xfrm>
-            <a:off x="694944" y="3172968"/>
-            <a:ext cx="10972800" cy="1115568"/>
+            <a:off x="658368" y="4206240"/>
+            <a:ext cx="10972800" cy="1554480"/>
           </a:xfrm>
           <a:prstGeom prst="roundRect">
             <a:avLst/>
           </a:prstGeom>
           <a:solidFill>
-            <a:srgbClr val="FFF7F4"/>
+            <a:srgbClr val="F4F7FB"/>
           </a:solidFill>
           <a:ln>
             <a:solidFill>
-              <a:srgbClr val="EDBEB4"/>
+              <a:srgbClr val="D1DFD5"/>
             </a:solidFill>
           </a:ln>
         </p:spPr>
@@ -12109,23 +11969,48 @@
           </a:fontRef>
         </p:style>
         <p:txBody>
-          <a:bodyPr rtlCol="0" anchor="ctr"/>
-          <a:lstStyle/>
-          <a:p>
-            <a:pPr algn="ctr"/>
-          </a:p>
-        </p:txBody>
-      </p:sp>
-      <p:sp>
-        <p:nvSpPr>
-          <p:cNvPr id="11" name="TextBox 10"/>
+          <a:bodyPr rtlCol="0" anchor="ctr" wrap="square" lIns="73152" rIns="73152" tIns="36576" bIns="36576"/>
+          <a:lstStyle/>
+          <a:p>
+            <a:pPr algn="l">
+              <a:spcAft>
+                <a:spcPts val="0"/>
+              </a:spcAft>
+              <a:defRPr sz="1800" b="1">
+                <a:solidFill>
+                  <a:srgbClr val="2A8B5A"/>
+                </a:solidFill>
+                <a:latin typeface="Noto Sans CJK KR"/>
+              </a:defRPr>
+            </a:pPr>
+            <a:r>
+              <a:t>완료 체크</a:t>
+            </a:r>
+            <a:br/>
+            <a:r>
+              <a:t>□ 명령이 오류 없이 실행된다.</a:t>
+            </a:r>
+            <a:br/>
+            <a:r>
+              <a:t>□ 기대한 파일·topic·frame·parameter 이름이 보인다.</a:t>
+            </a:r>
+            <a:br/>
+            <a:r>
+              <a:t>□ 값의 단위와 방향을 한 문장으로 설명할 수 있다.</a:t>
+            </a:r>
+          </a:p>
+        </p:txBody>
+      </p:sp>
+      <p:sp>
+        <p:nvSpPr>
+          <p:cNvPr id="9" name="TextBox 8"/>
           <p:cNvSpPr txBox="1"/>
           <p:nvPr/>
         </p:nvSpPr>
         <p:spPr>
           <a:xfrm>
-            <a:off x="896112" y="3319272"/>
-            <a:ext cx="2926080" cy="274320"/>
+            <a:off x="731520" y="5989320"/>
+            <a:ext cx="10789920" cy="237744"/>
           </a:xfrm>
           <a:prstGeom prst="rect">
             <a:avLst/>
@@ -12142,46 +12027,7 @@
               <a:spcAft>
                 <a:spcPts val="0"/>
               </a:spcAft>
-              <a:defRPr sz="1800" b="1">
-                <a:solidFill>
-                  <a:srgbClr val="BE3B3B"/>
-                </a:solidFill>
-                <a:latin typeface="Noto Sans CJK KR"/>
-              </a:defRPr>
-            </a:pPr>
-            <a:r>
-              <a:t>증상 2: topic은 있는데 subscriber가 못 받음</a:t>
-            </a:r>
-          </a:p>
-        </p:txBody>
-      </p:sp>
-      <p:sp>
-        <p:nvSpPr>
-          <p:cNvPr id="12" name="TextBox 11"/>
-          <p:cNvSpPr txBox="1"/>
-          <p:nvPr/>
-        </p:nvSpPr>
-        <p:spPr>
-          <a:xfrm>
-            <a:off x="3794760" y="3300984"/>
-            <a:ext cx="7543800" cy="621792"/>
-          </a:xfrm>
-          <a:prstGeom prst="rect">
-            <a:avLst/>
-          </a:prstGeom>
-          <a:noFill/>
-        </p:spPr>
-        <p:txBody>
-          <a:bodyPr wrap="square" lIns="73152" rIns="73152" tIns="36576" bIns="36576">
-            <a:spAutoFit/>
-          </a:bodyPr>
-          <a:lstStyle/>
-          <a:p>
-            <a:pPr algn="l">
-              <a:spcAft>
-                <a:spcPts val="0"/>
-              </a:spcAft>
-              <a:defRPr sz="1600" b="0">
+              <a:defRPr sz="1500" b="1">
                 <a:solidFill>
                   <a:srgbClr val="122C4E"/>
                 </a:solidFill>
@@ -12189,50 +12035,7 @@
               </a:defRPr>
             </a:pPr>
             <a:r>
-              <a:t>우선 확인: publisher/subscriber QoS reliability 호환을 확인한다.</a:t>
-            </a:r>
-            <a:br/>
-            <a:r>
-              <a:t>수정 후: ros2 topic echo /clock --once</a:t>
-            </a:r>
-          </a:p>
-        </p:txBody>
-      </p:sp>
-      <p:sp>
-        <p:nvSpPr>
-          <p:cNvPr id="13" name="TextBox 12"/>
-          <p:cNvSpPr txBox="1"/>
-          <p:nvPr/>
-        </p:nvSpPr>
-        <p:spPr>
-          <a:xfrm>
-            <a:off x="822960" y="5102352"/>
-            <a:ext cx="10607040" cy="402336"/>
-          </a:xfrm>
-          <a:prstGeom prst="rect">
-            <a:avLst/>
-          </a:prstGeom>
-          <a:noFill/>
-        </p:spPr>
-        <p:txBody>
-          <a:bodyPr wrap="square" lIns="73152" rIns="73152" tIns="36576" bIns="36576">
-            <a:spAutoFit/>
-          </a:bodyPr>
-          <a:lstStyle/>
-          <a:p>
-            <a:pPr algn="ctr">
-              <a:spcAft>
-                <a:spcPts val="0"/>
-              </a:spcAft>
-              <a:defRPr sz="1800" b="1">
-                <a:solidFill>
-                  <a:srgbClr val="DB7E22"/>
-                </a:solidFill>
-                <a:latin typeface="Noto Sans CJK KR"/>
-              </a:defRPr>
-            </a:pPr>
-            <a:r>
-              <a:t>공통 순서: ① 현재 폴더 ② source ③ 파일 경로 ④ 이름/타입/단위 ⑤ build·source 후 재실행</a:t>
+              <a:t>완료 조건: 모든 sensor 노드가 같은 시뮬레이션 시간과 기대 publish rate를 사용한다.</a:t>
             </a:r>
           </a:p>
         </p:txBody>
@@ -12289,7 +12092,7 @@
               </a:defRPr>
             </a:pPr>
             <a:r>
-              <a:t>미니 실습: 값 하나를 바꾸고 결과를 비교한다</a:t>
+              <a:t>막히면: 증상 → 우선 확인 → 재검증</a:t>
             </a:r>
           </a:p>
         </p:txBody>
@@ -12328,7 +12131,7 @@
               </a:defRPr>
             </a:pPr>
             <a:r>
-              <a:t>정상 결과를 만든 뒤에는 한 번에 하나의 값만 바꿉니다.</a:t>
+              <a:t>오류 메시지를 숨기지 않고 같은 순서로 점검합니다.</a:t>
             </a:r>
           </a:p>
         </p:txBody>
@@ -12464,7 +12267,7 @@
               </a:defRPr>
             </a:pPr>
             <a:r>
-              <a:t>현재 단계 미니 실습    |    현재 폴더 ~/agv_ws    |    현재 터미널</a:t>
+              <a:t>현재 단계 오류 대응    |    현재 폴더 ~/ros2_curri/agv_ws    |    현재 터미널</a:t>
             </a:r>
           </a:p>
         </p:txBody>
@@ -12477,18 +12280,18 @@
         </p:nvSpPr>
         <p:spPr>
           <a:xfrm>
-            <a:off x="749808" y="1874519"/>
-            <a:ext cx="10652760" cy="1993392"/>
+            <a:off x="694944" y="1755648"/>
+            <a:ext cx="10972800" cy="1115568"/>
           </a:xfrm>
           <a:prstGeom prst="roundRect">
             <a:avLst/>
           </a:prstGeom>
           <a:solidFill>
-            <a:srgbClr val="FFF8EB"/>
+            <a:srgbClr val="FFF7F4"/>
           </a:solidFill>
           <a:ln>
             <a:solidFill>
-              <a:srgbClr val="ECC680"/>
+              <a:srgbClr val="EDBEB4"/>
             </a:solidFill>
           </a:ln>
         </p:spPr>
@@ -12507,23 +12310,10 @@
           </a:fontRef>
         </p:style>
         <p:txBody>
-          <a:bodyPr rtlCol="0" anchor="ctr" wrap="square" lIns="73152" rIns="73152" tIns="36576" bIns="36576"/>
-          <a:lstStyle/>
-          <a:p>
-            <a:pPr algn="ctr">
-              <a:spcAft>
-                <a:spcPts val="0"/>
-              </a:spcAft>
-              <a:defRPr sz="2300" b="1">
-                <a:solidFill>
-                  <a:srgbClr val="122C4E"/>
-                </a:solidFill>
-                <a:latin typeface="Noto Sans CJK KR"/>
-              </a:defRPr>
-            </a:pPr>
-            <a:r>
-              <a:t>/scan과 /imu/data의 hz를 표로 기록하고 SDF update_rate 10/100 Hz와 비교한다.</a:t>
-            </a:r>
+          <a:bodyPr rtlCol="0" anchor="ctr"/>
+          <a:lstStyle/>
+          <a:p>
+            <a:pPr algn="ctr"/>
           </a:p>
         </p:txBody>
       </p:sp>
@@ -12535,8 +12325,8 @@
         </p:nvSpPr>
         <p:spPr>
           <a:xfrm>
-            <a:off x="877824" y="4590288"/>
-            <a:ext cx="10241280" cy="594360"/>
+            <a:off x="896112" y="1901952"/>
+            <a:ext cx="2926080" cy="274320"/>
           </a:xfrm>
           <a:prstGeom prst="rect">
             <a:avLst/>
@@ -12549,11 +12339,220 @@
           </a:bodyPr>
           <a:lstStyle/>
           <a:p>
+            <a:pPr algn="l">
+              <a:spcAft>
+                <a:spcPts val="0"/>
+              </a:spcAft>
+              <a:defRPr sz="1800" b="1">
+                <a:solidFill>
+                  <a:srgbClr val="BE3B3B"/>
+                </a:solidFill>
+                <a:latin typeface="Noto Sans CJK KR"/>
+              </a:defRPr>
+            </a:pPr>
+            <a:r>
+              <a:t>증상 1: ROS 노드 시간이 안 감</a:t>
+            </a:r>
+          </a:p>
+        </p:txBody>
+      </p:sp>
+      <p:sp>
+        <p:nvSpPr>
+          <p:cNvPr id="9" name="TextBox 8"/>
+          <p:cNvSpPr txBox="1"/>
+          <p:nvPr/>
+        </p:nvSpPr>
+        <p:spPr>
+          <a:xfrm>
+            <a:off x="3794760" y="1883664"/>
+            <a:ext cx="7543800" cy="621792"/>
+          </a:xfrm>
+          <a:prstGeom prst="rect">
+            <a:avLst/>
+          </a:prstGeom>
+          <a:noFill/>
+        </p:spPr>
+        <p:txBody>
+          <a:bodyPr wrap="square" lIns="73152" rIns="73152" tIns="36576" bIns="36576">
+            <a:spAutoFit/>
+          </a:bodyPr>
+          <a:lstStyle/>
+          <a:p>
+            <a:pPr algn="l">
+              <a:spcAft>
+                <a:spcPts val="0"/>
+              </a:spcAft>
+              <a:defRPr sz="1600" b="0">
+                <a:solidFill>
+                  <a:srgbClr val="122C4E"/>
+                </a:solidFill>
+                <a:latin typeface="Noto Sans CJK KR"/>
+              </a:defRPr>
+            </a:pPr>
+            <a:r>
+              <a:t>우선 확인: use_sim_time과 /clock bridge를 확인한다.</a:t>
+            </a:r>
+            <a:br/>
+            <a:r>
+              <a:t>수정 후: ros2 topic echo /clock --once</a:t>
+            </a:r>
+          </a:p>
+        </p:txBody>
+      </p:sp>
+      <p:sp>
+        <p:nvSpPr>
+          <p:cNvPr id="10" name="Rounded Rectangle 9"/>
+          <p:cNvSpPr/>
+          <p:nvPr/>
+        </p:nvSpPr>
+        <p:spPr>
+          <a:xfrm>
+            <a:off x="694944" y="3172968"/>
+            <a:ext cx="10972800" cy="1115568"/>
+          </a:xfrm>
+          <a:prstGeom prst="roundRect">
+            <a:avLst/>
+          </a:prstGeom>
+          <a:solidFill>
+            <a:srgbClr val="FFF7F4"/>
+          </a:solidFill>
+          <a:ln>
+            <a:solidFill>
+              <a:srgbClr val="EDBEB4"/>
+            </a:solidFill>
+          </a:ln>
+        </p:spPr>
+        <p:style>
+          <a:lnRef idx="1">
+            <a:schemeClr val="accent1"/>
+          </a:lnRef>
+          <a:fillRef idx="3">
+            <a:schemeClr val="accent1"/>
+          </a:fillRef>
+          <a:effectRef idx="2">
+            <a:schemeClr val="accent1"/>
+          </a:effectRef>
+          <a:fontRef idx="minor">
+            <a:schemeClr val="lt1"/>
+          </a:fontRef>
+        </p:style>
+        <p:txBody>
+          <a:bodyPr rtlCol="0" anchor="ctr"/>
+          <a:lstStyle/>
+          <a:p>
+            <a:pPr algn="ctr"/>
+          </a:p>
+        </p:txBody>
+      </p:sp>
+      <p:sp>
+        <p:nvSpPr>
+          <p:cNvPr id="11" name="TextBox 10"/>
+          <p:cNvSpPr txBox="1"/>
+          <p:nvPr/>
+        </p:nvSpPr>
+        <p:spPr>
+          <a:xfrm>
+            <a:off x="896112" y="3319272"/>
+            <a:ext cx="2926080" cy="274320"/>
+          </a:xfrm>
+          <a:prstGeom prst="rect">
+            <a:avLst/>
+          </a:prstGeom>
+          <a:noFill/>
+        </p:spPr>
+        <p:txBody>
+          <a:bodyPr wrap="square" lIns="73152" rIns="73152" tIns="36576" bIns="36576">
+            <a:spAutoFit/>
+          </a:bodyPr>
+          <a:lstStyle/>
+          <a:p>
+            <a:pPr algn="l">
+              <a:spcAft>
+                <a:spcPts val="0"/>
+              </a:spcAft>
+              <a:defRPr sz="1800" b="1">
+                <a:solidFill>
+                  <a:srgbClr val="BE3B3B"/>
+                </a:solidFill>
+                <a:latin typeface="Noto Sans CJK KR"/>
+              </a:defRPr>
+            </a:pPr>
+            <a:r>
+              <a:t>증상 2: topic은 있는데 subscriber가 못 받음</a:t>
+            </a:r>
+          </a:p>
+        </p:txBody>
+      </p:sp>
+      <p:sp>
+        <p:nvSpPr>
+          <p:cNvPr id="12" name="TextBox 11"/>
+          <p:cNvSpPr txBox="1"/>
+          <p:nvPr/>
+        </p:nvSpPr>
+        <p:spPr>
+          <a:xfrm>
+            <a:off x="3794760" y="3300984"/>
+            <a:ext cx="7543800" cy="621792"/>
+          </a:xfrm>
+          <a:prstGeom prst="rect">
+            <a:avLst/>
+          </a:prstGeom>
+          <a:noFill/>
+        </p:spPr>
+        <p:txBody>
+          <a:bodyPr wrap="square" lIns="73152" rIns="73152" tIns="36576" bIns="36576">
+            <a:spAutoFit/>
+          </a:bodyPr>
+          <a:lstStyle/>
+          <a:p>
+            <a:pPr algn="l">
+              <a:spcAft>
+                <a:spcPts val="0"/>
+              </a:spcAft>
+              <a:defRPr sz="1600" b="0">
+                <a:solidFill>
+                  <a:srgbClr val="122C4E"/>
+                </a:solidFill>
+                <a:latin typeface="Noto Sans CJK KR"/>
+              </a:defRPr>
+            </a:pPr>
+            <a:r>
+              <a:t>우선 확인: publisher/subscriber QoS reliability 호환을 확인한다.</a:t>
+            </a:r>
+            <a:br/>
+            <a:r>
+              <a:t>수정 후: ros2 topic echo /clock --once</a:t>
+            </a:r>
+          </a:p>
+        </p:txBody>
+      </p:sp>
+      <p:sp>
+        <p:nvSpPr>
+          <p:cNvPr id="13" name="TextBox 12"/>
+          <p:cNvSpPr txBox="1"/>
+          <p:nvPr/>
+        </p:nvSpPr>
+        <p:spPr>
+          <a:xfrm>
+            <a:off x="822960" y="5102352"/>
+            <a:ext cx="10607040" cy="402336"/>
+          </a:xfrm>
+          <a:prstGeom prst="rect">
+            <a:avLst/>
+          </a:prstGeom>
+          <a:noFill/>
+        </p:spPr>
+        <p:txBody>
+          <a:bodyPr wrap="square" lIns="73152" rIns="73152" tIns="36576" bIns="36576">
+            <a:spAutoFit/>
+          </a:bodyPr>
+          <a:lstStyle/>
+          <a:p>
             <a:pPr algn="ctr">
               <a:spcAft>
                 <a:spcPts val="0"/>
               </a:spcAft>
-              <a:defRPr sz="1900" b="1">
+              <a:defRPr sz="1800" b="1">
                 <a:solidFill>
                   <a:srgbClr val="DB7E22"/>
                 </a:solidFill>
@@ -12561,7 +12560,7 @@
               </a:defRPr>
             </a:pPr>
             <a:r>
-              <a:t>기록할 것: 바꾼 값(단위) · 기대한 변화 · 실제 출력/화면 · 원래 값으로 되돌린 결과</a:t>
+              <a:t>공통 순서: ① 현재 폴더 ② source ③ 파일 경로 ④ 이름/타입/단위 ⑤ build·source 후 재실행</a:t>
             </a:r>
           </a:p>
         </p:txBody>
@@ -12618,7 +12617,7 @@
               </a:defRPr>
             </a:pPr>
             <a:r>
-              <a:t>체크포인트를 저장하고 다음 모듈로 넘긴다</a:t>
+              <a:t>미니 실습: 값 하나를 바꾸고 결과를 비교한다</a:t>
             </a:r>
           </a:p>
         </p:txBody>
@@ -12657,7 +12656,7 @@
               </a:defRPr>
             </a:pPr>
             <a:r>
-              <a:t>현재 Complete는 다음 Starter의 기준선입니다.</a:t>
+              <a:t>정상 결과를 만든 뒤에는 한 번에 하나의 값만 바꿉니다.</a:t>
             </a:r>
           </a:p>
         </p:txBody>
@@ -12793,7 +12792,7 @@
               </a:defRPr>
             </a:pPr>
             <a:r>
-              <a:t>현재 단계 체크포인트    |    현재 폴더 ~/agv_ws    |    현재 터미널</a:t>
+              <a:t>현재 단계 미니 실습    |    현재 폴더 ~/ros2_curri/agv_ws    |    현재 터미널</a:t>
             </a:r>
           </a:p>
         </p:txBody>
@@ -12806,18 +12805,18 @@
         </p:nvSpPr>
         <p:spPr>
           <a:xfrm>
-            <a:off x="685800" y="1737360"/>
-            <a:ext cx="10972800" cy="3611880"/>
+            <a:off x="749808" y="1874519"/>
+            <a:ext cx="10652760" cy="1993392"/>
           </a:xfrm>
           <a:prstGeom prst="roundRect">
             <a:avLst/>
           </a:prstGeom>
           <a:solidFill>
-            <a:srgbClr val="F4F7FB"/>
+            <a:srgbClr val="FFF8EB"/>
           </a:solidFill>
           <a:ln>
             <a:solidFill>
-              <a:srgbClr val="D2DCE8"/>
+              <a:srgbClr val="ECC680"/>
             </a:solidFill>
           </a:ln>
         </p:spPr>
@@ -12836,10 +12835,23 @@
           </a:fontRef>
         </p:style>
         <p:txBody>
-          <a:bodyPr rtlCol="0" anchor="ctr"/>
-          <a:lstStyle/>
-          <a:p>
-            <a:pPr algn="ctr"/>
+          <a:bodyPr rtlCol="0" anchor="ctr" wrap="square" lIns="73152" rIns="73152" tIns="36576" bIns="36576"/>
+          <a:lstStyle/>
+          <a:p>
+            <a:pPr algn="ctr">
+              <a:spcAft>
+                <a:spcPts val="0"/>
+              </a:spcAft>
+              <a:defRPr sz="2300" b="1">
+                <a:solidFill>
+                  <a:srgbClr val="122C4E"/>
+                </a:solidFill>
+                <a:latin typeface="Noto Sans CJK KR"/>
+              </a:defRPr>
+            </a:pPr>
+            <a:r>
+              <a:t>/scan과 /imu/data의 hz를 표로 기록하고 SDF update_rate 10/100 Hz와 비교한다.</a:t>
+            </a:r>
           </a:p>
         </p:txBody>
       </p:sp>
@@ -12851,111 +12863,8 @@
         </p:nvSpPr>
         <p:spPr>
           <a:xfrm>
-            <a:off x="896112" y="1993392"/>
-            <a:ext cx="10332720" cy="2971800"/>
-          </a:xfrm>
-          <a:prstGeom prst="rect">
-            <a:avLst/>
-          </a:prstGeom>
-          <a:noFill/>
-        </p:spPr>
-        <p:txBody>
-          <a:bodyPr wrap="square" lIns="109728" rIns="109728">
-            <a:spAutoFit/>
-          </a:bodyPr>
-          <a:lstStyle/>
-          <a:p>
-            <a:pPr>
-              <a:spcAft>
-                <a:spcPts val="800"/>
-              </a:spcAft>
-              <a:defRPr sz="1800">
-                <a:solidFill>
-                  <a:srgbClr val="122C4E"/>
-                </a:solidFill>
-                <a:latin typeface="Noto Sans CJK KR"/>
-              </a:defRPr>
-            </a:pPr>
-            <a:r>
-              <a:t>• □ 완료 화면: 모든 sensor 노드가 같은 시뮬레이션 시간과 기대 publish rate를 사용한다.</a:t>
-            </a:r>
-          </a:p>
-          <a:p>
-            <a:pPr>
-              <a:spcAft>
-                <a:spcPts val="800"/>
-              </a:spcAft>
-              <a:defRPr sz="1800">
-                <a:solidFill>
-                  <a:srgbClr val="122C4E"/>
-                </a:solidFill>
-                <a:latin typeface="Noto Sans CJK KR"/>
-              </a:defRPr>
-            </a:pPr>
-            <a:r>
-              <a:t>• □ Complete 파일: blocks/D_sensors/M15_sensor_operations/complete/</a:t>
-            </a:r>
-          </a:p>
-          <a:p>
-            <a:pPr>
-              <a:spcAft>
-                <a:spcPts val="800"/>
-              </a:spcAft>
-              <a:defRPr sz="1800">
-                <a:solidFill>
-                  <a:srgbClr val="122C4E"/>
-                </a:solidFill>
-                <a:latin typeface="Noto Sans CJK KR"/>
-              </a:defRPr>
-            </a:pPr>
-            <a:r>
-              <a:t>• □ 정상 로그·캡처: logs/validation.log, screenshots/validation_terminal.png</a:t>
-            </a:r>
-          </a:p>
-          <a:p>
-            <a:pPr>
-              <a:spcAft>
-                <a:spcPts val="800"/>
-              </a:spcAft>
-              <a:defRPr sz="1800">
-                <a:solidFill>
-                  <a:srgbClr val="122C4E"/>
-                </a:solidFill>
-                <a:latin typeface="Noto Sans CJK KR"/>
-              </a:defRPr>
-            </a:pPr>
-            <a:r>
-              <a:t>• □ 버전 식별: CHECKSUM_or_TAG.txt의 SHA-256 manifest</a:t>
-            </a:r>
-          </a:p>
-          <a:p>
-            <a:pPr>
-              <a:spcAft>
-                <a:spcPts val="800"/>
-              </a:spcAft>
-              <a:defRPr sz="1800">
-                <a:solidFill>
-                  <a:srgbClr val="122C4E"/>
-                </a:solidFill>
-                <a:latin typeface="Noto Sans CJK KR"/>
-              </a:defRPr>
-            </a:pPr>
-            <a:r>
-              <a:t>• □ 다음 시작 조건: M16 제어 interface</a:t>
-            </a:r>
-          </a:p>
-        </p:txBody>
-      </p:sp>
-      <p:sp>
-        <p:nvSpPr>
-          <p:cNvPr id="9" name="TextBox 8"/>
-          <p:cNvSpPr txBox="1"/>
-          <p:nvPr/>
-        </p:nvSpPr>
-        <p:spPr>
-          <a:xfrm>
-            <a:off x="868680" y="5596128"/>
-            <a:ext cx="10515600" cy="338328"/>
+            <a:off x="877824" y="4590288"/>
+            <a:ext cx="10241280" cy="594360"/>
           </a:xfrm>
           <a:prstGeom prst="rect">
             <a:avLst/>
@@ -12972,15 +12881,15 @@
               <a:spcAft>
                 <a:spcPts val="0"/>
               </a:spcAft>
-              <a:defRPr sz="1700" b="1">
-                <a:solidFill>
-                  <a:srgbClr val="2A8B5A"/>
-                </a:solidFill>
-                <a:latin typeface="Noto Sans CJK KR"/>
-              </a:defRPr>
-            </a:pPr>
-            <a:r>
-              <a:t>다음 모듈을 시작하기 전, 이 슬라이드의 Complete와 다음 모듈의 Starter를 비교합니다.</a:t>
+              <a:defRPr sz="1900" b="1">
+                <a:solidFill>
+                  <a:srgbClr val="DB7E22"/>
+                </a:solidFill>
+                <a:latin typeface="Noto Sans CJK KR"/>
+              </a:defRPr>
+            </a:pPr>
+            <a:r>
+              <a:t>기록할 것: 바꾼 값(단위) · 기대한 변화 · 실제 출력/화면 · 원래 값으로 되돌린 결과</a:t>
             </a:r>
           </a:p>
         </p:txBody>
@@ -13037,6 +12946,425 @@
               </a:defRPr>
             </a:pPr>
             <a:r>
+              <a:t>체크포인트를 저장하고 다음 모듈로 넘긴다</a:t>
+            </a:r>
+          </a:p>
+        </p:txBody>
+      </p:sp>
+      <p:sp>
+        <p:nvSpPr>
+          <p:cNvPr id="3" name="TextBox 2"/>
+          <p:cNvSpPr txBox="1"/>
+          <p:nvPr/>
+        </p:nvSpPr>
+        <p:spPr>
+          <a:xfrm>
+            <a:off x="603504" y="859536"/>
+            <a:ext cx="10698480" cy="292608"/>
+          </a:xfrm>
+          <a:prstGeom prst="rect">
+            <a:avLst/>
+          </a:prstGeom>
+          <a:noFill/>
+        </p:spPr>
+        <p:txBody>
+          <a:bodyPr wrap="square" lIns="73152" rIns="73152" tIns="36576" bIns="36576">
+            <a:spAutoFit/>
+          </a:bodyPr>
+          <a:lstStyle/>
+          <a:p>
+            <a:pPr algn="l">
+              <a:spcAft>
+                <a:spcPts val="0"/>
+              </a:spcAft>
+              <a:defRPr sz="1700" b="0">
+                <a:solidFill>
+                  <a:srgbClr val="5C6672"/>
+                </a:solidFill>
+                <a:latin typeface="Noto Sans CJK KR"/>
+              </a:defRPr>
+            </a:pPr>
+            <a:r>
+              <a:t>현재 Complete는 다음 Starter의 기준선입니다.</a:t>
+            </a:r>
+          </a:p>
+        </p:txBody>
+      </p:sp>
+      <p:sp>
+        <p:nvSpPr>
+          <p:cNvPr id="4" name="TextBox 3"/>
+          <p:cNvSpPr txBox="1"/>
+          <p:nvPr/>
+        </p:nvSpPr>
+        <p:spPr>
+          <a:xfrm>
+            <a:off x="530352" y="6510528"/>
+            <a:ext cx="7772400" cy="201168"/>
+          </a:xfrm>
+          <a:prstGeom prst="rect">
+            <a:avLst/>
+          </a:prstGeom>
+          <a:noFill/>
+        </p:spPr>
+        <p:txBody>
+          <a:bodyPr wrap="square" lIns="73152" rIns="73152" tIns="36576" bIns="36576">
+            <a:spAutoFit/>
+          </a:bodyPr>
+          <a:lstStyle/>
+          <a:p>
+            <a:pPr algn="l">
+              <a:spcAft>
+                <a:spcPts val="0"/>
+              </a:spcAft>
+              <a:defRPr sz="1000" b="0">
+                <a:solidFill>
+                  <a:srgbClr val="5C6672"/>
+                </a:solidFill>
+                <a:latin typeface="Noto Sans CJK KR"/>
+              </a:defRPr>
+            </a:pPr>
+            <a:r>
+              <a:t>ROS 2 Jazzy · Gazebo Harmonic · M15 · 따라 하기형 AGV 실습</a:t>
+            </a:r>
+          </a:p>
+        </p:txBody>
+      </p:sp>
+      <p:sp>
+        <p:nvSpPr>
+          <p:cNvPr id="5" name="TextBox 4"/>
+          <p:cNvSpPr txBox="1"/>
+          <p:nvPr/>
+        </p:nvSpPr>
+        <p:spPr>
+          <a:xfrm>
+            <a:off x="9144000" y="6510528"/>
+            <a:ext cx="2468880" cy="201168"/>
+          </a:xfrm>
+          <a:prstGeom prst="rect">
+            <a:avLst/>
+          </a:prstGeom>
+          <a:noFill/>
+        </p:spPr>
+        <p:txBody>
+          <a:bodyPr wrap="square" lIns="73152" rIns="73152" tIns="36576" bIns="36576">
+            <a:spAutoFit/>
+          </a:bodyPr>
+          <a:lstStyle/>
+          <a:p>
+            <a:pPr algn="r">
+              <a:spcAft>
+                <a:spcPts val="0"/>
+              </a:spcAft>
+              <a:defRPr sz="1000" b="0">
+                <a:solidFill>
+                  <a:srgbClr val="5C6672"/>
+                </a:solidFill>
+                <a:latin typeface="Noto Sans CJK KR"/>
+              </a:defRPr>
+            </a:pPr>
+            <a:r>
+              <a:t>명령·파일 경로는 슬라이드에서 복사 가능</a:t>
+            </a:r>
+          </a:p>
+        </p:txBody>
+      </p:sp>
+      <p:sp>
+        <p:nvSpPr>
+          <p:cNvPr id="6" name="Rectangle 5"/>
+          <p:cNvSpPr/>
+          <p:nvPr/>
+        </p:nvSpPr>
+        <p:spPr>
+          <a:xfrm>
+            <a:off x="566928" y="1188720"/>
+            <a:ext cx="11064240" cy="347472"/>
+          </a:xfrm>
+          <a:prstGeom prst="rect">
+            <a:avLst/>
+          </a:prstGeom>
+          <a:solidFill>
+            <a:srgbClr val="F4F7FB"/>
+          </a:solidFill>
+          <a:ln>
+            <a:solidFill>
+              <a:srgbClr val="F4F7FB"/>
+            </a:solidFill>
+          </a:ln>
+        </p:spPr>
+        <p:style>
+          <a:lnRef idx="1">
+            <a:schemeClr val="accent1"/>
+          </a:lnRef>
+          <a:fillRef idx="3">
+            <a:schemeClr val="accent1"/>
+          </a:fillRef>
+          <a:effectRef idx="2">
+            <a:schemeClr val="accent1"/>
+          </a:effectRef>
+          <a:fontRef idx="minor">
+            <a:schemeClr val="lt1"/>
+          </a:fontRef>
+        </p:style>
+        <p:txBody>
+          <a:bodyPr rtlCol="0" anchor="ctr" wrap="square" lIns="73152" rIns="73152" tIns="36576" bIns="36576"/>
+          <a:lstStyle/>
+          <a:p>
+            <a:pPr algn="l">
+              <a:spcAft>
+                <a:spcPts val="0"/>
+              </a:spcAft>
+              <a:defRPr sz="1300" b="1">
+                <a:solidFill>
+                  <a:srgbClr val="122C4E"/>
+                </a:solidFill>
+                <a:latin typeface="Noto Sans CJK KR"/>
+              </a:defRPr>
+            </a:pPr>
+            <a:r>
+              <a:t>현재 단계 체크포인트    |    현재 폴더 ~/ros2_curri/agv_ws    |    현재 터미널</a:t>
+            </a:r>
+          </a:p>
+        </p:txBody>
+      </p:sp>
+      <p:sp>
+        <p:nvSpPr>
+          <p:cNvPr id="7" name="Rounded Rectangle 6"/>
+          <p:cNvSpPr/>
+          <p:nvPr/>
+        </p:nvSpPr>
+        <p:spPr>
+          <a:xfrm>
+            <a:off x="685800" y="1737360"/>
+            <a:ext cx="10972800" cy="3611880"/>
+          </a:xfrm>
+          <a:prstGeom prst="roundRect">
+            <a:avLst/>
+          </a:prstGeom>
+          <a:solidFill>
+            <a:srgbClr val="F4F7FB"/>
+          </a:solidFill>
+          <a:ln>
+            <a:solidFill>
+              <a:srgbClr val="D2DCE8"/>
+            </a:solidFill>
+          </a:ln>
+        </p:spPr>
+        <p:style>
+          <a:lnRef idx="1">
+            <a:schemeClr val="accent1"/>
+          </a:lnRef>
+          <a:fillRef idx="3">
+            <a:schemeClr val="accent1"/>
+          </a:fillRef>
+          <a:effectRef idx="2">
+            <a:schemeClr val="accent1"/>
+          </a:effectRef>
+          <a:fontRef idx="minor">
+            <a:schemeClr val="lt1"/>
+          </a:fontRef>
+        </p:style>
+        <p:txBody>
+          <a:bodyPr rtlCol="0" anchor="ctr"/>
+          <a:lstStyle/>
+          <a:p>
+            <a:pPr algn="ctr"/>
+          </a:p>
+        </p:txBody>
+      </p:sp>
+      <p:sp>
+        <p:nvSpPr>
+          <p:cNvPr id="8" name="TextBox 7"/>
+          <p:cNvSpPr txBox="1"/>
+          <p:nvPr/>
+        </p:nvSpPr>
+        <p:spPr>
+          <a:xfrm>
+            <a:off x="896112" y="1993392"/>
+            <a:ext cx="10332720" cy="2971800"/>
+          </a:xfrm>
+          <a:prstGeom prst="rect">
+            <a:avLst/>
+          </a:prstGeom>
+          <a:noFill/>
+        </p:spPr>
+        <p:txBody>
+          <a:bodyPr wrap="square" lIns="109728" rIns="109728">
+            <a:spAutoFit/>
+          </a:bodyPr>
+          <a:lstStyle/>
+          <a:p>
+            <a:pPr>
+              <a:spcAft>
+                <a:spcPts val="800"/>
+              </a:spcAft>
+              <a:defRPr sz="1800">
+                <a:solidFill>
+                  <a:srgbClr val="122C4E"/>
+                </a:solidFill>
+                <a:latin typeface="Noto Sans CJK KR"/>
+              </a:defRPr>
+            </a:pPr>
+            <a:r>
+              <a:t>• □ 완료 화면: 모든 sensor 노드가 같은 시뮬레이션 시간과 기대 publish rate를 사용한다.</a:t>
+            </a:r>
+          </a:p>
+          <a:p>
+            <a:pPr>
+              <a:spcAft>
+                <a:spcPts val="800"/>
+              </a:spcAft>
+              <a:defRPr sz="1800">
+                <a:solidFill>
+                  <a:srgbClr val="122C4E"/>
+                </a:solidFill>
+                <a:latin typeface="Noto Sans CJK KR"/>
+              </a:defRPr>
+            </a:pPr>
+            <a:r>
+              <a:t>• □ Complete 파일: blocks/D_sensors/M15_sensor_operations/complete/</a:t>
+            </a:r>
+          </a:p>
+          <a:p>
+            <a:pPr>
+              <a:spcAft>
+                <a:spcPts val="800"/>
+              </a:spcAft>
+              <a:defRPr sz="1800">
+                <a:solidFill>
+                  <a:srgbClr val="122C4E"/>
+                </a:solidFill>
+                <a:latin typeface="Noto Sans CJK KR"/>
+              </a:defRPr>
+            </a:pPr>
+            <a:r>
+              <a:t>• □ 정상 로그·캡처: logs/validation.log, screenshots/validation_terminal.png</a:t>
+            </a:r>
+          </a:p>
+          <a:p>
+            <a:pPr>
+              <a:spcAft>
+                <a:spcPts val="800"/>
+              </a:spcAft>
+              <a:defRPr sz="1800">
+                <a:solidFill>
+                  <a:srgbClr val="122C4E"/>
+                </a:solidFill>
+                <a:latin typeface="Noto Sans CJK KR"/>
+              </a:defRPr>
+            </a:pPr>
+            <a:r>
+              <a:t>• □ 버전 식별: CHECKSUM_or_TAG.txt의 SHA-256 manifest</a:t>
+            </a:r>
+          </a:p>
+          <a:p>
+            <a:pPr>
+              <a:spcAft>
+                <a:spcPts val="800"/>
+              </a:spcAft>
+              <a:defRPr sz="1800">
+                <a:solidFill>
+                  <a:srgbClr val="122C4E"/>
+                </a:solidFill>
+                <a:latin typeface="Noto Sans CJK KR"/>
+              </a:defRPr>
+            </a:pPr>
+            <a:r>
+              <a:t>• □ 다음 시작 조건: M16 제어 interface</a:t>
+            </a:r>
+          </a:p>
+        </p:txBody>
+      </p:sp>
+      <p:sp>
+        <p:nvSpPr>
+          <p:cNvPr id="9" name="TextBox 8"/>
+          <p:cNvSpPr txBox="1"/>
+          <p:nvPr/>
+        </p:nvSpPr>
+        <p:spPr>
+          <a:xfrm>
+            <a:off x="868680" y="5596128"/>
+            <a:ext cx="10515600" cy="338328"/>
+          </a:xfrm>
+          <a:prstGeom prst="rect">
+            <a:avLst/>
+          </a:prstGeom>
+          <a:noFill/>
+        </p:spPr>
+        <p:txBody>
+          <a:bodyPr wrap="square" lIns="73152" rIns="73152" tIns="36576" bIns="36576">
+            <a:spAutoFit/>
+          </a:bodyPr>
+          <a:lstStyle/>
+          <a:p>
+            <a:pPr algn="ctr">
+              <a:spcAft>
+                <a:spcPts val="0"/>
+              </a:spcAft>
+              <a:defRPr sz="1700" b="1">
+                <a:solidFill>
+                  <a:srgbClr val="2A8B5A"/>
+                </a:solidFill>
+                <a:latin typeface="Noto Sans CJK KR"/>
+              </a:defRPr>
+            </a:pPr>
+            <a:r>
+              <a:t>다음 모듈을 시작하기 전, 이 슬라이드의 Complete와 다음 모듈의 Starter를 비교합니다.</a:t>
+            </a:r>
+          </a:p>
+        </p:txBody>
+      </p:sp>
+    </p:spTree>
+  </p:cSld>
+  <p:clrMapOvr>
+    <a:masterClrMapping/>
+  </p:clrMapOvr>
+</p:sld>
+</file>
+
+<file path=ppt/slides/slide26.xml><?xml version="1.0" encoding="utf-8"?>
+<p:sld xmlns:a="http://schemas.openxmlformats.org/drawingml/2006/main" xmlns:p="http://schemas.openxmlformats.org/presentationml/2006/main" xmlns:r="http://schemas.openxmlformats.org/officeDocument/2006/relationships">
+  <p:cSld>
+    <p:spTree>
+      <p:nvGrpSpPr>
+        <p:cNvPr id="1" name=""/>
+        <p:cNvGrpSpPr/>
+        <p:nvPr/>
+      </p:nvGrpSpPr>
+      <p:grpSpPr/>
+      <p:sp>
+        <p:nvSpPr>
+          <p:cNvPr id="2" name="TextBox 1"/>
+          <p:cNvSpPr txBox="1"/>
+          <p:nvPr/>
+        </p:nvSpPr>
+        <p:spPr>
+          <a:xfrm>
+            <a:off x="566928" y="347472"/>
+            <a:ext cx="10881360" cy="438912"/>
+          </a:xfrm>
+          <a:prstGeom prst="rect">
+            <a:avLst/>
+          </a:prstGeom>
+          <a:noFill/>
+        </p:spPr>
+        <p:txBody>
+          <a:bodyPr wrap="square" lIns="73152" rIns="73152" tIns="36576" bIns="36576">
+            <a:spAutoFit/>
+          </a:bodyPr>
+          <a:lstStyle/>
+          <a:p>
+            <a:pPr algn="l">
+              <a:spcAft>
+                <a:spcPts val="0"/>
+              </a:spcAft>
+              <a:defRPr sz="3200" b="1">
+                <a:solidFill>
+                  <a:srgbClr val="122C4E"/>
+                </a:solidFill>
+                <a:latin typeface="Noto Sans CJK KR"/>
+              </a:defRPr>
+            </a:pPr>
+            <a:r>
               <a:t>공식 참고 자료</a:t>
             </a:r>
           </a:p>
@@ -13743,7 +14071,7 @@
               </a:defRPr>
             </a:pPr>
             <a:r>
-              <a:t>현재 단계 시작    |    현재 폴더 ~/agv_ws    |    현재 터미널</a:t>
+              <a:t>현재 단계 시작    |    현재 폴더 ~/ros2_curri/agv_ws    |    현재 터미널</a:t>
             </a:r>
           </a:p>
         </p:txBody>
@@ -13859,7 +14187,7 @@
               </a:defRPr>
             </a:pPr>
             <a:r>
-              <a:t>• 현재 폴더: ~/agv_ws</a:t>
+              <a:t>• 현재 폴더: ~/ros2_curri/agv_ws</a:t>
             </a:r>
           </a:p>
           <a:p>
@@ -13930,7 +14258,7 @@
               </a:defRPr>
             </a:pPr>
             <a:r>
-              <a:t>확인: pwd가 ~/agv_ws이고, 이전 모듈의 완료 조건을 한 문장으로 설명할 수 있으면 시작합니다.</a:t>
+              <a:t>확인: pwd가 ~/ros2_curri/agv_ws이고, 이전 모듈의 완료 조건을 한 문장으로 설명할 수 있으면 시작합니다.</a:t>
             </a:r>
           </a:p>
         </p:txBody>
@@ -15045,7 +15373,7 @@
               </a:defRPr>
             </a:pPr>
             <a:r>
-              <a:t>~/agv_ws/src/</a:t>
+              <a:t>~/ros2_curri/agv_ws/src/</a:t>
             </a:r>
             <a:br/>
             <a:r>
@@ -15332,7 +15660,7 @@
               </a:defRPr>
             </a:pPr>
             <a:r>
-              <a:t>현재 단계 1/2    |    현재 폴더 ~/agv_ws    |    현재 터미널</a:t>
+              <a:t>현재 단계 1/2    |    현재 폴더 ~/ros2_curri/agv_ws    |    현재 터미널</a:t>
             </a:r>
           </a:p>
         </p:txBody>
@@ -15782,7 +16110,7 @@
               </a:defRPr>
             </a:pPr>
             <a:r>
-              <a:t>현재 단계 2/2    |    현재 폴더 ~/agv_ws    |    현재 터미널</a:t>
+              <a:t>현재 단계 2/2    |    현재 폴더 ~/ros2_curri/agv_ws    |    현재 터미널</a:t>
             </a:r>
           </a:p>
         </p:txBody>
@@ -16100,7 +16428,7 @@
               </a:defRPr>
             </a:pPr>
             <a:r>
-              <a:t>~/agv_ws/src/agv_bringup/config/sensors.yaml</a:t>
+              <a:t>~/ros2_curri/agv_ws/src/agv_bringup/config/sensors.yaml</a:t>
             </a:r>
           </a:p>
         </p:txBody>
@@ -16236,7 +16564,7 @@
               </a:defRPr>
             </a:pPr>
             <a:r>
-              <a:t>현재 단계 3/4    |    현재 폴더 ~/agv_ws    |    현재 터미널</a:t>
+              <a:t>현재 단계 3/4    |    현재 폴더 ~/ros2_curri/agv_ws    |    현재 터미널</a:t>
             </a:r>
           </a:p>
         </p:txBody>
@@ -16333,11 +16661,11 @@
               </a:defRPr>
             </a:pPr>
             <a:r>
-              <a:t>파일 생성: mkdir -p ~/agv_ws/src/agv_bringup/config</a:t>
+              <a:t>파일 생성: mkdir -p ~/ros2_curri/agv_ws/src/agv_bringup/config</a:t>
             </a:r>
             <a:br/>
             <a:r>
-              <a:t>파일 열기: nano ~/agv_ws/src/agv_bringup/config/sensors.yaml</a:t>
+              <a:t>파일 열기: nano ~/ros2_curri/agv_ws/src/agv_bringup/config/sensors.yaml</a:t>
             </a:r>
           </a:p>
         </p:txBody>

--- a/blocks/D_sensors/M15_sensor_operations/M15_센서_운영과_동기화.pptx
+++ b/blocks/D_sensors/M15_sensor_operations/M15_센서_운영과_동기화.pptx
@@ -31,6 +31,12 @@
     <p:sldId id="279" r:id="rId31"/>
     <p:sldId id="280" r:id="rId32"/>
     <p:sldId id="281" r:id="rId33"/>
+    <p:sldId id="282" r:id="rId34"/>
+    <p:sldId id="283" r:id="rId35"/>
+    <p:sldId id="284" r:id="rId36"/>
+    <p:sldId id="285" r:id="rId37"/>
+    <p:sldId id="286" r:id="rId38"/>
+    <p:sldId id="287" r:id="rId39"/>
   </p:sldIdLst>
   <p:sldSz cx="12191999" cy="6858000" type="screen4x3"/>
   <p:notesSz cx="6858000" cy="9144000"/>
@@ -617,17 +623,22 @@
           <a:lstStyle/>
           <a:p>
             <a:r>
-              <a:t>[설명] ~/ros2_curri/agv_ws/src/agv_gazebo/config/bridge.yaml의 전체 파일을 1/3 구간으로 작성한다.</a:t>
-            </a:r>
-          </a:p>
-          <a:p>
-            <a:r>
-              <a:t>[실행] nano ~/ros2_curri/agv_ws/src/agv_gazebo/config/bridge.yaml</a:t>
-            </a:r>
-          </a:p>
-          <a:p>
-            <a:r>
-              <a:t>[확인] 코드를 저장하고 다음 코드 슬라이드 또는 build 단계로 이동한다.</a:t>
+              <a:t>[설명] Gazebo /clock을 안 쓰면 sensor timestamp와 node 시간이 어긋날 수 있다.</a:t>
+            </a:r>
+          </a:p>
+          <a:p>
+            <a:r>
+              <a:t>[실행] ros2 param get /lidar_processor use_sim_time</a:t>
+            </a:r>
+          </a:p>
+          <a:p>
+            <a:r>
+              <a:t>ros2 topic echo /clock --once</a:t>
+            </a:r>
+          </a:p>
+          <a:p>
+            <a:r>
+              <a:t>[확인] 명령 출력에서 슬라이드의 확인 항목을 찾는다.</a:t>
             </a:r>
           </a:p>
           <a:p>
@@ -637,7 +648,7 @@
           </a:p>
           <a:p>
             <a:r>
-              <a:t>[오류] 들여쓰기·XML 태그·따옴표가 슬라이드와 정확히 같은지 확인한다.</a:t>
+              <a:t>[오류] 오류가 나면 현재 폴더, source, 파일 경로를 먼저 확인한다.</a:t>
             </a:r>
           </a:p>
         </p:txBody>
@@ -707,17 +718,27 @@
           <a:lstStyle/>
           <a:p>
             <a:r>
-              <a:t>[설명] ~/ros2_curri/agv_ws/src/agv_gazebo/config/bridge.yaml의 전체 파일을 2/3 구간으로 작성한다.</a:t>
-            </a:r>
-          </a:p>
-          <a:p>
-            <a:r>
-              <a:t>[실행] nano ~/ros2_curri/agv_ws/src/agv_gazebo/config/bridge.yaml</a:t>
-            </a:r>
-          </a:p>
-          <a:p>
-            <a:r>
-              <a:t>[확인] 코드를 저장하고 다음 코드 슬라이드 또는 build 단계로 이동한다.</a:t>
+              <a:t>[설명] topic이 있어도 QoS가 호환되지 않으면 callback이 받지 못할 수 있다.</a:t>
+            </a:r>
+          </a:p>
+          <a:p>
+            <a:r>
+              <a:t>[실행] ros2 topic hz /scan</a:t>
+            </a:r>
+          </a:p>
+          <a:p>
+            <a:r>
+              <a:t>ros2 topic hz /imu/data</a:t>
+            </a:r>
+          </a:p>
+          <a:p>
+            <a:r>
+              <a:t>ros2 topic info --verbose /scan</a:t>
+            </a:r>
+          </a:p>
+          <a:p>
+            <a:r>
+              <a:t>[확인] 명령 출력에서 슬라이드의 확인 항목을 찾는다.</a:t>
             </a:r>
           </a:p>
           <a:p>
@@ -727,7 +748,7 @@
           </a:p>
           <a:p>
             <a:r>
-              <a:t>[오류] 들여쓰기·XML 태그·따옴표가 슬라이드와 정확히 같은지 확인한다.</a:t>
+              <a:t>[오류] 오류가 나면 현재 폴더, source, 파일 경로를 먼저 확인한다.</a:t>
             </a:r>
           </a:p>
         </p:txBody>
@@ -797,12 +818,12 @@
           <a:lstStyle/>
           <a:p>
             <a:r>
-              <a:t>[설명] ~/ros2_curri/agv_ws/src/agv_gazebo/config/bridge.yaml의 전체 파일을 3/3 구간으로 작성한다.</a:t>
-            </a:r>
-          </a:p>
-          <a:p>
-            <a:r>
-              <a:t>[실행] nano ~/ros2_curri/agv_ws/src/agv_gazebo/config/bridge.yaml</a:t>
+              <a:t>[설명] ~/ros2_curri/agv_ws/src/agv_bringup/config/sensors.yaml의 전체 파일을 1/1 구간으로 작성한다.</a:t>
+            </a:r>
+          </a:p>
+          <a:p>
+            <a:r>
+              <a:t>[실행] nano ~/ros2_curri/agv_ws/src/agv_bringup/config/sensors.yaml</a:t>
             </a:r>
           </a:p>
           <a:p>
@@ -887,12 +908,12 @@
           <a:lstStyle/>
           <a:p>
             <a:r>
-              <a:t>[설명] ~/ros2_curri/agv_ws/src/agv_sensors/agv_sensors/lidar_processor.py의 전체 파일을 1/3 구간으로 작성한다.</a:t>
-            </a:r>
-          </a:p>
-          <a:p>
-            <a:r>
-              <a:t>[실행] nano ~/ros2_curri/agv_ws/src/agv_sensors/agv_sensors/lidar_processor.py</a:t>
+              <a:t>[설명] ~/ros2_curri/agv_ws/src/agv_gazebo/config/bridge.yaml의 전체 파일을 1/3 구간으로 작성한다.</a:t>
+            </a:r>
+          </a:p>
+          <a:p>
+            <a:r>
+              <a:t>[실행] nano ~/ros2_curri/agv_ws/src/agv_gazebo/config/bridge.yaml</a:t>
             </a:r>
           </a:p>
           <a:p>
@@ -977,12 +998,12 @@
           <a:lstStyle/>
           <a:p>
             <a:r>
-              <a:t>[설명] ~/ros2_curri/agv_ws/src/agv_sensors/agv_sensors/lidar_processor.py의 전체 파일을 2/3 구간으로 작성한다.</a:t>
-            </a:r>
-          </a:p>
-          <a:p>
-            <a:r>
-              <a:t>[실행] nano ~/ros2_curri/agv_ws/src/agv_sensors/agv_sensors/lidar_processor.py</a:t>
+              <a:t>[설명] ~/ros2_curri/agv_ws/src/agv_gazebo/config/bridge.yaml의 전체 파일을 2/3 구간으로 작성한다.</a:t>
+            </a:r>
+          </a:p>
+          <a:p>
+            <a:r>
+              <a:t>[실행] nano ~/ros2_curri/agv_ws/src/agv_gazebo/config/bridge.yaml</a:t>
             </a:r>
           </a:p>
           <a:p>
@@ -1067,12 +1088,12 @@
           <a:lstStyle/>
           <a:p>
             <a:r>
-              <a:t>[설명] ~/ros2_curri/agv_ws/src/agv_sensors/agv_sensors/lidar_processor.py의 전체 파일을 3/3 구간으로 작성한다.</a:t>
-            </a:r>
-          </a:p>
-          <a:p>
-            <a:r>
-              <a:t>[실행] nano ~/ros2_curri/agv_ws/src/agv_sensors/agv_sensors/lidar_processor.py</a:t>
+              <a:t>[설명] ~/ros2_curri/agv_ws/src/agv_gazebo/config/bridge.yaml의 전체 파일을 3/3 구간으로 작성한다.</a:t>
+            </a:r>
+          </a:p>
+          <a:p>
+            <a:r>
+              <a:t>[실행] nano ~/ros2_curri/agv_ws/src/agv_gazebo/config/bridge.yaml</a:t>
             </a:r>
           </a:p>
           <a:p>
@@ -1157,12 +1178,12 @@
           <a:lstStyle/>
           <a:p>
             <a:r>
-              <a:t>[설명] ~/ros2_curri/agv_ws/src/agv_sensors/agv_sensors/imu_monitor.py의 전체 파일을 1/3 구간으로 작성한다.</a:t>
-            </a:r>
-          </a:p>
-          <a:p>
-            <a:r>
-              <a:t>[실행] nano ~/ros2_curri/agv_ws/src/agv_sensors/agv_sensors/imu_monitor.py</a:t>
+              <a:t>[설명] ~/ros2_curri/agv_ws/src/agv_sensors/agv_sensors/lidar_processor.py의 전체 파일을 1/3 구간으로 작성한다.</a:t>
+            </a:r>
+          </a:p>
+          <a:p>
+            <a:r>
+              <a:t>[실행] nano ~/ros2_curri/agv_ws/src/agv_sensors/agv_sensors/lidar_processor.py</a:t>
             </a:r>
           </a:p>
           <a:p>
@@ -1247,12 +1268,12 @@
           <a:lstStyle/>
           <a:p>
             <a:r>
-              <a:t>[설명] ~/ros2_curri/agv_ws/src/agv_sensors/agv_sensors/imu_monitor.py의 전체 파일을 2/3 구간으로 작성한다.</a:t>
-            </a:r>
-          </a:p>
-          <a:p>
-            <a:r>
-              <a:t>[실행] nano ~/ros2_curri/agv_ws/src/agv_sensors/agv_sensors/imu_monitor.py</a:t>
+              <a:t>[설명] ~/ros2_curri/agv_ws/src/agv_sensors/agv_sensors/lidar_processor.py의 전체 파일을 2/3 구간으로 작성한다.</a:t>
+            </a:r>
+          </a:p>
+          <a:p>
+            <a:r>
+              <a:t>[실행] nano ~/ros2_curri/agv_ws/src/agv_sensors/agv_sensors/lidar_processor.py</a:t>
             </a:r>
           </a:p>
           <a:p>
@@ -1337,12 +1358,12 @@
           <a:lstStyle/>
           <a:p>
             <a:r>
-              <a:t>[설명] ~/ros2_curri/agv_ws/src/agv_sensors/agv_sensors/imu_monitor.py의 전체 파일을 3/3 구간으로 작성한다.</a:t>
-            </a:r>
-          </a:p>
-          <a:p>
-            <a:r>
-              <a:t>[실행] nano ~/ros2_curri/agv_ws/src/agv_sensors/agv_sensors/imu_monitor.py</a:t>
+              <a:t>[설명] ~/ros2_curri/agv_ws/src/agv_sensors/agv_sensors/lidar_processor.py의 전체 파일을 3/3 구간으로 작성한다.</a:t>
+            </a:r>
+          </a:p>
+          <a:p>
+            <a:r>
+              <a:t>[실행] nano ~/ros2_curri/agv_ws/src/agv_sensors/agv_sensors/lidar_processor.py</a:t>
             </a:r>
           </a:p>
           <a:p>
@@ -1427,17 +1448,17 @@
           <a:lstStyle/>
           <a:p>
             <a:r>
-              <a:t>[설명] build/source/run을 생략 없이 실행한다.</a:t>
-            </a:r>
-          </a:p>
-          <a:p>
-            <a:r>
-              <a:t>[실행] ros2 launch agv_bringup agv_sim.launch.py rviz:=false</a:t>
-            </a:r>
-          </a:p>
-          <a:p>
-            <a:r>
-              <a:t>[확인] 모든 sensor 노드가 같은 시뮬레이션 시간과 기대 publish rate를 사용한다.</a:t>
+              <a:t>[설명] ~/ros2_curri/agv_ws/src/agv_sensors/agv_sensors/imu_monitor.py의 전체 파일을 1/3 구간으로 작성한다.</a:t>
+            </a:r>
+          </a:p>
+          <a:p>
+            <a:r>
+              <a:t>[실행] nano ~/ros2_curri/agv_ws/src/agv_sensors/agv_sensors/imu_monitor.py</a:t>
+            </a:r>
+          </a:p>
+          <a:p>
+            <a:r>
+              <a:t>[확인] 코드를 저장하고 다음 코드 슬라이드 또는 build 단계로 이동한다.</a:t>
             </a:r>
           </a:p>
           <a:p>
@@ -1447,7 +1468,7 @@
           </a:p>
           <a:p>
             <a:r>
-              <a:t>[오류] 오류가 나면 현재 폴더, source, 파일 경로를 먼저 확인한다.</a:t>
+              <a:t>[오류] 들여쓰기·XML 태그·따옴표가 슬라이드와 정확히 같은지 확인한다.</a:t>
             </a:r>
           </a:p>
         </p:txBody>
@@ -1607,17 +1628,17 @@
           <a:lstStyle/>
           <a:p>
             <a:r>
-              <a:t>[설명] 실제 Ubuntu/ROS 2 환경에서 생성한 검증 화면이다.</a:t>
-            </a:r>
-          </a:p>
-          <a:p>
-            <a:r>
-              <a:t>[실행] 슬라이드의 명령 또는 파일 작성 단계를 진행한다.</a:t>
-            </a:r>
-          </a:p>
-          <a:p>
-            <a:r>
-              <a:t>[확인] 캡처의 명령과 다음 슬라이드의 검증 명령을 비교한다.</a:t>
+              <a:t>[설명] ~/ros2_curri/agv_ws/src/agv_sensors/agv_sensors/imu_monitor.py의 전체 파일을 2/3 구간으로 작성한다.</a:t>
+            </a:r>
+          </a:p>
+          <a:p>
+            <a:r>
+              <a:t>[실행] nano ~/ros2_curri/agv_ws/src/agv_sensors/agv_sensors/imu_monitor.py</a:t>
+            </a:r>
+          </a:p>
+          <a:p>
+            <a:r>
+              <a:t>[확인] 코드를 저장하고 다음 코드 슬라이드 또는 build 단계로 이동한다.</a:t>
             </a:r>
           </a:p>
           <a:p>
@@ -1627,7 +1648,7 @@
           </a:p>
           <a:p>
             <a:r>
-              <a:t>[오류] 오류가 나면 현재 폴더, source, 파일 경로를 먼저 확인한다.</a:t>
+              <a:t>[오류] 들여쓰기·XML 태그·따옴표가 슬라이드와 정확히 같은지 확인한다.</a:t>
             </a:r>
           </a:p>
         </p:txBody>
@@ -1697,17 +1718,17 @@
           <a:lstStyle/>
           <a:p>
             <a:r>
-              <a:t>[설명] 실제 Ubuntu/ROS 2 환경에서 생성한 검증 화면이다.</a:t>
-            </a:r>
-          </a:p>
-          <a:p>
-            <a:r>
-              <a:t>[실행] 슬라이드의 명령 또는 파일 작성 단계를 진행한다.</a:t>
-            </a:r>
-          </a:p>
-          <a:p>
-            <a:r>
-              <a:t>[확인] 캡처의 명령과 다음 슬라이드의 검증 명령을 비교한다.</a:t>
+              <a:t>[설명] ~/ros2_curri/agv_ws/src/agv_sensors/agv_sensors/imu_monitor.py의 전체 파일을 3/3 구간으로 작성한다.</a:t>
+            </a:r>
+          </a:p>
+          <a:p>
+            <a:r>
+              <a:t>[실행] nano ~/ros2_curri/agv_ws/src/agv_sensors/agv_sensors/imu_monitor.py</a:t>
+            </a:r>
+          </a:p>
+          <a:p>
+            <a:r>
+              <a:t>[확인] 코드를 저장하고 다음 코드 슬라이드 또는 build 단계로 이동한다.</a:t>
             </a:r>
           </a:p>
           <a:p>
@@ -1717,7 +1738,7 @@
           </a:p>
           <a:p>
             <a:r>
-              <a:t>[오류] 오류가 나면 현재 폴더, source, 파일 경로를 먼저 확인한다.</a:t>
+              <a:t>[오류] 들여쓰기·XML 태그·따옴표가 슬라이드와 정확히 같은지 확인한다.</a:t>
             </a:r>
           </a:p>
         </p:txBody>
@@ -1787,27 +1808,12 @@
           <a:lstStyle/>
           <a:p>
             <a:r>
-              <a:t>[설명] 검증 명령은 GUI 결과와 별도로 실행해 재현 가능한 완료 기준을 만든다.</a:t>
-            </a:r>
-          </a:p>
-          <a:p>
-            <a:r>
-              <a:t>[실행] ros2 topic echo /clock --once</a:t>
-            </a:r>
-          </a:p>
-          <a:p>
-            <a:r>
-              <a:t>ros2 topic hz /scan</a:t>
-            </a:r>
-          </a:p>
-          <a:p>
-            <a:r>
-              <a:t>ros2 topic hz /imu/data</a:t>
-            </a:r>
-          </a:p>
-          <a:p>
-            <a:r>
-              <a:t>ros2 param get /lidar_processor use_sim_time</a:t>
+              <a:t>[설명] build/source/run을 생략 없이 실행한다.</a:t>
+            </a:r>
+          </a:p>
+          <a:p>
+            <a:r>
+              <a:t>[실행] ros2 launch agv_bringup agv_sim.launch.py rviz:=false</a:t>
             </a:r>
           </a:p>
           <a:p>
@@ -1892,7 +1898,7 @@
           <a:lstStyle/>
           <a:p>
             <a:r>
-              <a:t>[설명] 오류를 대신 해결하지 말고 증상부터 우선 확인 순서대로 교육생이 실행하게 한다.</a:t>
+              <a:t>[설명] 실제 Ubuntu/ROS 2 환경에서 생성한 검증 화면이다.</a:t>
             </a:r>
           </a:p>
           <a:p>
@@ -1902,7 +1908,7 @@
           </a:p>
           <a:p>
             <a:r>
-              <a:t>[확인] 수정 뒤 첫 검증 명령을 다시 실행한다.</a:t>
+              <a:t>[확인] ① 명령/설정  ② 정상 출력 또는 화면  ③ 다음 검증 명령으로 재확인</a:t>
             </a:r>
           </a:p>
           <a:p>
@@ -1912,7 +1918,7 @@
           </a:p>
           <a:p>
             <a:r>
-              <a:t>[오류] 슬라이드의 두 대표 오류를 먼저 사용한다.</a:t>
+              <a:t>[오류] 오류가 나면 현재 폴더, source, 파일 경로를 먼저 확인한다.</a:t>
             </a:r>
           </a:p>
         </p:txBody>
@@ -1982,7 +1988,7 @@
           <a:lstStyle/>
           <a:p>
             <a:r>
-              <a:t>[설명] 교육생이 직접 한 값만 바꿔 원인과 결과를 연결하게 한다.</a:t>
+              <a:t>[설명] 실제 Ubuntu/ROS 2 환경에서 생성한 검증 화면이다.</a:t>
             </a:r>
           </a:p>
           <a:p>
@@ -1992,7 +1998,7 @@
           </a:p>
           <a:p>
             <a:r>
-              <a:t>[확인] 원래 값과 변경 값을 모두 기록한다.</a:t>
+              <a:t>[확인] camera가 message를 내보내고 있는지 type·publisher·rate로 확인합니다.</a:t>
             </a:r>
           </a:p>
           <a:p>
@@ -2072,7 +2078,7 @@
           <a:lstStyle/>
           <a:p>
             <a:r>
-              <a:t>[설명] 교육생이 Complete·캡처·로그를 저장했는지 확인하고 다음 모듈의 시작 상태를 읽는다.</a:t>
+              <a:t>[설명] 실제 Ubuntu/ROS 2 환경에서 생성한 검증 화면이다.</a:t>
             </a:r>
           </a:p>
           <a:p>
@@ -2082,7 +2088,7 @@
           </a:p>
           <a:p>
             <a:r>
-              <a:t>[확인] M16 제어 interface 시작 조건을 말할 수 있다.</a:t>
+              <a:t>[확인] SDF 설정값과 실제 range/angle/rate가 논리적으로 맞는지 대조합니다.</a:t>
             </a:r>
           </a:p>
           <a:p>
@@ -2162,7 +2168,7 @@
           <a:lstStyle/>
           <a:p>
             <a:r>
-              <a:t>[설명] 공식 문서는 버전 차이와 확장 학습을 확인할 때 사용한다.</a:t>
+              <a:t>[설명] 실제 Ubuntu/ROS 2 환경에서 생성한 검증 화면이다.</a:t>
             </a:r>
           </a:p>
           <a:p>
@@ -2172,7 +2178,7 @@
           </a:p>
           <a:p>
             <a:r>
-              <a:t>[확인] 학습자는 본문만으로 현재 모듈을 완료한 상태여야 한다.</a:t>
+              <a:t>[확인] IMU도 같은 simulation 시간에 갱신되는지 average rate를 확인합니다.</a:t>
             </a:r>
           </a:p>
           <a:p>
@@ -2183,6 +2189,291 @@
           <a:p>
             <a:r>
               <a:t>[오류] 오류가 나면 현재 폴더, source, 파일 경로를 먼저 확인한다.</a:t>
+            </a:r>
+          </a:p>
+        </p:txBody>
+      </p:sp>
+      <p:sp>
+        <p:nvSpPr>
+          <p:cNvPr id="4" name="Slide Number Placeholder 3"/>
+          <p:cNvSpPr>
+            <a:spLocks noGrp="1"/>
+          </p:cNvSpPr>
+          <p:nvPr>
+            <p:ph type="sldNum" idx="5" sz="quarter"/>
+          </p:nvPr>
+        </p:nvSpPr>
+        <p:spPr/>
+      </p:sp>
+    </p:spTree>
+  </p:cSld>
+  <p:clrMapOvr>
+    <a:masterClrMapping/>
+  </p:clrMapOvr>
+</p:notes>
+</file>
+
+<file path=ppt/notesSlides/notesSlide27.xml><?xml version="1.0" encoding="utf-8"?>
+<p:notes xmlns:a="http://schemas.openxmlformats.org/drawingml/2006/main" xmlns:p="http://schemas.openxmlformats.org/presentationml/2006/main" xmlns:r="http://schemas.openxmlformats.org/officeDocument/2006/relationships">
+  <p:cSld>
+    <p:spTree>
+      <p:nvGrpSpPr>
+        <p:cNvPr id="1" name=""/>
+        <p:cNvGrpSpPr/>
+        <p:nvPr/>
+      </p:nvGrpSpPr>
+      <p:grpSpPr>
+        <a:xfrm>
+          <a:off x="0" y="0"/>
+          <a:ext cx="0" cy="0"/>
+          <a:chOff x="0" y="0"/>
+          <a:chExt cx="0" cy="0"/>
+        </a:xfrm>
+      </p:grpSpPr>
+      <p:sp>
+        <p:nvSpPr>
+          <p:cNvPr id="2" name="Slide Image Placeholder 1"/>
+          <p:cNvSpPr>
+            <a:spLocks noGrp="1"/>
+          </p:cNvSpPr>
+          <p:nvPr>
+            <p:ph type="sldImg" idx="2"/>
+          </p:nvPr>
+        </p:nvSpPr>
+        <p:spPr/>
+      </p:sp>
+      <p:sp>
+        <p:nvSpPr>
+          <p:cNvPr id="3" name="Notes Placeholder 2"/>
+          <p:cNvSpPr>
+            <a:spLocks noGrp="1"/>
+          </p:cNvSpPr>
+          <p:nvPr>
+            <p:ph type="body" idx="3" sz="quarter"/>
+          </p:nvPr>
+        </p:nvSpPr>
+        <p:spPr/>
+        <p:txBody>
+          <a:bodyPr/>
+          <a:lstStyle/>
+          <a:p>
+            <a:r>
+              <a:t>[설명] 실제 Ubuntu/ROS 2 환경에서 생성한 검증 화면이다.</a:t>
+            </a:r>
+          </a:p>
+          <a:p>
+            <a:r>
+              <a:t>[실행] 슬라이드의 명령 또는 파일 작성 단계를 진행한다.</a:t>
+            </a:r>
+          </a:p>
+          <a:p>
+            <a:r>
+              <a:t>[확인] camera·LiDAR·IMU 각각을 화면·terminal·frame 기준으로 교차 확인합니다.</a:t>
+            </a:r>
+          </a:p>
+          <a:p>
+            <a:r>
+              <a:t>[멈춤] 교육생이 현재 체크포인트를 통과할 때까지 기다린다.</a:t>
+            </a:r>
+          </a:p>
+          <a:p>
+            <a:r>
+              <a:t>[오류] 오류가 나면 현재 폴더, source, 파일 경로를 먼저 확인한다.</a:t>
+            </a:r>
+          </a:p>
+        </p:txBody>
+      </p:sp>
+      <p:sp>
+        <p:nvSpPr>
+          <p:cNvPr id="4" name="Slide Number Placeholder 3"/>
+          <p:cNvSpPr>
+            <a:spLocks noGrp="1"/>
+          </p:cNvSpPr>
+          <p:nvPr>
+            <p:ph type="sldNum" idx="5" sz="quarter"/>
+          </p:nvPr>
+        </p:nvSpPr>
+        <p:spPr/>
+      </p:sp>
+    </p:spTree>
+  </p:cSld>
+  <p:clrMapOvr>
+    <a:masterClrMapping/>
+  </p:clrMapOvr>
+</p:notes>
+</file>
+
+<file path=ppt/notesSlides/notesSlide28.xml><?xml version="1.0" encoding="utf-8"?>
+<p:notes xmlns:a="http://schemas.openxmlformats.org/drawingml/2006/main" xmlns:p="http://schemas.openxmlformats.org/presentationml/2006/main" xmlns:r="http://schemas.openxmlformats.org/officeDocument/2006/relationships">
+  <p:cSld>
+    <p:spTree>
+      <p:nvGrpSpPr>
+        <p:cNvPr id="1" name=""/>
+        <p:cNvGrpSpPr/>
+        <p:nvPr/>
+      </p:nvGrpSpPr>
+      <p:grpSpPr>
+        <a:xfrm>
+          <a:off x="0" y="0"/>
+          <a:ext cx="0" cy="0"/>
+          <a:chOff x="0" y="0"/>
+          <a:chExt cx="0" cy="0"/>
+        </a:xfrm>
+      </p:grpSpPr>
+      <p:sp>
+        <p:nvSpPr>
+          <p:cNvPr id="2" name="Slide Image Placeholder 1"/>
+          <p:cNvSpPr>
+            <a:spLocks noGrp="1"/>
+          </p:cNvSpPr>
+          <p:nvPr>
+            <p:ph type="sldImg" idx="2"/>
+          </p:nvPr>
+        </p:nvSpPr>
+        <p:spPr/>
+      </p:sp>
+      <p:sp>
+        <p:nvSpPr>
+          <p:cNvPr id="3" name="Notes Placeholder 2"/>
+          <p:cNvSpPr>
+            <a:spLocks noGrp="1"/>
+          </p:cNvSpPr>
+          <p:nvPr>
+            <p:ph type="body" idx="3" sz="quarter"/>
+          </p:nvPr>
+        </p:nvSpPr>
+        <p:spPr/>
+        <p:txBody>
+          <a:bodyPr/>
+          <a:lstStyle/>
+          <a:p>
+            <a:r>
+              <a:t>[설명] 검증 명령은 GUI 결과와 별도로 실행해 재현 가능한 완료 기준을 만든다.</a:t>
+            </a:r>
+          </a:p>
+          <a:p>
+            <a:r>
+              <a:t>[실행] ros2 topic echo /clock --once</a:t>
+            </a:r>
+          </a:p>
+          <a:p>
+            <a:r>
+              <a:t>ros2 topic hz /scan</a:t>
+            </a:r>
+          </a:p>
+          <a:p>
+            <a:r>
+              <a:t>ros2 topic hz /imu/data</a:t>
+            </a:r>
+          </a:p>
+          <a:p>
+            <a:r>
+              <a:t>ros2 param get /lidar_processor use_sim_time</a:t>
+            </a:r>
+          </a:p>
+          <a:p>
+            <a:r>
+              <a:t>[확인] 모든 sensor 노드가 같은 시뮬레이션 시간과 기대 publish rate를 사용한다.</a:t>
+            </a:r>
+          </a:p>
+          <a:p>
+            <a:r>
+              <a:t>[멈춤] 교육생이 현재 체크포인트를 통과할 때까지 기다린다.</a:t>
+            </a:r>
+          </a:p>
+          <a:p>
+            <a:r>
+              <a:t>[오류] 오류가 나면 현재 폴더, source, 파일 경로를 먼저 확인한다.</a:t>
+            </a:r>
+          </a:p>
+        </p:txBody>
+      </p:sp>
+      <p:sp>
+        <p:nvSpPr>
+          <p:cNvPr id="4" name="Slide Number Placeholder 3"/>
+          <p:cNvSpPr>
+            <a:spLocks noGrp="1"/>
+          </p:cNvSpPr>
+          <p:nvPr>
+            <p:ph type="sldNum" idx="5" sz="quarter"/>
+          </p:nvPr>
+        </p:nvSpPr>
+        <p:spPr/>
+      </p:sp>
+    </p:spTree>
+  </p:cSld>
+  <p:clrMapOvr>
+    <a:masterClrMapping/>
+  </p:clrMapOvr>
+</p:notes>
+</file>
+
+<file path=ppt/notesSlides/notesSlide29.xml><?xml version="1.0" encoding="utf-8"?>
+<p:notes xmlns:a="http://schemas.openxmlformats.org/drawingml/2006/main" xmlns:p="http://schemas.openxmlformats.org/presentationml/2006/main" xmlns:r="http://schemas.openxmlformats.org/officeDocument/2006/relationships">
+  <p:cSld>
+    <p:spTree>
+      <p:nvGrpSpPr>
+        <p:cNvPr id="1" name=""/>
+        <p:cNvGrpSpPr/>
+        <p:nvPr/>
+      </p:nvGrpSpPr>
+      <p:grpSpPr>
+        <a:xfrm>
+          <a:off x="0" y="0"/>
+          <a:ext cx="0" cy="0"/>
+          <a:chOff x="0" y="0"/>
+          <a:chExt cx="0" cy="0"/>
+        </a:xfrm>
+      </p:grpSpPr>
+      <p:sp>
+        <p:nvSpPr>
+          <p:cNvPr id="2" name="Slide Image Placeholder 1"/>
+          <p:cNvSpPr>
+            <a:spLocks noGrp="1"/>
+          </p:cNvSpPr>
+          <p:nvPr>
+            <p:ph type="sldImg" idx="2"/>
+          </p:nvPr>
+        </p:nvSpPr>
+        <p:spPr/>
+      </p:sp>
+      <p:sp>
+        <p:nvSpPr>
+          <p:cNvPr id="3" name="Notes Placeholder 2"/>
+          <p:cNvSpPr>
+            <a:spLocks noGrp="1"/>
+          </p:cNvSpPr>
+          <p:nvPr>
+            <p:ph type="body" idx="3" sz="quarter"/>
+          </p:nvPr>
+        </p:nvSpPr>
+        <p:spPr/>
+        <p:txBody>
+          <a:bodyPr/>
+          <a:lstStyle/>
+          <a:p>
+            <a:r>
+              <a:t>[설명] 오류를 대신 해결하지 말고 증상부터 우선 확인 순서대로 교육생이 실행하게 한다.</a:t>
+            </a:r>
+          </a:p>
+          <a:p>
+            <a:r>
+              <a:t>[실행] 슬라이드의 명령 또는 파일 작성 단계를 진행한다.</a:t>
+            </a:r>
+          </a:p>
+          <a:p>
+            <a:r>
+              <a:t>[확인] 수정 뒤 첫 검증 명령을 다시 실행한다.</a:t>
+            </a:r>
+          </a:p>
+          <a:p>
+            <a:r>
+              <a:t>[멈춤] 교육생이 현재 체크포인트를 통과할 때까지 기다린다.</a:t>
+            </a:r>
+          </a:p>
+          <a:p>
+            <a:r>
+              <a:t>[오류] 슬라이드의 두 대표 오류를 먼저 사용한다.</a:t>
             </a:r>
           </a:p>
         </p:txBody>
@@ -2297,6 +2588,276 @@
 </p:notes>
 </file>
 
+<file path=ppt/notesSlides/notesSlide30.xml><?xml version="1.0" encoding="utf-8"?>
+<p:notes xmlns:a="http://schemas.openxmlformats.org/drawingml/2006/main" xmlns:p="http://schemas.openxmlformats.org/presentationml/2006/main" xmlns:r="http://schemas.openxmlformats.org/officeDocument/2006/relationships">
+  <p:cSld>
+    <p:spTree>
+      <p:nvGrpSpPr>
+        <p:cNvPr id="1" name=""/>
+        <p:cNvGrpSpPr/>
+        <p:nvPr/>
+      </p:nvGrpSpPr>
+      <p:grpSpPr>
+        <a:xfrm>
+          <a:off x="0" y="0"/>
+          <a:ext cx="0" cy="0"/>
+          <a:chOff x="0" y="0"/>
+          <a:chExt cx="0" cy="0"/>
+        </a:xfrm>
+      </p:grpSpPr>
+      <p:sp>
+        <p:nvSpPr>
+          <p:cNvPr id="2" name="Slide Image Placeholder 1"/>
+          <p:cNvSpPr>
+            <a:spLocks noGrp="1"/>
+          </p:cNvSpPr>
+          <p:nvPr>
+            <p:ph type="sldImg" idx="2"/>
+          </p:nvPr>
+        </p:nvSpPr>
+        <p:spPr/>
+      </p:sp>
+      <p:sp>
+        <p:nvSpPr>
+          <p:cNvPr id="3" name="Notes Placeholder 2"/>
+          <p:cNvSpPr>
+            <a:spLocks noGrp="1"/>
+          </p:cNvSpPr>
+          <p:nvPr>
+            <p:ph type="body" idx="3" sz="quarter"/>
+          </p:nvPr>
+        </p:nvSpPr>
+        <p:spPr/>
+        <p:txBody>
+          <a:bodyPr/>
+          <a:lstStyle/>
+          <a:p>
+            <a:r>
+              <a:t>[설명] 교육생이 직접 한 값만 바꿔 원인과 결과를 연결하게 한다.</a:t>
+            </a:r>
+          </a:p>
+          <a:p>
+            <a:r>
+              <a:t>[실행] 슬라이드의 명령 또는 파일 작성 단계를 진행한다.</a:t>
+            </a:r>
+          </a:p>
+          <a:p>
+            <a:r>
+              <a:t>[확인] 원래 값과 변경 값을 모두 기록한다.</a:t>
+            </a:r>
+          </a:p>
+          <a:p>
+            <a:r>
+              <a:t>[멈춤] 교육생이 현재 체크포인트를 통과할 때까지 기다린다.</a:t>
+            </a:r>
+          </a:p>
+          <a:p>
+            <a:r>
+              <a:t>[오류] 오류가 나면 현재 폴더, source, 파일 경로를 먼저 확인한다.</a:t>
+            </a:r>
+          </a:p>
+        </p:txBody>
+      </p:sp>
+      <p:sp>
+        <p:nvSpPr>
+          <p:cNvPr id="4" name="Slide Number Placeholder 3"/>
+          <p:cNvSpPr>
+            <a:spLocks noGrp="1"/>
+          </p:cNvSpPr>
+          <p:nvPr>
+            <p:ph type="sldNum" idx="5" sz="quarter"/>
+          </p:nvPr>
+        </p:nvSpPr>
+        <p:spPr/>
+      </p:sp>
+    </p:spTree>
+  </p:cSld>
+  <p:clrMapOvr>
+    <a:masterClrMapping/>
+  </p:clrMapOvr>
+</p:notes>
+</file>
+
+<file path=ppt/notesSlides/notesSlide31.xml><?xml version="1.0" encoding="utf-8"?>
+<p:notes xmlns:a="http://schemas.openxmlformats.org/drawingml/2006/main" xmlns:p="http://schemas.openxmlformats.org/presentationml/2006/main" xmlns:r="http://schemas.openxmlformats.org/officeDocument/2006/relationships">
+  <p:cSld>
+    <p:spTree>
+      <p:nvGrpSpPr>
+        <p:cNvPr id="1" name=""/>
+        <p:cNvGrpSpPr/>
+        <p:nvPr/>
+      </p:nvGrpSpPr>
+      <p:grpSpPr>
+        <a:xfrm>
+          <a:off x="0" y="0"/>
+          <a:ext cx="0" cy="0"/>
+          <a:chOff x="0" y="0"/>
+          <a:chExt cx="0" cy="0"/>
+        </a:xfrm>
+      </p:grpSpPr>
+      <p:sp>
+        <p:nvSpPr>
+          <p:cNvPr id="2" name="Slide Image Placeholder 1"/>
+          <p:cNvSpPr>
+            <a:spLocks noGrp="1"/>
+          </p:cNvSpPr>
+          <p:nvPr>
+            <p:ph type="sldImg" idx="2"/>
+          </p:nvPr>
+        </p:nvSpPr>
+        <p:spPr/>
+      </p:sp>
+      <p:sp>
+        <p:nvSpPr>
+          <p:cNvPr id="3" name="Notes Placeholder 2"/>
+          <p:cNvSpPr>
+            <a:spLocks noGrp="1"/>
+          </p:cNvSpPr>
+          <p:nvPr>
+            <p:ph type="body" idx="3" sz="quarter"/>
+          </p:nvPr>
+        </p:nvSpPr>
+        <p:spPr/>
+        <p:txBody>
+          <a:bodyPr/>
+          <a:lstStyle/>
+          <a:p>
+            <a:r>
+              <a:t>[설명] 교육생이 Complete·캡처·로그를 저장했는지 확인하고 다음 모듈의 시작 상태를 읽는다.</a:t>
+            </a:r>
+          </a:p>
+          <a:p>
+            <a:r>
+              <a:t>[실행] 슬라이드의 명령 또는 파일 작성 단계를 진행한다.</a:t>
+            </a:r>
+          </a:p>
+          <a:p>
+            <a:r>
+              <a:t>[확인] M16 제어 interface 시작 조건을 말할 수 있다.</a:t>
+            </a:r>
+          </a:p>
+          <a:p>
+            <a:r>
+              <a:t>[멈춤] 교육생이 현재 체크포인트를 통과할 때까지 기다린다.</a:t>
+            </a:r>
+          </a:p>
+          <a:p>
+            <a:r>
+              <a:t>[오류] 오류가 나면 현재 폴더, source, 파일 경로를 먼저 확인한다.</a:t>
+            </a:r>
+          </a:p>
+        </p:txBody>
+      </p:sp>
+      <p:sp>
+        <p:nvSpPr>
+          <p:cNvPr id="4" name="Slide Number Placeholder 3"/>
+          <p:cNvSpPr>
+            <a:spLocks noGrp="1"/>
+          </p:cNvSpPr>
+          <p:nvPr>
+            <p:ph type="sldNum" idx="5" sz="quarter"/>
+          </p:nvPr>
+        </p:nvSpPr>
+        <p:spPr/>
+      </p:sp>
+    </p:spTree>
+  </p:cSld>
+  <p:clrMapOvr>
+    <a:masterClrMapping/>
+  </p:clrMapOvr>
+</p:notes>
+</file>
+
+<file path=ppt/notesSlides/notesSlide32.xml><?xml version="1.0" encoding="utf-8"?>
+<p:notes xmlns:a="http://schemas.openxmlformats.org/drawingml/2006/main" xmlns:p="http://schemas.openxmlformats.org/presentationml/2006/main" xmlns:r="http://schemas.openxmlformats.org/officeDocument/2006/relationships">
+  <p:cSld>
+    <p:spTree>
+      <p:nvGrpSpPr>
+        <p:cNvPr id="1" name=""/>
+        <p:cNvGrpSpPr/>
+        <p:nvPr/>
+      </p:nvGrpSpPr>
+      <p:grpSpPr>
+        <a:xfrm>
+          <a:off x="0" y="0"/>
+          <a:ext cx="0" cy="0"/>
+          <a:chOff x="0" y="0"/>
+          <a:chExt cx="0" cy="0"/>
+        </a:xfrm>
+      </p:grpSpPr>
+      <p:sp>
+        <p:nvSpPr>
+          <p:cNvPr id="2" name="Slide Image Placeholder 1"/>
+          <p:cNvSpPr>
+            <a:spLocks noGrp="1"/>
+          </p:cNvSpPr>
+          <p:nvPr>
+            <p:ph type="sldImg" idx="2"/>
+          </p:nvPr>
+        </p:nvSpPr>
+        <p:spPr/>
+      </p:sp>
+      <p:sp>
+        <p:nvSpPr>
+          <p:cNvPr id="3" name="Notes Placeholder 2"/>
+          <p:cNvSpPr>
+            <a:spLocks noGrp="1"/>
+          </p:cNvSpPr>
+          <p:nvPr>
+            <p:ph type="body" idx="3" sz="quarter"/>
+          </p:nvPr>
+        </p:nvSpPr>
+        <p:spPr/>
+        <p:txBody>
+          <a:bodyPr/>
+          <a:lstStyle/>
+          <a:p>
+            <a:r>
+              <a:t>[설명] 공식 문서는 버전 차이와 확장 학습을 확인할 때 사용한다.</a:t>
+            </a:r>
+          </a:p>
+          <a:p>
+            <a:r>
+              <a:t>[실행] 슬라이드의 명령 또는 파일 작성 단계를 진행한다.</a:t>
+            </a:r>
+          </a:p>
+          <a:p>
+            <a:r>
+              <a:t>[확인] 학습자는 본문만으로 현재 모듈을 완료한 상태여야 한다.</a:t>
+            </a:r>
+          </a:p>
+          <a:p>
+            <a:r>
+              <a:t>[멈춤] 교육생이 현재 체크포인트를 통과할 때까지 기다린다.</a:t>
+            </a:r>
+          </a:p>
+          <a:p>
+            <a:r>
+              <a:t>[오류] 오류가 나면 현재 폴더, source, 파일 경로를 먼저 확인한다.</a:t>
+            </a:r>
+          </a:p>
+        </p:txBody>
+      </p:sp>
+      <p:sp>
+        <p:nvSpPr>
+          <p:cNvPr id="4" name="Slide Number Placeholder 3"/>
+          <p:cNvSpPr>
+            <a:spLocks noGrp="1"/>
+          </p:cNvSpPr>
+          <p:nvPr>
+            <p:ph type="sldNum" idx="5" sz="quarter"/>
+          </p:nvPr>
+        </p:nvSpPr>
+        <p:spPr/>
+      </p:sp>
+    </p:spTree>
+  </p:cSld>
+  <p:clrMapOvr>
+    <a:masterClrMapping/>
+  </p:clrMapOvr>
+</p:notes>
+</file>
+
 <file path=ppt/notesSlides/notesSlide4.xml><?xml version="1.0" encoding="utf-8"?>
 <p:notes xmlns:a="http://schemas.openxmlformats.org/drawingml/2006/main" xmlns:p="http://schemas.openxmlformats.org/presentationml/2006/main" xmlns:r="http://schemas.openxmlformats.org/officeDocument/2006/relationships">
   <p:cSld>
@@ -2612,22 +3173,17 @@
           <a:lstStyle/>
           <a:p>
             <a:r>
-              <a:t>[설명] Gazebo /clock을 안 쓰면 sensor timestamp와 node 시간이 어긋날 수 있다.</a:t>
-            </a:r>
-          </a:p>
-          <a:p>
-            <a:r>
-              <a:t>[실행] ros2 param get /lidar_processor use_sim_time</a:t>
-            </a:r>
-          </a:p>
-          <a:p>
-            <a:r>
-              <a:t>ros2 topic echo /clock --once</a:t>
-            </a:r>
-          </a:p>
-          <a:p>
-            <a:r>
-              <a:t>[확인] 명령 출력에서 슬라이드의 확인 항목을 찾는다.</a:t>
+              <a:t>[설명] 파일을 코드 문법보다 먼저 역할·사용법·확인 화면으로 설명한다.</a:t>
+            </a:r>
+          </a:p>
+          <a:p>
+            <a:r>
+              <a:t>[실행] 슬라이드의 명령 또는 파일 작성 단계를 진행한다.</a:t>
+            </a:r>
+          </a:p>
+          <a:p>
+            <a:r>
+              <a:t>[확인] 교육생이 각 파일의 산출물과 확인 위치를 말할 수 있다.</a:t>
             </a:r>
           </a:p>
           <a:p>
@@ -2707,27 +3263,17 @@
           <a:lstStyle/>
           <a:p>
             <a:r>
-              <a:t>[설명] topic이 있어도 QoS가 호환되지 않으면 callback이 받지 못할 수 있다.</a:t>
-            </a:r>
-          </a:p>
-          <a:p>
-            <a:r>
-              <a:t>[실행] ros2 topic hz /scan</a:t>
-            </a:r>
-          </a:p>
-          <a:p>
-            <a:r>
-              <a:t>ros2 topic hz /imu/data</a:t>
-            </a:r>
-          </a:p>
-          <a:p>
-            <a:r>
-              <a:t>ros2 topic info --verbose /scan</a:t>
-            </a:r>
-          </a:p>
-          <a:p>
-            <a:r>
-              <a:t>[확인] 명령 출력에서 슬라이드의 확인 항목을 찾는다.</a:t>
+              <a:t>[설명] 파일을 코드 문법보다 먼저 역할·사용법·확인 화면으로 설명한다.</a:t>
+            </a:r>
+          </a:p>
+          <a:p>
+            <a:r>
+              <a:t>[실행] 슬라이드의 명령 또는 파일 작성 단계를 진행한다.</a:t>
+            </a:r>
+          </a:p>
+          <a:p>
+            <a:r>
+              <a:t>[확인] 교육생이 각 파일의 산출물과 확인 위치를 말할 수 있다.</a:t>
             </a:r>
           </a:p>
           <a:p>
@@ -2807,17 +3353,17 @@
           <a:lstStyle/>
           <a:p>
             <a:r>
-              <a:t>[설명] ~/ros2_curri/agv_ws/src/agv_bringup/config/sensors.yaml의 전체 파일을 1/1 구간으로 작성한다.</a:t>
-            </a:r>
-          </a:p>
-          <a:p>
-            <a:r>
-              <a:t>[실행] nano ~/ros2_curri/agv_ws/src/agv_bringup/config/sensors.yaml</a:t>
-            </a:r>
-          </a:p>
-          <a:p>
-            <a:r>
-              <a:t>[확인] 코드를 저장하고 다음 코드 슬라이드 또는 build 단계로 이동한다.</a:t>
+              <a:t>[설명] 센서를 동시에 운영할 때는 ‘topic이 있다’보다 시간·QoS·frame·rate가 서로 맞는지가 중요합니다.</a:t>
+            </a:r>
+          </a:p>
+          <a:p>
+            <a:r>
+              <a:t>[실행] 슬라이드의 명령 또는 파일 작성 단계를 진행한다.</a:t>
+            </a:r>
+          </a:p>
+          <a:p>
+            <a:r>
+              <a:t>[확인] camera/LiDAR/IMU terminal과 RViz를 함께 열어 이름·rate·Fixed Frame을 대조합니다.</a:t>
             </a:r>
           </a:p>
           <a:p>
@@ -2827,7 +3373,7 @@
           </a:p>
           <a:p>
             <a:r>
-              <a:t>[오류] 들여쓰기·XML 태그·따옴표가 슬라이드와 정확히 같은지 확인한다.</a:t>
+              <a:t>[오류] 오류가 나면 현재 폴더, source, 파일 경로를 먼저 확인한다.</a:t>
             </a:r>
           </a:p>
         </p:txBody>
@@ -6200,7 +6746,7 @@
               </a:defRPr>
             </a:pPr>
             <a:r>
-              <a:t>파일을 새로 만들고 저장한다 (1/3)</a:t>
+              <a:t>시뮬레이션 시간을 설정한다</a:t>
             </a:r>
           </a:p>
         </p:txBody>
@@ -6239,7 +6785,7 @@
               </a:defRPr>
             </a:pPr>
             <a:r>
-              <a:t>~/ros2_curri/agv_ws/src/agv_gazebo/config/bridge.yaml</a:t>
+              <a:t>한 장에는 한 행동만 수행합니다.</a:t>
             </a:r>
           </a:p>
         </p:txBody>
@@ -6375,7 +6921,7 @@
               </a:defRPr>
             </a:pPr>
             <a:r>
-              <a:t>현재 단계 4/7    |    현재 폴더 ~/ros2_curri/agv_ws    |    현재 터미널</a:t>
+              <a:t>현재 단계 1/2    |    현재 폴더 ~/ros2_curri/agv_ws    |    현재 터미널</a:t>
             </a:r>
           </a:p>
         </p:txBody>
@@ -6388,25 +6934,64 @@
         </p:nvSpPr>
         <p:spPr>
           <a:xfrm>
-            <a:off x="658368" y="1627632"/>
-            <a:ext cx="10972800" cy="256032"/>
-          </a:xfrm>
-          <a:prstGeom prst="rect">
-            <a:avLst/>
-          </a:prstGeom>
-          <a:noFill/>
-        </p:spPr>
-        <p:txBody>
-          <a:bodyPr wrap="square" lIns="73152" rIns="73152" tIns="36576" bIns="36576">
-            <a:spAutoFit/>
-          </a:bodyPr>
-          <a:lstStyle/>
-          <a:p>
-            <a:pPr algn="l">
-              <a:spcAft>
-                <a:spcPts val="0"/>
-              </a:spcAft>
-              <a:defRPr sz="1500" b="1">
+            <a:off x="676656" y="1764792"/>
+            <a:ext cx="1828800" cy="347472"/>
+          </a:xfrm>
+          <a:prstGeom prst="rect">
+            <a:avLst/>
+          </a:prstGeom>
+          <a:noFill/>
+        </p:spPr>
+        <p:txBody>
+          <a:bodyPr wrap="square" lIns="73152" rIns="73152" tIns="36576" bIns="36576">
+            <a:spAutoFit/>
+          </a:bodyPr>
+          <a:lstStyle/>
+          <a:p>
+            <a:pPr algn="l">
+              <a:spcAft>
+                <a:spcPts val="0"/>
+              </a:spcAft>
+              <a:defRPr sz="1800" b="1">
+                <a:solidFill>
+                  <a:srgbClr val="225B9B"/>
+                </a:solidFill>
+                <a:latin typeface="Noto Sans CJK KR"/>
+              </a:defRPr>
+            </a:pPr>
+            <a:r>
+              <a:t>왜 하는가</a:t>
+            </a:r>
+          </a:p>
+        </p:txBody>
+      </p:sp>
+      <p:sp>
+        <p:nvSpPr>
+          <p:cNvPr id="8" name="TextBox 7"/>
+          <p:cNvSpPr txBox="1"/>
+          <p:nvPr/>
+        </p:nvSpPr>
+        <p:spPr>
+          <a:xfrm>
+            <a:off x="676656" y="2103120"/>
+            <a:ext cx="10789920" cy="512064"/>
+          </a:xfrm>
+          <a:prstGeom prst="rect">
+            <a:avLst/>
+          </a:prstGeom>
+          <a:noFill/>
+        </p:spPr>
+        <p:txBody>
+          <a:bodyPr wrap="square" lIns="73152" rIns="73152" tIns="36576" bIns="36576">
+            <a:spAutoFit/>
+          </a:bodyPr>
+          <a:lstStyle/>
+          <a:p>
+            <a:pPr algn="l">
+              <a:spcAft>
+                <a:spcPts val="0"/>
+              </a:spcAft>
+              <a:defRPr sz="2000" b="0">
                 <a:solidFill>
                   <a:srgbClr val="122C4E"/>
                 </a:solidFill>
@@ -6414,85 +6999,23 @@
               </a:defRPr>
             </a:pPr>
             <a:r>
-              <a:t>이번 단계: 파일의 전체 내용을 중간 생략 없이 작성합니다. 아래 줄 범위를 끝까지 입력하세요.</a:t>
-            </a:r>
-          </a:p>
-        </p:txBody>
-      </p:sp>
-      <p:sp>
-        <p:nvSpPr>
-          <p:cNvPr id="8" name="Rectangle 7"/>
+              <a:t>Gazebo /clock을 안 쓰면 sensor timestamp와 node 시간이 어긋날 수 있다.</a:t>
+            </a:r>
+          </a:p>
+        </p:txBody>
+      </p:sp>
+      <p:sp>
+        <p:nvSpPr>
+          <p:cNvPr id="9" name="Rounded Rectangle 8"/>
           <p:cNvSpPr/>
           <p:nvPr/>
         </p:nvSpPr>
         <p:spPr>
           <a:xfrm>
-            <a:off x="658368" y="1956816"/>
-            <a:ext cx="10972800" cy="603504"/>
-          </a:xfrm>
-          <a:prstGeom prst="rect">
-            <a:avLst/>
-          </a:prstGeom>
-          <a:solidFill>
-            <a:srgbClr val="F4F7FB"/>
-          </a:solidFill>
-          <a:ln>
-            <a:solidFill>
-              <a:srgbClr val="F4F7FB"/>
-            </a:solidFill>
-          </a:ln>
-        </p:spPr>
-        <p:style>
-          <a:lnRef idx="1">
-            <a:schemeClr val="accent1"/>
-          </a:lnRef>
-          <a:fillRef idx="3">
-            <a:schemeClr val="accent1"/>
-          </a:fillRef>
-          <a:effectRef idx="2">
-            <a:schemeClr val="accent1"/>
-          </a:effectRef>
-          <a:fontRef idx="minor">
-            <a:schemeClr val="lt1"/>
-          </a:fontRef>
-        </p:style>
-        <p:txBody>
-          <a:bodyPr rtlCol="0" anchor="ctr" wrap="square" lIns="73152" rIns="73152" tIns="36576" bIns="36576"/>
-          <a:lstStyle/>
-          <a:p>
-            <a:pPr algn="l">
-              <a:spcAft>
-                <a:spcPts val="0"/>
-              </a:spcAft>
-              <a:defRPr sz="1400" b="0">
-                <a:solidFill>
-                  <a:srgbClr val="122C4E"/>
-                </a:solidFill>
-                <a:latin typeface="DejaVu Sans Mono"/>
-              </a:defRPr>
-            </a:pPr>
-            <a:r>
-              <a:t>파일 생성: mkdir -p ~/ros2_curri/agv_ws/src/agv_gazebo/config</a:t>
-            </a:r>
-            <a:br/>
-            <a:r>
-              <a:t>파일 열기: nano ~/ros2_curri/agv_ws/src/agv_gazebo/config/bridge.yaml</a:t>
-            </a:r>
-          </a:p>
-        </p:txBody>
-      </p:sp>
-      <p:sp>
-        <p:nvSpPr>
-          <p:cNvPr id="9" name="Rectangle 8"/>
-          <p:cNvSpPr/>
-          <p:nvPr/>
-        </p:nvSpPr>
-        <p:spPr>
-          <a:xfrm>
-            <a:off x="658368" y="2706624"/>
-            <a:ext cx="10972800" cy="3364992"/>
-          </a:xfrm>
-          <a:prstGeom prst="rect">
+            <a:off x="676656" y="2871216"/>
+            <a:ext cx="10835640" cy="2331720"/>
+          </a:xfrm>
+          <a:prstGeom prst="roundRect">
             <a:avLst/>
           </a:prstGeom>
           <a:solidFill>
@@ -6519,14 +7042,14 @@
           </a:fontRef>
         </p:style>
         <p:txBody>
-          <a:bodyPr rtlCol="0" anchor="ctr" wrap="square" lIns="164592" rIns="164592" tIns="109728" bIns="36576"/>
-          <a:lstStyle/>
-          <a:p>
-            <a:pPr algn="l">
-              <a:spcAft>
-                <a:spcPts val="0"/>
-              </a:spcAft>
-              <a:defRPr sz="1400" b="0">
+          <a:bodyPr rtlCol="0" anchor="ctr" wrap="square" lIns="73152" rIns="73152" tIns="36576" bIns="36576"/>
+          <a:lstStyle/>
+          <a:p>
+            <a:pPr algn="l">
+              <a:spcAft>
+                <a:spcPts val="0"/>
+              </a:spcAft>
+              <a:defRPr sz="1600" b="0">
                 <a:solidFill>
                   <a:srgbClr val="FFFFFF"/>
                 </a:solidFill>
@@ -6534,51 +7057,11 @@
               </a:defRPr>
             </a:pPr>
             <a:r>
-              <a:t>- ros_topic_name: "/cmd_vel"</a:t>
+              <a:t>ros2 param get /lidar_processor use_sim_time</a:t>
             </a:r>
             <a:br/>
             <a:r>
-              <a:t>  gz_topic_name: "/cmd_vel"</a:t>
-            </a:r>
-            <a:br/>
-            <a:r>
-              <a:t>  ros_type_name: "geometry_msgs/msg/Twist"</a:t>
-            </a:r>
-            <a:br/>
-            <a:r>
-              <a:t>  gz_type_name: "gz.msgs.Twist"</a:t>
-            </a:r>
-            <a:br/>
-            <a:r>
-              <a:t>  direction: ROS_TO_GZ</a:t>
-            </a:r>
-            <a:br/>
-            <a:r>
-              <a:t>- ros_topic_name: "/odom"</a:t>
-            </a:r>
-            <a:br/>
-            <a:r>
-              <a:t>  gz_topic_name: "/odom"</a:t>
-            </a:r>
-            <a:br/>
-            <a:r>
-              <a:t>  ros_type_name: "nav_msgs/msg/Odometry"</a:t>
-            </a:r>
-            <a:br/>
-            <a:r>
-              <a:t>  gz_type_name: "gz.msgs.Odometry"</a:t>
-            </a:r>
-            <a:br/>
-            <a:r>
-              <a:t>  direction: GZ_TO_ROS</a:t>
-            </a:r>
-            <a:br/>
-            <a:r>
-              <a:t>- ros_topic_name: "/scan"</a:t>
-            </a:r>
-            <a:br/>
-            <a:r>
-              <a:t>  gz_topic_name: "/scan"</a:t>
+              <a:t>ros2 topic echo /clock --once</a:t>
             </a:r>
           </a:p>
         </p:txBody>
@@ -6591,33 +7074,72 @@
         </p:nvSpPr>
         <p:spPr>
           <a:xfrm>
-            <a:off x="749808" y="6181344"/>
-            <a:ext cx="10789920" cy="201168"/>
-          </a:xfrm>
-          <a:prstGeom prst="rect">
-            <a:avLst/>
-          </a:prstGeom>
-          <a:noFill/>
-        </p:spPr>
-        <p:txBody>
-          <a:bodyPr wrap="square" lIns="73152" rIns="73152" tIns="36576" bIns="36576">
-            <a:spAutoFit/>
-          </a:bodyPr>
-          <a:lstStyle/>
-          <a:p>
-            <a:pPr algn="l">
-              <a:spcAft>
-                <a:spcPts val="0"/>
-              </a:spcAft>
-              <a:defRPr sz="1000" b="0">
-                <a:solidFill>
-                  <a:srgbClr val="5C6672"/>
-                </a:solidFill>
-                <a:latin typeface="Noto Sans CJK KR"/>
-              </a:defRPr>
-            </a:pPr>
-            <a:r>
-              <a:t>파일 전체 1/3 · 이 슬라이드 다음에 같은 파일의 나머지 줄이 이어집니다.</a:t>
+            <a:off x="768096" y="5468112"/>
+            <a:ext cx="1143000" cy="256032"/>
+          </a:xfrm>
+          <a:prstGeom prst="rect">
+            <a:avLst/>
+          </a:prstGeom>
+          <a:noFill/>
+        </p:spPr>
+        <p:txBody>
+          <a:bodyPr wrap="square" lIns="73152" rIns="73152" tIns="36576" bIns="36576">
+            <a:spAutoFit/>
+          </a:bodyPr>
+          <a:lstStyle/>
+          <a:p>
+            <a:pPr algn="l">
+              <a:spcAft>
+                <a:spcPts val="0"/>
+              </a:spcAft>
+              <a:defRPr sz="1800" b="1">
+                <a:solidFill>
+                  <a:srgbClr val="2A8B5A"/>
+                </a:solidFill>
+                <a:latin typeface="Noto Sans CJK KR"/>
+              </a:defRPr>
+            </a:pPr>
+            <a:r>
+              <a:t>확인</a:t>
+            </a:r>
+          </a:p>
+        </p:txBody>
+      </p:sp>
+      <p:sp>
+        <p:nvSpPr>
+          <p:cNvPr id="11" name="TextBox 10"/>
+          <p:cNvSpPr txBox="1"/>
+          <p:nvPr/>
+        </p:nvSpPr>
+        <p:spPr>
+          <a:xfrm>
+            <a:off x="768096" y="5742432"/>
+            <a:ext cx="10561320" cy="347472"/>
+          </a:xfrm>
+          <a:prstGeom prst="rect">
+            <a:avLst/>
+          </a:prstGeom>
+          <a:noFill/>
+        </p:spPr>
+        <p:txBody>
+          <a:bodyPr wrap="square" lIns="73152" rIns="73152" tIns="36576" bIns="36576">
+            <a:spAutoFit/>
+          </a:bodyPr>
+          <a:lstStyle/>
+          <a:p>
+            <a:pPr algn="l">
+              <a:spcAft>
+                <a:spcPts val="0"/>
+              </a:spcAft>
+              <a:defRPr sz="1800" b="0">
+                <a:solidFill>
+                  <a:srgbClr val="122C4E"/>
+                </a:solidFill>
+                <a:latin typeface="Noto Sans CJK KR"/>
+              </a:defRPr>
+            </a:pPr>
+            <a:r>
+              <a:t>명령의 출력에서 topic·frame·파일 이름 또는 성공 메시지를 찾으면 이 단계가 완료됩니다.</a:t>
             </a:r>
           </a:p>
         </p:txBody>
@@ -6674,7 +7196,7 @@
               </a:defRPr>
             </a:pPr>
             <a:r>
-              <a:t>파일을 계속 작성하고 저장한다 (2/3)</a:t>
+              <a:t>rate와 QoS를 점검한다</a:t>
             </a:r>
           </a:p>
         </p:txBody>
@@ -6713,7 +7235,7 @@
               </a:defRPr>
             </a:pPr>
             <a:r>
-              <a:t>~/ros2_curri/agv_ws/src/agv_gazebo/config/bridge.yaml</a:t>
+              <a:t>한 장에는 한 행동만 수행합니다.</a:t>
             </a:r>
           </a:p>
         </p:txBody>
@@ -6849,7 +7371,7 @@
               </a:defRPr>
             </a:pPr>
             <a:r>
-              <a:t>현재 단계 5/7    |    현재 폴더 ~/ros2_curri/agv_ws    |    현재 터미널</a:t>
+              <a:t>현재 단계 2/2    |    현재 폴더 ~/ros2_curri/agv_ws    |    현재 터미널</a:t>
             </a:r>
           </a:p>
         </p:txBody>
@@ -6862,25 +7384,64 @@
         </p:nvSpPr>
         <p:spPr>
           <a:xfrm>
-            <a:off x="658368" y="1627632"/>
-            <a:ext cx="10972800" cy="256032"/>
-          </a:xfrm>
-          <a:prstGeom prst="rect">
-            <a:avLst/>
-          </a:prstGeom>
-          <a:noFill/>
-        </p:spPr>
-        <p:txBody>
-          <a:bodyPr wrap="square" lIns="73152" rIns="73152" tIns="36576" bIns="36576">
-            <a:spAutoFit/>
-          </a:bodyPr>
-          <a:lstStyle/>
-          <a:p>
-            <a:pPr algn="l">
-              <a:spcAft>
-                <a:spcPts val="0"/>
-              </a:spcAft>
-              <a:defRPr sz="1500" b="1">
+            <a:off x="676656" y="1764792"/>
+            <a:ext cx="1828800" cy="347472"/>
+          </a:xfrm>
+          <a:prstGeom prst="rect">
+            <a:avLst/>
+          </a:prstGeom>
+          <a:noFill/>
+        </p:spPr>
+        <p:txBody>
+          <a:bodyPr wrap="square" lIns="73152" rIns="73152" tIns="36576" bIns="36576">
+            <a:spAutoFit/>
+          </a:bodyPr>
+          <a:lstStyle/>
+          <a:p>
+            <a:pPr algn="l">
+              <a:spcAft>
+                <a:spcPts val="0"/>
+              </a:spcAft>
+              <a:defRPr sz="1800" b="1">
+                <a:solidFill>
+                  <a:srgbClr val="225B9B"/>
+                </a:solidFill>
+                <a:latin typeface="Noto Sans CJK KR"/>
+              </a:defRPr>
+            </a:pPr>
+            <a:r>
+              <a:t>왜 하는가</a:t>
+            </a:r>
+          </a:p>
+        </p:txBody>
+      </p:sp>
+      <p:sp>
+        <p:nvSpPr>
+          <p:cNvPr id="8" name="TextBox 7"/>
+          <p:cNvSpPr txBox="1"/>
+          <p:nvPr/>
+        </p:nvSpPr>
+        <p:spPr>
+          <a:xfrm>
+            <a:off x="676656" y="2103120"/>
+            <a:ext cx="10789920" cy="512064"/>
+          </a:xfrm>
+          <a:prstGeom prst="rect">
+            <a:avLst/>
+          </a:prstGeom>
+          <a:noFill/>
+        </p:spPr>
+        <p:txBody>
+          <a:bodyPr wrap="square" lIns="73152" rIns="73152" tIns="36576" bIns="36576">
+            <a:spAutoFit/>
+          </a:bodyPr>
+          <a:lstStyle/>
+          <a:p>
+            <a:pPr algn="l">
+              <a:spcAft>
+                <a:spcPts val="0"/>
+              </a:spcAft>
+              <a:defRPr sz="2000" b="0">
                 <a:solidFill>
                   <a:srgbClr val="122C4E"/>
                 </a:solidFill>
@@ -6888,85 +7449,23 @@
               </a:defRPr>
             </a:pPr>
             <a:r>
-              <a:t>이번 단계: 파일의 전체 내용을 중간 생략 없이 작성합니다. 아래 줄 범위를 끝까지 입력하세요.</a:t>
-            </a:r>
-          </a:p>
-        </p:txBody>
-      </p:sp>
-      <p:sp>
-        <p:nvSpPr>
-          <p:cNvPr id="8" name="Rectangle 7"/>
+              <a:t>topic이 있어도 QoS가 호환되지 않으면 callback이 받지 못할 수 있다.</a:t>
+            </a:r>
+          </a:p>
+        </p:txBody>
+      </p:sp>
+      <p:sp>
+        <p:nvSpPr>
+          <p:cNvPr id="9" name="Rounded Rectangle 8"/>
           <p:cNvSpPr/>
           <p:nvPr/>
         </p:nvSpPr>
         <p:spPr>
           <a:xfrm>
-            <a:off x="658368" y="1956816"/>
-            <a:ext cx="10972800" cy="603504"/>
-          </a:xfrm>
-          <a:prstGeom prst="rect">
-            <a:avLst/>
-          </a:prstGeom>
-          <a:solidFill>
-            <a:srgbClr val="F4F7FB"/>
-          </a:solidFill>
-          <a:ln>
-            <a:solidFill>
-              <a:srgbClr val="F4F7FB"/>
-            </a:solidFill>
-          </a:ln>
-        </p:spPr>
-        <p:style>
-          <a:lnRef idx="1">
-            <a:schemeClr val="accent1"/>
-          </a:lnRef>
-          <a:fillRef idx="3">
-            <a:schemeClr val="accent1"/>
-          </a:fillRef>
-          <a:effectRef idx="2">
-            <a:schemeClr val="accent1"/>
-          </a:effectRef>
-          <a:fontRef idx="minor">
-            <a:schemeClr val="lt1"/>
-          </a:fontRef>
-        </p:style>
-        <p:txBody>
-          <a:bodyPr rtlCol="0" anchor="ctr" wrap="square" lIns="73152" rIns="73152" tIns="36576" bIns="36576"/>
-          <a:lstStyle/>
-          <a:p>
-            <a:pPr algn="l">
-              <a:spcAft>
-                <a:spcPts val="0"/>
-              </a:spcAft>
-              <a:defRPr sz="1400" b="0">
-                <a:solidFill>
-                  <a:srgbClr val="122C4E"/>
-                </a:solidFill>
-                <a:latin typeface="DejaVu Sans Mono"/>
-              </a:defRPr>
-            </a:pPr>
-            <a:r>
-              <a:t>파일 생성: mkdir -p ~/ros2_curri/agv_ws/src/agv_gazebo/config</a:t>
-            </a:r>
-            <a:br/>
-            <a:r>
-              <a:t>파일 열기: nano ~/ros2_curri/agv_ws/src/agv_gazebo/config/bridge.yaml</a:t>
-            </a:r>
-          </a:p>
-        </p:txBody>
-      </p:sp>
-      <p:sp>
-        <p:nvSpPr>
-          <p:cNvPr id="9" name="Rectangle 8"/>
-          <p:cNvSpPr/>
-          <p:nvPr/>
-        </p:nvSpPr>
-        <p:spPr>
-          <a:xfrm>
-            <a:off x="658368" y="2706624"/>
-            <a:ext cx="10972800" cy="3364992"/>
-          </a:xfrm>
-          <a:prstGeom prst="rect">
+            <a:off x="676656" y="2871216"/>
+            <a:ext cx="10835640" cy="2331720"/>
+          </a:xfrm>
+          <a:prstGeom prst="roundRect">
             <a:avLst/>
           </a:prstGeom>
           <a:solidFill>
@@ -6993,14 +7492,14 @@
           </a:fontRef>
         </p:style>
         <p:txBody>
-          <a:bodyPr rtlCol="0" anchor="ctr" wrap="square" lIns="164592" rIns="164592" tIns="109728" bIns="36576"/>
-          <a:lstStyle/>
-          <a:p>
-            <a:pPr algn="l">
-              <a:spcAft>
-                <a:spcPts val="0"/>
-              </a:spcAft>
-              <a:defRPr sz="1400" b="0">
+          <a:bodyPr rtlCol="0" anchor="ctr" wrap="square" lIns="73152" rIns="73152" tIns="36576" bIns="36576"/>
+          <a:lstStyle/>
+          <a:p>
+            <a:pPr algn="l">
+              <a:spcAft>
+                <a:spcPts val="0"/>
+              </a:spcAft>
+              <a:defRPr sz="1600" b="0">
                 <a:solidFill>
                   <a:srgbClr val="FFFFFF"/>
                 </a:solidFill>
@@ -7008,51 +7507,15 @@
               </a:defRPr>
             </a:pPr>
             <a:r>
-              <a:t>  ros_type_name: "sensor_msgs/msg/LaserScan"</a:t>
+              <a:t>ros2 topic hz /scan</a:t>
             </a:r>
             <a:br/>
             <a:r>
-              <a:t>  gz_type_name: "gz.msgs.LaserScan"</a:t>
+              <a:t>ros2 topic hz /imu/data</a:t>
             </a:r>
             <a:br/>
             <a:r>
-              <a:t>  direction: GZ_TO_ROS</a:t>
-            </a:r>
-            <a:br/>
-            <a:r>
-              <a:t>- ros_topic_name: "/imu/data"</a:t>
-            </a:r>
-            <a:br/>
-            <a:r>
-              <a:t>  gz_topic_name: "/imu/data"</a:t>
-            </a:r>
-            <a:br/>
-            <a:r>
-              <a:t>  ros_type_name: "sensor_msgs/msg/Imu"</a:t>
-            </a:r>
-            <a:br/>
-            <a:r>
-              <a:t>  gz_type_name: "gz.msgs.IMU"</a:t>
-            </a:r>
-            <a:br/>
-            <a:r>
-              <a:t>  direction: GZ_TO_ROS</a:t>
-            </a:r>
-            <a:br/>
-            <a:r>
-              <a:t>- ros_topic_name: "/camera/image_raw"</a:t>
-            </a:r>
-            <a:br/>
-            <a:r>
-              <a:t>  gz_topic_name: "/camera/image_raw"</a:t>
-            </a:r>
-            <a:br/>
-            <a:r>
-              <a:t>  ros_type_name: "sensor_msgs/msg/Image"</a:t>
-            </a:r>
-            <a:br/>
-            <a:r>
-              <a:t>  gz_type_name: "gz.msgs.Image"</a:t>
+              <a:t>ros2 topic info --verbose /scan</a:t>
             </a:r>
           </a:p>
         </p:txBody>
@@ -7065,33 +7528,72 @@
         </p:nvSpPr>
         <p:spPr>
           <a:xfrm>
-            <a:off x="749808" y="6181344"/>
-            <a:ext cx="10789920" cy="201168"/>
-          </a:xfrm>
-          <a:prstGeom prst="rect">
-            <a:avLst/>
-          </a:prstGeom>
-          <a:noFill/>
-        </p:spPr>
-        <p:txBody>
-          <a:bodyPr wrap="square" lIns="73152" rIns="73152" tIns="36576" bIns="36576">
-            <a:spAutoFit/>
-          </a:bodyPr>
-          <a:lstStyle/>
-          <a:p>
-            <a:pPr algn="l">
-              <a:spcAft>
-                <a:spcPts val="0"/>
-              </a:spcAft>
-              <a:defRPr sz="1000" b="0">
-                <a:solidFill>
-                  <a:srgbClr val="5C6672"/>
-                </a:solidFill>
-                <a:latin typeface="Noto Sans CJK KR"/>
-              </a:defRPr>
-            </a:pPr>
-            <a:r>
-              <a:t>파일 전체 2/3 · 이 슬라이드 다음에 같은 파일의 나머지 줄이 이어집니다.</a:t>
+            <a:off x="768096" y="5468112"/>
+            <a:ext cx="1143000" cy="256032"/>
+          </a:xfrm>
+          <a:prstGeom prst="rect">
+            <a:avLst/>
+          </a:prstGeom>
+          <a:noFill/>
+        </p:spPr>
+        <p:txBody>
+          <a:bodyPr wrap="square" lIns="73152" rIns="73152" tIns="36576" bIns="36576">
+            <a:spAutoFit/>
+          </a:bodyPr>
+          <a:lstStyle/>
+          <a:p>
+            <a:pPr algn="l">
+              <a:spcAft>
+                <a:spcPts val="0"/>
+              </a:spcAft>
+              <a:defRPr sz="1800" b="1">
+                <a:solidFill>
+                  <a:srgbClr val="2A8B5A"/>
+                </a:solidFill>
+                <a:latin typeface="Noto Sans CJK KR"/>
+              </a:defRPr>
+            </a:pPr>
+            <a:r>
+              <a:t>확인</a:t>
+            </a:r>
+          </a:p>
+        </p:txBody>
+      </p:sp>
+      <p:sp>
+        <p:nvSpPr>
+          <p:cNvPr id="11" name="TextBox 10"/>
+          <p:cNvSpPr txBox="1"/>
+          <p:nvPr/>
+        </p:nvSpPr>
+        <p:spPr>
+          <a:xfrm>
+            <a:off x="768096" y="5742432"/>
+            <a:ext cx="10561320" cy="347472"/>
+          </a:xfrm>
+          <a:prstGeom prst="rect">
+            <a:avLst/>
+          </a:prstGeom>
+          <a:noFill/>
+        </p:spPr>
+        <p:txBody>
+          <a:bodyPr wrap="square" lIns="73152" rIns="73152" tIns="36576" bIns="36576">
+            <a:spAutoFit/>
+          </a:bodyPr>
+          <a:lstStyle/>
+          <a:p>
+            <a:pPr algn="l">
+              <a:spcAft>
+                <a:spcPts val="0"/>
+              </a:spcAft>
+              <a:defRPr sz="1800" b="0">
+                <a:solidFill>
+                  <a:srgbClr val="122C4E"/>
+                </a:solidFill>
+                <a:latin typeface="Noto Sans CJK KR"/>
+              </a:defRPr>
+            </a:pPr>
+            <a:r>
+              <a:t>명령의 출력에서 topic·frame·파일 이름 또는 성공 메시지를 찾으면 이 단계가 완료됩니다.</a:t>
             </a:r>
           </a:p>
         </p:txBody>
@@ -7148,7 +7650,7 @@
               </a:defRPr>
             </a:pPr>
             <a:r>
-              <a:t>파일을 계속 작성하고 저장한다 (3/3)</a:t>
+              <a:t>파일을 새로 만들고 저장한다 (1/1)</a:t>
             </a:r>
           </a:p>
         </p:txBody>
@@ -7187,7 +7689,7 @@
               </a:defRPr>
             </a:pPr>
             <a:r>
-              <a:t>~/ros2_curri/agv_ws/src/agv_gazebo/config/bridge.yaml</a:t>
+              <a:t>~/ros2_curri/agv_ws/src/agv_bringup/config/sensors.yaml</a:t>
             </a:r>
           </a:p>
         </p:txBody>
@@ -7323,7 +7825,7 @@
               </a:defRPr>
             </a:pPr>
             <a:r>
-              <a:t>현재 단계 6/7    |    현재 폴더 ~/ros2_curri/agv_ws    |    현재 터미널</a:t>
+              <a:t>현재 단계 3/4    |    현재 폴더 ~/ros2_curri/agv_ws    |    현재 터미널</a:t>
             </a:r>
           </a:p>
         </p:txBody>
@@ -7420,11 +7922,11 @@
               </a:defRPr>
             </a:pPr>
             <a:r>
-              <a:t>파일 생성: mkdir -p ~/ros2_curri/agv_ws/src/agv_gazebo/config</a:t>
+              <a:t>파일 생성: mkdir -p ~/ros2_curri/agv_ws/src/agv_bringup/config</a:t>
             </a:r>
             <a:br/>
             <a:r>
-              <a:t>파일 열기: nano ~/ros2_curri/agv_ws/src/agv_gazebo/config/bridge.yaml</a:t>
+              <a:t>파일 열기: nano ~/ros2_curri/agv_ws/src/agv_bringup/config/sensors.yaml</a:t>
             </a:r>
           </a:p>
         </p:txBody>
@@ -7482,27 +7984,31 @@
               </a:defRPr>
             </a:pPr>
             <a:r>
-              <a:t>  direction: GZ_TO_ROS</a:t>
+              <a:t>lidar_processor:</a:t>
             </a:r>
             <a:br/>
             <a:r>
-              <a:t>- ros_topic_name: "/clock"</a:t>
+              <a:t>  ros__parameters:</a:t>
             </a:r>
             <a:br/>
             <a:r>
-              <a:t>  gz_topic_name: "/clock"</a:t>
+              <a:t>    use_sim_time: true</a:t>
             </a:r>
             <a:br/>
             <a:r>
-              <a:t>  ros_type_name: "rosgraph_msgs/msg/Clock"</a:t>
+              <a:t>    front_half_angle_deg: 15.0</a:t>
             </a:r>
             <a:br/>
             <a:r>
-              <a:t>  gz_type_name: "gz.msgs.Clock"</a:t>
+              <a:t>imu_monitor:</a:t>
             </a:r>
             <a:br/>
             <a:r>
-              <a:t>  direction: GZ_TO_ROS</a:t>
+              <a:t>  ros__parameters:</a:t>
+            </a:r>
+            <a:br/>
+            <a:r>
+              <a:t>    use_sim_time: true</a:t>
             </a:r>
           </a:p>
         </p:txBody>
@@ -7541,7 +8047,7 @@
               </a:defRPr>
             </a:pPr>
             <a:r>
-              <a:t>파일 전체 3/3 · 이 슬라이드 다음에 같은 파일의 나머지 줄이 이어집니다.</a:t>
+              <a:t>파일 전체 1/1 · 이 슬라이드 다음에 같은 파일의 나머지 줄이 이어집니다.</a:t>
             </a:r>
           </a:p>
         </p:txBody>
@@ -7637,7 +8143,7 @@
               </a:defRPr>
             </a:pPr>
             <a:r>
-              <a:t>~/ros2_curri/agv_ws/src/agv_sensors/agv_sensors/lidar_processor.py</a:t>
+              <a:t>~/ros2_curri/agv_ws/src/agv_gazebo/config/bridge.yaml</a:t>
             </a:r>
           </a:p>
         </p:txBody>
@@ -7773,7 +8279,7 @@
               </a:defRPr>
             </a:pPr>
             <a:r>
-              <a:t>현재 단계 7/10    |    현재 폴더 ~/ros2_curri/agv_ws    |    현재 터미널</a:t>
+              <a:t>현재 단계 4/7    |    현재 폴더 ~/ros2_curri/agv_ws    |    현재 터미널</a:t>
             </a:r>
           </a:p>
         </p:txBody>
@@ -7870,11 +8376,11 @@
               </a:defRPr>
             </a:pPr>
             <a:r>
-              <a:t>파일 생성: mkdir -p ~/ros2_curri/agv_ws/src/agv_sensors/agv_sensors</a:t>
+              <a:t>파일 생성: mkdir -p ~/ros2_curri/agv_ws/src/agv_gazebo/config</a:t>
             </a:r>
             <a:br/>
             <a:r>
-              <a:t>파일 열기: nano ~/ros2_curri/agv_ws/src/agv_sensors/agv_sensors/lidar_processor.py</a:t>
+              <a:t>파일 열기: nano ~/ros2_curri/agv_ws/src/agv_gazebo/config/bridge.yaml</a:t>
             </a:r>
           </a:p>
         </p:txBody>
@@ -7932,45 +8438,51 @@
               </a:defRPr>
             </a:pPr>
             <a:r>
-              <a:t>import math</a:t>
+              <a:t>- ros_topic_name: "/cmd_vel"</a:t>
             </a:r>
             <a:br/>
             <a:r>
-              <a:t>import rclpy</a:t>
+              <a:t>  gz_topic_name: "/cmd_vel"</a:t>
             </a:r>
             <a:br/>
             <a:r>
-              <a:t>from rclpy.node import Node</a:t>
+              <a:t>  ros_type_name: "geometry_msgs/msg/Twist"</a:t>
             </a:r>
             <a:br/>
             <a:r>
-              <a:t>from rclpy.qos import qos_profile_sensor_data</a:t>
+              <a:t>  gz_type_name: "gz.msgs.Twist"</a:t>
             </a:r>
             <a:br/>
             <a:r>
-              <a:t>from sensor_msgs.msg import LaserScan</a:t>
+              <a:t>  direction: ROS_TO_GZ</a:t>
             </a:r>
             <a:br/>
             <a:r>
-              <a:t>from std_msgs.msg import Float32</a:t>
+              <a:t>- ros_topic_name: "/odom"</a:t>
             </a:r>
             <a:br/>
+            <a:r>
+              <a:t>  gz_topic_name: "/odom"</a:t>
+            </a:r>
             <a:br/>
             <a:r>
-              <a:t>class LidarProcessor(Node):</a:t>
+              <a:t>  ros_type_name: "nav_msgs/msg/Odometry"</a:t>
             </a:r>
             <a:br/>
+            <a:r>
+              <a:t>  gz_type_name: "gz.msgs.Odometry"</a:t>
+            </a:r>
             <a:br/>
             <a:r>
-              <a:t>    def __init__(self):</a:t>
+              <a:t>  direction: GZ_TO_ROS</a:t>
             </a:r>
             <a:br/>
             <a:r>
-              <a:t>        super().__init__('lidar_processor')</a:t>
+              <a:t>- ros_topic_name: "/scan"</a:t>
             </a:r>
             <a:br/>
             <a:r>
-              <a:t>        self.declare_parameter('front_half_angle_deg', 15.0)</a:t>
+              <a:t>  gz_topic_name: "/scan"</a:t>
             </a:r>
           </a:p>
         </p:txBody>
@@ -8105,7 +8617,7 @@
               </a:defRPr>
             </a:pPr>
             <a:r>
-              <a:t>~/ros2_curri/agv_ws/src/agv_sensors/agv_sensors/lidar_processor.py</a:t>
+              <a:t>~/ros2_curri/agv_ws/src/agv_gazebo/config/bridge.yaml</a:t>
             </a:r>
           </a:p>
         </p:txBody>
@@ -8241,7 +8753,7 @@
               </a:defRPr>
             </a:pPr>
             <a:r>
-              <a:t>현재 단계 8/10    |    현재 폴더 ~/ros2_curri/agv_ws    |    현재 터미널</a:t>
+              <a:t>현재 단계 5/7    |    현재 폴더 ~/ros2_curri/agv_ws    |    현재 터미널</a:t>
             </a:r>
           </a:p>
         </p:txBody>
@@ -8338,11 +8850,11 @@
               </a:defRPr>
             </a:pPr>
             <a:r>
-              <a:t>파일 생성: mkdir -p ~/ros2_curri/agv_ws/src/agv_sensors/agv_sensors</a:t>
+              <a:t>파일 생성: mkdir -p ~/ros2_curri/agv_ws/src/agv_gazebo/config</a:t>
             </a:r>
             <a:br/>
             <a:r>
-              <a:t>파일 열기: nano ~/ros2_curri/agv_ws/src/agv_sensors/agv_sensors/lidar_processor.py</a:t>
+              <a:t>파일 열기: nano ~/ros2_curri/agv_ws/src/agv_gazebo/config/bridge.yaml</a:t>
             </a:r>
           </a:p>
         </p:txBody>
@@ -8400,45 +8912,51 @@
               </a:defRPr>
             </a:pPr>
             <a:r>
-              <a:t>        self.subscription = self.create_subscription(LaserScan, '/scan', self.callback,</a:t>
+              <a:t>  ros_type_name: "sensor_msgs/msg/LaserScan"</a:t>
             </a:r>
             <a:br/>
             <a:r>
-              <a:t>            qos_profile_sensor_data)</a:t>
+              <a:t>  gz_type_name: "gz.msgs.LaserScan"</a:t>
             </a:r>
             <a:br/>
             <a:r>
-              <a:t>        self.publisher = self.create_publisher(Float32, '/obstacle_distance', 10)</a:t>
+              <a:t>  direction: GZ_TO_ROS</a:t>
             </a:r>
             <a:br/>
+            <a:r>
+              <a:t>- ros_topic_name: "/imu/data"</a:t>
+            </a:r>
             <a:br/>
             <a:r>
-              <a:t>    def callback(self, scan):</a:t>
+              <a:t>  gz_topic_name: "/imu/data"</a:t>
             </a:r>
             <a:br/>
             <a:r>
-              <a:t>        half_angle = math.radians(self.get_parameter('front_half_angle_deg').value)</a:t>
+              <a:t>  ros_type_name: "sensor_msgs/msg/Imu"</a:t>
             </a:r>
             <a:br/>
             <a:r>
-              <a:t>        front_ranges = [distance for index,</a:t>
+              <a:t>  gz_type_name: "gz.msgs.IMU"</a:t>
             </a:r>
             <a:br/>
             <a:r>
-              <a:t>            distance in enumerate(scan.ranges) if abs(scan.angle_min + index * scan.angle_increment) &lt;= half_angle and math.isfinite(distance)]</a:t>
+              <a:t>  direction: GZ_TO_ROS</a:t>
             </a:r>
             <a:br/>
             <a:r>
-              <a:t>        result = Float32(data=min(front_ranges) if front_ranges else float('inf'))</a:t>
+              <a:t>- ros_topic_name: "/camera/image_raw"</a:t>
             </a:r>
             <a:br/>
             <a:r>
-              <a:t>        self.publisher.publish(result)</a:t>
+              <a:t>  gz_topic_name: "/camera/image_raw"</a:t>
             </a:r>
             <a:br/>
+            <a:r>
+              <a:t>  ros_type_name: "sensor_msgs/msg/Image"</a:t>
+            </a:r>
             <a:br/>
             <a:r>
-              <a:t>def main():</a:t>
+              <a:t>  gz_type_name: "gz.msgs.Image"</a:t>
             </a:r>
           </a:p>
         </p:txBody>
@@ -8573,7 +9091,7 @@
               </a:defRPr>
             </a:pPr>
             <a:r>
-              <a:t>~/ros2_curri/agv_ws/src/agv_sensors/agv_sensors/lidar_processor.py</a:t>
+              <a:t>~/ros2_curri/agv_ws/src/agv_gazebo/config/bridge.yaml</a:t>
             </a:r>
           </a:p>
         </p:txBody>
@@ -8709,7 +9227,7 @@
               </a:defRPr>
             </a:pPr>
             <a:r>
-              <a:t>현재 단계 9/10    |    현재 폴더 ~/ros2_curri/agv_ws    |    현재 터미널</a:t>
+              <a:t>현재 단계 6/7    |    현재 폴더 ~/ros2_curri/agv_ws    |    현재 터미널</a:t>
             </a:r>
           </a:p>
         </p:txBody>
@@ -8806,11 +9324,11 @@
               </a:defRPr>
             </a:pPr>
             <a:r>
-              <a:t>파일 생성: mkdir -p ~/ros2_curri/agv_ws/src/agv_sensors/agv_sensors</a:t>
+              <a:t>파일 생성: mkdir -p ~/ros2_curri/agv_ws/src/agv_gazebo/config</a:t>
             </a:r>
             <a:br/>
             <a:r>
-              <a:t>파일 열기: nano ~/ros2_curri/agv_ws/src/agv_sensors/agv_sensors/lidar_processor.py</a:t>
+              <a:t>파일 열기: nano ~/ros2_curri/agv_ws/src/agv_gazebo/config/bridge.yaml</a:t>
             </a:r>
           </a:p>
         </p:txBody>
@@ -8868,43 +9386,27 @@
               </a:defRPr>
             </a:pPr>
             <a:r>
-              <a:t>    rclpy.init()</a:t>
+              <a:t>  direction: GZ_TO_ROS</a:t>
             </a:r>
             <a:br/>
             <a:r>
-              <a:t>    node = LidarProcessor()</a:t>
+              <a:t>- ros_topic_name: "/clock"</a:t>
             </a:r>
             <a:br/>
             <a:r>
-              <a:t>    try:</a:t>
+              <a:t>  gz_topic_name: "/clock"</a:t>
             </a:r>
             <a:br/>
             <a:r>
-              <a:t>        rclpy.spin(node)</a:t>
+              <a:t>  ros_type_name: "rosgraph_msgs/msg/Clock"</a:t>
             </a:r>
             <a:br/>
             <a:r>
-              <a:t>    except KeyboardInterrupt:</a:t>
+              <a:t>  gz_type_name: "gz.msgs.Clock"</a:t>
             </a:r>
             <a:br/>
             <a:r>
-              <a:t>        pass</a:t>
-            </a:r>
-            <a:br/>
-            <a:r>
-              <a:t>    finally:</a:t>
-            </a:r>
-            <a:br/>
-            <a:r>
-              <a:t>        node.destroy_node()</a:t>
-            </a:r>
-            <a:br/>
-            <a:r>
-              <a:t>        if rclpy.ok():</a:t>
-            </a:r>
-            <a:br/>
-            <a:r>
-              <a:t>            rclpy.shutdown()</a:t>
+              <a:t>  direction: GZ_TO_ROS</a:t>
             </a:r>
           </a:p>
         </p:txBody>
@@ -9039,7 +9541,7 @@
               </a:defRPr>
             </a:pPr>
             <a:r>
-              <a:t>~/ros2_curri/agv_ws/src/agv_sensors/agv_sensors/imu_monitor.py</a:t>
+              <a:t>~/ros2_curri/agv_ws/src/agv_sensors/agv_sensors/lidar_processor.py</a:t>
             </a:r>
           </a:p>
         </p:txBody>
@@ -9175,7 +9677,7 @@
               </a:defRPr>
             </a:pPr>
             <a:r>
-              <a:t>현재 단계 10/13    |    현재 폴더 ~/ros2_curri/agv_ws    |    현재 터미널</a:t>
+              <a:t>현재 단계 7/10    |    현재 폴더 ~/ros2_curri/agv_ws    |    현재 터미널</a:t>
             </a:r>
           </a:p>
         </p:txBody>
@@ -9276,7 +9778,7 @@
             </a:r>
             <a:br/>
             <a:r>
-              <a:t>파일 열기: nano ~/ros2_curri/agv_ws/src/agv_sensors/agv_sensors/imu_monitor.py</a:t>
+              <a:t>파일 열기: nano ~/ros2_curri/agv_ws/src/agv_sensors/agv_sensors/lidar_processor.py</a:t>
             </a:r>
           </a:p>
         </p:txBody>
@@ -9334,6 +9836,10 @@
               </a:defRPr>
             </a:pPr>
             <a:r>
+              <a:t>import math</a:t>
+            </a:r>
+            <a:br/>
+            <a:r>
               <a:t>import rclpy</a:t>
             </a:r>
             <a:br/>
@@ -9346,12 +9852,16 @@
             </a:r>
             <a:br/>
             <a:r>
-              <a:t>from sensor_msgs.msg import Imu</a:t>
+              <a:t>from sensor_msgs.msg import LaserScan</a:t>
+            </a:r>
+            <a:br/>
+            <a:r>
+              <a:t>from std_msgs.msg import Float32</a:t>
             </a:r>
             <a:br/>
             <a:br/>
             <a:r>
-              <a:t>class ImuMonitor(Node):</a:t>
+              <a:t>class LidarProcessor(Node):</a:t>
             </a:r>
             <a:br/>
             <a:br/>
@@ -9360,17 +9870,12 @@
             </a:r>
             <a:br/>
             <a:r>
-              <a:t>        super().__init__('imu_monitor')</a:t>
+              <a:t>        super().__init__('lidar_processor')</a:t>
             </a:r>
             <a:br/>
             <a:r>
-              <a:t>        self.create_subscription(Imu, '/imu/data', self.callback,</a:t>
-            </a:r>
-            <a:br/>
-            <a:r>
-              <a:t>            qos_profile_sensor_data)</a:t>
-            </a:r>
-            <a:br/>
+              <a:t>        self.declare_parameter('front_half_angle_deg', 15.0)</a:t>
+            </a:r>
           </a:p>
         </p:txBody>
       </p:sp>
@@ -9504,7 +10009,7 @@
               </a:defRPr>
             </a:pPr>
             <a:r>
-              <a:t>~/ros2_curri/agv_ws/src/agv_sensors/agv_sensors/imu_monitor.py</a:t>
+              <a:t>~/ros2_curri/agv_ws/src/agv_sensors/agv_sensors/lidar_processor.py</a:t>
             </a:r>
           </a:p>
         </p:txBody>
@@ -9640,7 +10145,7 @@
               </a:defRPr>
             </a:pPr>
             <a:r>
-              <a:t>현재 단계 11/13    |    현재 폴더 ~/ros2_curri/agv_ws    |    현재 터미널</a:t>
+              <a:t>현재 단계 8/10    |    현재 폴더 ~/ros2_curri/agv_ws    |    현재 터미널</a:t>
             </a:r>
           </a:p>
         </p:txBody>
@@ -9741,7 +10246,7 @@
             </a:r>
             <a:br/>
             <a:r>
-              <a:t>파일 열기: nano ~/ros2_curri/agv_ws/src/agv_sensors/agv_sensors/imu_monitor.py</a:t>
+              <a:t>파일 열기: nano ~/ros2_curri/agv_ws/src/agv_sensors/agv_sensors/lidar_processor.py</a:t>
             </a:r>
           </a:p>
         </p:txBody>
@@ -9799,48 +10304,45 @@
               </a:defRPr>
             </a:pPr>
             <a:r>
-              <a:t>    def callback(self, message):</a:t>
+              <a:t>        self.subscription = self.create_subscription(LaserScan, '/scan', self.callback,</a:t>
             </a:r>
             <a:br/>
             <a:r>
-              <a:t>        self.get_logger().info('gyro z=%.3f rad/s, acceleration z=%.3f m/s²,</a:t>
+              <a:t>            qos_profile_sensor_data)</a:t>
             </a:r>
             <a:br/>
             <a:r>
-              <a:t>            frame=%s' % (message.angular_velocity.z, message.linear_acceleration.z,</a:t>
-            </a:r>
-            <a:br/>
-            <a:r>
-              <a:t>            message.header.frame_id), throttle_duration_sec=1.0)</a:t>
+              <a:t>        self.publisher = self.create_publisher(Float32, '/obstacle_distance', 10)</a:t>
             </a:r>
             <a:br/>
             <a:br/>
             <a:r>
+              <a:t>    def callback(self, scan):</a:t>
+            </a:r>
+            <a:br/>
+            <a:r>
+              <a:t>        half_angle = math.radians(self.get_parameter('front_half_angle_deg').value)</a:t>
+            </a:r>
+            <a:br/>
+            <a:r>
+              <a:t>        front_ranges = [distance for index,</a:t>
+            </a:r>
+            <a:br/>
+            <a:r>
+              <a:t>            distance in enumerate(scan.ranges) if abs(scan.angle_min + index * scan.angle_increment) &lt;= half_angle and math.isfinite(distance)]</a:t>
+            </a:r>
+            <a:br/>
+            <a:r>
+              <a:t>        result = Float32(data=min(front_ranges) if front_ranges else float('inf'))</a:t>
+            </a:r>
+            <a:br/>
+            <a:r>
+              <a:t>        self.publisher.publish(result)</a:t>
+            </a:r>
+            <a:br/>
+            <a:br/>
+            <a:r>
               <a:t>def main():</a:t>
-            </a:r>
-            <a:br/>
-            <a:r>
-              <a:t>    rclpy.init()</a:t>
-            </a:r>
-            <a:br/>
-            <a:r>
-              <a:t>    node = ImuMonitor()</a:t>
-            </a:r>
-            <a:br/>
-            <a:r>
-              <a:t>    try:</a:t>
-            </a:r>
-            <a:br/>
-            <a:r>
-              <a:t>        rclpy.spin(node)</a:t>
-            </a:r>
-            <a:br/>
-            <a:r>
-              <a:t>    except KeyboardInterrupt:</a:t>
-            </a:r>
-            <a:br/>
-            <a:r>
-              <a:t>        pass</a:t>
             </a:r>
           </a:p>
         </p:txBody>
@@ -9975,7 +10477,7 @@
               </a:defRPr>
             </a:pPr>
             <a:r>
-              <a:t>~/ros2_curri/agv_ws/src/agv_sensors/agv_sensors/imu_monitor.py</a:t>
+              <a:t>~/ros2_curri/agv_ws/src/agv_sensors/agv_sensors/lidar_processor.py</a:t>
             </a:r>
           </a:p>
         </p:txBody>
@@ -10111,7 +10613,7 @@
               </a:defRPr>
             </a:pPr>
             <a:r>
-              <a:t>현재 단계 12/13    |    현재 폴더 ~/ros2_curri/agv_ws    |    현재 터미널</a:t>
+              <a:t>현재 단계 9/10    |    현재 폴더 ~/ros2_curri/agv_ws    |    현재 터미널</a:t>
             </a:r>
           </a:p>
         </p:txBody>
@@ -10212,7 +10714,7 @@
             </a:r>
             <a:br/>
             <a:r>
-              <a:t>파일 열기: nano ~/ros2_curri/agv_ws/src/agv_sensors/agv_sensors/imu_monitor.py</a:t>
+              <a:t>파일 열기: nano ~/ros2_curri/agv_ws/src/agv_sensors/agv_sensors/lidar_processor.py</a:t>
             </a:r>
           </a:p>
         </p:txBody>
@@ -10269,6 +10771,30 @@
                 <a:latin typeface="DejaVu Sans Mono"/>
               </a:defRPr>
             </a:pPr>
+            <a:r>
+              <a:t>    rclpy.init()</a:t>
+            </a:r>
+            <a:br/>
+            <a:r>
+              <a:t>    node = LidarProcessor()</a:t>
+            </a:r>
+            <a:br/>
+            <a:r>
+              <a:t>    try:</a:t>
+            </a:r>
+            <a:br/>
+            <a:r>
+              <a:t>        rclpy.spin(node)</a:t>
+            </a:r>
+            <a:br/>
+            <a:r>
+              <a:t>    except KeyboardInterrupt:</a:t>
+            </a:r>
+            <a:br/>
+            <a:r>
+              <a:t>        pass</a:t>
+            </a:r>
+            <a:br/>
             <a:r>
               <a:t>    finally:</a:t>
             </a:r>
@@ -10378,7 +10904,7 @@
               </a:defRPr>
             </a:pPr>
             <a:r>
-              <a:t>build → source → run 순서로 실행한다</a:t>
+              <a:t>파일을 새로 만들고 저장한다 (1/3)</a:t>
             </a:r>
           </a:p>
         </p:txBody>
@@ -10417,7 +10943,7 @@
               </a:defRPr>
             </a:pPr>
             <a:r>
-              <a:t>새 파일 또는 수정 파일은 build와 source 뒤에만 실행 이름·설정에 반영됩니다.</a:t>
+              <a:t>~/ros2_curri/agv_ws/src/agv_sensors/agv_sensors/imu_monitor.py</a:t>
             </a:r>
           </a:p>
         </p:txBody>
@@ -10553,23 +11079,124 @@
               </a:defRPr>
             </a:pPr>
             <a:r>
-              <a:t>현재 단계 실행    |    현재 폴더 ~/ros2_curri/agv_ws    |    현재 터미널</a:t>
-            </a:r>
-          </a:p>
-        </p:txBody>
-      </p:sp>
-      <p:sp>
-        <p:nvSpPr>
-          <p:cNvPr id="7" name="Rounded Rectangle 6"/>
+              <a:t>현재 단계 10/13    |    현재 폴더 ~/ros2_curri/agv_ws    |    현재 터미널</a:t>
+            </a:r>
+          </a:p>
+        </p:txBody>
+      </p:sp>
+      <p:sp>
+        <p:nvSpPr>
+          <p:cNvPr id="7" name="TextBox 6"/>
+          <p:cNvSpPr txBox="1"/>
+          <p:nvPr/>
+        </p:nvSpPr>
+        <p:spPr>
+          <a:xfrm>
+            <a:off x="658368" y="1627632"/>
+            <a:ext cx="10972800" cy="256032"/>
+          </a:xfrm>
+          <a:prstGeom prst="rect">
+            <a:avLst/>
+          </a:prstGeom>
+          <a:noFill/>
+        </p:spPr>
+        <p:txBody>
+          <a:bodyPr wrap="square" lIns="73152" rIns="73152" tIns="36576" bIns="36576">
+            <a:spAutoFit/>
+          </a:bodyPr>
+          <a:lstStyle/>
+          <a:p>
+            <a:pPr algn="l">
+              <a:spcAft>
+                <a:spcPts val="0"/>
+              </a:spcAft>
+              <a:defRPr sz="1500" b="1">
+                <a:solidFill>
+                  <a:srgbClr val="122C4E"/>
+                </a:solidFill>
+                <a:latin typeface="Noto Sans CJK KR"/>
+              </a:defRPr>
+            </a:pPr>
+            <a:r>
+              <a:t>이번 단계: 파일의 전체 내용을 중간 생략 없이 작성합니다. 아래 줄 범위를 끝까지 입력하세요.</a:t>
+            </a:r>
+          </a:p>
+        </p:txBody>
+      </p:sp>
+      <p:sp>
+        <p:nvSpPr>
+          <p:cNvPr id="8" name="Rectangle 7"/>
           <p:cNvSpPr/>
           <p:nvPr/>
         </p:nvSpPr>
         <p:spPr>
           <a:xfrm>
-            <a:off x="658368" y="1700784"/>
-            <a:ext cx="10972800" cy="3182112"/>
-          </a:xfrm>
-          <a:prstGeom prst="roundRect">
+            <a:off x="658368" y="1956816"/>
+            <a:ext cx="10972800" cy="603504"/>
+          </a:xfrm>
+          <a:prstGeom prst="rect">
+            <a:avLst/>
+          </a:prstGeom>
+          <a:solidFill>
+            <a:srgbClr val="F4F7FB"/>
+          </a:solidFill>
+          <a:ln>
+            <a:solidFill>
+              <a:srgbClr val="F4F7FB"/>
+            </a:solidFill>
+          </a:ln>
+        </p:spPr>
+        <p:style>
+          <a:lnRef idx="1">
+            <a:schemeClr val="accent1"/>
+          </a:lnRef>
+          <a:fillRef idx="3">
+            <a:schemeClr val="accent1"/>
+          </a:fillRef>
+          <a:effectRef idx="2">
+            <a:schemeClr val="accent1"/>
+          </a:effectRef>
+          <a:fontRef idx="minor">
+            <a:schemeClr val="lt1"/>
+          </a:fontRef>
+        </p:style>
+        <p:txBody>
+          <a:bodyPr rtlCol="0" anchor="ctr" wrap="square" lIns="73152" rIns="73152" tIns="36576" bIns="36576"/>
+          <a:lstStyle/>
+          <a:p>
+            <a:pPr algn="l">
+              <a:spcAft>
+                <a:spcPts val="0"/>
+              </a:spcAft>
+              <a:defRPr sz="1400" b="0">
+                <a:solidFill>
+                  <a:srgbClr val="122C4E"/>
+                </a:solidFill>
+                <a:latin typeface="DejaVu Sans Mono"/>
+              </a:defRPr>
+            </a:pPr>
+            <a:r>
+              <a:t>파일 생성: mkdir -p ~/ros2_curri/agv_ws/src/agv_sensors/agv_sensors</a:t>
+            </a:r>
+            <a:br/>
+            <a:r>
+              <a:t>파일 열기: nano ~/ros2_curri/agv_ws/src/agv_sensors/agv_sensors/imu_monitor.py</a:t>
+            </a:r>
+          </a:p>
+        </p:txBody>
+      </p:sp>
+      <p:sp>
+        <p:nvSpPr>
+          <p:cNvPr id="9" name="Rectangle 8"/>
+          <p:cNvSpPr/>
+          <p:nvPr/>
+        </p:nvSpPr>
+        <p:spPr>
+          <a:xfrm>
+            <a:off x="658368" y="2706624"/>
+            <a:ext cx="10972800" cy="3364992"/>
+          </a:xfrm>
+          <a:prstGeom prst="rect">
             <a:avLst/>
           </a:prstGeom>
           <a:solidFill>
@@ -10596,14 +11223,14 @@
           </a:fontRef>
         </p:style>
         <p:txBody>
-          <a:bodyPr rtlCol="0" anchor="ctr" wrap="square" lIns="73152" rIns="73152" tIns="36576" bIns="36576"/>
-          <a:lstStyle/>
-          <a:p>
-            <a:pPr algn="l">
-              <a:spcAft>
-                <a:spcPts val="0"/>
-              </a:spcAft>
-              <a:defRPr sz="1600" b="0">
+          <a:bodyPr rtlCol="0" anchor="ctr" wrap="square" lIns="164592" rIns="164592" tIns="109728" bIns="36576"/>
+          <a:lstStyle/>
+          <a:p>
+            <a:pPr algn="l">
+              <a:spcAft>
+                <a:spcPts val="0"/>
+              </a:spcAft>
+              <a:defRPr sz="1400" b="0">
                 <a:solidFill>
                   <a:srgbClr val="FFFFFF"/>
                 </a:solidFill>
@@ -10611,85 +11238,81 @@
               </a:defRPr>
             </a:pPr>
             <a:r>
-              <a:t>ros2 launch agv_bringup agv_sim.launch.py rviz:=false</a:t>
-            </a:r>
-          </a:p>
-        </p:txBody>
-      </p:sp>
-      <p:sp>
-        <p:nvSpPr>
-          <p:cNvPr id="8" name="TextBox 7"/>
-          <p:cNvSpPr txBox="1"/>
-          <p:nvPr/>
-        </p:nvSpPr>
-        <p:spPr>
-          <a:xfrm>
-            <a:off x="786384" y="5239512"/>
-            <a:ext cx="1261872" cy="237744"/>
-          </a:xfrm>
-          <a:prstGeom prst="rect">
-            <a:avLst/>
-          </a:prstGeom>
-          <a:noFill/>
-        </p:spPr>
-        <p:txBody>
-          <a:bodyPr wrap="square" lIns="73152" rIns="73152" tIns="36576" bIns="36576">
-            <a:spAutoFit/>
-          </a:bodyPr>
-          <a:lstStyle/>
-          <a:p>
-            <a:pPr algn="l">
-              <a:spcAft>
-                <a:spcPts val="0"/>
-              </a:spcAft>
-              <a:defRPr sz="1800" b="1">
-                <a:solidFill>
-                  <a:srgbClr val="2A8B5A"/>
-                </a:solidFill>
-                <a:latin typeface="Noto Sans CJK KR"/>
-              </a:defRPr>
-            </a:pPr>
-            <a:r>
-              <a:t>확인 기준</a:t>
-            </a:r>
-          </a:p>
-        </p:txBody>
-      </p:sp>
-      <p:sp>
-        <p:nvSpPr>
-          <p:cNvPr id="9" name="TextBox 8"/>
-          <p:cNvSpPr txBox="1"/>
-          <p:nvPr/>
-        </p:nvSpPr>
-        <p:spPr>
-          <a:xfrm>
-            <a:off x="786384" y="5532120"/>
-            <a:ext cx="10469880" cy="420624"/>
-          </a:xfrm>
-          <a:prstGeom prst="rect">
-            <a:avLst/>
-          </a:prstGeom>
-          <a:noFill/>
-        </p:spPr>
-        <p:txBody>
-          <a:bodyPr wrap="square" lIns="73152" rIns="73152" tIns="36576" bIns="36576">
-            <a:spAutoFit/>
-          </a:bodyPr>
-          <a:lstStyle/>
-          <a:p>
-            <a:pPr algn="l">
-              <a:spcAft>
-                <a:spcPts val="0"/>
-              </a:spcAft>
-              <a:defRPr sz="1800" b="0">
-                <a:solidFill>
-                  <a:srgbClr val="122C4E"/>
-                </a:solidFill>
-                <a:latin typeface="Noto Sans CJK KR"/>
-              </a:defRPr>
-            </a:pPr>
-            <a:r>
-              <a:t>모든 sensor 노드가 같은 시뮬레이션 시간과 기대 publish rate를 사용한다.</a:t>
+              <a:t>import rclpy</a:t>
+            </a:r>
+            <a:br/>
+            <a:r>
+              <a:t>from rclpy.node import Node</a:t>
+            </a:r>
+            <a:br/>
+            <a:r>
+              <a:t>from rclpy.qos import qos_profile_sensor_data</a:t>
+            </a:r>
+            <a:br/>
+            <a:r>
+              <a:t>from sensor_msgs.msg import Imu</a:t>
+            </a:r>
+            <a:br/>
+            <a:br/>
+            <a:r>
+              <a:t>class ImuMonitor(Node):</a:t>
+            </a:r>
+            <a:br/>
+            <a:br/>
+            <a:r>
+              <a:t>    def __init__(self):</a:t>
+            </a:r>
+            <a:br/>
+            <a:r>
+              <a:t>        super().__init__('imu_monitor')</a:t>
+            </a:r>
+            <a:br/>
+            <a:r>
+              <a:t>        self.create_subscription(Imu, '/imu/data', self.callback,</a:t>
+            </a:r>
+            <a:br/>
+            <a:r>
+              <a:t>            qos_profile_sensor_data)</a:t>
+            </a:r>
+            <a:br/>
+          </a:p>
+        </p:txBody>
+      </p:sp>
+      <p:sp>
+        <p:nvSpPr>
+          <p:cNvPr id="10" name="TextBox 9"/>
+          <p:cNvSpPr txBox="1"/>
+          <p:nvPr/>
+        </p:nvSpPr>
+        <p:spPr>
+          <a:xfrm>
+            <a:off x="749808" y="6181344"/>
+            <a:ext cx="10789920" cy="201168"/>
+          </a:xfrm>
+          <a:prstGeom prst="rect">
+            <a:avLst/>
+          </a:prstGeom>
+          <a:noFill/>
+        </p:spPr>
+        <p:txBody>
+          <a:bodyPr wrap="square" lIns="73152" rIns="73152" tIns="36576" bIns="36576">
+            <a:spAutoFit/>
+          </a:bodyPr>
+          <a:lstStyle/>
+          <a:p>
+            <a:pPr algn="l">
+              <a:spcAft>
+                <a:spcPts val="0"/>
+              </a:spcAft>
+              <a:defRPr sz="1000" b="0">
+                <a:solidFill>
+                  <a:srgbClr val="5C6672"/>
+                </a:solidFill>
+                <a:latin typeface="Noto Sans CJK KR"/>
+              </a:defRPr>
+            </a:pPr>
+            <a:r>
+              <a:t>파일 전체 1/3 · 이 슬라이드 다음에 같은 파일의 나머지 줄이 이어집니다.</a:t>
             </a:r>
           </a:p>
         </p:txBody>
@@ -11207,7 +11830,7 @@
               </a:defRPr>
             </a:pPr>
             <a:r>
-              <a:t>정상 결과: 실제 환경에서 확인한 출력</a:t>
+              <a:t>파일을 계속 작성하고 저장한다 (2/3)</a:t>
             </a:r>
           </a:p>
         </p:txBody>
@@ -11246,7 +11869,7 @@
               </a:defRPr>
             </a:pPr>
             <a:r>
-              <a:t>실제 ROS 2 환경의 파일·패키지·구성 검증 로그</a:t>
+              <a:t>~/ros2_curri/agv_ws/src/agv_sensors/agv_sensors/imu_monitor.py</a:t>
             </a:r>
           </a:p>
         </p:txBody>
@@ -11329,30 +11952,64 @@
           </a:p>
         </p:txBody>
       </p:sp>
-      <p:pic>
-        <p:nvPicPr>
-          <p:cNvPr id="6" name="Picture 5" descr="validation_terminal.png"/>
-          <p:cNvPicPr>
-            <a:picLocks noChangeAspect="1"/>
-          </p:cNvPicPr>
-          <p:nvPr/>
-        </p:nvPicPr>
-        <p:blipFill>
-          <a:blip r:embed="rId2"/>
-          <a:stretch>
-            <a:fillRect/>
-          </a:stretch>
-        </p:blipFill>
-        <p:spPr>
-          <a:xfrm>
-            <a:off x="790956" y="1453970"/>
-            <a:ext cx="10607040" cy="4599282"/>
-          </a:xfrm>
-          <a:prstGeom prst="rect">
-            <a:avLst/>
-          </a:prstGeom>
-        </p:spPr>
-      </p:pic>
+      <p:sp>
+        <p:nvSpPr>
+          <p:cNvPr id="6" name="Rectangle 5"/>
+          <p:cNvSpPr/>
+          <p:nvPr/>
+        </p:nvSpPr>
+        <p:spPr>
+          <a:xfrm>
+            <a:off x="566928" y="1188720"/>
+            <a:ext cx="11064240" cy="347472"/>
+          </a:xfrm>
+          <a:prstGeom prst="rect">
+            <a:avLst/>
+          </a:prstGeom>
+          <a:solidFill>
+            <a:srgbClr val="F4F7FB"/>
+          </a:solidFill>
+          <a:ln>
+            <a:solidFill>
+              <a:srgbClr val="F4F7FB"/>
+            </a:solidFill>
+          </a:ln>
+        </p:spPr>
+        <p:style>
+          <a:lnRef idx="1">
+            <a:schemeClr val="accent1"/>
+          </a:lnRef>
+          <a:fillRef idx="3">
+            <a:schemeClr val="accent1"/>
+          </a:fillRef>
+          <a:effectRef idx="2">
+            <a:schemeClr val="accent1"/>
+          </a:effectRef>
+          <a:fontRef idx="minor">
+            <a:schemeClr val="lt1"/>
+          </a:fontRef>
+        </p:style>
+        <p:txBody>
+          <a:bodyPr rtlCol="0" anchor="ctr" wrap="square" lIns="73152" rIns="73152" tIns="36576" bIns="36576"/>
+          <a:lstStyle/>
+          <a:p>
+            <a:pPr algn="l">
+              <a:spcAft>
+                <a:spcPts val="0"/>
+              </a:spcAft>
+              <a:defRPr sz="1300" b="1">
+                <a:solidFill>
+                  <a:srgbClr val="122C4E"/>
+                </a:solidFill>
+                <a:latin typeface="Noto Sans CJK KR"/>
+              </a:defRPr>
+            </a:pPr>
+            <a:r>
+              <a:t>현재 단계 11/13    |    현재 폴더 ~/ros2_curri/agv_ws    |    현재 터미널</a:t>
+            </a:r>
+          </a:p>
+        </p:txBody>
+      </p:sp>
       <p:sp>
         <p:nvSpPr>
           <p:cNvPr id="7" name="TextBox 6"/>
@@ -11361,33 +12018,233 @@
         </p:nvSpPr>
         <p:spPr>
           <a:xfrm>
-            <a:off x="777240" y="6217920"/>
-            <a:ext cx="10607040" cy="182880"/>
-          </a:xfrm>
-          <a:prstGeom prst="rect">
-            <a:avLst/>
-          </a:prstGeom>
-          <a:noFill/>
-        </p:spPr>
-        <p:txBody>
-          <a:bodyPr wrap="square" lIns="73152" rIns="73152" tIns="36576" bIns="36576">
-            <a:spAutoFit/>
-          </a:bodyPr>
-          <a:lstStyle/>
-          <a:p>
-            <a:pPr algn="ctr">
-              <a:spcAft>
-                <a:spcPts val="0"/>
-              </a:spcAft>
-              <a:defRPr sz="1100" b="1">
-                <a:solidFill>
-                  <a:srgbClr val="2A8B5A"/>
-                </a:solidFill>
-                <a:latin typeface="Noto Sans CJK KR"/>
-              </a:defRPr>
-            </a:pPr>
-            <a:r>
-              <a:t>① 명령/설정  ② 정상 출력 또는 화면  ③ 다음 검증 명령으로 재확인</a:t>
+            <a:off x="658368" y="1627632"/>
+            <a:ext cx="10972800" cy="256032"/>
+          </a:xfrm>
+          <a:prstGeom prst="rect">
+            <a:avLst/>
+          </a:prstGeom>
+          <a:noFill/>
+        </p:spPr>
+        <p:txBody>
+          <a:bodyPr wrap="square" lIns="73152" rIns="73152" tIns="36576" bIns="36576">
+            <a:spAutoFit/>
+          </a:bodyPr>
+          <a:lstStyle/>
+          <a:p>
+            <a:pPr algn="l">
+              <a:spcAft>
+                <a:spcPts val="0"/>
+              </a:spcAft>
+              <a:defRPr sz="1500" b="1">
+                <a:solidFill>
+                  <a:srgbClr val="122C4E"/>
+                </a:solidFill>
+                <a:latin typeface="Noto Sans CJK KR"/>
+              </a:defRPr>
+            </a:pPr>
+            <a:r>
+              <a:t>이번 단계: 파일의 전체 내용을 중간 생략 없이 작성합니다. 아래 줄 범위를 끝까지 입력하세요.</a:t>
+            </a:r>
+          </a:p>
+        </p:txBody>
+      </p:sp>
+      <p:sp>
+        <p:nvSpPr>
+          <p:cNvPr id="8" name="Rectangle 7"/>
+          <p:cNvSpPr/>
+          <p:nvPr/>
+        </p:nvSpPr>
+        <p:spPr>
+          <a:xfrm>
+            <a:off x="658368" y="1956816"/>
+            <a:ext cx="10972800" cy="603504"/>
+          </a:xfrm>
+          <a:prstGeom prst="rect">
+            <a:avLst/>
+          </a:prstGeom>
+          <a:solidFill>
+            <a:srgbClr val="F4F7FB"/>
+          </a:solidFill>
+          <a:ln>
+            <a:solidFill>
+              <a:srgbClr val="F4F7FB"/>
+            </a:solidFill>
+          </a:ln>
+        </p:spPr>
+        <p:style>
+          <a:lnRef idx="1">
+            <a:schemeClr val="accent1"/>
+          </a:lnRef>
+          <a:fillRef idx="3">
+            <a:schemeClr val="accent1"/>
+          </a:fillRef>
+          <a:effectRef idx="2">
+            <a:schemeClr val="accent1"/>
+          </a:effectRef>
+          <a:fontRef idx="minor">
+            <a:schemeClr val="lt1"/>
+          </a:fontRef>
+        </p:style>
+        <p:txBody>
+          <a:bodyPr rtlCol="0" anchor="ctr" wrap="square" lIns="73152" rIns="73152" tIns="36576" bIns="36576"/>
+          <a:lstStyle/>
+          <a:p>
+            <a:pPr algn="l">
+              <a:spcAft>
+                <a:spcPts val="0"/>
+              </a:spcAft>
+              <a:defRPr sz="1400" b="0">
+                <a:solidFill>
+                  <a:srgbClr val="122C4E"/>
+                </a:solidFill>
+                <a:latin typeface="DejaVu Sans Mono"/>
+              </a:defRPr>
+            </a:pPr>
+            <a:r>
+              <a:t>파일 생성: mkdir -p ~/ros2_curri/agv_ws/src/agv_sensors/agv_sensors</a:t>
+            </a:r>
+            <a:br/>
+            <a:r>
+              <a:t>파일 열기: nano ~/ros2_curri/agv_ws/src/agv_sensors/agv_sensors/imu_monitor.py</a:t>
+            </a:r>
+          </a:p>
+        </p:txBody>
+      </p:sp>
+      <p:sp>
+        <p:nvSpPr>
+          <p:cNvPr id="9" name="Rectangle 8"/>
+          <p:cNvSpPr/>
+          <p:nvPr/>
+        </p:nvSpPr>
+        <p:spPr>
+          <a:xfrm>
+            <a:off x="658368" y="2706624"/>
+            <a:ext cx="10972800" cy="3364992"/>
+          </a:xfrm>
+          <a:prstGeom prst="rect">
+            <a:avLst/>
+          </a:prstGeom>
+          <a:solidFill>
+            <a:srgbClr val="1D232D"/>
+          </a:solidFill>
+          <a:ln>
+            <a:solidFill>
+              <a:srgbClr val="1D232D"/>
+            </a:solidFill>
+          </a:ln>
+        </p:spPr>
+        <p:style>
+          <a:lnRef idx="1">
+            <a:schemeClr val="accent1"/>
+          </a:lnRef>
+          <a:fillRef idx="3">
+            <a:schemeClr val="accent1"/>
+          </a:fillRef>
+          <a:effectRef idx="2">
+            <a:schemeClr val="accent1"/>
+          </a:effectRef>
+          <a:fontRef idx="minor">
+            <a:schemeClr val="lt1"/>
+          </a:fontRef>
+        </p:style>
+        <p:txBody>
+          <a:bodyPr rtlCol="0" anchor="ctr" wrap="square" lIns="164592" rIns="164592" tIns="109728" bIns="36576"/>
+          <a:lstStyle/>
+          <a:p>
+            <a:pPr algn="l">
+              <a:spcAft>
+                <a:spcPts val="0"/>
+              </a:spcAft>
+              <a:defRPr sz="1400" b="0">
+                <a:solidFill>
+                  <a:srgbClr val="FFFFFF"/>
+                </a:solidFill>
+                <a:latin typeface="DejaVu Sans Mono"/>
+              </a:defRPr>
+            </a:pPr>
+            <a:r>
+              <a:t>    def callback(self, message):</a:t>
+            </a:r>
+            <a:br/>
+            <a:r>
+              <a:t>        self.get_logger().info('gyro z=%.3f rad/s, acceleration z=%.3f m/s²,</a:t>
+            </a:r>
+            <a:br/>
+            <a:r>
+              <a:t>            frame=%s' % (message.angular_velocity.z, message.linear_acceleration.z,</a:t>
+            </a:r>
+            <a:br/>
+            <a:r>
+              <a:t>            message.header.frame_id), throttle_duration_sec=1.0)</a:t>
+            </a:r>
+            <a:br/>
+            <a:br/>
+            <a:r>
+              <a:t>def main():</a:t>
+            </a:r>
+            <a:br/>
+            <a:r>
+              <a:t>    rclpy.init()</a:t>
+            </a:r>
+            <a:br/>
+            <a:r>
+              <a:t>    node = ImuMonitor()</a:t>
+            </a:r>
+            <a:br/>
+            <a:r>
+              <a:t>    try:</a:t>
+            </a:r>
+            <a:br/>
+            <a:r>
+              <a:t>        rclpy.spin(node)</a:t>
+            </a:r>
+            <a:br/>
+            <a:r>
+              <a:t>    except KeyboardInterrupt:</a:t>
+            </a:r>
+            <a:br/>
+            <a:r>
+              <a:t>        pass</a:t>
+            </a:r>
+          </a:p>
+        </p:txBody>
+      </p:sp>
+      <p:sp>
+        <p:nvSpPr>
+          <p:cNvPr id="10" name="TextBox 9"/>
+          <p:cNvSpPr txBox="1"/>
+          <p:nvPr/>
+        </p:nvSpPr>
+        <p:spPr>
+          <a:xfrm>
+            <a:off x="749808" y="6181344"/>
+            <a:ext cx="10789920" cy="201168"/>
+          </a:xfrm>
+          <a:prstGeom prst="rect">
+            <a:avLst/>
+          </a:prstGeom>
+          <a:noFill/>
+        </p:spPr>
+        <p:txBody>
+          <a:bodyPr wrap="square" lIns="73152" rIns="73152" tIns="36576" bIns="36576">
+            <a:spAutoFit/>
+          </a:bodyPr>
+          <a:lstStyle/>
+          <a:p>
+            <a:pPr algn="l">
+              <a:spcAft>
+                <a:spcPts val="0"/>
+              </a:spcAft>
+              <a:defRPr sz="1000" b="0">
+                <a:solidFill>
+                  <a:srgbClr val="5C6672"/>
+                </a:solidFill>
+                <a:latin typeface="Noto Sans CJK KR"/>
+              </a:defRPr>
+            </a:pPr>
+            <a:r>
+              <a:t>파일 전체 2/3 · 이 슬라이드 다음에 같은 파일의 나머지 줄이 이어집니다.</a:t>
             </a:r>
           </a:p>
         </p:txBody>
@@ -11444,7 +12301,7 @@
               </a:defRPr>
             </a:pPr>
             <a:r>
-              <a:t>정상 결과: 실제 환경에서 확인한 출력</a:t>
+              <a:t>파일을 계속 작성하고 저장한다 (3/3)</a:t>
             </a:r>
           </a:p>
         </p:txBody>
@@ -11483,7 +12340,7 @@
               </a:defRPr>
             </a:pPr>
             <a:r>
-              <a:t>실제 RViz2: 여러 sensor display를 같은 Fixed Frame에서 여는 운영 점검 화면</a:t>
+              <a:t>~/ros2_curri/agv_ws/src/agv_sensors/agv_sensors/imu_monitor.py</a:t>
             </a:r>
           </a:p>
         </p:txBody>
@@ -11566,30 +12423,64 @@
           </a:p>
         </p:txBody>
       </p:sp>
-      <p:pic>
-        <p:nvPicPr>
-          <p:cNvPr id="6" name="Picture 5" descr="03_rviz_sensors_actual.png"/>
-          <p:cNvPicPr>
-            <a:picLocks noChangeAspect="1"/>
-          </p:cNvPicPr>
-          <p:nvPr/>
-        </p:nvPicPr>
-        <p:blipFill>
-          <a:blip r:embed="rId2"/>
-          <a:stretch>
-            <a:fillRect/>
-          </a:stretch>
-        </p:blipFill>
-        <p:spPr>
-          <a:xfrm>
-            <a:off x="2971409" y="1353312"/>
-            <a:ext cx="6246133" cy="4800600"/>
-          </a:xfrm>
-          <a:prstGeom prst="rect">
-            <a:avLst/>
-          </a:prstGeom>
-        </p:spPr>
-      </p:pic>
+      <p:sp>
+        <p:nvSpPr>
+          <p:cNvPr id="6" name="Rectangle 5"/>
+          <p:cNvSpPr/>
+          <p:nvPr/>
+        </p:nvSpPr>
+        <p:spPr>
+          <a:xfrm>
+            <a:off x="566928" y="1188720"/>
+            <a:ext cx="11064240" cy="347472"/>
+          </a:xfrm>
+          <a:prstGeom prst="rect">
+            <a:avLst/>
+          </a:prstGeom>
+          <a:solidFill>
+            <a:srgbClr val="F4F7FB"/>
+          </a:solidFill>
+          <a:ln>
+            <a:solidFill>
+              <a:srgbClr val="F4F7FB"/>
+            </a:solidFill>
+          </a:ln>
+        </p:spPr>
+        <p:style>
+          <a:lnRef idx="1">
+            <a:schemeClr val="accent1"/>
+          </a:lnRef>
+          <a:fillRef idx="3">
+            <a:schemeClr val="accent1"/>
+          </a:fillRef>
+          <a:effectRef idx="2">
+            <a:schemeClr val="accent1"/>
+          </a:effectRef>
+          <a:fontRef idx="minor">
+            <a:schemeClr val="lt1"/>
+          </a:fontRef>
+        </p:style>
+        <p:txBody>
+          <a:bodyPr rtlCol="0" anchor="ctr" wrap="square" lIns="73152" rIns="73152" tIns="36576" bIns="36576"/>
+          <a:lstStyle/>
+          <a:p>
+            <a:pPr algn="l">
+              <a:spcAft>
+                <a:spcPts val="0"/>
+              </a:spcAft>
+              <a:defRPr sz="1300" b="1">
+                <a:solidFill>
+                  <a:srgbClr val="122C4E"/>
+                </a:solidFill>
+                <a:latin typeface="Noto Sans CJK KR"/>
+              </a:defRPr>
+            </a:pPr>
+            <a:r>
+              <a:t>현재 단계 12/13    |    현재 폴더 ~/ros2_curri/agv_ws    |    현재 터미널</a:t>
+            </a:r>
+          </a:p>
+        </p:txBody>
+      </p:sp>
       <p:sp>
         <p:nvSpPr>
           <p:cNvPr id="7" name="TextBox 6"/>
@@ -11598,33 +12489,204 @@
         </p:nvSpPr>
         <p:spPr>
           <a:xfrm>
-            <a:off x="777240" y="6217920"/>
-            <a:ext cx="10607040" cy="182880"/>
-          </a:xfrm>
-          <a:prstGeom prst="rect">
-            <a:avLst/>
-          </a:prstGeom>
-          <a:noFill/>
-        </p:spPr>
-        <p:txBody>
-          <a:bodyPr wrap="square" lIns="73152" rIns="73152" tIns="36576" bIns="36576">
-            <a:spAutoFit/>
-          </a:bodyPr>
-          <a:lstStyle/>
-          <a:p>
-            <a:pPr algn="ctr">
-              <a:spcAft>
-                <a:spcPts val="0"/>
-              </a:spcAft>
-              <a:defRPr sz="1100" b="1">
-                <a:solidFill>
-                  <a:srgbClr val="2A8B5A"/>
-                </a:solidFill>
-                <a:latin typeface="Noto Sans CJK KR"/>
-              </a:defRPr>
-            </a:pPr>
-            <a:r>
-              <a:t>① 명령/설정  ② 정상 출력 또는 화면  ③ 다음 검증 명령으로 재확인</a:t>
+            <a:off x="658368" y="1627632"/>
+            <a:ext cx="10972800" cy="256032"/>
+          </a:xfrm>
+          <a:prstGeom prst="rect">
+            <a:avLst/>
+          </a:prstGeom>
+          <a:noFill/>
+        </p:spPr>
+        <p:txBody>
+          <a:bodyPr wrap="square" lIns="73152" rIns="73152" tIns="36576" bIns="36576">
+            <a:spAutoFit/>
+          </a:bodyPr>
+          <a:lstStyle/>
+          <a:p>
+            <a:pPr algn="l">
+              <a:spcAft>
+                <a:spcPts val="0"/>
+              </a:spcAft>
+              <a:defRPr sz="1500" b="1">
+                <a:solidFill>
+                  <a:srgbClr val="122C4E"/>
+                </a:solidFill>
+                <a:latin typeface="Noto Sans CJK KR"/>
+              </a:defRPr>
+            </a:pPr>
+            <a:r>
+              <a:t>이번 단계: 파일의 전체 내용을 중간 생략 없이 작성합니다. 아래 줄 범위를 끝까지 입력하세요.</a:t>
+            </a:r>
+          </a:p>
+        </p:txBody>
+      </p:sp>
+      <p:sp>
+        <p:nvSpPr>
+          <p:cNvPr id="8" name="Rectangle 7"/>
+          <p:cNvSpPr/>
+          <p:nvPr/>
+        </p:nvSpPr>
+        <p:spPr>
+          <a:xfrm>
+            <a:off x="658368" y="1956816"/>
+            <a:ext cx="10972800" cy="603504"/>
+          </a:xfrm>
+          <a:prstGeom prst="rect">
+            <a:avLst/>
+          </a:prstGeom>
+          <a:solidFill>
+            <a:srgbClr val="F4F7FB"/>
+          </a:solidFill>
+          <a:ln>
+            <a:solidFill>
+              <a:srgbClr val="F4F7FB"/>
+            </a:solidFill>
+          </a:ln>
+        </p:spPr>
+        <p:style>
+          <a:lnRef idx="1">
+            <a:schemeClr val="accent1"/>
+          </a:lnRef>
+          <a:fillRef idx="3">
+            <a:schemeClr val="accent1"/>
+          </a:fillRef>
+          <a:effectRef idx="2">
+            <a:schemeClr val="accent1"/>
+          </a:effectRef>
+          <a:fontRef idx="minor">
+            <a:schemeClr val="lt1"/>
+          </a:fontRef>
+        </p:style>
+        <p:txBody>
+          <a:bodyPr rtlCol="0" anchor="ctr" wrap="square" lIns="73152" rIns="73152" tIns="36576" bIns="36576"/>
+          <a:lstStyle/>
+          <a:p>
+            <a:pPr algn="l">
+              <a:spcAft>
+                <a:spcPts val="0"/>
+              </a:spcAft>
+              <a:defRPr sz="1400" b="0">
+                <a:solidFill>
+                  <a:srgbClr val="122C4E"/>
+                </a:solidFill>
+                <a:latin typeface="DejaVu Sans Mono"/>
+              </a:defRPr>
+            </a:pPr>
+            <a:r>
+              <a:t>파일 생성: mkdir -p ~/ros2_curri/agv_ws/src/agv_sensors/agv_sensors</a:t>
+            </a:r>
+            <a:br/>
+            <a:r>
+              <a:t>파일 열기: nano ~/ros2_curri/agv_ws/src/agv_sensors/agv_sensors/imu_monitor.py</a:t>
+            </a:r>
+          </a:p>
+        </p:txBody>
+      </p:sp>
+      <p:sp>
+        <p:nvSpPr>
+          <p:cNvPr id="9" name="Rectangle 8"/>
+          <p:cNvSpPr/>
+          <p:nvPr/>
+        </p:nvSpPr>
+        <p:spPr>
+          <a:xfrm>
+            <a:off x="658368" y="2706624"/>
+            <a:ext cx="10972800" cy="3364992"/>
+          </a:xfrm>
+          <a:prstGeom prst="rect">
+            <a:avLst/>
+          </a:prstGeom>
+          <a:solidFill>
+            <a:srgbClr val="1D232D"/>
+          </a:solidFill>
+          <a:ln>
+            <a:solidFill>
+              <a:srgbClr val="1D232D"/>
+            </a:solidFill>
+          </a:ln>
+        </p:spPr>
+        <p:style>
+          <a:lnRef idx="1">
+            <a:schemeClr val="accent1"/>
+          </a:lnRef>
+          <a:fillRef idx="3">
+            <a:schemeClr val="accent1"/>
+          </a:fillRef>
+          <a:effectRef idx="2">
+            <a:schemeClr val="accent1"/>
+          </a:effectRef>
+          <a:fontRef idx="minor">
+            <a:schemeClr val="lt1"/>
+          </a:fontRef>
+        </p:style>
+        <p:txBody>
+          <a:bodyPr rtlCol="0" anchor="ctr" wrap="square" lIns="164592" rIns="164592" tIns="109728" bIns="36576"/>
+          <a:lstStyle/>
+          <a:p>
+            <a:pPr algn="l">
+              <a:spcAft>
+                <a:spcPts val="0"/>
+              </a:spcAft>
+              <a:defRPr sz="1400" b="0">
+                <a:solidFill>
+                  <a:srgbClr val="FFFFFF"/>
+                </a:solidFill>
+                <a:latin typeface="DejaVu Sans Mono"/>
+              </a:defRPr>
+            </a:pPr>
+            <a:r>
+              <a:t>    finally:</a:t>
+            </a:r>
+            <a:br/>
+            <a:r>
+              <a:t>        node.destroy_node()</a:t>
+            </a:r>
+            <a:br/>
+            <a:r>
+              <a:t>        if rclpy.ok():</a:t>
+            </a:r>
+            <a:br/>
+            <a:r>
+              <a:t>            rclpy.shutdown()</a:t>
+            </a:r>
+          </a:p>
+        </p:txBody>
+      </p:sp>
+      <p:sp>
+        <p:nvSpPr>
+          <p:cNvPr id="10" name="TextBox 9"/>
+          <p:cNvSpPr txBox="1"/>
+          <p:nvPr/>
+        </p:nvSpPr>
+        <p:spPr>
+          <a:xfrm>
+            <a:off x="749808" y="6181344"/>
+            <a:ext cx="10789920" cy="201168"/>
+          </a:xfrm>
+          <a:prstGeom prst="rect">
+            <a:avLst/>
+          </a:prstGeom>
+          <a:noFill/>
+        </p:spPr>
+        <p:txBody>
+          <a:bodyPr wrap="square" lIns="73152" rIns="73152" tIns="36576" bIns="36576">
+            <a:spAutoFit/>
+          </a:bodyPr>
+          <a:lstStyle/>
+          <a:p>
+            <a:pPr algn="l">
+              <a:spcAft>
+                <a:spcPts val="0"/>
+              </a:spcAft>
+              <a:defRPr sz="1000" b="0">
+                <a:solidFill>
+                  <a:srgbClr val="5C6672"/>
+                </a:solidFill>
+                <a:latin typeface="Noto Sans CJK KR"/>
+              </a:defRPr>
+            </a:pPr>
+            <a:r>
+              <a:t>파일 전체 3/3 · 이 슬라이드 다음에 같은 파일의 나머지 줄이 이어집니다.</a:t>
             </a:r>
           </a:p>
         </p:txBody>
@@ -11681,7 +12743,7 @@
               </a:defRPr>
             </a:pPr>
             <a:r>
-              <a:t>객관적 검증 명령으로 완료를 확인한다</a:t>
+              <a:t>build → source → run 순서로 실행한다</a:t>
             </a:r>
           </a:p>
         </p:txBody>
@@ -11720,7 +12782,7 @@
               </a:defRPr>
             </a:pPr>
             <a:r>
-              <a:t>화면만 보지 말고 topic·frame·파일·parameter를 다시 확인합니다.</a:t>
+              <a:t>새 파일 또는 수정 파일은 build와 source 뒤에만 실행 이름·설정에 반영됩니다.</a:t>
             </a:r>
           </a:p>
         </p:txBody>
@@ -11856,7 +12918,7 @@
               </a:defRPr>
             </a:pPr>
             <a:r>
-              <a:t>현재 단계 검증    |    현재 폴더 ~/ros2_curri/agv_ws    |    현재 터미널</a:t>
+              <a:t>현재 단계 실행    |    현재 폴더 ~/ros2_curri/agv_ws    |    현재 터미널</a:t>
             </a:r>
           </a:p>
         </p:txBody>
@@ -11869,8 +12931,8 @@
         </p:nvSpPr>
         <p:spPr>
           <a:xfrm>
-            <a:off x="658368" y="1755648"/>
-            <a:ext cx="10972800" cy="2148840"/>
+            <a:off x="658368" y="1700784"/>
+            <a:ext cx="10972800" cy="3182112"/>
           </a:xfrm>
           <a:prstGeom prst="roundRect">
             <a:avLst/>
@@ -11914,62 +12976,31 @@
               </a:defRPr>
             </a:pPr>
             <a:r>
-              <a:t>ros2 topic echo /clock --once</a:t>
-            </a:r>
-            <a:br/>
-            <a:r>
-              <a:t>ros2 topic hz /scan</a:t>
-            </a:r>
-            <a:br/>
-            <a:r>
-              <a:t>ros2 topic hz /imu/data</a:t>
-            </a:r>
-            <a:br/>
-            <a:r>
-              <a:t>ros2 param get /lidar_processor use_sim_time</a:t>
-            </a:r>
-          </a:p>
-        </p:txBody>
-      </p:sp>
-      <p:sp>
-        <p:nvSpPr>
-          <p:cNvPr id="8" name="Rounded Rectangle 7"/>
-          <p:cNvSpPr/>
-          <p:nvPr/>
-        </p:nvSpPr>
-        <p:spPr>
-          <a:xfrm>
-            <a:off x="658368" y="4206240"/>
-            <a:ext cx="10972800" cy="1554480"/>
-          </a:xfrm>
-          <a:prstGeom prst="roundRect">
-            <a:avLst/>
-          </a:prstGeom>
-          <a:solidFill>
-            <a:srgbClr val="F4F7FB"/>
-          </a:solidFill>
-          <a:ln>
-            <a:solidFill>
-              <a:srgbClr val="D1DFD5"/>
-            </a:solidFill>
-          </a:ln>
-        </p:spPr>
-        <p:style>
-          <a:lnRef idx="1">
-            <a:schemeClr val="accent1"/>
-          </a:lnRef>
-          <a:fillRef idx="3">
-            <a:schemeClr val="accent1"/>
-          </a:fillRef>
-          <a:effectRef idx="2">
-            <a:schemeClr val="accent1"/>
-          </a:effectRef>
-          <a:fontRef idx="minor">
-            <a:schemeClr val="lt1"/>
-          </a:fontRef>
-        </p:style>
-        <p:txBody>
-          <a:bodyPr rtlCol="0" anchor="ctr" wrap="square" lIns="73152" rIns="73152" tIns="36576" bIns="36576"/>
+              <a:t>ros2 launch agv_bringup agv_sim.launch.py rviz:=false</a:t>
+            </a:r>
+          </a:p>
+        </p:txBody>
+      </p:sp>
+      <p:sp>
+        <p:nvSpPr>
+          <p:cNvPr id="8" name="TextBox 7"/>
+          <p:cNvSpPr txBox="1"/>
+          <p:nvPr/>
+        </p:nvSpPr>
+        <p:spPr>
+          <a:xfrm>
+            <a:off x="786384" y="5239512"/>
+            <a:ext cx="1261872" cy="237744"/>
+          </a:xfrm>
+          <a:prstGeom prst="rect">
+            <a:avLst/>
+          </a:prstGeom>
+          <a:noFill/>
+        </p:spPr>
+        <p:txBody>
+          <a:bodyPr wrap="square" lIns="73152" rIns="73152" tIns="36576" bIns="36576">
+            <a:spAutoFit/>
+          </a:bodyPr>
           <a:lstStyle/>
           <a:p>
             <a:pPr algn="l">
@@ -11984,19 +13015,7 @@
               </a:defRPr>
             </a:pPr>
             <a:r>
-              <a:t>완료 체크</a:t>
-            </a:r>
-            <a:br/>
-            <a:r>
-              <a:t>□ 명령이 오류 없이 실행된다.</a:t>
-            </a:r>
-            <a:br/>
-            <a:r>
-              <a:t>□ 기대한 파일·topic·frame·parameter 이름이 보인다.</a:t>
-            </a:r>
-            <a:br/>
-            <a:r>
-              <a:t>□ 값의 단위와 방향을 한 문장으로 설명할 수 있다.</a:t>
+              <a:t>확인 기준</a:t>
             </a:r>
           </a:p>
         </p:txBody>
@@ -12009,25 +13028,25 @@
         </p:nvSpPr>
         <p:spPr>
           <a:xfrm>
-            <a:off x="731520" y="5989320"/>
-            <a:ext cx="10789920" cy="237744"/>
-          </a:xfrm>
-          <a:prstGeom prst="rect">
-            <a:avLst/>
-          </a:prstGeom>
-          <a:noFill/>
-        </p:spPr>
-        <p:txBody>
-          <a:bodyPr wrap="square" lIns="73152" rIns="73152" tIns="36576" bIns="36576">
-            <a:spAutoFit/>
-          </a:bodyPr>
-          <a:lstStyle/>
-          <a:p>
-            <a:pPr algn="l">
-              <a:spcAft>
-                <a:spcPts val="0"/>
-              </a:spcAft>
-              <a:defRPr sz="1500" b="1">
+            <a:off x="786384" y="5532120"/>
+            <a:ext cx="10469880" cy="420624"/>
+          </a:xfrm>
+          <a:prstGeom prst="rect">
+            <a:avLst/>
+          </a:prstGeom>
+          <a:noFill/>
+        </p:spPr>
+        <p:txBody>
+          <a:bodyPr wrap="square" lIns="73152" rIns="73152" tIns="36576" bIns="36576">
+            <a:spAutoFit/>
+          </a:bodyPr>
+          <a:lstStyle/>
+          <a:p>
+            <a:pPr algn="l">
+              <a:spcAft>
+                <a:spcPts val="0"/>
+              </a:spcAft>
+              <a:defRPr sz="1800" b="0">
                 <a:solidFill>
                   <a:srgbClr val="122C4E"/>
                 </a:solidFill>
@@ -12035,7 +13054,7 @@
               </a:defRPr>
             </a:pPr>
             <a:r>
-              <a:t>완료 조건: 모든 sensor 노드가 같은 시뮬레이션 시간과 기대 publish rate를 사용한다.</a:t>
+              <a:t>모든 sensor 노드가 같은 시뮬레이션 시간과 기대 publish rate를 사용한다.</a:t>
             </a:r>
           </a:p>
         </p:txBody>
@@ -12092,7 +13111,7 @@
               </a:defRPr>
             </a:pPr>
             <a:r>
-              <a:t>막히면: 증상 → 우선 확인 → 재검증</a:t>
+              <a:t>정상 결과: 실제 환경에서 확인한 출력</a:t>
             </a:r>
           </a:p>
         </p:txBody>
@@ -12131,7 +13150,7 @@
               </a:defRPr>
             </a:pPr>
             <a:r>
-              <a:t>오류 메시지를 숨기지 않고 같은 순서로 점검합니다.</a:t>
+              <a:t>실제 ROS 2 환경의 파일·패키지·구성 검증 로그</a:t>
             </a:r>
           </a:p>
         </p:txBody>
@@ -12214,328 +13233,40 @@
           </a:p>
         </p:txBody>
       </p:sp>
-      <p:sp>
-        <p:nvSpPr>
-          <p:cNvPr id="6" name="Rectangle 5"/>
-          <p:cNvSpPr/>
-          <p:nvPr/>
-        </p:nvSpPr>
-        <p:spPr>
-          <a:xfrm>
-            <a:off x="566928" y="1188720"/>
-            <a:ext cx="11064240" cy="347472"/>
-          </a:xfrm>
-          <a:prstGeom prst="rect">
-            <a:avLst/>
-          </a:prstGeom>
-          <a:solidFill>
-            <a:srgbClr val="F4F7FB"/>
-          </a:solidFill>
-          <a:ln>
-            <a:solidFill>
-              <a:srgbClr val="F4F7FB"/>
-            </a:solidFill>
-          </a:ln>
-        </p:spPr>
-        <p:style>
-          <a:lnRef idx="1">
-            <a:schemeClr val="accent1"/>
-          </a:lnRef>
-          <a:fillRef idx="3">
-            <a:schemeClr val="accent1"/>
-          </a:fillRef>
-          <a:effectRef idx="2">
-            <a:schemeClr val="accent1"/>
-          </a:effectRef>
-          <a:fontRef idx="minor">
-            <a:schemeClr val="lt1"/>
-          </a:fontRef>
-        </p:style>
-        <p:txBody>
-          <a:bodyPr rtlCol="0" anchor="ctr" wrap="square" lIns="73152" rIns="73152" tIns="36576" bIns="36576"/>
-          <a:lstStyle/>
-          <a:p>
-            <a:pPr algn="l">
-              <a:spcAft>
-                <a:spcPts val="0"/>
-              </a:spcAft>
-              <a:defRPr sz="1300" b="1">
-                <a:solidFill>
-                  <a:srgbClr val="122C4E"/>
-                </a:solidFill>
-                <a:latin typeface="Noto Sans CJK KR"/>
-              </a:defRPr>
-            </a:pPr>
-            <a:r>
-              <a:t>현재 단계 오류 대응    |    현재 폴더 ~/ros2_curri/agv_ws    |    현재 터미널</a:t>
-            </a:r>
-          </a:p>
-        </p:txBody>
-      </p:sp>
-      <p:sp>
-        <p:nvSpPr>
-          <p:cNvPr id="7" name="Rounded Rectangle 6"/>
-          <p:cNvSpPr/>
-          <p:nvPr/>
-        </p:nvSpPr>
-        <p:spPr>
-          <a:xfrm>
-            <a:off x="694944" y="1755648"/>
-            <a:ext cx="10972800" cy="1115568"/>
-          </a:xfrm>
-          <a:prstGeom prst="roundRect">
-            <a:avLst/>
-          </a:prstGeom>
-          <a:solidFill>
-            <a:srgbClr val="FFF7F4"/>
-          </a:solidFill>
-          <a:ln>
-            <a:solidFill>
-              <a:srgbClr val="EDBEB4"/>
-            </a:solidFill>
-          </a:ln>
-        </p:spPr>
-        <p:style>
-          <a:lnRef idx="1">
-            <a:schemeClr val="accent1"/>
-          </a:lnRef>
-          <a:fillRef idx="3">
-            <a:schemeClr val="accent1"/>
-          </a:fillRef>
-          <a:effectRef idx="2">
-            <a:schemeClr val="accent1"/>
-          </a:effectRef>
-          <a:fontRef idx="minor">
-            <a:schemeClr val="lt1"/>
-          </a:fontRef>
-        </p:style>
-        <p:txBody>
-          <a:bodyPr rtlCol="0" anchor="ctr"/>
-          <a:lstStyle/>
-          <a:p>
-            <a:pPr algn="ctr"/>
-          </a:p>
-        </p:txBody>
-      </p:sp>
-      <p:sp>
-        <p:nvSpPr>
-          <p:cNvPr id="8" name="TextBox 7"/>
-          <p:cNvSpPr txBox="1"/>
-          <p:nvPr/>
-        </p:nvSpPr>
-        <p:spPr>
-          <a:xfrm>
-            <a:off x="896112" y="1901952"/>
-            <a:ext cx="2926080" cy="274320"/>
-          </a:xfrm>
-          <a:prstGeom prst="rect">
-            <a:avLst/>
-          </a:prstGeom>
-          <a:noFill/>
-        </p:spPr>
-        <p:txBody>
-          <a:bodyPr wrap="square" lIns="73152" rIns="73152" tIns="36576" bIns="36576">
-            <a:spAutoFit/>
-          </a:bodyPr>
-          <a:lstStyle/>
-          <a:p>
-            <a:pPr algn="l">
-              <a:spcAft>
-                <a:spcPts val="0"/>
-              </a:spcAft>
-              <a:defRPr sz="1800" b="1">
-                <a:solidFill>
-                  <a:srgbClr val="BE3B3B"/>
-                </a:solidFill>
-                <a:latin typeface="Noto Sans CJK KR"/>
-              </a:defRPr>
-            </a:pPr>
-            <a:r>
-              <a:t>증상 1: ROS 노드 시간이 안 감</a:t>
-            </a:r>
-          </a:p>
-        </p:txBody>
-      </p:sp>
-      <p:sp>
-        <p:nvSpPr>
-          <p:cNvPr id="9" name="TextBox 8"/>
-          <p:cNvSpPr txBox="1"/>
-          <p:nvPr/>
-        </p:nvSpPr>
-        <p:spPr>
-          <a:xfrm>
-            <a:off x="3794760" y="1883664"/>
-            <a:ext cx="7543800" cy="621792"/>
-          </a:xfrm>
-          <a:prstGeom prst="rect">
-            <a:avLst/>
-          </a:prstGeom>
-          <a:noFill/>
-        </p:spPr>
-        <p:txBody>
-          <a:bodyPr wrap="square" lIns="73152" rIns="73152" tIns="36576" bIns="36576">
-            <a:spAutoFit/>
-          </a:bodyPr>
-          <a:lstStyle/>
-          <a:p>
-            <a:pPr algn="l">
-              <a:spcAft>
-                <a:spcPts val="0"/>
-              </a:spcAft>
-              <a:defRPr sz="1600" b="0">
-                <a:solidFill>
-                  <a:srgbClr val="122C4E"/>
-                </a:solidFill>
-                <a:latin typeface="Noto Sans CJK KR"/>
-              </a:defRPr>
-            </a:pPr>
-            <a:r>
-              <a:t>우선 확인: use_sim_time과 /clock bridge를 확인한다.</a:t>
-            </a:r>
-            <a:br/>
-            <a:r>
-              <a:t>수정 후: ros2 topic echo /clock --once</a:t>
-            </a:r>
-          </a:p>
-        </p:txBody>
-      </p:sp>
-      <p:sp>
-        <p:nvSpPr>
-          <p:cNvPr id="10" name="Rounded Rectangle 9"/>
-          <p:cNvSpPr/>
-          <p:nvPr/>
-        </p:nvSpPr>
-        <p:spPr>
-          <a:xfrm>
-            <a:off x="694944" y="3172968"/>
-            <a:ext cx="10972800" cy="1115568"/>
-          </a:xfrm>
-          <a:prstGeom prst="roundRect">
-            <a:avLst/>
-          </a:prstGeom>
-          <a:solidFill>
-            <a:srgbClr val="FFF7F4"/>
-          </a:solidFill>
-          <a:ln>
-            <a:solidFill>
-              <a:srgbClr val="EDBEB4"/>
-            </a:solidFill>
-          </a:ln>
-        </p:spPr>
-        <p:style>
-          <a:lnRef idx="1">
-            <a:schemeClr val="accent1"/>
-          </a:lnRef>
-          <a:fillRef idx="3">
-            <a:schemeClr val="accent1"/>
-          </a:fillRef>
-          <a:effectRef idx="2">
-            <a:schemeClr val="accent1"/>
-          </a:effectRef>
-          <a:fontRef idx="minor">
-            <a:schemeClr val="lt1"/>
-          </a:fontRef>
-        </p:style>
-        <p:txBody>
-          <a:bodyPr rtlCol="0" anchor="ctr"/>
-          <a:lstStyle/>
-          <a:p>
-            <a:pPr algn="ctr"/>
-          </a:p>
-        </p:txBody>
-      </p:sp>
-      <p:sp>
-        <p:nvSpPr>
-          <p:cNvPr id="11" name="TextBox 10"/>
-          <p:cNvSpPr txBox="1"/>
-          <p:nvPr/>
-        </p:nvSpPr>
-        <p:spPr>
-          <a:xfrm>
-            <a:off x="896112" y="3319272"/>
-            <a:ext cx="2926080" cy="274320"/>
-          </a:xfrm>
-          <a:prstGeom prst="rect">
-            <a:avLst/>
-          </a:prstGeom>
-          <a:noFill/>
-        </p:spPr>
-        <p:txBody>
-          <a:bodyPr wrap="square" lIns="73152" rIns="73152" tIns="36576" bIns="36576">
-            <a:spAutoFit/>
-          </a:bodyPr>
-          <a:lstStyle/>
-          <a:p>
-            <a:pPr algn="l">
-              <a:spcAft>
-                <a:spcPts val="0"/>
-              </a:spcAft>
-              <a:defRPr sz="1800" b="1">
-                <a:solidFill>
-                  <a:srgbClr val="BE3B3B"/>
-                </a:solidFill>
-                <a:latin typeface="Noto Sans CJK KR"/>
-              </a:defRPr>
-            </a:pPr>
-            <a:r>
-              <a:t>증상 2: topic은 있는데 subscriber가 못 받음</a:t>
-            </a:r>
-          </a:p>
-        </p:txBody>
-      </p:sp>
-      <p:sp>
-        <p:nvSpPr>
-          <p:cNvPr id="12" name="TextBox 11"/>
-          <p:cNvSpPr txBox="1"/>
-          <p:nvPr/>
-        </p:nvSpPr>
-        <p:spPr>
-          <a:xfrm>
-            <a:off x="3794760" y="3300984"/>
-            <a:ext cx="7543800" cy="621792"/>
-          </a:xfrm>
-          <a:prstGeom prst="rect">
-            <a:avLst/>
-          </a:prstGeom>
-          <a:noFill/>
-        </p:spPr>
-        <p:txBody>
-          <a:bodyPr wrap="square" lIns="73152" rIns="73152" tIns="36576" bIns="36576">
-            <a:spAutoFit/>
-          </a:bodyPr>
-          <a:lstStyle/>
-          <a:p>
-            <a:pPr algn="l">
-              <a:spcAft>
-                <a:spcPts val="0"/>
-              </a:spcAft>
-              <a:defRPr sz="1600" b="0">
-                <a:solidFill>
-                  <a:srgbClr val="122C4E"/>
-                </a:solidFill>
-                <a:latin typeface="Noto Sans CJK KR"/>
-              </a:defRPr>
-            </a:pPr>
-            <a:r>
-              <a:t>우선 확인: publisher/subscriber QoS reliability 호환을 확인한다.</a:t>
-            </a:r>
-            <a:br/>
-            <a:r>
-              <a:t>수정 후: ros2 topic echo /clock --once</a:t>
-            </a:r>
-          </a:p>
-        </p:txBody>
-      </p:sp>
-      <p:sp>
-        <p:nvSpPr>
-          <p:cNvPr id="13" name="TextBox 12"/>
-          <p:cNvSpPr txBox="1"/>
-          <p:nvPr/>
-        </p:nvSpPr>
-        <p:spPr>
-          <a:xfrm>
-            <a:off x="822960" y="5102352"/>
-            <a:ext cx="10607040" cy="402336"/>
+      <p:pic>
+        <p:nvPicPr>
+          <p:cNvPr id="6" name="Picture 5" descr="validation_terminal.png"/>
+          <p:cNvPicPr>
+            <a:picLocks noChangeAspect="1"/>
+          </p:cNvPicPr>
+          <p:nvPr/>
+        </p:nvPicPr>
+        <p:blipFill>
+          <a:blip r:embed="rId2"/>
+          <a:stretch>
+            <a:fillRect/>
+          </a:stretch>
+        </p:blipFill>
+        <p:spPr>
+          <a:xfrm>
+            <a:off x="790956" y="1453970"/>
+            <a:ext cx="10607040" cy="4599282"/>
+          </a:xfrm>
+          <a:prstGeom prst="rect">
+            <a:avLst/>
+          </a:prstGeom>
+        </p:spPr>
+      </p:pic>
+      <p:sp>
+        <p:nvSpPr>
+          <p:cNvPr id="7" name="TextBox 6"/>
+          <p:cNvSpPr txBox="1"/>
+          <p:nvPr/>
+        </p:nvSpPr>
+        <p:spPr>
+          <a:xfrm>
+            <a:off x="777240" y="6144768"/>
+            <a:ext cx="10607040" cy="310896"/>
           </a:xfrm>
           <a:prstGeom prst="rect">
             <a:avLst/>
@@ -12552,15 +13283,15 @@
               <a:spcAft>
                 <a:spcPts val="0"/>
               </a:spcAft>
-              <a:defRPr sz="1800" b="1">
-                <a:solidFill>
-                  <a:srgbClr val="DB7E22"/>
-                </a:solidFill>
-                <a:latin typeface="Noto Sans CJK KR"/>
-              </a:defRPr>
-            </a:pPr>
-            <a:r>
-              <a:t>공통 순서: ① 현재 폴더 ② source ③ 파일 경로 ④ 이름/타입/단위 ⑤ build·source 후 재실행</a:t>
+              <a:defRPr sz="1100" b="1">
+                <a:solidFill>
+                  <a:srgbClr val="2A8B5A"/>
+                </a:solidFill>
+                <a:latin typeface="Noto Sans CJK KR"/>
+              </a:defRPr>
+            </a:pPr>
+            <a:r>
+              <a:t>화면에서 확인: ① 명령/설정  ② 정상 출력 또는 화면  ③ 다음 검증 명령으로 재확인</a:t>
             </a:r>
           </a:p>
         </p:txBody>
@@ -12617,7 +13348,7 @@
               </a:defRPr>
             </a:pPr>
             <a:r>
-              <a:t>미니 실습: 값 하나를 바꾸고 결과를 비교한다</a:t>
+              <a:t>정상 결과: 실제 환경에서 확인한 출력</a:t>
             </a:r>
           </a:p>
         </p:txBody>
@@ -12656,7 +13387,7 @@
               </a:defRPr>
             </a:pPr>
             <a:r>
-              <a:t>정상 결과를 만든 뒤에는 한 번에 하나의 값만 바꿉니다.</a:t>
+              <a:t>실제 terminal: Camera topic의 type·연결 수·실측 rate</a:t>
             </a:r>
           </a:p>
         </p:txBody>
@@ -12739,157 +13470,65 @@
           </a:p>
         </p:txBody>
       </p:sp>
-      <p:sp>
-        <p:nvSpPr>
-          <p:cNvPr id="6" name="Rectangle 5"/>
-          <p:cNvSpPr/>
-          <p:nvPr/>
-        </p:nvSpPr>
-        <p:spPr>
-          <a:xfrm>
-            <a:off x="566928" y="1188720"/>
-            <a:ext cx="11064240" cy="347472"/>
-          </a:xfrm>
-          <a:prstGeom prst="rect">
-            <a:avLst/>
-          </a:prstGeom>
-          <a:solidFill>
-            <a:srgbClr val="F4F7FB"/>
-          </a:solidFill>
-          <a:ln>
-            <a:solidFill>
-              <a:srgbClr val="F4F7FB"/>
-            </a:solidFill>
-          </a:ln>
-        </p:spPr>
-        <p:style>
-          <a:lnRef idx="1">
-            <a:schemeClr val="accent1"/>
-          </a:lnRef>
-          <a:fillRef idx="3">
-            <a:schemeClr val="accent1"/>
-          </a:fillRef>
-          <a:effectRef idx="2">
-            <a:schemeClr val="accent1"/>
-          </a:effectRef>
-          <a:fontRef idx="minor">
-            <a:schemeClr val="lt1"/>
-          </a:fontRef>
-        </p:style>
-        <p:txBody>
-          <a:bodyPr rtlCol="0" anchor="ctr" wrap="square" lIns="73152" rIns="73152" tIns="36576" bIns="36576"/>
-          <a:lstStyle/>
-          <a:p>
-            <a:pPr algn="l">
-              <a:spcAft>
-                <a:spcPts val="0"/>
-              </a:spcAft>
-              <a:defRPr sz="1300" b="1">
-                <a:solidFill>
-                  <a:srgbClr val="122C4E"/>
-                </a:solidFill>
-                <a:latin typeface="Noto Sans CJK KR"/>
-              </a:defRPr>
-            </a:pPr>
-            <a:r>
-              <a:t>현재 단계 미니 실습    |    현재 폴더 ~/ros2_curri/agv_ws    |    현재 터미널</a:t>
-            </a:r>
-          </a:p>
-        </p:txBody>
-      </p:sp>
-      <p:sp>
-        <p:nvSpPr>
-          <p:cNvPr id="7" name="Rounded Rectangle 6"/>
-          <p:cNvSpPr/>
-          <p:nvPr/>
-        </p:nvSpPr>
-        <p:spPr>
-          <a:xfrm>
-            <a:off x="749808" y="1874519"/>
-            <a:ext cx="10652760" cy="1993392"/>
-          </a:xfrm>
-          <a:prstGeom prst="roundRect">
-            <a:avLst/>
-          </a:prstGeom>
-          <a:solidFill>
-            <a:srgbClr val="FFF8EB"/>
-          </a:solidFill>
-          <a:ln>
-            <a:solidFill>
-              <a:srgbClr val="ECC680"/>
-            </a:solidFill>
-          </a:ln>
-        </p:spPr>
-        <p:style>
-          <a:lnRef idx="1">
-            <a:schemeClr val="accent1"/>
-          </a:lnRef>
-          <a:fillRef idx="3">
-            <a:schemeClr val="accent1"/>
-          </a:fillRef>
-          <a:effectRef idx="2">
-            <a:schemeClr val="accent1"/>
-          </a:effectRef>
-          <a:fontRef idx="minor">
-            <a:schemeClr val="lt1"/>
-          </a:fontRef>
-        </p:style>
-        <p:txBody>
-          <a:bodyPr rtlCol="0" anchor="ctr" wrap="square" lIns="73152" rIns="73152" tIns="36576" bIns="36576"/>
+      <p:pic>
+        <p:nvPicPr>
+          <p:cNvPr id="6" name="Picture 5" descr="02_camera_terminal_actual.png"/>
+          <p:cNvPicPr>
+            <a:picLocks noChangeAspect="1"/>
+          </p:cNvPicPr>
+          <p:nvPr/>
+        </p:nvPicPr>
+        <p:blipFill>
+          <a:blip r:embed="rId2"/>
+          <a:stretch>
+            <a:fillRect/>
+          </a:stretch>
+        </p:blipFill>
+        <p:spPr>
+          <a:xfrm>
+            <a:off x="2789770" y="1353312"/>
+            <a:ext cx="6609411" cy="4800600"/>
+          </a:xfrm>
+          <a:prstGeom prst="rect">
+            <a:avLst/>
+          </a:prstGeom>
+        </p:spPr>
+      </p:pic>
+      <p:sp>
+        <p:nvSpPr>
+          <p:cNvPr id="7" name="TextBox 6"/>
+          <p:cNvSpPr txBox="1"/>
+          <p:nvPr/>
+        </p:nvSpPr>
+        <p:spPr>
+          <a:xfrm>
+            <a:off x="777240" y="6144768"/>
+            <a:ext cx="10607040" cy="310896"/>
+          </a:xfrm>
+          <a:prstGeom prst="rect">
+            <a:avLst/>
+          </a:prstGeom>
+          <a:noFill/>
+        </p:spPr>
+        <p:txBody>
+          <a:bodyPr wrap="square" lIns="73152" rIns="73152" tIns="36576" bIns="36576">
+            <a:spAutoFit/>
+          </a:bodyPr>
           <a:lstStyle/>
           <a:p>
             <a:pPr algn="ctr">
               <a:spcAft>
                 <a:spcPts val="0"/>
               </a:spcAft>
-              <a:defRPr sz="2300" b="1">
-                <a:solidFill>
-                  <a:srgbClr val="122C4E"/>
-                </a:solidFill>
-                <a:latin typeface="Noto Sans CJK KR"/>
-              </a:defRPr>
-            </a:pPr>
-            <a:r>
-              <a:t>/scan과 /imu/data의 hz를 표로 기록하고 SDF update_rate 10/100 Hz와 비교한다.</a:t>
-            </a:r>
-          </a:p>
-        </p:txBody>
-      </p:sp>
-      <p:sp>
-        <p:nvSpPr>
-          <p:cNvPr id="8" name="TextBox 7"/>
-          <p:cNvSpPr txBox="1"/>
-          <p:nvPr/>
-        </p:nvSpPr>
-        <p:spPr>
-          <a:xfrm>
-            <a:off x="877824" y="4590288"/>
-            <a:ext cx="10241280" cy="594360"/>
-          </a:xfrm>
-          <a:prstGeom prst="rect">
-            <a:avLst/>
-          </a:prstGeom>
-          <a:noFill/>
-        </p:spPr>
-        <p:txBody>
-          <a:bodyPr wrap="square" lIns="73152" rIns="73152" tIns="36576" bIns="36576">
-            <a:spAutoFit/>
-          </a:bodyPr>
-          <a:lstStyle/>
-          <a:p>
-            <a:pPr algn="ctr">
-              <a:spcAft>
-                <a:spcPts val="0"/>
-              </a:spcAft>
-              <a:defRPr sz="1900" b="1">
-                <a:solidFill>
-                  <a:srgbClr val="DB7E22"/>
-                </a:solidFill>
-                <a:latin typeface="Noto Sans CJK KR"/>
-              </a:defRPr>
-            </a:pPr>
-            <a:r>
-              <a:t>기록할 것: 바꾼 값(단위) · 기대한 변화 · 실제 출력/화면 · 원래 값으로 되돌린 결과</a:t>
+              <a:defRPr sz="1100" b="1">
+                <a:solidFill>
+                  <a:srgbClr val="2A8B5A"/>
+                </a:solidFill>
+                <a:latin typeface="Noto Sans CJK KR"/>
+              </a:defRPr>
+            </a:pPr>
+            <a:r>
+              <a:t>화면에서 확인: camera가 message를 내보내고 있는지 type·publisher·rate로 확인합니다.</a:t>
             </a:r>
           </a:p>
         </p:txBody>
@@ -12946,7 +13585,7 @@
               </a:defRPr>
             </a:pPr>
             <a:r>
-              <a:t>체크포인트를 저장하고 다음 모듈로 넘긴다</a:t>
+              <a:t>정상 결과: 실제 환경에서 확인한 출력</a:t>
             </a:r>
           </a:p>
         </p:txBody>
@@ -12985,7 +13624,7 @@
               </a:defRPr>
             </a:pPr>
             <a:r>
-              <a:t>현재 Complete는 다음 Starter의 기준선입니다.</a:t>
+              <a:t>실제 terminal: LiDAR의 frame·range·실측 rate</a:t>
             </a:r>
           </a:p>
         </p:txBody>
@@ -13068,222 +13707,40 @@
           </a:p>
         </p:txBody>
       </p:sp>
-      <p:sp>
-        <p:nvSpPr>
-          <p:cNvPr id="6" name="Rectangle 5"/>
-          <p:cNvSpPr/>
-          <p:nvPr/>
-        </p:nvSpPr>
-        <p:spPr>
-          <a:xfrm>
-            <a:off x="566928" y="1188720"/>
-            <a:ext cx="11064240" cy="347472"/>
-          </a:xfrm>
-          <a:prstGeom prst="rect">
-            <a:avLst/>
-          </a:prstGeom>
-          <a:solidFill>
-            <a:srgbClr val="F4F7FB"/>
-          </a:solidFill>
-          <a:ln>
-            <a:solidFill>
-              <a:srgbClr val="F4F7FB"/>
-            </a:solidFill>
-          </a:ln>
-        </p:spPr>
-        <p:style>
-          <a:lnRef idx="1">
-            <a:schemeClr val="accent1"/>
-          </a:lnRef>
-          <a:fillRef idx="3">
-            <a:schemeClr val="accent1"/>
-          </a:fillRef>
-          <a:effectRef idx="2">
-            <a:schemeClr val="accent1"/>
-          </a:effectRef>
-          <a:fontRef idx="minor">
-            <a:schemeClr val="lt1"/>
-          </a:fontRef>
-        </p:style>
-        <p:txBody>
-          <a:bodyPr rtlCol="0" anchor="ctr" wrap="square" lIns="73152" rIns="73152" tIns="36576" bIns="36576"/>
-          <a:lstStyle/>
-          <a:p>
-            <a:pPr algn="l">
-              <a:spcAft>
-                <a:spcPts val="0"/>
-              </a:spcAft>
-              <a:defRPr sz="1300" b="1">
-                <a:solidFill>
-                  <a:srgbClr val="122C4E"/>
-                </a:solidFill>
-                <a:latin typeface="Noto Sans CJK KR"/>
-              </a:defRPr>
-            </a:pPr>
-            <a:r>
-              <a:t>현재 단계 체크포인트    |    현재 폴더 ~/ros2_curri/agv_ws    |    현재 터미널</a:t>
-            </a:r>
-          </a:p>
-        </p:txBody>
-      </p:sp>
-      <p:sp>
-        <p:nvSpPr>
-          <p:cNvPr id="7" name="Rounded Rectangle 6"/>
-          <p:cNvSpPr/>
-          <p:nvPr/>
-        </p:nvSpPr>
-        <p:spPr>
-          <a:xfrm>
-            <a:off x="685800" y="1737360"/>
-            <a:ext cx="10972800" cy="3611880"/>
-          </a:xfrm>
-          <a:prstGeom prst="roundRect">
-            <a:avLst/>
-          </a:prstGeom>
-          <a:solidFill>
-            <a:srgbClr val="F4F7FB"/>
-          </a:solidFill>
-          <a:ln>
-            <a:solidFill>
-              <a:srgbClr val="D2DCE8"/>
-            </a:solidFill>
-          </a:ln>
-        </p:spPr>
-        <p:style>
-          <a:lnRef idx="1">
-            <a:schemeClr val="accent1"/>
-          </a:lnRef>
-          <a:fillRef idx="3">
-            <a:schemeClr val="accent1"/>
-          </a:fillRef>
-          <a:effectRef idx="2">
-            <a:schemeClr val="accent1"/>
-          </a:effectRef>
-          <a:fontRef idx="minor">
-            <a:schemeClr val="lt1"/>
-          </a:fontRef>
-        </p:style>
-        <p:txBody>
-          <a:bodyPr rtlCol="0" anchor="ctr"/>
-          <a:lstStyle/>
-          <a:p>
-            <a:pPr algn="ctr"/>
-          </a:p>
-        </p:txBody>
-      </p:sp>
-      <p:sp>
-        <p:nvSpPr>
-          <p:cNvPr id="8" name="TextBox 7"/>
-          <p:cNvSpPr txBox="1"/>
-          <p:nvPr/>
-        </p:nvSpPr>
-        <p:spPr>
-          <a:xfrm>
-            <a:off x="896112" y="1993392"/>
-            <a:ext cx="10332720" cy="2971800"/>
-          </a:xfrm>
-          <a:prstGeom prst="rect">
-            <a:avLst/>
-          </a:prstGeom>
-          <a:noFill/>
-        </p:spPr>
-        <p:txBody>
-          <a:bodyPr wrap="square" lIns="109728" rIns="109728">
-            <a:spAutoFit/>
-          </a:bodyPr>
-          <a:lstStyle/>
-          <a:p>
-            <a:pPr>
-              <a:spcAft>
-                <a:spcPts val="800"/>
-              </a:spcAft>
-              <a:defRPr sz="1800">
-                <a:solidFill>
-                  <a:srgbClr val="122C4E"/>
-                </a:solidFill>
-                <a:latin typeface="Noto Sans CJK KR"/>
-              </a:defRPr>
-            </a:pPr>
-            <a:r>
-              <a:t>• □ 완료 화면: 모든 sensor 노드가 같은 시뮬레이션 시간과 기대 publish rate를 사용한다.</a:t>
-            </a:r>
-          </a:p>
-          <a:p>
-            <a:pPr>
-              <a:spcAft>
-                <a:spcPts val="800"/>
-              </a:spcAft>
-              <a:defRPr sz="1800">
-                <a:solidFill>
-                  <a:srgbClr val="122C4E"/>
-                </a:solidFill>
-                <a:latin typeface="Noto Sans CJK KR"/>
-              </a:defRPr>
-            </a:pPr>
-            <a:r>
-              <a:t>• □ Complete 파일: blocks/D_sensors/M15_sensor_operations/complete/</a:t>
-            </a:r>
-          </a:p>
-          <a:p>
-            <a:pPr>
-              <a:spcAft>
-                <a:spcPts val="800"/>
-              </a:spcAft>
-              <a:defRPr sz="1800">
-                <a:solidFill>
-                  <a:srgbClr val="122C4E"/>
-                </a:solidFill>
-                <a:latin typeface="Noto Sans CJK KR"/>
-              </a:defRPr>
-            </a:pPr>
-            <a:r>
-              <a:t>• □ 정상 로그·캡처: logs/validation.log, screenshots/validation_terminal.png</a:t>
-            </a:r>
-          </a:p>
-          <a:p>
-            <a:pPr>
-              <a:spcAft>
-                <a:spcPts val="800"/>
-              </a:spcAft>
-              <a:defRPr sz="1800">
-                <a:solidFill>
-                  <a:srgbClr val="122C4E"/>
-                </a:solidFill>
-                <a:latin typeface="Noto Sans CJK KR"/>
-              </a:defRPr>
-            </a:pPr>
-            <a:r>
-              <a:t>• □ 버전 식별: CHECKSUM_or_TAG.txt의 SHA-256 manifest</a:t>
-            </a:r>
-          </a:p>
-          <a:p>
-            <a:pPr>
-              <a:spcAft>
-                <a:spcPts val="800"/>
-              </a:spcAft>
-              <a:defRPr sz="1800">
-                <a:solidFill>
-                  <a:srgbClr val="122C4E"/>
-                </a:solidFill>
-                <a:latin typeface="Noto Sans CJK KR"/>
-              </a:defRPr>
-            </a:pPr>
-            <a:r>
-              <a:t>• □ 다음 시작 조건: M16 제어 interface</a:t>
-            </a:r>
-          </a:p>
-        </p:txBody>
-      </p:sp>
-      <p:sp>
-        <p:nvSpPr>
-          <p:cNvPr id="9" name="TextBox 8"/>
-          <p:cNvSpPr txBox="1"/>
-          <p:nvPr/>
-        </p:nvSpPr>
-        <p:spPr>
-          <a:xfrm>
-            <a:off x="868680" y="5596128"/>
-            <a:ext cx="10515600" cy="338328"/>
+      <p:pic>
+        <p:nvPicPr>
+          <p:cNvPr id="6" name="Picture 5" descr="05_lidar_terminal_actual.png"/>
+          <p:cNvPicPr>
+            <a:picLocks noChangeAspect="1"/>
+          </p:cNvPicPr>
+          <p:nvPr/>
+        </p:nvPicPr>
+        <p:blipFill>
+          <a:blip r:embed="rId2"/>
+          <a:stretch>
+            <a:fillRect/>
+          </a:stretch>
+        </p:blipFill>
+        <p:spPr>
+          <a:xfrm>
+            <a:off x="2789770" y="1353312"/>
+            <a:ext cx="6609411" cy="4800600"/>
+          </a:xfrm>
+          <a:prstGeom prst="rect">
+            <a:avLst/>
+          </a:prstGeom>
+        </p:spPr>
+      </p:pic>
+      <p:sp>
+        <p:nvSpPr>
+          <p:cNvPr id="7" name="TextBox 6"/>
+          <p:cNvSpPr txBox="1"/>
+          <p:nvPr/>
+        </p:nvSpPr>
+        <p:spPr>
+          <a:xfrm>
+            <a:off x="777240" y="6144768"/>
+            <a:ext cx="10607040" cy="310896"/>
           </a:xfrm>
           <a:prstGeom prst="rect">
             <a:avLst/>
@@ -13300,7 +13757,7 @@
               <a:spcAft>
                 <a:spcPts val="0"/>
               </a:spcAft>
-              <a:defRPr sz="1700" b="1">
+              <a:defRPr sz="1100" b="1">
                 <a:solidFill>
                   <a:srgbClr val="2A8B5A"/>
                 </a:solidFill>
@@ -13308,7 +13765,7 @@
               </a:defRPr>
             </a:pPr>
             <a:r>
-              <a:t>다음 모듈을 시작하기 전, 이 슬라이드의 Complete와 다음 모듈의 Starter를 비교합니다.</a:t>
+              <a:t>화면에서 확인: SDF 설정값과 실제 range/angle/rate가 논리적으로 맞는지 대조합니다.</a:t>
             </a:r>
           </a:p>
         </p:txBody>
@@ -13365,7 +13822,7 @@
               </a:defRPr>
             </a:pPr>
             <a:r>
-              <a:t>공식 참고 자료</a:t>
+              <a:t>정상 결과: 실제 환경에서 확인한 출력</a:t>
             </a:r>
           </a:p>
         </p:txBody>
@@ -13404,7 +13861,7 @@
               </a:defRPr>
             </a:pPr>
             <a:r>
-              <a:t>본문 단계는 링크를 열지 않아도 완료할 수 있으며, 링크는 개념을 더 확인할 때만 사용합니다.</a:t>
+              <a:t>실제 terminal: IMU frame·필드·실측 rate</a:t>
             </a:r>
           </a:p>
         </p:txBody>
@@ -13487,18 +13944,492 @@
           </a:p>
         </p:txBody>
       </p:sp>
-      <p:sp>
-        <p:nvSpPr>
-          <p:cNvPr id="6" name="Rounded Rectangle 5"/>
+      <p:pic>
+        <p:nvPicPr>
+          <p:cNvPr id="6" name="Picture 5" descr="06_imu_terminal_actual.png"/>
+          <p:cNvPicPr>
+            <a:picLocks noChangeAspect="1"/>
+          </p:cNvPicPr>
+          <p:nvPr/>
+        </p:nvPicPr>
+        <p:blipFill>
+          <a:blip r:embed="rId2"/>
+          <a:stretch>
+            <a:fillRect/>
+          </a:stretch>
+        </p:blipFill>
+        <p:spPr>
+          <a:xfrm>
+            <a:off x="2789770" y="1353312"/>
+            <a:ext cx="6609411" cy="4800600"/>
+          </a:xfrm>
+          <a:prstGeom prst="rect">
+            <a:avLst/>
+          </a:prstGeom>
+        </p:spPr>
+      </p:pic>
+      <p:sp>
+        <p:nvSpPr>
+          <p:cNvPr id="7" name="TextBox 6"/>
+          <p:cNvSpPr txBox="1"/>
+          <p:nvPr/>
+        </p:nvSpPr>
+        <p:spPr>
+          <a:xfrm>
+            <a:off x="777240" y="6144768"/>
+            <a:ext cx="10607040" cy="310896"/>
+          </a:xfrm>
+          <a:prstGeom prst="rect">
+            <a:avLst/>
+          </a:prstGeom>
+          <a:noFill/>
+        </p:spPr>
+        <p:txBody>
+          <a:bodyPr wrap="square" lIns="73152" rIns="73152" tIns="36576" bIns="36576">
+            <a:spAutoFit/>
+          </a:bodyPr>
+          <a:lstStyle/>
+          <a:p>
+            <a:pPr algn="ctr">
+              <a:spcAft>
+                <a:spcPts val="0"/>
+              </a:spcAft>
+              <a:defRPr sz="1100" b="1">
+                <a:solidFill>
+                  <a:srgbClr val="2A8B5A"/>
+                </a:solidFill>
+                <a:latin typeface="Noto Sans CJK KR"/>
+              </a:defRPr>
+            </a:pPr>
+            <a:r>
+              <a:t>화면에서 확인: IMU도 같은 simulation 시간에 갱신되는지 average rate를 확인합니다.</a:t>
+            </a:r>
+          </a:p>
+        </p:txBody>
+      </p:sp>
+    </p:spTree>
+  </p:cSld>
+  <p:clrMapOvr>
+    <a:masterClrMapping/>
+  </p:clrMapOvr>
+</p:sld>
+</file>
+
+<file path=ppt/slides/slide27.xml><?xml version="1.0" encoding="utf-8"?>
+<p:sld xmlns:a="http://schemas.openxmlformats.org/drawingml/2006/main" xmlns:p="http://schemas.openxmlformats.org/presentationml/2006/main" xmlns:r="http://schemas.openxmlformats.org/officeDocument/2006/relationships">
+  <p:cSld>
+    <p:spTree>
+      <p:nvGrpSpPr>
+        <p:cNvPr id="1" name=""/>
+        <p:cNvGrpSpPr/>
+        <p:nvPr/>
+      </p:nvGrpSpPr>
+      <p:grpSpPr/>
+      <p:sp>
+        <p:nvSpPr>
+          <p:cNvPr id="2" name="TextBox 1"/>
+          <p:cNvSpPr txBox="1"/>
+          <p:nvPr/>
+        </p:nvSpPr>
+        <p:spPr>
+          <a:xfrm>
+            <a:off x="566928" y="347472"/>
+            <a:ext cx="10881360" cy="438912"/>
+          </a:xfrm>
+          <a:prstGeom prst="rect">
+            <a:avLst/>
+          </a:prstGeom>
+          <a:noFill/>
+        </p:spPr>
+        <p:txBody>
+          <a:bodyPr wrap="square" lIns="73152" rIns="73152" tIns="36576" bIns="36576">
+            <a:spAutoFit/>
+          </a:bodyPr>
+          <a:lstStyle/>
+          <a:p>
+            <a:pPr algn="l">
+              <a:spcAft>
+                <a:spcPts val="0"/>
+              </a:spcAft>
+              <a:defRPr sz="3200" b="1">
+                <a:solidFill>
+                  <a:srgbClr val="122C4E"/>
+                </a:solidFill>
+                <a:latin typeface="Noto Sans CJK KR"/>
+              </a:defRPr>
+            </a:pPr>
+            <a:r>
+              <a:t>정상 결과: 실제 환경에서 확인한 출력</a:t>
+            </a:r>
+          </a:p>
+        </p:txBody>
+      </p:sp>
+      <p:sp>
+        <p:nvSpPr>
+          <p:cNvPr id="3" name="TextBox 2"/>
+          <p:cNvSpPr txBox="1"/>
+          <p:nvPr/>
+        </p:nvSpPr>
+        <p:spPr>
+          <a:xfrm>
+            <a:off x="603504" y="859536"/>
+            <a:ext cx="10698480" cy="292608"/>
+          </a:xfrm>
+          <a:prstGeom prst="rect">
+            <a:avLst/>
+          </a:prstGeom>
+          <a:noFill/>
+        </p:spPr>
+        <p:txBody>
+          <a:bodyPr wrap="square" lIns="73152" rIns="73152" tIns="36576" bIns="36576">
+            <a:spAutoFit/>
+          </a:bodyPr>
+          <a:lstStyle/>
+          <a:p>
+            <a:pPr algn="l">
+              <a:spcAft>
+                <a:spcPts val="0"/>
+              </a:spcAft>
+              <a:defRPr sz="1700" b="0">
+                <a:solidFill>
+                  <a:srgbClr val="5C6672"/>
+                </a:solidFill>
+                <a:latin typeface="Noto Sans CJK KR"/>
+              </a:defRPr>
+            </a:pPr>
+            <a:r>
+              <a:t>실제 RViz2: sensor display를 같은 Fixed Frame에서 대조</a:t>
+            </a:r>
+          </a:p>
+        </p:txBody>
+      </p:sp>
+      <p:sp>
+        <p:nvSpPr>
+          <p:cNvPr id="4" name="TextBox 3"/>
+          <p:cNvSpPr txBox="1"/>
+          <p:nvPr/>
+        </p:nvSpPr>
+        <p:spPr>
+          <a:xfrm>
+            <a:off x="530352" y="6510528"/>
+            <a:ext cx="7772400" cy="201168"/>
+          </a:xfrm>
+          <a:prstGeom prst="rect">
+            <a:avLst/>
+          </a:prstGeom>
+          <a:noFill/>
+        </p:spPr>
+        <p:txBody>
+          <a:bodyPr wrap="square" lIns="73152" rIns="73152" tIns="36576" bIns="36576">
+            <a:spAutoFit/>
+          </a:bodyPr>
+          <a:lstStyle/>
+          <a:p>
+            <a:pPr algn="l">
+              <a:spcAft>
+                <a:spcPts val="0"/>
+              </a:spcAft>
+              <a:defRPr sz="1000" b="0">
+                <a:solidFill>
+                  <a:srgbClr val="5C6672"/>
+                </a:solidFill>
+                <a:latin typeface="Noto Sans CJK KR"/>
+              </a:defRPr>
+            </a:pPr>
+            <a:r>
+              <a:t>ROS 2 Jazzy · Gazebo Harmonic · M15 · 따라 하기형 AGV 실습</a:t>
+            </a:r>
+          </a:p>
+        </p:txBody>
+      </p:sp>
+      <p:sp>
+        <p:nvSpPr>
+          <p:cNvPr id="5" name="TextBox 4"/>
+          <p:cNvSpPr txBox="1"/>
+          <p:nvPr/>
+        </p:nvSpPr>
+        <p:spPr>
+          <a:xfrm>
+            <a:off x="9144000" y="6510528"/>
+            <a:ext cx="2468880" cy="201168"/>
+          </a:xfrm>
+          <a:prstGeom prst="rect">
+            <a:avLst/>
+          </a:prstGeom>
+          <a:noFill/>
+        </p:spPr>
+        <p:txBody>
+          <a:bodyPr wrap="square" lIns="73152" rIns="73152" tIns="36576" bIns="36576">
+            <a:spAutoFit/>
+          </a:bodyPr>
+          <a:lstStyle/>
+          <a:p>
+            <a:pPr algn="r">
+              <a:spcAft>
+                <a:spcPts val="0"/>
+              </a:spcAft>
+              <a:defRPr sz="1000" b="0">
+                <a:solidFill>
+                  <a:srgbClr val="5C6672"/>
+                </a:solidFill>
+                <a:latin typeface="Noto Sans CJK KR"/>
+              </a:defRPr>
+            </a:pPr>
+            <a:r>
+              <a:t>명령·파일 경로는 슬라이드에서 복사 가능</a:t>
+            </a:r>
+          </a:p>
+        </p:txBody>
+      </p:sp>
+      <p:pic>
+        <p:nvPicPr>
+          <p:cNvPr id="6" name="Picture 5" descr="03_rviz_sensors_actual.png"/>
+          <p:cNvPicPr>
+            <a:picLocks noChangeAspect="1"/>
+          </p:cNvPicPr>
+          <p:nvPr/>
+        </p:nvPicPr>
+        <p:blipFill>
+          <a:blip r:embed="rId2"/>
+          <a:stretch>
+            <a:fillRect/>
+          </a:stretch>
+        </p:blipFill>
+        <p:spPr>
+          <a:xfrm>
+            <a:off x="2971409" y="1353312"/>
+            <a:ext cx="6246133" cy="4800600"/>
+          </a:xfrm>
+          <a:prstGeom prst="rect">
+            <a:avLst/>
+          </a:prstGeom>
+        </p:spPr>
+      </p:pic>
+      <p:sp>
+        <p:nvSpPr>
+          <p:cNvPr id="7" name="TextBox 6"/>
+          <p:cNvSpPr txBox="1"/>
+          <p:nvPr/>
+        </p:nvSpPr>
+        <p:spPr>
+          <a:xfrm>
+            <a:off x="777240" y="6144768"/>
+            <a:ext cx="10607040" cy="310896"/>
+          </a:xfrm>
+          <a:prstGeom prst="rect">
+            <a:avLst/>
+          </a:prstGeom>
+          <a:noFill/>
+        </p:spPr>
+        <p:txBody>
+          <a:bodyPr wrap="square" lIns="73152" rIns="73152" tIns="36576" bIns="36576">
+            <a:spAutoFit/>
+          </a:bodyPr>
+          <a:lstStyle/>
+          <a:p>
+            <a:pPr algn="ctr">
+              <a:spcAft>
+                <a:spcPts val="0"/>
+              </a:spcAft>
+              <a:defRPr sz="1100" b="1">
+                <a:solidFill>
+                  <a:srgbClr val="2A8B5A"/>
+                </a:solidFill>
+                <a:latin typeface="Noto Sans CJK KR"/>
+              </a:defRPr>
+            </a:pPr>
+            <a:r>
+              <a:t>화면에서 확인: camera·LiDAR·IMU 각각을 화면·terminal·frame 기준으로 교차 확인합니다.</a:t>
+            </a:r>
+          </a:p>
+        </p:txBody>
+      </p:sp>
+    </p:spTree>
+  </p:cSld>
+  <p:clrMapOvr>
+    <a:masterClrMapping/>
+  </p:clrMapOvr>
+</p:sld>
+</file>
+
+<file path=ppt/slides/slide28.xml><?xml version="1.0" encoding="utf-8"?>
+<p:sld xmlns:a="http://schemas.openxmlformats.org/drawingml/2006/main" xmlns:p="http://schemas.openxmlformats.org/presentationml/2006/main" xmlns:r="http://schemas.openxmlformats.org/officeDocument/2006/relationships">
+  <p:cSld>
+    <p:spTree>
+      <p:nvGrpSpPr>
+        <p:cNvPr id="1" name=""/>
+        <p:cNvGrpSpPr/>
+        <p:nvPr/>
+      </p:nvGrpSpPr>
+      <p:grpSpPr/>
+      <p:sp>
+        <p:nvSpPr>
+          <p:cNvPr id="2" name="TextBox 1"/>
+          <p:cNvSpPr txBox="1"/>
+          <p:nvPr/>
+        </p:nvSpPr>
+        <p:spPr>
+          <a:xfrm>
+            <a:off x="566928" y="347472"/>
+            <a:ext cx="10881360" cy="438912"/>
+          </a:xfrm>
+          <a:prstGeom prst="rect">
+            <a:avLst/>
+          </a:prstGeom>
+          <a:noFill/>
+        </p:spPr>
+        <p:txBody>
+          <a:bodyPr wrap="square" lIns="73152" rIns="73152" tIns="36576" bIns="36576">
+            <a:spAutoFit/>
+          </a:bodyPr>
+          <a:lstStyle/>
+          <a:p>
+            <a:pPr algn="l">
+              <a:spcAft>
+                <a:spcPts val="0"/>
+              </a:spcAft>
+              <a:defRPr sz="3200" b="1">
+                <a:solidFill>
+                  <a:srgbClr val="122C4E"/>
+                </a:solidFill>
+                <a:latin typeface="Noto Sans CJK KR"/>
+              </a:defRPr>
+            </a:pPr>
+            <a:r>
+              <a:t>객관적 검증 명령으로 완료를 확인한다</a:t>
+            </a:r>
+          </a:p>
+        </p:txBody>
+      </p:sp>
+      <p:sp>
+        <p:nvSpPr>
+          <p:cNvPr id="3" name="TextBox 2"/>
+          <p:cNvSpPr txBox="1"/>
+          <p:nvPr/>
+        </p:nvSpPr>
+        <p:spPr>
+          <a:xfrm>
+            <a:off x="603504" y="859536"/>
+            <a:ext cx="10698480" cy="292608"/>
+          </a:xfrm>
+          <a:prstGeom prst="rect">
+            <a:avLst/>
+          </a:prstGeom>
+          <a:noFill/>
+        </p:spPr>
+        <p:txBody>
+          <a:bodyPr wrap="square" lIns="73152" rIns="73152" tIns="36576" bIns="36576">
+            <a:spAutoFit/>
+          </a:bodyPr>
+          <a:lstStyle/>
+          <a:p>
+            <a:pPr algn="l">
+              <a:spcAft>
+                <a:spcPts val="0"/>
+              </a:spcAft>
+              <a:defRPr sz="1700" b="0">
+                <a:solidFill>
+                  <a:srgbClr val="5C6672"/>
+                </a:solidFill>
+                <a:latin typeface="Noto Sans CJK KR"/>
+              </a:defRPr>
+            </a:pPr>
+            <a:r>
+              <a:t>화면만 보지 말고 topic·frame·파일·parameter를 다시 확인합니다.</a:t>
+            </a:r>
+          </a:p>
+        </p:txBody>
+      </p:sp>
+      <p:sp>
+        <p:nvSpPr>
+          <p:cNvPr id="4" name="TextBox 3"/>
+          <p:cNvSpPr txBox="1"/>
+          <p:nvPr/>
+        </p:nvSpPr>
+        <p:spPr>
+          <a:xfrm>
+            <a:off x="530352" y="6510528"/>
+            <a:ext cx="7772400" cy="201168"/>
+          </a:xfrm>
+          <a:prstGeom prst="rect">
+            <a:avLst/>
+          </a:prstGeom>
+          <a:noFill/>
+        </p:spPr>
+        <p:txBody>
+          <a:bodyPr wrap="square" lIns="73152" rIns="73152" tIns="36576" bIns="36576">
+            <a:spAutoFit/>
+          </a:bodyPr>
+          <a:lstStyle/>
+          <a:p>
+            <a:pPr algn="l">
+              <a:spcAft>
+                <a:spcPts val="0"/>
+              </a:spcAft>
+              <a:defRPr sz="1000" b="0">
+                <a:solidFill>
+                  <a:srgbClr val="5C6672"/>
+                </a:solidFill>
+                <a:latin typeface="Noto Sans CJK KR"/>
+              </a:defRPr>
+            </a:pPr>
+            <a:r>
+              <a:t>ROS 2 Jazzy · Gazebo Harmonic · M15 · 따라 하기형 AGV 실습</a:t>
+            </a:r>
+          </a:p>
+        </p:txBody>
+      </p:sp>
+      <p:sp>
+        <p:nvSpPr>
+          <p:cNvPr id="5" name="TextBox 4"/>
+          <p:cNvSpPr txBox="1"/>
+          <p:nvPr/>
+        </p:nvSpPr>
+        <p:spPr>
+          <a:xfrm>
+            <a:off x="9144000" y="6510528"/>
+            <a:ext cx="2468880" cy="201168"/>
+          </a:xfrm>
+          <a:prstGeom prst="rect">
+            <a:avLst/>
+          </a:prstGeom>
+          <a:noFill/>
+        </p:spPr>
+        <p:txBody>
+          <a:bodyPr wrap="square" lIns="73152" rIns="73152" tIns="36576" bIns="36576">
+            <a:spAutoFit/>
+          </a:bodyPr>
+          <a:lstStyle/>
+          <a:p>
+            <a:pPr algn="r">
+              <a:spcAft>
+                <a:spcPts val="0"/>
+              </a:spcAft>
+              <a:defRPr sz="1000" b="0">
+                <a:solidFill>
+                  <a:srgbClr val="5C6672"/>
+                </a:solidFill>
+                <a:latin typeface="Noto Sans CJK KR"/>
+              </a:defRPr>
+            </a:pPr>
+            <a:r>
+              <a:t>명령·파일 경로는 슬라이드에서 복사 가능</a:t>
+            </a:r>
+          </a:p>
+        </p:txBody>
+      </p:sp>
+      <p:sp>
+        <p:nvSpPr>
+          <p:cNvPr id="6" name="Rectangle 5"/>
           <p:cNvSpPr/>
           <p:nvPr/>
         </p:nvSpPr>
         <p:spPr>
           <a:xfrm>
-            <a:off x="658368" y="1554480"/>
-            <a:ext cx="10972800" cy="4526280"/>
-          </a:xfrm>
-          <a:prstGeom prst="roundRect">
+            <a:off x="566928" y="1188720"/>
+            <a:ext cx="11064240" cy="347472"/>
+          </a:xfrm>
+          <a:prstGeom prst="rect">
             <a:avLst/>
           </a:prstGeom>
           <a:solidFill>
@@ -13506,7 +14437,7 @@
           </a:solidFill>
           <a:ln>
             <a:solidFill>
-              <a:srgbClr val="D7DFE9"/>
+              <a:srgbClr val="F4F7FB"/>
             </a:solidFill>
           </a:ln>
         </p:spPr>
@@ -13525,6 +14456,475 @@
           </a:fontRef>
         </p:style>
         <p:txBody>
+          <a:bodyPr rtlCol="0" anchor="ctr" wrap="square" lIns="73152" rIns="73152" tIns="36576" bIns="36576"/>
+          <a:lstStyle/>
+          <a:p>
+            <a:pPr algn="l">
+              <a:spcAft>
+                <a:spcPts val="0"/>
+              </a:spcAft>
+              <a:defRPr sz="1300" b="1">
+                <a:solidFill>
+                  <a:srgbClr val="122C4E"/>
+                </a:solidFill>
+                <a:latin typeface="Noto Sans CJK KR"/>
+              </a:defRPr>
+            </a:pPr>
+            <a:r>
+              <a:t>현재 단계 검증    |    현재 폴더 ~/ros2_curri/agv_ws    |    현재 터미널</a:t>
+            </a:r>
+          </a:p>
+        </p:txBody>
+      </p:sp>
+      <p:sp>
+        <p:nvSpPr>
+          <p:cNvPr id="7" name="Rounded Rectangle 6"/>
+          <p:cNvSpPr/>
+          <p:nvPr/>
+        </p:nvSpPr>
+        <p:spPr>
+          <a:xfrm>
+            <a:off x="658368" y="1755648"/>
+            <a:ext cx="10972800" cy="2148840"/>
+          </a:xfrm>
+          <a:prstGeom prst="roundRect">
+            <a:avLst/>
+          </a:prstGeom>
+          <a:solidFill>
+            <a:srgbClr val="1D232D"/>
+          </a:solidFill>
+          <a:ln>
+            <a:solidFill>
+              <a:srgbClr val="1D232D"/>
+            </a:solidFill>
+          </a:ln>
+        </p:spPr>
+        <p:style>
+          <a:lnRef idx="1">
+            <a:schemeClr val="accent1"/>
+          </a:lnRef>
+          <a:fillRef idx="3">
+            <a:schemeClr val="accent1"/>
+          </a:fillRef>
+          <a:effectRef idx="2">
+            <a:schemeClr val="accent1"/>
+          </a:effectRef>
+          <a:fontRef idx="minor">
+            <a:schemeClr val="lt1"/>
+          </a:fontRef>
+        </p:style>
+        <p:txBody>
+          <a:bodyPr rtlCol="0" anchor="ctr" wrap="square" lIns="73152" rIns="73152" tIns="36576" bIns="36576"/>
+          <a:lstStyle/>
+          <a:p>
+            <a:pPr algn="l">
+              <a:spcAft>
+                <a:spcPts val="0"/>
+              </a:spcAft>
+              <a:defRPr sz="1600" b="0">
+                <a:solidFill>
+                  <a:srgbClr val="FFFFFF"/>
+                </a:solidFill>
+                <a:latin typeface="DejaVu Sans Mono"/>
+              </a:defRPr>
+            </a:pPr>
+            <a:r>
+              <a:t>ros2 topic echo /clock --once</a:t>
+            </a:r>
+            <a:br/>
+            <a:r>
+              <a:t>ros2 topic hz /scan</a:t>
+            </a:r>
+            <a:br/>
+            <a:r>
+              <a:t>ros2 topic hz /imu/data</a:t>
+            </a:r>
+            <a:br/>
+            <a:r>
+              <a:t>ros2 param get /lidar_processor use_sim_time</a:t>
+            </a:r>
+          </a:p>
+        </p:txBody>
+      </p:sp>
+      <p:sp>
+        <p:nvSpPr>
+          <p:cNvPr id="8" name="Rounded Rectangle 7"/>
+          <p:cNvSpPr/>
+          <p:nvPr/>
+        </p:nvSpPr>
+        <p:spPr>
+          <a:xfrm>
+            <a:off x="658368" y="4206240"/>
+            <a:ext cx="10972800" cy="1554480"/>
+          </a:xfrm>
+          <a:prstGeom prst="roundRect">
+            <a:avLst/>
+          </a:prstGeom>
+          <a:solidFill>
+            <a:srgbClr val="F4F7FB"/>
+          </a:solidFill>
+          <a:ln>
+            <a:solidFill>
+              <a:srgbClr val="D1DFD5"/>
+            </a:solidFill>
+          </a:ln>
+        </p:spPr>
+        <p:style>
+          <a:lnRef idx="1">
+            <a:schemeClr val="accent1"/>
+          </a:lnRef>
+          <a:fillRef idx="3">
+            <a:schemeClr val="accent1"/>
+          </a:fillRef>
+          <a:effectRef idx="2">
+            <a:schemeClr val="accent1"/>
+          </a:effectRef>
+          <a:fontRef idx="minor">
+            <a:schemeClr val="lt1"/>
+          </a:fontRef>
+        </p:style>
+        <p:txBody>
+          <a:bodyPr rtlCol="0" anchor="ctr" wrap="square" lIns="73152" rIns="73152" tIns="36576" bIns="36576"/>
+          <a:lstStyle/>
+          <a:p>
+            <a:pPr algn="l">
+              <a:spcAft>
+                <a:spcPts val="0"/>
+              </a:spcAft>
+              <a:defRPr sz="1800" b="1">
+                <a:solidFill>
+                  <a:srgbClr val="2A8B5A"/>
+                </a:solidFill>
+                <a:latin typeface="Noto Sans CJK KR"/>
+              </a:defRPr>
+            </a:pPr>
+            <a:r>
+              <a:t>완료 체크</a:t>
+            </a:r>
+            <a:br/>
+            <a:r>
+              <a:t>□ 명령이 오류 없이 실행된다.</a:t>
+            </a:r>
+            <a:br/>
+            <a:r>
+              <a:t>□ 기대한 파일·topic·frame·parameter 이름이 보인다.</a:t>
+            </a:r>
+            <a:br/>
+            <a:r>
+              <a:t>□ 값의 단위와 방향을 한 문장으로 설명할 수 있다.</a:t>
+            </a:r>
+          </a:p>
+        </p:txBody>
+      </p:sp>
+      <p:sp>
+        <p:nvSpPr>
+          <p:cNvPr id="9" name="TextBox 8"/>
+          <p:cNvSpPr txBox="1"/>
+          <p:nvPr/>
+        </p:nvSpPr>
+        <p:spPr>
+          <a:xfrm>
+            <a:off x="731520" y="5989320"/>
+            <a:ext cx="10789920" cy="237744"/>
+          </a:xfrm>
+          <a:prstGeom prst="rect">
+            <a:avLst/>
+          </a:prstGeom>
+          <a:noFill/>
+        </p:spPr>
+        <p:txBody>
+          <a:bodyPr wrap="square" lIns="73152" rIns="73152" tIns="36576" bIns="36576">
+            <a:spAutoFit/>
+          </a:bodyPr>
+          <a:lstStyle/>
+          <a:p>
+            <a:pPr algn="l">
+              <a:spcAft>
+                <a:spcPts val="0"/>
+              </a:spcAft>
+              <a:defRPr sz="1500" b="1">
+                <a:solidFill>
+                  <a:srgbClr val="122C4E"/>
+                </a:solidFill>
+                <a:latin typeface="Noto Sans CJK KR"/>
+              </a:defRPr>
+            </a:pPr>
+            <a:r>
+              <a:t>완료 조건: 모든 sensor 노드가 같은 시뮬레이션 시간과 기대 publish rate를 사용한다.</a:t>
+            </a:r>
+          </a:p>
+        </p:txBody>
+      </p:sp>
+    </p:spTree>
+  </p:cSld>
+  <p:clrMapOvr>
+    <a:masterClrMapping/>
+  </p:clrMapOvr>
+</p:sld>
+</file>
+
+<file path=ppt/slides/slide29.xml><?xml version="1.0" encoding="utf-8"?>
+<p:sld xmlns:a="http://schemas.openxmlformats.org/drawingml/2006/main" xmlns:p="http://schemas.openxmlformats.org/presentationml/2006/main" xmlns:r="http://schemas.openxmlformats.org/officeDocument/2006/relationships">
+  <p:cSld>
+    <p:spTree>
+      <p:nvGrpSpPr>
+        <p:cNvPr id="1" name=""/>
+        <p:cNvGrpSpPr/>
+        <p:nvPr/>
+      </p:nvGrpSpPr>
+      <p:grpSpPr/>
+      <p:sp>
+        <p:nvSpPr>
+          <p:cNvPr id="2" name="TextBox 1"/>
+          <p:cNvSpPr txBox="1"/>
+          <p:nvPr/>
+        </p:nvSpPr>
+        <p:spPr>
+          <a:xfrm>
+            <a:off x="566928" y="347472"/>
+            <a:ext cx="10881360" cy="438912"/>
+          </a:xfrm>
+          <a:prstGeom prst="rect">
+            <a:avLst/>
+          </a:prstGeom>
+          <a:noFill/>
+        </p:spPr>
+        <p:txBody>
+          <a:bodyPr wrap="square" lIns="73152" rIns="73152" tIns="36576" bIns="36576">
+            <a:spAutoFit/>
+          </a:bodyPr>
+          <a:lstStyle/>
+          <a:p>
+            <a:pPr algn="l">
+              <a:spcAft>
+                <a:spcPts val="0"/>
+              </a:spcAft>
+              <a:defRPr sz="3200" b="1">
+                <a:solidFill>
+                  <a:srgbClr val="122C4E"/>
+                </a:solidFill>
+                <a:latin typeface="Noto Sans CJK KR"/>
+              </a:defRPr>
+            </a:pPr>
+            <a:r>
+              <a:t>막히면: 증상 → 우선 확인 → 재검증</a:t>
+            </a:r>
+          </a:p>
+        </p:txBody>
+      </p:sp>
+      <p:sp>
+        <p:nvSpPr>
+          <p:cNvPr id="3" name="TextBox 2"/>
+          <p:cNvSpPr txBox="1"/>
+          <p:nvPr/>
+        </p:nvSpPr>
+        <p:spPr>
+          <a:xfrm>
+            <a:off x="603504" y="859536"/>
+            <a:ext cx="10698480" cy="292608"/>
+          </a:xfrm>
+          <a:prstGeom prst="rect">
+            <a:avLst/>
+          </a:prstGeom>
+          <a:noFill/>
+        </p:spPr>
+        <p:txBody>
+          <a:bodyPr wrap="square" lIns="73152" rIns="73152" tIns="36576" bIns="36576">
+            <a:spAutoFit/>
+          </a:bodyPr>
+          <a:lstStyle/>
+          <a:p>
+            <a:pPr algn="l">
+              <a:spcAft>
+                <a:spcPts val="0"/>
+              </a:spcAft>
+              <a:defRPr sz="1700" b="0">
+                <a:solidFill>
+                  <a:srgbClr val="5C6672"/>
+                </a:solidFill>
+                <a:latin typeface="Noto Sans CJK KR"/>
+              </a:defRPr>
+            </a:pPr>
+            <a:r>
+              <a:t>오류 메시지를 숨기지 않고 같은 순서로 점검합니다.</a:t>
+            </a:r>
+          </a:p>
+        </p:txBody>
+      </p:sp>
+      <p:sp>
+        <p:nvSpPr>
+          <p:cNvPr id="4" name="TextBox 3"/>
+          <p:cNvSpPr txBox="1"/>
+          <p:nvPr/>
+        </p:nvSpPr>
+        <p:spPr>
+          <a:xfrm>
+            <a:off x="530352" y="6510528"/>
+            <a:ext cx="7772400" cy="201168"/>
+          </a:xfrm>
+          <a:prstGeom prst="rect">
+            <a:avLst/>
+          </a:prstGeom>
+          <a:noFill/>
+        </p:spPr>
+        <p:txBody>
+          <a:bodyPr wrap="square" lIns="73152" rIns="73152" tIns="36576" bIns="36576">
+            <a:spAutoFit/>
+          </a:bodyPr>
+          <a:lstStyle/>
+          <a:p>
+            <a:pPr algn="l">
+              <a:spcAft>
+                <a:spcPts val="0"/>
+              </a:spcAft>
+              <a:defRPr sz="1000" b="0">
+                <a:solidFill>
+                  <a:srgbClr val="5C6672"/>
+                </a:solidFill>
+                <a:latin typeface="Noto Sans CJK KR"/>
+              </a:defRPr>
+            </a:pPr>
+            <a:r>
+              <a:t>ROS 2 Jazzy · Gazebo Harmonic · M15 · 따라 하기형 AGV 실습</a:t>
+            </a:r>
+          </a:p>
+        </p:txBody>
+      </p:sp>
+      <p:sp>
+        <p:nvSpPr>
+          <p:cNvPr id="5" name="TextBox 4"/>
+          <p:cNvSpPr txBox="1"/>
+          <p:nvPr/>
+        </p:nvSpPr>
+        <p:spPr>
+          <a:xfrm>
+            <a:off x="9144000" y="6510528"/>
+            <a:ext cx="2468880" cy="201168"/>
+          </a:xfrm>
+          <a:prstGeom prst="rect">
+            <a:avLst/>
+          </a:prstGeom>
+          <a:noFill/>
+        </p:spPr>
+        <p:txBody>
+          <a:bodyPr wrap="square" lIns="73152" rIns="73152" tIns="36576" bIns="36576">
+            <a:spAutoFit/>
+          </a:bodyPr>
+          <a:lstStyle/>
+          <a:p>
+            <a:pPr algn="r">
+              <a:spcAft>
+                <a:spcPts val="0"/>
+              </a:spcAft>
+              <a:defRPr sz="1000" b="0">
+                <a:solidFill>
+                  <a:srgbClr val="5C6672"/>
+                </a:solidFill>
+                <a:latin typeface="Noto Sans CJK KR"/>
+              </a:defRPr>
+            </a:pPr>
+            <a:r>
+              <a:t>명령·파일 경로는 슬라이드에서 복사 가능</a:t>
+            </a:r>
+          </a:p>
+        </p:txBody>
+      </p:sp>
+      <p:sp>
+        <p:nvSpPr>
+          <p:cNvPr id="6" name="Rectangle 5"/>
+          <p:cNvSpPr/>
+          <p:nvPr/>
+        </p:nvSpPr>
+        <p:spPr>
+          <a:xfrm>
+            <a:off x="566928" y="1188720"/>
+            <a:ext cx="11064240" cy="347472"/>
+          </a:xfrm>
+          <a:prstGeom prst="rect">
+            <a:avLst/>
+          </a:prstGeom>
+          <a:solidFill>
+            <a:srgbClr val="F4F7FB"/>
+          </a:solidFill>
+          <a:ln>
+            <a:solidFill>
+              <a:srgbClr val="F4F7FB"/>
+            </a:solidFill>
+          </a:ln>
+        </p:spPr>
+        <p:style>
+          <a:lnRef idx="1">
+            <a:schemeClr val="accent1"/>
+          </a:lnRef>
+          <a:fillRef idx="3">
+            <a:schemeClr val="accent1"/>
+          </a:fillRef>
+          <a:effectRef idx="2">
+            <a:schemeClr val="accent1"/>
+          </a:effectRef>
+          <a:fontRef idx="minor">
+            <a:schemeClr val="lt1"/>
+          </a:fontRef>
+        </p:style>
+        <p:txBody>
+          <a:bodyPr rtlCol="0" anchor="ctr" wrap="square" lIns="73152" rIns="73152" tIns="36576" bIns="36576"/>
+          <a:lstStyle/>
+          <a:p>
+            <a:pPr algn="l">
+              <a:spcAft>
+                <a:spcPts val="0"/>
+              </a:spcAft>
+              <a:defRPr sz="1300" b="1">
+                <a:solidFill>
+                  <a:srgbClr val="122C4E"/>
+                </a:solidFill>
+                <a:latin typeface="Noto Sans CJK KR"/>
+              </a:defRPr>
+            </a:pPr>
+            <a:r>
+              <a:t>현재 단계 오류 대응    |    현재 폴더 ~/ros2_curri/agv_ws    |    현재 터미널</a:t>
+            </a:r>
+          </a:p>
+        </p:txBody>
+      </p:sp>
+      <p:sp>
+        <p:nvSpPr>
+          <p:cNvPr id="7" name="Rounded Rectangle 6"/>
+          <p:cNvSpPr/>
+          <p:nvPr/>
+        </p:nvSpPr>
+        <p:spPr>
+          <a:xfrm>
+            <a:off x="694944" y="1755648"/>
+            <a:ext cx="10972800" cy="1115568"/>
+          </a:xfrm>
+          <a:prstGeom prst="roundRect">
+            <a:avLst/>
+          </a:prstGeom>
+          <a:solidFill>
+            <a:srgbClr val="FFF7F4"/>
+          </a:solidFill>
+          <a:ln>
+            <a:solidFill>
+              <a:srgbClr val="EDBEB4"/>
+            </a:solidFill>
+          </a:ln>
+        </p:spPr>
+        <p:style>
+          <a:lnRef idx="1">
+            <a:schemeClr val="accent1"/>
+          </a:lnRef>
+          <a:fillRef idx="3">
+            <a:schemeClr val="accent1"/>
+          </a:fillRef>
+          <a:effectRef idx="2">
+            <a:schemeClr val="accent1"/>
+          </a:effectRef>
+          <a:fontRef idx="minor">
+            <a:schemeClr val="lt1"/>
+          </a:fontRef>
+        </p:style>
+        <p:txBody>
           <a:bodyPr rtlCol="0" anchor="ctr"/>
           <a:lstStyle/>
           <a:p>
@@ -13534,31 +14934,70 @@
       </p:sp>
       <p:sp>
         <p:nvSpPr>
-          <p:cNvPr id="7" name="TextBox 6"/>
-          <p:cNvSpPr txBox="1"/>
-          <p:nvPr/>
-        </p:nvSpPr>
-        <p:spPr>
-          <a:xfrm>
-            <a:off x="914400" y="1773936"/>
-            <a:ext cx="3840480" cy="256032"/>
-          </a:xfrm>
-          <a:prstGeom prst="rect">
-            <a:avLst/>
-          </a:prstGeom>
-          <a:noFill/>
-        </p:spPr>
-        <p:txBody>
-          <a:bodyPr wrap="square" lIns="73152" rIns="73152" tIns="36576" bIns="36576">
-            <a:spAutoFit/>
-          </a:bodyPr>
-          <a:lstStyle/>
-          <a:p>
-            <a:pPr algn="l">
-              <a:spcAft>
-                <a:spcPts val="0"/>
-              </a:spcAft>
-              <a:defRPr sz="1700" b="1">
+          <p:cNvPr id="8" name="TextBox 7"/>
+          <p:cNvSpPr txBox="1"/>
+          <p:nvPr/>
+        </p:nvSpPr>
+        <p:spPr>
+          <a:xfrm>
+            <a:off x="896112" y="1901952"/>
+            <a:ext cx="2926080" cy="274320"/>
+          </a:xfrm>
+          <a:prstGeom prst="rect">
+            <a:avLst/>
+          </a:prstGeom>
+          <a:noFill/>
+        </p:spPr>
+        <p:txBody>
+          <a:bodyPr wrap="square" lIns="73152" rIns="73152" tIns="36576" bIns="36576">
+            <a:spAutoFit/>
+          </a:bodyPr>
+          <a:lstStyle/>
+          <a:p>
+            <a:pPr algn="l">
+              <a:spcAft>
+                <a:spcPts val="0"/>
+              </a:spcAft>
+              <a:defRPr sz="1800" b="1">
+                <a:solidFill>
+                  <a:srgbClr val="BE3B3B"/>
+                </a:solidFill>
+                <a:latin typeface="Noto Sans CJK KR"/>
+              </a:defRPr>
+            </a:pPr>
+            <a:r>
+              <a:t>증상 1: ROS 노드 시간이 안 감</a:t>
+            </a:r>
+          </a:p>
+        </p:txBody>
+      </p:sp>
+      <p:sp>
+        <p:nvSpPr>
+          <p:cNvPr id="9" name="TextBox 8"/>
+          <p:cNvSpPr txBox="1"/>
+          <p:nvPr/>
+        </p:nvSpPr>
+        <p:spPr>
+          <a:xfrm>
+            <a:off x="3794760" y="1883664"/>
+            <a:ext cx="7543800" cy="621792"/>
+          </a:xfrm>
+          <a:prstGeom prst="rect">
+            <a:avLst/>
+          </a:prstGeom>
+          <a:noFill/>
+        </p:spPr>
+        <p:txBody>
+          <a:bodyPr wrap="square" lIns="73152" rIns="73152" tIns="36576" bIns="36576">
+            <a:spAutoFit/>
+          </a:bodyPr>
+          <a:lstStyle/>
+          <a:p>
+            <a:pPr algn="l">
+              <a:spcAft>
+                <a:spcPts val="0"/>
+              </a:spcAft>
+              <a:defRPr sz="1600" b="0">
                 <a:solidFill>
                   <a:srgbClr val="122C4E"/>
                 </a:solidFill>
@@ -13566,77 +15005,126 @@
               </a:defRPr>
             </a:pPr>
             <a:r>
-              <a:t>ROS 2 Jazzy — Gazebo Simulation</a:t>
-            </a:r>
-          </a:p>
-        </p:txBody>
-      </p:sp>
-      <p:sp>
-        <p:nvSpPr>
-          <p:cNvPr id="8" name="TextBox 7"/>
-          <p:cNvSpPr txBox="1"/>
-          <p:nvPr/>
-        </p:nvSpPr>
-        <p:spPr>
-          <a:xfrm>
-            <a:off x="914400" y="2048255"/>
-            <a:ext cx="9966960" cy="475488"/>
-          </a:xfrm>
-          <a:prstGeom prst="rect">
-            <a:avLst/>
-          </a:prstGeom>
-          <a:noFill/>
-        </p:spPr>
-        <p:txBody>
-          <a:bodyPr wrap="square" lIns="73152" rIns="73152" tIns="36576" bIns="36576">
-            <a:spAutoFit/>
-          </a:bodyPr>
-          <a:lstStyle/>
-          <a:p>
-            <a:pPr algn="l">
-              <a:spcAft>
-                <a:spcPts val="0"/>
-              </a:spcAft>
-              <a:defRPr sz="1000" b="0">
-                <a:solidFill>
-                  <a:srgbClr val="225B9B"/>
-                </a:solidFill>
-                <a:latin typeface="DejaVu Sans Mono"/>
-              </a:defRPr>
-            </a:pPr>
-            <a:r>
-              <a:t>https://docs.ros.org/en/jazzy/Tutorials/Advanced/Simulators/Gazebo/Simulation-Gazebo.html</a:t>
-            </a:r>
-          </a:p>
-        </p:txBody>
-      </p:sp>
-      <p:sp>
-        <p:nvSpPr>
-          <p:cNvPr id="9" name="TextBox 8"/>
-          <p:cNvSpPr txBox="1"/>
-          <p:nvPr/>
-        </p:nvSpPr>
-        <p:spPr>
-          <a:xfrm>
-            <a:off x="914400" y="2852928"/>
-            <a:ext cx="3840480" cy="256032"/>
-          </a:xfrm>
-          <a:prstGeom prst="rect">
-            <a:avLst/>
-          </a:prstGeom>
-          <a:noFill/>
-        </p:spPr>
-        <p:txBody>
-          <a:bodyPr wrap="square" lIns="73152" rIns="73152" tIns="36576" bIns="36576">
-            <a:spAutoFit/>
-          </a:bodyPr>
-          <a:lstStyle/>
-          <a:p>
-            <a:pPr algn="l">
-              <a:spcAft>
-                <a:spcPts val="0"/>
-              </a:spcAft>
-              <a:defRPr sz="1700" b="1">
+              <a:t>우선 확인: use_sim_time과 /clock bridge를 확인한다.</a:t>
+            </a:r>
+            <a:br/>
+            <a:r>
+              <a:t>수정 후: ros2 topic echo /clock --once</a:t>
+            </a:r>
+          </a:p>
+        </p:txBody>
+      </p:sp>
+      <p:sp>
+        <p:nvSpPr>
+          <p:cNvPr id="10" name="Rounded Rectangle 9"/>
+          <p:cNvSpPr/>
+          <p:nvPr/>
+        </p:nvSpPr>
+        <p:spPr>
+          <a:xfrm>
+            <a:off x="694944" y="3172968"/>
+            <a:ext cx="10972800" cy="1115568"/>
+          </a:xfrm>
+          <a:prstGeom prst="roundRect">
+            <a:avLst/>
+          </a:prstGeom>
+          <a:solidFill>
+            <a:srgbClr val="FFF7F4"/>
+          </a:solidFill>
+          <a:ln>
+            <a:solidFill>
+              <a:srgbClr val="EDBEB4"/>
+            </a:solidFill>
+          </a:ln>
+        </p:spPr>
+        <p:style>
+          <a:lnRef idx="1">
+            <a:schemeClr val="accent1"/>
+          </a:lnRef>
+          <a:fillRef idx="3">
+            <a:schemeClr val="accent1"/>
+          </a:fillRef>
+          <a:effectRef idx="2">
+            <a:schemeClr val="accent1"/>
+          </a:effectRef>
+          <a:fontRef idx="minor">
+            <a:schemeClr val="lt1"/>
+          </a:fontRef>
+        </p:style>
+        <p:txBody>
+          <a:bodyPr rtlCol="0" anchor="ctr"/>
+          <a:lstStyle/>
+          <a:p>
+            <a:pPr algn="ctr"/>
+          </a:p>
+        </p:txBody>
+      </p:sp>
+      <p:sp>
+        <p:nvSpPr>
+          <p:cNvPr id="11" name="TextBox 10"/>
+          <p:cNvSpPr txBox="1"/>
+          <p:nvPr/>
+        </p:nvSpPr>
+        <p:spPr>
+          <a:xfrm>
+            <a:off x="896112" y="3319272"/>
+            <a:ext cx="2926080" cy="274320"/>
+          </a:xfrm>
+          <a:prstGeom prst="rect">
+            <a:avLst/>
+          </a:prstGeom>
+          <a:noFill/>
+        </p:spPr>
+        <p:txBody>
+          <a:bodyPr wrap="square" lIns="73152" rIns="73152" tIns="36576" bIns="36576">
+            <a:spAutoFit/>
+          </a:bodyPr>
+          <a:lstStyle/>
+          <a:p>
+            <a:pPr algn="l">
+              <a:spcAft>
+                <a:spcPts val="0"/>
+              </a:spcAft>
+              <a:defRPr sz="1800" b="1">
+                <a:solidFill>
+                  <a:srgbClr val="BE3B3B"/>
+                </a:solidFill>
+                <a:latin typeface="Noto Sans CJK KR"/>
+              </a:defRPr>
+            </a:pPr>
+            <a:r>
+              <a:t>증상 2: topic은 있는데 subscriber가 못 받음</a:t>
+            </a:r>
+          </a:p>
+        </p:txBody>
+      </p:sp>
+      <p:sp>
+        <p:nvSpPr>
+          <p:cNvPr id="12" name="TextBox 11"/>
+          <p:cNvSpPr txBox="1"/>
+          <p:nvPr/>
+        </p:nvSpPr>
+        <p:spPr>
+          <a:xfrm>
+            <a:off x="3794760" y="3300984"/>
+            <a:ext cx="7543800" cy="621792"/>
+          </a:xfrm>
+          <a:prstGeom prst="rect">
+            <a:avLst/>
+          </a:prstGeom>
+          <a:noFill/>
+        </p:spPr>
+        <p:txBody>
+          <a:bodyPr wrap="square" lIns="73152" rIns="73152" tIns="36576" bIns="36576">
+            <a:spAutoFit/>
+          </a:bodyPr>
+          <a:lstStyle/>
+          <a:p>
+            <a:pPr algn="l">
+              <a:spcAft>
+                <a:spcPts val="0"/>
+              </a:spcAft>
+              <a:defRPr sz="1600" b="0">
                 <a:solidFill>
                   <a:srgbClr val="122C4E"/>
                 </a:solidFill>
@@ -13644,124 +15132,11 @@
               </a:defRPr>
             </a:pPr>
             <a:r>
-              <a:t>ROS 2 Jazzy — URDF / robot_state_publisher</a:t>
-            </a:r>
-          </a:p>
-        </p:txBody>
-      </p:sp>
-      <p:sp>
-        <p:nvSpPr>
-          <p:cNvPr id="10" name="TextBox 9"/>
-          <p:cNvSpPr txBox="1"/>
-          <p:nvPr/>
-        </p:nvSpPr>
-        <p:spPr>
-          <a:xfrm>
-            <a:off x="914400" y="3127248"/>
-            <a:ext cx="9966960" cy="475488"/>
-          </a:xfrm>
-          <a:prstGeom prst="rect">
-            <a:avLst/>
-          </a:prstGeom>
-          <a:noFill/>
-        </p:spPr>
-        <p:txBody>
-          <a:bodyPr wrap="square" lIns="73152" rIns="73152" tIns="36576" bIns="36576">
-            <a:spAutoFit/>
-          </a:bodyPr>
-          <a:lstStyle/>
-          <a:p>
-            <a:pPr algn="l">
-              <a:spcAft>
-                <a:spcPts val="0"/>
-              </a:spcAft>
-              <a:defRPr sz="1000" b="0">
-                <a:solidFill>
-                  <a:srgbClr val="225B9B"/>
-                </a:solidFill>
-                <a:latin typeface="DejaVu Sans Mono"/>
-              </a:defRPr>
-            </a:pPr>
-            <a:r>
-              <a:t>https://docs.ros.org/en/jazzy/Tutorials/Intermediate/URDF/Using-URDF-with-Robot-State-Publisher-py.html</a:t>
-            </a:r>
-          </a:p>
-        </p:txBody>
-      </p:sp>
-      <p:sp>
-        <p:nvSpPr>
-          <p:cNvPr id="11" name="TextBox 10"/>
-          <p:cNvSpPr txBox="1"/>
-          <p:nvPr/>
-        </p:nvSpPr>
-        <p:spPr>
-          <a:xfrm>
-            <a:off x="914400" y="3931920"/>
-            <a:ext cx="3840480" cy="256032"/>
-          </a:xfrm>
-          <a:prstGeom prst="rect">
-            <a:avLst/>
-          </a:prstGeom>
-          <a:noFill/>
-        </p:spPr>
-        <p:txBody>
-          <a:bodyPr wrap="square" lIns="73152" rIns="73152" tIns="36576" bIns="36576">
-            <a:spAutoFit/>
-          </a:bodyPr>
-          <a:lstStyle/>
-          <a:p>
-            <a:pPr algn="l">
-              <a:spcAft>
-                <a:spcPts val="0"/>
-              </a:spcAft>
-              <a:defRPr sz="1700" b="1">
-                <a:solidFill>
-                  <a:srgbClr val="122C4E"/>
-                </a:solidFill>
-                <a:latin typeface="Noto Sans CJK KR"/>
-              </a:defRPr>
-            </a:pPr>
-            <a:r>
-              <a:t>Gazebo — ROS 2 Integration / ros_gz_bridge</a:t>
-            </a:r>
-          </a:p>
-        </p:txBody>
-      </p:sp>
-      <p:sp>
-        <p:nvSpPr>
-          <p:cNvPr id="12" name="TextBox 11"/>
-          <p:cNvSpPr txBox="1"/>
-          <p:nvPr/>
-        </p:nvSpPr>
-        <p:spPr>
-          <a:xfrm>
-            <a:off x="914400" y="4206240"/>
-            <a:ext cx="9966960" cy="475488"/>
-          </a:xfrm>
-          <a:prstGeom prst="rect">
-            <a:avLst/>
-          </a:prstGeom>
-          <a:noFill/>
-        </p:spPr>
-        <p:txBody>
-          <a:bodyPr wrap="square" lIns="73152" rIns="73152" tIns="36576" bIns="36576">
-            <a:spAutoFit/>
-          </a:bodyPr>
-          <a:lstStyle/>
-          <a:p>
-            <a:pPr algn="l">
-              <a:spcAft>
-                <a:spcPts val="0"/>
-              </a:spcAft>
-              <a:defRPr sz="1000" b="0">
-                <a:solidFill>
-                  <a:srgbClr val="225B9B"/>
-                </a:solidFill>
-                <a:latin typeface="DejaVu Sans Mono"/>
-              </a:defRPr>
-            </a:pPr>
-            <a:r>
-              <a:t>https://gazebosim.org/docs/latest/ros2_integration/</a:t>
+              <a:t>우선 확인: publisher/subscriber QoS reliability 호환을 확인한다.</a:t>
+            </a:r>
+            <a:br/>
+            <a:r>
+              <a:t>수정 후: ros2 topic echo /clock --once</a:t>
             </a:r>
           </a:p>
         </p:txBody>
@@ -13774,72 +15149,33 @@
         </p:nvSpPr>
         <p:spPr>
           <a:xfrm>
-            <a:off x="914400" y="5010912"/>
-            <a:ext cx="3840480" cy="256032"/>
-          </a:xfrm>
-          <a:prstGeom prst="rect">
-            <a:avLst/>
-          </a:prstGeom>
-          <a:noFill/>
-        </p:spPr>
-        <p:txBody>
-          <a:bodyPr wrap="square" lIns="73152" rIns="73152" tIns="36576" bIns="36576">
-            <a:spAutoFit/>
-          </a:bodyPr>
-          <a:lstStyle/>
-          <a:p>
-            <a:pPr algn="l">
-              <a:spcAft>
-                <a:spcPts val="0"/>
-              </a:spcAft>
-              <a:defRPr sz="1700" b="1">
-                <a:solidFill>
-                  <a:srgbClr val="122C4E"/>
-                </a:solidFill>
-                <a:latin typeface="Noto Sans CJK KR"/>
-              </a:defRPr>
-            </a:pPr>
-            <a:r>
-              <a:t>ROS 2 Jazzy — rosbag2 Recording and Playback</a:t>
-            </a:r>
-          </a:p>
-        </p:txBody>
-      </p:sp>
-      <p:sp>
-        <p:nvSpPr>
-          <p:cNvPr id="14" name="TextBox 13"/>
-          <p:cNvSpPr txBox="1"/>
-          <p:nvPr/>
-        </p:nvSpPr>
-        <p:spPr>
-          <a:xfrm>
-            <a:off x="914400" y="5285232"/>
-            <a:ext cx="9966960" cy="475488"/>
-          </a:xfrm>
-          <a:prstGeom prst="rect">
-            <a:avLst/>
-          </a:prstGeom>
-          <a:noFill/>
-        </p:spPr>
-        <p:txBody>
-          <a:bodyPr wrap="square" lIns="73152" rIns="73152" tIns="36576" bIns="36576">
-            <a:spAutoFit/>
-          </a:bodyPr>
-          <a:lstStyle/>
-          <a:p>
-            <a:pPr algn="l">
-              <a:spcAft>
-                <a:spcPts val="0"/>
-              </a:spcAft>
-              <a:defRPr sz="1000" b="0">
-                <a:solidFill>
-                  <a:srgbClr val="225B9B"/>
-                </a:solidFill>
-                <a:latin typeface="DejaVu Sans Mono"/>
-              </a:defRPr>
-            </a:pPr>
-            <a:r>
-              <a:t>https://docs.ros.org/en/jazzy/Tutorials/Beginner-CLI-Tools/Recording-And-Playing-Back-Data/Recording-And-Playing-Back-Data.html</a:t>
+            <a:off x="822960" y="5102352"/>
+            <a:ext cx="10607040" cy="402336"/>
+          </a:xfrm>
+          <a:prstGeom prst="rect">
+            <a:avLst/>
+          </a:prstGeom>
+          <a:noFill/>
+        </p:spPr>
+        <p:txBody>
+          <a:bodyPr wrap="square" lIns="73152" rIns="73152" tIns="36576" bIns="36576">
+            <a:spAutoFit/>
+          </a:bodyPr>
+          <a:lstStyle/>
+          <a:p>
+            <a:pPr algn="ctr">
+              <a:spcAft>
+                <a:spcPts val="0"/>
+              </a:spcAft>
+              <a:defRPr sz="1800" b="1">
+                <a:solidFill>
+                  <a:srgbClr val="DB7E22"/>
+                </a:solidFill>
+                <a:latin typeface="Noto Sans CJK KR"/>
+              </a:defRPr>
+            </a:pPr>
+            <a:r>
+              <a:t>공통 순서: ① 현재 폴더 ② source ③ 파일 경로 ④ 이름/타입/단위 ⑤ build·source 후 재실행</a:t>
             </a:r>
           </a:p>
         </p:txBody>
@@ -14271,6 +15607,1285 @@
 </p:sld>
 </file>
 
+<file path=ppt/slides/slide30.xml><?xml version="1.0" encoding="utf-8"?>
+<p:sld xmlns:a="http://schemas.openxmlformats.org/drawingml/2006/main" xmlns:p="http://schemas.openxmlformats.org/presentationml/2006/main" xmlns:r="http://schemas.openxmlformats.org/officeDocument/2006/relationships">
+  <p:cSld>
+    <p:spTree>
+      <p:nvGrpSpPr>
+        <p:cNvPr id="1" name=""/>
+        <p:cNvGrpSpPr/>
+        <p:nvPr/>
+      </p:nvGrpSpPr>
+      <p:grpSpPr/>
+      <p:sp>
+        <p:nvSpPr>
+          <p:cNvPr id="2" name="TextBox 1"/>
+          <p:cNvSpPr txBox="1"/>
+          <p:nvPr/>
+        </p:nvSpPr>
+        <p:spPr>
+          <a:xfrm>
+            <a:off x="566928" y="347472"/>
+            <a:ext cx="10881360" cy="438912"/>
+          </a:xfrm>
+          <a:prstGeom prst="rect">
+            <a:avLst/>
+          </a:prstGeom>
+          <a:noFill/>
+        </p:spPr>
+        <p:txBody>
+          <a:bodyPr wrap="square" lIns="73152" rIns="73152" tIns="36576" bIns="36576">
+            <a:spAutoFit/>
+          </a:bodyPr>
+          <a:lstStyle/>
+          <a:p>
+            <a:pPr algn="l">
+              <a:spcAft>
+                <a:spcPts val="0"/>
+              </a:spcAft>
+              <a:defRPr sz="3200" b="1">
+                <a:solidFill>
+                  <a:srgbClr val="122C4E"/>
+                </a:solidFill>
+                <a:latin typeface="Noto Sans CJK KR"/>
+              </a:defRPr>
+            </a:pPr>
+            <a:r>
+              <a:t>미니 실습: 값 하나를 바꾸고 결과를 비교한다</a:t>
+            </a:r>
+          </a:p>
+        </p:txBody>
+      </p:sp>
+      <p:sp>
+        <p:nvSpPr>
+          <p:cNvPr id="3" name="TextBox 2"/>
+          <p:cNvSpPr txBox="1"/>
+          <p:nvPr/>
+        </p:nvSpPr>
+        <p:spPr>
+          <a:xfrm>
+            <a:off x="603504" y="859536"/>
+            <a:ext cx="10698480" cy="292608"/>
+          </a:xfrm>
+          <a:prstGeom prst="rect">
+            <a:avLst/>
+          </a:prstGeom>
+          <a:noFill/>
+        </p:spPr>
+        <p:txBody>
+          <a:bodyPr wrap="square" lIns="73152" rIns="73152" tIns="36576" bIns="36576">
+            <a:spAutoFit/>
+          </a:bodyPr>
+          <a:lstStyle/>
+          <a:p>
+            <a:pPr algn="l">
+              <a:spcAft>
+                <a:spcPts val="0"/>
+              </a:spcAft>
+              <a:defRPr sz="1700" b="0">
+                <a:solidFill>
+                  <a:srgbClr val="5C6672"/>
+                </a:solidFill>
+                <a:latin typeface="Noto Sans CJK KR"/>
+              </a:defRPr>
+            </a:pPr>
+            <a:r>
+              <a:t>정상 결과를 만든 뒤에는 한 번에 하나의 값만 바꿉니다.</a:t>
+            </a:r>
+          </a:p>
+        </p:txBody>
+      </p:sp>
+      <p:sp>
+        <p:nvSpPr>
+          <p:cNvPr id="4" name="TextBox 3"/>
+          <p:cNvSpPr txBox="1"/>
+          <p:nvPr/>
+        </p:nvSpPr>
+        <p:spPr>
+          <a:xfrm>
+            <a:off x="530352" y="6510528"/>
+            <a:ext cx="7772400" cy="201168"/>
+          </a:xfrm>
+          <a:prstGeom prst="rect">
+            <a:avLst/>
+          </a:prstGeom>
+          <a:noFill/>
+        </p:spPr>
+        <p:txBody>
+          <a:bodyPr wrap="square" lIns="73152" rIns="73152" tIns="36576" bIns="36576">
+            <a:spAutoFit/>
+          </a:bodyPr>
+          <a:lstStyle/>
+          <a:p>
+            <a:pPr algn="l">
+              <a:spcAft>
+                <a:spcPts val="0"/>
+              </a:spcAft>
+              <a:defRPr sz="1000" b="0">
+                <a:solidFill>
+                  <a:srgbClr val="5C6672"/>
+                </a:solidFill>
+                <a:latin typeface="Noto Sans CJK KR"/>
+              </a:defRPr>
+            </a:pPr>
+            <a:r>
+              <a:t>ROS 2 Jazzy · Gazebo Harmonic · M15 · 따라 하기형 AGV 실습</a:t>
+            </a:r>
+          </a:p>
+        </p:txBody>
+      </p:sp>
+      <p:sp>
+        <p:nvSpPr>
+          <p:cNvPr id="5" name="TextBox 4"/>
+          <p:cNvSpPr txBox="1"/>
+          <p:nvPr/>
+        </p:nvSpPr>
+        <p:spPr>
+          <a:xfrm>
+            <a:off x="9144000" y="6510528"/>
+            <a:ext cx="2468880" cy="201168"/>
+          </a:xfrm>
+          <a:prstGeom prst="rect">
+            <a:avLst/>
+          </a:prstGeom>
+          <a:noFill/>
+        </p:spPr>
+        <p:txBody>
+          <a:bodyPr wrap="square" lIns="73152" rIns="73152" tIns="36576" bIns="36576">
+            <a:spAutoFit/>
+          </a:bodyPr>
+          <a:lstStyle/>
+          <a:p>
+            <a:pPr algn="r">
+              <a:spcAft>
+                <a:spcPts val="0"/>
+              </a:spcAft>
+              <a:defRPr sz="1000" b="0">
+                <a:solidFill>
+                  <a:srgbClr val="5C6672"/>
+                </a:solidFill>
+                <a:latin typeface="Noto Sans CJK KR"/>
+              </a:defRPr>
+            </a:pPr>
+            <a:r>
+              <a:t>명령·파일 경로는 슬라이드에서 복사 가능</a:t>
+            </a:r>
+          </a:p>
+        </p:txBody>
+      </p:sp>
+      <p:sp>
+        <p:nvSpPr>
+          <p:cNvPr id="6" name="Rectangle 5"/>
+          <p:cNvSpPr/>
+          <p:nvPr/>
+        </p:nvSpPr>
+        <p:spPr>
+          <a:xfrm>
+            <a:off x="566928" y="1188720"/>
+            <a:ext cx="11064240" cy="347472"/>
+          </a:xfrm>
+          <a:prstGeom prst="rect">
+            <a:avLst/>
+          </a:prstGeom>
+          <a:solidFill>
+            <a:srgbClr val="F4F7FB"/>
+          </a:solidFill>
+          <a:ln>
+            <a:solidFill>
+              <a:srgbClr val="F4F7FB"/>
+            </a:solidFill>
+          </a:ln>
+        </p:spPr>
+        <p:style>
+          <a:lnRef idx="1">
+            <a:schemeClr val="accent1"/>
+          </a:lnRef>
+          <a:fillRef idx="3">
+            <a:schemeClr val="accent1"/>
+          </a:fillRef>
+          <a:effectRef idx="2">
+            <a:schemeClr val="accent1"/>
+          </a:effectRef>
+          <a:fontRef idx="minor">
+            <a:schemeClr val="lt1"/>
+          </a:fontRef>
+        </p:style>
+        <p:txBody>
+          <a:bodyPr rtlCol="0" anchor="ctr" wrap="square" lIns="73152" rIns="73152" tIns="36576" bIns="36576"/>
+          <a:lstStyle/>
+          <a:p>
+            <a:pPr algn="l">
+              <a:spcAft>
+                <a:spcPts val="0"/>
+              </a:spcAft>
+              <a:defRPr sz="1300" b="1">
+                <a:solidFill>
+                  <a:srgbClr val="122C4E"/>
+                </a:solidFill>
+                <a:latin typeface="Noto Sans CJK KR"/>
+              </a:defRPr>
+            </a:pPr>
+            <a:r>
+              <a:t>현재 단계 미니 실습    |    현재 폴더 ~/ros2_curri/agv_ws    |    현재 터미널</a:t>
+            </a:r>
+          </a:p>
+        </p:txBody>
+      </p:sp>
+      <p:sp>
+        <p:nvSpPr>
+          <p:cNvPr id="7" name="Rounded Rectangle 6"/>
+          <p:cNvSpPr/>
+          <p:nvPr/>
+        </p:nvSpPr>
+        <p:spPr>
+          <a:xfrm>
+            <a:off x="749808" y="1874519"/>
+            <a:ext cx="10652760" cy="1993392"/>
+          </a:xfrm>
+          <a:prstGeom prst="roundRect">
+            <a:avLst/>
+          </a:prstGeom>
+          <a:solidFill>
+            <a:srgbClr val="FFF8EB"/>
+          </a:solidFill>
+          <a:ln>
+            <a:solidFill>
+              <a:srgbClr val="ECC680"/>
+            </a:solidFill>
+          </a:ln>
+        </p:spPr>
+        <p:style>
+          <a:lnRef idx="1">
+            <a:schemeClr val="accent1"/>
+          </a:lnRef>
+          <a:fillRef idx="3">
+            <a:schemeClr val="accent1"/>
+          </a:fillRef>
+          <a:effectRef idx="2">
+            <a:schemeClr val="accent1"/>
+          </a:effectRef>
+          <a:fontRef idx="minor">
+            <a:schemeClr val="lt1"/>
+          </a:fontRef>
+        </p:style>
+        <p:txBody>
+          <a:bodyPr rtlCol="0" anchor="ctr" wrap="square" lIns="73152" rIns="73152" tIns="36576" bIns="36576"/>
+          <a:lstStyle/>
+          <a:p>
+            <a:pPr algn="ctr">
+              <a:spcAft>
+                <a:spcPts val="0"/>
+              </a:spcAft>
+              <a:defRPr sz="2300" b="1">
+                <a:solidFill>
+                  <a:srgbClr val="122C4E"/>
+                </a:solidFill>
+                <a:latin typeface="Noto Sans CJK KR"/>
+              </a:defRPr>
+            </a:pPr>
+            <a:r>
+              <a:t>/scan과 /imu/data의 hz를 표로 기록하고 SDF update_rate 10/100 Hz와 비교한다.</a:t>
+            </a:r>
+          </a:p>
+        </p:txBody>
+      </p:sp>
+      <p:sp>
+        <p:nvSpPr>
+          <p:cNvPr id="8" name="TextBox 7"/>
+          <p:cNvSpPr txBox="1"/>
+          <p:nvPr/>
+        </p:nvSpPr>
+        <p:spPr>
+          <a:xfrm>
+            <a:off x="877824" y="4590288"/>
+            <a:ext cx="10241280" cy="594360"/>
+          </a:xfrm>
+          <a:prstGeom prst="rect">
+            <a:avLst/>
+          </a:prstGeom>
+          <a:noFill/>
+        </p:spPr>
+        <p:txBody>
+          <a:bodyPr wrap="square" lIns="73152" rIns="73152" tIns="36576" bIns="36576">
+            <a:spAutoFit/>
+          </a:bodyPr>
+          <a:lstStyle/>
+          <a:p>
+            <a:pPr algn="ctr">
+              <a:spcAft>
+                <a:spcPts val="0"/>
+              </a:spcAft>
+              <a:defRPr sz="1900" b="1">
+                <a:solidFill>
+                  <a:srgbClr val="DB7E22"/>
+                </a:solidFill>
+                <a:latin typeface="Noto Sans CJK KR"/>
+              </a:defRPr>
+            </a:pPr>
+            <a:r>
+              <a:t>기록할 것: 바꾼 값(단위) · 기대한 변화 · 실제 출력/화면 · 원래 값으로 되돌린 결과</a:t>
+            </a:r>
+          </a:p>
+        </p:txBody>
+      </p:sp>
+    </p:spTree>
+  </p:cSld>
+  <p:clrMapOvr>
+    <a:masterClrMapping/>
+  </p:clrMapOvr>
+</p:sld>
+</file>
+
+<file path=ppt/slides/slide31.xml><?xml version="1.0" encoding="utf-8"?>
+<p:sld xmlns:a="http://schemas.openxmlformats.org/drawingml/2006/main" xmlns:p="http://schemas.openxmlformats.org/presentationml/2006/main" xmlns:r="http://schemas.openxmlformats.org/officeDocument/2006/relationships">
+  <p:cSld>
+    <p:spTree>
+      <p:nvGrpSpPr>
+        <p:cNvPr id="1" name=""/>
+        <p:cNvGrpSpPr/>
+        <p:nvPr/>
+      </p:nvGrpSpPr>
+      <p:grpSpPr/>
+      <p:sp>
+        <p:nvSpPr>
+          <p:cNvPr id="2" name="TextBox 1"/>
+          <p:cNvSpPr txBox="1"/>
+          <p:nvPr/>
+        </p:nvSpPr>
+        <p:spPr>
+          <a:xfrm>
+            <a:off x="566928" y="347472"/>
+            <a:ext cx="10881360" cy="438912"/>
+          </a:xfrm>
+          <a:prstGeom prst="rect">
+            <a:avLst/>
+          </a:prstGeom>
+          <a:noFill/>
+        </p:spPr>
+        <p:txBody>
+          <a:bodyPr wrap="square" lIns="73152" rIns="73152" tIns="36576" bIns="36576">
+            <a:spAutoFit/>
+          </a:bodyPr>
+          <a:lstStyle/>
+          <a:p>
+            <a:pPr algn="l">
+              <a:spcAft>
+                <a:spcPts val="0"/>
+              </a:spcAft>
+              <a:defRPr sz="3200" b="1">
+                <a:solidFill>
+                  <a:srgbClr val="122C4E"/>
+                </a:solidFill>
+                <a:latin typeface="Noto Sans CJK KR"/>
+              </a:defRPr>
+            </a:pPr>
+            <a:r>
+              <a:t>체크포인트를 저장하고 다음 모듈로 넘긴다</a:t>
+            </a:r>
+          </a:p>
+        </p:txBody>
+      </p:sp>
+      <p:sp>
+        <p:nvSpPr>
+          <p:cNvPr id="3" name="TextBox 2"/>
+          <p:cNvSpPr txBox="1"/>
+          <p:nvPr/>
+        </p:nvSpPr>
+        <p:spPr>
+          <a:xfrm>
+            <a:off x="603504" y="859536"/>
+            <a:ext cx="10698480" cy="292608"/>
+          </a:xfrm>
+          <a:prstGeom prst="rect">
+            <a:avLst/>
+          </a:prstGeom>
+          <a:noFill/>
+        </p:spPr>
+        <p:txBody>
+          <a:bodyPr wrap="square" lIns="73152" rIns="73152" tIns="36576" bIns="36576">
+            <a:spAutoFit/>
+          </a:bodyPr>
+          <a:lstStyle/>
+          <a:p>
+            <a:pPr algn="l">
+              <a:spcAft>
+                <a:spcPts val="0"/>
+              </a:spcAft>
+              <a:defRPr sz="1700" b="0">
+                <a:solidFill>
+                  <a:srgbClr val="5C6672"/>
+                </a:solidFill>
+                <a:latin typeface="Noto Sans CJK KR"/>
+              </a:defRPr>
+            </a:pPr>
+            <a:r>
+              <a:t>현재 Complete는 다음 Starter의 기준선입니다.</a:t>
+            </a:r>
+          </a:p>
+        </p:txBody>
+      </p:sp>
+      <p:sp>
+        <p:nvSpPr>
+          <p:cNvPr id="4" name="TextBox 3"/>
+          <p:cNvSpPr txBox="1"/>
+          <p:nvPr/>
+        </p:nvSpPr>
+        <p:spPr>
+          <a:xfrm>
+            <a:off x="530352" y="6510528"/>
+            <a:ext cx="7772400" cy="201168"/>
+          </a:xfrm>
+          <a:prstGeom prst="rect">
+            <a:avLst/>
+          </a:prstGeom>
+          <a:noFill/>
+        </p:spPr>
+        <p:txBody>
+          <a:bodyPr wrap="square" lIns="73152" rIns="73152" tIns="36576" bIns="36576">
+            <a:spAutoFit/>
+          </a:bodyPr>
+          <a:lstStyle/>
+          <a:p>
+            <a:pPr algn="l">
+              <a:spcAft>
+                <a:spcPts val="0"/>
+              </a:spcAft>
+              <a:defRPr sz="1000" b="0">
+                <a:solidFill>
+                  <a:srgbClr val="5C6672"/>
+                </a:solidFill>
+                <a:latin typeface="Noto Sans CJK KR"/>
+              </a:defRPr>
+            </a:pPr>
+            <a:r>
+              <a:t>ROS 2 Jazzy · Gazebo Harmonic · M15 · 따라 하기형 AGV 실습</a:t>
+            </a:r>
+          </a:p>
+        </p:txBody>
+      </p:sp>
+      <p:sp>
+        <p:nvSpPr>
+          <p:cNvPr id="5" name="TextBox 4"/>
+          <p:cNvSpPr txBox="1"/>
+          <p:nvPr/>
+        </p:nvSpPr>
+        <p:spPr>
+          <a:xfrm>
+            <a:off x="9144000" y="6510528"/>
+            <a:ext cx="2468880" cy="201168"/>
+          </a:xfrm>
+          <a:prstGeom prst="rect">
+            <a:avLst/>
+          </a:prstGeom>
+          <a:noFill/>
+        </p:spPr>
+        <p:txBody>
+          <a:bodyPr wrap="square" lIns="73152" rIns="73152" tIns="36576" bIns="36576">
+            <a:spAutoFit/>
+          </a:bodyPr>
+          <a:lstStyle/>
+          <a:p>
+            <a:pPr algn="r">
+              <a:spcAft>
+                <a:spcPts val="0"/>
+              </a:spcAft>
+              <a:defRPr sz="1000" b="0">
+                <a:solidFill>
+                  <a:srgbClr val="5C6672"/>
+                </a:solidFill>
+                <a:latin typeface="Noto Sans CJK KR"/>
+              </a:defRPr>
+            </a:pPr>
+            <a:r>
+              <a:t>명령·파일 경로는 슬라이드에서 복사 가능</a:t>
+            </a:r>
+          </a:p>
+        </p:txBody>
+      </p:sp>
+      <p:sp>
+        <p:nvSpPr>
+          <p:cNvPr id="6" name="Rectangle 5"/>
+          <p:cNvSpPr/>
+          <p:nvPr/>
+        </p:nvSpPr>
+        <p:spPr>
+          <a:xfrm>
+            <a:off x="566928" y="1188720"/>
+            <a:ext cx="11064240" cy="347472"/>
+          </a:xfrm>
+          <a:prstGeom prst="rect">
+            <a:avLst/>
+          </a:prstGeom>
+          <a:solidFill>
+            <a:srgbClr val="F4F7FB"/>
+          </a:solidFill>
+          <a:ln>
+            <a:solidFill>
+              <a:srgbClr val="F4F7FB"/>
+            </a:solidFill>
+          </a:ln>
+        </p:spPr>
+        <p:style>
+          <a:lnRef idx="1">
+            <a:schemeClr val="accent1"/>
+          </a:lnRef>
+          <a:fillRef idx="3">
+            <a:schemeClr val="accent1"/>
+          </a:fillRef>
+          <a:effectRef idx="2">
+            <a:schemeClr val="accent1"/>
+          </a:effectRef>
+          <a:fontRef idx="minor">
+            <a:schemeClr val="lt1"/>
+          </a:fontRef>
+        </p:style>
+        <p:txBody>
+          <a:bodyPr rtlCol="0" anchor="ctr" wrap="square" lIns="73152" rIns="73152" tIns="36576" bIns="36576"/>
+          <a:lstStyle/>
+          <a:p>
+            <a:pPr algn="l">
+              <a:spcAft>
+                <a:spcPts val="0"/>
+              </a:spcAft>
+              <a:defRPr sz="1300" b="1">
+                <a:solidFill>
+                  <a:srgbClr val="122C4E"/>
+                </a:solidFill>
+                <a:latin typeface="Noto Sans CJK KR"/>
+              </a:defRPr>
+            </a:pPr>
+            <a:r>
+              <a:t>현재 단계 체크포인트    |    현재 폴더 ~/ros2_curri/agv_ws    |    현재 터미널</a:t>
+            </a:r>
+          </a:p>
+        </p:txBody>
+      </p:sp>
+      <p:sp>
+        <p:nvSpPr>
+          <p:cNvPr id="7" name="Rounded Rectangle 6"/>
+          <p:cNvSpPr/>
+          <p:nvPr/>
+        </p:nvSpPr>
+        <p:spPr>
+          <a:xfrm>
+            <a:off x="685800" y="1737360"/>
+            <a:ext cx="10972800" cy="3611880"/>
+          </a:xfrm>
+          <a:prstGeom prst="roundRect">
+            <a:avLst/>
+          </a:prstGeom>
+          <a:solidFill>
+            <a:srgbClr val="F4F7FB"/>
+          </a:solidFill>
+          <a:ln>
+            <a:solidFill>
+              <a:srgbClr val="D2DCE8"/>
+            </a:solidFill>
+          </a:ln>
+        </p:spPr>
+        <p:style>
+          <a:lnRef idx="1">
+            <a:schemeClr val="accent1"/>
+          </a:lnRef>
+          <a:fillRef idx="3">
+            <a:schemeClr val="accent1"/>
+          </a:fillRef>
+          <a:effectRef idx="2">
+            <a:schemeClr val="accent1"/>
+          </a:effectRef>
+          <a:fontRef idx="minor">
+            <a:schemeClr val="lt1"/>
+          </a:fontRef>
+        </p:style>
+        <p:txBody>
+          <a:bodyPr rtlCol="0" anchor="ctr"/>
+          <a:lstStyle/>
+          <a:p>
+            <a:pPr algn="ctr"/>
+          </a:p>
+        </p:txBody>
+      </p:sp>
+      <p:sp>
+        <p:nvSpPr>
+          <p:cNvPr id="8" name="TextBox 7"/>
+          <p:cNvSpPr txBox="1"/>
+          <p:nvPr/>
+        </p:nvSpPr>
+        <p:spPr>
+          <a:xfrm>
+            <a:off x="896112" y="1993392"/>
+            <a:ext cx="10332720" cy="2971800"/>
+          </a:xfrm>
+          <a:prstGeom prst="rect">
+            <a:avLst/>
+          </a:prstGeom>
+          <a:noFill/>
+        </p:spPr>
+        <p:txBody>
+          <a:bodyPr wrap="square" lIns="109728" rIns="109728">
+            <a:spAutoFit/>
+          </a:bodyPr>
+          <a:lstStyle/>
+          <a:p>
+            <a:pPr>
+              <a:spcAft>
+                <a:spcPts val="800"/>
+              </a:spcAft>
+              <a:defRPr sz="1800">
+                <a:solidFill>
+                  <a:srgbClr val="122C4E"/>
+                </a:solidFill>
+                <a:latin typeface="Noto Sans CJK KR"/>
+              </a:defRPr>
+            </a:pPr>
+            <a:r>
+              <a:t>• □ 완료 화면: 모든 sensor 노드가 같은 시뮬레이션 시간과 기대 publish rate를 사용한다.</a:t>
+            </a:r>
+          </a:p>
+          <a:p>
+            <a:pPr>
+              <a:spcAft>
+                <a:spcPts val="800"/>
+              </a:spcAft>
+              <a:defRPr sz="1800">
+                <a:solidFill>
+                  <a:srgbClr val="122C4E"/>
+                </a:solidFill>
+                <a:latin typeface="Noto Sans CJK KR"/>
+              </a:defRPr>
+            </a:pPr>
+            <a:r>
+              <a:t>• □ Complete 파일: blocks/D_sensors/M15_sensor_operations/complete/</a:t>
+            </a:r>
+          </a:p>
+          <a:p>
+            <a:pPr>
+              <a:spcAft>
+                <a:spcPts val="800"/>
+              </a:spcAft>
+              <a:defRPr sz="1800">
+                <a:solidFill>
+                  <a:srgbClr val="122C4E"/>
+                </a:solidFill>
+                <a:latin typeface="Noto Sans CJK KR"/>
+              </a:defRPr>
+            </a:pPr>
+            <a:r>
+              <a:t>• □ 정상 로그·캡처: logs/validation.log, screenshots/validation_terminal.png</a:t>
+            </a:r>
+          </a:p>
+          <a:p>
+            <a:pPr>
+              <a:spcAft>
+                <a:spcPts val="800"/>
+              </a:spcAft>
+              <a:defRPr sz="1800">
+                <a:solidFill>
+                  <a:srgbClr val="122C4E"/>
+                </a:solidFill>
+                <a:latin typeface="Noto Sans CJK KR"/>
+              </a:defRPr>
+            </a:pPr>
+            <a:r>
+              <a:t>• □ 버전 식별: CHECKSUM_or_TAG.txt의 SHA-256 manifest</a:t>
+            </a:r>
+          </a:p>
+          <a:p>
+            <a:pPr>
+              <a:spcAft>
+                <a:spcPts val="800"/>
+              </a:spcAft>
+              <a:defRPr sz="1800">
+                <a:solidFill>
+                  <a:srgbClr val="122C4E"/>
+                </a:solidFill>
+                <a:latin typeface="Noto Sans CJK KR"/>
+              </a:defRPr>
+            </a:pPr>
+            <a:r>
+              <a:t>• □ 다음 시작 조건: M16 제어 interface</a:t>
+            </a:r>
+          </a:p>
+        </p:txBody>
+      </p:sp>
+      <p:sp>
+        <p:nvSpPr>
+          <p:cNvPr id="9" name="TextBox 8"/>
+          <p:cNvSpPr txBox="1"/>
+          <p:nvPr/>
+        </p:nvSpPr>
+        <p:spPr>
+          <a:xfrm>
+            <a:off x="868680" y="5596128"/>
+            <a:ext cx="10515600" cy="338328"/>
+          </a:xfrm>
+          <a:prstGeom prst="rect">
+            <a:avLst/>
+          </a:prstGeom>
+          <a:noFill/>
+        </p:spPr>
+        <p:txBody>
+          <a:bodyPr wrap="square" lIns="73152" rIns="73152" tIns="36576" bIns="36576">
+            <a:spAutoFit/>
+          </a:bodyPr>
+          <a:lstStyle/>
+          <a:p>
+            <a:pPr algn="ctr">
+              <a:spcAft>
+                <a:spcPts val="0"/>
+              </a:spcAft>
+              <a:defRPr sz="1700" b="1">
+                <a:solidFill>
+                  <a:srgbClr val="2A8B5A"/>
+                </a:solidFill>
+                <a:latin typeface="Noto Sans CJK KR"/>
+              </a:defRPr>
+            </a:pPr>
+            <a:r>
+              <a:t>다음 모듈을 시작하기 전, 이 슬라이드의 Complete와 다음 모듈의 Starter를 비교합니다.</a:t>
+            </a:r>
+          </a:p>
+        </p:txBody>
+      </p:sp>
+    </p:spTree>
+  </p:cSld>
+  <p:clrMapOvr>
+    <a:masterClrMapping/>
+  </p:clrMapOvr>
+</p:sld>
+</file>
+
+<file path=ppt/slides/slide32.xml><?xml version="1.0" encoding="utf-8"?>
+<p:sld xmlns:a="http://schemas.openxmlformats.org/drawingml/2006/main" xmlns:p="http://schemas.openxmlformats.org/presentationml/2006/main" xmlns:r="http://schemas.openxmlformats.org/officeDocument/2006/relationships">
+  <p:cSld>
+    <p:spTree>
+      <p:nvGrpSpPr>
+        <p:cNvPr id="1" name=""/>
+        <p:cNvGrpSpPr/>
+        <p:nvPr/>
+      </p:nvGrpSpPr>
+      <p:grpSpPr/>
+      <p:sp>
+        <p:nvSpPr>
+          <p:cNvPr id="2" name="TextBox 1"/>
+          <p:cNvSpPr txBox="1"/>
+          <p:nvPr/>
+        </p:nvSpPr>
+        <p:spPr>
+          <a:xfrm>
+            <a:off x="566928" y="347472"/>
+            <a:ext cx="10881360" cy="438912"/>
+          </a:xfrm>
+          <a:prstGeom prst="rect">
+            <a:avLst/>
+          </a:prstGeom>
+          <a:noFill/>
+        </p:spPr>
+        <p:txBody>
+          <a:bodyPr wrap="square" lIns="73152" rIns="73152" tIns="36576" bIns="36576">
+            <a:spAutoFit/>
+          </a:bodyPr>
+          <a:lstStyle/>
+          <a:p>
+            <a:pPr algn="l">
+              <a:spcAft>
+                <a:spcPts val="0"/>
+              </a:spcAft>
+              <a:defRPr sz="3200" b="1">
+                <a:solidFill>
+                  <a:srgbClr val="122C4E"/>
+                </a:solidFill>
+                <a:latin typeface="Noto Sans CJK KR"/>
+              </a:defRPr>
+            </a:pPr>
+            <a:r>
+              <a:t>공식 참고 자료</a:t>
+            </a:r>
+          </a:p>
+        </p:txBody>
+      </p:sp>
+      <p:sp>
+        <p:nvSpPr>
+          <p:cNvPr id="3" name="TextBox 2"/>
+          <p:cNvSpPr txBox="1"/>
+          <p:nvPr/>
+        </p:nvSpPr>
+        <p:spPr>
+          <a:xfrm>
+            <a:off x="603504" y="859536"/>
+            <a:ext cx="10698480" cy="292608"/>
+          </a:xfrm>
+          <a:prstGeom prst="rect">
+            <a:avLst/>
+          </a:prstGeom>
+          <a:noFill/>
+        </p:spPr>
+        <p:txBody>
+          <a:bodyPr wrap="square" lIns="73152" rIns="73152" tIns="36576" bIns="36576">
+            <a:spAutoFit/>
+          </a:bodyPr>
+          <a:lstStyle/>
+          <a:p>
+            <a:pPr algn="l">
+              <a:spcAft>
+                <a:spcPts val="0"/>
+              </a:spcAft>
+              <a:defRPr sz="1700" b="0">
+                <a:solidFill>
+                  <a:srgbClr val="5C6672"/>
+                </a:solidFill>
+                <a:latin typeface="Noto Sans CJK KR"/>
+              </a:defRPr>
+            </a:pPr>
+            <a:r>
+              <a:t>본문 단계는 링크를 열지 않아도 완료할 수 있으며, 링크는 개념을 더 확인할 때만 사용합니다.</a:t>
+            </a:r>
+          </a:p>
+        </p:txBody>
+      </p:sp>
+      <p:sp>
+        <p:nvSpPr>
+          <p:cNvPr id="4" name="TextBox 3"/>
+          <p:cNvSpPr txBox="1"/>
+          <p:nvPr/>
+        </p:nvSpPr>
+        <p:spPr>
+          <a:xfrm>
+            <a:off x="530352" y="6510528"/>
+            <a:ext cx="7772400" cy="201168"/>
+          </a:xfrm>
+          <a:prstGeom prst="rect">
+            <a:avLst/>
+          </a:prstGeom>
+          <a:noFill/>
+        </p:spPr>
+        <p:txBody>
+          <a:bodyPr wrap="square" lIns="73152" rIns="73152" tIns="36576" bIns="36576">
+            <a:spAutoFit/>
+          </a:bodyPr>
+          <a:lstStyle/>
+          <a:p>
+            <a:pPr algn="l">
+              <a:spcAft>
+                <a:spcPts val="0"/>
+              </a:spcAft>
+              <a:defRPr sz="1000" b="0">
+                <a:solidFill>
+                  <a:srgbClr val="5C6672"/>
+                </a:solidFill>
+                <a:latin typeface="Noto Sans CJK KR"/>
+              </a:defRPr>
+            </a:pPr>
+            <a:r>
+              <a:t>ROS 2 Jazzy · Gazebo Harmonic · M15 · 따라 하기형 AGV 실습</a:t>
+            </a:r>
+          </a:p>
+        </p:txBody>
+      </p:sp>
+      <p:sp>
+        <p:nvSpPr>
+          <p:cNvPr id="5" name="TextBox 4"/>
+          <p:cNvSpPr txBox="1"/>
+          <p:nvPr/>
+        </p:nvSpPr>
+        <p:spPr>
+          <a:xfrm>
+            <a:off x="9144000" y="6510528"/>
+            <a:ext cx="2468880" cy="201168"/>
+          </a:xfrm>
+          <a:prstGeom prst="rect">
+            <a:avLst/>
+          </a:prstGeom>
+          <a:noFill/>
+        </p:spPr>
+        <p:txBody>
+          <a:bodyPr wrap="square" lIns="73152" rIns="73152" tIns="36576" bIns="36576">
+            <a:spAutoFit/>
+          </a:bodyPr>
+          <a:lstStyle/>
+          <a:p>
+            <a:pPr algn="r">
+              <a:spcAft>
+                <a:spcPts val="0"/>
+              </a:spcAft>
+              <a:defRPr sz="1000" b="0">
+                <a:solidFill>
+                  <a:srgbClr val="5C6672"/>
+                </a:solidFill>
+                <a:latin typeface="Noto Sans CJK KR"/>
+              </a:defRPr>
+            </a:pPr>
+            <a:r>
+              <a:t>명령·파일 경로는 슬라이드에서 복사 가능</a:t>
+            </a:r>
+          </a:p>
+        </p:txBody>
+      </p:sp>
+      <p:sp>
+        <p:nvSpPr>
+          <p:cNvPr id="6" name="Rounded Rectangle 5"/>
+          <p:cNvSpPr/>
+          <p:nvPr/>
+        </p:nvSpPr>
+        <p:spPr>
+          <a:xfrm>
+            <a:off x="658368" y="1554480"/>
+            <a:ext cx="10972800" cy="4526280"/>
+          </a:xfrm>
+          <a:prstGeom prst="roundRect">
+            <a:avLst/>
+          </a:prstGeom>
+          <a:solidFill>
+            <a:srgbClr val="F4F7FB"/>
+          </a:solidFill>
+          <a:ln>
+            <a:solidFill>
+              <a:srgbClr val="D7DFE9"/>
+            </a:solidFill>
+          </a:ln>
+        </p:spPr>
+        <p:style>
+          <a:lnRef idx="1">
+            <a:schemeClr val="accent1"/>
+          </a:lnRef>
+          <a:fillRef idx="3">
+            <a:schemeClr val="accent1"/>
+          </a:fillRef>
+          <a:effectRef idx="2">
+            <a:schemeClr val="accent1"/>
+          </a:effectRef>
+          <a:fontRef idx="minor">
+            <a:schemeClr val="lt1"/>
+          </a:fontRef>
+        </p:style>
+        <p:txBody>
+          <a:bodyPr rtlCol="0" anchor="ctr"/>
+          <a:lstStyle/>
+          <a:p>
+            <a:pPr algn="ctr"/>
+          </a:p>
+        </p:txBody>
+      </p:sp>
+      <p:sp>
+        <p:nvSpPr>
+          <p:cNvPr id="7" name="TextBox 6"/>
+          <p:cNvSpPr txBox="1"/>
+          <p:nvPr/>
+        </p:nvSpPr>
+        <p:spPr>
+          <a:xfrm>
+            <a:off x="914400" y="1773936"/>
+            <a:ext cx="3840480" cy="256032"/>
+          </a:xfrm>
+          <a:prstGeom prst="rect">
+            <a:avLst/>
+          </a:prstGeom>
+          <a:noFill/>
+        </p:spPr>
+        <p:txBody>
+          <a:bodyPr wrap="square" lIns="73152" rIns="73152" tIns="36576" bIns="36576">
+            <a:spAutoFit/>
+          </a:bodyPr>
+          <a:lstStyle/>
+          <a:p>
+            <a:pPr algn="l">
+              <a:spcAft>
+                <a:spcPts val="0"/>
+              </a:spcAft>
+              <a:defRPr sz="1700" b="1">
+                <a:solidFill>
+                  <a:srgbClr val="122C4E"/>
+                </a:solidFill>
+                <a:latin typeface="Noto Sans CJK KR"/>
+              </a:defRPr>
+            </a:pPr>
+            <a:r>
+              <a:t>ROS 2 Jazzy — Gazebo Simulation</a:t>
+            </a:r>
+          </a:p>
+        </p:txBody>
+      </p:sp>
+      <p:sp>
+        <p:nvSpPr>
+          <p:cNvPr id="8" name="TextBox 7"/>
+          <p:cNvSpPr txBox="1"/>
+          <p:nvPr/>
+        </p:nvSpPr>
+        <p:spPr>
+          <a:xfrm>
+            <a:off x="914400" y="2048255"/>
+            <a:ext cx="9966960" cy="475488"/>
+          </a:xfrm>
+          <a:prstGeom prst="rect">
+            <a:avLst/>
+          </a:prstGeom>
+          <a:noFill/>
+        </p:spPr>
+        <p:txBody>
+          <a:bodyPr wrap="square" lIns="73152" rIns="73152" tIns="36576" bIns="36576">
+            <a:spAutoFit/>
+          </a:bodyPr>
+          <a:lstStyle/>
+          <a:p>
+            <a:pPr algn="l">
+              <a:spcAft>
+                <a:spcPts val="0"/>
+              </a:spcAft>
+              <a:defRPr sz="1000" b="0">
+                <a:solidFill>
+                  <a:srgbClr val="225B9B"/>
+                </a:solidFill>
+                <a:latin typeface="DejaVu Sans Mono"/>
+              </a:defRPr>
+            </a:pPr>
+            <a:r>
+              <a:t>https://docs.ros.org/en/jazzy/Tutorials/Advanced/Simulators/Gazebo/Simulation-Gazebo.html</a:t>
+            </a:r>
+          </a:p>
+        </p:txBody>
+      </p:sp>
+      <p:sp>
+        <p:nvSpPr>
+          <p:cNvPr id="9" name="TextBox 8"/>
+          <p:cNvSpPr txBox="1"/>
+          <p:nvPr/>
+        </p:nvSpPr>
+        <p:spPr>
+          <a:xfrm>
+            <a:off x="914400" y="2852928"/>
+            <a:ext cx="3840480" cy="256032"/>
+          </a:xfrm>
+          <a:prstGeom prst="rect">
+            <a:avLst/>
+          </a:prstGeom>
+          <a:noFill/>
+        </p:spPr>
+        <p:txBody>
+          <a:bodyPr wrap="square" lIns="73152" rIns="73152" tIns="36576" bIns="36576">
+            <a:spAutoFit/>
+          </a:bodyPr>
+          <a:lstStyle/>
+          <a:p>
+            <a:pPr algn="l">
+              <a:spcAft>
+                <a:spcPts val="0"/>
+              </a:spcAft>
+              <a:defRPr sz="1700" b="1">
+                <a:solidFill>
+                  <a:srgbClr val="122C4E"/>
+                </a:solidFill>
+                <a:latin typeface="Noto Sans CJK KR"/>
+              </a:defRPr>
+            </a:pPr>
+            <a:r>
+              <a:t>ROS 2 Jazzy — URDF / robot_state_publisher</a:t>
+            </a:r>
+          </a:p>
+        </p:txBody>
+      </p:sp>
+      <p:sp>
+        <p:nvSpPr>
+          <p:cNvPr id="10" name="TextBox 9"/>
+          <p:cNvSpPr txBox="1"/>
+          <p:nvPr/>
+        </p:nvSpPr>
+        <p:spPr>
+          <a:xfrm>
+            <a:off x="914400" y="3127248"/>
+            <a:ext cx="9966960" cy="475488"/>
+          </a:xfrm>
+          <a:prstGeom prst="rect">
+            <a:avLst/>
+          </a:prstGeom>
+          <a:noFill/>
+        </p:spPr>
+        <p:txBody>
+          <a:bodyPr wrap="square" lIns="73152" rIns="73152" tIns="36576" bIns="36576">
+            <a:spAutoFit/>
+          </a:bodyPr>
+          <a:lstStyle/>
+          <a:p>
+            <a:pPr algn="l">
+              <a:spcAft>
+                <a:spcPts val="0"/>
+              </a:spcAft>
+              <a:defRPr sz="1000" b="0">
+                <a:solidFill>
+                  <a:srgbClr val="225B9B"/>
+                </a:solidFill>
+                <a:latin typeface="DejaVu Sans Mono"/>
+              </a:defRPr>
+            </a:pPr>
+            <a:r>
+              <a:t>https://docs.ros.org/en/jazzy/Tutorials/Intermediate/URDF/Using-URDF-with-Robot-State-Publisher-py.html</a:t>
+            </a:r>
+          </a:p>
+        </p:txBody>
+      </p:sp>
+      <p:sp>
+        <p:nvSpPr>
+          <p:cNvPr id="11" name="TextBox 10"/>
+          <p:cNvSpPr txBox="1"/>
+          <p:nvPr/>
+        </p:nvSpPr>
+        <p:spPr>
+          <a:xfrm>
+            <a:off x="914400" y="3931920"/>
+            <a:ext cx="3840480" cy="256032"/>
+          </a:xfrm>
+          <a:prstGeom prst="rect">
+            <a:avLst/>
+          </a:prstGeom>
+          <a:noFill/>
+        </p:spPr>
+        <p:txBody>
+          <a:bodyPr wrap="square" lIns="73152" rIns="73152" tIns="36576" bIns="36576">
+            <a:spAutoFit/>
+          </a:bodyPr>
+          <a:lstStyle/>
+          <a:p>
+            <a:pPr algn="l">
+              <a:spcAft>
+                <a:spcPts val="0"/>
+              </a:spcAft>
+              <a:defRPr sz="1700" b="1">
+                <a:solidFill>
+                  <a:srgbClr val="122C4E"/>
+                </a:solidFill>
+                <a:latin typeface="Noto Sans CJK KR"/>
+              </a:defRPr>
+            </a:pPr>
+            <a:r>
+              <a:t>Gazebo — ROS 2 Integration / ros_gz_bridge</a:t>
+            </a:r>
+          </a:p>
+        </p:txBody>
+      </p:sp>
+      <p:sp>
+        <p:nvSpPr>
+          <p:cNvPr id="12" name="TextBox 11"/>
+          <p:cNvSpPr txBox="1"/>
+          <p:nvPr/>
+        </p:nvSpPr>
+        <p:spPr>
+          <a:xfrm>
+            <a:off x="914400" y="4206240"/>
+            <a:ext cx="9966960" cy="475488"/>
+          </a:xfrm>
+          <a:prstGeom prst="rect">
+            <a:avLst/>
+          </a:prstGeom>
+          <a:noFill/>
+        </p:spPr>
+        <p:txBody>
+          <a:bodyPr wrap="square" lIns="73152" rIns="73152" tIns="36576" bIns="36576">
+            <a:spAutoFit/>
+          </a:bodyPr>
+          <a:lstStyle/>
+          <a:p>
+            <a:pPr algn="l">
+              <a:spcAft>
+                <a:spcPts val="0"/>
+              </a:spcAft>
+              <a:defRPr sz="1000" b="0">
+                <a:solidFill>
+                  <a:srgbClr val="225B9B"/>
+                </a:solidFill>
+                <a:latin typeface="DejaVu Sans Mono"/>
+              </a:defRPr>
+            </a:pPr>
+            <a:r>
+              <a:t>https://gazebosim.org/docs/latest/ros2_integration/</a:t>
+            </a:r>
+          </a:p>
+        </p:txBody>
+      </p:sp>
+      <p:sp>
+        <p:nvSpPr>
+          <p:cNvPr id="13" name="TextBox 12"/>
+          <p:cNvSpPr txBox="1"/>
+          <p:nvPr/>
+        </p:nvSpPr>
+        <p:spPr>
+          <a:xfrm>
+            <a:off x="914400" y="5010912"/>
+            <a:ext cx="3840480" cy="256032"/>
+          </a:xfrm>
+          <a:prstGeom prst="rect">
+            <a:avLst/>
+          </a:prstGeom>
+          <a:noFill/>
+        </p:spPr>
+        <p:txBody>
+          <a:bodyPr wrap="square" lIns="73152" rIns="73152" tIns="36576" bIns="36576">
+            <a:spAutoFit/>
+          </a:bodyPr>
+          <a:lstStyle/>
+          <a:p>
+            <a:pPr algn="l">
+              <a:spcAft>
+                <a:spcPts val="0"/>
+              </a:spcAft>
+              <a:defRPr sz="1700" b="1">
+                <a:solidFill>
+                  <a:srgbClr val="122C4E"/>
+                </a:solidFill>
+                <a:latin typeface="Noto Sans CJK KR"/>
+              </a:defRPr>
+            </a:pPr>
+            <a:r>
+              <a:t>ROS 2 Jazzy — rosbag2 Recording and Playback</a:t>
+            </a:r>
+          </a:p>
+        </p:txBody>
+      </p:sp>
+      <p:sp>
+        <p:nvSpPr>
+          <p:cNvPr id="14" name="TextBox 13"/>
+          <p:cNvSpPr txBox="1"/>
+          <p:nvPr/>
+        </p:nvSpPr>
+        <p:spPr>
+          <a:xfrm>
+            <a:off x="914400" y="5285232"/>
+            <a:ext cx="9966960" cy="475488"/>
+          </a:xfrm>
+          <a:prstGeom prst="rect">
+            <a:avLst/>
+          </a:prstGeom>
+          <a:noFill/>
+        </p:spPr>
+        <p:txBody>
+          <a:bodyPr wrap="square" lIns="73152" rIns="73152" tIns="36576" bIns="36576">
+            <a:spAutoFit/>
+          </a:bodyPr>
+          <a:lstStyle/>
+          <a:p>
+            <a:pPr algn="l">
+              <a:spcAft>
+                <a:spcPts val="0"/>
+              </a:spcAft>
+              <a:defRPr sz="1000" b="0">
+                <a:solidFill>
+                  <a:srgbClr val="225B9B"/>
+                </a:solidFill>
+                <a:latin typeface="DejaVu Sans Mono"/>
+              </a:defRPr>
+            </a:pPr>
+            <a:r>
+              <a:t>https://docs.ros.org/en/jazzy/Tutorials/Beginner-CLI-Tools/Recording-And-Playing-Back-Data/Recording-And-Playing-Back-Data.html</a:t>
+            </a:r>
+          </a:p>
+        </p:txBody>
+      </p:sp>
+    </p:spTree>
+  </p:cSld>
+  <p:clrMapOvr>
+    <a:masterClrMapping/>
+  </p:clrMapOvr>
+</p:sld>
+</file>
+
 <file path=ppt/slides/slide4.xml><?xml version="1.0" encoding="utf-8"?>
 <p:sld xmlns:a="http://schemas.openxmlformats.org/drawingml/2006/main" xmlns:p="http://schemas.openxmlformats.org/presentationml/2006/main" xmlns:r="http://schemas.openxmlformats.org/officeDocument/2006/relationships">
   <p:cSld>
@@ -15485,7 +18100,7 @@
               </a:defRPr>
             </a:pPr>
             <a:r>
-              <a:t>시뮬레이션 시간을 설정한다</a:t>
+              <a:t>코드/설정이 실제로 만드는 것 (1/2)</a:t>
             </a:r>
           </a:p>
         </p:txBody>
@@ -15524,7 +18139,7 @@
               </a:defRPr>
             </a:pPr>
             <a:r>
-              <a:t>한 장에는 한 행동만 수행합니다.</a:t>
+              <a:t>파일을 입력하기 전에 ‘무엇을 만들고 어디서 볼지’를 먼저 연결합니다.</a:t>
             </a:r>
           </a:p>
         </p:txBody>
@@ -15660,109 +18275,31 @@
               </a:defRPr>
             </a:pPr>
             <a:r>
-              <a:t>현재 단계 1/2    |    현재 폴더 ~/ros2_curri/agv_ws    |    현재 터미널</a:t>
-            </a:r>
-          </a:p>
-        </p:txBody>
-      </p:sp>
-      <p:sp>
-        <p:nvSpPr>
-          <p:cNvPr id="7" name="TextBox 6"/>
-          <p:cNvSpPr txBox="1"/>
-          <p:nvPr/>
-        </p:nvSpPr>
-        <p:spPr>
-          <a:xfrm>
-            <a:off x="676656" y="1764792"/>
-            <a:ext cx="1828800" cy="347472"/>
-          </a:xfrm>
-          <a:prstGeom prst="rect">
-            <a:avLst/>
-          </a:prstGeom>
-          <a:noFill/>
-        </p:spPr>
-        <p:txBody>
-          <a:bodyPr wrap="square" lIns="73152" rIns="73152" tIns="36576" bIns="36576">
-            <a:spAutoFit/>
-          </a:bodyPr>
-          <a:lstStyle/>
-          <a:p>
-            <a:pPr algn="l">
-              <a:spcAft>
-                <a:spcPts val="0"/>
-              </a:spcAft>
-              <a:defRPr sz="1800" b="1">
-                <a:solidFill>
-                  <a:srgbClr val="225B9B"/>
-                </a:solidFill>
-                <a:latin typeface="Noto Sans CJK KR"/>
-              </a:defRPr>
-            </a:pPr>
-            <a:r>
-              <a:t>왜 하는가</a:t>
-            </a:r>
-          </a:p>
-        </p:txBody>
-      </p:sp>
-      <p:sp>
-        <p:nvSpPr>
-          <p:cNvPr id="8" name="TextBox 7"/>
-          <p:cNvSpPr txBox="1"/>
-          <p:nvPr/>
-        </p:nvSpPr>
-        <p:spPr>
-          <a:xfrm>
-            <a:off x="676656" y="2103120"/>
-            <a:ext cx="10789920" cy="512064"/>
-          </a:xfrm>
-          <a:prstGeom prst="rect">
-            <a:avLst/>
-          </a:prstGeom>
-          <a:noFill/>
-        </p:spPr>
-        <p:txBody>
-          <a:bodyPr wrap="square" lIns="73152" rIns="73152" tIns="36576" bIns="36576">
-            <a:spAutoFit/>
-          </a:bodyPr>
-          <a:lstStyle/>
-          <a:p>
-            <a:pPr algn="l">
-              <a:spcAft>
-                <a:spcPts val="0"/>
-              </a:spcAft>
-              <a:defRPr sz="2000" b="0">
-                <a:solidFill>
-                  <a:srgbClr val="122C4E"/>
-                </a:solidFill>
-                <a:latin typeface="Noto Sans CJK KR"/>
-              </a:defRPr>
-            </a:pPr>
-            <a:r>
-              <a:t>Gazebo /clock을 안 쓰면 sensor timestamp와 node 시간이 어긋날 수 있다.</a:t>
-            </a:r>
-          </a:p>
-        </p:txBody>
-      </p:sp>
-      <p:sp>
-        <p:nvSpPr>
-          <p:cNvPr id="9" name="Rounded Rectangle 8"/>
+              <a:t>현재 단계 파일 역할    |    현재 폴더 ~/ros2_curri/agv_ws    |    현재 터미널</a:t>
+            </a:r>
+          </a:p>
+        </p:txBody>
+      </p:sp>
+      <p:sp>
+        <p:nvSpPr>
+          <p:cNvPr id="7" name="Rounded Rectangle 6"/>
           <p:cNvSpPr/>
           <p:nvPr/>
         </p:nvSpPr>
         <p:spPr>
           <a:xfrm>
-            <a:off x="676656" y="2871216"/>
-            <a:ext cx="10835640" cy="2331720"/>
+            <a:off x="640080" y="1627632"/>
+            <a:ext cx="10972800" cy="2048256"/>
           </a:xfrm>
           <a:prstGeom prst="roundRect">
             <a:avLst/>
           </a:prstGeom>
           <a:solidFill>
-            <a:srgbClr val="1D232D"/>
+            <a:srgbClr val="F4F7FB"/>
           </a:solidFill>
           <a:ln>
             <a:solidFill>
-              <a:srgbClr val="1D232D"/>
+              <a:srgbClr val="CCDBEB"/>
             </a:solidFill>
           </a:ln>
         </p:spPr>
@@ -15781,57 +18318,401 @@
           </a:fontRef>
         </p:style>
         <p:txBody>
-          <a:bodyPr rtlCol="0" anchor="ctr" wrap="square" lIns="73152" rIns="73152" tIns="36576" bIns="36576"/>
-          <a:lstStyle/>
-          <a:p>
-            <a:pPr algn="l">
-              <a:spcAft>
-                <a:spcPts val="0"/>
-              </a:spcAft>
-              <a:defRPr sz="1600" b="0">
-                <a:solidFill>
-                  <a:srgbClr val="FFFFFF"/>
+          <a:bodyPr rtlCol="0" anchor="ctr"/>
+          <a:lstStyle/>
+          <a:p>
+            <a:pPr algn="ctr"/>
+          </a:p>
+        </p:txBody>
+      </p:sp>
+      <p:sp>
+        <p:nvSpPr>
+          <p:cNvPr id="8" name="TextBox 7"/>
+          <p:cNvSpPr txBox="1"/>
+          <p:nvPr/>
+        </p:nvSpPr>
+        <p:spPr>
+          <a:xfrm>
+            <a:off x="850392" y="1764792"/>
+            <a:ext cx="10424160" cy="256032"/>
+          </a:xfrm>
+          <a:prstGeom prst="rect">
+            <a:avLst/>
+          </a:prstGeom>
+          <a:noFill/>
+        </p:spPr>
+        <p:txBody>
+          <a:bodyPr wrap="square" lIns="73152" rIns="73152" tIns="36576" bIns="36576">
+            <a:spAutoFit/>
+          </a:bodyPr>
+          <a:lstStyle/>
+          <a:p>
+            <a:pPr algn="l">
+              <a:spcAft>
+                <a:spcPts val="0"/>
+              </a:spcAft>
+              <a:defRPr sz="1300" b="1">
+                <a:solidFill>
+                  <a:srgbClr val="225B9B"/>
                 </a:solidFill>
                 <a:latin typeface="DejaVu Sans Mono"/>
               </a:defRPr>
             </a:pPr>
             <a:r>
-              <a:t>ros2 param get /lidar_processor use_sim_time</a:t>
+              <a:t>~/ros2_curri/agv_ws/src/agv_bringup/config/sensors.yaml</a:t>
+            </a:r>
+          </a:p>
+        </p:txBody>
+      </p:sp>
+      <p:sp>
+        <p:nvSpPr>
+          <p:cNvPr id="9" name="TextBox 8"/>
+          <p:cNvSpPr txBox="1"/>
+          <p:nvPr/>
+        </p:nvSpPr>
+        <p:spPr>
+          <a:xfrm>
+            <a:off x="868680" y="2130552"/>
+            <a:ext cx="1234440" cy="228600"/>
+          </a:xfrm>
+          <a:prstGeom prst="rect">
+            <a:avLst/>
+          </a:prstGeom>
+          <a:noFill/>
+        </p:spPr>
+        <p:txBody>
+          <a:bodyPr wrap="square" lIns="73152" rIns="73152" tIns="36576" bIns="36576">
+            <a:spAutoFit/>
+          </a:bodyPr>
+          <a:lstStyle/>
+          <a:p>
+            <a:pPr algn="l">
+              <a:spcAft>
+                <a:spcPts val="0"/>
+              </a:spcAft>
+              <a:defRPr sz="1500" b="1">
+                <a:solidFill>
+                  <a:srgbClr val="2A8B5A"/>
+                </a:solidFill>
+                <a:latin typeface="Noto Sans CJK KR"/>
+              </a:defRPr>
+            </a:pPr>
+            <a:r>
+              <a:t>만드는 것</a:t>
+            </a:r>
+          </a:p>
+        </p:txBody>
+      </p:sp>
+      <p:sp>
+        <p:nvSpPr>
+          <p:cNvPr id="10" name="TextBox 9"/>
+          <p:cNvSpPr txBox="1"/>
+          <p:nvPr/>
+        </p:nvSpPr>
+        <p:spPr>
+          <a:xfrm>
+            <a:off x="1975104" y="2112264"/>
+            <a:ext cx="9189720" cy="274320"/>
+          </a:xfrm>
+          <a:prstGeom prst="rect">
+            <a:avLst/>
+          </a:prstGeom>
+          <a:noFill/>
+        </p:spPr>
+        <p:txBody>
+          <a:bodyPr wrap="square" lIns="73152" rIns="73152" tIns="36576" bIns="36576">
+            <a:spAutoFit/>
+          </a:bodyPr>
+          <a:lstStyle/>
+          <a:p>
+            <a:pPr algn="l">
+              <a:spcAft>
+                <a:spcPts val="0"/>
+              </a:spcAft>
+              <a:defRPr sz="1500" b="0">
+                <a:solidFill>
+                  <a:srgbClr val="122C4E"/>
+                </a:solidFill>
+                <a:latin typeface="Noto Sans CJK KR"/>
+              </a:defRPr>
+            </a:pPr>
+            <a:r>
+              <a:t>센서 처리 노드가 공통으로 사용할 use_sim_time 등 실행 파라미터</a:t>
+            </a:r>
+          </a:p>
+        </p:txBody>
+      </p:sp>
+      <p:sp>
+        <p:nvSpPr>
+          <p:cNvPr id="11" name="TextBox 10"/>
+          <p:cNvSpPr txBox="1"/>
+          <p:nvPr/>
+        </p:nvSpPr>
+        <p:spPr>
+          <a:xfrm>
+            <a:off x="868680" y="2505456"/>
+            <a:ext cx="1234440" cy="228600"/>
+          </a:xfrm>
+          <a:prstGeom prst="rect">
+            <a:avLst/>
+          </a:prstGeom>
+          <a:noFill/>
+        </p:spPr>
+        <p:txBody>
+          <a:bodyPr wrap="square" lIns="73152" rIns="73152" tIns="36576" bIns="36576">
+            <a:spAutoFit/>
+          </a:bodyPr>
+          <a:lstStyle/>
+          <a:p>
+            <a:pPr algn="l">
+              <a:spcAft>
+                <a:spcPts val="0"/>
+              </a:spcAft>
+              <a:defRPr sz="1500" b="1">
+                <a:solidFill>
+                  <a:srgbClr val="DB7E22"/>
+                </a:solidFill>
+                <a:latin typeface="Noto Sans CJK KR"/>
+              </a:defRPr>
+            </a:pPr>
+            <a:r>
+              <a:t>코드 읽기</a:t>
+            </a:r>
+          </a:p>
+        </p:txBody>
+      </p:sp>
+      <p:sp>
+        <p:nvSpPr>
+          <p:cNvPr id="12" name="TextBox 11"/>
+          <p:cNvSpPr txBox="1"/>
+          <p:nvPr/>
+        </p:nvSpPr>
+        <p:spPr>
+          <a:xfrm>
+            <a:off x="1975104" y="2487168"/>
+            <a:ext cx="9189720" cy="301752"/>
+          </a:xfrm>
+          <a:prstGeom prst="rect">
+            <a:avLst/>
+          </a:prstGeom>
+          <a:noFill/>
+        </p:spPr>
+        <p:txBody>
+          <a:bodyPr wrap="square" lIns="73152" rIns="73152" tIns="36576" bIns="36576">
+            <a:spAutoFit/>
+          </a:bodyPr>
+          <a:lstStyle/>
+          <a:p>
+            <a:pPr algn="l">
+              <a:spcAft>
+                <a:spcPts val="0"/>
+              </a:spcAft>
+              <a:defRPr sz="1400" b="0">
+                <a:solidFill>
+                  <a:srgbClr val="122C4E"/>
+                </a:solidFill>
+                <a:latin typeface="Noto Sans CJK KR"/>
+              </a:defRPr>
+            </a:pPr>
+            <a:r>
+              <a:t>노드 이름 아래 parameter와 값의 단위를 확인한다.</a:t>
+            </a:r>
+          </a:p>
+        </p:txBody>
+      </p:sp>
+      <p:sp>
+        <p:nvSpPr>
+          <p:cNvPr id="13" name="TextBox 12"/>
+          <p:cNvSpPr txBox="1"/>
+          <p:nvPr/>
+        </p:nvSpPr>
+        <p:spPr>
+          <a:xfrm>
+            <a:off x="868680" y="2889504"/>
+            <a:ext cx="1234440" cy="228600"/>
+          </a:xfrm>
+          <a:prstGeom prst="rect">
+            <a:avLst/>
+          </a:prstGeom>
+          <a:noFill/>
+        </p:spPr>
+        <p:txBody>
+          <a:bodyPr wrap="square" lIns="73152" rIns="73152" tIns="36576" bIns="36576">
+            <a:spAutoFit/>
+          </a:bodyPr>
+          <a:lstStyle/>
+          <a:p>
+            <a:pPr algn="l">
+              <a:spcAft>
+                <a:spcPts val="0"/>
+              </a:spcAft>
+              <a:defRPr sz="1500" b="1">
+                <a:solidFill>
+                  <a:srgbClr val="225B9B"/>
+                </a:solidFill>
+                <a:latin typeface="Noto Sans CJK KR"/>
+              </a:defRPr>
+            </a:pPr>
+            <a:r>
+              <a:t>사용/확인</a:t>
+            </a:r>
+          </a:p>
+        </p:txBody>
+      </p:sp>
+      <p:sp>
+        <p:nvSpPr>
+          <p:cNvPr id="14" name="TextBox 13"/>
+          <p:cNvSpPr txBox="1"/>
+          <p:nvPr/>
+        </p:nvSpPr>
+        <p:spPr>
+          <a:xfrm>
+            <a:off x="1975104" y="2871216"/>
+            <a:ext cx="9189720" cy="512064"/>
+          </a:xfrm>
+          <a:prstGeom prst="rect">
+            <a:avLst/>
+          </a:prstGeom>
+          <a:noFill/>
+        </p:spPr>
+        <p:txBody>
+          <a:bodyPr wrap="square" lIns="73152" rIns="73152" tIns="36576" bIns="36576">
+            <a:spAutoFit/>
+          </a:bodyPr>
+          <a:lstStyle/>
+          <a:p>
+            <a:pPr algn="l">
+              <a:spcAft>
+                <a:spcPts val="0"/>
+              </a:spcAft>
+              <a:defRPr sz="1300" b="0">
+                <a:solidFill>
+                  <a:srgbClr val="122C4E"/>
+                </a:solidFill>
+                <a:latin typeface="Noto Sans CJK KR"/>
+              </a:defRPr>
+            </a:pPr>
+            <a:r>
+              <a:t>사용: launch가 YAML을 넘긴 뒤 ros2 param get으로 확인한다.</a:t>
             </a:r>
             <a:br/>
             <a:r>
-              <a:t>ros2 topic echo /clock --once</a:t>
-            </a:r>
-          </a:p>
-        </p:txBody>
-      </p:sp>
-      <p:sp>
-        <p:nvSpPr>
-          <p:cNvPr id="10" name="TextBox 9"/>
-          <p:cNvSpPr txBox="1"/>
-          <p:nvPr/>
-        </p:nvSpPr>
-        <p:spPr>
-          <a:xfrm>
-            <a:off x="768096" y="5468112"/>
-            <a:ext cx="1143000" cy="256032"/>
-          </a:xfrm>
-          <a:prstGeom prst="rect">
-            <a:avLst/>
-          </a:prstGeom>
-          <a:noFill/>
-        </p:spPr>
-        <p:txBody>
-          <a:bodyPr wrap="square" lIns="73152" rIns="73152" tIns="36576" bIns="36576">
-            <a:spAutoFit/>
-          </a:bodyPr>
-          <a:lstStyle/>
-          <a:p>
-            <a:pPr algn="l">
-              <a:spcAft>
-                <a:spcPts val="0"/>
-              </a:spcAft>
-              <a:defRPr sz="1800" b="1">
+              <a:t>화면/출력: /clock과 use_sim_time=true</a:t>
+            </a:r>
+          </a:p>
+        </p:txBody>
+      </p:sp>
+      <p:sp>
+        <p:nvSpPr>
+          <p:cNvPr id="15" name="Rounded Rectangle 14"/>
+          <p:cNvSpPr/>
+          <p:nvPr/>
+        </p:nvSpPr>
+        <p:spPr>
+          <a:xfrm>
+            <a:off x="640080" y="3941063"/>
+            <a:ext cx="10972800" cy="2048256"/>
+          </a:xfrm>
+          <a:prstGeom prst="roundRect">
+            <a:avLst/>
+          </a:prstGeom>
+          <a:solidFill>
+            <a:srgbClr val="F4F7FB"/>
+          </a:solidFill>
+          <a:ln>
+            <a:solidFill>
+              <a:srgbClr val="CCDBEB"/>
+            </a:solidFill>
+          </a:ln>
+        </p:spPr>
+        <p:style>
+          <a:lnRef idx="1">
+            <a:schemeClr val="accent1"/>
+          </a:lnRef>
+          <a:fillRef idx="3">
+            <a:schemeClr val="accent1"/>
+          </a:fillRef>
+          <a:effectRef idx="2">
+            <a:schemeClr val="accent1"/>
+          </a:effectRef>
+          <a:fontRef idx="minor">
+            <a:schemeClr val="lt1"/>
+          </a:fontRef>
+        </p:style>
+        <p:txBody>
+          <a:bodyPr rtlCol="0" anchor="ctr"/>
+          <a:lstStyle/>
+          <a:p>
+            <a:pPr algn="ctr"/>
+          </a:p>
+        </p:txBody>
+      </p:sp>
+      <p:sp>
+        <p:nvSpPr>
+          <p:cNvPr id="16" name="TextBox 15"/>
+          <p:cNvSpPr txBox="1"/>
+          <p:nvPr/>
+        </p:nvSpPr>
+        <p:spPr>
+          <a:xfrm>
+            <a:off x="850392" y="4078224"/>
+            <a:ext cx="10424160" cy="256032"/>
+          </a:xfrm>
+          <a:prstGeom prst="rect">
+            <a:avLst/>
+          </a:prstGeom>
+          <a:noFill/>
+        </p:spPr>
+        <p:txBody>
+          <a:bodyPr wrap="square" lIns="73152" rIns="73152" tIns="36576" bIns="36576">
+            <a:spAutoFit/>
+          </a:bodyPr>
+          <a:lstStyle/>
+          <a:p>
+            <a:pPr algn="l">
+              <a:spcAft>
+                <a:spcPts val="0"/>
+              </a:spcAft>
+              <a:defRPr sz="1300" b="1">
+                <a:solidFill>
+                  <a:srgbClr val="225B9B"/>
+                </a:solidFill>
+                <a:latin typeface="DejaVu Sans Mono"/>
+              </a:defRPr>
+            </a:pPr>
+            <a:r>
+              <a:t>~/ros2_curri/agv_ws/src/agv_gazebo/config/bridge.yaml</a:t>
+            </a:r>
+          </a:p>
+        </p:txBody>
+      </p:sp>
+      <p:sp>
+        <p:nvSpPr>
+          <p:cNvPr id="17" name="TextBox 16"/>
+          <p:cNvSpPr txBox="1"/>
+          <p:nvPr/>
+        </p:nvSpPr>
+        <p:spPr>
+          <a:xfrm>
+            <a:off x="868680" y="4443983"/>
+            <a:ext cx="1234440" cy="228600"/>
+          </a:xfrm>
+          <a:prstGeom prst="rect">
+            <a:avLst/>
+          </a:prstGeom>
+          <a:noFill/>
+        </p:spPr>
+        <p:txBody>
+          <a:bodyPr wrap="square" lIns="73152" rIns="73152" tIns="36576" bIns="36576">
+            <a:spAutoFit/>
+          </a:bodyPr>
+          <a:lstStyle/>
+          <a:p>
+            <a:pPr algn="l">
+              <a:spcAft>
+                <a:spcPts val="0"/>
+              </a:spcAft>
+              <a:defRPr sz="1500" b="1">
                 <a:solidFill>
                   <a:srgbClr val="2A8B5A"/>
                 </a:solidFill>
@@ -15839,38 +18720,38 @@
               </a:defRPr>
             </a:pPr>
             <a:r>
-              <a:t>확인</a:t>
-            </a:r>
-          </a:p>
-        </p:txBody>
-      </p:sp>
-      <p:sp>
-        <p:nvSpPr>
-          <p:cNvPr id="11" name="TextBox 10"/>
-          <p:cNvSpPr txBox="1"/>
-          <p:nvPr/>
-        </p:nvSpPr>
-        <p:spPr>
-          <a:xfrm>
-            <a:off x="768096" y="5742432"/>
-            <a:ext cx="10561320" cy="347472"/>
-          </a:xfrm>
-          <a:prstGeom prst="rect">
-            <a:avLst/>
-          </a:prstGeom>
-          <a:noFill/>
-        </p:spPr>
-        <p:txBody>
-          <a:bodyPr wrap="square" lIns="73152" rIns="73152" tIns="36576" bIns="36576">
-            <a:spAutoFit/>
-          </a:bodyPr>
-          <a:lstStyle/>
-          <a:p>
-            <a:pPr algn="l">
-              <a:spcAft>
-                <a:spcPts val="0"/>
-              </a:spcAft>
-              <a:defRPr sz="1800" b="0">
+              <a:t>만드는 것</a:t>
+            </a:r>
+          </a:p>
+        </p:txBody>
+      </p:sp>
+      <p:sp>
+        <p:nvSpPr>
+          <p:cNvPr id="18" name="TextBox 17"/>
+          <p:cNvSpPr txBox="1"/>
+          <p:nvPr/>
+        </p:nvSpPr>
+        <p:spPr>
+          <a:xfrm>
+            <a:off x="1975104" y="4425696"/>
+            <a:ext cx="9189720" cy="274320"/>
+          </a:xfrm>
+          <a:prstGeom prst="rect">
+            <a:avLst/>
+          </a:prstGeom>
+          <a:noFill/>
+        </p:spPr>
+        <p:txBody>
+          <a:bodyPr wrap="square" lIns="73152" rIns="73152" tIns="36576" bIns="36576">
+            <a:spAutoFit/>
+          </a:bodyPr>
+          <a:lstStyle/>
+          <a:p>
+            <a:pPr algn="l">
+              <a:spcAft>
+                <a:spcPts val="0"/>
+              </a:spcAft>
+              <a:defRPr sz="1500" b="0">
                 <a:solidFill>
                   <a:srgbClr val="122C4E"/>
                 </a:solidFill>
@@ -15878,7 +18759,167 @@
               </a:defRPr>
             </a:pPr>
             <a:r>
-              <a:t>명령의 출력에서 topic·frame·파일 이름 또는 성공 메시지를 찾으면 이 단계가 완료됩니다.</a:t>
+              <a:t>Gazebo Transport 메시지와 ROS 2 topic을 방향별로 연결하는 번역표</a:t>
+            </a:r>
+          </a:p>
+        </p:txBody>
+      </p:sp>
+      <p:sp>
+        <p:nvSpPr>
+          <p:cNvPr id="19" name="TextBox 18"/>
+          <p:cNvSpPr txBox="1"/>
+          <p:nvPr/>
+        </p:nvSpPr>
+        <p:spPr>
+          <a:xfrm>
+            <a:off x="868680" y="4818888"/>
+            <a:ext cx="1234440" cy="228600"/>
+          </a:xfrm>
+          <a:prstGeom prst="rect">
+            <a:avLst/>
+          </a:prstGeom>
+          <a:noFill/>
+        </p:spPr>
+        <p:txBody>
+          <a:bodyPr wrap="square" lIns="73152" rIns="73152" tIns="36576" bIns="36576">
+            <a:spAutoFit/>
+          </a:bodyPr>
+          <a:lstStyle/>
+          <a:p>
+            <a:pPr algn="l">
+              <a:spcAft>
+                <a:spcPts val="0"/>
+              </a:spcAft>
+              <a:defRPr sz="1500" b="1">
+                <a:solidFill>
+                  <a:srgbClr val="DB7E22"/>
+                </a:solidFill>
+                <a:latin typeface="Noto Sans CJK KR"/>
+              </a:defRPr>
+            </a:pPr>
+            <a:r>
+              <a:t>코드 읽기</a:t>
+            </a:r>
+          </a:p>
+        </p:txBody>
+      </p:sp>
+      <p:sp>
+        <p:nvSpPr>
+          <p:cNvPr id="20" name="TextBox 19"/>
+          <p:cNvSpPr txBox="1"/>
+          <p:nvPr/>
+        </p:nvSpPr>
+        <p:spPr>
+          <a:xfrm>
+            <a:off x="1975104" y="4800600"/>
+            <a:ext cx="9189720" cy="301752"/>
+          </a:xfrm>
+          <a:prstGeom prst="rect">
+            <a:avLst/>
+          </a:prstGeom>
+          <a:noFill/>
+        </p:spPr>
+        <p:txBody>
+          <a:bodyPr wrap="square" lIns="73152" rIns="73152" tIns="36576" bIns="36576">
+            <a:spAutoFit/>
+          </a:bodyPr>
+          <a:lstStyle/>
+          <a:p>
+            <a:pPr algn="l">
+              <a:spcAft>
+                <a:spcPts val="0"/>
+              </a:spcAft>
+              <a:defRPr sz="1400" b="0">
+                <a:solidFill>
+                  <a:srgbClr val="122C4E"/>
+                </a:solidFill>
+                <a:latin typeface="Noto Sans CJK KR"/>
+              </a:defRPr>
+            </a:pPr>
+            <a:r>
+              <a:t>한 항목에서 ros_topic_name → type → direction을 세 줄씩 비교한다.</a:t>
+            </a:r>
+          </a:p>
+        </p:txBody>
+      </p:sp>
+      <p:sp>
+        <p:nvSpPr>
+          <p:cNvPr id="21" name="TextBox 20"/>
+          <p:cNvSpPr txBox="1"/>
+          <p:nvPr/>
+        </p:nvSpPr>
+        <p:spPr>
+          <a:xfrm>
+            <a:off x="868680" y="5202936"/>
+            <a:ext cx="1234440" cy="228600"/>
+          </a:xfrm>
+          <a:prstGeom prst="rect">
+            <a:avLst/>
+          </a:prstGeom>
+          <a:noFill/>
+        </p:spPr>
+        <p:txBody>
+          <a:bodyPr wrap="square" lIns="73152" rIns="73152" tIns="36576" bIns="36576">
+            <a:spAutoFit/>
+          </a:bodyPr>
+          <a:lstStyle/>
+          <a:p>
+            <a:pPr algn="l">
+              <a:spcAft>
+                <a:spcPts val="0"/>
+              </a:spcAft>
+              <a:defRPr sz="1500" b="1">
+                <a:solidFill>
+                  <a:srgbClr val="225B9B"/>
+                </a:solidFill>
+                <a:latin typeface="Noto Sans CJK KR"/>
+              </a:defRPr>
+            </a:pPr>
+            <a:r>
+              <a:t>사용/확인</a:t>
+            </a:r>
+          </a:p>
+        </p:txBody>
+      </p:sp>
+      <p:sp>
+        <p:nvSpPr>
+          <p:cNvPr id="22" name="TextBox 21"/>
+          <p:cNvSpPr txBox="1"/>
+          <p:nvPr/>
+        </p:nvSpPr>
+        <p:spPr>
+          <a:xfrm>
+            <a:off x="1975104" y="5184648"/>
+            <a:ext cx="9189720" cy="512064"/>
+          </a:xfrm>
+          <a:prstGeom prst="rect">
+            <a:avLst/>
+          </a:prstGeom>
+          <a:noFill/>
+        </p:spPr>
+        <p:txBody>
+          <a:bodyPr wrap="square" lIns="73152" rIns="73152" tIns="36576" bIns="36576">
+            <a:spAutoFit/>
+          </a:bodyPr>
+          <a:lstStyle/>
+          <a:p>
+            <a:pPr algn="l">
+              <a:spcAft>
+                <a:spcPts val="0"/>
+              </a:spcAft>
+              <a:defRPr sz="1300" b="0">
+                <a:solidFill>
+                  <a:srgbClr val="122C4E"/>
+                </a:solidFill>
+                <a:latin typeface="Noto Sans CJK KR"/>
+              </a:defRPr>
+            </a:pPr>
+            <a:r>
+              <a:t>사용: parameter_bridge가 이 YAML을 읽도록 launch한다.</a:t>
+            </a:r>
+            <a:br/>
+            <a:r>
+              <a:t>화면/출력: ros2 topic info에서 보이는 type과 publisher 수</a:t>
             </a:r>
           </a:p>
         </p:txBody>
@@ -15935,7 +18976,7 @@
               </a:defRPr>
             </a:pPr>
             <a:r>
-              <a:t>rate와 QoS를 점검한다</a:t>
+              <a:t>코드/설정이 실제로 만드는 것 (2/2)</a:t>
             </a:r>
           </a:p>
         </p:txBody>
@@ -15974,7 +19015,7 @@
               </a:defRPr>
             </a:pPr>
             <a:r>
-              <a:t>한 장에는 한 행동만 수행합니다.</a:t>
+              <a:t>파일을 입력하기 전에 ‘무엇을 만들고 어디서 볼지’를 먼저 연결합니다.</a:t>
             </a:r>
           </a:p>
         </p:txBody>
@@ -16110,109 +19151,31 @@
               </a:defRPr>
             </a:pPr>
             <a:r>
-              <a:t>현재 단계 2/2    |    현재 폴더 ~/ros2_curri/agv_ws    |    현재 터미널</a:t>
-            </a:r>
-          </a:p>
-        </p:txBody>
-      </p:sp>
-      <p:sp>
-        <p:nvSpPr>
-          <p:cNvPr id="7" name="TextBox 6"/>
-          <p:cNvSpPr txBox="1"/>
-          <p:nvPr/>
-        </p:nvSpPr>
-        <p:spPr>
-          <a:xfrm>
-            <a:off x="676656" y="1764792"/>
-            <a:ext cx="1828800" cy="347472"/>
-          </a:xfrm>
-          <a:prstGeom prst="rect">
-            <a:avLst/>
-          </a:prstGeom>
-          <a:noFill/>
-        </p:spPr>
-        <p:txBody>
-          <a:bodyPr wrap="square" lIns="73152" rIns="73152" tIns="36576" bIns="36576">
-            <a:spAutoFit/>
-          </a:bodyPr>
-          <a:lstStyle/>
-          <a:p>
-            <a:pPr algn="l">
-              <a:spcAft>
-                <a:spcPts val="0"/>
-              </a:spcAft>
-              <a:defRPr sz="1800" b="1">
-                <a:solidFill>
-                  <a:srgbClr val="225B9B"/>
-                </a:solidFill>
-                <a:latin typeface="Noto Sans CJK KR"/>
-              </a:defRPr>
-            </a:pPr>
-            <a:r>
-              <a:t>왜 하는가</a:t>
-            </a:r>
-          </a:p>
-        </p:txBody>
-      </p:sp>
-      <p:sp>
-        <p:nvSpPr>
-          <p:cNvPr id="8" name="TextBox 7"/>
-          <p:cNvSpPr txBox="1"/>
-          <p:nvPr/>
-        </p:nvSpPr>
-        <p:spPr>
-          <a:xfrm>
-            <a:off x="676656" y="2103120"/>
-            <a:ext cx="10789920" cy="512064"/>
-          </a:xfrm>
-          <a:prstGeom prst="rect">
-            <a:avLst/>
-          </a:prstGeom>
-          <a:noFill/>
-        </p:spPr>
-        <p:txBody>
-          <a:bodyPr wrap="square" lIns="73152" rIns="73152" tIns="36576" bIns="36576">
-            <a:spAutoFit/>
-          </a:bodyPr>
-          <a:lstStyle/>
-          <a:p>
-            <a:pPr algn="l">
-              <a:spcAft>
-                <a:spcPts val="0"/>
-              </a:spcAft>
-              <a:defRPr sz="2000" b="0">
-                <a:solidFill>
-                  <a:srgbClr val="122C4E"/>
-                </a:solidFill>
-                <a:latin typeface="Noto Sans CJK KR"/>
-              </a:defRPr>
-            </a:pPr>
-            <a:r>
-              <a:t>topic이 있어도 QoS가 호환되지 않으면 callback이 받지 못할 수 있다.</a:t>
-            </a:r>
-          </a:p>
-        </p:txBody>
-      </p:sp>
-      <p:sp>
-        <p:nvSpPr>
-          <p:cNvPr id="9" name="Rounded Rectangle 8"/>
+              <a:t>현재 단계 파일 역할    |    현재 폴더 ~/ros2_curri/agv_ws    |    현재 터미널</a:t>
+            </a:r>
+          </a:p>
+        </p:txBody>
+      </p:sp>
+      <p:sp>
+        <p:nvSpPr>
+          <p:cNvPr id="7" name="Rounded Rectangle 6"/>
           <p:cNvSpPr/>
           <p:nvPr/>
         </p:nvSpPr>
         <p:spPr>
           <a:xfrm>
-            <a:off x="676656" y="2871216"/>
-            <a:ext cx="10835640" cy="2331720"/>
+            <a:off x="640080" y="1627632"/>
+            <a:ext cx="10972800" cy="2048256"/>
           </a:xfrm>
           <a:prstGeom prst="roundRect">
             <a:avLst/>
           </a:prstGeom>
           <a:solidFill>
-            <a:srgbClr val="1D232D"/>
+            <a:srgbClr val="F4F7FB"/>
           </a:solidFill>
           <a:ln>
             <a:solidFill>
-              <a:srgbClr val="1D232D"/>
+              <a:srgbClr val="CCDBEB"/>
             </a:solidFill>
           </a:ln>
         </p:spPr>
@@ -16231,108 +19194,608 @@
           </a:fontRef>
         </p:style>
         <p:txBody>
-          <a:bodyPr rtlCol="0" anchor="ctr" wrap="square" lIns="73152" rIns="73152" tIns="36576" bIns="36576"/>
-          <a:lstStyle/>
-          <a:p>
-            <a:pPr algn="l">
-              <a:spcAft>
-                <a:spcPts val="0"/>
-              </a:spcAft>
-              <a:defRPr sz="1600" b="0">
-                <a:solidFill>
-                  <a:srgbClr val="FFFFFF"/>
+          <a:bodyPr rtlCol="0" anchor="ctr"/>
+          <a:lstStyle/>
+          <a:p>
+            <a:pPr algn="ctr"/>
+          </a:p>
+        </p:txBody>
+      </p:sp>
+      <p:sp>
+        <p:nvSpPr>
+          <p:cNvPr id="8" name="TextBox 7"/>
+          <p:cNvSpPr txBox="1"/>
+          <p:nvPr/>
+        </p:nvSpPr>
+        <p:spPr>
+          <a:xfrm>
+            <a:off x="850392" y="1764792"/>
+            <a:ext cx="10424160" cy="256032"/>
+          </a:xfrm>
+          <a:prstGeom prst="rect">
+            <a:avLst/>
+          </a:prstGeom>
+          <a:noFill/>
+        </p:spPr>
+        <p:txBody>
+          <a:bodyPr wrap="square" lIns="73152" rIns="73152" tIns="36576" bIns="36576">
+            <a:spAutoFit/>
+          </a:bodyPr>
+          <a:lstStyle/>
+          <a:p>
+            <a:pPr algn="l">
+              <a:spcAft>
+                <a:spcPts val="0"/>
+              </a:spcAft>
+              <a:defRPr sz="1300" b="1">
+                <a:solidFill>
+                  <a:srgbClr val="225B9B"/>
                 </a:solidFill>
                 <a:latin typeface="DejaVu Sans Mono"/>
               </a:defRPr>
             </a:pPr>
             <a:r>
-              <a:t>ros2 topic hz /scan</a:t>
+              <a:t>~/ros2_curri/agv_ws/src/agv_sensors/agv_sensors/lidar_processor.py</a:t>
+            </a:r>
+          </a:p>
+        </p:txBody>
+      </p:sp>
+      <p:sp>
+        <p:nvSpPr>
+          <p:cNvPr id="9" name="TextBox 8"/>
+          <p:cNvSpPr txBox="1"/>
+          <p:nvPr/>
+        </p:nvSpPr>
+        <p:spPr>
+          <a:xfrm>
+            <a:off x="868680" y="2130552"/>
+            <a:ext cx="1234440" cy="228600"/>
+          </a:xfrm>
+          <a:prstGeom prst="rect">
+            <a:avLst/>
+          </a:prstGeom>
+          <a:noFill/>
+        </p:spPr>
+        <p:txBody>
+          <a:bodyPr wrap="square" lIns="73152" rIns="73152" tIns="36576" bIns="36576">
+            <a:spAutoFit/>
+          </a:bodyPr>
+          <a:lstStyle/>
+          <a:p>
+            <a:pPr algn="l">
+              <a:spcAft>
+                <a:spcPts val="0"/>
+              </a:spcAft>
+              <a:defRPr sz="1500" b="1">
+                <a:solidFill>
+                  <a:srgbClr val="2A8B5A"/>
+                </a:solidFill>
+                <a:latin typeface="Noto Sans CJK KR"/>
+              </a:defRPr>
+            </a:pPr>
+            <a:r>
+              <a:t>만드는 것</a:t>
+            </a:r>
+          </a:p>
+        </p:txBody>
+      </p:sp>
+      <p:sp>
+        <p:nvSpPr>
+          <p:cNvPr id="10" name="TextBox 9"/>
+          <p:cNvSpPr txBox="1"/>
+          <p:nvPr/>
+        </p:nvSpPr>
+        <p:spPr>
+          <a:xfrm>
+            <a:off x="1975104" y="2112264"/>
+            <a:ext cx="9189720" cy="274320"/>
+          </a:xfrm>
+          <a:prstGeom prst="rect">
+            <a:avLst/>
+          </a:prstGeom>
+          <a:noFill/>
+        </p:spPr>
+        <p:txBody>
+          <a:bodyPr wrap="square" lIns="73152" rIns="73152" tIns="36576" bIns="36576">
+            <a:spAutoFit/>
+          </a:bodyPr>
+          <a:lstStyle/>
+          <a:p>
+            <a:pPr algn="l">
+              <a:spcAft>
+                <a:spcPts val="0"/>
+              </a:spcAft>
+              <a:defRPr sz="1500" b="0">
+                <a:solidFill>
+                  <a:srgbClr val="122C4E"/>
+                </a:solidFill>
+                <a:latin typeface="Noto Sans CJK KR"/>
+              </a:defRPr>
+            </a:pPr>
+            <a:r>
+              <a:t>LaserScan의 전방 sector에서 유효 거리 최소값을 계산하는 안전 입력 노드</a:t>
+            </a:r>
+          </a:p>
+        </p:txBody>
+      </p:sp>
+      <p:sp>
+        <p:nvSpPr>
+          <p:cNvPr id="11" name="TextBox 10"/>
+          <p:cNvSpPr txBox="1"/>
+          <p:nvPr/>
+        </p:nvSpPr>
+        <p:spPr>
+          <a:xfrm>
+            <a:off x="868680" y="2505456"/>
+            <a:ext cx="1234440" cy="228600"/>
+          </a:xfrm>
+          <a:prstGeom prst="rect">
+            <a:avLst/>
+          </a:prstGeom>
+          <a:noFill/>
+        </p:spPr>
+        <p:txBody>
+          <a:bodyPr wrap="square" lIns="73152" rIns="73152" tIns="36576" bIns="36576">
+            <a:spAutoFit/>
+          </a:bodyPr>
+          <a:lstStyle/>
+          <a:p>
+            <a:pPr algn="l">
+              <a:spcAft>
+                <a:spcPts val="0"/>
+              </a:spcAft>
+              <a:defRPr sz="1500" b="1">
+                <a:solidFill>
+                  <a:srgbClr val="DB7E22"/>
+                </a:solidFill>
+                <a:latin typeface="Noto Sans CJK KR"/>
+              </a:defRPr>
+            </a:pPr>
+            <a:r>
+              <a:t>코드 읽기</a:t>
+            </a:r>
+          </a:p>
+        </p:txBody>
+      </p:sp>
+      <p:sp>
+        <p:nvSpPr>
+          <p:cNvPr id="12" name="TextBox 11"/>
+          <p:cNvSpPr txBox="1"/>
+          <p:nvPr/>
+        </p:nvSpPr>
+        <p:spPr>
+          <a:xfrm>
+            <a:off x="1975104" y="2487168"/>
+            <a:ext cx="9189720" cy="301752"/>
+          </a:xfrm>
+          <a:prstGeom prst="rect">
+            <a:avLst/>
+          </a:prstGeom>
+          <a:noFill/>
+        </p:spPr>
+        <p:txBody>
+          <a:bodyPr wrap="square" lIns="73152" rIns="73152" tIns="36576" bIns="36576">
+            <a:spAutoFit/>
+          </a:bodyPr>
+          <a:lstStyle/>
+          <a:p>
+            <a:pPr algn="l">
+              <a:spcAft>
+                <a:spcPts val="0"/>
+              </a:spcAft>
+              <a:defRPr sz="1400" b="0">
+                <a:solidFill>
+                  <a:srgbClr val="122C4E"/>
+                </a:solidFill>
+                <a:latin typeface="Noto Sans CJK KR"/>
+              </a:defRPr>
+            </a:pPr>
+            <a:r>
+              <a:t>ranges 필터 → 각도 index → minimum → /obstacle_distance publish 순서로 읽는다.</a:t>
+            </a:r>
+          </a:p>
+        </p:txBody>
+      </p:sp>
+      <p:sp>
+        <p:nvSpPr>
+          <p:cNvPr id="13" name="TextBox 12"/>
+          <p:cNvSpPr txBox="1"/>
+          <p:nvPr/>
+        </p:nvSpPr>
+        <p:spPr>
+          <a:xfrm>
+            <a:off x="868680" y="2889504"/>
+            <a:ext cx="1234440" cy="228600"/>
+          </a:xfrm>
+          <a:prstGeom prst="rect">
+            <a:avLst/>
+          </a:prstGeom>
+          <a:noFill/>
+        </p:spPr>
+        <p:txBody>
+          <a:bodyPr wrap="square" lIns="73152" rIns="73152" tIns="36576" bIns="36576">
+            <a:spAutoFit/>
+          </a:bodyPr>
+          <a:lstStyle/>
+          <a:p>
+            <a:pPr algn="l">
+              <a:spcAft>
+                <a:spcPts val="0"/>
+              </a:spcAft>
+              <a:defRPr sz="1500" b="1">
+                <a:solidFill>
+                  <a:srgbClr val="225B9B"/>
+                </a:solidFill>
+                <a:latin typeface="Noto Sans CJK KR"/>
+              </a:defRPr>
+            </a:pPr>
+            <a:r>
+              <a:t>사용/확인</a:t>
+            </a:r>
+          </a:p>
+        </p:txBody>
+      </p:sp>
+      <p:sp>
+        <p:nvSpPr>
+          <p:cNvPr id="14" name="TextBox 13"/>
+          <p:cNvSpPr txBox="1"/>
+          <p:nvPr/>
+        </p:nvSpPr>
+        <p:spPr>
+          <a:xfrm>
+            <a:off x="1975104" y="2871216"/>
+            <a:ext cx="9189720" cy="512064"/>
+          </a:xfrm>
+          <a:prstGeom prst="rect">
+            <a:avLst/>
+          </a:prstGeom>
+          <a:noFill/>
+        </p:spPr>
+        <p:txBody>
+          <a:bodyPr wrap="square" lIns="73152" rIns="73152" tIns="36576" bIns="36576">
+            <a:spAutoFit/>
+          </a:bodyPr>
+          <a:lstStyle/>
+          <a:p>
+            <a:pPr algn="l">
+              <a:spcAft>
+                <a:spcPts val="0"/>
+              </a:spcAft>
+              <a:defRPr sz="1300" b="0">
+                <a:solidFill>
+                  <a:srgbClr val="122C4E"/>
+                </a:solidFill>
+                <a:latin typeface="Noto Sans CJK KR"/>
+              </a:defRPr>
+            </a:pPr>
+            <a:r>
+              <a:t>사용: launch 뒤 /scan과 /obstacle_distance를 별 터미널에서 본다.</a:t>
             </a:r>
             <a:br/>
             <a:r>
-              <a:t>ros2 topic hz /imu/data</a:t>
+              <a:t>화면/출력: LiDAR terminal의 frame·range와 RViz LaserScan</a:t>
+            </a:r>
+          </a:p>
+        </p:txBody>
+      </p:sp>
+      <p:sp>
+        <p:nvSpPr>
+          <p:cNvPr id="15" name="Rounded Rectangle 14"/>
+          <p:cNvSpPr/>
+          <p:nvPr/>
+        </p:nvSpPr>
+        <p:spPr>
+          <a:xfrm>
+            <a:off x="640080" y="3941063"/>
+            <a:ext cx="10972800" cy="2048256"/>
+          </a:xfrm>
+          <a:prstGeom prst="roundRect">
+            <a:avLst/>
+          </a:prstGeom>
+          <a:solidFill>
+            <a:srgbClr val="F4F7FB"/>
+          </a:solidFill>
+          <a:ln>
+            <a:solidFill>
+              <a:srgbClr val="CCDBEB"/>
+            </a:solidFill>
+          </a:ln>
+        </p:spPr>
+        <p:style>
+          <a:lnRef idx="1">
+            <a:schemeClr val="accent1"/>
+          </a:lnRef>
+          <a:fillRef idx="3">
+            <a:schemeClr val="accent1"/>
+          </a:fillRef>
+          <a:effectRef idx="2">
+            <a:schemeClr val="accent1"/>
+          </a:effectRef>
+          <a:fontRef idx="minor">
+            <a:schemeClr val="lt1"/>
+          </a:fontRef>
+        </p:style>
+        <p:txBody>
+          <a:bodyPr rtlCol="0" anchor="ctr"/>
+          <a:lstStyle/>
+          <a:p>
+            <a:pPr algn="ctr"/>
+          </a:p>
+        </p:txBody>
+      </p:sp>
+      <p:sp>
+        <p:nvSpPr>
+          <p:cNvPr id="16" name="TextBox 15"/>
+          <p:cNvSpPr txBox="1"/>
+          <p:nvPr/>
+        </p:nvSpPr>
+        <p:spPr>
+          <a:xfrm>
+            <a:off x="850392" y="4078224"/>
+            <a:ext cx="10424160" cy="256032"/>
+          </a:xfrm>
+          <a:prstGeom prst="rect">
+            <a:avLst/>
+          </a:prstGeom>
+          <a:noFill/>
+        </p:spPr>
+        <p:txBody>
+          <a:bodyPr wrap="square" lIns="73152" rIns="73152" tIns="36576" bIns="36576">
+            <a:spAutoFit/>
+          </a:bodyPr>
+          <a:lstStyle/>
+          <a:p>
+            <a:pPr algn="l">
+              <a:spcAft>
+                <a:spcPts val="0"/>
+              </a:spcAft>
+              <a:defRPr sz="1300" b="1">
+                <a:solidFill>
+                  <a:srgbClr val="225B9B"/>
+                </a:solidFill>
+                <a:latin typeface="DejaVu Sans Mono"/>
+              </a:defRPr>
+            </a:pPr>
+            <a:r>
+              <a:t>~/ros2_curri/agv_ws/src/agv_sensors/agv_sensors/imu_monitor.py</a:t>
+            </a:r>
+          </a:p>
+        </p:txBody>
+      </p:sp>
+      <p:sp>
+        <p:nvSpPr>
+          <p:cNvPr id="17" name="TextBox 16"/>
+          <p:cNvSpPr txBox="1"/>
+          <p:nvPr/>
+        </p:nvSpPr>
+        <p:spPr>
+          <a:xfrm>
+            <a:off x="868680" y="4443983"/>
+            <a:ext cx="1234440" cy="228600"/>
+          </a:xfrm>
+          <a:prstGeom prst="rect">
+            <a:avLst/>
+          </a:prstGeom>
+          <a:noFill/>
+        </p:spPr>
+        <p:txBody>
+          <a:bodyPr wrap="square" lIns="73152" rIns="73152" tIns="36576" bIns="36576">
+            <a:spAutoFit/>
+          </a:bodyPr>
+          <a:lstStyle/>
+          <a:p>
+            <a:pPr algn="l">
+              <a:spcAft>
+                <a:spcPts val="0"/>
+              </a:spcAft>
+              <a:defRPr sz="1500" b="1">
+                <a:solidFill>
+                  <a:srgbClr val="2A8B5A"/>
+                </a:solidFill>
+                <a:latin typeface="Noto Sans CJK KR"/>
+              </a:defRPr>
+            </a:pPr>
+            <a:r>
+              <a:t>만드는 것</a:t>
+            </a:r>
+          </a:p>
+        </p:txBody>
+      </p:sp>
+      <p:sp>
+        <p:nvSpPr>
+          <p:cNvPr id="18" name="TextBox 17"/>
+          <p:cNvSpPr txBox="1"/>
+          <p:nvPr/>
+        </p:nvSpPr>
+        <p:spPr>
+          <a:xfrm>
+            <a:off x="1975104" y="4425696"/>
+            <a:ext cx="9189720" cy="274320"/>
+          </a:xfrm>
+          <a:prstGeom prst="rect">
+            <a:avLst/>
+          </a:prstGeom>
+          <a:noFill/>
+        </p:spPr>
+        <p:txBody>
+          <a:bodyPr wrap="square" lIns="73152" rIns="73152" tIns="36576" bIns="36576">
+            <a:spAutoFit/>
+          </a:bodyPr>
+          <a:lstStyle/>
+          <a:p>
+            <a:pPr algn="l">
+              <a:spcAft>
+                <a:spcPts val="0"/>
+              </a:spcAft>
+              <a:defRPr sz="1500" b="0">
+                <a:solidFill>
+                  <a:srgbClr val="122C4E"/>
+                </a:solidFill>
+                <a:latin typeface="Noto Sans CJK KR"/>
+              </a:defRPr>
+            </a:pPr>
+            <a:r>
+              <a:t>IMU frame·각속도·가속도를 단위와 함께 출력하는 진단 노드</a:t>
+            </a:r>
+          </a:p>
+        </p:txBody>
+      </p:sp>
+      <p:sp>
+        <p:nvSpPr>
+          <p:cNvPr id="19" name="TextBox 18"/>
+          <p:cNvSpPr txBox="1"/>
+          <p:nvPr/>
+        </p:nvSpPr>
+        <p:spPr>
+          <a:xfrm>
+            <a:off x="868680" y="4818888"/>
+            <a:ext cx="1234440" cy="228600"/>
+          </a:xfrm>
+          <a:prstGeom prst="rect">
+            <a:avLst/>
+          </a:prstGeom>
+          <a:noFill/>
+        </p:spPr>
+        <p:txBody>
+          <a:bodyPr wrap="square" lIns="73152" rIns="73152" tIns="36576" bIns="36576">
+            <a:spAutoFit/>
+          </a:bodyPr>
+          <a:lstStyle/>
+          <a:p>
+            <a:pPr algn="l">
+              <a:spcAft>
+                <a:spcPts val="0"/>
+              </a:spcAft>
+              <a:defRPr sz="1500" b="1">
+                <a:solidFill>
+                  <a:srgbClr val="DB7E22"/>
+                </a:solidFill>
+                <a:latin typeface="Noto Sans CJK KR"/>
+              </a:defRPr>
+            </a:pPr>
+            <a:r>
+              <a:t>코드 읽기</a:t>
+            </a:r>
+          </a:p>
+        </p:txBody>
+      </p:sp>
+      <p:sp>
+        <p:nvSpPr>
+          <p:cNvPr id="20" name="TextBox 19"/>
+          <p:cNvSpPr txBox="1"/>
+          <p:nvPr/>
+        </p:nvSpPr>
+        <p:spPr>
+          <a:xfrm>
+            <a:off x="1975104" y="4800600"/>
+            <a:ext cx="9189720" cy="301752"/>
+          </a:xfrm>
+          <a:prstGeom prst="rect">
+            <a:avLst/>
+          </a:prstGeom>
+          <a:noFill/>
+        </p:spPr>
+        <p:txBody>
+          <a:bodyPr wrap="square" lIns="73152" rIns="73152" tIns="36576" bIns="36576">
+            <a:spAutoFit/>
+          </a:bodyPr>
+          <a:lstStyle/>
+          <a:p>
+            <a:pPr algn="l">
+              <a:spcAft>
+                <a:spcPts val="0"/>
+              </a:spcAft>
+              <a:defRPr sz="1400" b="0">
+                <a:solidFill>
+                  <a:srgbClr val="122C4E"/>
+                </a:solidFill>
+                <a:latin typeface="Noto Sans CJK KR"/>
+              </a:defRPr>
+            </a:pPr>
+            <a:r>
+              <a:t>message header → angular_velocity → linear_acceleration 순서로 읽는다.</a:t>
+            </a:r>
+          </a:p>
+        </p:txBody>
+      </p:sp>
+      <p:sp>
+        <p:nvSpPr>
+          <p:cNvPr id="21" name="TextBox 20"/>
+          <p:cNvSpPr txBox="1"/>
+          <p:nvPr/>
+        </p:nvSpPr>
+        <p:spPr>
+          <a:xfrm>
+            <a:off x="868680" y="5202936"/>
+            <a:ext cx="1234440" cy="228600"/>
+          </a:xfrm>
+          <a:prstGeom prst="rect">
+            <a:avLst/>
+          </a:prstGeom>
+          <a:noFill/>
+        </p:spPr>
+        <p:txBody>
+          <a:bodyPr wrap="square" lIns="73152" rIns="73152" tIns="36576" bIns="36576">
+            <a:spAutoFit/>
+          </a:bodyPr>
+          <a:lstStyle/>
+          <a:p>
+            <a:pPr algn="l">
+              <a:spcAft>
+                <a:spcPts val="0"/>
+              </a:spcAft>
+              <a:defRPr sz="1500" b="1">
+                <a:solidFill>
+                  <a:srgbClr val="225B9B"/>
+                </a:solidFill>
+                <a:latin typeface="Noto Sans CJK KR"/>
+              </a:defRPr>
+            </a:pPr>
+            <a:r>
+              <a:t>사용/확인</a:t>
+            </a:r>
+          </a:p>
+        </p:txBody>
+      </p:sp>
+      <p:sp>
+        <p:nvSpPr>
+          <p:cNvPr id="22" name="TextBox 21"/>
+          <p:cNvSpPr txBox="1"/>
+          <p:nvPr/>
+        </p:nvSpPr>
+        <p:spPr>
+          <a:xfrm>
+            <a:off x="1975104" y="5184648"/>
+            <a:ext cx="9189720" cy="512064"/>
+          </a:xfrm>
+          <a:prstGeom prst="rect">
+            <a:avLst/>
+          </a:prstGeom>
+          <a:noFill/>
+        </p:spPr>
+        <p:txBody>
+          <a:bodyPr wrap="square" lIns="73152" rIns="73152" tIns="36576" bIns="36576">
+            <a:spAutoFit/>
+          </a:bodyPr>
+          <a:lstStyle/>
+          <a:p>
+            <a:pPr algn="l">
+              <a:spcAft>
+                <a:spcPts val="0"/>
+              </a:spcAft>
+              <a:defRPr sz="1300" b="0">
+                <a:solidFill>
+                  <a:srgbClr val="122C4E"/>
+                </a:solidFill>
+                <a:latin typeface="Noto Sans CJK KR"/>
+              </a:defRPr>
+            </a:pPr>
+            <a:r>
+              <a:t>사용: 제자리 회전 명령과 함께 실행해 z축 부호를 비교한다.</a:t>
             </a:r>
             <a:br/>
             <a:r>
-              <a:t>ros2 topic info --verbose /scan</a:t>
-            </a:r>
-          </a:p>
-        </p:txBody>
-      </p:sp>
-      <p:sp>
-        <p:nvSpPr>
-          <p:cNvPr id="10" name="TextBox 9"/>
-          <p:cNvSpPr txBox="1"/>
-          <p:nvPr/>
-        </p:nvSpPr>
-        <p:spPr>
-          <a:xfrm>
-            <a:off x="768096" y="5468112"/>
-            <a:ext cx="1143000" cy="256032"/>
-          </a:xfrm>
-          <a:prstGeom prst="rect">
-            <a:avLst/>
-          </a:prstGeom>
-          <a:noFill/>
-        </p:spPr>
-        <p:txBody>
-          <a:bodyPr wrap="square" lIns="73152" rIns="73152" tIns="36576" bIns="36576">
-            <a:spAutoFit/>
-          </a:bodyPr>
-          <a:lstStyle/>
-          <a:p>
-            <a:pPr algn="l">
-              <a:spcAft>
-                <a:spcPts val="0"/>
-              </a:spcAft>
-              <a:defRPr sz="1800" b="1">
-                <a:solidFill>
-                  <a:srgbClr val="2A8B5A"/>
-                </a:solidFill>
-                <a:latin typeface="Noto Sans CJK KR"/>
-              </a:defRPr>
-            </a:pPr>
-            <a:r>
-              <a:t>확인</a:t>
-            </a:r>
-          </a:p>
-        </p:txBody>
-      </p:sp>
-      <p:sp>
-        <p:nvSpPr>
-          <p:cNvPr id="11" name="TextBox 10"/>
-          <p:cNvSpPr txBox="1"/>
-          <p:nvPr/>
-        </p:nvSpPr>
-        <p:spPr>
-          <a:xfrm>
-            <a:off x="768096" y="5742432"/>
-            <a:ext cx="10561320" cy="347472"/>
-          </a:xfrm>
-          <a:prstGeom prst="rect">
-            <a:avLst/>
-          </a:prstGeom>
-          <a:noFill/>
-        </p:spPr>
-        <p:txBody>
-          <a:bodyPr wrap="square" lIns="73152" rIns="73152" tIns="36576" bIns="36576">
-            <a:spAutoFit/>
-          </a:bodyPr>
-          <a:lstStyle/>
-          <a:p>
-            <a:pPr algn="l">
-              <a:spcAft>
-                <a:spcPts val="0"/>
-              </a:spcAft>
-              <a:defRPr sz="1800" b="0">
-                <a:solidFill>
-                  <a:srgbClr val="122C4E"/>
-                </a:solidFill>
-                <a:latin typeface="Noto Sans CJK KR"/>
-              </a:defRPr>
-            </a:pPr>
-            <a:r>
-              <a:t>명령의 출력에서 topic·frame·파일 이름 또는 성공 메시지를 찾으면 이 단계가 완료됩니다.</a:t>
+              <a:t>화면/출력: IMU terminal의 frame_id와 publish rate</a:t>
             </a:r>
           </a:p>
         </p:txBody>
@@ -16389,7 +19852,7 @@
               </a:defRPr>
             </a:pPr>
             <a:r>
-              <a:t>파일을 새로 만들고 저장한다 (1/1)</a:t>
+              <a:t>코드를 ‘만드는 것 → 표시할 줄 → 바꾼 결과’로 읽는다</a:t>
             </a:r>
           </a:p>
         </p:txBody>
@@ -16428,7 +19891,7 @@
               </a:defRPr>
             </a:pPr>
             <a:r>
-              <a:t>~/ros2_curri/agv_ws/src/agv_bringup/config/sensors.yaml</a:t>
+              <a:t>PDF 예시처럼 화면을 보기 전에 코드의 역할과 관찰 지점을 한 번 짚고 갑니다.</a:t>
             </a:r>
           </a:p>
         </p:txBody>
@@ -16564,62 +20027,23 @@
               </a:defRPr>
             </a:pPr>
             <a:r>
-              <a:t>현재 단계 3/4    |    현재 폴더 ~/ros2_curri/agv_ws    |    현재 터미널</a:t>
-            </a:r>
-          </a:p>
-        </p:txBody>
-      </p:sp>
-      <p:sp>
-        <p:nvSpPr>
-          <p:cNvPr id="7" name="TextBox 6"/>
-          <p:cNvSpPr txBox="1"/>
-          <p:nvPr/>
-        </p:nvSpPr>
-        <p:spPr>
-          <a:xfrm>
-            <a:off x="658368" y="1627632"/>
-            <a:ext cx="10972800" cy="256032"/>
-          </a:xfrm>
-          <a:prstGeom prst="rect">
-            <a:avLst/>
-          </a:prstGeom>
-          <a:noFill/>
-        </p:spPr>
-        <p:txBody>
-          <a:bodyPr wrap="square" lIns="73152" rIns="73152" tIns="36576" bIns="36576">
-            <a:spAutoFit/>
-          </a:bodyPr>
-          <a:lstStyle/>
-          <a:p>
-            <a:pPr algn="l">
-              <a:spcAft>
-                <a:spcPts val="0"/>
-              </a:spcAft>
-              <a:defRPr sz="1500" b="1">
-                <a:solidFill>
-                  <a:srgbClr val="122C4E"/>
-                </a:solidFill>
-                <a:latin typeface="Noto Sans CJK KR"/>
-              </a:defRPr>
-            </a:pPr>
-            <a:r>
-              <a:t>이번 단계: 파일의 전체 내용을 중간 생략 없이 작성합니다. 아래 줄 범위를 끝까지 입력하세요.</a:t>
-            </a:r>
-          </a:p>
-        </p:txBody>
-      </p:sp>
-      <p:sp>
-        <p:nvSpPr>
-          <p:cNvPr id="8" name="Rectangle 7"/>
+              <a:t>현재 단계 코드 해설    |    현재 폴더 ~/ros2_curri/agv_ws    |    현재 터미널</a:t>
+            </a:r>
+          </a:p>
+        </p:txBody>
+      </p:sp>
+      <p:sp>
+        <p:nvSpPr>
+          <p:cNvPr id="7" name="Rounded Rectangle 6"/>
           <p:cNvSpPr/>
           <p:nvPr/>
         </p:nvSpPr>
         <p:spPr>
           <a:xfrm>
-            <a:off x="658368" y="1956816"/>
-            <a:ext cx="10972800" cy="603504"/>
-          </a:xfrm>
-          <a:prstGeom prst="rect">
+            <a:off x="658368" y="1664208"/>
+            <a:ext cx="5321808" cy="1764792"/>
+          </a:xfrm>
+          <a:prstGeom prst="roundRect">
             <a:avLst/>
           </a:prstGeom>
           <a:solidFill>
@@ -16627,7 +20051,7 @@
           </a:solidFill>
           <a:ln>
             <a:solidFill>
-              <a:srgbClr val="F4F7FB"/>
+              <a:srgbClr val="2A8B5A"/>
             </a:solidFill>
           </a:ln>
         </p:spPr>
@@ -16646,50 +20070,111 @@
           </a:fontRef>
         </p:style>
         <p:txBody>
-          <a:bodyPr rtlCol="0" anchor="ctr" wrap="square" lIns="73152" rIns="73152" tIns="36576" bIns="36576"/>
-          <a:lstStyle/>
-          <a:p>
-            <a:pPr algn="l">
-              <a:spcAft>
-                <a:spcPts val="0"/>
-              </a:spcAft>
-              <a:defRPr sz="1400" b="0">
+          <a:bodyPr rtlCol="0" anchor="ctr"/>
+          <a:lstStyle/>
+          <a:p>
+            <a:pPr algn="ctr"/>
+          </a:p>
+        </p:txBody>
+      </p:sp>
+      <p:sp>
+        <p:nvSpPr>
+          <p:cNvPr id="8" name="TextBox 7"/>
+          <p:cNvSpPr txBox="1"/>
+          <p:nvPr/>
+        </p:nvSpPr>
+        <p:spPr>
+          <a:xfrm>
+            <a:off x="859536" y="1828800"/>
+            <a:ext cx="4892040" cy="265176"/>
+          </a:xfrm>
+          <a:prstGeom prst="rect">
+            <a:avLst/>
+          </a:prstGeom>
+          <a:noFill/>
+        </p:spPr>
+        <p:txBody>
+          <a:bodyPr wrap="square" lIns="73152" rIns="73152" tIns="36576" bIns="36576">
+            <a:spAutoFit/>
+          </a:bodyPr>
+          <a:lstStyle/>
+          <a:p>
+            <a:pPr algn="l">
+              <a:spcAft>
+                <a:spcPts val="0"/>
+              </a:spcAft>
+              <a:defRPr sz="1700" b="1">
+                <a:solidFill>
+                  <a:srgbClr val="2A8B5A"/>
+                </a:solidFill>
+                <a:latin typeface="Noto Sans CJK KR"/>
+              </a:defRPr>
+            </a:pPr>
+            <a:r>
+              <a:t>1. 이 파일이 만드는 것</a:t>
+            </a:r>
+          </a:p>
+        </p:txBody>
+      </p:sp>
+      <p:sp>
+        <p:nvSpPr>
+          <p:cNvPr id="9" name="TextBox 8"/>
+          <p:cNvSpPr txBox="1"/>
+          <p:nvPr/>
+        </p:nvSpPr>
+        <p:spPr>
+          <a:xfrm>
+            <a:off x="859536" y="2240280"/>
+            <a:ext cx="4846320" cy="941832"/>
+          </a:xfrm>
+          <a:prstGeom prst="rect">
+            <a:avLst/>
+          </a:prstGeom>
+          <a:noFill/>
+        </p:spPr>
+        <p:txBody>
+          <a:bodyPr wrap="square" lIns="73152" rIns="73152" tIns="36576" bIns="36576">
+            <a:spAutoFit/>
+          </a:bodyPr>
+          <a:lstStyle/>
+          <a:p>
+            <a:pPr algn="l">
+              <a:spcAft>
+                <a:spcPts val="0"/>
+              </a:spcAft>
+              <a:defRPr sz="1600" b="0">
                 <a:solidFill>
                   <a:srgbClr val="122C4E"/>
                 </a:solidFill>
-                <a:latin typeface="DejaVu Sans Mono"/>
-              </a:defRPr>
-            </a:pPr>
-            <a:r>
-              <a:t>파일 생성: mkdir -p ~/ros2_curri/agv_ws/src/agv_bringup/config</a:t>
-            </a:r>
-            <a:br/>
-            <a:r>
-              <a:t>파일 열기: nano ~/ros2_curri/agv_ws/src/agv_bringup/config/sensors.yaml</a:t>
-            </a:r>
-          </a:p>
-        </p:txBody>
-      </p:sp>
-      <p:sp>
-        <p:nvSpPr>
-          <p:cNvPr id="9" name="Rectangle 8"/>
+                <a:latin typeface="Noto Sans CJK KR"/>
+              </a:defRPr>
+            </a:pPr>
+            <a:r>
+              <a:t>센서를 동시에 운영할 때는 ‘topic이 있다’보다 시간·QoS·frame·rate가 서로 맞는지가 중요합니다.</a:t>
+            </a:r>
+          </a:p>
+        </p:txBody>
+      </p:sp>
+      <p:sp>
+        <p:nvSpPr>
+          <p:cNvPr id="10" name="Rounded Rectangle 9"/>
           <p:cNvSpPr/>
           <p:nvPr/>
         </p:nvSpPr>
         <p:spPr>
           <a:xfrm>
-            <a:off x="658368" y="2706624"/>
-            <a:ext cx="10972800" cy="3364992"/>
-          </a:xfrm>
-          <a:prstGeom prst="rect">
+            <a:off x="6217920" y="1664208"/>
+            <a:ext cx="5321808" cy="1764792"/>
+          </a:xfrm>
+          <a:prstGeom prst="roundRect">
             <a:avLst/>
           </a:prstGeom>
           <a:solidFill>
-            <a:srgbClr val="1D232D"/>
+            <a:srgbClr val="F4F7FB"/>
           </a:solidFill>
           <a:ln>
             <a:solidFill>
-              <a:srgbClr val="1D232D"/>
+              <a:srgbClr val="225B9B"/>
             </a:solidFill>
           </a:ln>
         </p:spPr>
@@ -16708,85 +20193,372 @@
           </a:fontRef>
         </p:style>
         <p:txBody>
-          <a:bodyPr rtlCol="0" anchor="ctr" wrap="square" lIns="164592" rIns="164592" tIns="109728" bIns="36576"/>
-          <a:lstStyle/>
-          <a:p>
-            <a:pPr algn="l">
-              <a:spcAft>
-                <a:spcPts val="0"/>
-              </a:spcAft>
-              <a:defRPr sz="1400" b="0">
-                <a:solidFill>
-                  <a:srgbClr val="FFFFFF"/>
-                </a:solidFill>
-                <a:latin typeface="DejaVu Sans Mono"/>
-              </a:defRPr>
-            </a:pPr>
-            <a:r>
-              <a:t>lidar_processor:</a:t>
-            </a:r>
-            <a:br/>
-            <a:r>
-              <a:t>  ros__parameters:</a:t>
-            </a:r>
-            <a:br/>
-            <a:r>
-              <a:t>    use_sim_time: true</a:t>
-            </a:r>
-            <a:br/>
-            <a:r>
-              <a:t>    front_half_angle_deg: 15.0</a:t>
-            </a:r>
-            <a:br/>
-            <a:r>
-              <a:t>imu_monitor:</a:t>
-            </a:r>
-            <a:br/>
-            <a:r>
-              <a:t>  ros__parameters:</a:t>
-            </a:r>
-            <a:br/>
-            <a:r>
-              <a:t>    use_sim_time: true</a:t>
-            </a:r>
-          </a:p>
-        </p:txBody>
-      </p:sp>
-      <p:sp>
-        <p:nvSpPr>
-          <p:cNvPr id="10" name="TextBox 9"/>
-          <p:cNvSpPr txBox="1"/>
-          <p:nvPr/>
-        </p:nvSpPr>
-        <p:spPr>
-          <a:xfrm>
-            <a:off x="749808" y="6181344"/>
-            <a:ext cx="10789920" cy="201168"/>
-          </a:xfrm>
-          <a:prstGeom prst="rect">
-            <a:avLst/>
-          </a:prstGeom>
-          <a:noFill/>
-        </p:spPr>
-        <p:txBody>
-          <a:bodyPr wrap="square" lIns="73152" rIns="73152" tIns="36576" bIns="36576">
-            <a:spAutoFit/>
-          </a:bodyPr>
-          <a:lstStyle/>
-          <a:p>
-            <a:pPr algn="l">
-              <a:spcAft>
-                <a:spcPts val="0"/>
-              </a:spcAft>
-              <a:defRPr sz="1000" b="0">
-                <a:solidFill>
-                  <a:srgbClr val="5C6672"/>
-                </a:solidFill>
-                <a:latin typeface="Noto Sans CJK KR"/>
-              </a:defRPr>
-            </a:pPr>
-            <a:r>
-              <a:t>파일 전체 1/1 · 이 슬라이드 다음에 같은 파일의 나머지 줄이 이어집니다.</a:t>
+          <a:bodyPr rtlCol="0" anchor="ctr"/>
+          <a:lstStyle/>
+          <a:p>
+            <a:pPr algn="ctr"/>
+          </a:p>
+        </p:txBody>
+      </p:sp>
+      <p:sp>
+        <p:nvSpPr>
+          <p:cNvPr id="11" name="TextBox 10"/>
+          <p:cNvSpPr txBox="1"/>
+          <p:nvPr/>
+        </p:nvSpPr>
+        <p:spPr>
+          <a:xfrm>
+            <a:off x="6419088" y="1828800"/>
+            <a:ext cx="4892040" cy="265176"/>
+          </a:xfrm>
+          <a:prstGeom prst="rect">
+            <a:avLst/>
+          </a:prstGeom>
+          <a:noFill/>
+        </p:spPr>
+        <p:txBody>
+          <a:bodyPr wrap="square" lIns="73152" rIns="73152" tIns="36576" bIns="36576">
+            <a:spAutoFit/>
+          </a:bodyPr>
+          <a:lstStyle/>
+          <a:p>
+            <a:pPr algn="l">
+              <a:spcAft>
+                <a:spcPts val="0"/>
+              </a:spcAft>
+              <a:defRPr sz="1700" b="1">
+                <a:solidFill>
+                  <a:srgbClr val="225B9B"/>
+                </a:solidFill>
+                <a:latin typeface="Noto Sans CJK KR"/>
+              </a:defRPr>
+            </a:pPr>
+            <a:r>
+              <a:t>2. 먼저 찾을 코드/태그</a:t>
+            </a:r>
+          </a:p>
+        </p:txBody>
+      </p:sp>
+      <p:sp>
+        <p:nvSpPr>
+          <p:cNvPr id="12" name="TextBox 11"/>
+          <p:cNvSpPr txBox="1"/>
+          <p:nvPr/>
+        </p:nvSpPr>
+        <p:spPr>
+          <a:xfrm>
+            <a:off x="6419088" y="2240280"/>
+            <a:ext cx="4846320" cy="941832"/>
+          </a:xfrm>
+          <a:prstGeom prst="rect">
+            <a:avLst/>
+          </a:prstGeom>
+          <a:noFill/>
+        </p:spPr>
+        <p:txBody>
+          <a:bodyPr wrap="square" lIns="73152" rIns="73152" tIns="36576" bIns="36576">
+            <a:spAutoFit/>
+          </a:bodyPr>
+          <a:lstStyle/>
+          <a:p>
+            <a:pPr algn="l">
+              <a:spcAft>
+                <a:spcPts val="0"/>
+              </a:spcAft>
+              <a:defRPr sz="1600" b="0">
+                <a:solidFill>
+                  <a:srgbClr val="122C4E"/>
+                </a:solidFill>
+                <a:latin typeface="Noto Sans CJK KR"/>
+              </a:defRPr>
+            </a:pPr>
+            <a:r>
+              <a:t>/clock, use_sim_time, qos_profile_sensor_data, ros2 topic hz</a:t>
+            </a:r>
+          </a:p>
+        </p:txBody>
+      </p:sp>
+      <p:sp>
+        <p:nvSpPr>
+          <p:cNvPr id="13" name="Rounded Rectangle 12"/>
+          <p:cNvSpPr/>
+          <p:nvPr/>
+        </p:nvSpPr>
+        <p:spPr>
+          <a:xfrm>
+            <a:off x="658368" y="3813048"/>
+            <a:ext cx="5321808" cy="1764792"/>
+          </a:xfrm>
+          <a:prstGeom prst="roundRect">
+            <a:avLst/>
+          </a:prstGeom>
+          <a:solidFill>
+            <a:srgbClr val="F4F7FB"/>
+          </a:solidFill>
+          <a:ln>
+            <a:solidFill>
+              <a:srgbClr val="DB7E22"/>
+            </a:solidFill>
+          </a:ln>
+        </p:spPr>
+        <p:style>
+          <a:lnRef idx="1">
+            <a:schemeClr val="accent1"/>
+          </a:lnRef>
+          <a:fillRef idx="3">
+            <a:schemeClr val="accent1"/>
+          </a:fillRef>
+          <a:effectRef idx="2">
+            <a:schemeClr val="accent1"/>
+          </a:effectRef>
+          <a:fontRef idx="minor">
+            <a:schemeClr val="lt1"/>
+          </a:fontRef>
+        </p:style>
+        <p:txBody>
+          <a:bodyPr rtlCol="0" anchor="ctr"/>
+          <a:lstStyle/>
+          <a:p>
+            <a:pPr algn="ctr"/>
+          </a:p>
+        </p:txBody>
+      </p:sp>
+      <p:sp>
+        <p:nvSpPr>
+          <p:cNvPr id="14" name="TextBox 13"/>
+          <p:cNvSpPr txBox="1"/>
+          <p:nvPr/>
+        </p:nvSpPr>
+        <p:spPr>
+          <a:xfrm>
+            <a:off x="859536" y="3977639"/>
+            <a:ext cx="4892040" cy="265176"/>
+          </a:xfrm>
+          <a:prstGeom prst="rect">
+            <a:avLst/>
+          </a:prstGeom>
+          <a:noFill/>
+        </p:spPr>
+        <p:txBody>
+          <a:bodyPr wrap="square" lIns="73152" rIns="73152" tIns="36576" bIns="36576">
+            <a:spAutoFit/>
+          </a:bodyPr>
+          <a:lstStyle/>
+          <a:p>
+            <a:pPr algn="l">
+              <a:spcAft>
+                <a:spcPts val="0"/>
+              </a:spcAft>
+              <a:defRPr sz="1700" b="1">
+                <a:solidFill>
+                  <a:srgbClr val="DB7E22"/>
+                </a:solidFill>
+                <a:latin typeface="Noto Sans CJK KR"/>
+              </a:defRPr>
+            </a:pPr>
+            <a:r>
+              <a:t>3. 값을 바꾸면</a:t>
+            </a:r>
+          </a:p>
+        </p:txBody>
+      </p:sp>
+      <p:sp>
+        <p:nvSpPr>
+          <p:cNvPr id="15" name="TextBox 14"/>
+          <p:cNvSpPr txBox="1"/>
+          <p:nvPr/>
+        </p:nvSpPr>
+        <p:spPr>
+          <a:xfrm>
+            <a:off x="859536" y="4389120"/>
+            <a:ext cx="4846320" cy="941832"/>
+          </a:xfrm>
+          <a:prstGeom prst="rect">
+            <a:avLst/>
+          </a:prstGeom>
+          <a:noFill/>
+        </p:spPr>
+        <p:txBody>
+          <a:bodyPr wrap="square" lIns="73152" rIns="73152" tIns="36576" bIns="36576">
+            <a:spAutoFit/>
+          </a:bodyPr>
+          <a:lstStyle/>
+          <a:p>
+            <a:pPr algn="l">
+              <a:spcAft>
+                <a:spcPts val="0"/>
+              </a:spcAft>
+              <a:defRPr sz="1600" b="0">
+                <a:solidFill>
+                  <a:srgbClr val="122C4E"/>
+                </a:solidFill>
+                <a:latin typeface="Noto Sans CJK KR"/>
+              </a:defRPr>
+            </a:pPr>
+            <a:r>
+              <a:t>SDF update_rate와 실제 hz가 크게 다르면 시뮬레이터 부하·QoS·bridge를 먼저 점검합니다.</a:t>
+            </a:r>
+          </a:p>
+        </p:txBody>
+      </p:sp>
+      <p:sp>
+        <p:nvSpPr>
+          <p:cNvPr id="16" name="Rounded Rectangle 15"/>
+          <p:cNvSpPr/>
+          <p:nvPr/>
+        </p:nvSpPr>
+        <p:spPr>
+          <a:xfrm>
+            <a:off x="6217920" y="3813048"/>
+            <a:ext cx="5321808" cy="1764792"/>
+          </a:xfrm>
+          <a:prstGeom prst="roundRect">
+            <a:avLst/>
+          </a:prstGeom>
+          <a:solidFill>
+            <a:srgbClr val="F4F7FB"/>
+          </a:solidFill>
+          <a:ln>
+            <a:solidFill>
+              <a:srgbClr val="BE3B3B"/>
+            </a:solidFill>
+          </a:ln>
+        </p:spPr>
+        <p:style>
+          <a:lnRef idx="1">
+            <a:schemeClr val="accent1"/>
+          </a:lnRef>
+          <a:fillRef idx="3">
+            <a:schemeClr val="accent1"/>
+          </a:fillRef>
+          <a:effectRef idx="2">
+            <a:schemeClr val="accent1"/>
+          </a:effectRef>
+          <a:fontRef idx="minor">
+            <a:schemeClr val="lt1"/>
+          </a:fontRef>
+        </p:style>
+        <p:txBody>
+          <a:bodyPr rtlCol="0" anchor="ctr"/>
+          <a:lstStyle/>
+          <a:p>
+            <a:pPr algn="ctr"/>
+          </a:p>
+        </p:txBody>
+      </p:sp>
+      <p:sp>
+        <p:nvSpPr>
+          <p:cNvPr id="17" name="TextBox 16"/>
+          <p:cNvSpPr txBox="1"/>
+          <p:nvPr/>
+        </p:nvSpPr>
+        <p:spPr>
+          <a:xfrm>
+            <a:off x="6419088" y="3977639"/>
+            <a:ext cx="4892040" cy="265176"/>
+          </a:xfrm>
+          <a:prstGeom prst="rect">
+            <a:avLst/>
+          </a:prstGeom>
+          <a:noFill/>
+        </p:spPr>
+        <p:txBody>
+          <a:bodyPr wrap="square" lIns="73152" rIns="73152" tIns="36576" bIns="36576">
+            <a:spAutoFit/>
+          </a:bodyPr>
+          <a:lstStyle/>
+          <a:p>
+            <a:pPr algn="l">
+              <a:spcAft>
+                <a:spcPts val="0"/>
+              </a:spcAft>
+              <a:defRPr sz="1700" b="1">
+                <a:solidFill>
+                  <a:srgbClr val="BE3B3B"/>
+                </a:solidFill>
+                <a:latin typeface="Noto Sans CJK KR"/>
+              </a:defRPr>
+            </a:pPr>
+            <a:r>
+              <a:t>4. 실제로 보는 곳</a:t>
+            </a:r>
+          </a:p>
+        </p:txBody>
+      </p:sp>
+      <p:sp>
+        <p:nvSpPr>
+          <p:cNvPr id="18" name="TextBox 17"/>
+          <p:cNvSpPr txBox="1"/>
+          <p:nvPr/>
+        </p:nvSpPr>
+        <p:spPr>
+          <a:xfrm>
+            <a:off x="6419088" y="4389120"/>
+            <a:ext cx="4846320" cy="941832"/>
+          </a:xfrm>
+          <a:prstGeom prst="rect">
+            <a:avLst/>
+          </a:prstGeom>
+          <a:noFill/>
+        </p:spPr>
+        <p:txBody>
+          <a:bodyPr wrap="square" lIns="73152" rIns="73152" tIns="36576" bIns="36576">
+            <a:spAutoFit/>
+          </a:bodyPr>
+          <a:lstStyle/>
+          <a:p>
+            <a:pPr algn="l">
+              <a:spcAft>
+                <a:spcPts val="0"/>
+              </a:spcAft>
+              <a:defRPr sz="1600" b="0">
+                <a:solidFill>
+                  <a:srgbClr val="122C4E"/>
+                </a:solidFill>
+                <a:latin typeface="Noto Sans CJK KR"/>
+              </a:defRPr>
+            </a:pPr>
+            <a:r>
+              <a:t>camera/LiDAR/IMU terminal과 RViz를 함께 열어 이름·rate·Fixed Frame을 대조합니다.</a:t>
+            </a:r>
+          </a:p>
+        </p:txBody>
+      </p:sp>
+      <p:sp>
+        <p:nvSpPr>
+          <p:cNvPr id="19" name="TextBox 18"/>
+          <p:cNvSpPr txBox="1"/>
+          <p:nvPr/>
+        </p:nvSpPr>
+        <p:spPr>
+          <a:xfrm>
+            <a:off x="777240" y="6172200"/>
+            <a:ext cx="10607040" cy="201168"/>
+          </a:xfrm>
+          <a:prstGeom prst="rect">
+            <a:avLst/>
+          </a:prstGeom>
+          <a:noFill/>
+        </p:spPr>
+        <p:txBody>
+          <a:bodyPr wrap="square" lIns="73152" rIns="73152" tIns="36576" bIns="36576">
+            <a:spAutoFit/>
+          </a:bodyPr>
+          <a:lstStyle/>
+          <a:p>
+            <a:pPr algn="ctr">
+              <a:spcAft>
+                <a:spcPts val="0"/>
+              </a:spcAft>
+              <a:defRPr sz="1200" b="1">
+                <a:solidFill>
+                  <a:srgbClr val="2A8B5A"/>
+                </a:solidFill>
+                <a:latin typeface="Noto Sans CJK KR"/>
+              </a:defRPr>
+            </a:pPr>
+            <a:r>
+              <a:t>다음 코드 슬라이드에서는 위의 태그/함수를 찾아 색으로 표시하며 한 줄씩 설명합니다.</a:t>
             </a:r>
           </a:p>
         </p:txBody>

--- a/blocks/D_sensors/M15_sensor_operations/M15_센서_운영과_동기화.pptx
+++ b/blocks/D_sensors/M15_sensor_operations/M15_센서_운영과_동기화.pptx
@@ -8193,7 +8193,7 @@
               <a:spcAft>
                 <a:spcPts val="0"/>
               </a:spcAft>
-              <a:defRPr sz="1800" b="1">
+              <a:defRPr sz="1400" b="1">
                 <a:solidFill>
                   <a:srgbClr val="FFFFFF"/>
                 </a:solidFill>
@@ -8201,7 +8201,7 @@
               </a:defRPr>
             </a:pPr>
             <a:r>
-              <a:t>M15 · Block D · ROS 2 + Gazebo Sim AGV</a:t>
+              <a:t>ROS 2 기반 AGV End-to-End 개발 커리큘럼 · M15 · Block D</a:t>
             </a:r>
           </a:p>
         </p:txBody>
@@ -8411,7 +8411,7 @@
               <a:spcAft>
                 <a:spcPts val="0"/>
               </a:spcAft>
-              <a:defRPr sz="1000" b="0">
+              <a:defRPr sz="900" b="0">
                 <a:solidFill>
                   <a:srgbClr val="5C6672"/>
                 </a:solidFill>
@@ -8419,7 +8419,7 @@
               </a:defRPr>
             </a:pPr>
             <a:r>
-              <a:t>ROS 2 Jazzy · Gazebo Harmonic · M15 · 따라 하기형 AGV 실습</a:t>
+              <a:t>ROS 2 기반 AGV End-to-End 개발 커리큘럼 · M15 · Block D</a:t>
             </a:r>
           </a:p>
         </p:txBody>
@@ -8585,7 +8585,7 @@
               <a:spcAft>
                 <a:spcPts val="0"/>
               </a:spcAft>
-              <a:defRPr sz="1000" b="0">
+              <a:defRPr sz="900" b="0">
                 <a:solidFill>
                   <a:srgbClr val="5C6672"/>
                 </a:solidFill>
@@ -8593,7 +8593,7 @@
               </a:defRPr>
             </a:pPr>
             <a:r>
-              <a:t>ROS 2 Jazzy · Gazebo Harmonic · M15 · 따라 하기형 AGV 실습</a:t>
+              <a:t>ROS 2 기반 AGV End-to-End 개발 커리큘럼 · M15 · Block D</a:t>
             </a:r>
           </a:p>
         </p:txBody>
@@ -9135,7 +9135,7 @@
               <a:spcAft>
                 <a:spcPts val="0"/>
               </a:spcAft>
-              <a:defRPr sz="1000" b="0">
+              <a:defRPr sz="900" b="0">
                 <a:solidFill>
                   <a:srgbClr val="5C6672"/>
                 </a:solidFill>
@@ -9143,7 +9143,7 @@
               </a:defRPr>
             </a:pPr>
             <a:r>
-              <a:t>ROS 2 Jazzy · Gazebo Harmonic · M15 · 따라 하기형 AGV 실습</a:t>
+              <a:t>ROS 2 기반 AGV End-to-End 개발 커리큘럼 · M15 · Block D</a:t>
             </a:r>
           </a:p>
         </p:txBody>
@@ -9422,7 +9422,7 @@
               <a:spcAft>
                 <a:spcPts val="0"/>
               </a:spcAft>
-              <a:defRPr sz="1000" b="0">
+              <a:defRPr sz="900" b="0">
                 <a:solidFill>
                   <a:srgbClr val="5C6672"/>
                 </a:solidFill>
@@ -9430,7 +9430,7 @@
               </a:defRPr>
             </a:pPr>
             <a:r>
-              <a:t>ROS 2 Jazzy · Gazebo Harmonic · M15 · 따라 하기형 AGV 실습</a:t>
+              <a:t>ROS 2 기반 AGV End-to-End 개발 커리큘럼 · M15 · Block D</a:t>
             </a:r>
           </a:p>
         </p:txBody>
@@ -10298,7 +10298,7 @@
               <a:spcAft>
                 <a:spcPts val="0"/>
               </a:spcAft>
-              <a:defRPr sz="1000" b="0">
+              <a:defRPr sz="900" b="0">
                 <a:solidFill>
                   <a:srgbClr val="5C6672"/>
                 </a:solidFill>
@@ -10306,7 +10306,7 @@
               </a:defRPr>
             </a:pPr>
             <a:r>
-              <a:t>ROS 2 Jazzy · Gazebo Harmonic · M15 · 따라 하기형 AGV 실습</a:t>
+              <a:t>ROS 2 기반 AGV End-to-End 개발 커리큘럼 · M15 · Block D</a:t>
             </a:r>
           </a:p>
         </p:txBody>
@@ -11174,7 +11174,7 @@
               <a:spcAft>
                 <a:spcPts val="0"/>
               </a:spcAft>
-              <a:defRPr sz="1000" b="0">
+              <a:defRPr sz="900" b="0">
                 <a:solidFill>
                   <a:srgbClr val="5C6672"/>
                 </a:solidFill>
@@ -11182,7 +11182,7 @@
               </a:defRPr>
             </a:pPr>
             <a:r>
-              <a:t>ROS 2 Jazzy · Gazebo Harmonic · M15 · 따라 하기형 AGV 실습</a:t>
+              <a:t>ROS 2 기반 AGV End-to-End 개발 커리큘럼 · M15 · Block D</a:t>
             </a:r>
           </a:p>
         </p:txBody>
@@ -11937,7 +11937,7 @@
               <a:spcAft>
                 <a:spcPts val="0"/>
               </a:spcAft>
-              <a:defRPr sz="1000" b="0">
+              <a:defRPr sz="900" b="0">
                 <a:solidFill>
                   <a:srgbClr val="5C6672"/>
                 </a:solidFill>
@@ -11945,7 +11945,7 @@
               </a:defRPr>
             </a:pPr>
             <a:r>
-              <a:t>ROS 2 Jazzy · Gazebo Harmonic · M15 · 따라 하기형 AGV 실습</a:t>
+              <a:t>ROS 2 기반 AGV End-to-End 개발 커리큘럼 · M15 · Block D</a:t>
             </a:r>
           </a:p>
         </p:txBody>
@@ -12465,7 +12465,7 @@
               <a:spcAft>
                 <a:spcPts val="0"/>
               </a:spcAft>
-              <a:defRPr sz="1000" b="0">
+              <a:defRPr sz="900" b="0">
                 <a:solidFill>
                   <a:srgbClr val="5C6672"/>
                 </a:solidFill>
@@ -12473,7 +12473,7 @@
               </a:defRPr>
             </a:pPr>
             <a:r>
-              <a:t>ROS 2 Jazzy · Gazebo Harmonic · M15 · 따라 하기형 AGV 실습</a:t>
+              <a:t>ROS 2 기반 AGV End-to-End 개발 커리큘럼 · M15 · Block D</a:t>
             </a:r>
           </a:p>
         </p:txBody>
@@ -13254,7 +13254,7 @@
               <a:spcAft>
                 <a:spcPts val="0"/>
               </a:spcAft>
-              <a:defRPr sz="1000" b="0">
+              <a:defRPr sz="900" b="0">
                 <a:solidFill>
                   <a:srgbClr val="5C6672"/>
                 </a:solidFill>
@@ -13262,7 +13262,7 @@
               </a:defRPr>
             </a:pPr>
             <a:r>
-              <a:t>ROS 2 Jazzy · Gazebo Harmonic · M15 · 따라 하기형 AGV 실습</a:t>
+              <a:t>ROS 2 기반 AGV End-to-End 개발 커리큘럼 · M15 · Block D</a:t>
             </a:r>
           </a:p>
         </p:txBody>
@@ -13823,7 +13823,7 @@
               <a:spcAft>
                 <a:spcPts val="0"/>
               </a:spcAft>
-              <a:defRPr sz="1000" b="0">
+              <a:defRPr sz="900" b="0">
                 <a:solidFill>
                   <a:srgbClr val="5C6672"/>
                 </a:solidFill>
@@ -13831,7 +13831,7 @@
               </a:defRPr>
             </a:pPr>
             <a:r>
-              <a:t>ROS 2 Jazzy · Gazebo Harmonic · M15 · 따라 하기형 AGV 실습</a:t>
+              <a:t>ROS 2 기반 AGV End-to-End 개발 커리큘럼 · M15 · Block D</a:t>
             </a:r>
           </a:p>
         </p:txBody>
@@ -14277,7 +14277,7 @@
               <a:spcAft>
                 <a:spcPts val="0"/>
               </a:spcAft>
-              <a:defRPr sz="1000" b="0">
+              <a:defRPr sz="900" b="0">
                 <a:solidFill>
                   <a:srgbClr val="5C6672"/>
                 </a:solidFill>
@@ -14285,7 +14285,7 @@
               </a:defRPr>
             </a:pPr>
             <a:r>
-              <a:t>ROS 2 Jazzy · Gazebo Harmonic · M15 · 따라 하기형 AGV 실습</a:t>
+              <a:t>ROS 2 기반 AGV End-to-End 개발 커리큘럼 · M15 · Block D</a:t>
             </a:r>
           </a:p>
         </p:txBody>
@@ -14805,7 +14805,7 @@
               <a:spcAft>
                 <a:spcPts val="0"/>
               </a:spcAft>
-              <a:defRPr sz="1000" b="0">
+              <a:defRPr sz="900" b="0">
                 <a:solidFill>
                   <a:srgbClr val="5C6672"/>
                 </a:solidFill>
@@ -14813,7 +14813,7 @@
               </a:defRPr>
             </a:pPr>
             <a:r>
-              <a:t>ROS 2 Jazzy · Gazebo Harmonic · M15 · 따라 하기형 AGV 실습</a:t>
+              <a:t>ROS 2 기반 AGV End-to-End 개발 커리큘럼 · M15 · Block D</a:t>
             </a:r>
           </a:p>
         </p:txBody>
@@ -15266,7 +15266,7 @@
               <a:spcAft>
                 <a:spcPts val="0"/>
               </a:spcAft>
-              <a:defRPr sz="1000" b="0">
+              <a:defRPr sz="900" b="0">
                 <a:solidFill>
                   <a:srgbClr val="5C6672"/>
                 </a:solidFill>
@@ -15274,7 +15274,7 @@
               </a:defRPr>
             </a:pPr>
             <a:r>
-              <a:t>ROS 2 Jazzy · Gazebo Harmonic · M15 · 따라 하기형 AGV 실습</a:t>
+              <a:t>ROS 2 기반 AGV End-to-End 개발 커리큘럼 · M15 · Block D</a:t>
             </a:r>
           </a:p>
         </p:txBody>
@@ -16055,7 +16055,7 @@
               <a:spcAft>
                 <a:spcPts val="0"/>
               </a:spcAft>
-              <a:defRPr sz="1000" b="0">
+              <a:defRPr sz="900" b="0">
                 <a:solidFill>
                   <a:srgbClr val="5C6672"/>
                 </a:solidFill>
@@ -16063,7 +16063,7 @@
               </a:defRPr>
             </a:pPr>
             <a:r>
-              <a:t>ROS 2 Jazzy · Gazebo Harmonic · M15 · 따라 하기형 AGV 실습</a:t>
+              <a:t>ROS 2 기반 AGV End-to-End 개발 커리큘럼 · M15 · Block D</a:t>
             </a:r>
           </a:p>
         </p:txBody>
@@ -16529,7 +16529,7 @@
               <a:spcAft>
                 <a:spcPts val="0"/>
               </a:spcAft>
-              <a:defRPr sz="1000" b="0">
+              <a:defRPr sz="900" b="0">
                 <a:solidFill>
                   <a:srgbClr val="5C6672"/>
                 </a:solidFill>
@@ -16537,7 +16537,7 @@
               </a:defRPr>
             </a:pPr>
             <a:r>
-              <a:t>ROS 2 Jazzy · Gazebo Harmonic · M15 · 따라 하기형 AGV 실습</a:t>
+              <a:t>ROS 2 기반 AGV End-to-End 개발 커리큘럼 · M15 · Block D</a:t>
             </a:r>
           </a:p>
         </p:txBody>
@@ -17003,7 +17003,7 @@
               <a:spcAft>
                 <a:spcPts val="0"/>
               </a:spcAft>
-              <a:defRPr sz="1000" b="0">
+              <a:defRPr sz="900" b="0">
                 <a:solidFill>
                   <a:srgbClr val="5C6672"/>
                 </a:solidFill>
@@ -17011,7 +17011,7 @@
               </a:defRPr>
             </a:pPr>
             <a:r>
-              <a:t>ROS 2 Jazzy · Gazebo Harmonic · M15 · 따라 하기형 AGV 실습</a:t>
+              <a:t>ROS 2 기반 AGV End-to-End 개발 커리큘럼 · M15 · Block D</a:t>
             </a:r>
           </a:p>
         </p:txBody>
@@ -17453,7 +17453,7 @@
               <a:spcAft>
                 <a:spcPts val="0"/>
               </a:spcAft>
-              <a:defRPr sz="1000" b="0">
+              <a:defRPr sz="900" b="0">
                 <a:solidFill>
                   <a:srgbClr val="5C6672"/>
                 </a:solidFill>
@@ -17461,7 +17461,7 @@
               </a:defRPr>
             </a:pPr>
             <a:r>
-              <a:t>ROS 2 Jazzy · Gazebo Harmonic · M15 · 따라 하기형 AGV 실습</a:t>
+              <a:t>ROS 2 기반 AGV End-to-End 개발 커리큘럼 · M15 · Block D</a:t>
             </a:r>
           </a:p>
         </p:txBody>
@@ -17981,7 +17981,7 @@
               <a:spcAft>
                 <a:spcPts val="0"/>
               </a:spcAft>
-              <a:defRPr sz="1000" b="0">
+              <a:defRPr sz="900" b="0">
                 <a:solidFill>
                   <a:srgbClr val="5C6672"/>
                 </a:solidFill>
@@ -17989,7 +17989,7 @@
               </a:defRPr>
             </a:pPr>
             <a:r>
-              <a:t>ROS 2 Jazzy · Gazebo Harmonic · M15 · 따라 하기형 AGV 실습</a:t>
+              <a:t>ROS 2 기반 AGV End-to-End 개발 커리큘럼 · M15 · Block D</a:t>
             </a:r>
           </a:p>
         </p:txBody>
@@ -18770,7 +18770,7 @@
               <a:spcAft>
                 <a:spcPts val="0"/>
               </a:spcAft>
-              <a:defRPr sz="1000" b="0">
+              <a:defRPr sz="900" b="0">
                 <a:solidFill>
                   <a:srgbClr val="5C6672"/>
                 </a:solidFill>
@@ -18778,7 +18778,7 @@
               </a:defRPr>
             </a:pPr>
             <a:r>
-              <a:t>ROS 2 Jazzy · Gazebo Harmonic · M15 · 따라 하기형 AGV 실습</a:t>
+              <a:t>ROS 2 기반 AGV End-to-End 개발 커리큘럼 · M15 · Block D</a:t>
             </a:r>
           </a:p>
         </p:txBody>
@@ -19559,7 +19559,7 @@
               <a:spcAft>
                 <a:spcPts val="0"/>
               </a:spcAft>
-              <a:defRPr sz="1000" b="0">
+              <a:defRPr sz="900" b="0">
                 <a:solidFill>
                   <a:srgbClr val="5C6672"/>
                 </a:solidFill>
@@ -19567,7 +19567,7 @@
               </a:defRPr>
             </a:pPr>
             <a:r>
-              <a:t>ROS 2 Jazzy · Gazebo Harmonic · M15 · 따라 하기형 AGV 실습</a:t>
+              <a:t>ROS 2 기반 AGV End-to-End 개발 커리큘럼 · M15 · Block D</a:t>
             </a:r>
           </a:p>
         </p:txBody>
@@ -20356,7 +20356,7 @@
               <a:spcAft>
                 <a:spcPts val="0"/>
               </a:spcAft>
-              <a:defRPr sz="1000" b="0">
+              <a:defRPr sz="900" b="0">
                 <a:solidFill>
                   <a:srgbClr val="5C6672"/>
                 </a:solidFill>
@@ -20364,7 +20364,7 @@
               </a:defRPr>
             </a:pPr>
             <a:r>
-              <a:t>ROS 2 Jazzy · Gazebo Harmonic · M15 · 따라 하기형 AGV 실습</a:t>
+              <a:t>ROS 2 기반 AGV End-to-End 개발 커리큘럼 · M15 · Block D</a:t>
             </a:r>
           </a:p>
         </p:txBody>
@@ -21149,7 +21149,7 @@
               <a:spcAft>
                 <a:spcPts val="0"/>
               </a:spcAft>
-              <a:defRPr sz="1000" b="0">
+              <a:defRPr sz="900" b="0">
                 <a:solidFill>
                   <a:srgbClr val="5C6672"/>
                 </a:solidFill>
@@ -21157,7 +21157,7 @@
               </a:defRPr>
             </a:pPr>
             <a:r>
-              <a:t>ROS 2 Jazzy · Gazebo Harmonic · M15 · 따라 하기형 AGV 실습</a:t>
+              <a:t>ROS 2 기반 AGV End-to-End 개발 커리큘럼 · M15 · Block D</a:t>
             </a:r>
           </a:p>
         </p:txBody>
@@ -21718,7 +21718,7 @@
               <a:spcAft>
                 <a:spcPts val="0"/>
               </a:spcAft>
-              <a:defRPr sz="1000" b="0">
+              <a:defRPr sz="900" b="0">
                 <a:solidFill>
                   <a:srgbClr val="5C6672"/>
                 </a:solidFill>
@@ -21726,7 +21726,7 @@
               </a:defRPr>
             </a:pPr>
             <a:r>
-              <a:t>ROS 2 Jazzy · Gazebo Harmonic · M15 · 따라 하기형 AGV 실습</a:t>
+              <a:t>ROS 2 기반 AGV End-to-End 개발 커리큘럼 · M15 · Block D</a:t>
             </a:r>
           </a:p>
         </p:txBody>
@@ -22137,7 +22137,7 @@
               <a:spcAft>
                 <a:spcPts val="0"/>
               </a:spcAft>
-              <a:defRPr sz="1000" b="0">
+              <a:defRPr sz="900" b="0">
                 <a:solidFill>
                   <a:srgbClr val="5C6672"/>
                 </a:solidFill>
@@ -22145,7 +22145,7 @@
               </a:defRPr>
             </a:pPr>
             <a:r>
-              <a:t>ROS 2 Jazzy · Gazebo Harmonic · M15 · 따라 하기형 AGV 실습</a:t>
+              <a:t>ROS 2 기반 AGV End-to-End 개발 커리큘럼 · M15 · Block D</a:t>
             </a:r>
           </a:p>
         </p:txBody>
@@ -22605,7 +22605,7 @@
               <a:spcAft>
                 <a:spcPts val="0"/>
               </a:spcAft>
-              <a:defRPr sz="1000" b="0">
+              <a:defRPr sz="900" b="0">
                 <a:solidFill>
                   <a:srgbClr val="5C6672"/>
                 </a:solidFill>
@@ -22613,7 +22613,7 @@
               </a:defRPr>
             </a:pPr>
             <a:r>
-              <a:t>ROS 2 Jazzy · Gazebo Harmonic · M15 · 따라 하기형 AGV 실습</a:t>
+              <a:t>ROS 2 기반 AGV End-to-End 개발 커리큘럼 · M15 · Block D</a:t>
             </a:r>
           </a:p>
         </p:txBody>
@@ -23073,7 +23073,7 @@
               <a:spcAft>
                 <a:spcPts val="0"/>
               </a:spcAft>
-              <a:defRPr sz="1000" b="0">
+              <a:defRPr sz="900" b="0">
                 <a:solidFill>
                   <a:srgbClr val="5C6672"/>
                 </a:solidFill>
@@ -23081,7 +23081,7 @@
               </a:defRPr>
             </a:pPr>
             <a:r>
-              <a:t>ROS 2 Jazzy · Gazebo Harmonic · M15 · 따라 하기형 AGV 실습</a:t>
+              <a:t>ROS 2 기반 AGV End-to-End 개발 커리큘럼 · M15 · Block D</a:t>
             </a:r>
           </a:p>
         </p:txBody>
@@ -23539,7 +23539,7 @@
               <a:spcAft>
                 <a:spcPts val="0"/>
               </a:spcAft>
-              <a:defRPr sz="1000" b="0">
+              <a:defRPr sz="900" b="0">
                 <a:solidFill>
                   <a:srgbClr val="5C6672"/>
                 </a:solidFill>
@@ -23547,7 +23547,7 @@
               </a:defRPr>
             </a:pPr>
             <a:r>
-              <a:t>ROS 2 Jazzy · Gazebo Harmonic · M15 · 따라 하기형 AGV 실습</a:t>
+              <a:t>ROS 2 기반 AGV End-to-End 개발 커리큘럼 · M15 · Block D</a:t>
             </a:r>
           </a:p>
         </p:txBody>
@@ -24067,7 +24067,7 @@
               <a:spcAft>
                 <a:spcPts val="0"/>
               </a:spcAft>
-              <a:defRPr sz="1000" b="0">
+              <a:defRPr sz="900" b="0">
                 <a:solidFill>
                   <a:srgbClr val="5C6672"/>
                 </a:solidFill>
@@ -24075,7 +24075,7 @@
               </a:defRPr>
             </a:pPr>
             <a:r>
-              <a:t>ROS 2 Jazzy · Gazebo Harmonic · M15 · 따라 하기형 AGV 실습</a:t>
+              <a:t>ROS 2 기반 AGV End-to-End 개발 커리큘럼 · M15 · Block D</a:t>
             </a:r>
           </a:p>
         </p:txBody>
@@ -24856,7 +24856,7 @@
               <a:spcAft>
                 <a:spcPts val="0"/>
               </a:spcAft>
-              <a:defRPr sz="1000" b="0">
+              <a:defRPr sz="900" b="0">
                 <a:solidFill>
                   <a:srgbClr val="5C6672"/>
                 </a:solidFill>
@@ -24864,7 +24864,7 @@
               </a:defRPr>
             </a:pPr>
             <a:r>
-              <a:t>ROS 2 Jazzy · Gazebo Harmonic · M15 · 따라 하기형 AGV 실습</a:t>
+              <a:t>ROS 2 기반 AGV End-to-End 개발 커리큘럼 · M15 · Block D</a:t>
             </a:r>
           </a:p>
         </p:txBody>
@@ -25645,7 +25645,7 @@
               <a:spcAft>
                 <a:spcPts val="0"/>
               </a:spcAft>
-              <a:defRPr sz="1000" b="0">
+              <a:defRPr sz="900" b="0">
                 <a:solidFill>
                   <a:srgbClr val="5C6672"/>
                 </a:solidFill>
@@ -25653,7 +25653,7 @@
               </a:defRPr>
             </a:pPr>
             <a:r>
-              <a:t>ROS 2 Jazzy · Gazebo Harmonic · M15 · 따라 하기형 AGV 실습</a:t>
+              <a:t>ROS 2 기반 AGV End-to-End 개발 커리큘럼 · M15 · Block D</a:t>
             </a:r>
           </a:p>
         </p:txBody>
@@ -26438,7 +26438,7 @@
               <a:spcAft>
                 <a:spcPts val="0"/>
               </a:spcAft>
-              <a:defRPr sz="1000" b="0">
+              <a:defRPr sz="900" b="0">
                 <a:solidFill>
                   <a:srgbClr val="5C6672"/>
                 </a:solidFill>
@@ -26446,7 +26446,7 @@
               </a:defRPr>
             </a:pPr>
             <a:r>
-              <a:t>ROS 2 Jazzy · Gazebo Harmonic · M15 · 따라 하기형 AGV 실습</a:t>
+              <a:t>ROS 2 기반 AGV End-to-End 개발 커리큘럼 · M15 · Block D</a:t>
             </a:r>
           </a:p>
         </p:txBody>
@@ -27227,7 +27227,7 @@
               <a:spcAft>
                 <a:spcPts val="0"/>
               </a:spcAft>
-              <a:defRPr sz="1000" b="0">
+              <a:defRPr sz="900" b="0">
                 <a:solidFill>
                   <a:srgbClr val="5C6672"/>
                 </a:solidFill>
@@ -27235,7 +27235,7 @@
               </a:defRPr>
             </a:pPr>
             <a:r>
-              <a:t>ROS 2 Jazzy · Gazebo Harmonic · M15 · 따라 하기형 AGV 실습</a:t>
+              <a:t>ROS 2 기반 AGV End-to-End 개발 커리큘럼 · M15 · Block D</a:t>
             </a:r>
           </a:p>
         </p:txBody>
@@ -27796,7 +27796,7 @@
               <a:spcAft>
                 <a:spcPts val="0"/>
               </a:spcAft>
-              <a:defRPr sz="1000" b="0">
+              <a:defRPr sz="900" b="0">
                 <a:solidFill>
                   <a:srgbClr val="5C6672"/>
                 </a:solidFill>
@@ -27804,7 +27804,7 @@
               </a:defRPr>
             </a:pPr>
             <a:r>
-              <a:t>ROS 2 Jazzy · Gazebo Harmonic · M15 · 따라 하기형 AGV 실습</a:t>
+              <a:t>ROS 2 기반 AGV End-to-End 개발 커리큘럼 · M15 · Block D</a:t>
             </a:r>
           </a:p>
         </p:txBody>
@@ -28261,7 +28261,7 @@
               <a:spcAft>
                 <a:spcPts val="0"/>
               </a:spcAft>
-              <a:defRPr sz="1000" b="0">
+              <a:defRPr sz="900" b="0">
                 <a:solidFill>
                   <a:srgbClr val="5C6672"/>
                 </a:solidFill>
@@ -28269,7 +28269,7 @@
               </a:defRPr>
             </a:pPr>
             <a:r>
-              <a:t>ROS 2 Jazzy · Gazebo Harmonic · M15 · 따라 하기형 AGV 실습</a:t>
+              <a:t>ROS 2 기반 AGV End-to-End 개발 커리큘럼 · M15 · Block D</a:t>
             </a:r>
           </a:p>
         </p:txBody>
@@ -28594,7 +28594,7 @@
               <a:spcAft>
                 <a:spcPts val="0"/>
               </a:spcAft>
-              <a:defRPr sz="1000" b="0">
+              <a:defRPr sz="900" b="0">
                 <a:solidFill>
                   <a:srgbClr val="5C6672"/>
                 </a:solidFill>
@@ -28602,7 +28602,7 @@
               </a:defRPr>
             </a:pPr>
             <a:r>
-              <a:t>ROS 2 Jazzy · Gazebo Harmonic · M15 · 따라 하기형 AGV 실습</a:t>
+              <a:t>ROS 2 기반 AGV End-to-End 개발 커리큘럼 · M15 · Block D</a:t>
             </a:r>
           </a:p>
         </p:txBody>
@@ -29065,7 +29065,7 @@
               <a:spcAft>
                 <a:spcPts val="0"/>
               </a:spcAft>
-              <a:defRPr sz="1000" b="0">
+              <a:defRPr sz="900" b="0">
                 <a:solidFill>
                   <a:srgbClr val="5C6672"/>
                 </a:solidFill>
@@ -29073,7 +29073,7 @@
               </a:defRPr>
             </a:pPr>
             <a:r>
-              <a:t>ROS 2 Jazzy · Gazebo Harmonic · M15 · 따라 하기형 AGV 실습</a:t>
+              <a:t>ROS 2 기반 AGV End-to-End 개발 커리큘럼 · M15 · Block D</a:t>
             </a:r>
           </a:p>
         </p:txBody>
@@ -29507,7 +29507,7 @@
               <a:spcAft>
                 <a:spcPts val="0"/>
               </a:spcAft>
-              <a:defRPr sz="1000" b="0">
+              <a:defRPr sz="900" b="0">
                 <a:solidFill>
                   <a:srgbClr val="5C6672"/>
                 </a:solidFill>
@@ -29515,7 +29515,7 @@
               </a:defRPr>
             </a:pPr>
             <a:r>
-              <a:t>ROS 2 Jazzy · Gazebo Harmonic · M15 · 따라 하기형 AGV 실습</a:t>
+              <a:t>ROS 2 기반 AGV End-to-End 개발 커리큘럼 · M15 · Block D</a:t>
             </a:r>
           </a:p>
         </p:txBody>
@@ -29957,7 +29957,7 @@
               <a:spcAft>
                 <a:spcPts val="0"/>
               </a:spcAft>
-              <a:defRPr sz="1000" b="0">
+              <a:defRPr sz="900" b="0">
                 <a:solidFill>
                   <a:srgbClr val="5C6672"/>
                 </a:solidFill>
@@ -29965,7 +29965,7 @@
               </a:defRPr>
             </a:pPr>
             <a:r>
-              <a:t>ROS 2 Jazzy · Gazebo Harmonic · M15 · 따라 하기형 AGV 실습</a:t>
+              <a:t>ROS 2 기반 AGV End-to-End 개발 커리큘럼 · M15 · Block D</a:t>
             </a:r>
           </a:p>
         </p:txBody>
@@ -30411,7 +30411,7 @@
               <a:spcAft>
                 <a:spcPts val="0"/>
               </a:spcAft>
-              <a:defRPr sz="1000" b="0">
+              <a:defRPr sz="900" b="0">
                 <a:solidFill>
                   <a:srgbClr val="5C6672"/>
                 </a:solidFill>
@@ -30419,7 +30419,7 @@
               </a:defRPr>
             </a:pPr>
             <a:r>
-              <a:t>ROS 2 Jazzy · Gazebo Harmonic · M15 · 따라 하기형 AGV 실습</a:t>
+              <a:t>ROS 2 기반 AGV End-to-End 개발 커리큘럼 · M15 · Block D</a:t>
             </a:r>
           </a:p>
         </p:txBody>
@@ -30779,7 +30779,7 @@
               <a:spcAft>
                 <a:spcPts val="0"/>
               </a:spcAft>
-              <a:defRPr sz="1000" b="0">
+              <a:defRPr sz="900" b="0">
                 <a:solidFill>
                   <a:srgbClr val="5C6672"/>
                 </a:solidFill>
@@ -30787,7 +30787,7 @@
               </a:defRPr>
             </a:pPr>
             <a:r>
-              <a:t>ROS 2 Jazzy · Gazebo Harmonic · M15 · 따라 하기형 AGV 실습</a:t>
+              <a:t>ROS 2 기반 AGV End-to-End 개발 커리큘럼 · M15 · Block D</a:t>
             </a:r>
           </a:p>
         </p:txBody>
@@ -31016,7 +31016,7 @@
               <a:spcAft>
                 <a:spcPts val="0"/>
               </a:spcAft>
-              <a:defRPr sz="1000" b="0">
+              <a:defRPr sz="900" b="0">
                 <a:solidFill>
                   <a:srgbClr val="5C6672"/>
                 </a:solidFill>
@@ -31024,7 +31024,7 @@
               </a:defRPr>
             </a:pPr>
             <a:r>
-              <a:t>ROS 2 Jazzy · Gazebo Harmonic · M15 · 따라 하기형 AGV 실습</a:t>
+              <a:t>ROS 2 기반 AGV End-to-End 개발 커리큘럼 · M15 · Block D</a:t>
             </a:r>
           </a:p>
         </p:txBody>
@@ -31427,7 +31427,7 @@
               <a:spcAft>
                 <a:spcPts val="0"/>
               </a:spcAft>
-              <a:defRPr sz="1000" b="0">
+              <a:defRPr sz="900" b="0">
                 <a:solidFill>
                   <a:srgbClr val="5C6672"/>
                 </a:solidFill>
@@ -31435,7 +31435,7 @@
               </a:defRPr>
             </a:pPr>
             <a:r>
-              <a:t>ROS 2 Jazzy · Gazebo Harmonic · M15 · 따라 하기형 AGV 실습</a:t>
+              <a:t>ROS 2 기반 AGV End-to-End 개발 커리큘럼 · M15 · Block D</a:t>
             </a:r>
           </a:p>
         </p:txBody>
@@ -31952,7 +31952,7 @@
               <a:spcAft>
                 <a:spcPts val="0"/>
               </a:spcAft>
-              <a:defRPr sz="1000" b="0">
+              <a:defRPr sz="900" b="0">
                 <a:solidFill>
                   <a:srgbClr val="5C6672"/>
                 </a:solidFill>
@@ -31960,7 +31960,7 @@
               </a:defRPr>
             </a:pPr>
             <a:r>
-              <a:t>ROS 2 Jazzy · Gazebo Harmonic · M15 · 따라 하기형 AGV 실습</a:t>
+              <a:t>ROS 2 기반 AGV End-to-End 개발 커리큘럼 · M15 · Block D</a:t>
             </a:r>
           </a:p>
         </p:txBody>
@@ -32336,7 +32336,7 @@
               <a:spcAft>
                 <a:spcPts val="0"/>
               </a:spcAft>
-              <a:defRPr sz="1000" b="0">
+              <a:defRPr sz="900" b="0">
                 <a:solidFill>
                   <a:srgbClr val="5C6672"/>
                 </a:solidFill>
@@ -32344,7 +32344,7 @@
               </a:defRPr>
             </a:pPr>
             <a:r>
-              <a:t>ROS 2 Jazzy · Gazebo Harmonic · M15 · 따라 하기형 AGV 실습</a:t>
+              <a:t>ROS 2 기반 AGV End-to-End 개발 커리큘럼 · M15 · Block D</a:t>
             </a:r>
           </a:p>
         </p:txBody>
@@ -32665,7 +32665,7 @@
               <a:spcAft>
                 <a:spcPts val="0"/>
               </a:spcAft>
-              <a:defRPr sz="1000" b="0">
+              <a:defRPr sz="900" b="0">
                 <a:solidFill>
                   <a:srgbClr val="5C6672"/>
                 </a:solidFill>
@@ -32673,7 +32673,7 @@
               </a:defRPr>
             </a:pPr>
             <a:r>
-              <a:t>ROS 2 Jazzy · Gazebo Harmonic · M15 · 따라 하기형 AGV 실습</a:t>
+              <a:t>ROS 2 기반 AGV End-to-End 개발 커리큘럼 · M15 · Block D</a:t>
             </a:r>
           </a:p>
         </p:txBody>
@@ -33305,7 +33305,7 @@
               <a:spcAft>
                 <a:spcPts val="0"/>
               </a:spcAft>
-              <a:defRPr sz="1000" b="0">
+              <a:defRPr sz="900" b="0">
                 <a:solidFill>
                   <a:srgbClr val="5C6672"/>
                 </a:solidFill>
@@ -33313,7 +33313,7 @@
               </a:defRPr>
             </a:pPr>
             <a:r>
-              <a:t>ROS 2 Jazzy · Gazebo Harmonic · M15 · 따라 하기형 AGV 실습</a:t>
+              <a:t>ROS 2 기반 AGV End-to-End 개발 커리큘럼 · M15 · Block D</a:t>
             </a:r>
           </a:p>
         </p:txBody>
@@ -33724,7 +33724,7 @@
               <a:spcAft>
                 <a:spcPts val="0"/>
               </a:spcAft>
-              <a:defRPr sz="1000" b="0">
+              <a:defRPr sz="900" b="0">
                 <a:solidFill>
                   <a:srgbClr val="5C6672"/>
                 </a:solidFill>
@@ -33732,7 +33732,7 @@
               </a:defRPr>
             </a:pPr>
             <a:r>
-              <a:t>ROS 2 Jazzy · Gazebo Harmonic · M15 · 따라 하기형 AGV 실습</a:t>
+              <a:t>ROS 2 기반 AGV End-to-End 개발 커리큘럼 · M15 · Block D</a:t>
             </a:r>
           </a:p>
         </p:txBody>
@@ -34255,7 +34255,7 @@
               <a:spcAft>
                 <a:spcPts val="0"/>
               </a:spcAft>
-              <a:defRPr sz="1000" b="0">
+              <a:defRPr sz="900" b="0">
                 <a:solidFill>
                   <a:srgbClr val="5C6672"/>
                 </a:solidFill>
@@ -34263,7 +34263,7 @@
               </a:defRPr>
             </a:pPr>
             <a:r>
-              <a:t>ROS 2 Jazzy · Gazebo Harmonic · M15 · 따라 하기형 AGV 실습</a:t>
+              <a:t>ROS 2 기반 AGV End-to-End 개발 커리큘럼 · M15 · Block D</a:t>
             </a:r>
           </a:p>
         </p:txBody>
@@ -34492,7 +34492,7 @@
               <a:spcAft>
                 <a:spcPts val="0"/>
               </a:spcAft>
-              <a:defRPr sz="1000" b="0">
+              <a:defRPr sz="900" b="0">
                 <a:solidFill>
                   <a:srgbClr val="5C6672"/>
                 </a:solidFill>
@@ -34500,7 +34500,7 @@
               </a:defRPr>
             </a:pPr>
             <a:r>
-              <a:t>ROS 2 Jazzy · Gazebo Harmonic · M15 · 따라 하기형 AGV 실습</a:t>
+              <a:t>ROS 2 기반 AGV End-to-End 개발 커리큘럼 · M15 · Block D</a:t>
             </a:r>
           </a:p>
         </p:txBody>
@@ -34729,7 +34729,7 @@
               <a:spcAft>
                 <a:spcPts val="0"/>
               </a:spcAft>
-              <a:defRPr sz="1000" b="0">
+              <a:defRPr sz="900" b="0">
                 <a:solidFill>
                   <a:srgbClr val="5C6672"/>
                 </a:solidFill>
@@ -34737,7 +34737,7 @@
               </a:defRPr>
             </a:pPr>
             <a:r>
-              <a:t>ROS 2 Jazzy · Gazebo Harmonic · M15 · 따라 하기형 AGV 실습</a:t>
+              <a:t>ROS 2 기반 AGV End-to-End 개발 커리큘럼 · M15 · Block D</a:t>
             </a:r>
           </a:p>
         </p:txBody>
@@ -34966,7 +34966,7 @@
               <a:spcAft>
                 <a:spcPts val="0"/>
               </a:spcAft>
-              <a:defRPr sz="1000" b="0">
+              <a:defRPr sz="900" b="0">
                 <a:solidFill>
                   <a:srgbClr val="5C6672"/>
                 </a:solidFill>
@@ -34974,7 +34974,7 @@
               </a:defRPr>
             </a:pPr>
             <a:r>
-              <a:t>ROS 2 Jazzy · Gazebo Harmonic · M15 · 따라 하기형 AGV 실습</a:t>
+              <a:t>ROS 2 기반 AGV End-to-End 개발 커리큘럼 · M15 · Block D</a:t>
             </a:r>
           </a:p>
         </p:txBody>

--- a/blocks/D_sensors/M15_sensor_operations/M15_센서_운영과_동기화.pptx
+++ b/blocks/D_sensors/M15_sensor_operations/M15_센서_운영과_동기화.pptx
@@ -56,6 +56,10 @@
     <p:sldId id="304" r:id="rId56"/>
     <p:sldId id="305" r:id="rId57"/>
     <p:sldId id="306" r:id="rId58"/>
+    <p:sldId id="307" r:id="rId59"/>
+    <p:sldId id="308" r:id="rId60"/>
+    <p:sldId id="309" r:id="rId61"/>
+    <p:sldId id="310" r:id="rId62"/>
   </p:sldIdLst>
   <p:sldSz cx="12191999" cy="6858000" type="screen4x3"/>
   <p:notesSz cx="6858000" cy="9144000"/>
@@ -4107,7 +4111,7 @@
           </a:p>
           <a:p>
             <a:r>
-              <a:t>[확인] ① 명령/설정  ② 정상 출력 또는 화면  ③ 다음 검증 명령으로 재확인</a:t>
+              <a:t>[확인] camera가 message를 내보내고 있는지 type·publisher·rate로 확인합니다.</a:t>
             </a:r>
           </a:p>
           <a:p>
@@ -4187,32 +4191,17 @@
           <a:lstStyle/>
           <a:p>
             <a:r>
-              <a:t>[설명] 검증 명령은 GUI 결과와 별도로 실행해 재현 가능한 완료 기준을 만든다.</a:t>
-            </a:r>
-          </a:p>
-          <a:p>
-            <a:r>
-              <a:t>[실행] ros2 topic echo /clock --once</a:t>
-            </a:r>
-          </a:p>
-          <a:p>
-            <a:r>
-              <a:t>ros2 topic hz /scan</a:t>
-            </a:r>
-          </a:p>
-          <a:p>
-            <a:r>
-              <a:t>ros2 topic hz /imu/data</a:t>
-            </a:r>
-          </a:p>
-          <a:p>
-            <a:r>
-              <a:t>ros2 param get /lidar_processor use_sim_time</a:t>
-            </a:r>
-          </a:p>
-          <a:p>
-            <a:r>
-              <a:t>[확인] 모든 sensor 노드가 같은 시뮬레이션 시간과 기대 publish rate를 사용한다.</a:t>
+              <a:t>[설명] 실제 Ubuntu/ROS 2 환경에서 생성한 검증 화면이다.</a:t>
+            </a:r>
+          </a:p>
+          <a:p>
+            <a:r>
+              <a:t>[실행] 슬라이드의 명령 또는 파일 작성 단계를 진행한다.</a:t>
+            </a:r>
+          </a:p>
+          <a:p>
+            <a:r>
+              <a:t>[확인] SDF 설정값과 실제 range/angle/rate가 논리적으로 맞는지 대조합니다.</a:t>
             </a:r>
           </a:p>
           <a:p>
@@ -4292,7 +4281,7 @@
           <a:lstStyle/>
           <a:p>
             <a:r>
-              <a:t>[설명] 오류를 대신 해결하지 말고 증상부터 우선 확인 순서대로 교육생이 실행하게 한다.</a:t>
+              <a:t>[설명] 실제 Ubuntu/ROS 2 환경에서 생성한 검증 화면이다.</a:t>
             </a:r>
           </a:p>
           <a:p>
@@ -4302,7 +4291,7 @@
           </a:p>
           <a:p>
             <a:r>
-              <a:t>[확인] 수정 뒤 첫 검증 명령을 다시 실행한다.</a:t>
+              <a:t>[확인] IMU도 같은 simulation 시간에 갱신되는지 average rate를 확인합니다.</a:t>
             </a:r>
           </a:p>
           <a:p>
@@ -4312,7 +4301,7 @@
           </a:p>
           <a:p>
             <a:r>
-              <a:t>[오류] 슬라이드의 두 대표 오류를 먼저 사용한다.</a:t>
+              <a:t>[오류] 오류가 나면 현재 폴더, source, 파일 경로를 먼저 확인한다.</a:t>
             </a:r>
           </a:p>
         </p:txBody>
@@ -4382,37 +4371,17 @@
           <a:lstStyle/>
           <a:p>
             <a:r>
-              <a:t>[설명] Complete는 정답 복사본이 아니라 막혔을 때 비교·복구하는 안전망이다.</a:t>
-            </a:r>
-          </a:p>
-          <a:p>
-            <a:r>
-              <a:t>[실행] cd ~/ros2_curri</a:t>
-            </a:r>
-          </a:p>
-          <a:p>
-            <a:r>
-              <a:t>diff -ru my_agv_ws/src blocks/D_sensors/M15_sensor_operations/complete/agv_ws/src || true</a:t>
-            </a:r>
-          </a:p>
-          <a:p>
-            <a:r>
-              <a:t>cp -a my_agv_ws/src my_agv_ws/src_before_M15</a:t>
-            </a:r>
-          </a:p>
-          <a:p>
-            <a:r>
-              <a:t>cp -a blocks/D_sensors/M15_sensor_operations/complete/agv_ws/src/. my_agv_ws/src/</a:t>
-            </a:r>
-          </a:p>
-          <a:p>
-            <a:r>
-              <a:t>cd my_agv_ws &amp;&amp; colcon build --symlink-install &amp;&amp; source install/setup.bash</a:t>
-            </a:r>
-          </a:p>
-          <a:p>
-            <a:r>
-              <a:t>[확인] diff에서 내 파일과 Complete의 차이를 설명할 수 있다.</a:t>
+              <a:t>[설명] 실제 Ubuntu/ROS 2 환경에서 생성한 검증 화면이다.</a:t>
+            </a:r>
+          </a:p>
+          <a:p>
+            <a:r>
+              <a:t>[실행] 슬라이드의 명령 또는 파일 작성 단계를 진행한다.</a:t>
+            </a:r>
+          </a:p>
+          <a:p>
+            <a:r>
+              <a:t>[확인] camera·LiDAR·IMU 각각을 화면·terminal·frame 기준으로 교차 확인합니다.</a:t>
             </a:r>
           </a:p>
           <a:p>
@@ -4492,7 +4461,7 @@
           <a:lstStyle/>
           <a:p>
             <a:r>
-              <a:t>[설명] 교육생이 직접 한 값만 바꿔 원인과 결과를 연결하게 한다.</a:t>
+              <a:t>[설명] 실제 Ubuntu/ROS 2 환경에서 생성한 검증 화면이다.</a:t>
             </a:r>
           </a:p>
           <a:p>
@@ -4502,7 +4471,7 @@
           </a:p>
           <a:p>
             <a:r>
-              <a:t>[확인] 원래 값과 변경 값을 모두 기록한다.</a:t>
+              <a:t>[확인] ① 명령/설정  ② 정상 출력 또는 화면  ③ 다음 검증 명령으로 재확인</a:t>
             </a:r>
           </a:p>
           <a:p>
@@ -4672,17 +4641,32 @@
           <a:lstStyle/>
           <a:p>
             <a:r>
-              <a:t>[설명] 교육생이 자신의 workspace·캡처·로그를 저장했는지 확인하고 다음 모듈의 시작 상태를 읽는다.</a:t>
-            </a:r>
-          </a:p>
-          <a:p>
-            <a:r>
-              <a:t>[실행] 슬라이드의 명령 또는 파일 작성 단계를 진행한다.</a:t>
-            </a:r>
-          </a:p>
-          <a:p>
-            <a:r>
-              <a:t>[확인] M16 제어 interface 시작 조건을 말할 수 있다.</a:t>
+              <a:t>[설명] 검증 명령은 GUI 결과와 별도로 실행해 재현 가능한 완료 기준을 만든다.</a:t>
+            </a:r>
+          </a:p>
+          <a:p>
+            <a:r>
+              <a:t>[실행] ros2 topic echo /clock --once</a:t>
+            </a:r>
+          </a:p>
+          <a:p>
+            <a:r>
+              <a:t>ros2 topic hz /scan</a:t>
+            </a:r>
+          </a:p>
+          <a:p>
+            <a:r>
+              <a:t>ros2 topic hz /imu/data</a:t>
+            </a:r>
+          </a:p>
+          <a:p>
+            <a:r>
+              <a:t>ros2 param get /lidar_processor use_sim_time</a:t>
+            </a:r>
+          </a:p>
+          <a:p>
+            <a:r>
+              <a:t>[확인] 모든 sensor 노드가 같은 시뮬레이션 시간과 기대 publish rate를 사용한다.</a:t>
             </a:r>
           </a:p>
           <a:p>
@@ -4718,6 +4702,386 @@
 </file>
 
 <file path=ppt/notesSlides/notesSlide51.xml><?xml version="1.0" encoding="utf-8"?>
+<p:notes xmlns:a="http://schemas.openxmlformats.org/drawingml/2006/main" xmlns:p="http://schemas.openxmlformats.org/presentationml/2006/main" xmlns:r="http://schemas.openxmlformats.org/officeDocument/2006/relationships">
+  <p:cSld>
+    <p:spTree>
+      <p:nvGrpSpPr>
+        <p:cNvPr id="1" name=""/>
+        <p:cNvGrpSpPr/>
+        <p:nvPr/>
+      </p:nvGrpSpPr>
+      <p:grpSpPr>
+        <a:xfrm>
+          <a:off x="0" y="0"/>
+          <a:ext cx="0" cy="0"/>
+          <a:chOff x="0" y="0"/>
+          <a:chExt cx="0" cy="0"/>
+        </a:xfrm>
+      </p:grpSpPr>
+      <p:sp>
+        <p:nvSpPr>
+          <p:cNvPr id="2" name="Slide Image Placeholder 1"/>
+          <p:cNvSpPr>
+            <a:spLocks noGrp="1"/>
+          </p:cNvSpPr>
+          <p:nvPr>
+            <p:ph type="sldImg" idx="2"/>
+          </p:nvPr>
+        </p:nvSpPr>
+        <p:spPr/>
+      </p:sp>
+      <p:sp>
+        <p:nvSpPr>
+          <p:cNvPr id="3" name="Notes Placeholder 2"/>
+          <p:cNvSpPr>
+            <a:spLocks noGrp="1"/>
+          </p:cNvSpPr>
+          <p:nvPr>
+            <p:ph type="body" idx="3" sz="quarter"/>
+          </p:nvPr>
+        </p:nvSpPr>
+        <p:spPr/>
+        <p:txBody>
+          <a:bodyPr/>
+          <a:lstStyle/>
+          <a:p>
+            <a:r>
+              <a:t>[설명] 오류를 대신 해결하지 말고 증상부터 우선 확인 순서대로 교육생이 실행하게 한다.</a:t>
+            </a:r>
+          </a:p>
+          <a:p>
+            <a:r>
+              <a:t>[실행] 슬라이드의 명령 또는 파일 작성 단계를 진행한다.</a:t>
+            </a:r>
+          </a:p>
+          <a:p>
+            <a:r>
+              <a:t>[확인] 수정 뒤 첫 검증 명령을 다시 실행한다.</a:t>
+            </a:r>
+          </a:p>
+          <a:p>
+            <a:r>
+              <a:t>[멈춤] 교육생이 현재 체크포인트를 통과할 때까지 기다린다.</a:t>
+            </a:r>
+          </a:p>
+          <a:p>
+            <a:r>
+              <a:t>[오류] 슬라이드의 두 대표 오류를 먼저 사용한다.</a:t>
+            </a:r>
+          </a:p>
+        </p:txBody>
+      </p:sp>
+      <p:sp>
+        <p:nvSpPr>
+          <p:cNvPr id="4" name="Slide Number Placeholder 3"/>
+          <p:cNvSpPr>
+            <a:spLocks noGrp="1"/>
+          </p:cNvSpPr>
+          <p:nvPr>
+            <p:ph type="sldNum" idx="5" sz="quarter"/>
+          </p:nvPr>
+        </p:nvSpPr>
+        <p:spPr/>
+      </p:sp>
+    </p:spTree>
+  </p:cSld>
+  <p:clrMapOvr>
+    <a:masterClrMapping/>
+  </p:clrMapOvr>
+</p:notes>
+</file>
+
+<file path=ppt/notesSlides/notesSlide52.xml><?xml version="1.0" encoding="utf-8"?>
+<p:notes xmlns:a="http://schemas.openxmlformats.org/drawingml/2006/main" xmlns:p="http://schemas.openxmlformats.org/presentationml/2006/main" xmlns:r="http://schemas.openxmlformats.org/officeDocument/2006/relationships">
+  <p:cSld>
+    <p:spTree>
+      <p:nvGrpSpPr>
+        <p:cNvPr id="1" name=""/>
+        <p:cNvGrpSpPr/>
+        <p:nvPr/>
+      </p:nvGrpSpPr>
+      <p:grpSpPr>
+        <a:xfrm>
+          <a:off x="0" y="0"/>
+          <a:ext cx="0" cy="0"/>
+          <a:chOff x="0" y="0"/>
+          <a:chExt cx="0" cy="0"/>
+        </a:xfrm>
+      </p:grpSpPr>
+      <p:sp>
+        <p:nvSpPr>
+          <p:cNvPr id="2" name="Slide Image Placeholder 1"/>
+          <p:cNvSpPr>
+            <a:spLocks noGrp="1"/>
+          </p:cNvSpPr>
+          <p:nvPr>
+            <p:ph type="sldImg" idx="2"/>
+          </p:nvPr>
+        </p:nvSpPr>
+        <p:spPr/>
+      </p:sp>
+      <p:sp>
+        <p:nvSpPr>
+          <p:cNvPr id="3" name="Notes Placeholder 2"/>
+          <p:cNvSpPr>
+            <a:spLocks noGrp="1"/>
+          </p:cNvSpPr>
+          <p:nvPr>
+            <p:ph type="body" idx="3" sz="quarter"/>
+          </p:nvPr>
+        </p:nvSpPr>
+        <p:spPr/>
+        <p:txBody>
+          <a:bodyPr/>
+          <a:lstStyle/>
+          <a:p>
+            <a:r>
+              <a:t>[설명] Complete는 정답 복사본이 아니라 막혔을 때 비교·복구하는 안전망이다.</a:t>
+            </a:r>
+          </a:p>
+          <a:p>
+            <a:r>
+              <a:t>[실행] cd ~/ros2_curri</a:t>
+            </a:r>
+          </a:p>
+          <a:p>
+            <a:r>
+              <a:t>diff -ru my_agv_ws/src blocks/D_sensors/M15_sensor_operations/complete/agv_ws/src || true</a:t>
+            </a:r>
+          </a:p>
+          <a:p>
+            <a:r>
+              <a:t>cp -a my_agv_ws/src my_agv_ws/src_before_M15</a:t>
+            </a:r>
+          </a:p>
+          <a:p>
+            <a:r>
+              <a:t>cp -a blocks/D_sensors/M15_sensor_operations/complete/agv_ws/src/. my_agv_ws/src/</a:t>
+            </a:r>
+          </a:p>
+          <a:p>
+            <a:r>
+              <a:t>cd my_agv_ws &amp;&amp; colcon build --symlink-install &amp;&amp; source install/setup.bash</a:t>
+            </a:r>
+          </a:p>
+          <a:p>
+            <a:r>
+              <a:t>[확인] diff에서 내 파일과 Complete의 차이를 설명할 수 있다.</a:t>
+            </a:r>
+          </a:p>
+          <a:p>
+            <a:r>
+              <a:t>[멈춤] 교육생이 현재 체크포인트를 통과할 때까지 기다린다.</a:t>
+            </a:r>
+          </a:p>
+          <a:p>
+            <a:r>
+              <a:t>[오류] 오류가 나면 현재 폴더, source, 파일 경로를 먼저 확인한다.</a:t>
+            </a:r>
+          </a:p>
+        </p:txBody>
+      </p:sp>
+      <p:sp>
+        <p:nvSpPr>
+          <p:cNvPr id="4" name="Slide Number Placeholder 3"/>
+          <p:cNvSpPr>
+            <a:spLocks noGrp="1"/>
+          </p:cNvSpPr>
+          <p:nvPr>
+            <p:ph type="sldNum" idx="5" sz="quarter"/>
+          </p:nvPr>
+        </p:nvSpPr>
+        <p:spPr/>
+      </p:sp>
+    </p:spTree>
+  </p:cSld>
+  <p:clrMapOvr>
+    <a:masterClrMapping/>
+  </p:clrMapOvr>
+</p:notes>
+</file>
+
+<file path=ppt/notesSlides/notesSlide53.xml><?xml version="1.0" encoding="utf-8"?>
+<p:notes xmlns:a="http://schemas.openxmlformats.org/drawingml/2006/main" xmlns:p="http://schemas.openxmlformats.org/presentationml/2006/main" xmlns:r="http://schemas.openxmlformats.org/officeDocument/2006/relationships">
+  <p:cSld>
+    <p:spTree>
+      <p:nvGrpSpPr>
+        <p:cNvPr id="1" name=""/>
+        <p:cNvGrpSpPr/>
+        <p:nvPr/>
+      </p:nvGrpSpPr>
+      <p:grpSpPr>
+        <a:xfrm>
+          <a:off x="0" y="0"/>
+          <a:ext cx="0" cy="0"/>
+          <a:chOff x="0" y="0"/>
+          <a:chExt cx="0" cy="0"/>
+        </a:xfrm>
+      </p:grpSpPr>
+      <p:sp>
+        <p:nvSpPr>
+          <p:cNvPr id="2" name="Slide Image Placeholder 1"/>
+          <p:cNvSpPr>
+            <a:spLocks noGrp="1"/>
+          </p:cNvSpPr>
+          <p:nvPr>
+            <p:ph type="sldImg" idx="2"/>
+          </p:nvPr>
+        </p:nvSpPr>
+        <p:spPr/>
+      </p:sp>
+      <p:sp>
+        <p:nvSpPr>
+          <p:cNvPr id="3" name="Notes Placeholder 2"/>
+          <p:cNvSpPr>
+            <a:spLocks noGrp="1"/>
+          </p:cNvSpPr>
+          <p:nvPr>
+            <p:ph type="body" idx="3" sz="quarter"/>
+          </p:nvPr>
+        </p:nvSpPr>
+        <p:spPr/>
+        <p:txBody>
+          <a:bodyPr/>
+          <a:lstStyle/>
+          <a:p>
+            <a:r>
+              <a:t>[설명] 교육생이 직접 한 값만 바꿔 원인과 결과를 연결하게 한다.</a:t>
+            </a:r>
+          </a:p>
+          <a:p>
+            <a:r>
+              <a:t>[실행] 슬라이드의 명령 또는 파일 작성 단계를 진행한다.</a:t>
+            </a:r>
+          </a:p>
+          <a:p>
+            <a:r>
+              <a:t>[확인] 원래 값과 변경 값을 모두 기록한다.</a:t>
+            </a:r>
+          </a:p>
+          <a:p>
+            <a:r>
+              <a:t>[멈춤] 교육생이 현재 체크포인트를 통과할 때까지 기다린다.</a:t>
+            </a:r>
+          </a:p>
+          <a:p>
+            <a:r>
+              <a:t>[오류] 오류가 나면 현재 폴더, source, 파일 경로를 먼저 확인한다.</a:t>
+            </a:r>
+          </a:p>
+        </p:txBody>
+      </p:sp>
+      <p:sp>
+        <p:nvSpPr>
+          <p:cNvPr id="4" name="Slide Number Placeholder 3"/>
+          <p:cNvSpPr>
+            <a:spLocks noGrp="1"/>
+          </p:cNvSpPr>
+          <p:nvPr>
+            <p:ph type="sldNum" idx="5" sz="quarter"/>
+          </p:nvPr>
+        </p:nvSpPr>
+        <p:spPr/>
+      </p:sp>
+    </p:spTree>
+  </p:cSld>
+  <p:clrMapOvr>
+    <a:masterClrMapping/>
+  </p:clrMapOvr>
+</p:notes>
+</file>
+
+<file path=ppt/notesSlides/notesSlide54.xml><?xml version="1.0" encoding="utf-8"?>
+<p:notes xmlns:a="http://schemas.openxmlformats.org/drawingml/2006/main" xmlns:p="http://schemas.openxmlformats.org/presentationml/2006/main" xmlns:r="http://schemas.openxmlformats.org/officeDocument/2006/relationships">
+  <p:cSld>
+    <p:spTree>
+      <p:nvGrpSpPr>
+        <p:cNvPr id="1" name=""/>
+        <p:cNvGrpSpPr/>
+        <p:nvPr/>
+      </p:nvGrpSpPr>
+      <p:grpSpPr>
+        <a:xfrm>
+          <a:off x="0" y="0"/>
+          <a:ext cx="0" cy="0"/>
+          <a:chOff x="0" y="0"/>
+          <a:chExt cx="0" cy="0"/>
+        </a:xfrm>
+      </p:grpSpPr>
+      <p:sp>
+        <p:nvSpPr>
+          <p:cNvPr id="2" name="Slide Image Placeholder 1"/>
+          <p:cNvSpPr>
+            <a:spLocks noGrp="1"/>
+          </p:cNvSpPr>
+          <p:nvPr>
+            <p:ph type="sldImg" idx="2"/>
+          </p:nvPr>
+        </p:nvSpPr>
+        <p:spPr/>
+      </p:sp>
+      <p:sp>
+        <p:nvSpPr>
+          <p:cNvPr id="3" name="Notes Placeholder 2"/>
+          <p:cNvSpPr>
+            <a:spLocks noGrp="1"/>
+          </p:cNvSpPr>
+          <p:nvPr>
+            <p:ph type="body" idx="3" sz="quarter"/>
+          </p:nvPr>
+        </p:nvSpPr>
+        <p:spPr/>
+        <p:txBody>
+          <a:bodyPr/>
+          <a:lstStyle/>
+          <a:p>
+            <a:r>
+              <a:t>[설명] 교육생이 자신의 workspace·캡처·로그를 저장했는지 확인하고 다음 모듈의 시작 상태를 읽는다.</a:t>
+            </a:r>
+          </a:p>
+          <a:p>
+            <a:r>
+              <a:t>[실행] 슬라이드의 명령 또는 파일 작성 단계를 진행한다.</a:t>
+            </a:r>
+          </a:p>
+          <a:p>
+            <a:r>
+              <a:t>[확인] M16 제어 interface 시작 조건을 말할 수 있다.</a:t>
+            </a:r>
+          </a:p>
+          <a:p>
+            <a:r>
+              <a:t>[멈춤] 교육생이 현재 체크포인트를 통과할 때까지 기다린다.</a:t>
+            </a:r>
+          </a:p>
+          <a:p>
+            <a:r>
+              <a:t>[오류] 오류가 나면 현재 폴더, source, 파일 경로를 먼저 확인한다.</a:t>
+            </a:r>
+          </a:p>
+        </p:txBody>
+      </p:sp>
+      <p:sp>
+        <p:nvSpPr>
+          <p:cNvPr id="4" name="Slide Number Placeholder 3"/>
+          <p:cNvSpPr>
+            <a:spLocks noGrp="1"/>
+          </p:cNvSpPr>
+          <p:nvPr>
+            <p:ph type="sldNum" idx="5" sz="quarter"/>
+          </p:nvPr>
+        </p:nvSpPr>
+        <p:spPr/>
+      </p:sp>
+    </p:spTree>
+  </p:cSld>
+  <p:clrMapOvr>
+    <a:masterClrMapping/>
+  </p:clrMapOvr>
+</p:notes>
+</file>
+
+<file path=ppt/notesSlides/notesSlide55.xml><?xml version="1.0" encoding="utf-8"?>
 <p:notes xmlns:a="http://schemas.openxmlformats.org/drawingml/2006/main" xmlns:p="http://schemas.openxmlformats.org/presentationml/2006/main" xmlns:r="http://schemas.openxmlformats.org/officeDocument/2006/relationships">
   <p:cSld>
     <p:spTree>
@@ -12241,7 +12605,7 @@
           </a:fontRef>
         </p:style>
         <p:txBody>
-          <a:bodyPr rtlCol="0" anchor="ctr" wrap="square" lIns="73152" rIns="73152" tIns="36576" bIns="36576"/>
+          <a:bodyPr rtlCol="0" anchor="ctr" wrap="square" lIns="109728" rIns="109728" tIns="73152" bIns="73152"/>
           <a:lstStyle/>
           <a:p>
             <a:pPr algn="l">
@@ -12258,7 +12622,19 @@
             <a:r>
               <a:t>mkdir -p ~/ros2_curri/my_agv_ws/src/agv_bringup/config</a:t>
             </a:r>
-            <a:br/>
+          </a:p>
+          <a:p>
+            <a:pPr algn="l">
+              <a:spcAft>
+                <a:spcPts val="0"/>
+              </a:spcAft>
+              <a:defRPr sz="1600" b="0">
+                <a:solidFill>
+                  <a:srgbClr val="FFFFFF"/>
+                </a:solidFill>
+                <a:latin typeface="DejaVu Sans Mono"/>
+              </a:defRPr>
+            </a:pPr>
             <a:r>
               <a:t>nano ~/ros2_curri/my_agv_ws/src/agv_bringup/config/sensors.yaml</a:t>
             </a:r>
@@ -14072,7 +14448,7 @@
           </a:fontRef>
         </p:style>
         <p:txBody>
-          <a:bodyPr rtlCol="0" anchor="ctr" wrap="square" lIns="164592" rIns="164592" tIns="109728" bIns="36576"/>
+          <a:bodyPr rtlCol="0" anchor="ctr" wrap="square" lIns="164592" rIns="164592" tIns="109728" bIns="73152"/>
           <a:lstStyle/>
           <a:p>
             <a:pPr algn="l">
@@ -14089,27 +14465,99 @@
             <a:r>
               <a:t>lidar_processor:</a:t>
             </a:r>
-            <a:br/>
+          </a:p>
+          <a:p>
+            <a:pPr algn="l">
+              <a:spcAft>
+                <a:spcPts val="0"/>
+              </a:spcAft>
+              <a:defRPr sz="1400" b="0">
+                <a:solidFill>
+                  <a:srgbClr val="FFFFFF"/>
+                </a:solidFill>
+                <a:latin typeface="DejaVu Sans Mono"/>
+              </a:defRPr>
+            </a:pPr>
             <a:r>
               <a:t>  ros__parameters:</a:t>
             </a:r>
-            <a:br/>
+          </a:p>
+          <a:p>
+            <a:pPr algn="l">
+              <a:spcAft>
+                <a:spcPts val="0"/>
+              </a:spcAft>
+              <a:defRPr sz="1400" b="0">
+                <a:solidFill>
+                  <a:srgbClr val="FFFFFF"/>
+                </a:solidFill>
+                <a:latin typeface="DejaVu Sans Mono"/>
+              </a:defRPr>
+            </a:pPr>
             <a:r>
               <a:t>    use_sim_time: true</a:t>
             </a:r>
-            <a:br/>
+          </a:p>
+          <a:p>
+            <a:pPr algn="l">
+              <a:spcAft>
+                <a:spcPts val="0"/>
+              </a:spcAft>
+              <a:defRPr sz="1400" b="0">
+                <a:solidFill>
+                  <a:srgbClr val="FFFFFF"/>
+                </a:solidFill>
+                <a:latin typeface="DejaVu Sans Mono"/>
+              </a:defRPr>
+            </a:pPr>
             <a:r>
               <a:t>    front_half_angle_deg: 15.0</a:t>
             </a:r>
-            <a:br/>
+          </a:p>
+          <a:p>
+            <a:pPr algn="l">
+              <a:spcAft>
+                <a:spcPts val="0"/>
+              </a:spcAft>
+              <a:defRPr sz="1400" b="0">
+                <a:solidFill>
+                  <a:srgbClr val="FFFFFF"/>
+                </a:solidFill>
+                <a:latin typeface="DejaVu Sans Mono"/>
+              </a:defRPr>
+            </a:pPr>
             <a:r>
               <a:t>imu_monitor:</a:t>
             </a:r>
-            <a:br/>
+          </a:p>
+          <a:p>
+            <a:pPr algn="l">
+              <a:spcAft>
+                <a:spcPts val="0"/>
+              </a:spcAft>
+              <a:defRPr sz="1400" b="0">
+                <a:solidFill>
+                  <a:srgbClr val="FFFFFF"/>
+                </a:solidFill>
+                <a:latin typeface="DejaVu Sans Mono"/>
+              </a:defRPr>
+            </a:pPr>
             <a:r>
               <a:t>  ros__parameters:</a:t>
             </a:r>
-            <a:br/>
+          </a:p>
+          <a:p>
+            <a:pPr algn="l">
+              <a:spcAft>
+                <a:spcPts val="0"/>
+              </a:spcAft>
+              <a:defRPr sz="1400" b="0">
+                <a:solidFill>
+                  <a:srgbClr val="FFFFFF"/>
+                </a:solidFill>
+                <a:latin typeface="DejaVu Sans Mono"/>
+              </a:defRPr>
+            </a:pPr>
             <a:r>
               <a:t>    use_sim_time: true</a:t>
             </a:r>
@@ -14581,7 +15029,7 @@
           </a:fontRef>
         </p:style>
         <p:txBody>
-          <a:bodyPr rtlCol="0" anchor="ctr" wrap="square" lIns="73152" rIns="73152" tIns="36576" bIns="36576"/>
+          <a:bodyPr rtlCol="0" anchor="ctr" wrap="square" lIns="109728" rIns="109728" tIns="73152" bIns="73152"/>
           <a:lstStyle/>
           <a:p>
             <a:pPr algn="l">
@@ -14598,7 +15046,19 @@
             <a:r>
               <a:t>mkdir -p ~/ros2_curri/my_agv_ws/src/agv_gazebo/config</a:t>
             </a:r>
-            <a:br/>
+          </a:p>
+          <a:p>
+            <a:pPr algn="l">
+              <a:spcAft>
+                <a:spcPts val="0"/>
+              </a:spcAft>
+              <a:defRPr sz="1600" b="0">
+                <a:solidFill>
+                  <a:srgbClr val="FFFFFF"/>
+                </a:solidFill>
+                <a:latin typeface="DejaVu Sans Mono"/>
+              </a:defRPr>
+            </a:pPr>
             <a:r>
               <a:t>nano ~/ros2_curri/my_agv_ws/src/agv_gazebo/config/bridge.yaml</a:t>
             </a:r>
@@ -16304,7 +16764,7 @@
           </a:fontRef>
         </p:style>
         <p:txBody>
-          <a:bodyPr rtlCol="0" anchor="ctr" wrap="square" lIns="164592" rIns="164592" tIns="109728" bIns="36576"/>
+          <a:bodyPr rtlCol="0" anchor="ctr" wrap="square" lIns="164592" rIns="164592" tIns="109728" bIns="73152"/>
           <a:lstStyle/>
           <a:p>
             <a:pPr algn="l">
@@ -16321,47 +16781,179 @@
             <a:r>
               <a:t>- ros_topic_name: "/cmd_vel"</a:t>
             </a:r>
-            <a:br/>
+          </a:p>
+          <a:p>
+            <a:pPr algn="l">
+              <a:spcAft>
+                <a:spcPts val="0"/>
+              </a:spcAft>
+              <a:defRPr sz="1400" b="0">
+                <a:solidFill>
+                  <a:srgbClr val="FFFFFF"/>
+                </a:solidFill>
+                <a:latin typeface="DejaVu Sans Mono"/>
+              </a:defRPr>
+            </a:pPr>
             <a:r>
               <a:t>  gz_topic_name: "/cmd_vel"</a:t>
             </a:r>
-            <a:br/>
+          </a:p>
+          <a:p>
+            <a:pPr algn="l">
+              <a:spcAft>
+                <a:spcPts val="0"/>
+              </a:spcAft>
+              <a:defRPr sz="1400" b="0">
+                <a:solidFill>
+                  <a:srgbClr val="FFFFFF"/>
+                </a:solidFill>
+                <a:latin typeface="DejaVu Sans Mono"/>
+              </a:defRPr>
+            </a:pPr>
             <a:r>
               <a:t>  ros_type_name: "geometry_msgs/msg/Twist"</a:t>
             </a:r>
-            <a:br/>
+          </a:p>
+          <a:p>
+            <a:pPr algn="l">
+              <a:spcAft>
+                <a:spcPts val="0"/>
+              </a:spcAft>
+              <a:defRPr sz="1400" b="0">
+                <a:solidFill>
+                  <a:srgbClr val="FFFFFF"/>
+                </a:solidFill>
+                <a:latin typeface="DejaVu Sans Mono"/>
+              </a:defRPr>
+            </a:pPr>
             <a:r>
               <a:t>  gz_type_name: "gz.msgs.Twist"</a:t>
             </a:r>
-            <a:br/>
+          </a:p>
+          <a:p>
+            <a:pPr algn="l">
+              <a:spcAft>
+                <a:spcPts val="0"/>
+              </a:spcAft>
+              <a:defRPr sz="1400" b="0">
+                <a:solidFill>
+                  <a:srgbClr val="FFFFFF"/>
+                </a:solidFill>
+                <a:latin typeface="DejaVu Sans Mono"/>
+              </a:defRPr>
+            </a:pPr>
             <a:r>
               <a:t>  direction: ROS_TO_GZ</a:t>
             </a:r>
-            <a:br/>
+          </a:p>
+          <a:p>
+            <a:pPr algn="l">
+              <a:spcAft>
+                <a:spcPts val="0"/>
+              </a:spcAft>
+              <a:defRPr sz="1400" b="0">
+                <a:solidFill>
+                  <a:srgbClr val="FFFFFF"/>
+                </a:solidFill>
+                <a:latin typeface="DejaVu Sans Mono"/>
+              </a:defRPr>
+            </a:pPr>
             <a:r>
               <a:t>- ros_topic_name: "/odom"</a:t>
             </a:r>
-            <a:br/>
+          </a:p>
+          <a:p>
+            <a:pPr algn="l">
+              <a:spcAft>
+                <a:spcPts val="0"/>
+              </a:spcAft>
+              <a:defRPr sz="1400" b="0">
+                <a:solidFill>
+                  <a:srgbClr val="FFFFFF"/>
+                </a:solidFill>
+                <a:latin typeface="DejaVu Sans Mono"/>
+              </a:defRPr>
+            </a:pPr>
             <a:r>
               <a:t>  gz_topic_name: "/odom"</a:t>
             </a:r>
-            <a:br/>
+          </a:p>
+          <a:p>
+            <a:pPr algn="l">
+              <a:spcAft>
+                <a:spcPts val="0"/>
+              </a:spcAft>
+              <a:defRPr sz="1400" b="0">
+                <a:solidFill>
+                  <a:srgbClr val="FFFFFF"/>
+                </a:solidFill>
+                <a:latin typeface="DejaVu Sans Mono"/>
+              </a:defRPr>
+            </a:pPr>
             <a:r>
               <a:t>  ros_type_name: "nav_msgs/msg/Odometry"</a:t>
             </a:r>
-            <a:br/>
+          </a:p>
+          <a:p>
+            <a:pPr algn="l">
+              <a:spcAft>
+                <a:spcPts val="0"/>
+              </a:spcAft>
+              <a:defRPr sz="1400" b="0">
+                <a:solidFill>
+                  <a:srgbClr val="FFFFFF"/>
+                </a:solidFill>
+                <a:latin typeface="DejaVu Sans Mono"/>
+              </a:defRPr>
+            </a:pPr>
             <a:r>
               <a:t>  gz_type_name: "gz.msgs.Odometry"</a:t>
             </a:r>
-            <a:br/>
+          </a:p>
+          <a:p>
+            <a:pPr algn="l">
+              <a:spcAft>
+                <a:spcPts val="0"/>
+              </a:spcAft>
+              <a:defRPr sz="1400" b="0">
+                <a:solidFill>
+                  <a:srgbClr val="FFFFFF"/>
+                </a:solidFill>
+                <a:latin typeface="DejaVu Sans Mono"/>
+              </a:defRPr>
+            </a:pPr>
             <a:r>
               <a:t>  direction: GZ_TO_ROS</a:t>
             </a:r>
-            <a:br/>
+          </a:p>
+          <a:p>
+            <a:pPr algn="l">
+              <a:spcAft>
+                <a:spcPts val="0"/>
+              </a:spcAft>
+              <a:defRPr sz="1400" b="0">
+                <a:solidFill>
+                  <a:srgbClr val="FFFFFF"/>
+                </a:solidFill>
+                <a:latin typeface="DejaVu Sans Mono"/>
+              </a:defRPr>
+            </a:pPr>
             <a:r>
               <a:t>- ros_topic_name: "/scan"</a:t>
             </a:r>
-            <a:br/>
+          </a:p>
+          <a:p>
+            <a:pPr algn="l">
+              <a:spcAft>
+                <a:spcPts val="0"/>
+              </a:spcAft>
+              <a:defRPr sz="1400" b="0">
+                <a:solidFill>
+                  <a:srgbClr val="FFFFFF"/>
+                </a:solidFill>
+                <a:latin typeface="DejaVu Sans Mono"/>
+              </a:defRPr>
+            </a:pPr>
             <a:r>
               <a:t>  gz_topic_name: "/scan"</a:t>
             </a:r>
@@ -16778,7 +17370,7 @@
           </a:fontRef>
         </p:style>
         <p:txBody>
-          <a:bodyPr rtlCol="0" anchor="ctr" wrap="square" lIns="164592" rIns="164592" tIns="109728" bIns="36576"/>
+          <a:bodyPr rtlCol="0" anchor="ctr" wrap="square" lIns="164592" rIns="164592" tIns="109728" bIns="73152"/>
           <a:lstStyle/>
           <a:p>
             <a:pPr algn="l">
@@ -16795,47 +17387,179 @@
             <a:r>
               <a:t>  ros_type_name: "sensor_msgs/msg/LaserScan"</a:t>
             </a:r>
-            <a:br/>
+          </a:p>
+          <a:p>
+            <a:pPr algn="l">
+              <a:spcAft>
+                <a:spcPts val="0"/>
+              </a:spcAft>
+              <a:defRPr sz="1400" b="0">
+                <a:solidFill>
+                  <a:srgbClr val="FFFFFF"/>
+                </a:solidFill>
+                <a:latin typeface="DejaVu Sans Mono"/>
+              </a:defRPr>
+            </a:pPr>
             <a:r>
               <a:t>  gz_type_name: "gz.msgs.LaserScan"</a:t>
             </a:r>
-            <a:br/>
+          </a:p>
+          <a:p>
+            <a:pPr algn="l">
+              <a:spcAft>
+                <a:spcPts val="0"/>
+              </a:spcAft>
+              <a:defRPr sz="1400" b="0">
+                <a:solidFill>
+                  <a:srgbClr val="FFFFFF"/>
+                </a:solidFill>
+                <a:latin typeface="DejaVu Sans Mono"/>
+              </a:defRPr>
+            </a:pPr>
             <a:r>
               <a:t>  direction: GZ_TO_ROS</a:t>
             </a:r>
-            <a:br/>
+          </a:p>
+          <a:p>
+            <a:pPr algn="l">
+              <a:spcAft>
+                <a:spcPts val="0"/>
+              </a:spcAft>
+              <a:defRPr sz="1400" b="0">
+                <a:solidFill>
+                  <a:srgbClr val="FFFFFF"/>
+                </a:solidFill>
+                <a:latin typeface="DejaVu Sans Mono"/>
+              </a:defRPr>
+            </a:pPr>
             <a:r>
               <a:t>- ros_topic_name: "/imu/data"</a:t>
             </a:r>
-            <a:br/>
+          </a:p>
+          <a:p>
+            <a:pPr algn="l">
+              <a:spcAft>
+                <a:spcPts val="0"/>
+              </a:spcAft>
+              <a:defRPr sz="1400" b="0">
+                <a:solidFill>
+                  <a:srgbClr val="FFFFFF"/>
+                </a:solidFill>
+                <a:latin typeface="DejaVu Sans Mono"/>
+              </a:defRPr>
+            </a:pPr>
             <a:r>
               <a:t>  gz_topic_name: "/imu/data"</a:t>
             </a:r>
-            <a:br/>
+          </a:p>
+          <a:p>
+            <a:pPr algn="l">
+              <a:spcAft>
+                <a:spcPts val="0"/>
+              </a:spcAft>
+              <a:defRPr sz="1400" b="0">
+                <a:solidFill>
+                  <a:srgbClr val="FFFFFF"/>
+                </a:solidFill>
+                <a:latin typeface="DejaVu Sans Mono"/>
+              </a:defRPr>
+            </a:pPr>
             <a:r>
               <a:t>  ros_type_name: "sensor_msgs/msg/Imu"</a:t>
             </a:r>
-            <a:br/>
+          </a:p>
+          <a:p>
+            <a:pPr algn="l">
+              <a:spcAft>
+                <a:spcPts val="0"/>
+              </a:spcAft>
+              <a:defRPr sz="1400" b="0">
+                <a:solidFill>
+                  <a:srgbClr val="FFFFFF"/>
+                </a:solidFill>
+                <a:latin typeface="DejaVu Sans Mono"/>
+              </a:defRPr>
+            </a:pPr>
             <a:r>
               <a:t>  gz_type_name: "gz.msgs.IMU"</a:t>
             </a:r>
-            <a:br/>
+          </a:p>
+          <a:p>
+            <a:pPr algn="l">
+              <a:spcAft>
+                <a:spcPts val="0"/>
+              </a:spcAft>
+              <a:defRPr sz="1400" b="0">
+                <a:solidFill>
+                  <a:srgbClr val="FFFFFF"/>
+                </a:solidFill>
+                <a:latin typeface="DejaVu Sans Mono"/>
+              </a:defRPr>
+            </a:pPr>
             <a:r>
               <a:t>  direction: GZ_TO_ROS</a:t>
             </a:r>
-            <a:br/>
+          </a:p>
+          <a:p>
+            <a:pPr algn="l">
+              <a:spcAft>
+                <a:spcPts val="0"/>
+              </a:spcAft>
+              <a:defRPr sz="1400" b="0">
+                <a:solidFill>
+                  <a:srgbClr val="FFFFFF"/>
+                </a:solidFill>
+                <a:latin typeface="DejaVu Sans Mono"/>
+              </a:defRPr>
+            </a:pPr>
             <a:r>
               <a:t>- ros_topic_name: "/camera/image_raw"</a:t>
             </a:r>
-            <a:br/>
+          </a:p>
+          <a:p>
+            <a:pPr algn="l">
+              <a:spcAft>
+                <a:spcPts val="0"/>
+              </a:spcAft>
+              <a:defRPr sz="1400" b="0">
+                <a:solidFill>
+                  <a:srgbClr val="FFFFFF"/>
+                </a:solidFill>
+                <a:latin typeface="DejaVu Sans Mono"/>
+              </a:defRPr>
+            </a:pPr>
             <a:r>
               <a:t>  gz_topic_name: "/camera/image_raw"</a:t>
             </a:r>
-            <a:br/>
+          </a:p>
+          <a:p>
+            <a:pPr algn="l">
+              <a:spcAft>
+                <a:spcPts val="0"/>
+              </a:spcAft>
+              <a:defRPr sz="1400" b="0">
+                <a:solidFill>
+                  <a:srgbClr val="FFFFFF"/>
+                </a:solidFill>
+                <a:latin typeface="DejaVu Sans Mono"/>
+              </a:defRPr>
+            </a:pPr>
             <a:r>
               <a:t>  ros_type_name: "sensor_msgs/msg/Image"</a:t>
             </a:r>
-            <a:br/>
+          </a:p>
+          <a:p>
+            <a:pPr algn="l">
+              <a:spcAft>
+                <a:spcPts val="0"/>
+              </a:spcAft>
+              <a:defRPr sz="1400" b="0">
+                <a:solidFill>
+                  <a:srgbClr val="FFFFFF"/>
+                </a:solidFill>
+                <a:latin typeface="DejaVu Sans Mono"/>
+              </a:defRPr>
+            </a:pPr>
             <a:r>
               <a:t>  gz_type_name: "gz.msgs.Image"</a:t>
             </a:r>
@@ -17252,7 +17976,7 @@
           </a:fontRef>
         </p:style>
         <p:txBody>
-          <a:bodyPr rtlCol="0" anchor="ctr" wrap="square" lIns="164592" rIns="164592" tIns="109728" bIns="36576"/>
+          <a:bodyPr rtlCol="0" anchor="ctr" wrap="square" lIns="164592" rIns="164592" tIns="109728" bIns="73152"/>
           <a:lstStyle/>
           <a:p>
             <a:pPr algn="l">
@@ -17269,23 +17993,83 @@
             <a:r>
               <a:t>  direction: GZ_TO_ROS</a:t>
             </a:r>
-            <a:br/>
+          </a:p>
+          <a:p>
+            <a:pPr algn="l">
+              <a:spcAft>
+                <a:spcPts val="0"/>
+              </a:spcAft>
+              <a:defRPr sz="1400" b="0">
+                <a:solidFill>
+                  <a:srgbClr val="FFFFFF"/>
+                </a:solidFill>
+                <a:latin typeface="DejaVu Sans Mono"/>
+              </a:defRPr>
+            </a:pPr>
             <a:r>
               <a:t>- ros_topic_name: "/clock"</a:t>
             </a:r>
-            <a:br/>
+          </a:p>
+          <a:p>
+            <a:pPr algn="l">
+              <a:spcAft>
+                <a:spcPts val="0"/>
+              </a:spcAft>
+              <a:defRPr sz="1400" b="0">
+                <a:solidFill>
+                  <a:srgbClr val="FFFFFF"/>
+                </a:solidFill>
+                <a:latin typeface="DejaVu Sans Mono"/>
+              </a:defRPr>
+            </a:pPr>
             <a:r>
               <a:t>  gz_topic_name: "/clock"</a:t>
             </a:r>
-            <a:br/>
+          </a:p>
+          <a:p>
+            <a:pPr algn="l">
+              <a:spcAft>
+                <a:spcPts val="0"/>
+              </a:spcAft>
+              <a:defRPr sz="1400" b="0">
+                <a:solidFill>
+                  <a:srgbClr val="FFFFFF"/>
+                </a:solidFill>
+                <a:latin typeface="DejaVu Sans Mono"/>
+              </a:defRPr>
+            </a:pPr>
             <a:r>
               <a:t>  ros_type_name: "rosgraph_msgs/msg/Clock"</a:t>
             </a:r>
-            <a:br/>
+          </a:p>
+          <a:p>
+            <a:pPr algn="l">
+              <a:spcAft>
+                <a:spcPts val="0"/>
+              </a:spcAft>
+              <a:defRPr sz="1400" b="0">
+                <a:solidFill>
+                  <a:srgbClr val="FFFFFF"/>
+                </a:solidFill>
+                <a:latin typeface="DejaVu Sans Mono"/>
+              </a:defRPr>
+            </a:pPr>
             <a:r>
               <a:t>  gz_type_name: "gz.msgs.Clock"</a:t>
             </a:r>
-            <a:br/>
+          </a:p>
+          <a:p>
+            <a:pPr algn="l">
+              <a:spcAft>
+                <a:spcPts val="0"/>
+              </a:spcAft>
+              <a:defRPr sz="1400" b="0">
+                <a:solidFill>
+                  <a:srgbClr val="FFFFFF"/>
+                </a:solidFill>
+                <a:latin typeface="DejaVu Sans Mono"/>
+              </a:defRPr>
+            </a:pPr>
             <a:r>
               <a:t>  direction: GZ_TO_ROS</a:t>
             </a:r>
@@ -17757,7 +18541,7 @@
           </a:fontRef>
         </p:style>
         <p:txBody>
-          <a:bodyPr rtlCol="0" anchor="ctr" wrap="square" lIns="73152" rIns="73152" tIns="36576" bIns="36576"/>
+          <a:bodyPr rtlCol="0" anchor="ctr" wrap="square" lIns="109728" rIns="109728" tIns="73152" bIns="73152"/>
           <a:lstStyle/>
           <a:p>
             <a:pPr algn="l">
@@ -17774,7 +18558,19 @@
             <a:r>
               <a:t>mkdir -p ~/ros2_curri/my_agv_ws/src/agv_sensors/agv_sensors</a:t>
             </a:r>
-            <a:br/>
+          </a:p>
+          <a:p>
+            <a:pPr algn="l">
+              <a:spcAft>
+                <a:spcPts val="0"/>
+              </a:spcAft>
+              <a:defRPr sz="1600" b="0">
+                <a:solidFill>
+                  <a:srgbClr val="FFFFFF"/>
+                </a:solidFill>
+                <a:latin typeface="DejaVu Sans Mono"/>
+              </a:defRPr>
+            </a:pPr>
             <a:r>
               <a:t>nano ~/ros2_curri/my_agv_ws/src/agv_sensors/agv_sensors/lidar_processor.py</a:t>
             </a:r>
@@ -22386,7 +23182,7 @@
           </a:fontRef>
         </p:style>
         <p:txBody>
-          <a:bodyPr rtlCol="0" anchor="ctr" wrap="square" lIns="164592" rIns="164592" tIns="109728" bIns="36576"/>
+          <a:bodyPr rtlCol="0" anchor="ctr" wrap="square" lIns="164592" rIns="164592" tIns="109728" bIns="73152"/>
           <a:lstStyle/>
           <a:p>
             <a:pPr algn="l">
@@ -22403,41 +23199,173 @@
             <a:r>
               <a:t>import math</a:t>
             </a:r>
-            <a:br/>
+          </a:p>
+          <a:p>
+            <a:pPr algn="l">
+              <a:spcAft>
+                <a:spcPts val="0"/>
+              </a:spcAft>
+              <a:defRPr sz="1400" b="0">
+                <a:solidFill>
+                  <a:srgbClr val="FFFFFF"/>
+                </a:solidFill>
+                <a:latin typeface="DejaVu Sans Mono"/>
+              </a:defRPr>
+            </a:pPr>
             <a:r>
               <a:t>import rclpy</a:t>
             </a:r>
-            <a:br/>
+          </a:p>
+          <a:p>
+            <a:pPr algn="l">
+              <a:spcAft>
+                <a:spcPts val="0"/>
+              </a:spcAft>
+              <a:defRPr sz="1400" b="0">
+                <a:solidFill>
+                  <a:srgbClr val="FFFFFF"/>
+                </a:solidFill>
+                <a:latin typeface="DejaVu Sans Mono"/>
+              </a:defRPr>
+            </a:pPr>
             <a:r>
               <a:t>from rclpy.node import Node</a:t>
             </a:r>
-            <a:br/>
+          </a:p>
+          <a:p>
+            <a:pPr algn="l">
+              <a:spcAft>
+                <a:spcPts val="0"/>
+              </a:spcAft>
+              <a:defRPr sz="1400" b="0">
+                <a:solidFill>
+                  <a:srgbClr val="FFFFFF"/>
+                </a:solidFill>
+                <a:latin typeface="DejaVu Sans Mono"/>
+              </a:defRPr>
+            </a:pPr>
             <a:r>
               <a:t>from rclpy.qos import qos_profile_sensor_data</a:t>
             </a:r>
-            <a:br/>
+          </a:p>
+          <a:p>
+            <a:pPr algn="l">
+              <a:spcAft>
+                <a:spcPts val="0"/>
+              </a:spcAft>
+              <a:defRPr sz="1400" b="0">
+                <a:solidFill>
+                  <a:srgbClr val="FFFFFF"/>
+                </a:solidFill>
+                <a:latin typeface="DejaVu Sans Mono"/>
+              </a:defRPr>
+            </a:pPr>
             <a:r>
               <a:t>from sensor_msgs.msg import LaserScan</a:t>
             </a:r>
-            <a:br/>
+          </a:p>
+          <a:p>
+            <a:pPr algn="l">
+              <a:spcAft>
+                <a:spcPts val="0"/>
+              </a:spcAft>
+              <a:defRPr sz="1400" b="0">
+                <a:solidFill>
+                  <a:srgbClr val="FFFFFF"/>
+                </a:solidFill>
+                <a:latin typeface="DejaVu Sans Mono"/>
+              </a:defRPr>
+            </a:pPr>
             <a:r>
               <a:t>from std_msgs.msg import Float32</a:t>
             </a:r>
-            <a:br/>
-            <a:br/>
+          </a:p>
+          <a:p>
+            <a:pPr algn="l">
+              <a:spcAft>
+                <a:spcPts val="0"/>
+              </a:spcAft>
+              <a:defRPr sz="1400" b="0">
+                <a:solidFill>
+                  <a:srgbClr val="FFFFFF"/>
+                </a:solidFill>
+                <a:latin typeface="DejaVu Sans Mono"/>
+              </a:defRPr>
+            </a:pPr>
+          </a:p>
+          <a:p>
+            <a:pPr algn="l">
+              <a:spcAft>
+                <a:spcPts val="0"/>
+              </a:spcAft>
+              <a:defRPr sz="1400" b="0">
+                <a:solidFill>
+                  <a:srgbClr val="FFFFFF"/>
+                </a:solidFill>
+                <a:latin typeface="DejaVu Sans Mono"/>
+              </a:defRPr>
+            </a:pPr>
             <a:r>
               <a:t>class LidarProcessor(Node):</a:t>
             </a:r>
-            <a:br/>
-            <a:br/>
+          </a:p>
+          <a:p>
+            <a:pPr algn="l">
+              <a:spcAft>
+                <a:spcPts val="0"/>
+              </a:spcAft>
+              <a:defRPr sz="1400" b="0">
+                <a:solidFill>
+                  <a:srgbClr val="FFFFFF"/>
+                </a:solidFill>
+                <a:latin typeface="DejaVu Sans Mono"/>
+              </a:defRPr>
+            </a:pPr>
+          </a:p>
+          <a:p>
+            <a:pPr algn="l">
+              <a:spcAft>
+                <a:spcPts val="0"/>
+              </a:spcAft>
+              <a:defRPr sz="1400" b="0">
+                <a:solidFill>
+                  <a:srgbClr val="FFFFFF"/>
+                </a:solidFill>
+                <a:latin typeface="DejaVu Sans Mono"/>
+              </a:defRPr>
+            </a:pPr>
             <a:r>
               <a:t>    def __init__(self):</a:t>
             </a:r>
-            <a:br/>
+          </a:p>
+          <a:p>
+            <a:pPr algn="l">
+              <a:spcAft>
+                <a:spcPts val="0"/>
+              </a:spcAft>
+              <a:defRPr sz="1400" b="0">
+                <a:solidFill>
+                  <a:srgbClr val="FFFFFF"/>
+                </a:solidFill>
+                <a:latin typeface="DejaVu Sans Mono"/>
+              </a:defRPr>
+            </a:pPr>
             <a:r>
               <a:t>        super().__init__('lidar_processor')</a:t>
             </a:r>
-            <a:br/>
+          </a:p>
+          <a:p>
+            <a:pPr algn="l">
+              <a:spcAft>
+                <a:spcPts val="0"/>
+              </a:spcAft>
+              <a:defRPr sz="1400" b="0">
+                <a:solidFill>
+                  <a:srgbClr val="FFFFFF"/>
+                </a:solidFill>
+                <a:latin typeface="DejaVu Sans Mono"/>
+              </a:defRPr>
+            </a:pPr>
             <a:r>
               <a:t>        self.declare_parameter('front_half_angle_deg', 15.0)</a:t>
             </a:r>
@@ -22854,7 +23782,7 @@
           </a:fontRef>
         </p:style>
         <p:txBody>
-          <a:bodyPr rtlCol="0" anchor="ctr" wrap="square" lIns="164592" rIns="164592" tIns="109728" bIns="36576"/>
+          <a:bodyPr rtlCol="0" anchor="ctr" wrap="square" lIns="164592" rIns="164592" tIns="109728" bIns="73152"/>
           <a:lstStyle/>
           <a:p>
             <a:pPr algn="l">
@@ -22871,41 +23799,173 @@
             <a:r>
               <a:t>        self.subscription = self.create_subscription(LaserScan, '/scan', self.callback,</a:t>
             </a:r>
-            <a:br/>
+          </a:p>
+          <a:p>
+            <a:pPr algn="l">
+              <a:spcAft>
+                <a:spcPts val="0"/>
+              </a:spcAft>
+              <a:defRPr sz="1400" b="0">
+                <a:solidFill>
+                  <a:srgbClr val="FFFFFF"/>
+                </a:solidFill>
+                <a:latin typeface="DejaVu Sans Mono"/>
+              </a:defRPr>
+            </a:pPr>
             <a:r>
               <a:t>            qos_profile_sensor_data)</a:t>
             </a:r>
-            <a:br/>
+          </a:p>
+          <a:p>
+            <a:pPr algn="l">
+              <a:spcAft>
+                <a:spcPts val="0"/>
+              </a:spcAft>
+              <a:defRPr sz="1400" b="0">
+                <a:solidFill>
+                  <a:srgbClr val="FFFFFF"/>
+                </a:solidFill>
+                <a:latin typeface="DejaVu Sans Mono"/>
+              </a:defRPr>
+            </a:pPr>
             <a:r>
               <a:t>        self.publisher = self.create_publisher(Float32, '/obstacle_distance', 10)</a:t>
             </a:r>
-            <a:br/>
-            <a:br/>
+          </a:p>
+          <a:p>
+            <a:pPr algn="l">
+              <a:spcAft>
+                <a:spcPts val="0"/>
+              </a:spcAft>
+              <a:defRPr sz="1400" b="0">
+                <a:solidFill>
+                  <a:srgbClr val="FFFFFF"/>
+                </a:solidFill>
+                <a:latin typeface="DejaVu Sans Mono"/>
+              </a:defRPr>
+            </a:pPr>
+          </a:p>
+          <a:p>
+            <a:pPr algn="l">
+              <a:spcAft>
+                <a:spcPts val="0"/>
+              </a:spcAft>
+              <a:defRPr sz="1400" b="0">
+                <a:solidFill>
+                  <a:srgbClr val="FFFFFF"/>
+                </a:solidFill>
+                <a:latin typeface="DejaVu Sans Mono"/>
+              </a:defRPr>
+            </a:pPr>
             <a:r>
               <a:t>    def callback(self, scan):</a:t>
             </a:r>
-            <a:br/>
+          </a:p>
+          <a:p>
+            <a:pPr algn="l">
+              <a:spcAft>
+                <a:spcPts val="0"/>
+              </a:spcAft>
+              <a:defRPr sz="1400" b="0">
+                <a:solidFill>
+                  <a:srgbClr val="FFFFFF"/>
+                </a:solidFill>
+                <a:latin typeface="DejaVu Sans Mono"/>
+              </a:defRPr>
+            </a:pPr>
             <a:r>
               <a:t>        half_angle = math.radians(self.get_parameter('front_half_angle_deg').value)</a:t>
             </a:r>
-            <a:br/>
+          </a:p>
+          <a:p>
+            <a:pPr algn="l">
+              <a:spcAft>
+                <a:spcPts val="0"/>
+              </a:spcAft>
+              <a:defRPr sz="1400" b="0">
+                <a:solidFill>
+                  <a:srgbClr val="FFFFFF"/>
+                </a:solidFill>
+                <a:latin typeface="DejaVu Sans Mono"/>
+              </a:defRPr>
+            </a:pPr>
             <a:r>
               <a:t>        front_ranges = [distance for index,</a:t>
             </a:r>
-            <a:br/>
+          </a:p>
+          <a:p>
+            <a:pPr algn="l">
+              <a:spcAft>
+                <a:spcPts val="0"/>
+              </a:spcAft>
+              <a:defRPr sz="1400" b="0">
+                <a:solidFill>
+                  <a:srgbClr val="FFFFFF"/>
+                </a:solidFill>
+                <a:latin typeface="DejaVu Sans Mono"/>
+              </a:defRPr>
+            </a:pPr>
             <a:r>
               <a:t>            distance in enumerate(scan.ranges) if abs(scan.angle_min + index * scan.angle_increment) &lt;= half_angle and math.isfinite(distance)]</a:t>
             </a:r>
-            <a:br/>
+          </a:p>
+          <a:p>
+            <a:pPr algn="l">
+              <a:spcAft>
+                <a:spcPts val="0"/>
+              </a:spcAft>
+              <a:defRPr sz="1400" b="0">
+                <a:solidFill>
+                  <a:srgbClr val="FFFFFF"/>
+                </a:solidFill>
+                <a:latin typeface="DejaVu Sans Mono"/>
+              </a:defRPr>
+            </a:pPr>
             <a:r>
               <a:t>        result = Float32(data=min(front_ranges) if front_ranges else float('inf'))</a:t>
             </a:r>
-            <a:br/>
+          </a:p>
+          <a:p>
+            <a:pPr algn="l">
+              <a:spcAft>
+                <a:spcPts val="0"/>
+              </a:spcAft>
+              <a:defRPr sz="1400" b="0">
+                <a:solidFill>
+                  <a:srgbClr val="FFFFFF"/>
+                </a:solidFill>
+                <a:latin typeface="DejaVu Sans Mono"/>
+              </a:defRPr>
+            </a:pPr>
             <a:r>
               <a:t>        self.publisher.publish(result)</a:t>
             </a:r>
-            <a:br/>
-            <a:br/>
+          </a:p>
+          <a:p>
+            <a:pPr algn="l">
+              <a:spcAft>
+                <a:spcPts val="0"/>
+              </a:spcAft>
+              <a:defRPr sz="1400" b="0">
+                <a:solidFill>
+                  <a:srgbClr val="FFFFFF"/>
+                </a:solidFill>
+                <a:latin typeface="DejaVu Sans Mono"/>
+              </a:defRPr>
+            </a:pPr>
+          </a:p>
+          <a:p>
+            <a:pPr algn="l">
+              <a:spcAft>
+                <a:spcPts val="0"/>
+              </a:spcAft>
+              <a:defRPr sz="1400" b="0">
+                <a:solidFill>
+                  <a:srgbClr val="FFFFFF"/>
+                </a:solidFill>
+                <a:latin typeface="DejaVu Sans Mono"/>
+              </a:defRPr>
+            </a:pPr>
             <a:r>
               <a:t>def main():</a:t>
             </a:r>
@@ -23322,7 +24382,7 @@
           </a:fontRef>
         </p:style>
         <p:txBody>
-          <a:bodyPr rtlCol="0" anchor="ctr" wrap="square" lIns="164592" rIns="164592" tIns="109728" bIns="36576"/>
+          <a:bodyPr rtlCol="0" anchor="ctr" wrap="square" lIns="164592" rIns="164592" tIns="109728" bIns="73152"/>
           <a:lstStyle/>
           <a:p>
             <a:pPr algn="l">
@@ -23339,39 +24399,147 @@
             <a:r>
               <a:t>    rclpy.init()</a:t>
             </a:r>
-            <a:br/>
+          </a:p>
+          <a:p>
+            <a:pPr algn="l">
+              <a:spcAft>
+                <a:spcPts val="0"/>
+              </a:spcAft>
+              <a:defRPr sz="1400" b="0">
+                <a:solidFill>
+                  <a:srgbClr val="FFFFFF"/>
+                </a:solidFill>
+                <a:latin typeface="DejaVu Sans Mono"/>
+              </a:defRPr>
+            </a:pPr>
             <a:r>
               <a:t>    node = LidarProcessor()</a:t>
             </a:r>
-            <a:br/>
+          </a:p>
+          <a:p>
+            <a:pPr algn="l">
+              <a:spcAft>
+                <a:spcPts val="0"/>
+              </a:spcAft>
+              <a:defRPr sz="1400" b="0">
+                <a:solidFill>
+                  <a:srgbClr val="FFFFFF"/>
+                </a:solidFill>
+                <a:latin typeface="DejaVu Sans Mono"/>
+              </a:defRPr>
+            </a:pPr>
             <a:r>
               <a:t>    try:</a:t>
             </a:r>
-            <a:br/>
+          </a:p>
+          <a:p>
+            <a:pPr algn="l">
+              <a:spcAft>
+                <a:spcPts val="0"/>
+              </a:spcAft>
+              <a:defRPr sz="1400" b="0">
+                <a:solidFill>
+                  <a:srgbClr val="FFFFFF"/>
+                </a:solidFill>
+                <a:latin typeface="DejaVu Sans Mono"/>
+              </a:defRPr>
+            </a:pPr>
             <a:r>
               <a:t>        rclpy.spin(node)</a:t>
             </a:r>
-            <a:br/>
+          </a:p>
+          <a:p>
+            <a:pPr algn="l">
+              <a:spcAft>
+                <a:spcPts val="0"/>
+              </a:spcAft>
+              <a:defRPr sz="1400" b="0">
+                <a:solidFill>
+                  <a:srgbClr val="FFFFFF"/>
+                </a:solidFill>
+                <a:latin typeface="DejaVu Sans Mono"/>
+              </a:defRPr>
+            </a:pPr>
             <a:r>
               <a:t>    except KeyboardInterrupt:</a:t>
             </a:r>
-            <a:br/>
+          </a:p>
+          <a:p>
+            <a:pPr algn="l">
+              <a:spcAft>
+                <a:spcPts val="0"/>
+              </a:spcAft>
+              <a:defRPr sz="1400" b="0">
+                <a:solidFill>
+                  <a:srgbClr val="FFFFFF"/>
+                </a:solidFill>
+                <a:latin typeface="DejaVu Sans Mono"/>
+              </a:defRPr>
+            </a:pPr>
             <a:r>
               <a:t>        pass</a:t>
             </a:r>
-            <a:br/>
+          </a:p>
+          <a:p>
+            <a:pPr algn="l">
+              <a:spcAft>
+                <a:spcPts val="0"/>
+              </a:spcAft>
+              <a:defRPr sz="1400" b="0">
+                <a:solidFill>
+                  <a:srgbClr val="FFFFFF"/>
+                </a:solidFill>
+                <a:latin typeface="DejaVu Sans Mono"/>
+              </a:defRPr>
+            </a:pPr>
             <a:r>
               <a:t>    finally:</a:t>
             </a:r>
-            <a:br/>
+          </a:p>
+          <a:p>
+            <a:pPr algn="l">
+              <a:spcAft>
+                <a:spcPts val="0"/>
+              </a:spcAft>
+              <a:defRPr sz="1400" b="0">
+                <a:solidFill>
+                  <a:srgbClr val="FFFFFF"/>
+                </a:solidFill>
+                <a:latin typeface="DejaVu Sans Mono"/>
+              </a:defRPr>
+            </a:pPr>
             <a:r>
               <a:t>        node.destroy_node()</a:t>
             </a:r>
-            <a:br/>
+          </a:p>
+          <a:p>
+            <a:pPr algn="l">
+              <a:spcAft>
+                <a:spcPts val="0"/>
+              </a:spcAft>
+              <a:defRPr sz="1400" b="0">
+                <a:solidFill>
+                  <a:srgbClr val="FFFFFF"/>
+                </a:solidFill>
+                <a:latin typeface="DejaVu Sans Mono"/>
+              </a:defRPr>
+            </a:pPr>
             <a:r>
               <a:t>        if rclpy.ok():</a:t>
             </a:r>
-            <a:br/>
+          </a:p>
+          <a:p>
+            <a:pPr algn="l">
+              <a:spcAft>
+                <a:spcPts val="0"/>
+              </a:spcAft>
+              <a:defRPr sz="1400" b="0">
+                <a:solidFill>
+                  <a:srgbClr val="FFFFFF"/>
+                </a:solidFill>
+                <a:latin typeface="DejaVu Sans Mono"/>
+              </a:defRPr>
+            </a:pPr>
             <a:r>
               <a:t>            rclpy.shutdown()</a:t>
             </a:r>
@@ -23843,7 +25011,7 @@
           </a:fontRef>
         </p:style>
         <p:txBody>
-          <a:bodyPr rtlCol="0" anchor="ctr" wrap="square" lIns="73152" rIns="73152" tIns="36576" bIns="36576"/>
+          <a:bodyPr rtlCol="0" anchor="ctr" wrap="square" lIns="109728" rIns="109728" tIns="73152" bIns="73152"/>
           <a:lstStyle/>
           <a:p>
             <a:pPr algn="l">
@@ -23860,7 +25028,19 @@
             <a:r>
               <a:t>mkdir -p ~/ros2_curri/my_agv_ws/src/agv_sensors/agv_sensors</a:t>
             </a:r>
-            <a:br/>
+          </a:p>
+          <a:p>
+            <a:pPr algn="l">
+              <a:spcAft>
+                <a:spcPts val="0"/>
+              </a:spcAft>
+              <a:defRPr sz="1600" b="0">
+                <a:solidFill>
+                  <a:srgbClr val="FFFFFF"/>
+                </a:solidFill>
+                <a:latin typeface="DejaVu Sans Mono"/>
+              </a:defRPr>
+            </a:pPr>
             <a:r>
               <a:t>nano ~/ros2_curri/my_agv_ws/src/agv_sensors/agv_sensors/imu_monitor.py</a:t>
             </a:r>
@@ -28045,7 +29225,7 @@
           </a:fontRef>
         </p:style>
         <p:txBody>
-          <a:bodyPr rtlCol="0" anchor="ctr" wrap="square" lIns="164592" rIns="164592" tIns="109728" bIns="36576"/>
+          <a:bodyPr rtlCol="0" anchor="ctr" wrap="square" lIns="164592" rIns="164592" tIns="109728" bIns="73152"/>
           <a:lstStyle/>
           <a:p>
             <a:pPr algn="l">
@@ -28062,41 +29242,160 @@
             <a:r>
               <a:t>import rclpy</a:t>
             </a:r>
-            <a:br/>
+          </a:p>
+          <a:p>
+            <a:pPr algn="l">
+              <a:spcAft>
+                <a:spcPts val="0"/>
+              </a:spcAft>
+              <a:defRPr sz="1400" b="0">
+                <a:solidFill>
+                  <a:srgbClr val="FFFFFF"/>
+                </a:solidFill>
+                <a:latin typeface="DejaVu Sans Mono"/>
+              </a:defRPr>
+            </a:pPr>
             <a:r>
               <a:t>from rclpy.node import Node</a:t>
             </a:r>
-            <a:br/>
+          </a:p>
+          <a:p>
+            <a:pPr algn="l">
+              <a:spcAft>
+                <a:spcPts val="0"/>
+              </a:spcAft>
+              <a:defRPr sz="1400" b="0">
+                <a:solidFill>
+                  <a:srgbClr val="FFFFFF"/>
+                </a:solidFill>
+                <a:latin typeface="DejaVu Sans Mono"/>
+              </a:defRPr>
+            </a:pPr>
             <a:r>
               <a:t>from rclpy.qos import qos_profile_sensor_data</a:t>
             </a:r>
-            <a:br/>
+          </a:p>
+          <a:p>
+            <a:pPr algn="l">
+              <a:spcAft>
+                <a:spcPts val="0"/>
+              </a:spcAft>
+              <a:defRPr sz="1400" b="0">
+                <a:solidFill>
+                  <a:srgbClr val="FFFFFF"/>
+                </a:solidFill>
+                <a:latin typeface="DejaVu Sans Mono"/>
+              </a:defRPr>
+            </a:pPr>
             <a:r>
               <a:t>from sensor_msgs.msg import Imu</a:t>
             </a:r>
-            <a:br/>
-            <a:br/>
+          </a:p>
+          <a:p>
+            <a:pPr algn="l">
+              <a:spcAft>
+                <a:spcPts val="0"/>
+              </a:spcAft>
+              <a:defRPr sz="1400" b="0">
+                <a:solidFill>
+                  <a:srgbClr val="FFFFFF"/>
+                </a:solidFill>
+                <a:latin typeface="DejaVu Sans Mono"/>
+              </a:defRPr>
+            </a:pPr>
+          </a:p>
+          <a:p>
+            <a:pPr algn="l">
+              <a:spcAft>
+                <a:spcPts val="0"/>
+              </a:spcAft>
+              <a:defRPr sz="1400" b="0">
+                <a:solidFill>
+                  <a:srgbClr val="FFFFFF"/>
+                </a:solidFill>
+                <a:latin typeface="DejaVu Sans Mono"/>
+              </a:defRPr>
+            </a:pPr>
             <a:r>
               <a:t>class ImuMonitor(Node):</a:t>
             </a:r>
-            <a:br/>
-            <a:br/>
+          </a:p>
+          <a:p>
+            <a:pPr algn="l">
+              <a:spcAft>
+                <a:spcPts val="0"/>
+              </a:spcAft>
+              <a:defRPr sz="1400" b="0">
+                <a:solidFill>
+                  <a:srgbClr val="FFFFFF"/>
+                </a:solidFill>
+                <a:latin typeface="DejaVu Sans Mono"/>
+              </a:defRPr>
+            </a:pPr>
+          </a:p>
+          <a:p>
+            <a:pPr algn="l">
+              <a:spcAft>
+                <a:spcPts val="0"/>
+              </a:spcAft>
+              <a:defRPr sz="1400" b="0">
+                <a:solidFill>
+                  <a:srgbClr val="FFFFFF"/>
+                </a:solidFill>
+                <a:latin typeface="DejaVu Sans Mono"/>
+              </a:defRPr>
+            </a:pPr>
             <a:r>
               <a:t>    def __init__(self):</a:t>
             </a:r>
-            <a:br/>
+          </a:p>
+          <a:p>
+            <a:pPr algn="l">
+              <a:spcAft>
+                <a:spcPts val="0"/>
+              </a:spcAft>
+              <a:defRPr sz="1400" b="0">
+                <a:solidFill>
+                  <a:srgbClr val="FFFFFF"/>
+                </a:solidFill>
+                <a:latin typeface="DejaVu Sans Mono"/>
+              </a:defRPr>
+            </a:pPr>
             <a:r>
               <a:t>        super().__init__('imu_monitor')</a:t>
             </a:r>
-            <a:br/>
+          </a:p>
+          <a:p>
+            <a:pPr algn="l">
+              <a:spcAft>
+                <a:spcPts val="0"/>
+              </a:spcAft>
+              <a:defRPr sz="1400" b="0">
+                <a:solidFill>
+                  <a:srgbClr val="FFFFFF"/>
+                </a:solidFill>
+                <a:latin typeface="DejaVu Sans Mono"/>
+              </a:defRPr>
+            </a:pPr>
             <a:r>
               <a:t>        self.create_subscription(Imu, '/imu/data', self.callback,</a:t>
             </a:r>
-            <a:br/>
+          </a:p>
+          <a:p>
+            <a:pPr algn="l">
+              <a:spcAft>
+                <a:spcPts val="0"/>
+              </a:spcAft>
+              <a:defRPr sz="1400" b="0">
+                <a:solidFill>
+                  <a:srgbClr val="FFFFFF"/>
+                </a:solidFill>
+                <a:latin typeface="DejaVu Sans Mono"/>
+              </a:defRPr>
+            </a:pPr>
             <a:r>
               <a:t>            qos_profile_sensor_data)</a:t>
             </a:r>
-            <a:br/>
           </a:p>
         </p:txBody>
       </p:sp>
@@ -28843,7 +30142,7 @@
           </a:fontRef>
         </p:style>
         <p:txBody>
-          <a:bodyPr rtlCol="0" anchor="ctr" wrap="square" lIns="164592" rIns="164592" tIns="109728" bIns="36576"/>
+          <a:bodyPr rtlCol="0" anchor="ctr" wrap="square" lIns="164592" rIns="164592" tIns="109728" bIns="73152"/>
           <a:lstStyle/>
           <a:p>
             <a:pPr algn="l">
@@ -28860,44 +30159,176 @@
             <a:r>
               <a:t>    def callback(self, message):</a:t>
             </a:r>
-            <a:br/>
+          </a:p>
+          <a:p>
+            <a:pPr algn="l">
+              <a:spcAft>
+                <a:spcPts val="0"/>
+              </a:spcAft>
+              <a:defRPr sz="1400" b="0">
+                <a:solidFill>
+                  <a:srgbClr val="FFFFFF"/>
+                </a:solidFill>
+                <a:latin typeface="DejaVu Sans Mono"/>
+              </a:defRPr>
+            </a:pPr>
             <a:r>
               <a:t>        self.get_logger().info('gyro z=%.3f rad/s, acceleration z=%.3f m/s²,</a:t>
             </a:r>
-            <a:br/>
+          </a:p>
+          <a:p>
+            <a:pPr algn="l">
+              <a:spcAft>
+                <a:spcPts val="0"/>
+              </a:spcAft>
+              <a:defRPr sz="1400" b="0">
+                <a:solidFill>
+                  <a:srgbClr val="FFFFFF"/>
+                </a:solidFill>
+                <a:latin typeface="DejaVu Sans Mono"/>
+              </a:defRPr>
+            </a:pPr>
             <a:r>
               <a:t>            frame=%s' % (message.angular_velocity.z, message.linear_acceleration.z,</a:t>
             </a:r>
-            <a:br/>
+          </a:p>
+          <a:p>
+            <a:pPr algn="l">
+              <a:spcAft>
+                <a:spcPts val="0"/>
+              </a:spcAft>
+              <a:defRPr sz="1400" b="0">
+                <a:solidFill>
+                  <a:srgbClr val="FFFFFF"/>
+                </a:solidFill>
+                <a:latin typeface="DejaVu Sans Mono"/>
+              </a:defRPr>
+            </a:pPr>
             <a:r>
               <a:t>            message.header.frame_id), throttle_duration_sec=1.0)</a:t>
             </a:r>
-            <a:br/>
-            <a:br/>
+          </a:p>
+          <a:p>
+            <a:pPr algn="l">
+              <a:spcAft>
+                <a:spcPts val="0"/>
+              </a:spcAft>
+              <a:defRPr sz="1400" b="0">
+                <a:solidFill>
+                  <a:srgbClr val="FFFFFF"/>
+                </a:solidFill>
+                <a:latin typeface="DejaVu Sans Mono"/>
+              </a:defRPr>
+            </a:pPr>
+          </a:p>
+          <a:p>
+            <a:pPr algn="l">
+              <a:spcAft>
+                <a:spcPts val="0"/>
+              </a:spcAft>
+              <a:defRPr sz="1400" b="0">
+                <a:solidFill>
+                  <a:srgbClr val="FFFFFF"/>
+                </a:solidFill>
+                <a:latin typeface="DejaVu Sans Mono"/>
+              </a:defRPr>
+            </a:pPr>
             <a:r>
               <a:t>def main():</a:t>
             </a:r>
-            <a:br/>
+          </a:p>
+          <a:p>
+            <a:pPr algn="l">
+              <a:spcAft>
+                <a:spcPts val="0"/>
+              </a:spcAft>
+              <a:defRPr sz="1400" b="0">
+                <a:solidFill>
+                  <a:srgbClr val="FFFFFF"/>
+                </a:solidFill>
+                <a:latin typeface="DejaVu Sans Mono"/>
+              </a:defRPr>
+            </a:pPr>
             <a:r>
               <a:t>    rclpy.init()</a:t>
             </a:r>
-            <a:br/>
+          </a:p>
+          <a:p>
+            <a:pPr algn="l">
+              <a:spcAft>
+                <a:spcPts val="0"/>
+              </a:spcAft>
+              <a:defRPr sz="1400" b="0">
+                <a:solidFill>
+                  <a:srgbClr val="FFFFFF"/>
+                </a:solidFill>
+                <a:latin typeface="DejaVu Sans Mono"/>
+              </a:defRPr>
+            </a:pPr>
             <a:r>
               <a:t>    node = ImuMonitor()</a:t>
             </a:r>
-            <a:br/>
+          </a:p>
+          <a:p>
+            <a:pPr algn="l">
+              <a:spcAft>
+                <a:spcPts val="0"/>
+              </a:spcAft>
+              <a:defRPr sz="1400" b="0">
+                <a:solidFill>
+                  <a:srgbClr val="FFFFFF"/>
+                </a:solidFill>
+                <a:latin typeface="DejaVu Sans Mono"/>
+              </a:defRPr>
+            </a:pPr>
             <a:r>
               <a:t>    try:</a:t>
             </a:r>
-            <a:br/>
+          </a:p>
+          <a:p>
+            <a:pPr algn="l">
+              <a:spcAft>
+                <a:spcPts val="0"/>
+              </a:spcAft>
+              <a:defRPr sz="1400" b="0">
+                <a:solidFill>
+                  <a:srgbClr val="FFFFFF"/>
+                </a:solidFill>
+                <a:latin typeface="DejaVu Sans Mono"/>
+              </a:defRPr>
+            </a:pPr>
             <a:r>
               <a:t>        rclpy.spin(node)</a:t>
             </a:r>
-            <a:br/>
+          </a:p>
+          <a:p>
+            <a:pPr algn="l">
+              <a:spcAft>
+                <a:spcPts val="0"/>
+              </a:spcAft>
+              <a:defRPr sz="1400" b="0">
+                <a:solidFill>
+                  <a:srgbClr val="FFFFFF"/>
+                </a:solidFill>
+                <a:latin typeface="DejaVu Sans Mono"/>
+              </a:defRPr>
+            </a:pPr>
             <a:r>
               <a:t>    except KeyboardInterrupt:</a:t>
             </a:r>
-            <a:br/>
+          </a:p>
+          <a:p>
+            <a:pPr algn="l">
+              <a:spcAft>
+                <a:spcPts val="0"/>
+              </a:spcAft>
+              <a:defRPr sz="1400" b="0">
+                <a:solidFill>
+                  <a:srgbClr val="FFFFFF"/>
+                </a:solidFill>
+                <a:latin typeface="DejaVu Sans Mono"/>
+              </a:defRPr>
+            </a:pPr>
             <a:r>
               <a:t>        pass</a:t>
             </a:r>
@@ -29314,7 +30745,7 @@
           </a:fontRef>
         </p:style>
         <p:txBody>
-          <a:bodyPr rtlCol="0" anchor="ctr" wrap="square" lIns="164592" rIns="164592" tIns="109728" bIns="36576"/>
+          <a:bodyPr rtlCol="0" anchor="ctr" wrap="square" lIns="164592" rIns="164592" tIns="109728" bIns="73152"/>
           <a:lstStyle/>
           <a:p>
             <a:pPr algn="l">
@@ -29331,15 +30762,51 @@
             <a:r>
               <a:t>    finally:</a:t>
             </a:r>
-            <a:br/>
+          </a:p>
+          <a:p>
+            <a:pPr algn="l">
+              <a:spcAft>
+                <a:spcPts val="0"/>
+              </a:spcAft>
+              <a:defRPr sz="1400" b="0">
+                <a:solidFill>
+                  <a:srgbClr val="FFFFFF"/>
+                </a:solidFill>
+                <a:latin typeface="DejaVu Sans Mono"/>
+              </a:defRPr>
+            </a:pPr>
             <a:r>
               <a:t>        node.destroy_node()</a:t>
             </a:r>
-            <a:br/>
+          </a:p>
+          <a:p>
+            <a:pPr algn="l">
+              <a:spcAft>
+                <a:spcPts val="0"/>
+              </a:spcAft>
+              <a:defRPr sz="1400" b="0">
+                <a:solidFill>
+                  <a:srgbClr val="FFFFFF"/>
+                </a:solidFill>
+                <a:latin typeface="DejaVu Sans Mono"/>
+              </a:defRPr>
+            </a:pPr>
             <a:r>
               <a:t>        if rclpy.ok():</a:t>
             </a:r>
-            <a:br/>
+          </a:p>
+          <a:p>
+            <a:pPr algn="l">
+              <a:spcAft>
+                <a:spcPts val="0"/>
+              </a:spcAft>
+              <a:defRPr sz="1400" b="0">
+                <a:solidFill>
+                  <a:srgbClr val="FFFFFF"/>
+                </a:solidFill>
+                <a:latin typeface="DejaVu Sans Mono"/>
+              </a:defRPr>
+            </a:pPr>
             <a:r>
               <a:t>            rclpy.shutdown()</a:t>
             </a:r>
@@ -29612,7 +31079,7 @@
               </a:defRPr>
             </a:pPr>
             <a:r>
-              <a:t>현재 단계 실행 1/2    |    현재 폴더 ~/ros2_curri/my_agv_ws    |    현재 터미널</a:t>
+              <a:t>현재 단계 실행 1/2    |    현재 폴더 ~/ros2_curri/my_agv_ws    |    터미널 1</a:t>
             </a:r>
           </a:p>
         </p:txBody>
@@ -29625,25 +31092,25 @@
         </p:nvSpPr>
         <p:spPr>
           <a:xfrm>
-            <a:off x="676656" y="1764792"/>
-            <a:ext cx="1828800" cy="347472"/>
-          </a:xfrm>
-          <a:prstGeom prst="rect">
-            <a:avLst/>
-          </a:prstGeom>
-          <a:noFill/>
-        </p:spPr>
-        <p:txBody>
-          <a:bodyPr wrap="square" lIns="73152" rIns="73152" tIns="36576" bIns="36576">
-            <a:spAutoFit/>
-          </a:bodyPr>
-          <a:lstStyle/>
-          <a:p>
-            <a:pPr algn="l">
-              <a:spcAft>
-                <a:spcPts val="0"/>
-              </a:spcAft>
-              <a:defRPr sz="1800" b="1">
+            <a:off x="676656" y="1719072"/>
+            <a:ext cx="1691640" cy="274320"/>
+          </a:xfrm>
+          <a:prstGeom prst="rect">
+            <a:avLst/>
+          </a:prstGeom>
+          <a:noFill/>
+        </p:spPr>
+        <p:txBody>
+          <a:bodyPr wrap="square" lIns="73152" rIns="73152" tIns="36576" bIns="36576">
+            <a:spAutoFit/>
+          </a:bodyPr>
+          <a:lstStyle/>
+          <a:p>
+            <a:pPr algn="l">
+              <a:spcAft>
+                <a:spcPts val="0"/>
+              </a:spcAft>
+              <a:defRPr sz="1700" b="1">
                 <a:solidFill>
                   <a:srgbClr val="225B9B"/>
                 </a:solidFill>
@@ -29651,7 +31118,7 @@
               </a:defRPr>
             </a:pPr>
             <a:r>
-              <a:t>왜 하는가</a:t>
+              <a:t>명령의 목적</a:t>
             </a:r>
           </a:p>
         </p:txBody>
@@ -29664,7 +31131,7 @@
         </p:nvSpPr>
         <p:spPr>
           <a:xfrm>
-            <a:off x="676656" y="2103120"/>
+            <a:off x="676656" y="2002536"/>
             <a:ext cx="10789920" cy="512064"/>
           </a:xfrm>
           <a:prstGeom prst="rect">
@@ -29682,7 +31149,7 @@
               <a:spcAft>
                 <a:spcPts val="0"/>
               </a:spcAft>
-              <a:defRPr sz="2000" b="0">
+              <a:defRPr sz="1800" b="0">
                 <a:solidFill>
                   <a:srgbClr val="122C4E"/>
                 </a:solidFill>
@@ -29697,14 +31164,53 @@
       </p:sp>
       <p:sp>
         <p:nvSpPr>
-          <p:cNvPr id="9" name="Rounded Rectangle 8"/>
+          <p:cNvPr id="9" name="TextBox 8"/>
+          <p:cNvSpPr txBox="1"/>
+          <p:nvPr/>
+        </p:nvSpPr>
+        <p:spPr>
+          <a:xfrm>
+            <a:off x="676656" y="2816352"/>
+            <a:ext cx="10835640" cy="256032"/>
+          </a:xfrm>
+          <a:prstGeom prst="rect">
+            <a:avLst/>
+          </a:prstGeom>
+          <a:noFill/>
+        </p:spPr>
+        <p:txBody>
+          <a:bodyPr wrap="square" lIns="73152" rIns="73152" tIns="36576" bIns="36576">
+            <a:spAutoFit/>
+          </a:bodyPr>
+          <a:lstStyle/>
+          <a:p>
+            <a:pPr algn="ctr">
+              <a:spcAft>
+                <a:spcPts val="0"/>
+              </a:spcAft>
+              <a:defRPr sz="1600" b="1">
+                <a:solidFill>
+                  <a:srgbClr val="225B9B"/>
+                </a:solidFill>
+                <a:latin typeface="Noto Sans CJK KR"/>
+              </a:defRPr>
+            </a:pPr>
+            <a:r>
+              <a:t>터미널 1 — 아래 검은 블록은 명령만 복사합니다.</a:t>
+            </a:r>
+          </a:p>
+        </p:txBody>
+      </p:sp>
+      <p:sp>
+        <p:nvSpPr>
+          <p:cNvPr id="10" name="Rounded Rectangle 9"/>
           <p:cNvSpPr/>
           <p:nvPr/>
         </p:nvSpPr>
         <p:spPr>
           <a:xfrm>
-            <a:off x="676656" y="2871216"/>
-            <a:ext cx="10835640" cy="2331720"/>
+            <a:off x="676656" y="3154680"/>
+            <a:ext cx="10835640" cy="1938528"/>
           </a:xfrm>
           <a:prstGeom prst="roundRect">
             <a:avLst/>
@@ -29733,7 +31239,7 @@
           </a:fontRef>
         </p:style>
         <p:txBody>
-          <a:bodyPr rtlCol="0" anchor="ctr" wrap="square" lIns="73152" rIns="73152" tIns="36576" bIns="36576"/>
+          <a:bodyPr rtlCol="0" anchor="ctr" wrap="square" lIns="109728" rIns="109728" tIns="73152" bIns="73152"/>
           <a:lstStyle/>
           <a:p>
             <a:pPr algn="l">
@@ -29750,7 +31256,19 @@
             <a:r>
               <a:t>ros2 param get /lidar_processor use_sim_time</a:t>
             </a:r>
-            <a:br/>
+          </a:p>
+          <a:p>
+            <a:pPr algn="l">
+              <a:spcAft>
+                <a:spcPts val="0"/>
+              </a:spcAft>
+              <a:defRPr sz="1600" b="0">
+                <a:solidFill>
+                  <a:srgbClr val="FFFFFF"/>
+                </a:solidFill>
+                <a:latin typeface="DejaVu Sans Mono"/>
+              </a:defRPr>
+            </a:pPr>
             <a:r>
               <a:t>ros2 topic echo /clock --once</a:t>
             </a:r>
@@ -29759,31 +31277,31 @@
       </p:sp>
       <p:sp>
         <p:nvSpPr>
-          <p:cNvPr id="10" name="TextBox 9"/>
-          <p:cNvSpPr txBox="1"/>
-          <p:nvPr/>
-        </p:nvSpPr>
-        <p:spPr>
-          <a:xfrm>
-            <a:off x="768096" y="5468112"/>
-            <a:ext cx="1143000" cy="256032"/>
-          </a:xfrm>
-          <a:prstGeom prst="rect">
-            <a:avLst/>
-          </a:prstGeom>
-          <a:noFill/>
-        </p:spPr>
-        <p:txBody>
-          <a:bodyPr wrap="square" lIns="73152" rIns="73152" tIns="36576" bIns="36576">
-            <a:spAutoFit/>
-          </a:bodyPr>
-          <a:lstStyle/>
-          <a:p>
-            <a:pPr algn="l">
-              <a:spcAft>
-                <a:spcPts val="0"/>
-              </a:spcAft>
-              <a:defRPr sz="1800" b="1">
+          <p:cNvPr id="11" name="TextBox 10"/>
+          <p:cNvSpPr txBox="1"/>
+          <p:nvPr/>
+        </p:nvSpPr>
+        <p:spPr>
+          <a:xfrm>
+            <a:off x="768096" y="5276088"/>
+            <a:ext cx="10561320" cy="384048"/>
+          </a:xfrm>
+          <a:prstGeom prst="rect">
+            <a:avLst/>
+          </a:prstGeom>
+          <a:noFill/>
+        </p:spPr>
+        <p:txBody>
+          <a:bodyPr wrap="square" lIns="73152" rIns="73152" tIns="36576" bIns="36576">
+            <a:spAutoFit/>
+          </a:bodyPr>
+          <a:lstStyle/>
+          <a:p>
+            <a:pPr algn="ctr">
+              <a:spcAft>
+                <a:spcPts val="0"/>
+              </a:spcAft>
+              <a:defRPr sz="1500" b="1">
                 <a:solidFill>
                   <a:srgbClr val="2A8B5A"/>
                 </a:solidFill>
@@ -29791,38 +31309,38 @@
               </a:defRPr>
             </a:pPr>
             <a:r>
-              <a:t>확인</a:t>
-            </a:r>
-          </a:p>
-        </p:txBody>
-      </p:sp>
-      <p:sp>
-        <p:nvSpPr>
-          <p:cNvPr id="11" name="TextBox 10"/>
-          <p:cNvSpPr txBox="1"/>
-          <p:nvPr/>
-        </p:nvSpPr>
-        <p:spPr>
-          <a:xfrm>
-            <a:off x="768096" y="5742432"/>
-            <a:ext cx="10561320" cy="347472"/>
-          </a:xfrm>
-          <a:prstGeom prst="rect">
-            <a:avLst/>
-          </a:prstGeom>
-          <a:noFill/>
-        </p:spPr>
-        <p:txBody>
-          <a:bodyPr wrap="square" lIns="73152" rIns="73152" tIns="36576" bIns="36576">
-            <a:spAutoFit/>
-          </a:bodyPr>
-          <a:lstStyle/>
-          <a:p>
-            <a:pPr algn="l">
-              <a:spcAft>
-                <a:spcPts val="0"/>
-              </a:spcAft>
-              <a:defRPr sz="1800" b="0">
+              <a:t>터미널 1 역할: 다른 터미널의 실행 결과를 이 창에서 관찰·검증합니다.</a:t>
+            </a:r>
+          </a:p>
+        </p:txBody>
+      </p:sp>
+      <p:sp>
+        <p:nvSpPr>
+          <p:cNvPr id="12" name="TextBox 11"/>
+          <p:cNvSpPr txBox="1"/>
+          <p:nvPr/>
+        </p:nvSpPr>
+        <p:spPr>
+          <a:xfrm>
+            <a:off x="768096" y="5916168"/>
+            <a:ext cx="10561320" cy="292608"/>
+          </a:xfrm>
+          <a:prstGeom prst="rect">
+            <a:avLst/>
+          </a:prstGeom>
+          <a:noFill/>
+        </p:spPr>
+        <p:txBody>
+          <a:bodyPr wrap="square" lIns="73152" rIns="73152" tIns="36576" bIns="36576">
+            <a:spAutoFit/>
+          </a:bodyPr>
+          <a:lstStyle/>
+          <a:p>
+            <a:pPr algn="ctr">
+              <a:spcAft>
+                <a:spcPts val="0"/>
+              </a:spcAft>
+              <a:defRPr sz="1500" b="1">
                 <a:solidFill>
                   <a:srgbClr val="122C4E"/>
                 </a:solidFill>
@@ -29830,7 +31348,7 @@
               </a:defRPr>
             </a:pPr>
             <a:r>
-              <a:t>출력에서 topic·frame·파일 이름 또는 성공 메시지를 찾고, 맞지 않으면 다음 파일로 가지 않습니다.</a:t>
+              <a:t>확인: 출력에서 topic·frame·파일 이름 또는 성공 메시지를 찾고, 맞지 않으면 다음 파일로 가지 않습니다.</a:t>
             </a:r>
           </a:p>
         </p:txBody>
@@ -30062,7 +31580,7 @@
               </a:defRPr>
             </a:pPr>
             <a:r>
-              <a:t>현재 단계 실행 2/2    |    현재 폴더 ~/ros2_curri/my_agv_ws    |    현재 터미널</a:t>
+              <a:t>현재 단계 실행 2/2    |    현재 폴더 ~/ros2_curri/my_agv_ws    |    터미널 1</a:t>
             </a:r>
           </a:p>
         </p:txBody>
@@ -30075,25 +31593,25 @@
         </p:nvSpPr>
         <p:spPr>
           <a:xfrm>
-            <a:off x="676656" y="1764792"/>
-            <a:ext cx="1828800" cy="347472"/>
-          </a:xfrm>
-          <a:prstGeom prst="rect">
-            <a:avLst/>
-          </a:prstGeom>
-          <a:noFill/>
-        </p:spPr>
-        <p:txBody>
-          <a:bodyPr wrap="square" lIns="73152" rIns="73152" tIns="36576" bIns="36576">
-            <a:spAutoFit/>
-          </a:bodyPr>
-          <a:lstStyle/>
-          <a:p>
-            <a:pPr algn="l">
-              <a:spcAft>
-                <a:spcPts val="0"/>
-              </a:spcAft>
-              <a:defRPr sz="1800" b="1">
+            <a:off x="676656" y="1719072"/>
+            <a:ext cx="1691640" cy="274320"/>
+          </a:xfrm>
+          <a:prstGeom prst="rect">
+            <a:avLst/>
+          </a:prstGeom>
+          <a:noFill/>
+        </p:spPr>
+        <p:txBody>
+          <a:bodyPr wrap="square" lIns="73152" rIns="73152" tIns="36576" bIns="36576">
+            <a:spAutoFit/>
+          </a:bodyPr>
+          <a:lstStyle/>
+          <a:p>
+            <a:pPr algn="l">
+              <a:spcAft>
+                <a:spcPts val="0"/>
+              </a:spcAft>
+              <a:defRPr sz="1700" b="1">
                 <a:solidFill>
                   <a:srgbClr val="225B9B"/>
                 </a:solidFill>
@@ -30101,7 +31619,7 @@
               </a:defRPr>
             </a:pPr>
             <a:r>
-              <a:t>왜 하는가</a:t>
+              <a:t>명령의 목적</a:t>
             </a:r>
           </a:p>
         </p:txBody>
@@ -30114,7 +31632,7 @@
         </p:nvSpPr>
         <p:spPr>
           <a:xfrm>
-            <a:off x="676656" y="2103120"/>
+            <a:off x="676656" y="2002536"/>
             <a:ext cx="10789920" cy="512064"/>
           </a:xfrm>
           <a:prstGeom prst="rect">
@@ -30132,7 +31650,7 @@
               <a:spcAft>
                 <a:spcPts val="0"/>
               </a:spcAft>
-              <a:defRPr sz="2000" b="0">
+              <a:defRPr sz="1800" b="0">
                 <a:solidFill>
                   <a:srgbClr val="122C4E"/>
                 </a:solidFill>
@@ -30147,14 +31665,53 @@
       </p:sp>
       <p:sp>
         <p:nvSpPr>
-          <p:cNvPr id="9" name="Rounded Rectangle 8"/>
+          <p:cNvPr id="9" name="TextBox 8"/>
+          <p:cNvSpPr txBox="1"/>
+          <p:nvPr/>
+        </p:nvSpPr>
+        <p:spPr>
+          <a:xfrm>
+            <a:off x="676656" y="2816352"/>
+            <a:ext cx="10835640" cy="256032"/>
+          </a:xfrm>
+          <a:prstGeom prst="rect">
+            <a:avLst/>
+          </a:prstGeom>
+          <a:noFill/>
+        </p:spPr>
+        <p:txBody>
+          <a:bodyPr wrap="square" lIns="73152" rIns="73152" tIns="36576" bIns="36576">
+            <a:spAutoFit/>
+          </a:bodyPr>
+          <a:lstStyle/>
+          <a:p>
+            <a:pPr algn="ctr">
+              <a:spcAft>
+                <a:spcPts val="0"/>
+              </a:spcAft>
+              <a:defRPr sz="1600" b="1">
+                <a:solidFill>
+                  <a:srgbClr val="225B9B"/>
+                </a:solidFill>
+                <a:latin typeface="Noto Sans CJK KR"/>
+              </a:defRPr>
+            </a:pPr>
+            <a:r>
+              <a:t>터미널 1 — 아래 검은 블록은 명령만 복사합니다.</a:t>
+            </a:r>
+          </a:p>
+        </p:txBody>
+      </p:sp>
+      <p:sp>
+        <p:nvSpPr>
+          <p:cNvPr id="10" name="Rounded Rectangle 9"/>
           <p:cNvSpPr/>
           <p:nvPr/>
         </p:nvSpPr>
         <p:spPr>
           <a:xfrm>
-            <a:off x="676656" y="2871216"/>
-            <a:ext cx="10835640" cy="2331720"/>
+            <a:off x="676656" y="3154680"/>
+            <a:ext cx="10835640" cy="1938528"/>
           </a:xfrm>
           <a:prstGeom prst="roundRect">
             <a:avLst/>
@@ -30183,7 +31740,7 @@
           </a:fontRef>
         </p:style>
         <p:txBody>
-          <a:bodyPr rtlCol="0" anchor="ctr" wrap="square" lIns="73152" rIns="73152" tIns="36576" bIns="36576"/>
+          <a:bodyPr rtlCol="0" anchor="ctr" wrap="square" lIns="109728" rIns="109728" tIns="73152" bIns="73152"/>
           <a:lstStyle/>
           <a:p>
             <a:pPr algn="l">
@@ -30200,11 +31757,35 @@
             <a:r>
               <a:t>ros2 topic hz /scan</a:t>
             </a:r>
-            <a:br/>
+          </a:p>
+          <a:p>
+            <a:pPr algn="l">
+              <a:spcAft>
+                <a:spcPts val="0"/>
+              </a:spcAft>
+              <a:defRPr sz="1600" b="0">
+                <a:solidFill>
+                  <a:srgbClr val="FFFFFF"/>
+                </a:solidFill>
+                <a:latin typeface="DejaVu Sans Mono"/>
+              </a:defRPr>
+            </a:pPr>
             <a:r>
               <a:t>ros2 topic hz /imu/data</a:t>
             </a:r>
-            <a:br/>
+          </a:p>
+          <a:p>
+            <a:pPr algn="l">
+              <a:spcAft>
+                <a:spcPts val="0"/>
+              </a:spcAft>
+              <a:defRPr sz="1600" b="0">
+                <a:solidFill>
+                  <a:srgbClr val="FFFFFF"/>
+                </a:solidFill>
+                <a:latin typeface="DejaVu Sans Mono"/>
+              </a:defRPr>
+            </a:pPr>
             <a:r>
               <a:t>ros2 topic info --verbose /scan</a:t>
             </a:r>
@@ -30213,31 +31794,31 @@
       </p:sp>
       <p:sp>
         <p:nvSpPr>
-          <p:cNvPr id="10" name="TextBox 9"/>
-          <p:cNvSpPr txBox="1"/>
-          <p:nvPr/>
-        </p:nvSpPr>
-        <p:spPr>
-          <a:xfrm>
-            <a:off x="768096" y="5468112"/>
-            <a:ext cx="1143000" cy="256032"/>
-          </a:xfrm>
-          <a:prstGeom prst="rect">
-            <a:avLst/>
-          </a:prstGeom>
-          <a:noFill/>
-        </p:spPr>
-        <p:txBody>
-          <a:bodyPr wrap="square" lIns="73152" rIns="73152" tIns="36576" bIns="36576">
-            <a:spAutoFit/>
-          </a:bodyPr>
-          <a:lstStyle/>
-          <a:p>
-            <a:pPr algn="l">
-              <a:spcAft>
-                <a:spcPts val="0"/>
-              </a:spcAft>
-              <a:defRPr sz="1800" b="1">
+          <p:cNvPr id="11" name="TextBox 10"/>
+          <p:cNvSpPr txBox="1"/>
+          <p:nvPr/>
+        </p:nvSpPr>
+        <p:spPr>
+          <a:xfrm>
+            <a:off x="768096" y="5276088"/>
+            <a:ext cx="10561320" cy="384048"/>
+          </a:xfrm>
+          <a:prstGeom prst="rect">
+            <a:avLst/>
+          </a:prstGeom>
+          <a:noFill/>
+        </p:spPr>
+        <p:txBody>
+          <a:bodyPr wrap="square" lIns="73152" rIns="73152" tIns="36576" bIns="36576">
+            <a:spAutoFit/>
+          </a:bodyPr>
+          <a:lstStyle/>
+          <a:p>
+            <a:pPr algn="ctr">
+              <a:spcAft>
+                <a:spcPts val="0"/>
+              </a:spcAft>
+              <a:defRPr sz="1500" b="1">
                 <a:solidFill>
                   <a:srgbClr val="2A8B5A"/>
                 </a:solidFill>
@@ -30245,38 +31826,38 @@
               </a:defRPr>
             </a:pPr>
             <a:r>
-              <a:t>확인</a:t>
-            </a:r>
-          </a:p>
-        </p:txBody>
-      </p:sp>
-      <p:sp>
-        <p:nvSpPr>
-          <p:cNvPr id="11" name="TextBox 10"/>
-          <p:cNvSpPr txBox="1"/>
-          <p:nvPr/>
-        </p:nvSpPr>
-        <p:spPr>
-          <a:xfrm>
-            <a:off x="768096" y="5742432"/>
-            <a:ext cx="10561320" cy="347472"/>
-          </a:xfrm>
-          <a:prstGeom prst="rect">
-            <a:avLst/>
-          </a:prstGeom>
-          <a:noFill/>
-        </p:spPr>
-        <p:txBody>
-          <a:bodyPr wrap="square" lIns="73152" rIns="73152" tIns="36576" bIns="36576">
-            <a:spAutoFit/>
-          </a:bodyPr>
-          <a:lstStyle/>
-          <a:p>
-            <a:pPr algn="l">
-              <a:spcAft>
-                <a:spcPts val="0"/>
-              </a:spcAft>
-              <a:defRPr sz="1800" b="0">
+              <a:t>터미널 1 역할: 다른 터미널의 실행 결과를 이 창에서 관찰·검증합니다.</a:t>
+            </a:r>
+          </a:p>
+        </p:txBody>
+      </p:sp>
+      <p:sp>
+        <p:nvSpPr>
+          <p:cNvPr id="12" name="TextBox 11"/>
+          <p:cNvSpPr txBox="1"/>
+          <p:nvPr/>
+        </p:nvSpPr>
+        <p:spPr>
+          <a:xfrm>
+            <a:off x="768096" y="5916168"/>
+            <a:ext cx="10561320" cy="292608"/>
+          </a:xfrm>
+          <a:prstGeom prst="rect">
+            <a:avLst/>
+          </a:prstGeom>
+          <a:noFill/>
+        </p:spPr>
+        <p:txBody>
+          <a:bodyPr wrap="square" lIns="73152" rIns="73152" tIns="36576" bIns="36576">
+            <a:spAutoFit/>
+          </a:bodyPr>
+          <a:lstStyle/>
+          <a:p>
+            <a:pPr algn="ctr">
+              <a:spcAft>
+                <a:spcPts val="0"/>
+              </a:spcAft>
+              <a:defRPr sz="1500" b="1">
                 <a:solidFill>
                   <a:srgbClr val="122C4E"/>
                 </a:solidFill>
@@ -30284,7 +31865,7 @@
               </a:defRPr>
             </a:pPr>
             <a:r>
-              <a:t>출력에서 topic·frame·파일 이름 또는 성공 메시지를 찾고, 맞지 않으면 다음 파일로 가지 않습니다.</a:t>
+              <a:t>확인: 출력에서 topic·frame·파일 이름 또는 성공 메시지를 찾고, 맞지 않으면 다음 파일로 가지 않습니다.</a:t>
             </a:r>
           </a:p>
         </p:txBody>
@@ -30516,21 +32097,138 @@
               </a:defRPr>
             </a:pPr>
             <a:r>
-              <a:t>현재 단계 실행    |    현재 폴더 ~/ros2_curri/my_agv_ws    |    현재 터미널</a:t>
-            </a:r>
-          </a:p>
-        </p:txBody>
-      </p:sp>
-      <p:sp>
-        <p:nvSpPr>
-          <p:cNvPr id="7" name="Rounded Rectangle 6"/>
+              <a:t>현재 단계 실행    |    현재 폴더 ~/ros2_curri/my_agv_ws    |    터미널 1</a:t>
+            </a:r>
+          </a:p>
+        </p:txBody>
+      </p:sp>
+      <p:sp>
+        <p:nvSpPr>
+          <p:cNvPr id="7" name="TextBox 6"/>
+          <p:cNvSpPr txBox="1"/>
+          <p:nvPr/>
+        </p:nvSpPr>
+        <p:spPr>
+          <a:xfrm>
+            <a:off x="676656" y="1719072"/>
+            <a:ext cx="1691640" cy="274320"/>
+          </a:xfrm>
+          <a:prstGeom prst="rect">
+            <a:avLst/>
+          </a:prstGeom>
+          <a:noFill/>
+        </p:spPr>
+        <p:txBody>
+          <a:bodyPr wrap="square" lIns="73152" rIns="73152" tIns="36576" bIns="36576">
+            <a:spAutoFit/>
+          </a:bodyPr>
+          <a:lstStyle/>
+          <a:p>
+            <a:pPr algn="l">
+              <a:spcAft>
+                <a:spcPts val="0"/>
+              </a:spcAft>
+              <a:defRPr sz="1700" b="1">
+                <a:solidFill>
+                  <a:srgbClr val="225B9B"/>
+                </a:solidFill>
+                <a:latin typeface="Noto Sans CJK KR"/>
+              </a:defRPr>
+            </a:pPr>
+            <a:r>
+              <a:t>명령의 목적</a:t>
+            </a:r>
+          </a:p>
+        </p:txBody>
+      </p:sp>
+      <p:sp>
+        <p:nvSpPr>
+          <p:cNvPr id="8" name="TextBox 7"/>
+          <p:cNvSpPr txBox="1"/>
+          <p:nvPr/>
+        </p:nvSpPr>
+        <p:spPr>
+          <a:xfrm>
+            <a:off x="676656" y="2002536"/>
+            <a:ext cx="10789920" cy="512064"/>
+          </a:xfrm>
+          <a:prstGeom prst="rect">
+            <a:avLst/>
+          </a:prstGeom>
+          <a:noFill/>
+        </p:spPr>
+        <p:txBody>
+          <a:bodyPr wrap="square" lIns="73152" rIns="73152" tIns="36576" bIns="36576">
+            <a:spAutoFit/>
+          </a:bodyPr>
+          <a:lstStyle/>
+          <a:p>
+            <a:pPr algn="l">
+              <a:spcAft>
+                <a:spcPts val="0"/>
+              </a:spcAft>
+              <a:defRPr sz="1800" b="0">
+                <a:solidFill>
+                  <a:srgbClr val="122C4E"/>
+                </a:solidFill>
+                <a:latin typeface="Noto Sans CJK KR"/>
+              </a:defRPr>
+            </a:pPr>
+            <a:r>
+              <a:t>명령 순서를 바꾸지 않습니다. build가 끝난 뒤 source하고, 마지막 명령으로 node·Gazebo·RViz를 실행합니다.</a:t>
+            </a:r>
+          </a:p>
+        </p:txBody>
+      </p:sp>
+      <p:sp>
+        <p:nvSpPr>
+          <p:cNvPr id="9" name="TextBox 8"/>
+          <p:cNvSpPr txBox="1"/>
+          <p:nvPr/>
+        </p:nvSpPr>
+        <p:spPr>
+          <a:xfrm>
+            <a:off x="676656" y="2816352"/>
+            <a:ext cx="10835640" cy="256032"/>
+          </a:xfrm>
+          <a:prstGeom prst="rect">
+            <a:avLst/>
+          </a:prstGeom>
+          <a:noFill/>
+        </p:spPr>
+        <p:txBody>
+          <a:bodyPr wrap="square" lIns="73152" rIns="73152" tIns="36576" bIns="36576">
+            <a:spAutoFit/>
+          </a:bodyPr>
+          <a:lstStyle/>
+          <a:p>
+            <a:pPr algn="ctr">
+              <a:spcAft>
+                <a:spcPts val="0"/>
+              </a:spcAft>
+              <a:defRPr sz="1600" b="1">
+                <a:solidFill>
+                  <a:srgbClr val="225B9B"/>
+                </a:solidFill>
+                <a:latin typeface="Noto Sans CJK KR"/>
+              </a:defRPr>
+            </a:pPr>
+            <a:r>
+              <a:t>터미널 1 — 아래 검은 블록은 명령만 복사합니다.</a:t>
+            </a:r>
+          </a:p>
+        </p:txBody>
+      </p:sp>
+      <p:sp>
+        <p:nvSpPr>
+          <p:cNvPr id="10" name="Rounded Rectangle 9"/>
           <p:cNvSpPr/>
           <p:nvPr/>
         </p:nvSpPr>
         <p:spPr>
           <a:xfrm>
-            <a:off x="658368" y="1700784"/>
-            <a:ext cx="10972800" cy="3182112"/>
+            <a:off x="676656" y="3154680"/>
+            <a:ext cx="10835640" cy="1938528"/>
           </a:xfrm>
           <a:prstGeom prst="roundRect">
             <a:avLst/>
@@ -30559,7 +32257,7 @@
           </a:fontRef>
         </p:style>
         <p:txBody>
-          <a:bodyPr rtlCol="0" anchor="ctr" wrap="square" lIns="73152" rIns="73152" tIns="36576" bIns="36576"/>
+          <a:bodyPr rtlCol="0" anchor="ctr" wrap="square" lIns="109728" rIns="109728" tIns="73152" bIns="73152"/>
           <a:lstStyle/>
           <a:p>
             <a:pPr algn="l">
@@ -30581,31 +32279,31 @@
       </p:sp>
       <p:sp>
         <p:nvSpPr>
-          <p:cNvPr id="8" name="TextBox 7"/>
-          <p:cNvSpPr txBox="1"/>
-          <p:nvPr/>
-        </p:nvSpPr>
-        <p:spPr>
-          <a:xfrm>
-            <a:off x="786384" y="5239512"/>
-            <a:ext cx="1261872" cy="237744"/>
-          </a:xfrm>
-          <a:prstGeom prst="rect">
-            <a:avLst/>
-          </a:prstGeom>
-          <a:noFill/>
-        </p:spPr>
-        <p:txBody>
-          <a:bodyPr wrap="square" lIns="73152" rIns="73152" tIns="36576" bIns="36576">
-            <a:spAutoFit/>
-          </a:bodyPr>
-          <a:lstStyle/>
-          <a:p>
-            <a:pPr algn="l">
-              <a:spcAft>
-                <a:spcPts val="0"/>
-              </a:spcAft>
-              <a:defRPr sz="1800" b="1">
+          <p:cNvPr id="11" name="TextBox 10"/>
+          <p:cNvSpPr txBox="1"/>
+          <p:nvPr/>
+        </p:nvSpPr>
+        <p:spPr>
+          <a:xfrm>
+            <a:off x="768096" y="5276088"/>
+            <a:ext cx="10561320" cy="384048"/>
+          </a:xfrm>
+          <a:prstGeom prst="rect">
+            <a:avLst/>
+          </a:prstGeom>
+          <a:noFill/>
+        </p:spPr>
+        <p:txBody>
+          <a:bodyPr wrap="square" lIns="73152" rIns="73152" tIns="36576" bIns="36576">
+            <a:spAutoFit/>
+          </a:bodyPr>
+          <a:lstStyle/>
+          <a:p>
+            <a:pPr algn="ctr">
+              <a:spcAft>
+                <a:spcPts val="0"/>
+              </a:spcAft>
+              <a:defRPr sz="1500" b="1">
                 <a:solidFill>
                   <a:srgbClr val="2A8B5A"/>
                 </a:solidFill>
@@ -30613,38 +32311,38 @@
               </a:defRPr>
             </a:pPr>
             <a:r>
-              <a:t>확인 기준</a:t>
-            </a:r>
-          </a:p>
-        </p:txBody>
-      </p:sp>
-      <p:sp>
-        <p:nvSpPr>
-          <p:cNvPr id="9" name="TextBox 8"/>
-          <p:cNvSpPr txBox="1"/>
-          <p:nvPr/>
-        </p:nvSpPr>
-        <p:spPr>
-          <a:xfrm>
-            <a:off x="786384" y="5532120"/>
-            <a:ext cx="10469880" cy="420624"/>
-          </a:xfrm>
-          <a:prstGeom prst="rect">
-            <a:avLst/>
-          </a:prstGeom>
-          <a:noFill/>
-        </p:spPr>
-        <p:txBody>
-          <a:bodyPr wrap="square" lIns="73152" rIns="73152" tIns="36576" bIns="36576">
-            <a:spAutoFit/>
-          </a:bodyPr>
-          <a:lstStyle/>
-          <a:p>
-            <a:pPr algn="l">
-              <a:spcAft>
-                <a:spcPts val="0"/>
-              </a:spcAft>
-              <a:defRPr sz="1800" b="0">
+              <a:t>터미널 1 역할: 시뮬레이터·bridge·node를 먼저 시작한 뒤 이 창은 종료하지 않고 둡니다.</a:t>
+            </a:r>
+          </a:p>
+        </p:txBody>
+      </p:sp>
+      <p:sp>
+        <p:nvSpPr>
+          <p:cNvPr id="12" name="TextBox 11"/>
+          <p:cNvSpPr txBox="1"/>
+          <p:nvPr/>
+        </p:nvSpPr>
+        <p:spPr>
+          <a:xfrm>
+            <a:off x="768096" y="5916168"/>
+            <a:ext cx="10561320" cy="292608"/>
+          </a:xfrm>
+          <a:prstGeom prst="rect">
+            <a:avLst/>
+          </a:prstGeom>
+          <a:noFill/>
+        </p:spPr>
+        <p:txBody>
+          <a:bodyPr wrap="square" lIns="73152" rIns="73152" tIns="36576" bIns="36576">
+            <a:spAutoFit/>
+          </a:bodyPr>
+          <a:lstStyle/>
+          <a:p>
+            <a:pPr algn="ctr">
+              <a:spcAft>
+                <a:spcPts val="0"/>
+              </a:spcAft>
+              <a:defRPr sz="1500" b="1">
                 <a:solidFill>
                   <a:srgbClr val="122C4E"/>
                 </a:solidFill>
@@ -30652,7 +32350,7 @@
               </a:defRPr>
             </a:pPr>
             <a:r>
-              <a:t>모든 sensor 노드가 같은 시뮬레이션 시간과 기대 publish rate를 사용한다.</a:t>
+              <a:t>확인: 모든 sensor 노드가 같은 시뮬레이션 시간과 기대 publish rate를 사용한다.</a:t>
             </a:r>
           </a:p>
         </p:txBody>
@@ -30748,7 +32446,7 @@
               </a:defRPr>
             </a:pPr>
             <a:r>
-              <a:t>실제 ROS 2 환경의 파일·패키지·구성 검증 로그</a:t>
+              <a:t>실제 terminal: Camera topic의 type·연결 수·실측 rate</a:t>
             </a:r>
           </a:p>
         </p:txBody>
@@ -30833,7 +32531,7 @@
       </p:sp>
       <p:pic>
         <p:nvPicPr>
-          <p:cNvPr id="6" name="Picture 5" descr="validation_terminal.png"/>
+          <p:cNvPr id="6" name="Picture 5" descr="02_camera_terminal_actual.png"/>
           <p:cNvPicPr>
             <a:picLocks noChangeAspect="1"/>
           </p:cNvPicPr>
@@ -30847,8 +32545,8 @@
         </p:blipFill>
         <p:spPr>
           <a:xfrm>
-            <a:off x="790956" y="1453970"/>
-            <a:ext cx="10607040" cy="4599282"/>
+            <a:off x="2789770" y="1353312"/>
+            <a:ext cx="6609411" cy="4800600"/>
           </a:xfrm>
           <a:prstGeom prst="rect">
             <a:avLst/>
@@ -30889,7 +32587,7 @@
               </a:defRPr>
             </a:pPr>
             <a:r>
-              <a:t>화면에서 확인: ① 명령/설정  ② 정상 출력 또는 화면  ③ 다음 검증 명령으로 재확인</a:t>
+              <a:t>화면에서 확인: camera가 message를 내보내고 있는지 type·publisher·rate로 확인합니다.</a:t>
             </a:r>
           </a:p>
         </p:txBody>
@@ -30946,7 +32644,7 @@
               </a:defRPr>
             </a:pPr>
             <a:r>
-              <a:t>객관적 검증 명령으로 완료를 확인한다</a:t>
+              <a:t>정상 결과: 실제 환경에서 확인한 출력</a:t>
             </a:r>
           </a:p>
         </p:txBody>
@@ -30985,7 +32683,7 @@
               </a:defRPr>
             </a:pPr>
             <a:r>
-              <a:t>화면만 보지 말고 topic·frame·파일·parameter를 다시 확인합니다.</a:t>
+              <a:t>실제 terminal: LiDAR의 frame·range·실측 rate</a:t>
             </a:r>
           </a:p>
         </p:txBody>
@@ -31068,180 +32766,57 @@
           </a:p>
         </p:txBody>
       </p:sp>
-      <p:sp>
-        <p:nvSpPr>
-          <p:cNvPr id="6" name="Rectangle 5"/>
-          <p:cNvSpPr/>
-          <p:nvPr/>
-        </p:nvSpPr>
-        <p:spPr>
-          <a:xfrm>
-            <a:off x="566928" y="1188720"/>
-            <a:ext cx="11064240" cy="347472"/>
-          </a:xfrm>
-          <a:prstGeom prst="rect">
-            <a:avLst/>
-          </a:prstGeom>
-          <a:solidFill>
-            <a:srgbClr val="F4F7FB"/>
-          </a:solidFill>
-          <a:ln>
-            <a:solidFill>
-              <a:srgbClr val="F4F7FB"/>
-            </a:solidFill>
-          </a:ln>
-        </p:spPr>
-        <p:style>
-          <a:lnRef idx="1">
-            <a:schemeClr val="accent1"/>
-          </a:lnRef>
-          <a:fillRef idx="3">
-            <a:schemeClr val="accent1"/>
-          </a:fillRef>
-          <a:effectRef idx="2">
-            <a:schemeClr val="accent1"/>
-          </a:effectRef>
-          <a:fontRef idx="minor">
-            <a:schemeClr val="lt1"/>
-          </a:fontRef>
-        </p:style>
-        <p:txBody>
-          <a:bodyPr rtlCol="0" anchor="ctr" wrap="square" lIns="73152" rIns="73152" tIns="36576" bIns="36576"/>
-          <a:lstStyle/>
-          <a:p>
-            <a:pPr algn="l">
-              <a:spcAft>
-                <a:spcPts val="0"/>
-              </a:spcAft>
-              <a:defRPr sz="1300" b="1">
-                <a:solidFill>
-                  <a:srgbClr val="122C4E"/>
-                </a:solidFill>
-                <a:latin typeface="Noto Sans CJK KR"/>
-              </a:defRPr>
-            </a:pPr>
-            <a:r>
-              <a:t>현재 단계 검증    |    현재 폴더 ~/ros2_curri/my_agv_ws    |    현재 터미널</a:t>
-            </a:r>
-          </a:p>
-        </p:txBody>
-      </p:sp>
-      <p:sp>
-        <p:nvSpPr>
-          <p:cNvPr id="7" name="Rounded Rectangle 6"/>
-          <p:cNvSpPr/>
-          <p:nvPr/>
-        </p:nvSpPr>
-        <p:spPr>
-          <a:xfrm>
-            <a:off x="658368" y="1755648"/>
-            <a:ext cx="10972800" cy="2148840"/>
-          </a:xfrm>
-          <a:prstGeom prst="roundRect">
-            <a:avLst/>
-          </a:prstGeom>
-          <a:solidFill>
-            <a:srgbClr val="1D232D"/>
-          </a:solidFill>
-          <a:ln>
-            <a:solidFill>
-              <a:srgbClr val="1D232D"/>
-            </a:solidFill>
-          </a:ln>
-        </p:spPr>
-        <p:style>
-          <a:lnRef idx="1">
-            <a:schemeClr val="accent1"/>
-          </a:lnRef>
-          <a:fillRef idx="3">
-            <a:schemeClr val="accent1"/>
-          </a:fillRef>
-          <a:effectRef idx="2">
-            <a:schemeClr val="accent1"/>
-          </a:effectRef>
-          <a:fontRef idx="minor">
-            <a:schemeClr val="lt1"/>
-          </a:fontRef>
-        </p:style>
-        <p:txBody>
-          <a:bodyPr rtlCol="0" anchor="ctr" wrap="square" lIns="73152" rIns="73152" tIns="36576" bIns="36576"/>
-          <a:lstStyle/>
-          <a:p>
-            <a:pPr algn="l">
-              <a:spcAft>
-                <a:spcPts val="0"/>
-              </a:spcAft>
-              <a:defRPr sz="1600" b="0">
-                <a:solidFill>
-                  <a:srgbClr val="FFFFFF"/>
-                </a:solidFill>
-                <a:latin typeface="DejaVu Sans Mono"/>
-              </a:defRPr>
-            </a:pPr>
-            <a:r>
-              <a:t>ros2 topic echo /clock --once</a:t>
-            </a:r>
-            <a:br/>
-            <a:r>
-              <a:t>ros2 topic hz /scan</a:t>
-            </a:r>
-            <a:br/>
-            <a:r>
-              <a:t>ros2 topic hz /imu/data</a:t>
-            </a:r>
-            <a:br/>
-            <a:r>
-              <a:t>ros2 param get /lidar_processor use_sim_time</a:t>
-            </a:r>
-          </a:p>
-        </p:txBody>
-      </p:sp>
-      <p:sp>
-        <p:nvSpPr>
-          <p:cNvPr id="8" name="Rounded Rectangle 7"/>
-          <p:cNvSpPr/>
-          <p:nvPr/>
-        </p:nvSpPr>
-        <p:spPr>
-          <a:xfrm>
-            <a:off x="658368" y="4206240"/>
-            <a:ext cx="10972800" cy="1554480"/>
-          </a:xfrm>
-          <a:prstGeom prst="roundRect">
-            <a:avLst/>
-          </a:prstGeom>
-          <a:solidFill>
-            <a:srgbClr val="F4F7FB"/>
-          </a:solidFill>
-          <a:ln>
-            <a:solidFill>
-              <a:srgbClr val="D1DFD5"/>
-            </a:solidFill>
-          </a:ln>
-        </p:spPr>
-        <p:style>
-          <a:lnRef idx="1">
-            <a:schemeClr val="accent1"/>
-          </a:lnRef>
-          <a:fillRef idx="3">
-            <a:schemeClr val="accent1"/>
-          </a:fillRef>
-          <a:effectRef idx="2">
-            <a:schemeClr val="accent1"/>
-          </a:effectRef>
-          <a:fontRef idx="minor">
-            <a:schemeClr val="lt1"/>
-          </a:fontRef>
-        </p:style>
-        <p:txBody>
-          <a:bodyPr rtlCol="0" anchor="ctr" wrap="square" lIns="73152" rIns="73152" tIns="36576" bIns="36576"/>
-          <a:lstStyle/>
-          <a:p>
-            <a:pPr algn="l">
-              <a:spcAft>
-                <a:spcPts val="0"/>
-              </a:spcAft>
-              <a:defRPr sz="1800" b="1">
+      <p:pic>
+        <p:nvPicPr>
+          <p:cNvPr id="6" name="Picture 5" descr="05_lidar_terminal_actual.png"/>
+          <p:cNvPicPr>
+            <a:picLocks noChangeAspect="1"/>
+          </p:cNvPicPr>
+          <p:nvPr/>
+        </p:nvPicPr>
+        <p:blipFill>
+          <a:blip r:embed="rId2"/>
+          <a:stretch>
+            <a:fillRect/>
+          </a:stretch>
+        </p:blipFill>
+        <p:spPr>
+          <a:xfrm>
+            <a:off x="2789770" y="1353312"/>
+            <a:ext cx="6609411" cy="4800600"/>
+          </a:xfrm>
+          <a:prstGeom prst="rect">
+            <a:avLst/>
+          </a:prstGeom>
+        </p:spPr>
+      </p:pic>
+      <p:sp>
+        <p:nvSpPr>
+          <p:cNvPr id="7" name="TextBox 6"/>
+          <p:cNvSpPr txBox="1"/>
+          <p:nvPr/>
+        </p:nvSpPr>
+        <p:spPr>
+          <a:xfrm>
+            <a:off x="777240" y="6144768"/>
+            <a:ext cx="10607040" cy="310896"/>
+          </a:xfrm>
+          <a:prstGeom prst="rect">
+            <a:avLst/>
+          </a:prstGeom>
+          <a:noFill/>
+        </p:spPr>
+        <p:txBody>
+          <a:bodyPr wrap="square" lIns="73152" rIns="73152" tIns="36576" bIns="36576">
+            <a:spAutoFit/>
+          </a:bodyPr>
+          <a:lstStyle/>
+          <a:p>
+            <a:pPr algn="ctr">
+              <a:spcAft>
+                <a:spcPts val="0"/>
+              </a:spcAft>
+              <a:defRPr sz="1100" b="1">
                 <a:solidFill>
                   <a:srgbClr val="2A8B5A"/>
                 </a:solidFill>
@@ -31249,58 +32824,7 @@
               </a:defRPr>
             </a:pPr>
             <a:r>
-              <a:t>완료 체크</a:t>
-            </a:r>
-            <a:br/>
-            <a:r>
-              <a:t>□ 명령이 오류 없이 실행된다.</a:t>
-            </a:r>
-            <a:br/>
-            <a:r>
-              <a:t>□ 기대한 파일·topic·frame·parameter 이름이 보인다.</a:t>
-            </a:r>
-            <a:br/>
-            <a:r>
-              <a:t>□ 값의 단위와 방향을 한 문장으로 설명할 수 있다.</a:t>
-            </a:r>
-          </a:p>
-        </p:txBody>
-      </p:sp>
-      <p:sp>
-        <p:nvSpPr>
-          <p:cNvPr id="9" name="TextBox 8"/>
-          <p:cNvSpPr txBox="1"/>
-          <p:nvPr/>
-        </p:nvSpPr>
-        <p:spPr>
-          <a:xfrm>
-            <a:off x="731520" y="5989320"/>
-            <a:ext cx="10789920" cy="237744"/>
-          </a:xfrm>
-          <a:prstGeom prst="rect">
-            <a:avLst/>
-          </a:prstGeom>
-          <a:noFill/>
-        </p:spPr>
-        <p:txBody>
-          <a:bodyPr wrap="square" lIns="73152" rIns="73152" tIns="36576" bIns="36576">
-            <a:spAutoFit/>
-          </a:bodyPr>
-          <a:lstStyle/>
-          <a:p>
-            <a:pPr algn="l">
-              <a:spcAft>
-                <a:spcPts val="0"/>
-              </a:spcAft>
-              <a:defRPr sz="1500" b="1">
-                <a:solidFill>
-                  <a:srgbClr val="122C4E"/>
-                </a:solidFill>
-                <a:latin typeface="Noto Sans CJK KR"/>
-              </a:defRPr>
-            </a:pPr>
-            <a:r>
-              <a:t>완료 조건: 모든 sensor 노드가 같은 시뮬레이션 시간과 기대 publish rate를 사용한다.</a:t>
+              <a:t>화면에서 확인: SDF 설정값과 실제 range/angle/rate가 논리적으로 맞는지 대조합니다.</a:t>
             </a:r>
           </a:p>
         </p:txBody>
@@ -31357,7 +32881,7 @@
               </a:defRPr>
             </a:pPr>
             <a:r>
-              <a:t>막히면: 증상 → 우선 확인 → 재검증</a:t>
+              <a:t>정상 결과: 실제 환경에서 확인한 출력</a:t>
             </a:r>
           </a:p>
         </p:txBody>
@@ -31396,7 +32920,7 @@
               </a:defRPr>
             </a:pPr>
             <a:r>
-              <a:t>오류 메시지를 숨기지 않고 같은 순서로 점검합니다.</a:t>
+              <a:t>실제 terminal: IMU frame·필드·실측 rate</a:t>
             </a:r>
           </a:p>
         </p:txBody>
@@ -31479,328 +33003,40 @@
           </a:p>
         </p:txBody>
       </p:sp>
-      <p:sp>
-        <p:nvSpPr>
-          <p:cNvPr id="6" name="Rectangle 5"/>
-          <p:cNvSpPr/>
-          <p:nvPr/>
-        </p:nvSpPr>
-        <p:spPr>
-          <a:xfrm>
-            <a:off x="566928" y="1188720"/>
-            <a:ext cx="11064240" cy="347472"/>
-          </a:xfrm>
-          <a:prstGeom prst="rect">
-            <a:avLst/>
-          </a:prstGeom>
-          <a:solidFill>
-            <a:srgbClr val="F4F7FB"/>
-          </a:solidFill>
-          <a:ln>
-            <a:solidFill>
-              <a:srgbClr val="F4F7FB"/>
-            </a:solidFill>
-          </a:ln>
-        </p:spPr>
-        <p:style>
-          <a:lnRef idx="1">
-            <a:schemeClr val="accent1"/>
-          </a:lnRef>
-          <a:fillRef idx="3">
-            <a:schemeClr val="accent1"/>
-          </a:fillRef>
-          <a:effectRef idx="2">
-            <a:schemeClr val="accent1"/>
-          </a:effectRef>
-          <a:fontRef idx="minor">
-            <a:schemeClr val="lt1"/>
-          </a:fontRef>
-        </p:style>
-        <p:txBody>
-          <a:bodyPr rtlCol="0" anchor="ctr" wrap="square" lIns="73152" rIns="73152" tIns="36576" bIns="36576"/>
-          <a:lstStyle/>
-          <a:p>
-            <a:pPr algn="l">
-              <a:spcAft>
-                <a:spcPts val="0"/>
-              </a:spcAft>
-              <a:defRPr sz="1300" b="1">
-                <a:solidFill>
-                  <a:srgbClr val="122C4E"/>
-                </a:solidFill>
-                <a:latin typeface="Noto Sans CJK KR"/>
-              </a:defRPr>
-            </a:pPr>
-            <a:r>
-              <a:t>현재 단계 오류 대응    |    현재 폴더 ~/ros2_curri/my_agv_ws    |    현재 터미널</a:t>
-            </a:r>
-          </a:p>
-        </p:txBody>
-      </p:sp>
-      <p:sp>
-        <p:nvSpPr>
-          <p:cNvPr id="7" name="Rounded Rectangle 6"/>
-          <p:cNvSpPr/>
-          <p:nvPr/>
-        </p:nvSpPr>
-        <p:spPr>
-          <a:xfrm>
-            <a:off x="694944" y="1755648"/>
-            <a:ext cx="10972800" cy="1115568"/>
-          </a:xfrm>
-          <a:prstGeom prst="roundRect">
-            <a:avLst/>
-          </a:prstGeom>
-          <a:solidFill>
-            <a:srgbClr val="FFF7F4"/>
-          </a:solidFill>
-          <a:ln>
-            <a:solidFill>
-              <a:srgbClr val="EDBEB4"/>
-            </a:solidFill>
-          </a:ln>
-        </p:spPr>
-        <p:style>
-          <a:lnRef idx="1">
-            <a:schemeClr val="accent1"/>
-          </a:lnRef>
-          <a:fillRef idx="3">
-            <a:schemeClr val="accent1"/>
-          </a:fillRef>
-          <a:effectRef idx="2">
-            <a:schemeClr val="accent1"/>
-          </a:effectRef>
-          <a:fontRef idx="minor">
-            <a:schemeClr val="lt1"/>
-          </a:fontRef>
-        </p:style>
-        <p:txBody>
-          <a:bodyPr rtlCol="0" anchor="ctr"/>
-          <a:lstStyle/>
-          <a:p>
-            <a:pPr algn="ctr"/>
-          </a:p>
-        </p:txBody>
-      </p:sp>
-      <p:sp>
-        <p:nvSpPr>
-          <p:cNvPr id="8" name="TextBox 7"/>
-          <p:cNvSpPr txBox="1"/>
-          <p:nvPr/>
-        </p:nvSpPr>
-        <p:spPr>
-          <a:xfrm>
-            <a:off x="896112" y="1901952"/>
-            <a:ext cx="2926080" cy="274320"/>
-          </a:xfrm>
-          <a:prstGeom prst="rect">
-            <a:avLst/>
-          </a:prstGeom>
-          <a:noFill/>
-        </p:spPr>
-        <p:txBody>
-          <a:bodyPr wrap="square" lIns="73152" rIns="73152" tIns="36576" bIns="36576">
-            <a:spAutoFit/>
-          </a:bodyPr>
-          <a:lstStyle/>
-          <a:p>
-            <a:pPr algn="l">
-              <a:spcAft>
-                <a:spcPts val="0"/>
-              </a:spcAft>
-              <a:defRPr sz="1800" b="1">
-                <a:solidFill>
-                  <a:srgbClr val="BE3B3B"/>
-                </a:solidFill>
-                <a:latin typeface="Noto Sans CJK KR"/>
-              </a:defRPr>
-            </a:pPr>
-            <a:r>
-              <a:t>증상 1: ROS 노드 시간이 안 감</a:t>
-            </a:r>
-          </a:p>
-        </p:txBody>
-      </p:sp>
-      <p:sp>
-        <p:nvSpPr>
-          <p:cNvPr id="9" name="TextBox 8"/>
-          <p:cNvSpPr txBox="1"/>
-          <p:nvPr/>
-        </p:nvSpPr>
-        <p:spPr>
-          <a:xfrm>
-            <a:off x="3794760" y="1883664"/>
-            <a:ext cx="7543800" cy="621792"/>
-          </a:xfrm>
-          <a:prstGeom prst="rect">
-            <a:avLst/>
-          </a:prstGeom>
-          <a:noFill/>
-        </p:spPr>
-        <p:txBody>
-          <a:bodyPr wrap="square" lIns="73152" rIns="73152" tIns="36576" bIns="36576">
-            <a:spAutoFit/>
-          </a:bodyPr>
-          <a:lstStyle/>
-          <a:p>
-            <a:pPr algn="l">
-              <a:spcAft>
-                <a:spcPts val="0"/>
-              </a:spcAft>
-              <a:defRPr sz="1600" b="0">
-                <a:solidFill>
-                  <a:srgbClr val="122C4E"/>
-                </a:solidFill>
-                <a:latin typeface="Noto Sans CJK KR"/>
-              </a:defRPr>
-            </a:pPr>
-            <a:r>
-              <a:t>우선 확인: use_sim_time과 /clock bridge를 확인한다.</a:t>
-            </a:r>
-            <a:br/>
-            <a:r>
-              <a:t>수정 후: ros2 topic echo /clock --once</a:t>
-            </a:r>
-          </a:p>
-        </p:txBody>
-      </p:sp>
-      <p:sp>
-        <p:nvSpPr>
-          <p:cNvPr id="10" name="Rounded Rectangle 9"/>
-          <p:cNvSpPr/>
-          <p:nvPr/>
-        </p:nvSpPr>
-        <p:spPr>
-          <a:xfrm>
-            <a:off x="694944" y="3172968"/>
-            <a:ext cx="10972800" cy="1115568"/>
-          </a:xfrm>
-          <a:prstGeom prst="roundRect">
-            <a:avLst/>
-          </a:prstGeom>
-          <a:solidFill>
-            <a:srgbClr val="FFF7F4"/>
-          </a:solidFill>
-          <a:ln>
-            <a:solidFill>
-              <a:srgbClr val="EDBEB4"/>
-            </a:solidFill>
-          </a:ln>
-        </p:spPr>
-        <p:style>
-          <a:lnRef idx="1">
-            <a:schemeClr val="accent1"/>
-          </a:lnRef>
-          <a:fillRef idx="3">
-            <a:schemeClr val="accent1"/>
-          </a:fillRef>
-          <a:effectRef idx="2">
-            <a:schemeClr val="accent1"/>
-          </a:effectRef>
-          <a:fontRef idx="minor">
-            <a:schemeClr val="lt1"/>
-          </a:fontRef>
-        </p:style>
-        <p:txBody>
-          <a:bodyPr rtlCol="0" anchor="ctr"/>
-          <a:lstStyle/>
-          <a:p>
-            <a:pPr algn="ctr"/>
-          </a:p>
-        </p:txBody>
-      </p:sp>
-      <p:sp>
-        <p:nvSpPr>
-          <p:cNvPr id="11" name="TextBox 10"/>
-          <p:cNvSpPr txBox="1"/>
-          <p:nvPr/>
-        </p:nvSpPr>
-        <p:spPr>
-          <a:xfrm>
-            <a:off x="896112" y="3319272"/>
-            <a:ext cx="2926080" cy="274320"/>
-          </a:xfrm>
-          <a:prstGeom prst="rect">
-            <a:avLst/>
-          </a:prstGeom>
-          <a:noFill/>
-        </p:spPr>
-        <p:txBody>
-          <a:bodyPr wrap="square" lIns="73152" rIns="73152" tIns="36576" bIns="36576">
-            <a:spAutoFit/>
-          </a:bodyPr>
-          <a:lstStyle/>
-          <a:p>
-            <a:pPr algn="l">
-              <a:spcAft>
-                <a:spcPts val="0"/>
-              </a:spcAft>
-              <a:defRPr sz="1800" b="1">
-                <a:solidFill>
-                  <a:srgbClr val="BE3B3B"/>
-                </a:solidFill>
-                <a:latin typeface="Noto Sans CJK KR"/>
-              </a:defRPr>
-            </a:pPr>
-            <a:r>
-              <a:t>증상 2: topic은 있는데 subscriber가 못 받음</a:t>
-            </a:r>
-          </a:p>
-        </p:txBody>
-      </p:sp>
-      <p:sp>
-        <p:nvSpPr>
-          <p:cNvPr id="12" name="TextBox 11"/>
-          <p:cNvSpPr txBox="1"/>
-          <p:nvPr/>
-        </p:nvSpPr>
-        <p:spPr>
-          <a:xfrm>
-            <a:off x="3794760" y="3300984"/>
-            <a:ext cx="7543800" cy="621792"/>
-          </a:xfrm>
-          <a:prstGeom prst="rect">
-            <a:avLst/>
-          </a:prstGeom>
-          <a:noFill/>
-        </p:spPr>
-        <p:txBody>
-          <a:bodyPr wrap="square" lIns="73152" rIns="73152" tIns="36576" bIns="36576">
-            <a:spAutoFit/>
-          </a:bodyPr>
-          <a:lstStyle/>
-          <a:p>
-            <a:pPr algn="l">
-              <a:spcAft>
-                <a:spcPts val="0"/>
-              </a:spcAft>
-              <a:defRPr sz="1600" b="0">
-                <a:solidFill>
-                  <a:srgbClr val="122C4E"/>
-                </a:solidFill>
-                <a:latin typeface="Noto Sans CJK KR"/>
-              </a:defRPr>
-            </a:pPr>
-            <a:r>
-              <a:t>우선 확인: publisher/subscriber QoS reliability 호환을 확인한다.</a:t>
-            </a:r>
-            <a:br/>
-            <a:r>
-              <a:t>수정 후: ros2 topic echo /clock --once</a:t>
-            </a:r>
-          </a:p>
-        </p:txBody>
-      </p:sp>
-      <p:sp>
-        <p:nvSpPr>
-          <p:cNvPr id="13" name="TextBox 12"/>
-          <p:cNvSpPr txBox="1"/>
-          <p:nvPr/>
-        </p:nvSpPr>
-        <p:spPr>
-          <a:xfrm>
-            <a:off x="822960" y="5102352"/>
-            <a:ext cx="10607040" cy="402336"/>
+      <p:pic>
+        <p:nvPicPr>
+          <p:cNvPr id="6" name="Picture 5" descr="06_imu_terminal_actual.png"/>
+          <p:cNvPicPr>
+            <a:picLocks noChangeAspect="1"/>
+          </p:cNvPicPr>
+          <p:nvPr/>
+        </p:nvPicPr>
+        <p:blipFill>
+          <a:blip r:embed="rId2"/>
+          <a:stretch>
+            <a:fillRect/>
+          </a:stretch>
+        </p:blipFill>
+        <p:spPr>
+          <a:xfrm>
+            <a:off x="2789770" y="1353312"/>
+            <a:ext cx="6609411" cy="4800600"/>
+          </a:xfrm>
+          <a:prstGeom prst="rect">
+            <a:avLst/>
+          </a:prstGeom>
+        </p:spPr>
+      </p:pic>
+      <p:sp>
+        <p:nvSpPr>
+          <p:cNvPr id="7" name="TextBox 6"/>
+          <p:cNvSpPr txBox="1"/>
+          <p:nvPr/>
+        </p:nvSpPr>
+        <p:spPr>
+          <a:xfrm>
+            <a:off x="777240" y="6144768"/>
+            <a:ext cx="10607040" cy="310896"/>
           </a:xfrm>
           <a:prstGeom prst="rect">
             <a:avLst/>
@@ -31817,15 +33053,15 @@
               <a:spcAft>
                 <a:spcPts val="0"/>
               </a:spcAft>
-              <a:defRPr sz="1800" b="1">
-                <a:solidFill>
-                  <a:srgbClr val="DB7E22"/>
-                </a:solidFill>
-                <a:latin typeface="Noto Sans CJK KR"/>
-              </a:defRPr>
-            </a:pPr>
-            <a:r>
-              <a:t>공통 순서: ① 현재 폴더 ② source ③ 파일 경로 ④ 이름/타입/단위 ⑤ build·source 후 재실행</a:t>
+              <a:defRPr sz="1100" b="1">
+                <a:solidFill>
+                  <a:srgbClr val="2A8B5A"/>
+                </a:solidFill>
+                <a:latin typeface="Noto Sans CJK KR"/>
+              </a:defRPr>
+            </a:pPr>
+            <a:r>
+              <a:t>화면에서 확인: IMU도 같은 simulation 시간에 갱신되는지 average rate를 확인합니다.</a:t>
             </a:r>
           </a:p>
         </p:txBody>
@@ -31882,7 +33118,7 @@
               </a:defRPr>
             </a:pPr>
             <a:r>
-              <a:t>막혔을 때만: Complete를 복구용으로 사용한다</a:t>
+              <a:t>정상 결과: 실제 환경에서 확인한 출력</a:t>
             </a:r>
           </a:p>
         </p:txBody>
@@ -31921,7 +33157,7 @@
               </a:defRPr>
             </a:pPr>
             <a:r>
-              <a:t>이 슬라이드가 먼저가 아닙니다. 직접 입력·실행을 시도한 뒤에만 내 파일과 Complete를 비교합니다.</a:t>
+              <a:t>실제 RViz2: sensor display를 같은 Fixed Frame에서 대조</a:t>
             </a:r>
           </a:p>
         </p:txBody>
@@ -32004,64 +33240,30 @@
           </a:p>
         </p:txBody>
       </p:sp>
-      <p:sp>
-        <p:nvSpPr>
-          <p:cNvPr id="6" name="Rectangle 5"/>
-          <p:cNvSpPr/>
-          <p:nvPr/>
-        </p:nvSpPr>
-        <p:spPr>
-          <a:xfrm>
-            <a:off x="566928" y="1188720"/>
-            <a:ext cx="11064240" cy="347472"/>
-          </a:xfrm>
-          <a:prstGeom prst="rect">
-            <a:avLst/>
-          </a:prstGeom>
-          <a:solidFill>
-            <a:srgbClr val="F4F7FB"/>
-          </a:solidFill>
-          <a:ln>
-            <a:solidFill>
-              <a:srgbClr val="F4F7FB"/>
-            </a:solidFill>
-          </a:ln>
-        </p:spPr>
-        <p:style>
-          <a:lnRef idx="1">
-            <a:schemeClr val="accent1"/>
-          </a:lnRef>
-          <a:fillRef idx="3">
-            <a:schemeClr val="accent1"/>
-          </a:fillRef>
-          <a:effectRef idx="2">
-            <a:schemeClr val="accent1"/>
-          </a:effectRef>
-          <a:fontRef idx="minor">
-            <a:schemeClr val="lt1"/>
-          </a:fontRef>
-        </p:style>
-        <p:txBody>
-          <a:bodyPr rtlCol="0" anchor="ctr" wrap="square" lIns="73152" rIns="73152" tIns="36576" bIns="36576"/>
-          <a:lstStyle/>
-          <a:p>
-            <a:pPr algn="l">
-              <a:spcAft>
-                <a:spcPts val="0"/>
-              </a:spcAft>
-              <a:defRPr sz="1300" b="1">
-                <a:solidFill>
-                  <a:srgbClr val="122C4E"/>
-                </a:solidFill>
-                <a:latin typeface="Noto Sans CJK KR"/>
-              </a:defRPr>
-            </a:pPr>
-            <a:r>
-              <a:t>현재 단계 복구용 Complete    |    현재 폴더 ~/ros2_curri    |    현재 터미널</a:t>
-            </a:r>
-          </a:p>
-        </p:txBody>
-      </p:sp>
+      <p:pic>
+        <p:nvPicPr>
+          <p:cNvPr id="6" name="Picture 5" descr="03_rviz_sensors_actual.png"/>
+          <p:cNvPicPr>
+            <a:picLocks noChangeAspect="1"/>
+          </p:cNvPicPr>
+          <p:nvPr/>
+        </p:nvPicPr>
+        <p:blipFill>
+          <a:blip r:embed="rId2"/>
+          <a:stretch>
+            <a:fillRect/>
+          </a:stretch>
+        </p:blipFill>
+        <p:spPr>
+          <a:xfrm>
+            <a:off x="2971409" y="1353312"/>
+            <a:ext cx="6246133" cy="4800600"/>
+          </a:xfrm>
+          <a:prstGeom prst="rect">
+            <a:avLst/>
+          </a:prstGeom>
+        </p:spPr>
+      </p:pic>
       <p:sp>
         <p:nvSpPr>
           <p:cNvPr id="7" name="TextBox 6"/>
@@ -32070,8 +33272,8 @@
         </p:nvSpPr>
         <p:spPr>
           <a:xfrm>
-            <a:off x="713232" y="1664208"/>
-            <a:ext cx="10698480" cy="402336"/>
+            <a:off x="777240" y="6144768"/>
+            <a:ext cx="10607040" cy="310896"/>
           </a:xfrm>
           <a:prstGeom prst="rect">
             <a:avLst/>
@@ -32088,120 +33290,7 @@
               <a:spcAft>
                 <a:spcPts val="0"/>
               </a:spcAft>
-              <a:defRPr sz="1800" b="1">
-                <a:solidFill>
-                  <a:srgbClr val="DB7E22"/>
-                </a:solidFill>
-                <a:latin typeface="Noto Sans CJK KR"/>
-              </a:defRPr>
-            </a:pPr>
-            <a:r>
-              <a:t>권장 순서: ① 내 오류를 확인  ② Complete와 diff  ③ 꼭 필요할 때만 backup 후 복사</a:t>
-            </a:r>
-          </a:p>
-        </p:txBody>
-      </p:sp>
-      <p:sp>
-        <p:nvSpPr>
-          <p:cNvPr id="8" name="Rounded Rectangle 7"/>
-          <p:cNvSpPr/>
-          <p:nvPr/>
-        </p:nvSpPr>
-        <p:spPr>
-          <a:xfrm>
-            <a:off x="676656" y="2423160"/>
-            <a:ext cx="10881360" cy="2606040"/>
-          </a:xfrm>
-          <a:prstGeom prst="roundRect">
-            <a:avLst/>
-          </a:prstGeom>
-          <a:solidFill>
-            <a:srgbClr val="1D232D"/>
-          </a:solidFill>
-          <a:ln>
-            <a:solidFill>
-              <a:srgbClr val="1D232D"/>
-            </a:solidFill>
-          </a:ln>
-        </p:spPr>
-        <p:style>
-          <a:lnRef idx="1">
-            <a:schemeClr val="accent1"/>
-          </a:lnRef>
-          <a:fillRef idx="3">
-            <a:schemeClr val="accent1"/>
-          </a:fillRef>
-          <a:effectRef idx="2">
-            <a:schemeClr val="accent1"/>
-          </a:effectRef>
-          <a:fontRef idx="minor">
-            <a:schemeClr val="lt1"/>
-          </a:fontRef>
-        </p:style>
-        <p:txBody>
-          <a:bodyPr rtlCol="0" anchor="ctr" wrap="square" lIns="73152" rIns="73152" tIns="36576" bIns="36576"/>
-          <a:lstStyle/>
-          <a:p>
-            <a:pPr algn="l">
-              <a:spcAft>
-                <a:spcPts val="0"/>
-              </a:spcAft>
-              <a:defRPr sz="1400" b="0">
-                <a:solidFill>
-                  <a:srgbClr val="FFFFFF"/>
-                </a:solidFill>
-                <a:latin typeface="DejaVu Sans Mono"/>
-              </a:defRPr>
-            </a:pPr>
-            <a:r>
-              <a:t>cd ~/ros2_curri</a:t>
-            </a:r>
-            <a:br/>
-            <a:r>
-              <a:t>diff -ru my_agv_ws/src blocks/D_sensors/M15_sensor_operations/complete/agv_ws/src || true</a:t>
-            </a:r>
-            <a:br/>
-            <a:r>
-              <a:t>cp -a my_agv_ws/src my_agv_ws/src_before_M15</a:t>
-            </a:r>
-            <a:br/>
-            <a:r>
-              <a:t>cp -a blocks/D_sensors/M15_sensor_operations/complete/agv_ws/src/. my_agv_ws/src/</a:t>
-            </a:r>
-            <a:br/>
-            <a:r>
-              <a:t>cd my_agv_ws &amp;&amp; colcon build --symlink-install &amp;&amp; source install/setup.bash</a:t>
-            </a:r>
-          </a:p>
-        </p:txBody>
-      </p:sp>
-      <p:sp>
-        <p:nvSpPr>
-          <p:cNvPr id="9" name="TextBox 8"/>
-          <p:cNvSpPr txBox="1"/>
-          <p:nvPr/>
-        </p:nvSpPr>
-        <p:spPr>
-          <a:xfrm>
-            <a:off x="786384" y="5413248"/>
-            <a:ext cx="10424160" cy="429768"/>
-          </a:xfrm>
-          <a:prstGeom prst="rect">
-            <a:avLst/>
-          </a:prstGeom>
-          <a:noFill/>
-        </p:spPr>
-        <p:txBody>
-          <a:bodyPr wrap="square" lIns="73152" rIns="73152" tIns="36576" bIns="36576">
-            <a:spAutoFit/>
-          </a:bodyPr>
-          <a:lstStyle/>
-          <a:p>
-            <a:pPr algn="ctr">
-              <a:spcAft>
-                <a:spcPts val="0"/>
-              </a:spcAft>
-              <a:defRPr sz="1700" b="1">
+              <a:defRPr sz="1100" b="1">
                 <a:solidFill>
                   <a:srgbClr val="2A8B5A"/>
                 </a:solidFill>
@@ -32209,7 +33298,7 @@
               </a:defRPr>
             </a:pPr>
             <a:r>
-              <a:t>복구 뒤에는 끝내지 말고, 내 파일과 Complete의 차이를 한 줄씩 설명한 뒤 다시 직접 입력해 봅니다.</a:t>
+              <a:t>화면에서 확인: camera·LiDAR·IMU 각각을 화면·terminal·frame 기준으로 교차 확인합니다.</a:t>
             </a:r>
           </a:p>
         </p:txBody>
@@ -32266,7 +33355,7 @@
               </a:defRPr>
             </a:pPr>
             <a:r>
-              <a:t>미니 실습: 값 하나를 바꾸고 결과를 비교한다</a:t>
+              <a:t>정상 결과: 실제 환경에서 확인한 출력</a:t>
             </a:r>
           </a:p>
         </p:txBody>
@@ -32305,7 +33394,7 @@
               </a:defRPr>
             </a:pPr>
             <a:r>
-              <a:t>정상 결과를 만든 뒤에는 한 번에 하나의 값만 바꿉니다.</a:t>
+              <a:t>실제 ROS 2 환경의 파일·패키지·구성 검증 로그</a:t>
             </a:r>
           </a:p>
         </p:txBody>
@@ -32388,157 +33477,65 @@
           </a:p>
         </p:txBody>
       </p:sp>
-      <p:sp>
-        <p:nvSpPr>
-          <p:cNvPr id="6" name="Rectangle 5"/>
-          <p:cNvSpPr/>
-          <p:nvPr/>
-        </p:nvSpPr>
-        <p:spPr>
-          <a:xfrm>
-            <a:off x="566928" y="1188720"/>
-            <a:ext cx="11064240" cy="347472"/>
-          </a:xfrm>
-          <a:prstGeom prst="rect">
-            <a:avLst/>
-          </a:prstGeom>
-          <a:solidFill>
-            <a:srgbClr val="F4F7FB"/>
-          </a:solidFill>
-          <a:ln>
-            <a:solidFill>
-              <a:srgbClr val="F4F7FB"/>
-            </a:solidFill>
-          </a:ln>
-        </p:spPr>
-        <p:style>
-          <a:lnRef idx="1">
-            <a:schemeClr val="accent1"/>
-          </a:lnRef>
-          <a:fillRef idx="3">
-            <a:schemeClr val="accent1"/>
-          </a:fillRef>
-          <a:effectRef idx="2">
-            <a:schemeClr val="accent1"/>
-          </a:effectRef>
-          <a:fontRef idx="minor">
-            <a:schemeClr val="lt1"/>
-          </a:fontRef>
-        </p:style>
-        <p:txBody>
-          <a:bodyPr rtlCol="0" anchor="ctr" wrap="square" lIns="73152" rIns="73152" tIns="36576" bIns="36576"/>
-          <a:lstStyle/>
-          <a:p>
-            <a:pPr algn="l">
-              <a:spcAft>
-                <a:spcPts val="0"/>
-              </a:spcAft>
-              <a:defRPr sz="1300" b="1">
-                <a:solidFill>
-                  <a:srgbClr val="122C4E"/>
-                </a:solidFill>
-                <a:latin typeface="Noto Sans CJK KR"/>
-              </a:defRPr>
-            </a:pPr>
-            <a:r>
-              <a:t>현재 단계 미니 실습    |    현재 폴더 ~/ros2_curri/my_agv_ws    |    현재 터미널</a:t>
-            </a:r>
-          </a:p>
-        </p:txBody>
-      </p:sp>
-      <p:sp>
-        <p:nvSpPr>
-          <p:cNvPr id="7" name="Rounded Rectangle 6"/>
-          <p:cNvSpPr/>
-          <p:nvPr/>
-        </p:nvSpPr>
-        <p:spPr>
-          <a:xfrm>
-            <a:off x="749808" y="1874519"/>
-            <a:ext cx="10652760" cy="1993392"/>
-          </a:xfrm>
-          <a:prstGeom prst="roundRect">
-            <a:avLst/>
-          </a:prstGeom>
-          <a:solidFill>
-            <a:srgbClr val="FFF8EB"/>
-          </a:solidFill>
-          <a:ln>
-            <a:solidFill>
-              <a:srgbClr val="ECC680"/>
-            </a:solidFill>
-          </a:ln>
-        </p:spPr>
-        <p:style>
-          <a:lnRef idx="1">
-            <a:schemeClr val="accent1"/>
-          </a:lnRef>
-          <a:fillRef idx="3">
-            <a:schemeClr val="accent1"/>
-          </a:fillRef>
-          <a:effectRef idx="2">
-            <a:schemeClr val="accent1"/>
-          </a:effectRef>
-          <a:fontRef idx="minor">
-            <a:schemeClr val="lt1"/>
-          </a:fontRef>
-        </p:style>
-        <p:txBody>
-          <a:bodyPr rtlCol="0" anchor="ctr" wrap="square" lIns="73152" rIns="73152" tIns="36576" bIns="36576"/>
+      <p:pic>
+        <p:nvPicPr>
+          <p:cNvPr id="6" name="Picture 5" descr="validation_terminal.png"/>
+          <p:cNvPicPr>
+            <a:picLocks noChangeAspect="1"/>
+          </p:cNvPicPr>
+          <p:nvPr/>
+        </p:nvPicPr>
+        <p:blipFill>
+          <a:blip r:embed="rId2"/>
+          <a:stretch>
+            <a:fillRect/>
+          </a:stretch>
+        </p:blipFill>
+        <p:spPr>
+          <a:xfrm>
+            <a:off x="790956" y="1453970"/>
+            <a:ext cx="10607040" cy="4599282"/>
+          </a:xfrm>
+          <a:prstGeom prst="rect">
+            <a:avLst/>
+          </a:prstGeom>
+        </p:spPr>
+      </p:pic>
+      <p:sp>
+        <p:nvSpPr>
+          <p:cNvPr id="7" name="TextBox 6"/>
+          <p:cNvSpPr txBox="1"/>
+          <p:nvPr/>
+        </p:nvSpPr>
+        <p:spPr>
+          <a:xfrm>
+            <a:off x="777240" y="6144768"/>
+            <a:ext cx="10607040" cy="310896"/>
+          </a:xfrm>
+          <a:prstGeom prst="rect">
+            <a:avLst/>
+          </a:prstGeom>
+          <a:noFill/>
+        </p:spPr>
+        <p:txBody>
+          <a:bodyPr wrap="square" lIns="73152" rIns="73152" tIns="36576" bIns="36576">
+            <a:spAutoFit/>
+          </a:bodyPr>
           <a:lstStyle/>
           <a:p>
             <a:pPr algn="ctr">
               <a:spcAft>
                 <a:spcPts val="0"/>
               </a:spcAft>
-              <a:defRPr sz="2300" b="1">
-                <a:solidFill>
-                  <a:srgbClr val="122C4E"/>
-                </a:solidFill>
-                <a:latin typeface="Noto Sans CJK KR"/>
-              </a:defRPr>
-            </a:pPr>
-            <a:r>
-              <a:t>/scan과 /imu/data의 hz를 표로 기록하고 SDF update_rate 10/100 Hz와 비교한다.</a:t>
-            </a:r>
-          </a:p>
-        </p:txBody>
-      </p:sp>
-      <p:sp>
-        <p:nvSpPr>
-          <p:cNvPr id="8" name="TextBox 7"/>
-          <p:cNvSpPr txBox="1"/>
-          <p:nvPr/>
-        </p:nvSpPr>
-        <p:spPr>
-          <a:xfrm>
-            <a:off x="877824" y="4590288"/>
-            <a:ext cx="10241280" cy="594360"/>
-          </a:xfrm>
-          <a:prstGeom prst="rect">
-            <a:avLst/>
-          </a:prstGeom>
-          <a:noFill/>
-        </p:spPr>
-        <p:txBody>
-          <a:bodyPr wrap="square" lIns="73152" rIns="73152" tIns="36576" bIns="36576">
-            <a:spAutoFit/>
-          </a:bodyPr>
-          <a:lstStyle/>
-          <a:p>
-            <a:pPr algn="ctr">
-              <a:spcAft>
-                <a:spcPts val="0"/>
-              </a:spcAft>
-              <a:defRPr sz="1900" b="1">
-                <a:solidFill>
-                  <a:srgbClr val="DB7E22"/>
-                </a:solidFill>
-                <a:latin typeface="Noto Sans CJK KR"/>
-              </a:defRPr>
-            </a:pPr>
-            <a:r>
-              <a:t>기록할 것: 바꾼 값(단위) · 기대한 변화 · 실제 출력/화면 · 원래 값으로 되돌린 결과</a:t>
+              <a:defRPr sz="1100" b="1">
+                <a:solidFill>
+                  <a:srgbClr val="2A8B5A"/>
+                </a:solidFill>
+                <a:latin typeface="Noto Sans CJK KR"/>
+              </a:defRPr>
+            </a:pPr>
+            <a:r>
+              <a:t>화면에서 확인: ① 명령/설정  ② 정상 출력 또는 화면  ③ 다음 검증 명령으로 재확인</a:t>
             </a:r>
           </a:p>
         </p:txBody>
@@ -33235,7 +34232,7 @@
               </a:defRPr>
             </a:pPr>
             <a:r>
-              <a:t>내 프로젝트 체크포인트를 저장하고 다음 모듈로 넘긴다</a:t>
+              <a:t>객관적 검증 명령으로 완료를 확인한다</a:t>
             </a:r>
           </a:p>
         </p:txBody>
@@ -33274,7 +34271,7 @@
               </a:defRPr>
             </a:pPr>
             <a:r>
-              <a:t>Complete는 복구용 비교 기준이고, 다음 단계는 내가 직접 만든 workspace에서 계속합니다.</a:t>
+              <a:t>화면만 보지 말고 topic·frame·파일·parameter를 다시 확인합니다.</a:t>
             </a:r>
           </a:p>
         </p:txBody>
@@ -33410,7 +34407,7 @@
               </a:defRPr>
             </a:pPr>
             <a:r>
-              <a:t>현재 단계 체크포인트    |    현재 폴더 ~/ros2_curri/my_agv_ws    |    현재 터미널</a:t>
+              <a:t>현재 단계 검증    |    현재 폴더 ~/ros2_curri/my_agv_ws    |    현재 터미널</a:t>
             </a:r>
           </a:p>
         </p:txBody>
@@ -33423,8 +34420,114 @@
         </p:nvSpPr>
         <p:spPr>
           <a:xfrm>
-            <a:off x="685800" y="1737360"/>
-            <a:ext cx="10972800" cy="3611880"/>
+            <a:off x="658368" y="1755648"/>
+            <a:ext cx="10972800" cy="2148840"/>
+          </a:xfrm>
+          <a:prstGeom prst="roundRect">
+            <a:avLst/>
+          </a:prstGeom>
+          <a:solidFill>
+            <a:srgbClr val="1D232D"/>
+          </a:solidFill>
+          <a:ln>
+            <a:solidFill>
+              <a:srgbClr val="1D232D"/>
+            </a:solidFill>
+          </a:ln>
+        </p:spPr>
+        <p:style>
+          <a:lnRef idx="1">
+            <a:schemeClr val="accent1"/>
+          </a:lnRef>
+          <a:fillRef idx="3">
+            <a:schemeClr val="accent1"/>
+          </a:fillRef>
+          <a:effectRef idx="2">
+            <a:schemeClr val="accent1"/>
+          </a:effectRef>
+          <a:fontRef idx="minor">
+            <a:schemeClr val="lt1"/>
+          </a:fontRef>
+        </p:style>
+        <p:txBody>
+          <a:bodyPr rtlCol="0" anchor="ctr" wrap="square" lIns="109728" rIns="109728" tIns="73152" bIns="73152"/>
+          <a:lstStyle/>
+          <a:p>
+            <a:pPr algn="l">
+              <a:spcAft>
+                <a:spcPts val="0"/>
+              </a:spcAft>
+              <a:defRPr sz="1600" b="0">
+                <a:solidFill>
+                  <a:srgbClr val="FFFFFF"/>
+                </a:solidFill>
+                <a:latin typeface="DejaVu Sans Mono"/>
+              </a:defRPr>
+            </a:pPr>
+            <a:r>
+              <a:t>ros2 topic echo /clock --once</a:t>
+            </a:r>
+          </a:p>
+          <a:p>
+            <a:pPr algn="l">
+              <a:spcAft>
+                <a:spcPts val="0"/>
+              </a:spcAft>
+              <a:defRPr sz="1600" b="0">
+                <a:solidFill>
+                  <a:srgbClr val="FFFFFF"/>
+                </a:solidFill>
+                <a:latin typeface="DejaVu Sans Mono"/>
+              </a:defRPr>
+            </a:pPr>
+            <a:r>
+              <a:t>ros2 topic hz /scan</a:t>
+            </a:r>
+          </a:p>
+          <a:p>
+            <a:pPr algn="l">
+              <a:spcAft>
+                <a:spcPts val="0"/>
+              </a:spcAft>
+              <a:defRPr sz="1600" b="0">
+                <a:solidFill>
+                  <a:srgbClr val="FFFFFF"/>
+                </a:solidFill>
+                <a:latin typeface="DejaVu Sans Mono"/>
+              </a:defRPr>
+            </a:pPr>
+            <a:r>
+              <a:t>ros2 topic hz /imu/data</a:t>
+            </a:r>
+          </a:p>
+          <a:p>
+            <a:pPr algn="l">
+              <a:spcAft>
+                <a:spcPts val="0"/>
+              </a:spcAft>
+              <a:defRPr sz="1600" b="0">
+                <a:solidFill>
+                  <a:srgbClr val="FFFFFF"/>
+                </a:solidFill>
+                <a:latin typeface="DejaVu Sans Mono"/>
+              </a:defRPr>
+            </a:pPr>
+            <a:r>
+              <a:t>ros2 param get /lidar_processor use_sim_time</a:t>
+            </a:r>
+          </a:p>
+        </p:txBody>
+      </p:sp>
+      <p:sp>
+        <p:nvSpPr>
+          <p:cNvPr id="8" name="Rounded Rectangle 7"/>
+          <p:cNvSpPr/>
+          <p:nvPr/>
+        </p:nvSpPr>
+        <p:spPr>
+          <a:xfrm>
+            <a:off x="658368" y="4206240"/>
+            <a:ext cx="10972800" cy="1554480"/>
           </a:xfrm>
           <a:prstGeom prst="roundRect">
             <a:avLst/>
@@ -33434,7 +34537,7 @@
           </a:solidFill>
           <a:ln>
             <a:solidFill>
-              <a:srgbClr val="D2DCE8"/>
+              <a:srgbClr val="D1DFD5"/>
             </a:solidFill>
           </a:ln>
         </p:spPr>
@@ -33453,40 +34556,65 @@
           </a:fontRef>
         </p:style>
         <p:txBody>
-          <a:bodyPr rtlCol="0" anchor="ctr"/>
-          <a:lstStyle/>
-          <a:p>
-            <a:pPr algn="ctr"/>
-          </a:p>
-        </p:txBody>
-      </p:sp>
-      <p:sp>
-        <p:nvSpPr>
-          <p:cNvPr id="8" name="TextBox 7"/>
-          <p:cNvSpPr txBox="1"/>
-          <p:nvPr/>
-        </p:nvSpPr>
-        <p:spPr>
-          <a:xfrm>
-            <a:off x="896112" y="1993392"/>
-            <a:ext cx="10332720" cy="2971800"/>
-          </a:xfrm>
-          <a:prstGeom prst="rect">
-            <a:avLst/>
-          </a:prstGeom>
-          <a:noFill/>
-        </p:spPr>
-        <p:txBody>
-          <a:bodyPr wrap="square" lIns="109728" rIns="109728">
-            <a:spAutoFit/>
-          </a:bodyPr>
-          <a:lstStyle/>
-          <a:p>
-            <a:pPr>
-              <a:spcAft>
-                <a:spcPts val="800"/>
-              </a:spcAft>
-              <a:defRPr sz="1800">
+          <a:bodyPr rtlCol="0" anchor="ctr" wrap="square" lIns="73152" rIns="73152" tIns="36576" bIns="36576"/>
+          <a:lstStyle/>
+          <a:p>
+            <a:pPr algn="l">
+              <a:spcAft>
+                <a:spcPts val="0"/>
+              </a:spcAft>
+              <a:defRPr sz="1800" b="1">
+                <a:solidFill>
+                  <a:srgbClr val="2A8B5A"/>
+                </a:solidFill>
+                <a:latin typeface="Noto Sans CJK KR"/>
+              </a:defRPr>
+            </a:pPr>
+            <a:r>
+              <a:t>완료 체크</a:t>
+            </a:r>
+            <a:br/>
+            <a:r>
+              <a:t>□ 명령이 오류 없이 실행된다.</a:t>
+            </a:r>
+            <a:br/>
+            <a:r>
+              <a:t>□ 기대한 파일·topic·frame·parameter 이름이 보인다.</a:t>
+            </a:r>
+            <a:br/>
+            <a:r>
+              <a:t>□ 값의 단위와 방향을 한 문장으로 설명할 수 있다.</a:t>
+            </a:r>
+          </a:p>
+        </p:txBody>
+      </p:sp>
+      <p:sp>
+        <p:nvSpPr>
+          <p:cNvPr id="9" name="TextBox 8"/>
+          <p:cNvSpPr txBox="1"/>
+          <p:nvPr/>
+        </p:nvSpPr>
+        <p:spPr>
+          <a:xfrm>
+            <a:off x="731520" y="5989320"/>
+            <a:ext cx="10789920" cy="237744"/>
+          </a:xfrm>
+          <a:prstGeom prst="rect">
+            <a:avLst/>
+          </a:prstGeom>
+          <a:noFill/>
+        </p:spPr>
+        <p:txBody>
+          <a:bodyPr wrap="square" lIns="73152" rIns="73152" tIns="36576" bIns="36576">
+            <a:spAutoFit/>
+          </a:bodyPr>
+          <a:lstStyle/>
+          <a:p>
+            <a:pPr algn="l">
+              <a:spcAft>
+                <a:spcPts val="0"/>
+              </a:spcAft>
+              <a:defRPr sz="1500" b="1">
                 <a:solidFill>
                   <a:srgbClr val="122C4E"/>
                 </a:solidFill>
@@ -33494,110 +34622,7 @@
               </a:defRPr>
             </a:pPr>
             <a:r>
-              <a:t>• □ 완료 화면: 모든 sensor 노드가 같은 시뮬레이션 시간과 기대 publish rate를 사용한다.</a:t>
-            </a:r>
-          </a:p>
-          <a:p>
-            <a:pPr>
-              <a:spcAft>
-                <a:spcPts val="800"/>
-              </a:spcAft>
-              <a:defRPr sz="1800">
-                <a:solidFill>
-                  <a:srgbClr val="122C4E"/>
-                </a:solidFill>
-                <a:latin typeface="Noto Sans CJK KR"/>
-              </a:defRPr>
-            </a:pPr>
-            <a:r>
-              <a:t>• □ 막혔을 때 비교할 Complete: blocks/D_sensors/M15_sensor_operations/complete/</a:t>
-            </a:r>
-          </a:p>
-          <a:p>
-            <a:pPr>
-              <a:spcAft>
-                <a:spcPts val="800"/>
-              </a:spcAft>
-              <a:defRPr sz="1800">
-                <a:solidFill>
-                  <a:srgbClr val="122C4E"/>
-                </a:solidFill>
-                <a:latin typeface="Noto Sans CJK KR"/>
-              </a:defRPr>
-            </a:pPr>
-            <a:r>
-              <a:t>• □ 정상 로그·캡처: logs/validation.log, screenshots/validation_terminal.png</a:t>
-            </a:r>
-          </a:p>
-          <a:p>
-            <a:pPr>
-              <a:spcAft>
-                <a:spcPts val="800"/>
-              </a:spcAft>
-              <a:defRPr sz="1800">
-                <a:solidFill>
-                  <a:srgbClr val="122C4E"/>
-                </a:solidFill>
-                <a:latin typeface="Noto Sans CJK KR"/>
-              </a:defRPr>
-            </a:pPr>
-            <a:r>
-              <a:t>• □ 버전 식별: CHECKSUM_or_TAG.txt의 SHA-256 manifest</a:t>
-            </a:r>
-          </a:p>
-          <a:p>
-            <a:pPr>
-              <a:spcAft>
-                <a:spcPts val="800"/>
-              </a:spcAft>
-              <a:defRPr sz="1800">
-                <a:solidFill>
-                  <a:srgbClr val="122C4E"/>
-                </a:solidFill>
-                <a:latin typeface="Noto Sans CJK KR"/>
-              </a:defRPr>
-            </a:pPr>
-            <a:r>
-              <a:t>• □ 다음 시작 조건: M16 제어 interface</a:t>
-            </a:r>
-          </a:p>
-        </p:txBody>
-      </p:sp>
-      <p:sp>
-        <p:nvSpPr>
-          <p:cNvPr id="9" name="TextBox 8"/>
-          <p:cNvSpPr txBox="1"/>
-          <p:nvPr/>
-        </p:nvSpPr>
-        <p:spPr>
-          <a:xfrm>
-            <a:off x="868680" y="5596128"/>
-            <a:ext cx="10515600" cy="338328"/>
-          </a:xfrm>
-          <a:prstGeom prst="rect">
-            <a:avLst/>
-          </a:prstGeom>
-          <a:noFill/>
-        </p:spPr>
-        <p:txBody>
-          <a:bodyPr wrap="square" lIns="73152" rIns="73152" tIns="36576" bIns="36576">
-            <a:spAutoFit/>
-          </a:bodyPr>
-          <a:lstStyle/>
-          <a:p>
-            <a:pPr algn="ctr">
-              <a:spcAft>
-                <a:spcPts val="0"/>
-              </a:spcAft>
-              <a:defRPr sz="1700" b="1">
-                <a:solidFill>
-                  <a:srgbClr val="2A8B5A"/>
-                </a:solidFill>
-                <a:latin typeface="Noto Sans CJK KR"/>
-              </a:defRPr>
-            </a:pPr>
-            <a:r>
-              <a:t>다음 모듈을 시작하기 전, 내 src의 변경사항을 저장하고 현재 완료 조건을 다시 확인합니다.</a:t>
+              <a:t>완료 조건: 모든 sensor 노드가 같은 시뮬레이션 시간과 기대 publish rate를 사용한다.</a:t>
             </a:r>
           </a:p>
         </p:txBody>
@@ -33611,6 +34636,1711 @@
 </file>
 
 <file path=ppt/slides/slide51.xml><?xml version="1.0" encoding="utf-8"?>
+<p:sld xmlns:a="http://schemas.openxmlformats.org/drawingml/2006/main" xmlns:p="http://schemas.openxmlformats.org/presentationml/2006/main" xmlns:r="http://schemas.openxmlformats.org/officeDocument/2006/relationships">
+  <p:cSld>
+    <p:spTree>
+      <p:nvGrpSpPr>
+        <p:cNvPr id="1" name=""/>
+        <p:cNvGrpSpPr/>
+        <p:nvPr/>
+      </p:nvGrpSpPr>
+      <p:grpSpPr/>
+      <p:sp>
+        <p:nvSpPr>
+          <p:cNvPr id="2" name="TextBox 1"/>
+          <p:cNvSpPr txBox="1"/>
+          <p:nvPr/>
+        </p:nvSpPr>
+        <p:spPr>
+          <a:xfrm>
+            <a:off x="566928" y="347472"/>
+            <a:ext cx="10881360" cy="438912"/>
+          </a:xfrm>
+          <a:prstGeom prst="rect">
+            <a:avLst/>
+          </a:prstGeom>
+          <a:noFill/>
+        </p:spPr>
+        <p:txBody>
+          <a:bodyPr wrap="square" lIns="73152" rIns="73152" tIns="36576" bIns="36576">
+            <a:spAutoFit/>
+          </a:bodyPr>
+          <a:lstStyle/>
+          <a:p>
+            <a:pPr algn="l">
+              <a:spcAft>
+                <a:spcPts val="0"/>
+              </a:spcAft>
+              <a:defRPr sz="3200" b="1">
+                <a:solidFill>
+                  <a:srgbClr val="122C4E"/>
+                </a:solidFill>
+                <a:latin typeface="Noto Sans CJK KR"/>
+              </a:defRPr>
+            </a:pPr>
+            <a:r>
+              <a:t>막히면: 증상 → 우선 확인 → 재검증</a:t>
+            </a:r>
+          </a:p>
+        </p:txBody>
+      </p:sp>
+      <p:sp>
+        <p:nvSpPr>
+          <p:cNvPr id="3" name="TextBox 2"/>
+          <p:cNvSpPr txBox="1"/>
+          <p:nvPr/>
+        </p:nvSpPr>
+        <p:spPr>
+          <a:xfrm>
+            <a:off x="603504" y="859536"/>
+            <a:ext cx="10698480" cy="292608"/>
+          </a:xfrm>
+          <a:prstGeom prst="rect">
+            <a:avLst/>
+          </a:prstGeom>
+          <a:noFill/>
+        </p:spPr>
+        <p:txBody>
+          <a:bodyPr wrap="square" lIns="73152" rIns="73152" tIns="36576" bIns="36576">
+            <a:spAutoFit/>
+          </a:bodyPr>
+          <a:lstStyle/>
+          <a:p>
+            <a:pPr algn="l">
+              <a:spcAft>
+                <a:spcPts val="0"/>
+              </a:spcAft>
+              <a:defRPr sz="1700" b="0">
+                <a:solidFill>
+                  <a:srgbClr val="5C6672"/>
+                </a:solidFill>
+                <a:latin typeface="Noto Sans CJK KR"/>
+              </a:defRPr>
+            </a:pPr>
+            <a:r>
+              <a:t>오류 메시지를 숨기지 않고 같은 순서로 점검합니다.</a:t>
+            </a:r>
+          </a:p>
+        </p:txBody>
+      </p:sp>
+      <p:sp>
+        <p:nvSpPr>
+          <p:cNvPr id="4" name="TextBox 3"/>
+          <p:cNvSpPr txBox="1"/>
+          <p:nvPr/>
+        </p:nvSpPr>
+        <p:spPr>
+          <a:xfrm>
+            <a:off x="530352" y="6510528"/>
+            <a:ext cx="7772400" cy="201168"/>
+          </a:xfrm>
+          <a:prstGeom prst="rect">
+            <a:avLst/>
+          </a:prstGeom>
+          <a:noFill/>
+        </p:spPr>
+        <p:txBody>
+          <a:bodyPr wrap="square" lIns="73152" rIns="73152" tIns="36576" bIns="36576">
+            <a:spAutoFit/>
+          </a:bodyPr>
+          <a:lstStyle/>
+          <a:p>
+            <a:pPr algn="l">
+              <a:spcAft>
+                <a:spcPts val="0"/>
+              </a:spcAft>
+              <a:defRPr sz="900" b="0">
+                <a:solidFill>
+                  <a:srgbClr val="5C6672"/>
+                </a:solidFill>
+                <a:latin typeface="Noto Sans CJK KR"/>
+              </a:defRPr>
+            </a:pPr>
+            <a:r>
+              <a:t>ROS 2 기반 AGV End-to-End 개발 커리큘럼 · M15 · Block D</a:t>
+            </a:r>
+          </a:p>
+        </p:txBody>
+      </p:sp>
+      <p:sp>
+        <p:nvSpPr>
+          <p:cNvPr id="5" name="TextBox 4"/>
+          <p:cNvSpPr txBox="1"/>
+          <p:nvPr/>
+        </p:nvSpPr>
+        <p:spPr>
+          <a:xfrm>
+            <a:off x="9144000" y="6510528"/>
+            <a:ext cx="2468880" cy="201168"/>
+          </a:xfrm>
+          <a:prstGeom prst="rect">
+            <a:avLst/>
+          </a:prstGeom>
+          <a:noFill/>
+        </p:spPr>
+        <p:txBody>
+          <a:bodyPr wrap="square" lIns="73152" rIns="73152" tIns="36576" bIns="36576">
+            <a:spAutoFit/>
+          </a:bodyPr>
+          <a:lstStyle/>
+          <a:p>
+            <a:pPr algn="r">
+              <a:spcAft>
+                <a:spcPts val="0"/>
+              </a:spcAft>
+              <a:defRPr sz="1000" b="0">
+                <a:solidFill>
+                  <a:srgbClr val="5C6672"/>
+                </a:solidFill>
+                <a:latin typeface="Noto Sans CJK KR"/>
+              </a:defRPr>
+            </a:pPr>
+            <a:r>
+              <a:t>명령·파일 경로는 슬라이드에서 복사 가능</a:t>
+            </a:r>
+          </a:p>
+        </p:txBody>
+      </p:sp>
+      <p:sp>
+        <p:nvSpPr>
+          <p:cNvPr id="6" name="Rectangle 5"/>
+          <p:cNvSpPr/>
+          <p:nvPr/>
+        </p:nvSpPr>
+        <p:spPr>
+          <a:xfrm>
+            <a:off x="566928" y="1188720"/>
+            <a:ext cx="11064240" cy="347472"/>
+          </a:xfrm>
+          <a:prstGeom prst="rect">
+            <a:avLst/>
+          </a:prstGeom>
+          <a:solidFill>
+            <a:srgbClr val="F4F7FB"/>
+          </a:solidFill>
+          <a:ln>
+            <a:solidFill>
+              <a:srgbClr val="F4F7FB"/>
+            </a:solidFill>
+          </a:ln>
+        </p:spPr>
+        <p:style>
+          <a:lnRef idx="1">
+            <a:schemeClr val="accent1"/>
+          </a:lnRef>
+          <a:fillRef idx="3">
+            <a:schemeClr val="accent1"/>
+          </a:fillRef>
+          <a:effectRef idx="2">
+            <a:schemeClr val="accent1"/>
+          </a:effectRef>
+          <a:fontRef idx="minor">
+            <a:schemeClr val="lt1"/>
+          </a:fontRef>
+        </p:style>
+        <p:txBody>
+          <a:bodyPr rtlCol="0" anchor="ctr" wrap="square" lIns="73152" rIns="73152" tIns="36576" bIns="36576"/>
+          <a:lstStyle/>
+          <a:p>
+            <a:pPr algn="l">
+              <a:spcAft>
+                <a:spcPts val="0"/>
+              </a:spcAft>
+              <a:defRPr sz="1300" b="1">
+                <a:solidFill>
+                  <a:srgbClr val="122C4E"/>
+                </a:solidFill>
+                <a:latin typeface="Noto Sans CJK KR"/>
+              </a:defRPr>
+            </a:pPr>
+            <a:r>
+              <a:t>현재 단계 오류 대응    |    현재 폴더 ~/ros2_curri/my_agv_ws    |    현재 터미널</a:t>
+            </a:r>
+          </a:p>
+        </p:txBody>
+      </p:sp>
+      <p:sp>
+        <p:nvSpPr>
+          <p:cNvPr id="7" name="Rounded Rectangle 6"/>
+          <p:cNvSpPr/>
+          <p:nvPr/>
+        </p:nvSpPr>
+        <p:spPr>
+          <a:xfrm>
+            <a:off x="694944" y="1755648"/>
+            <a:ext cx="10972800" cy="1115568"/>
+          </a:xfrm>
+          <a:prstGeom prst="roundRect">
+            <a:avLst/>
+          </a:prstGeom>
+          <a:solidFill>
+            <a:srgbClr val="FFF7F4"/>
+          </a:solidFill>
+          <a:ln>
+            <a:solidFill>
+              <a:srgbClr val="EDBEB4"/>
+            </a:solidFill>
+          </a:ln>
+        </p:spPr>
+        <p:style>
+          <a:lnRef idx="1">
+            <a:schemeClr val="accent1"/>
+          </a:lnRef>
+          <a:fillRef idx="3">
+            <a:schemeClr val="accent1"/>
+          </a:fillRef>
+          <a:effectRef idx="2">
+            <a:schemeClr val="accent1"/>
+          </a:effectRef>
+          <a:fontRef idx="minor">
+            <a:schemeClr val="lt1"/>
+          </a:fontRef>
+        </p:style>
+        <p:txBody>
+          <a:bodyPr rtlCol="0" anchor="ctr"/>
+          <a:lstStyle/>
+          <a:p>
+            <a:pPr algn="ctr"/>
+          </a:p>
+        </p:txBody>
+      </p:sp>
+      <p:sp>
+        <p:nvSpPr>
+          <p:cNvPr id="8" name="TextBox 7"/>
+          <p:cNvSpPr txBox="1"/>
+          <p:nvPr/>
+        </p:nvSpPr>
+        <p:spPr>
+          <a:xfrm>
+            <a:off x="896112" y="1901952"/>
+            <a:ext cx="2926080" cy="274320"/>
+          </a:xfrm>
+          <a:prstGeom prst="rect">
+            <a:avLst/>
+          </a:prstGeom>
+          <a:noFill/>
+        </p:spPr>
+        <p:txBody>
+          <a:bodyPr wrap="square" lIns="73152" rIns="73152" tIns="36576" bIns="36576">
+            <a:spAutoFit/>
+          </a:bodyPr>
+          <a:lstStyle/>
+          <a:p>
+            <a:pPr algn="l">
+              <a:spcAft>
+                <a:spcPts val="0"/>
+              </a:spcAft>
+              <a:defRPr sz="1800" b="1">
+                <a:solidFill>
+                  <a:srgbClr val="BE3B3B"/>
+                </a:solidFill>
+                <a:latin typeface="Noto Sans CJK KR"/>
+              </a:defRPr>
+            </a:pPr>
+            <a:r>
+              <a:t>증상 1: ROS 노드 시간이 안 감</a:t>
+            </a:r>
+          </a:p>
+        </p:txBody>
+      </p:sp>
+      <p:sp>
+        <p:nvSpPr>
+          <p:cNvPr id="9" name="TextBox 8"/>
+          <p:cNvSpPr txBox="1"/>
+          <p:nvPr/>
+        </p:nvSpPr>
+        <p:spPr>
+          <a:xfrm>
+            <a:off x="3794760" y="1883664"/>
+            <a:ext cx="7543800" cy="621792"/>
+          </a:xfrm>
+          <a:prstGeom prst="rect">
+            <a:avLst/>
+          </a:prstGeom>
+          <a:noFill/>
+        </p:spPr>
+        <p:txBody>
+          <a:bodyPr wrap="square" lIns="73152" rIns="73152" tIns="36576" bIns="36576">
+            <a:spAutoFit/>
+          </a:bodyPr>
+          <a:lstStyle/>
+          <a:p>
+            <a:pPr algn="l">
+              <a:spcAft>
+                <a:spcPts val="0"/>
+              </a:spcAft>
+              <a:defRPr sz="1600" b="0">
+                <a:solidFill>
+                  <a:srgbClr val="122C4E"/>
+                </a:solidFill>
+                <a:latin typeface="Noto Sans CJK KR"/>
+              </a:defRPr>
+            </a:pPr>
+            <a:r>
+              <a:t>우선 확인: use_sim_time과 /clock bridge를 확인한다.</a:t>
+            </a:r>
+            <a:br/>
+            <a:r>
+              <a:t>수정 후: ros2 topic echo /clock --once</a:t>
+            </a:r>
+          </a:p>
+        </p:txBody>
+      </p:sp>
+      <p:sp>
+        <p:nvSpPr>
+          <p:cNvPr id="10" name="Rounded Rectangle 9"/>
+          <p:cNvSpPr/>
+          <p:nvPr/>
+        </p:nvSpPr>
+        <p:spPr>
+          <a:xfrm>
+            <a:off x="694944" y="3172968"/>
+            <a:ext cx="10972800" cy="1115568"/>
+          </a:xfrm>
+          <a:prstGeom prst="roundRect">
+            <a:avLst/>
+          </a:prstGeom>
+          <a:solidFill>
+            <a:srgbClr val="FFF7F4"/>
+          </a:solidFill>
+          <a:ln>
+            <a:solidFill>
+              <a:srgbClr val="EDBEB4"/>
+            </a:solidFill>
+          </a:ln>
+        </p:spPr>
+        <p:style>
+          <a:lnRef idx="1">
+            <a:schemeClr val="accent1"/>
+          </a:lnRef>
+          <a:fillRef idx="3">
+            <a:schemeClr val="accent1"/>
+          </a:fillRef>
+          <a:effectRef idx="2">
+            <a:schemeClr val="accent1"/>
+          </a:effectRef>
+          <a:fontRef idx="minor">
+            <a:schemeClr val="lt1"/>
+          </a:fontRef>
+        </p:style>
+        <p:txBody>
+          <a:bodyPr rtlCol="0" anchor="ctr"/>
+          <a:lstStyle/>
+          <a:p>
+            <a:pPr algn="ctr"/>
+          </a:p>
+        </p:txBody>
+      </p:sp>
+      <p:sp>
+        <p:nvSpPr>
+          <p:cNvPr id="11" name="TextBox 10"/>
+          <p:cNvSpPr txBox="1"/>
+          <p:nvPr/>
+        </p:nvSpPr>
+        <p:spPr>
+          <a:xfrm>
+            <a:off x="896112" y="3319272"/>
+            <a:ext cx="2926080" cy="274320"/>
+          </a:xfrm>
+          <a:prstGeom prst="rect">
+            <a:avLst/>
+          </a:prstGeom>
+          <a:noFill/>
+        </p:spPr>
+        <p:txBody>
+          <a:bodyPr wrap="square" lIns="73152" rIns="73152" tIns="36576" bIns="36576">
+            <a:spAutoFit/>
+          </a:bodyPr>
+          <a:lstStyle/>
+          <a:p>
+            <a:pPr algn="l">
+              <a:spcAft>
+                <a:spcPts val="0"/>
+              </a:spcAft>
+              <a:defRPr sz="1800" b="1">
+                <a:solidFill>
+                  <a:srgbClr val="BE3B3B"/>
+                </a:solidFill>
+                <a:latin typeface="Noto Sans CJK KR"/>
+              </a:defRPr>
+            </a:pPr>
+            <a:r>
+              <a:t>증상 2: topic은 있는데 subscriber가 못 받음</a:t>
+            </a:r>
+          </a:p>
+        </p:txBody>
+      </p:sp>
+      <p:sp>
+        <p:nvSpPr>
+          <p:cNvPr id="12" name="TextBox 11"/>
+          <p:cNvSpPr txBox="1"/>
+          <p:nvPr/>
+        </p:nvSpPr>
+        <p:spPr>
+          <a:xfrm>
+            <a:off x="3794760" y="3300984"/>
+            <a:ext cx="7543800" cy="621792"/>
+          </a:xfrm>
+          <a:prstGeom prst="rect">
+            <a:avLst/>
+          </a:prstGeom>
+          <a:noFill/>
+        </p:spPr>
+        <p:txBody>
+          <a:bodyPr wrap="square" lIns="73152" rIns="73152" tIns="36576" bIns="36576">
+            <a:spAutoFit/>
+          </a:bodyPr>
+          <a:lstStyle/>
+          <a:p>
+            <a:pPr algn="l">
+              <a:spcAft>
+                <a:spcPts val="0"/>
+              </a:spcAft>
+              <a:defRPr sz="1600" b="0">
+                <a:solidFill>
+                  <a:srgbClr val="122C4E"/>
+                </a:solidFill>
+                <a:latin typeface="Noto Sans CJK KR"/>
+              </a:defRPr>
+            </a:pPr>
+            <a:r>
+              <a:t>우선 확인: publisher/subscriber QoS reliability 호환을 확인한다.</a:t>
+            </a:r>
+            <a:br/>
+            <a:r>
+              <a:t>수정 후: ros2 topic echo /clock --once</a:t>
+            </a:r>
+          </a:p>
+        </p:txBody>
+      </p:sp>
+      <p:sp>
+        <p:nvSpPr>
+          <p:cNvPr id="13" name="TextBox 12"/>
+          <p:cNvSpPr txBox="1"/>
+          <p:nvPr/>
+        </p:nvSpPr>
+        <p:spPr>
+          <a:xfrm>
+            <a:off x="822960" y="5102352"/>
+            <a:ext cx="10607040" cy="402336"/>
+          </a:xfrm>
+          <a:prstGeom prst="rect">
+            <a:avLst/>
+          </a:prstGeom>
+          <a:noFill/>
+        </p:spPr>
+        <p:txBody>
+          <a:bodyPr wrap="square" lIns="73152" rIns="73152" tIns="36576" bIns="36576">
+            <a:spAutoFit/>
+          </a:bodyPr>
+          <a:lstStyle/>
+          <a:p>
+            <a:pPr algn="ctr">
+              <a:spcAft>
+                <a:spcPts val="0"/>
+              </a:spcAft>
+              <a:defRPr sz="1800" b="1">
+                <a:solidFill>
+                  <a:srgbClr val="DB7E22"/>
+                </a:solidFill>
+                <a:latin typeface="Noto Sans CJK KR"/>
+              </a:defRPr>
+            </a:pPr>
+            <a:r>
+              <a:t>공통 순서: ① 현재 폴더 ② source ③ 파일 경로 ④ 이름/타입/단위 ⑤ build·source 후 재실행</a:t>
+            </a:r>
+          </a:p>
+        </p:txBody>
+      </p:sp>
+    </p:spTree>
+  </p:cSld>
+  <p:clrMapOvr>
+    <a:masterClrMapping/>
+  </p:clrMapOvr>
+</p:sld>
+</file>
+
+<file path=ppt/slides/slide52.xml><?xml version="1.0" encoding="utf-8"?>
+<p:sld xmlns:a="http://schemas.openxmlformats.org/drawingml/2006/main" xmlns:p="http://schemas.openxmlformats.org/presentationml/2006/main" xmlns:r="http://schemas.openxmlformats.org/officeDocument/2006/relationships">
+  <p:cSld>
+    <p:spTree>
+      <p:nvGrpSpPr>
+        <p:cNvPr id="1" name=""/>
+        <p:cNvGrpSpPr/>
+        <p:nvPr/>
+      </p:nvGrpSpPr>
+      <p:grpSpPr/>
+      <p:sp>
+        <p:nvSpPr>
+          <p:cNvPr id="2" name="TextBox 1"/>
+          <p:cNvSpPr txBox="1"/>
+          <p:nvPr/>
+        </p:nvSpPr>
+        <p:spPr>
+          <a:xfrm>
+            <a:off x="566928" y="347472"/>
+            <a:ext cx="10881360" cy="438912"/>
+          </a:xfrm>
+          <a:prstGeom prst="rect">
+            <a:avLst/>
+          </a:prstGeom>
+          <a:noFill/>
+        </p:spPr>
+        <p:txBody>
+          <a:bodyPr wrap="square" lIns="73152" rIns="73152" tIns="36576" bIns="36576">
+            <a:spAutoFit/>
+          </a:bodyPr>
+          <a:lstStyle/>
+          <a:p>
+            <a:pPr algn="l">
+              <a:spcAft>
+                <a:spcPts val="0"/>
+              </a:spcAft>
+              <a:defRPr sz="3200" b="1">
+                <a:solidFill>
+                  <a:srgbClr val="122C4E"/>
+                </a:solidFill>
+                <a:latin typeface="Noto Sans CJK KR"/>
+              </a:defRPr>
+            </a:pPr>
+            <a:r>
+              <a:t>막혔을 때만: Complete를 복구용으로 사용한다</a:t>
+            </a:r>
+          </a:p>
+        </p:txBody>
+      </p:sp>
+      <p:sp>
+        <p:nvSpPr>
+          <p:cNvPr id="3" name="TextBox 2"/>
+          <p:cNvSpPr txBox="1"/>
+          <p:nvPr/>
+        </p:nvSpPr>
+        <p:spPr>
+          <a:xfrm>
+            <a:off x="603504" y="859536"/>
+            <a:ext cx="10698480" cy="292608"/>
+          </a:xfrm>
+          <a:prstGeom prst="rect">
+            <a:avLst/>
+          </a:prstGeom>
+          <a:noFill/>
+        </p:spPr>
+        <p:txBody>
+          <a:bodyPr wrap="square" lIns="73152" rIns="73152" tIns="36576" bIns="36576">
+            <a:spAutoFit/>
+          </a:bodyPr>
+          <a:lstStyle/>
+          <a:p>
+            <a:pPr algn="l">
+              <a:spcAft>
+                <a:spcPts val="0"/>
+              </a:spcAft>
+              <a:defRPr sz="1700" b="0">
+                <a:solidFill>
+                  <a:srgbClr val="5C6672"/>
+                </a:solidFill>
+                <a:latin typeface="Noto Sans CJK KR"/>
+              </a:defRPr>
+            </a:pPr>
+            <a:r>
+              <a:t>이 슬라이드가 먼저가 아닙니다. 직접 입력·실행을 시도한 뒤에만 내 파일과 Complete를 비교합니다.</a:t>
+            </a:r>
+          </a:p>
+        </p:txBody>
+      </p:sp>
+      <p:sp>
+        <p:nvSpPr>
+          <p:cNvPr id="4" name="TextBox 3"/>
+          <p:cNvSpPr txBox="1"/>
+          <p:nvPr/>
+        </p:nvSpPr>
+        <p:spPr>
+          <a:xfrm>
+            <a:off x="530352" y="6510528"/>
+            <a:ext cx="7772400" cy="201168"/>
+          </a:xfrm>
+          <a:prstGeom prst="rect">
+            <a:avLst/>
+          </a:prstGeom>
+          <a:noFill/>
+        </p:spPr>
+        <p:txBody>
+          <a:bodyPr wrap="square" lIns="73152" rIns="73152" tIns="36576" bIns="36576">
+            <a:spAutoFit/>
+          </a:bodyPr>
+          <a:lstStyle/>
+          <a:p>
+            <a:pPr algn="l">
+              <a:spcAft>
+                <a:spcPts val="0"/>
+              </a:spcAft>
+              <a:defRPr sz="900" b="0">
+                <a:solidFill>
+                  <a:srgbClr val="5C6672"/>
+                </a:solidFill>
+                <a:latin typeface="Noto Sans CJK KR"/>
+              </a:defRPr>
+            </a:pPr>
+            <a:r>
+              <a:t>ROS 2 기반 AGV End-to-End 개발 커리큘럼 · M15 · Block D</a:t>
+            </a:r>
+          </a:p>
+        </p:txBody>
+      </p:sp>
+      <p:sp>
+        <p:nvSpPr>
+          <p:cNvPr id="5" name="TextBox 4"/>
+          <p:cNvSpPr txBox="1"/>
+          <p:nvPr/>
+        </p:nvSpPr>
+        <p:spPr>
+          <a:xfrm>
+            <a:off x="9144000" y="6510528"/>
+            <a:ext cx="2468880" cy="201168"/>
+          </a:xfrm>
+          <a:prstGeom prst="rect">
+            <a:avLst/>
+          </a:prstGeom>
+          <a:noFill/>
+        </p:spPr>
+        <p:txBody>
+          <a:bodyPr wrap="square" lIns="73152" rIns="73152" tIns="36576" bIns="36576">
+            <a:spAutoFit/>
+          </a:bodyPr>
+          <a:lstStyle/>
+          <a:p>
+            <a:pPr algn="r">
+              <a:spcAft>
+                <a:spcPts val="0"/>
+              </a:spcAft>
+              <a:defRPr sz="1000" b="0">
+                <a:solidFill>
+                  <a:srgbClr val="5C6672"/>
+                </a:solidFill>
+                <a:latin typeface="Noto Sans CJK KR"/>
+              </a:defRPr>
+            </a:pPr>
+            <a:r>
+              <a:t>명령·파일 경로는 슬라이드에서 복사 가능</a:t>
+            </a:r>
+          </a:p>
+        </p:txBody>
+      </p:sp>
+      <p:sp>
+        <p:nvSpPr>
+          <p:cNvPr id="6" name="Rectangle 5"/>
+          <p:cNvSpPr/>
+          <p:nvPr/>
+        </p:nvSpPr>
+        <p:spPr>
+          <a:xfrm>
+            <a:off x="566928" y="1188720"/>
+            <a:ext cx="11064240" cy="347472"/>
+          </a:xfrm>
+          <a:prstGeom prst="rect">
+            <a:avLst/>
+          </a:prstGeom>
+          <a:solidFill>
+            <a:srgbClr val="F4F7FB"/>
+          </a:solidFill>
+          <a:ln>
+            <a:solidFill>
+              <a:srgbClr val="F4F7FB"/>
+            </a:solidFill>
+          </a:ln>
+        </p:spPr>
+        <p:style>
+          <a:lnRef idx="1">
+            <a:schemeClr val="accent1"/>
+          </a:lnRef>
+          <a:fillRef idx="3">
+            <a:schemeClr val="accent1"/>
+          </a:fillRef>
+          <a:effectRef idx="2">
+            <a:schemeClr val="accent1"/>
+          </a:effectRef>
+          <a:fontRef idx="minor">
+            <a:schemeClr val="lt1"/>
+          </a:fontRef>
+        </p:style>
+        <p:txBody>
+          <a:bodyPr rtlCol="0" anchor="ctr" wrap="square" lIns="73152" rIns="73152" tIns="36576" bIns="36576"/>
+          <a:lstStyle/>
+          <a:p>
+            <a:pPr algn="l">
+              <a:spcAft>
+                <a:spcPts val="0"/>
+              </a:spcAft>
+              <a:defRPr sz="1300" b="1">
+                <a:solidFill>
+                  <a:srgbClr val="122C4E"/>
+                </a:solidFill>
+                <a:latin typeface="Noto Sans CJK KR"/>
+              </a:defRPr>
+            </a:pPr>
+            <a:r>
+              <a:t>현재 단계 복구용 Complete    |    현재 폴더 ~/ros2_curri    |    현재 터미널</a:t>
+            </a:r>
+          </a:p>
+        </p:txBody>
+      </p:sp>
+      <p:sp>
+        <p:nvSpPr>
+          <p:cNvPr id="7" name="TextBox 6"/>
+          <p:cNvSpPr txBox="1"/>
+          <p:nvPr/>
+        </p:nvSpPr>
+        <p:spPr>
+          <a:xfrm>
+            <a:off x="713232" y="1664208"/>
+            <a:ext cx="10698480" cy="402336"/>
+          </a:xfrm>
+          <a:prstGeom prst="rect">
+            <a:avLst/>
+          </a:prstGeom>
+          <a:noFill/>
+        </p:spPr>
+        <p:txBody>
+          <a:bodyPr wrap="square" lIns="73152" rIns="73152" tIns="36576" bIns="36576">
+            <a:spAutoFit/>
+          </a:bodyPr>
+          <a:lstStyle/>
+          <a:p>
+            <a:pPr algn="ctr">
+              <a:spcAft>
+                <a:spcPts val="0"/>
+              </a:spcAft>
+              <a:defRPr sz="1800" b="1">
+                <a:solidFill>
+                  <a:srgbClr val="DB7E22"/>
+                </a:solidFill>
+                <a:latin typeface="Noto Sans CJK KR"/>
+              </a:defRPr>
+            </a:pPr>
+            <a:r>
+              <a:t>권장 순서: ① 내 오류를 확인  ② Complete와 diff  ③ 꼭 필요할 때만 backup 후 복사</a:t>
+            </a:r>
+          </a:p>
+        </p:txBody>
+      </p:sp>
+      <p:sp>
+        <p:nvSpPr>
+          <p:cNvPr id="8" name="Rounded Rectangle 7"/>
+          <p:cNvSpPr/>
+          <p:nvPr/>
+        </p:nvSpPr>
+        <p:spPr>
+          <a:xfrm>
+            <a:off x="676656" y="2423160"/>
+            <a:ext cx="10881360" cy="2606040"/>
+          </a:xfrm>
+          <a:prstGeom prst="roundRect">
+            <a:avLst/>
+          </a:prstGeom>
+          <a:solidFill>
+            <a:srgbClr val="1D232D"/>
+          </a:solidFill>
+          <a:ln>
+            <a:solidFill>
+              <a:srgbClr val="1D232D"/>
+            </a:solidFill>
+          </a:ln>
+        </p:spPr>
+        <p:style>
+          <a:lnRef idx="1">
+            <a:schemeClr val="accent1"/>
+          </a:lnRef>
+          <a:fillRef idx="3">
+            <a:schemeClr val="accent1"/>
+          </a:fillRef>
+          <a:effectRef idx="2">
+            <a:schemeClr val="accent1"/>
+          </a:effectRef>
+          <a:fontRef idx="minor">
+            <a:schemeClr val="lt1"/>
+          </a:fontRef>
+        </p:style>
+        <p:txBody>
+          <a:bodyPr rtlCol="0" anchor="ctr" wrap="square" lIns="109728" rIns="109728" tIns="73152" bIns="73152"/>
+          <a:lstStyle/>
+          <a:p>
+            <a:pPr algn="l">
+              <a:spcAft>
+                <a:spcPts val="0"/>
+              </a:spcAft>
+              <a:defRPr sz="1400" b="0">
+                <a:solidFill>
+                  <a:srgbClr val="FFFFFF"/>
+                </a:solidFill>
+                <a:latin typeface="DejaVu Sans Mono"/>
+              </a:defRPr>
+            </a:pPr>
+            <a:r>
+              <a:t>cd ~/ros2_curri</a:t>
+            </a:r>
+          </a:p>
+          <a:p>
+            <a:pPr algn="l">
+              <a:spcAft>
+                <a:spcPts val="0"/>
+              </a:spcAft>
+              <a:defRPr sz="1400" b="0">
+                <a:solidFill>
+                  <a:srgbClr val="FFFFFF"/>
+                </a:solidFill>
+                <a:latin typeface="DejaVu Sans Mono"/>
+              </a:defRPr>
+            </a:pPr>
+            <a:r>
+              <a:t>diff -ru my_agv_ws/src blocks/D_sensors/M15_sensor_operations/complete/agv_ws/src || true</a:t>
+            </a:r>
+          </a:p>
+          <a:p>
+            <a:pPr algn="l">
+              <a:spcAft>
+                <a:spcPts val="0"/>
+              </a:spcAft>
+              <a:defRPr sz="1400" b="0">
+                <a:solidFill>
+                  <a:srgbClr val="FFFFFF"/>
+                </a:solidFill>
+                <a:latin typeface="DejaVu Sans Mono"/>
+              </a:defRPr>
+            </a:pPr>
+            <a:r>
+              <a:t>cp -a my_agv_ws/src my_agv_ws/src_before_M15</a:t>
+            </a:r>
+          </a:p>
+          <a:p>
+            <a:pPr algn="l">
+              <a:spcAft>
+                <a:spcPts val="0"/>
+              </a:spcAft>
+              <a:defRPr sz="1400" b="0">
+                <a:solidFill>
+                  <a:srgbClr val="FFFFFF"/>
+                </a:solidFill>
+                <a:latin typeface="DejaVu Sans Mono"/>
+              </a:defRPr>
+            </a:pPr>
+            <a:r>
+              <a:t>cp -a blocks/D_sensors/M15_sensor_operations/complete/agv_ws/src/. my_agv_ws/src/</a:t>
+            </a:r>
+          </a:p>
+          <a:p>
+            <a:pPr algn="l">
+              <a:spcAft>
+                <a:spcPts val="0"/>
+              </a:spcAft>
+              <a:defRPr sz="1400" b="0">
+                <a:solidFill>
+                  <a:srgbClr val="FFFFFF"/>
+                </a:solidFill>
+                <a:latin typeface="DejaVu Sans Mono"/>
+              </a:defRPr>
+            </a:pPr>
+            <a:r>
+              <a:t>cd my_agv_ws &amp;&amp; colcon build --symlink-install &amp;&amp; source install/setup.bash</a:t>
+            </a:r>
+          </a:p>
+        </p:txBody>
+      </p:sp>
+      <p:sp>
+        <p:nvSpPr>
+          <p:cNvPr id="9" name="TextBox 8"/>
+          <p:cNvSpPr txBox="1"/>
+          <p:nvPr/>
+        </p:nvSpPr>
+        <p:spPr>
+          <a:xfrm>
+            <a:off x="786384" y="5413248"/>
+            <a:ext cx="10424160" cy="429768"/>
+          </a:xfrm>
+          <a:prstGeom prst="rect">
+            <a:avLst/>
+          </a:prstGeom>
+          <a:noFill/>
+        </p:spPr>
+        <p:txBody>
+          <a:bodyPr wrap="square" lIns="73152" rIns="73152" tIns="36576" bIns="36576">
+            <a:spAutoFit/>
+          </a:bodyPr>
+          <a:lstStyle/>
+          <a:p>
+            <a:pPr algn="ctr">
+              <a:spcAft>
+                <a:spcPts val="0"/>
+              </a:spcAft>
+              <a:defRPr sz="1700" b="1">
+                <a:solidFill>
+                  <a:srgbClr val="2A8B5A"/>
+                </a:solidFill>
+                <a:latin typeface="Noto Sans CJK KR"/>
+              </a:defRPr>
+            </a:pPr>
+            <a:r>
+              <a:t>복구 뒤에는 끝내지 말고, 내 파일과 Complete의 차이를 한 줄씩 설명한 뒤 다시 직접 입력해 봅니다.</a:t>
+            </a:r>
+          </a:p>
+        </p:txBody>
+      </p:sp>
+    </p:spTree>
+  </p:cSld>
+  <p:clrMapOvr>
+    <a:masterClrMapping/>
+  </p:clrMapOvr>
+</p:sld>
+</file>
+
+<file path=ppt/slides/slide53.xml><?xml version="1.0" encoding="utf-8"?>
+<p:sld xmlns:a="http://schemas.openxmlformats.org/drawingml/2006/main" xmlns:p="http://schemas.openxmlformats.org/presentationml/2006/main" xmlns:r="http://schemas.openxmlformats.org/officeDocument/2006/relationships">
+  <p:cSld>
+    <p:spTree>
+      <p:nvGrpSpPr>
+        <p:cNvPr id="1" name=""/>
+        <p:cNvGrpSpPr/>
+        <p:nvPr/>
+      </p:nvGrpSpPr>
+      <p:grpSpPr/>
+      <p:sp>
+        <p:nvSpPr>
+          <p:cNvPr id="2" name="TextBox 1"/>
+          <p:cNvSpPr txBox="1"/>
+          <p:nvPr/>
+        </p:nvSpPr>
+        <p:spPr>
+          <a:xfrm>
+            <a:off x="566928" y="347472"/>
+            <a:ext cx="10881360" cy="438912"/>
+          </a:xfrm>
+          <a:prstGeom prst="rect">
+            <a:avLst/>
+          </a:prstGeom>
+          <a:noFill/>
+        </p:spPr>
+        <p:txBody>
+          <a:bodyPr wrap="square" lIns="73152" rIns="73152" tIns="36576" bIns="36576">
+            <a:spAutoFit/>
+          </a:bodyPr>
+          <a:lstStyle/>
+          <a:p>
+            <a:pPr algn="l">
+              <a:spcAft>
+                <a:spcPts val="0"/>
+              </a:spcAft>
+              <a:defRPr sz="3200" b="1">
+                <a:solidFill>
+                  <a:srgbClr val="122C4E"/>
+                </a:solidFill>
+                <a:latin typeface="Noto Sans CJK KR"/>
+              </a:defRPr>
+            </a:pPr>
+            <a:r>
+              <a:t>미니 실습: 값 하나를 바꾸고 결과를 비교한다</a:t>
+            </a:r>
+          </a:p>
+        </p:txBody>
+      </p:sp>
+      <p:sp>
+        <p:nvSpPr>
+          <p:cNvPr id="3" name="TextBox 2"/>
+          <p:cNvSpPr txBox="1"/>
+          <p:nvPr/>
+        </p:nvSpPr>
+        <p:spPr>
+          <a:xfrm>
+            <a:off x="603504" y="859536"/>
+            <a:ext cx="10698480" cy="292608"/>
+          </a:xfrm>
+          <a:prstGeom prst="rect">
+            <a:avLst/>
+          </a:prstGeom>
+          <a:noFill/>
+        </p:spPr>
+        <p:txBody>
+          <a:bodyPr wrap="square" lIns="73152" rIns="73152" tIns="36576" bIns="36576">
+            <a:spAutoFit/>
+          </a:bodyPr>
+          <a:lstStyle/>
+          <a:p>
+            <a:pPr algn="l">
+              <a:spcAft>
+                <a:spcPts val="0"/>
+              </a:spcAft>
+              <a:defRPr sz="1700" b="0">
+                <a:solidFill>
+                  <a:srgbClr val="5C6672"/>
+                </a:solidFill>
+                <a:latin typeface="Noto Sans CJK KR"/>
+              </a:defRPr>
+            </a:pPr>
+            <a:r>
+              <a:t>정상 결과를 만든 뒤에는 한 번에 하나의 값만 바꿉니다.</a:t>
+            </a:r>
+          </a:p>
+        </p:txBody>
+      </p:sp>
+      <p:sp>
+        <p:nvSpPr>
+          <p:cNvPr id="4" name="TextBox 3"/>
+          <p:cNvSpPr txBox="1"/>
+          <p:nvPr/>
+        </p:nvSpPr>
+        <p:spPr>
+          <a:xfrm>
+            <a:off x="530352" y="6510528"/>
+            <a:ext cx="7772400" cy="201168"/>
+          </a:xfrm>
+          <a:prstGeom prst="rect">
+            <a:avLst/>
+          </a:prstGeom>
+          <a:noFill/>
+        </p:spPr>
+        <p:txBody>
+          <a:bodyPr wrap="square" lIns="73152" rIns="73152" tIns="36576" bIns="36576">
+            <a:spAutoFit/>
+          </a:bodyPr>
+          <a:lstStyle/>
+          <a:p>
+            <a:pPr algn="l">
+              <a:spcAft>
+                <a:spcPts val="0"/>
+              </a:spcAft>
+              <a:defRPr sz="900" b="0">
+                <a:solidFill>
+                  <a:srgbClr val="5C6672"/>
+                </a:solidFill>
+                <a:latin typeface="Noto Sans CJK KR"/>
+              </a:defRPr>
+            </a:pPr>
+            <a:r>
+              <a:t>ROS 2 기반 AGV End-to-End 개발 커리큘럼 · M15 · Block D</a:t>
+            </a:r>
+          </a:p>
+        </p:txBody>
+      </p:sp>
+      <p:sp>
+        <p:nvSpPr>
+          <p:cNvPr id="5" name="TextBox 4"/>
+          <p:cNvSpPr txBox="1"/>
+          <p:nvPr/>
+        </p:nvSpPr>
+        <p:spPr>
+          <a:xfrm>
+            <a:off x="9144000" y="6510528"/>
+            <a:ext cx="2468880" cy="201168"/>
+          </a:xfrm>
+          <a:prstGeom prst="rect">
+            <a:avLst/>
+          </a:prstGeom>
+          <a:noFill/>
+        </p:spPr>
+        <p:txBody>
+          <a:bodyPr wrap="square" lIns="73152" rIns="73152" tIns="36576" bIns="36576">
+            <a:spAutoFit/>
+          </a:bodyPr>
+          <a:lstStyle/>
+          <a:p>
+            <a:pPr algn="r">
+              <a:spcAft>
+                <a:spcPts val="0"/>
+              </a:spcAft>
+              <a:defRPr sz="1000" b="0">
+                <a:solidFill>
+                  <a:srgbClr val="5C6672"/>
+                </a:solidFill>
+                <a:latin typeface="Noto Sans CJK KR"/>
+              </a:defRPr>
+            </a:pPr>
+            <a:r>
+              <a:t>명령·파일 경로는 슬라이드에서 복사 가능</a:t>
+            </a:r>
+          </a:p>
+        </p:txBody>
+      </p:sp>
+      <p:sp>
+        <p:nvSpPr>
+          <p:cNvPr id="6" name="Rectangle 5"/>
+          <p:cNvSpPr/>
+          <p:nvPr/>
+        </p:nvSpPr>
+        <p:spPr>
+          <a:xfrm>
+            <a:off x="566928" y="1188720"/>
+            <a:ext cx="11064240" cy="347472"/>
+          </a:xfrm>
+          <a:prstGeom prst="rect">
+            <a:avLst/>
+          </a:prstGeom>
+          <a:solidFill>
+            <a:srgbClr val="F4F7FB"/>
+          </a:solidFill>
+          <a:ln>
+            <a:solidFill>
+              <a:srgbClr val="F4F7FB"/>
+            </a:solidFill>
+          </a:ln>
+        </p:spPr>
+        <p:style>
+          <a:lnRef idx="1">
+            <a:schemeClr val="accent1"/>
+          </a:lnRef>
+          <a:fillRef idx="3">
+            <a:schemeClr val="accent1"/>
+          </a:fillRef>
+          <a:effectRef idx="2">
+            <a:schemeClr val="accent1"/>
+          </a:effectRef>
+          <a:fontRef idx="minor">
+            <a:schemeClr val="lt1"/>
+          </a:fontRef>
+        </p:style>
+        <p:txBody>
+          <a:bodyPr rtlCol="0" anchor="ctr" wrap="square" lIns="73152" rIns="73152" tIns="36576" bIns="36576"/>
+          <a:lstStyle/>
+          <a:p>
+            <a:pPr algn="l">
+              <a:spcAft>
+                <a:spcPts val="0"/>
+              </a:spcAft>
+              <a:defRPr sz="1300" b="1">
+                <a:solidFill>
+                  <a:srgbClr val="122C4E"/>
+                </a:solidFill>
+                <a:latin typeface="Noto Sans CJK KR"/>
+              </a:defRPr>
+            </a:pPr>
+            <a:r>
+              <a:t>현재 단계 미니 실습    |    현재 폴더 ~/ros2_curri/my_agv_ws    |    현재 터미널</a:t>
+            </a:r>
+          </a:p>
+        </p:txBody>
+      </p:sp>
+      <p:sp>
+        <p:nvSpPr>
+          <p:cNvPr id="7" name="Rounded Rectangle 6"/>
+          <p:cNvSpPr/>
+          <p:nvPr/>
+        </p:nvSpPr>
+        <p:spPr>
+          <a:xfrm>
+            <a:off x="749808" y="1874519"/>
+            <a:ext cx="10652760" cy="1993392"/>
+          </a:xfrm>
+          <a:prstGeom prst="roundRect">
+            <a:avLst/>
+          </a:prstGeom>
+          <a:solidFill>
+            <a:srgbClr val="FFF8EB"/>
+          </a:solidFill>
+          <a:ln>
+            <a:solidFill>
+              <a:srgbClr val="ECC680"/>
+            </a:solidFill>
+          </a:ln>
+        </p:spPr>
+        <p:style>
+          <a:lnRef idx="1">
+            <a:schemeClr val="accent1"/>
+          </a:lnRef>
+          <a:fillRef idx="3">
+            <a:schemeClr val="accent1"/>
+          </a:fillRef>
+          <a:effectRef idx="2">
+            <a:schemeClr val="accent1"/>
+          </a:effectRef>
+          <a:fontRef idx="minor">
+            <a:schemeClr val="lt1"/>
+          </a:fontRef>
+        </p:style>
+        <p:txBody>
+          <a:bodyPr rtlCol="0" anchor="ctr" wrap="square" lIns="73152" rIns="73152" tIns="36576" bIns="36576"/>
+          <a:lstStyle/>
+          <a:p>
+            <a:pPr algn="ctr">
+              <a:spcAft>
+                <a:spcPts val="0"/>
+              </a:spcAft>
+              <a:defRPr sz="2300" b="1">
+                <a:solidFill>
+                  <a:srgbClr val="122C4E"/>
+                </a:solidFill>
+                <a:latin typeface="Noto Sans CJK KR"/>
+              </a:defRPr>
+            </a:pPr>
+            <a:r>
+              <a:t>/scan과 /imu/data의 hz를 표로 기록하고 SDF update_rate 10/100 Hz와 비교한다.</a:t>
+            </a:r>
+          </a:p>
+        </p:txBody>
+      </p:sp>
+      <p:sp>
+        <p:nvSpPr>
+          <p:cNvPr id="8" name="TextBox 7"/>
+          <p:cNvSpPr txBox="1"/>
+          <p:nvPr/>
+        </p:nvSpPr>
+        <p:spPr>
+          <a:xfrm>
+            <a:off x="877824" y="4590288"/>
+            <a:ext cx="10241280" cy="594360"/>
+          </a:xfrm>
+          <a:prstGeom prst="rect">
+            <a:avLst/>
+          </a:prstGeom>
+          <a:noFill/>
+        </p:spPr>
+        <p:txBody>
+          <a:bodyPr wrap="square" lIns="73152" rIns="73152" tIns="36576" bIns="36576">
+            <a:spAutoFit/>
+          </a:bodyPr>
+          <a:lstStyle/>
+          <a:p>
+            <a:pPr algn="ctr">
+              <a:spcAft>
+                <a:spcPts val="0"/>
+              </a:spcAft>
+              <a:defRPr sz="1900" b="1">
+                <a:solidFill>
+                  <a:srgbClr val="DB7E22"/>
+                </a:solidFill>
+                <a:latin typeface="Noto Sans CJK KR"/>
+              </a:defRPr>
+            </a:pPr>
+            <a:r>
+              <a:t>기록할 것: 바꾼 값(단위) · 기대한 변화 · 실제 출력/화면 · 원래 값으로 되돌린 결과</a:t>
+            </a:r>
+          </a:p>
+        </p:txBody>
+      </p:sp>
+    </p:spTree>
+  </p:cSld>
+  <p:clrMapOvr>
+    <a:masterClrMapping/>
+  </p:clrMapOvr>
+</p:sld>
+</file>
+
+<file path=ppt/slides/slide54.xml><?xml version="1.0" encoding="utf-8"?>
+<p:sld xmlns:a="http://schemas.openxmlformats.org/drawingml/2006/main" xmlns:p="http://schemas.openxmlformats.org/presentationml/2006/main" xmlns:r="http://schemas.openxmlformats.org/officeDocument/2006/relationships">
+  <p:cSld>
+    <p:spTree>
+      <p:nvGrpSpPr>
+        <p:cNvPr id="1" name=""/>
+        <p:cNvGrpSpPr/>
+        <p:nvPr/>
+      </p:nvGrpSpPr>
+      <p:grpSpPr/>
+      <p:sp>
+        <p:nvSpPr>
+          <p:cNvPr id="2" name="TextBox 1"/>
+          <p:cNvSpPr txBox="1"/>
+          <p:nvPr/>
+        </p:nvSpPr>
+        <p:spPr>
+          <a:xfrm>
+            <a:off x="566928" y="347472"/>
+            <a:ext cx="10881360" cy="438912"/>
+          </a:xfrm>
+          <a:prstGeom prst="rect">
+            <a:avLst/>
+          </a:prstGeom>
+          <a:noFill/>
+        </p:spPr>
+        <p:txBody>
+          <a:bodyPr wrap="square" lIns="73152" rIns="73152" tIns="36576" bIns="36576">
+            <a:spAutoFit/>
+          </a:bodyPr>
+          <a:lstStyle/>
+          <a:p>
+            <a:pPr algn="l">
+              <a:spcAft>
+                <a:spcPts val="0"/>
+              </a:spcAft>
+              <a:defRPr sz="3200" b="1">
+                <a:solidFill>
+                  <a:srgbClr val="122C4E"/>
+                </a:solidFill>
+                <a:latin typeface="Noto Sans CJK KR"/>
+              </a:defRPr>
+            </a:pPr>
+            <a:r>
+              <a:t>내 프로젝트 체크포인트를 저장하고 다음 모듈로 넘긴다</a:t>
+            </a:r>
+          </a:p>
+        </p:txBody>
+      </p:sp>
+      <p:sp>
+        <p:nvSpPr>
+          <p:cNvPr id="3" name="TextBox 2"/>
+          <p:cNvSpPr txBox="1"/>
+          <p:nvPr/>
+        </p:nvSpPr>
+        <p:spPr>
+          <a:xfrm>
+            <a:off x="603504" y="859536"/>
+            <a:ext cx="10698480" cy="292608"/>
+          </a:xfrm>
+          <a:prstGeom prst="rect">
+            <a:avLst/>
+          </a:prstGeom>
+          <a:noFill/>
+        </p:spPr>
+        <p:txBody>
+          <a:bodyPr wrap="square" lIns="73152" rIns="73152" tIns="36576" bIns="36576">
+            <a:spAutoFit/>
+          </a:bodyPr>
+          <a:lstStyle/>
+          <a:p>
+            <a:pPr algn="l">
+              <a:spcAft>
+                <a:spcPts val="0"/>
+              </a:spcAft>
+              <a:defRPr sz="1700" b="0">
+                <a:solidFill>
+                  <a:srgbClr val="5C6672"/>
+                </a:solidFill>
+                <a:latin typeface="Noto Sans CJK KR"/>
+              </a:defRPr>
+            </a:pPr>
+            <a:r>
+              <a:t>Complete는 복구용 비교 기준이고, 다음 단계는 내가 직접 만든 workspace에서 계속합니다.</a:t>
+            </a:r>
+          </a:p>
+        </p:txBody>
+      </p:sp>
+      <p:sp>
+        <p:nvSpPr>
+          <p:cNvPr id="4" name="TextBox 3"/>
+          <p:cNvSpPr txBox="1"/>
+          <p:nvPr/>
+        </p:nvSpPr>
+        <p:spPr>
+          <a:xfrm>
+            <a:off x="530352" y="6510528"/>
+            <a:ext cx="7772400" cy="201168"/>
+          </a:xfrm>
+          <a:prstGeom prst="rect">
+            <a:avLst/>
+          </a:prstGeom>
+          <a:noFill/>
+        </p:spPr>
+        <p:txBody>
+          <a:bodyPr wrap="square" lIns="73152" rIns="73152" tIns="36576" bIns="36576">
+            <a:spAutoFit/>
+          </a:bodyPr>
+          <a:lstStyle/>
+          <a:p>
+            <a:pPr algn="l">
+              <a:spcAft>
+                <a:spcPts val="0"/>
+              </a:spcAft>
+              <a:defRPr sz="900" b="0">
+                <a:solidFill>
+                  <a:srgbClr val="5C6672"/>
+                </a:solidFill>
+                <a:latin typeface="Noto Sans CJK KR"/>
+              </a:defRPr>
+            </a:pPr>
+            <a:r>
+              <a:t>ROS 2 기반 AGV End-to-End 개발 커리큘럼 · M15 · Block D</a:t>
+            </a:r>
+          </a:p>
+        </p:txBody>
+      </p:sp>
+      <p:sp>
+        <p:nvSpPr>
+          <p:cNvPr id="5" name="TextBox 4"/>
+          <p:cNvSpPr txBox="1"/>
+          <p:nvPr/>
+        </p:nvSpPr>
+        <p:spPr>
+          <a:xfrm>
+            <a:off x="9144000" y="6510528"/>
+            <a:ext cx="2468880" cy="201168"/>
+          </a:xfrm>
+          <a:prstGeom prst="rect">
+            <a:avLst/>
+          </a:prstGeom>
+          <a:noFill/>
+        </p:spPr>
+        <p:txBody>
+          <a:bodyPr wrap="square" lIns="73152" rIns="73152" tIns="36576" bIns="36576">
+            <a:spAutoFit/>
+          </a:bodyPr>
+          <a:lstStyle/>
+          <a:p>
+            <a:pPr algn="r">
+              <a:spcAft>
+                <a:spcPts val="0"/>
+              </a:spcAft>
+              <a:defRPr sz="1000" b="0">
+                <a:solidFill>
+                  <a:srgbClr val="5C6672"/>
+                </a:solidFill>
+                <a:latin typeface="Noto Sans CJK KR"/>
+              </a:defRPr>
+            </a:pPr>
+            <a:r>
+              <a:t>명령·파일 경로는 슬라이드에서 복사 가능</a:t>
+            </a:r>
+          </a:p>
+        </p:txBody>
+      </p:sp>
+      <p:sp>
+        <p:nvSpPr>
+          <p:cNvPr id="6" name="Rectangle 5"/>
+          <p:cNvSpPr/>
+          <p:nvPr/>
+        </p:nvSpPr>
+        <p:spPr>
+          <a:xfrm>
+            <a:off x="566928" y="1188720"/>
+            <a:ext cx="11064240" cy="347472"/>
+          </a:xfrm>
+          <a:prstGeom prst="rect">
+            <a:avLst/>
+          </a:prstGeom>
+          <a:solidFill>
+            <a:srgbClr val="F4F7FB"/>
+          </a:solidFill>
+          <a:ln>
+            <a:solidFill>
+              <a:srgbClr val="F4F7FB"/>
+            </a:solidFill>
+          </a:ln>
+        </p:spPr>
+        <p:style>
+          <a:lnRef idx="1">
+            <a:schemeClr val="accent1"/>
+          </a:lnRef>
+          <a:fillRef idx="3">
+            <a:schemeClr val="accent1"/>
+          </a:fillRef>
+          <a:effectRef idx="2">
+            <a:schemeClr val="accent1"/>
+          </a:effectRef>
+          <a:fontRef idx="minor">
+            <a:schemeClr val="lt1"/>
+          </a:fontRef>
+        </p:style>
+        <p:txBody>
+          <a:bodyPr rtlCol="0" anchor="ctr" wrap="square" lIns="73152" rIns="73152" tIns="36576" bIns="36576"/>
+          <a:lstStyle/>
+          <a:p>
+            <a:pPr algn="l">
+              <a:spcAft>
+                <a:spcPts val="0"/>
+              </a:spcAft>
+              <a:defRPr sz="1300" b="1">
+                <a:solidFill>
+                  <a:srgbClr val="122C4E"/>
+                </a:solidFill>
+                <a:latin typeface="Noto Sans CJK KR"/>
+              </a:defRPr>
+            </a:pPr>
+            <a:r>
+              <a:t>현재 단계 체크포인트    |    현재 폴더 ~/ros2_curri/my_agv_ws    |    현재 터미널</a:t>
+            </a:r>
+          </a:p>
+        </p:txBody>
+      </p:sp>
+      <p:sp>
+        <p:nvSpPr>
+          <p:cNvPr id="7" name="Rounded Rectangle 6"/>
+          <p:cNvSpPr/>
+          <p:nvPr/>
+        </p:nvSpPr>
+        <p:spPr>
+          <a:xfrm>
+            <a:off x="685800" y="1737360"/>
+            <a:ext cx="10972800" cy="3611880"/>
+          </a:xfrm>
+          <a:prstGeom prst="roundRect">
+            <a:avLst/>
+          </a:prstGeom>
+          <a:solidFill>
+            <a:srgbClr val="F4F7FB"/>
+          </a:solidFill>
+          <a:ln>
+            <a:solidFill>
+              <a:srgbClr val="D2DCE8"/>
+            </a:solidFill>
+          </a:ln>
+        </p:spPr>
+        <p:style>
+          <a:lnRef idx="1">
+            <a:schemeClr val="accent1"/>
+          </a:lnRef>
+          <a:fillRef idx="3">
+            <a:schemeClr val="accent1"/>
+          </a:fillRef>
+          <a:effectRef idx="2">
+            <a:schemeClr val="accent1"/>
+          </a:effectRef>
+          <a:fontRef idx="minor">
+            <a:schemeClr val="lt1"/>
+          </a:fontRef>
+        </p:style>
+        <p:txBody>
+          <a:bodyPr rtlCol="0" anchor="ctr"/>
+          <a:lstStyle/>
+          <a:p>
+            <a:pPr algn="ctr"/>
+          </a:p>
+        </p:txBody>
+      </p:sp>
+      <p:sp>
+        <p:nvSpPr>
+          <p:cNvPr id="8" name="TextBox 7"/>
+          <p:cNvSpPr txBox="1"/>
+          <p:nvPr/>
+        </p:nvSpPr>
+        <p:spPr>
+          <a:xfrm>
+            <a:off x="896112" y="1993392"/>
+            <a:ext cx="10332720" cy="2971800"/>
+          </a:xfrm>
+          <a:prstGeom prst="rect">
+            <a:avLst/>
+          </a:prstGeom>
+          <a:noFill/>
+        </p:spPr>
+        <p:txBody>
+          <a:bodyPr wrap="square" lIns="109728" rIns="109728">
+            <a:spAutoFit/>
+          </a:bodyPr>
+          <a:lstStyle/>
+          <a:p>
+            <a:pPr>
+              <a:spcAft>
+                <a:spcPts val="800"/>
+              </a:spcAft>
+              <a:defRPr sz="1800">
+                <a:solidFill>
+                  <a:srgbClr val="122C4E"/>
+                </a:solidFill>
+                <a:latin typeface="Noto Sans CJK KR"/>
+              </a:defRPr>
+            </a:pPr>
+            <a:r>
+              <a:t>• □ 완료 화면: 모든 sensor 노드가 같은 시뮬레이션 시간과 기대 publish rate를 사용한다.</a:t>
+            </a:r>
+          </a:p>
+          <a:p>
+            <a:pPr>
+              <a:spcAft>
+                <a:spcPts val="800"/>
+              </a:spcAft>
+              <a:defRPr sz="1800">
+                <a:solidFill>
+                  <a:srgbClr val="122C4E"/>
+                </a:solidFill>
+                <a:latin typeface="Noto Sans CJK KR"/>
+              </a:defRPr>
+            </a:pPr>
+            <a:r>
+              <a:t>• □ 막혔을 때 비교할 Complete: blocks/D_sensors/M15_sensor_operations/complete/</a:t>
+            </a:r>
+          </a:p>
+          <a:p>
+            <a:pPr>
+              <a:spcAft>
+                <a:spcPts val="800"/>
+              </a:spcAft>
+              <a:defRPr sz="1800">
+                <a:solidFill>
+                  <a:srgbClr val="122C4E"/>
+                </a:solidFill>
+                <a:latin typeface="Noto Sans CJK KR"/>
+              </a:defRPr>
+            </a:pPr>
+            <a:r>
+              <a:t>• □ 정상 로그·캡처: logs/validation.log, screenshots/validation_terminal.png</a:t>
+            </a:r>
+          </a:p>
+          <a:p>
+            <a:pPr>
+              <a:spcAft>
+                <a:spcPts val="800"/>
+              </a:spcAft>
+              <a:defRPr sz="1800">
+                <a:solidFill>
+                  <a:srgbClr val="122C4E"/>
+                </a:solidFill>
+                <a:latin typeface="Noto Sans CJK KR"/>
+              </a:defRPr>
+            </a:pPr>
+            <a:r>
+              <a:t>• □ 버전 식별: CHECKSUM_or_TAG.txt의 SHA-256 manifest</a:t>
+            </a:r>
+          </a:p>
+          <a:p>
+            <a:pPr>
+              <a:spcAft>
+                <a:spcPts val="800"/>
+              </a:spcAft>
+              <a:defRPr sz="1800">
+                <a:solidFill>
+                  <a:srgbClr val="122C4E"/>
+                </a:solidFill>
+                <a:latin typeface="Noto Sans CJK KR"/>
+              </a:defRPr>
+            </a:pPr>
+            <a:r>
+              <a:t>• □ 다음 시작 조건: M16 제어 interface</a:t>
+            </a:r>
+          </a:p>
+        </p:txBody>
+      </p:sp>
+      <p:sp>
+        <p:nvSpPr>
+          <p:cNvPr id="9" name="TextBox 8"/>
+          <p:cNvSpPr txBox="1"/>
+          <p:nvPr/>
+        </p:nvSpPr>
+        <p:spPr>
+          <a:xfrm>
+            <a:off x="868680" y="5596128"/>
+            <a:ext cx="10515600" cy="338328"/>
+          </a:xfrm>
+          <a:prstGeom prst="rect">
+            <a:avLst/>
+          </a:prstGeom>
+          <a:noFill/>
+        </p:spPr>
+        <p:txBody>
+          <a:bodyPr wrap="square" lIns="73152" rIns="73152" tIns="36576" bIns="36576">
+            <a:spAutoFit/>
+          </a:bodyPr>
+          <a:lstStyle/>
+          <a:p>
+            <a:pPr algn="ctr">
+              <a:spcAft>
+                <a:spcPts val="0"/>
+              </a:spcAft>
+              <a:defRPr sz="1700" b="1">
+                <a:solidFill>
+                  <a:srgbClr val="2A8B5A"/>
+                </a:solidFill>
+                <a:latin typeface="Noto Sans CJK KR"/>
+              </a:defRPr>
+            </a:pPr>
+            <a:r>
+              <a:t>다음 모듈을 시작하기 전, 내 src의 변경사항을 저장하고 현재 완료 조건을 다시 확인합니다.</a:t>
+            </a:r>
+          </a:p>
+        </p:txBody>
+      </p:sp>
+    </p:spTree>
+  </p:cSld>
+  <p:clrMapOvr>
+    <a:masterClrMapping/>
+  </p:clrMapOvr>
+</p:sld>
+</file>
+
+<file path=ppt/slides/slide55.xml><?xml version="1.0" encoding="utf-8"?>
 <p:sld xmlns:a="http://schemas.openxmlformats.org/drawingml/2006/main" xmlns:p="http://schemas.openxmlformats.org/presentationml/2006/main" xmlns:r="http://schemas.openxmlformats.org/officeDocument/2006/relationships">
   <p:cSld>
     <p:spTree>
